--- a/downloads/presentations/modules/pol-300.pptx
+++ b/downloads/presentations/modules/pol-300.pptx
@@ -3619,13 +3619,11 @@
             </a:avLst>
           </a:prstGeom>
           <a:solidFill>
-            <a:srgbClr val="FFFFFF">
-              <a:alpha val="88000"/>
-            </a:srgbClr>
+            <a:srgbClr val="FFFFFF"/>
           </a:solidFill>
           <a:ln w="12700">
             <a:solidFill>
-              <a:srgbClr val="D6E8F2"/>
+              <a:srgbClr val="B9D7E6"/>
             </a:solidFill>
             <a:prstDash val="solid"/>
           </a:ln>
@@ -3633,190 +3631,112 @@
       </p:sp>
       <p:sp>
         <p:nvSpPr>
-          <p:cNvPr id="14" name="Shape 12"/>
-          <p:cNvSpPr/>
-          <p:nvPr/>
-        </p:nvSpPr>
-        <p:spPr>
-          <a:xfrm>
-            <a:off x="7891272" y="3108960"/>
-            <a:ext cx="566928" cy="566928"/>
-          </a:xfrm>
-          <a:prstGeom prst="ellipse">
-            <a:avLst/>
-          </a:prstGeom>
-          <a:solidFill>
-            <a:srgbClr val="0068B7"/>
-          </a:solidFill>
-          <a:ln w="12700">
-            <a:solidFill>
-              <a:srgbClr val="0068B7"/>
-            </a:solidFill>
-            <a:prstDash val="solid"/>
-          </a:ln>
-        </p:spPr>
-      </p:sp>
-      <p:sp>
-        <p:nvSpPr>
-          <p:cNvPr id="15" name="Shape 13"/>
-          <p:cNvSpPr/>
-          <p:nvPr/>
-        </p:nvSpPr>
-        <p:spPr>
-          <a:xfrm>
-            <a:off x="10287000" y="3108960"/>
-            <a:ext cx="566928" cy="566928"/>
-          </a:xfrm>
-          <a:prstGeom prst="ellipse">
-            <a:avLst/>
-          </a:prstGeom>
-          <a:solidFill>
-            <a:srgbClr val="2F8A28"/>
-          </a:solidFill>
-          <a:ln w="12700">
-            <a:solidFill>
-              <a:srgbClr val="2F8A28"/>
-            </a:solidFill>
-            <a:prstDash val="solid"/>
-          </a:ln>
-        </p:spPr>
+          <p:cNvPr id="14" name="Text 12"/>
+          <p:cNvSpPr/>
+          <p:nvPr/>
+        </p:nvSpPr>
+        <p:spPr>
+          <a:xfrm>
+            <a:off x="7799832" y="2935224"/>
+            <a:ext cx="3145536" cy="256032"/>
+          </a:xfrm>
+          <a:prstGeom prst="rect">
+            <a:avLst/>
+          </a:prstGeom>
+          <a:noFill/>
+          <a:ln/>
+        </p:spPr>
+        <p:txBody>
+          <a:bodyPr wrap="square" lIns="0" tIns="0" rIns="0" bIns="0" rtlCol="0" anchor="ctr"/>
+          <a:lstStyle/>
+          <a:p>
+            <a:pPr indent="0" marL="0">
+              <a:buNone/>
+            </a:pPr>
+            <a:r>
+              <a:rPr lang="en-US" sz="1300" b="1" dirty="0">
+                <a:solidFill>
+                  <a:srgbClr val="0068B7"/>
+                </a:solidFill>
+                <a:latin typeface="Aptos" pitchFamily="34" charset="0"/>
+                <a:ea typeface="Aptos" pitchFamily="34" charset="-122"/>
+                <a:cs typeface="Aptos" pitchFamily="34" charset="-120"/>
+              </a:rPr>
+              <a:t>Concept checkpoints</a:t>
+            </a:r>
+            <a:endParaRPr lang="en-US" sz="1300" dirty="0"/>
+          </a:p>
+        </p:txBody>
+      </p:sp>
+      <p:sp>
+        <p:nvSpPr>
+          <p:cNvPr id="15" name="Text 13"/>
+          <p:cNvSpPr/>
+          <p:nvPr/>
+        </p:nvSpPr>
+        <p:spPr>
+          <a:xfrm>
+            <a:off x="7818120" y="3300984"/>
+            <a:ext cx="3090672" cy="877824"/>
+          </a:xfrm>
+          <a:prstGeom prst="rect">
+            <a:avLst/>
+          </a:prstGeom>
+          <a:noFill/>
+          <a:ln/>
+        </p:spPr>
+        <p:txBody>
+          <a:bodyPr wrap="square" lIns="254" tIns="254" rIns="254" bIns="254" rtlCol="0" anchor="t">
+            <a:normAutofit/>
+          </a:bodyPr>
+          <a:lstStyle/>
+          <a:p>
+            <a:r>
+              <a:rPr lang="en-US" sz="1380" dirty="0">
+                <a:solidFill>
+                  <a:srgbClr val="17364A"/>
+                </a:solidFill>
+                <a:latin typeface="Aptos" pitchFamily="34" charset="0"/>
+                <a:ea typeface="Aptos" pitchFamily="34" charset="-122"/>
+                <a:cs typeface="Aptos" pitchFamily="34" charset="-120"/>
+              </a:rPr>
+              <a:t>Regulatory readiness also requires change management.</a:t>
+            </a:r>
+            <a:endParaRPr lang="en-US" sz="1380" dirty="0"/>
+          </a:p>
+          <a:p>
+            <a:r>
+              <a:rPr lang="en-US" sz="1380" dirty="0">
+                <a:solidFill>
+                  <a:srgbClr val="17364A"/>
+                </a:solidFill>
+                <a:latin typeface="Aptos" pitchFamily="34" charset="0"/>
+                <a:ea typeface="Aptos" pitchFamily="34" charset="-122"/>
+                <a:cs typeface="Aptos" pitchFamily="34" charset="-120"/>
+              </a:rPr>
+              <a:t>When policy requirements change, the agency may need to update SOPs, procurement language,.</a:t>
+            </a:r>
+            <a:endParaRPr lang="en-US" sz="1380" dirty="0"/>
+          </a:p>
+          <a:p>
+            <a:r>
+              <a:rPr lang="en-US" sz="1380" dirty="0">
+                <a:solidFill>
+                  <a:srgbClr val="17364A"/>
+                </a:solidFill>
+                <a:latin typeface="Aptos" pitchFamily="34" charset="0"/>
+                <a:ea typeface="Aptos" pitchFamily="34" charset="-122"/>
+                <a:cs typeface="Aptos" pitchFamily="34" charset="-120"/>
+              </a:rPr>
+              <a:t>A policy update is not complete until it has been translated into operational practice.</a:t>
+            </a:r>
+            <a:endParaRPr lang="en-US" sz="1380" dirty="0"/>
+          </a:p>
+        </p:txBody>
       </p:sp>
       <p:sp>
         <p:nvSpPr>
           <p:cNvPr id="16" name="Shape 14"/>
-          <p:cNvSpPr/>
-          <p:nvPr/>
-        </p:nvSpPr>
-        <p:spPr>
-          <a:xfrm>
-            <a:off x="9089136" y="3456432"/>
-            <a:ext cx="566928" cy="566928"/>
-          </a:xfrm>
-          <a:prstGeom prst="ellipse">
-            <a:avLst/>
-          </a:prstGeom>
-          <a:solidFill>
-            <a:srgbClr val="6A4CA3"/>
-          </a:solidFill>
-          <a:ln w="12700">
-            <a:solidFill>
-              <a:srgbClr val="6A4CA3"/>
-            </a:solidFill>
-            <a:prstDash val="solid"/>
-          </a:ln>
-        </p:spPr>
-      </p:sp>
-      <p:sp>
-        <p:nvSpPr>
-          <p:cNvPr id="17" name="Shape 15"/>
-          <p:cNvSpPr/>
-          <p:nvPr/>
-        </p:nvSpPr>
-        <p:spPr>
-          <a:xfrm>
-            <a:off x="8385048" y="3419856"/>
-            <a:ext cx="1975104" cy="0"/>
-          </a:xfrm>
-          <a:prstGeom prst="line">
-            <a:avLst/>
-          </a:prstGeom>
-          <a:noFill/>
-          <a:ln w="25400">
-            <a:solidFill>
-              <a:srgbClr val="8ABBD8"/>
-            </a:solidFill>
-            <a:prstDash val="solid"/>
-          </a:ln>
-        </p:spPr>
-      </p:sp>
-      <p:sp>
-        <p:nvSpPr>
-          <p:cNvPr id="18" name="Shape 16"/>
-          <p:cNvSpPr/>
-          <p:nvPr/>
-        </p:nvSpPr>
-        <p:spPr>
-          <a:xfrm>
-            <a:off x="8202168" y="3630168"/>
-            <a:ext cx="1170432" cy="118872"/>
-          </a:xfrm>
-          <a:prstGeom prst="line">
-            <a:avLst/>
-          </a:prstGeom>
-          <a:noFill/>
-          <a:ln w="25400">
-            <a:solidFill>
-              <a:srgbClr val="8ABBD8"/>
-            </a:solidFill>
-            <a:prstDash val="solid"/>
-          </a:ln>
-        </p:spPr>
-      </p:sp>
-      <p:sp>
-        <p:nvSpPr>
-          <p:cNvPr id="19" name="Shape 17"/>
-          <p:cNvSpPr/>
-          <p:nvPr/>
-        </p:nvSpPr>
-        <p:spPr>
-          <a:xfrm>
-            <a:off x="10543032" y="3630168"/>
-            <a:ext cx="-1170432" cy="118872"/>
-          </a:xfrm>
-          <a:prstGeom prst="line">
-            <a:avLst/>
-          </a:prstGeom>
-          <a:noFill/>
-          <a:ln w="25400">
-            <a:solidFill>
-              <a:srgbClr val="8ABBD8"/>
-            </a:solidFill>
-            <a:prstDash val="solid"/>
-          </a:ln>
-        </p:spPr>
-      </p:sp>
-      <p:sp>
-        <p:nvSpPr>
-          <p:cNvPr id="20" name="Text 18"/>
-          <p:cNvSpPr/>
-          <p:nvPr/>
-        </p:nvSpPr>
-        <p:spPr>
-          <a:xfrm>
-            <a:off x="7863840" y="4069080"/>
-            <a:ext cx="3017520" cy="164592"/>
-          </a:xfrm>
-          <a:prstGeom prst="rect">
-            <a:avLst/>
-          </a:prstGeom>
-          <a:noFill/>
-          <a:ln/>
-        </p:spPr>
-        <p:txBody>
-          <a:bodyPr wrap="square" lIns="0" tIns="0" rIns="0" bIns="0" rtlCol="0" anchor="ctr"/>
-          <a:lstStyle/>
-          <a:p>
-            <a:pPr algn="ctr" indent="0" marL="0">
-              <a:buNone/>
-            </a:pPr>
-            <a:r>
-              <a:rPr lang="en-US" sz="900" b="1" dirty="0">
-                <a:solidFill>
-                  <a:srgbClr val="003A63"/>
-                </a:solidFill>
-                <a:latin typeface="Aptos" pitchFamily="34" charset="0"/>
-                <a:ea typeface="Aptos" pitchFamily="34" charset="-122"/>
-                <a:cs typeface="Aptos" pitchFamily="34" charset="-120"/>
-              </a:rPr>
-              <a:t>Decision rights</a:t>
-            </a:r>
-            <a:endParaRPr lang="en-US" sz="900" dirty="0"/>
-          </a:p>
-        </p:txBody>
-      </p:sp>
-      <p:sp>
-        <p:nvSpPr>
-          <p:cNvPr id="21" name="Shape 19"/>
           <p:cNvSpPr/>
           <p:nvPr/>
         </p:nvSpPr>
@@ -3843,7 +3763,7 @@
       </p:sp>
       <p:sp>
         <p:nvSpPr>
-          <p:cNvPr id="22" name="Text 20"/>
+          <p:cNvPr id="17" name="Text 15"/>
           <p:cNvSpPr/>
           <p:nvPr/>
         </p:nvSpPr>
@@ -3882,7 +3802,7 @@
       </p:sp>
       <p:sp>
         <p:nvSpPr>
-          <p:cNvPr id="23" name="Text 21"/>
+          <p:cNvPr id="18" name="Text 16"/>
           <p:cNvSpPr/>
           <p:nvPr/>
         </p:nvSpPr>
@@ -4390,13 +4310,11 @@
             </a:avLst>
           </a:prstGeom>
           <a:solidFill>
-            <a:srgbClr val="FFFFFF">
-              <a:alpha val="88000"/>
-            </a:srgbClr>
+            <a:srgbClr val="FFFFFF"/>
           </a:solidFill>
           <a:ln w="12700">
             <a:solidFill>
-              <a:srgbClr val="D6E8F2"/>
+              <a:srgbClr val="B9D7E6"/>
             </a:solidFill>
             <a:prstDash val="solid"/>
           </a:ln>
@@ -4404,190 +4322,112 @@
       </p:sp>
       <p:sp>
         <p:nvSpPr>
-          <p:cNvPr id="14" name="Shape 12"/>
-          <p:cNvSpPr/>
-          <p:nvPr/>
-        </p:nvSpPr>
-        <p:spPr>
-          <a:xfrm>
-            <a:off x="7891272" y="3108960"/>
-            <a:ext cx="566928" cy="566928"/>
-          </a:xfrm>
-          <a:prstGeom prst="ellipse">
-            <a:avLst/>
-          </a:prstGeom>
-          <a:solidFill>
-            <a:srgbClr val="0068B7"/>
-          </a:solidFill>
-          <a:ln w="12700">
-            <a:solidFill>
-              <a:srgbClr val="0068B7"/>
-            </a:solidFill>
-            <a:prstDash val="solid"/>
-          </a:ln>
-        </p:spPr>
-      </p:sp>
-      <p:sp>
-        <p:nvSpPr>
-          <p:cNvPr id="15" name="Shape 13"/>
-          <p:cNvSpPr/>
-          <p:nvPr/>
-        </p:nvSpPr>
-        <p:spPr>
-          <a:xfrm>
-            <a:off x="10287000" y="3108960"/>
-            <a:ext cx="566928" cy="566928"/>
-          </a:xfrm>
-          <a:prstGeom prst="ellipse">
-            <a:avLst/>
-          </a:prstGeom>
-          <a:solidFill>
-            <a:srgbClr val="2F8A28"/>
-          </a:solidFill>
-          <a:ln w="12700">
-            <a:solidFill>
-              <a:srgbClr val="2F8A28"/>
-            </a:solidFill>
-            <a:prstDash val="solid"/>
-          </a:ln>
-        </p:spPr>
+          <p:cNvPr id="14" name="Text 12"/>
+          <p:cNvSpPr/>
+          <p:nvPr/>
+        </p:nvSpPr>
+        <p:spPr>
+          <a:xfrm>
+            <a:off x="7799832" y="2935224"/>
+            <a:ext cx="3145536" cy="256032"/>
+          </a:xfrm>
+          <a:prstGeom prst="rect">
+            <a:avLst/>
+          </a:prstGeom>
+          <a:noFill/>
+          <a:ln/>
+        </p:spPr>
+        <p:txBody>
+          <a:bodyPr wrap="square" lIns="0" tIns="0" rIns="0" bIns="0" rtlCol="0" anchor="ctr"/>
+          <a:lstStyle/>
+          <a:p>
+            <a:pPr indent="0" marL="0">
+              <a:buNone/>
+            </a:pPr>
+            <a:r>
+              <a:rPr lang="en-US" sz="1300" b="1" dirty="0">
+                <a:solidFill>
+                  <a:srgbClr val="0068B7"/>
+                </a:solidFill>
+                <a:latin typeface="Aptos" pitchFamily="34" charset="0"/>
+                <a:ea typeface="Aptos" pitchFamily="34" charset="-122"/>
+                <a:cs typeface="Aptos" pitchFamily="34" charset="-120"/>
+              </a:rPr>
+              <a:t>Concept checkpoints</a:t>
+            </a:r>
+            <a:endParaRPr lang="en-US" sz="1300" dirty="0"/>
+          </a:p>
+        </p:txBody>
+      </p:sp>
+      <p:sp>
+        <p:nvSpPr>
+          <p:cNvPr id="15" name="Text 13"/>
+          <p:cNvSpPr/>
+          <p:nvPr/>
+        </p:nvSpPr>
+        <p:spPr>
+          <a:xfrm>
+            <a:off x="7818120" y="3300984"/>
+            <a:ext cx="3090672" cy="877824"/>
+          </a:xfrm>
+          <a:prstGeom prst="rect">
+            <a:avLst/>
+          </a:prstGeom>
+          <a:noFill/>
+          <a:ln/>
+        </p:spPr>
+        <p:txBody>
+          <a:bodyPr wrap="square" lIns="254" tIns="254" rIns="254" bIns="254" rtlCol="0" anchor="t">
+            <a:normAutofit/>
+          </a:bodyPr>
+          <a:lstStyle/>
+          <a:p>
+            <a:r>
+              <a:rPr lang="en-US" sz="1380" dirty="0">
+                <a:solidFill>
+                  <a:srgbClr val="17364A"/>
+                </a:solidFill>
+                <a:latin typeface="Aptos" pitchFamily="34" charset="0"/>
+                <a:ea typeface="Aptos" pitchFamily="34" charset="-122"/>
+                <a:cs typeface="Aptos" pitchFamily="34" charset="-120"/>
+              </a:rPr>
+              <a:t>Risks and failure modes include the following:</a:t>
+            </a:r>
+            <a:endParaRPr lang="en-US" sz="1380" dirty="0"/>
+          </a:p>
+          <a:p>
+            <a:r>
+              <a:rPr lang="en-US" sz="1380" dirty="0">
+                <a:solidFill>
+                  <a:srgbClr val="17364A"/>
+                </a:solidFill>
+                <a:latin typeface="Aptos" pitchFamily="34" charset="0"/>
+                <a:ea typeface="Aptos" pitchFamily="34" charset="-122"/>
+                <a:cs typeface="Aptos" pitchFamily="34" charset="-120"/>
+              </a:rPr>
+              <a:t>Assuming there is no policy risk because there is no single AI statute.</a:t>
+            </a:r>
+            <a:endParaRPr lang="en-US" sz="1380" dirty="0"/>
+          </a:p>
+          <a:p>
+            <a:r>
+              <a:rPr lang="en-US" sz="1380" dirty="0">
+                <a:solidFill>
+                  <a:srgbClr val="17364A"/>
+                </a:solidFill>
+                <a:latin typeface="Aptos" pitchFamily="34" charset="0"/>
+                <a:ea typeface="Aptos" pitchFamily="34" charset="-122"/>
+                <a:cs typeface="Aptos" pitchFamily="34" charset="-120"/>
+              </a:rPr>
+              <a:t>Treating nonbinding guidance as irrelevant even when it reflects expected practice.</a:t>
+            </a:r>
+            <a:endParaRPr lang="en-US" sz="1380" dirty="0"/>
+          </a:p>
+        </p:txBody>
       </p:sp>
       <p:sp>
         <p:nvSpPr>
           <p:cNvPr id="16" name="Shape 14"/>
-          <p:cNvSpPr/>
-          <p:nvPr/>
-        </p:nvSpPr>
-        <p:spPr>
-          <a:xfrm>
-            <a:off x="9089136" y="3456432"/>
-            <a:ext cx="566928" cy="566928"/>
-          </a:xfrm>
-          <a:prstGeom prst="ellipse">
-            <a:avLst/>
-          </a:prstGeom>
-          <a:solidFill>
-            <a:srgbClr val="6A4CA3"/>
-          </a:solidFill>
-          <a:ln w="12700">
-            <a:solidFill>
-              <a:srgbClr val="6A4CA3"/>
-            </a:solidFill>
-            <a:prstDash val="solid"/>
-          </a:ln>
-        </p:spPr>
-      </p:sp>
-      <p:sp>
-        <p:nvSpPr>
-          <p:cNvPr id="17" name="Shape 15"/>
-          <p:cNvSpPr/>
-          <p:nvPr/>
-        </p:nvSpPr>
-        <p:spPr>
-          <a:xfrm>
-            <a:off x="8385048" y="3419856"/>
-            <a:ext cx="1975104" cy="0"/>
-          </a:xfrm>
-          <a:prstGeom prst="line">
-            <a:avLst/>
-          </a:prstGeom>
-          <a:noFill/>
-          <a:ln w="25400">
-            <a:solidFill>
-              <a:srgbClr val="8ABBD8"/>
-            </a:solidFill>
-            <a:prstDash val="solid"/>
-          </a:ln>
-        </p:spPr>
-      </p:sp>
-      <p:sp>
-        <p:nvSpPr>
-          <p:cNvPr id="18" name="Shape 16"/>
-          <p:cNvSpPr/>
-          <p:nvPr/>
-        </p:nvSpPr>
-        <p:spPr>
-          <a:xfrm>
-            <a:off x="8202168" y="3630168"/>
-            <a:ext cx="1170432" cy="118872"/>
-          </a:xfrm>
-          <a:prstGeom prst="line">
-            <a:avLst/>
-          </a:prstGeom>
-          <a:noFill/>
-          <a:ln w="25400">
-            <a:solidFill>
-              <a:srgbClr val="8ABBD8"/>
-            </a:solidFill>
-            <a:prstDash val="solid"/>
-          </a:ln>
-        </p:spPr>
-      </p:sp>
-      <p:sp>
-        <p:nvSpPr>
-          <p:cNvPr id="19" name="Shape 17"/>
-          <p:cNvSpPr/>
-          <p:nvPr/>
-        </p:nvSpPr>
-        <p:spPr>
-          <a:xfrm>
-            <a:off x="10543032" y="3630168"/>
-            <a:ext cx="-1170432" cy="118872"/>
-          </a:xfrm>
-          <a:prstGeom prst="line">
-            <a:avLst/>
-          </a:prstGeom>
-          <a:noFill/>
-          <a:ln w="25400">
-            <a:solidFill>
-              <a:srgbClr val="8ABBD8"/>
-            </a:solidFill>
-            <a:prstDash val="solid"/>
-          </a:ln>
-        </p:spPr>
-      </p:sp>
-      <p:sp>
-        <p:nvSpPr>
-          <p:cNvPr id="20" name="Text 18"/>
-          <p:cNvSpPr/>
-          <p:nvPr/>
-        </p:nvSpPr>
-        <p:spPr>
-          <a:xfrm>
-            <a:off x="7863840" y="4069080"/>
-            <a:ext cx="3017520" cy="164592"/>
-          </a:xfrm>
-          <a:prstGeom prst="rect">
-            <a:avLst/>
-          </a:prstGeom>
-          <a:noFill/>
-          <a:ln/>
-        </p:spPr>
-        <p:txBody>
-          <a:bodyPr wrap="square" lIns="0" tIns="0" rIns="0" bIns="0" rtlCol="0" anchor="ctr"/>
-          <a:lstStyle/>
-          <a:p>
-            <a:pPr algn="ctr" indent="0" marL="0">
-              <a:buNone/>
-            </a:pPr>
-            <a:r>
-              <a:rPr lang="en-US" sz="900" b="1" dirty="0">
-                <a:solidFill>
-                  <a:srgbClr val="003A63"/>
-                </a:solidFill>
-                <a:latin typeface="Aptos" pitchFamily="34" charset="0"/>
-                <a:ea typeface="Aptos" pitchFamily="34" charset="-122"/>
-                <a:cs typeface="Aptos" pitchFamily="34" charset="-120"/>
-              </a:rPr>
-              <a:t>Decision rights</a:t>
-            </a:r>
-            <a:endParaRPr lang="en-US" sz="900" dirty="0"/>
-          </a:p>
-        </p:txBody>
-      </p:sp>
-      <p:sp>
-        <p:nvSpPr>
-          <p:cNvPr id="21" name="Shape 19"/>
           <p:cNvSpPr/>
           <p:nvPr/>
         </p:nvSpPr>
@@ -4614,7 +4454,7 @@
       </p:sp>
       <p:sp>
         <p:nvSpPr>
-          <p:cNvPr id="22" name="Text 20"/>
+          <p:cNvPr id="17" name="Text 15"/>
           <p:cNvSpPr/>
           <p:nvPr/>
         </p:nvSpPr>
@@ -4653,7 +4493,7 @@
       </p:sp>
       <p:sp>
         <p:nvSpPr>
-          <p:cNvPr id="23" name="Text 21"/>
+          <p:cNvPr id="18" name="Text 16"/>
           <p:cNvSpPr/>
           <p:nvPr/>
         </p:nvSpPr>
@@ -5161,13 +5001,11 @@
             </a:avLst>
           </a:prstGeom>
           <a:solidFill>
-            <a:srgbClr val="FFFFFF">
-              <a:alpha val="88000"/>
-            </a:srgbClr>
+            <a:srgbClr val="FFFFFF"/>
           </a:solidFill>
           <a:ln w="12700">
             <a:solidFill>
-              <a:srgbClr val="D6E8F2"/>
+              <a:srgbClr val="B9D7E6"/>
             </a:solidFill>
             <a:prstDash val="solid"/>
           </a:ln>
@@ -5175,190 +5013,112 @@
       </p:sp>
       <p:sp>
         <p:nvSpPr>
-          <p:cNvPr id="14" name="Shape 12"/>
-          <p:cNvSpPr/>
-          <p:nvPr/>
-        </p:nvSpPr>
-        <p:spPr>
-          <a:xfrm>
-            <a:off x="7891272" y="3108960"/>
-            <a:ext cx="566928" cy="566928"/>
-          </a:xfrm>
-          <a:prstGeom prst="ellipse">
-            <a:avLst/>
-          </a:prstGeom>
-          <a:solidFill>
-            <a:srgbClr val="0068B7"/>
-          </a:solidFill>
-          <a:ln w="12700">
-            <a:solidFill>
-              <a:srgbClr val="0068B7"/>
-            </a:solidFill>
-            <a:prstDash val="solid"/>
-          </a:ln>
-        </p:spPr>
-      </p:sp>
-      <p:sp>
-        <p:nvSpPr>
-          <p:cNvPr id="15" name="Shape 13"/>
-          <p:cNvSpPr/>
-          <p:nvPr/>
-        </p:nvSpPr>
-        <p:spPr>
-          <a:xfrm>
-            <a:off x="10287000" y="3108960"/>
-            <a:ext cx="566928" cy="566928"/>
-          </a:xfrm>
-          <a:prstGeom prst="ellipse">
-            <a:avLst/>
-          </a:prstGeom>
-          <a:solidFill>
-            <a:srgbClr val="2F8A28"/>
-          </a:solidFill>
-          <a:ln w="12700">
-            <a:solidFill>
-              <a:srgbClr val="2F8A28"/>
-            </a:solidFill>
-            <a:prstDash val="solid"/>
-          </a:ln>
-        </p:spPr>
+          <p:cNvPr id="14" name="Text 12"/>
+          <p:cNvSpPr/>
+          <p:nvPr/>
+        </p:nvSpPr>
+        <p:spPr>
+          <a:xfrm>
+            <a:off x="7799832" y="2935224"/>
+            <a:ext cx="3145536" cy="256032"/>
+          </a:xfrm>
+          <a:prstGeom prst="rect">
+            <a:avLst/>
+          </a:prstGeom>
+          <a:noFill/>
+          <a:ln/>
+        </p:spPr>
+        <p:txBody>
+          <a:bodyPr wrap="square" lIns="0" tIns="0" rIns="0" bIns="0" rtlCol="0" anchor="ctr"/>
+          <a:lstStyle/>
+          <a:p>
+            <a:pPr indent="0" marL="0">
+              <a:buNone/>
+            </a:pPr>
+            <a:r>
+              <a:rPr lang="en-US" sz="1300" b="1" dirty="0">
+                <a:solidFill>
+                  <a:srgbClr val="0068B7"/>
+                </a:solidFill>
+                <a:latin typeface="Aptos" pitchFamily="34" charset="0"/>
+                <a:ea typeface="Aptos" pitchFamily="34" charset="-122"/>
+                <a:cs typeface="Aptos" pitchFamily="34" charset="-120"/>
+              </a:rPr>
+              <a:t>Concept checkpoints</a:t>
+            </a:r>
+            <a:endParaRPr lang="en-US" sz="1300" dirty="0"/>
+          </a:p>
+        </p:txBody>
+      </p:sp>
+      <p:sp>
+        <p:nvSpPr>
+          <p:cNvPr id="15" name="Text 13"/>
+          <p:cNvSpPr/>
+          <p:nvPr/>
+        </p:nvSpPr>
+        <p:spPr>
+          <a:xfrm>
+            <a:off x="7818120" y="3300984"/>
+            <a:ext cx="3090672" cy="877824"/>
+          </a:xfrm>
+          <a:prstGeom prst="rect">
+            <a:avLst/>
+          </a:prstGeom>
+          <a:noFill/>
+          <a:ln/>
+        </p:spPr>
+        <p:txBody>
+          <a:bodyPr wrap="square" lIns="254" tIns="254" rIns="254" bIns="254" rtlCol="0" anchor="t">
+            <a:normAutofit/>
+          </a:bodyPr>
+          <a:lstStyle/>
+          <a:p>
+            <a:r>
+              <a:rPr lang="en-US" sz="1380" dirty="0">
+                <a:solidFill>
+                  <a:srgbClr val="17364A"/>
+                </a:solidFill>
+                <a:latin typeface="Aptos" pitchFamily="34" charset="0"/>
+                <a:ea typeface="Aptos" pitchFamily="34" charset="-122"/>
+                <a:cs typeface="Aptos" pitchFamily="34" charset="-120"/>
+              </a:rPr>
+              <a:t>Failing to update internal policies after legal, procurement, privacy, or cybersecurity.</a:t>
+            </a:r>
+            <a:endParaRPr lang="en-US" sz="1380" dirty="0"/>
+          </a:p>
+          <a:p>
+            <a:r>
+              <a:rPr lang="en-US" sz="1380" dirty="0">
+                <a:solidFill>
+                  <a:srgbClr val="17364A"/>
+                </a:solidFill>
+                <a:latin typeface="Aptos" pitchFamily="34" charset="0"/>
+                <a:ea typeface="Aptos" pitchFamily="34" charset="-122"/>
+                <a:cs typeface="Aptos" pitchFamily="34" charset="-120"/>
+              </a:rPr>
+              <a:t>Allowing vendors to define compliance obligations without agency review.</a:t>
+            </a:r>
+            <a:endParaRPr lang="en-US" sz="1380" dirty="0"/>
+          </a:p>
+          <a:p>
+            <a:r>
+              <a:rPr lang="en-US" sz="1380" dirty="0">
+                <a:solidFill>
+                  <a:srgbClr val="17364A"/>
+                </a:solidFill>
+                <a:latin typeface="Aptos" pitchFamily="34" charset="0"/>
+                <a:ea typeface="Aptos" pitchFamily="34" charset="-122"/>
+                <a:cs typeface="Aptos" pitchFamily="34" charset="-120"/>
+              </a:rPr>
+              <a:t>Maintaining policies that are too vague to guide real decisions.</a:t>
+            </a:r>
+            <a:endParaRPr lang="en-US" sz="1380" dirty="0"/>
+          </a:p>
+        </p:txBody>
       </p:sp>
       <p:sp>
         <p:nvSpPr>
           <p:cNvPr id="16" name="Shape 14"/>
-          <p:cNvSpPr/>
-          <p:nvPr/>
-        </p:nvSpPr>
-        <p:spPr>
-          <a:xfrm>
-            <a:off x="9089136" y="3456432"/>
-            <a:ext cx="566928" cy="566928"/>
-          </a:xfrm>
-          <a:prstGeom prst="ellipse">
-            <a:avLst/>
-          </a:prstGeom>
-          <a:solidFill>
-            <a:srgbClr val="6A4CA3"/>
-          </a:solidFill>
-          <a:ln w="12700">
-            <a:solidFill>
-              <a:srgbClr val="6A4CA3"/>
-            </a:solidFill>
-            <a:prstDash val="solid"/>
-          </a:ln>
-        </p:spPr>
-      </p:sp>
-      <p:sp>
-        <p:nvSpPr>
-          <p:cNvPr id="17" name="Shape 15"/>
-          <p:cNvSpPr/>
-          <p:nvPr/>
-        </p:nvSpPr>
-        <p:spPr>
-          <a:xfrm>
-            <a:off x="8385048" y="3419856"/>
-            <a:ext cx="1975104" cy="0"/>
-          </a:xfrm>
-          <a:prstGeom prst="line">
-            <a:avLst/>
-          </a:prstGeom>
-          <a:noFill/>
-          <a:ln w="25400">
-            <a:solidFill>
-              <a:srgbClr val="8ABBD8"/>
-            </a:solidFill>
-            <a:prstDash val="solid"/>
-          </a:ln>
-        </p:spPr>
-      </p:sp>
-      <p:sp>
-        <p:nvSpPr>
-          <p:cNvPr id="18" name="Shape 16"/>
-          <p:cNvSpPr/>
-          <p:nvPr/>
-        </p:nvSpPr>
-        <p:spPr>
-          <a:xfrm>
-            <a:off x="8202168" y="3630168"/>
-            <a:ext cx="1170432" cy="118872"/>
-          </a:xfrm>
-          <a:prstGeom prst="line">
-            <a:avLst/>
-          </a:prstGeom>
-          <a:noFill/>
-          <a:ln w="25400">
-            <a:solidFill>
-              <a:srgbClr val="8ABBD8"/>
-            </a:solidFill>
-            <a:prstDash val="solid"/>
-          </a:ln>
-        </p:spPr>
-      </p:sp>
-      <p:sp>
-        <p:nvSpPr>
-          <p:cNvPr id="19" name="Shape 17"/>
-          <p:cNvSpPr/>
-          <p:nvPr/>
-        </p:nvSpPr>
-        <p:spPr>
-          <a:xfrm>
-            <a:off x="10543032" y="3630168"/>
-            <a:ext cx="-1170432" cy="118872"/>
-          </a:xfrm>
-          <a:prstGeom prst="line">
-            <a:avLst/>
-          </a:prstGeom>
-          <a:noFill/>
-          <a:ln w="25400">
-            <a:solidFill>
-              <a:srgbClr val="8ABBD8"/>
-            </a:solidFill>
-            <a:prstDash val="solid"/>
-          </a:ln>
-        </p:spPr>
-      </p:sp>
-      <p:sp>
-        <p:nvSpPr>
-          <p:cNvPr id="20" name="Text 18"/>
-          <p:cNvSpPr/>
-          <p:nvPr/>
-        </p:nvSpPr>
-        <p:spPr>
-          <a:xfrm>
-            <a:off x="7863840" y="4069080"/>
-            <a:ext cx="3017520" cy="164592"/>
-          </a:xfrm>
-          <a:prstGeom prst="rect">
-            <a:avLst/>
-          </a:prstGeom>
-          <a:noFill/>
-          <a:ln/>
-        </p:spPr>
-        <p:txBody>
-          <a:bodyPr wrap="square" lIns="0" tIns="0" rIns="0" bIns="0" rtlCol="0" anchor="ctr"/>
-          <a:lstStyle/>
-          <a:p>
-            <a:pPr algn="ctr" indent="0" marL="0">
-              <a:buNone/>
-            </a:pPr>
-            <a:r>
-              <a:rPr lang="en-US" sz="900" b="1" dirty="0">
-                <a:solidFill>
-                  <a:srgbClr val="003A63"/>
-                </a:solidFill>
-                <a:latin typeface="Aptos" pitchFamily="34" charset="0"/>
-                <a:ea typeface="Aptos" pitchFamily="34" charset="-122"/>
-                <a:cs typeface="Aptos" pitchFamily="34" charset="-120"/>
-              </a:rPr>
-              <a:t>Decision rights</a:t>
-            </a:r>
-            <a:endParaRPr lang="en-US" sz="900" dirty="0"/>
-          </a:p>
-        </p:txBody>
-      </p:sp>
-      <p:sp>
-        <p:nvSpPr>
-          <p:cNvPr id="21" name="Shape 19"/>
           <p:cNvSpPr/>
           <p:nvPr/>
         </p:nvSpPr>
@@ -5385,7 +5145,7 @@
       </p:sp>
       <p:sp>
         <p:nvSpPr>
-          <p:cNvPr id="22" name="Text 20"/>
+          <p:cNvPr id="17" name="Text 15"/>
           <p:cNvSpPr/>
           <p:nvPr/>
         </p:nvSpPr>
@@ -5424,7 +5184,7 @@
       </p:sp>
       <p:sp>
         <p:nvSpPr>
-          <p:cNvPr id="23" name="Text 21"/>
+          <p:cNvPr id="18" name="Text 16"/>
           <p:cNvSpPr/>
           <p:nvPr/>
         </p:nvSpPr>
@@ -5932,13 +5692,11 @@
             </a:avLst>
           </a:prstGeom>
           <a:solidFill>
-            <a:srgbClr val="FFFFFF">
-              <a:alpha val="88000"/>
-            </a:srgbClr>
+            <a:srgbClr val="FFFFFF"/>
           </a:solidFill>
           <a:ln w="12700">
             <a:solidFill>
-              <a:srgbClr val="D6E8F2"/>
+              <a:srgbClr val="B9D7E6"/>
             </a:solidFill>
             <a:prstDash val="solid"/>
           </a:ln>
@@ -5946,190 +5704,112 @@
       </p:sp>
       <p:sp>
         <p:nvSpPr>
-          <p:cNvPr id="14" name="Shape 12"/>
-          <p:cNvSpPr/>
-          <p:nvPr/>
-        </p:nvSpPr>
-        <p:spPr>
-          <a:xfrm>
-            <a:off x="7891272" y="3108960"/>
-            <a:ext cx="566928" cy="566928"/>
-          </a:xfrm>
-          <a:prstGeom prst="ellipse">
-            <a:avLst/>
-          </a:prstGeom>
-          <a:solidFill>
-            <a:srgbClr val="0068B7"/>
-          </a:solidFill>
-          <a:ln w="12700">
-            <a:solidFill>
-              <a:srgbClr val="0068B7"/>
-            </a:solidFill>
-            <a:prstDash val="solid"/>
-          </a:ln>
-        </p:spPr>
-      </p:sp>
-      <p:sp>
-        <p:nvSpPr>
-          <p:cNvPr id="15" name="Shape 13"/>
-          <p:cNvSpPr/>
-          <p:nvPr/>
-        </p:nvSpPr>
-        <p:spPr>
-          <a:xfrm>
-            <a:off x="10287000" y="3108960"/>
-            <a:ext cx="566928" cy="566928"/>
-          </a:xfrm>
-          <a:prstGeom prst="ellipse">
-            <a:avLst/>
-          </a:prstGeom>
-          <a:solidFill>
-            <a:srgbClr val="2F8A28"/>
-          </a:solidFill>
-          <a:ln w="12700">
-            <a:solidFill>
-              <a:srgbClr val="2F8A28"/>
-            </a:solidFill>
-            <a:prstDash val="solid"/>
-          </a:ln>
-        </p:spPr>
+          <p:cNvPr id="14" name="Text 12"/>
+          <p:cNvSpPr/>
+          <p:nvPr/>
+        </p:nvSpPr>
+        <p:spPr>
+          <a:xfrm>
+            <a:off x="7799832" y="2935224"/>
+            <a:ext cx="3145536" cy="256032"/>
+          </a:xfrm>
+          <a:prstGeom prst="rect">
+            <a:avLst/>
+          </a:prstGeom>
+          <a:noFill/>
+          <a:ln/>
+        </p:spPr>
+        <p:txBody>
+          <a:bodyPr wrap="square" lIns="0" tIns="0" rIns="0" bIns="0" rtlCol="0" anchor="ctr"/>
+          <a:lstStyle/>
+          <a:p>
+            <a:pPr indent="0" marL="0">
+              <a:buNone/>
+            </a:pPr>
+            <a:r>
+              <a:rPr lang="en-US" sz="1300" b="1" dirty="0">
+                <a:solidFill>
+                  <a:srgbClr val="0068B7"/>
+                </a:solidFill>
+                <a:latin typeface="Aptos" pitchFamily="34" charset="0"/>
+                <a:ea typeface="Aptos" pitchFamily="34" charset="-122"/>
+                <a:cs typeface="Aptos" pitchFamily="34" charset="-120"/>
+              </a:rPr>
+              <a:t>Concept checkpoints</a:t>
+            </a:r>
+            <a:endParaRPr lang="en-US" sz="1300" dirty="0"/>
+          </a:p>
+        </p:txBody>
+      </p:sp>
+      <p:sp>
+        <p:nvSpPr>
+          <p:cNvPr id="15" name="Text 13"/>
+          <p:cNvSpPr/>
+          <p:nvPr/>
+        </p:nvSpPr>
+        <p:spPr>
+          <a:xfrm>
+            <a:off x="7818120" y="3300984"/>
+            <a:ext cx="3090672" cy="877824"/>
+          </a:xfrm>
+          <a:prstGeom prst="rect">
+            <a:avLst/>
+          </a:prstGeom>
+          <a:noFill/>
+          <a:ln/>
+        </p:spPr>
+        <p:txBody>
+          <a:bodyPr wrap="square" lIns="254" tIns="254" rIns="254" bIns="254" rtlCol="0" anchor="t">
+            <a:normAutofit/>
+          </a:bodyPr>
+          <a:lstStyle/>
+          <a:p>
+            <a:r>
+              <a:rPr lang="en-US" sz="1380" dirty="0">
+                <a:solidFill>
+                  <a:srgbClr val="17364A"/>
+                </a:solidFill>
+                <a:latin typeface="Aptos" pitchFamily="34" charset="0"/>
+                <a:ea typeface="Aptos" pitchFamily="34" charset="-122"/>
+                <a:cs typeface="Aptos" pitchFamily="34" charset="-120"/>
+              </a:rPr>
+              <a:t>Recommended guardrails include the following:</a:t>
+            </a:r>
+            <a:endParaRPr lang="en-US" sz="1380" dirty="0"/>
+          </a:p>
+          <a:p>
+            <a:r>
+              <a:rPr lang="en-US" sz="1380" dirty="0">
+                <a:solidFill>
+                  <a:srgbClr val="17364A"/>
+                </a:solidFill>
+                <a:latin typeface="Aptos" pitchFamily="34" charset="0"/>
+                <a:ea typeface="Aptos" pitchFamily="34" charset="-122"/>
+                <a:cs typeface="Aptos" pitchFamily="34" charset="-120"/>
+              </a:rPr>
+              <a:t>Assign responsibility for AI policy scanning and interpretation.</a:t>
+            </a:r>
+            <a:endParaRPr lang="en-US" sz="1380" dirty="0"/>
+          </a:p>
+          <a:p>
+            <a:r>
+              <a:rPr lang="en-US" sz="1380" dirty="0">
+                <a:solidFill>
+                  <a:srgbClr val="17364A"/>
+                </a:solidFill>
+                <a:latin typeface="Aptos" pitchFamily="34" charset="0"/>
+                <a:ea typeface="Aptos" pitchFamily="34" charset="-122"/>
+                <a:cs typeface="Aptos" pitchFamily="34" charset="-120"/>
+              </a:rPr>
+              <a:t>Distinguish binding requirements from guidance and best practices.</a:t>
+            </a:r>
+            <a:endParaRPr lang="en-US" sz="1380" dirty="0"/>
+          </a:p>
+        </p:txBody>
       </p:sp>
       <p:sp>
         <p:nvSpPr>
           <p:cNvPr id="16" name="Shape 14"/>
-          <p:cNvSpPr/>
-          <p:nvPr/>
-        </p:nvSpPr>
-        <p:spPr>
-          <a:xfrm>
-            <a:off x="9089136" y="3456432"/>
-            <a:ext cx="566928" cy="566928"/>
-          </a:xfrm>
-          <a:prstGeom prst="ellipse">
-            <a:avLst/>
-          </a:prstGeom>
-          <a:solidFill>
-            <a:srgbClr val="6A4CA3"/>
-          </a:solidFill>
-          <a:ln w="12700">
-            <a:solidFill>
-              <a:srgbClr val="6A4CA3"/>
-            </a:solidFill>
-            <a:prstDash val="solid"/>
-          </a:ln>
-        </p:spPr>
-      </p:sp>
-      <p:sp>
-        <p:nvSpPr>
-          <p:cNvPr id="17" name="Shape 15"/>
-          <p:cNvSpPr/>
-          <p:nvPr/>
-        </p:nvSpPr>
-        <p:spPr>
-          <a:xfrm>
-            <a:off x="8385048" y="3419856"/>
-            <a:ext cx="1975104" cy="0"/>
-          </a:xfrm>
-          <a:prstGeom prst="line">
-            <a:avLst/>
-          </a:prstGeom>
-          <a:noFill/>
-          <a:ln w="25400">
-            <a:solidFill>
-              <a:srgbClr val="8ABBD8"/>
-            </a:solidFill>
-            <a:prstDash val="solid"/>
-          </a:ln>
-        </p:spPr>
-      </p:sp>
-      <p:sp>
-        <p:nvSpPr>
-          <p:cNvPr id="18" name="Shape 16"/>
-          <p:cNvSpPr/>
-          <p:nvPr/>
-        </p:nvSpPr>
-        <p:spPr>
-          <a:xfrm>
-            <a:off x="8202168" y="3630168"/>
-            <a:ext cx="1170432" cy="118872"/>
-          </a:xfrm>
-          <a:prstGeom prst="line">
-            <a:avLst/>
-          </a:prstGeom>
-          <a:noFill/>
-          <a:ln w="25400">
-            <a:solidFill>
-              <a:srgbClr val="8ABBD8"/>
-            </a:solidFill>
-            <a:prstDash val="solid"/>
-          </a:ln>
-        </p:spPr>
-      </p:sp>
-      <p:sp>
-        <p:nvSpPr>
-          <p:cNvPr id="19" name="Shape 17"/>
-          <p:cNvSpPr/>
-          <p:nvPr/>
-        </p:nvSpPr>
-        <p:spPr>
-          <a:xfrm>
-            <a:off x="10543032" y="3630168"/>
-            <a:ext cx="-1170432" cy="118872"/>
-          </a:xfrm>
-          <a:prstGeom prst="line">
-            <a:avLst/>
-          </a:prstGeom>
-          <a:noFill/>
-          <a:ln w="25400">
-            <a:solidFill>
-              <a:srgbClr val="8ABBD8"/>
-            </a:solidFill>
-            <a:prstDash val="solid"/>
-          </a:ln>
-        </p:spPr>
-      </p:sp>
-      <p:sp>
-        <p:nvSpPr>
-          <p:cNvPr id="20" name="Text 18"/>
-          <p:cNvSpPr/>
-          <p:nvPr/>
-        </p:nvSpPr>
-        <p:spPr>
-          <a:xfrm>
-            <a:off x="7863840" y="4069080"/>
-            <a:ext cx="3017520" cy="164592"/>
-          </a:xfrm>
-          <a:prstGeom prst="rect">
-            <a:avLst/>
-          </a:prstGeom>
-          <a:noFill/>
-          <a:ln/>
-        </p:spPr>
-        <p:txBody>
-          <a:bodyPr wrap="square" lIns="0" tIns="0" rIns="0" bIns="0" rtlCol="0" anchor="ctr"/>
-          <a:lstStyle/>
-          <a:p>
-            <a:pPr algn="ctr" indent="0" marL="0">
-              <a:buNone/>
-            </a:pPr>
-            <a:r>
-              <a:rPr lang="en-US" sz="900" b="1" dirty="0">
-                <a:solidFill>
-                  <a:srgbClr val="003A63"/>
-                </a:solidFill>
-                <a:latin typeface="Aptos" pitchFamily="34" charset="0"/>
-                <a:ea typeface="Aptos" pitchFamily="34" charset="-122"/>
-                <a:cs typeface="Aptos" pitchFamily="34" charset="-120"/>
-              </a:rPr>
-              <a:t>Decision rights</a:t>
-            </a:r>
-            <a:endParaRPr lang="en-US" sz="900" dirty="0"/>
-          </a:p>
-        </p:txBody>
-      </p:sp>
-      <p:sp>
-        <p:nvSpPr>
-          <p:cNvPr id="21" name="Shape 19"/>
           <p:cNvSpPr/>
           <p:nvPr/>
         </p:nvSpPr>
@@ -6156,7 +5836,7 @@
       </p:sp>
       <p:sp>
         <p:nvSpPr>
-          <p:cNvPr id="22" name="Text 20"/>
+          <p:cNvPr id="17" name="Text 15"/>
           <p:cNvSpPr/>
           <p:nvPr/>
         </p:nvSpPr>
@@ -6195,7 +5875,7 @@
       </p:sp>
       <p:sp>
         <p:nvSpPr>
-          <p:cNvPr id="23" name="Text 21"/>
+          <p:cNvPr id="18" name="Text 16"/>
           <p:cNvSpPr/>
           <p:nvPr/>
         </p:nvSpPr>
@@ -6703,13 +6383,11 @@
             </a:avLst>
           </a:prstGeom>
           <a:solidFill>
-            <a:srgbClr val="FFFFFF">
-              <a:alpha val="88000"/>
-            </a:srgbClr>
+            <a:srgbClr val="FFFFFF"/>
           </a:solidFill>
           <a:ln w="12700">
             <a:solidFill>
-              <a:srgbClr val="D6E8F2"/>
+              <a:srgbClr val="B9D7E6"/>
             </a:solidFill>
             <a:prstDash val="solid"/>
           </a:ln>
@@ -6717,190 +6395,112 @@
       </p:sp>
       <p:sp>
         <p:nvSpPr>
-          <p:cNvPr id="14" name="Shape 12"/>
-          <p:cNvSpPr/>
-          <p:nvPr/>
-        </p:nvSpPr>
-        <p:spPr>
-          <a:xfrm>
-            <a:off x="7891272" y="3108960"/>
-            <a:ext cx="566928" cy="566928"/>
-          </a:xfrm>
-          <a:prstGeom prst="ellipse">
-            <a:avLst/>
-          </a:prstGeom>
-          <a:solidFill>
-            <a:srgbClr val="0068B7"/>
-          </a:solidFill>
-          <a:ln w="12700">
-            <a:solidFill>
-              <a:srgbClr val="0068B7"/>
-            </a:solidFill>
-            <a:prstDash val="solid"/>
-          </a:ln>
-        </p:spPr>
-      </p:sp>
-      <p:sp>
-        <p:nvSpPr>
-          <p:cNvPr id="15" name="Shape 13"/>
-          <p:cNvSpPr/>
-          <p:nvPr/>
-        </p:nvSpPr>
-        <p:spPr>
-          <a:xfrm>
-            <a:off x="10287000" y="3108960"/>
-            <a:ext cx="566928" cy="566928"/>
-          </a:xfrm>
-          <a:prstGeom prst="ellipse">
-            <a:avLst/>
-          </a:prstGeom>
-          <a:solidFill>
-            <a:srgbClr val="2F8A28"/>
-          </a:solidFill>
-          <a:ln w="12700">
-            <a:solidFill>
-              <a:srgbClr val="2F8A28"/>
-            </a:solidFill>
-            <a:prstDash val="solid"/>
-          </a:ln>
-        </p:spPr>
+          <p:cNvPr id="14" name="Text 12"/>
+          <p:cNvSpPr/>
+          <p:nvPr/>
+        </p:nvSpPr>
+        <p:spPr>
+          <a:xfrm>
+            <a:off x="7799832" y="2935224"/>
+            <a:ext cx="3145536" cy="256032"/>
+          </a:xfrm>
+          <a:prstGeom prst="rect">
+            <a:avLst/>
+          </a:prstGeom>
+          <a:noFill/>
+          <a:ln/>
+        </p:spPr>
+        <p:txBody>
+          <a:bodyPr wrap="square" lIns="0" tIns="0" rIns="0" bIns="0" rtlCol="0" anchor="ctr"/>
+          <a:lstStyle/>
+          <a:p>
+            <a:pPr indent="0" marL="0">
+              <a:buNone/>
+            </a:pPr>
+            <a:r>
+              <a:rPr lang="en-US" sz="1300" b="1" dirty="0">
+                <a:solidFill>
+                  <a:srgbClr val="0068B7"/>
+                </a:solidFill>
+                <a:latin typeface="Aptos" pitchFamily="34" charset="0"/>
+                <a:ea typeface="Aptos" pitchFamily="34" charset="-122"/>
+                <a:cs typeface="Aptos" pitchFamily="34" charset="-120"/>
+              </a:rPr>
+              <a:t>Concept checkpoints</a:t>
+            </a:r>
+            <a:endParaRPr lang="en-US" sz="1300" dirty="0"/>
+          </a:p>
+        </p:txBody>
+      </p:sp>
+      <p:sp>
+        <p:nvSpPr>
+          <p:cNvPr id="15" name="Text 13"/>
+          <p:cNvSpPr/>
+          <p:nvPr/>
+        </p:nvSpPr>
+        <p:spPr>
+          <a:xfrm>
+            <a:off x="7818120" y="3300984"/>
+            <a:ext cx="3090672" cy="877824"/>
+          </a:xfrm>
+          <a:prstGeom prst="rect">
+            <a:avLst/>
+          </a:prstGeom>
+          <a:noFill/>
+          <a:ln/>
+        </p:spPr>
+        <p:txBody>
+          <a:bodyPr wrap="square" lIns="254" tIns="254" rIns="254" bIns="254" rtlCol="0" anchor="t">
+            <a:normAutofit/>
+          </a:bodyPr>
+          <a:lstStyle/>
+          <a:p>
+            <a:r>
+              <a:rPr lang="en-US" sz="1380" dirty="0">
+                <a:solidFill>
+                  <a:srgbClr val="17364A"/>
+                </a:solidFill>
+                <a:latin typeface="Aptos" pitchFamily="34" charset="0"/>
+                <a:ea typeface="Aptos" pitchFamily="34" charset="-122"/>
+                <a:cs typeface="Aptos" pitchFamily="34" charset="-120"/>
+              </a:rPr>
+              <a:t>Maintain a crosswalk from external requirements to internal policies and procedures.</a:t>
+            </a:r>
+            <a:endParaRPr lang="en-US" sz="1380" dirty="0"/>
+          </a:p>
+          <a:p>
+            <a:r>
+              <a:rPr lang="en-US" sz="1380" dirty="0">
+                <a:solidFill>
+                  <a:srgbClr val="17364A"/>
+                </a:solidFill>
+                <a:latin typeface="Aptos" pitchFamily="34" charset="0"/>
+                <a:ea typeface="Aptos" pitchFamily="34" charset="-122"/>
+                <a:cs typeface="Aptos" pitchFamily="34" charset="-120"/>
+              </a:rPr>
+              <a:t>Update training, SOPs, and procurement language when policies change.</a:t>
+            </a:r>
+            <a:endParaRPr lang="en-US" sz="1380" dirty="0"/>
+          </a:p>
+          <a:p>
+            <a:r>
+              <a:rPr lang="en-US" sz="1380" dirty="0">
+                <a:solidFill>
+                  <a:srgbClr val="17364A"/>
+                </a:solidFill>
+                <a:latin typeface="Aptos" pitchFamily="34" charset="0"/>
+                <a:ea typeface="Aptos" pitchFamily="34" charset="-122"/>
+                <a:cs typeface="Aptos" pitchFamily="34" charset="-120"/>
+              </a:rPr>
+              <a:t>Document assumptions, decisions, and unresolved legal or policy questions.</a:t>
+            </a:r>
+            <a:endParaRPr lang="en-US" sz="1380" dirty="0"/>
+          </a:p>
+        </p:txBody>
       </p:sp>
       <p:sp>
         <p:nvSpPr>
           <p:cNvPr id="16" name="Shape 14"/>
-          <p:cNvSpPr/>
-          <p:nvPr/>
-        </p:nvSpPr>
-        <p:spPr>
-          <a:xfrm>
-            <a:off x="9089136" y="3456432"/>
-            <a:ext cx="566928" cy="566928"/>
-          </a:xfrm>
-          <a:prstGeom prst="ellipse">
-            <a:avLst/>
-          </a:prstGeom>
-          <a:solidFill>
-            <a:srgbClr val="6A4CA3"/>
-          </a:solidFill>
-          <a:ln w="12700">
-            <a:solidFill>
-              <a:srgbClr val="6A4CA3"/>
-            </a:solidFill>
-            <a:prstDash val="solid"/>
-          </a:ln>
-        </p:spPr>
-      </p:sp>
-      <p:sp>
-        <p:nvSpPr>
-          <p:cNvPr id="17" name="Shape 15"/>
-          <p:cNvSpPr/>
-          <p:nvPr/>
-        </p:nvSpPr>
-        <p:spPr>
-          <a:xfrm>
-            <a:off x="8385048" y="3419856"/>
-            <a:ext cx="1975104" cy="0"/>
-          </a:xfrm>
-          <a:prstGeom prst="line">
-            <a:avLst/>
-          </a:prstGeom>
-          <a:noFill/>
-          <a:ln w="25400">
-            <a:solidFill>
-              <a:srgbClr val="8ABBD8"/>
-            </a:solidFill>
-            <a:prstDash val="solid"/>
-          </a:ln>
-        </p:spPr>
-      </p:sp>
-      <p:sp>
-        <p:nvSpPr>
-          <p:cNvPr id="18" name="Shape 16"/>
-          <p:cNvSpPr/>
-          <p:nvPr/>
-        </p:nvSpPr>
-        <p:spPr>
-          <a:xfrm>
-            <a:off x="8202168" y="3630168"/>
-            <a:ext cx="1170432" cy="118872"/>
-          </a:xfrm>
-          <a:prstGeom prst="line">
-            <a:avLst/>
-          </a:prstGeom>
-          <a:noFill/>
-          <a:ln w="25400">
-            <a:solidFill>
-              <a:srgbClr val="8ABBD8"/>
-            </a:solidFill>
-            <a:prstDash val="solid"/>
-          </a:ln>
-        </p:spPr>
-      </p:sp>
-      <p:sp>
-        <p:nvSpPr>
-          <p:cNvPr id="19" name="Shape 17"/>
-          <p:cNvSpPr/>
-          <p:nvPr/>
-        </p:nvSpPr>
-        <p:spPr>
-          <a:xfrm>
-            <a:off x="10543032" y="3630168"/>
-            <a:ext cx="-1170432" cy="118872"/>
-          </a:xfrm>
-          <a:prstGeom prst="line">
-            <a:avLst/>
-          </a:prstGeom>
-          <a:noFill/>
-          <a:ln w="25400">
-            <a:solidFill>
-              <a:srgbClr val="8ABBD8"/>
-            </a:solidFill>
-            <a:prstDash val="solid"/>
-          </a:ln>
-        </p:spPr>
-      </p:sp>
-      <p:sp>
-        <p:nvSpPr>
-          <p:cNvPr id="20" name="Text 18"/>
-          <p:cNvSpPr/>
-          <p:nvPr/>
-        </p:nvSpPr>
-        <p:spPr>
-          <a:xfrm>
-            <a:off x="7863840" y="4069080"/>
-            <a:ext cx="3017520" cy="164592"/>
-          </a:xfrm>
-          <a:prstGeom prst="rect">
-            <a:avLst/>
-          </a:prstGeom>
-          <a:noFill/>
-          <a:ln/>
-        </p:spPr>
-        <p:txBody>
-          <a:bodyPr wrap="square" lIns="0" tIns="0" rIns="0" bIns="0" rtlCol="0" anchor="ctr"/>
-          <a:lstStyle/>
-          <a:p>
-            <a:pPr algn="ctr" indent="0" marL="0">
-              <a:buNone/>
-            </a:pPr>
-            <a:r>
-              <a:rPr lang="en-US" sz="900" b="1" dirty="0">
-                <a:solidFill>
-                  <a:srgbClr val="003A63"/>
-                </a:solidFill>
-                <a:latin typeface="Aptos" pitchFamily="34" charset="0"/>
-                <a:ea typeface="Aptos" pitchFamily="34" charset="-122"/>
-                <a:cs typeface="Aptos" pitchFamily="34" charset="-120"/>
-              </a:rPr>
-              <a:t>Decision rights</a:t>
-            </a:r>
-            <a:endParaRPr lang="en-US" sz="900" dirty="0"/>
-          </a:p>
-        </p:txBody>
-      </p:sp>
-      <p:sp>
-        <p:nvSpPr>
-          <p:cNvPr id="21" name="Shape 19"/>
           <p:cNvSpPr/>
           <p:nvPr/>
         </p:nvSpPr>
@@ -6927,7 +6527,7 @@
       </p:sp>
       <p:sp>
         <p:nvSpPr>
-          <p:cNvPr id="22" name="Text 20"/>
+          <p:cNvPr id="17" name="Text 15"/>
           <p:cNvSpPr/>
           <p:nvPr/>
         </p:nvSpPr>
@@ -6966,7 +6566,7 @@
       </p:sp>
       <p:sp>
         <p:nvSpPr>
-          <p:cNvPr id="23" name="Text 21"/>
+          <p:cNvPr id="18" name="Text 16"/>
           <p:cNvSpPr/>
           <p:nvPr/>
         </p:nvSpPr>
@@ -7474,13 +7074,11 @@
             </a:avLst>
           </a:prstGeom>
           <a:solidFill>
-            <a:srgbClr val="FFFFFF">
-              <a:alpha val="88000"/>
-            </a:srgbClr>
+            <a:srgbClr val="FFFFFF"/>
           </a:solidFill>
           <a:ln w="12700">
             <a:solidFill>
-              <a:srgbClr val="D6E8F2"/>
+              <a:srgbClr val="B9D7E6"/>
             </a:solidFill>
             <a:prstDash val="solid"/>
           </a:ln>
@@ -7488,190 +7086,112 @@
       </p:sp>
       <p:sp>
         <p:nvSpPr>
-          <p:cNvPr id="14" name="Shape 12"/>
-          <p:cNvSpPr/>
-          <p:nvPr/>
-        </p:nvSpPr>
-        <p:spPr>
-          <a:xfrm>
-            <a:off x="7891272" y="3108960"/>
-            <a:ext cx="566928" cy="566928"/>
-          </a:xfrm>
-          <a:prstGeom prst="ellipse">
-            <a:avLst/>
-          </a:prstGeom>
-          <a:solidFill>
-            <a:srgbClr val="0068B7"/>
-          </a:solidFill>
-          <a:ln w="12700">
-            <a:solidFill>
-              <a:srgbClr val="0068B7"/>
-            </a:solidFill>
-            <a:prstDash val="solid"/>
-          </a:ln>
-        </p:spPr>
-      </p:sp>
-      <p:sp>
-        <p:nvSpPr>
-          <p:cNvPr id="15" name="Shape 13"/>
-          <p:cNvSpPr/>
-          <p:nvPr/>
-        </p:nvSpPr>
-        <p:spPr>
-          <a:xfrm>
-            <a:off x="10287000" y="3108960"/>
-            <a:ext cx="566928" cy="566928"/>
-          </a:xfrm>
-          <a:prstGeom prst="ellipse">
-            <a:avLst/>
-          </a:prstGeom>
-          <a:solidFill>
-            <a:srgbClr val="2F8A28"/>
-          </a:solidFill>
-          <a:ln w="12700">
-            <a:solidFill>
-              <a:srgbClr val="2F8A28"/>
-            </a:solidFill>
-            <a:prstDash val="solid"/>
-          </a:ln>
-        </p:spPr>
+          <p:cNvPr id="14" name="Text 12"/>
+          <p:cNvSpPr/>
+          <p:nvPr/>
+        </p:nvSpPr>
+        <p:spPr>
+          <a:xfrm>
+            <a:off x="7799832" y="2935224"/>
+            <a:ext cx="3145536" cy="256032"/>
+          </a:xfrm>
+          <a:prstGeom prst="rect">
+            <a:avLst/>
+          </a:prstGeom>
+          <a:noFill/>
+          <a:ln/>
+        </p:spPr>
+        <p:txBody>
+          <a:bodyPr wrap="square" lIns="0" tIns="0" rIns="0" bIns="0" rtlCol="0" anchor="ctr"/>
+          <a:lstStyle/>
+          <a:p>
+            <a:pPr indent="0" marL="0">
+              <a:buNone/>
+            </a:pPr>
+            <a:r>
+              <a:rPr lang="en-US" sz="1300" b="1" dirty="0">
+                <a:solidFill>
+                  <a:srgbClr val="0068B7"/>
+                </a:solidFill>
+                <a:latin typeface="Aptos" pitchFamily="34" charset="0"/>
+                <a:ea typeface="Aptos" pitchFamily="34" charset="-122"/>
+                <a:cs typeface="Aptos" pitchFamily="34" charset="-120"/>
+              </a:rPr>
+              <a:t>Concept checkpoints</a:t>
+            </a:r>
+            <a:endParaRPr lang="en-US" sz="1300" dirty="0"/>
+          </a:p>
+        </p:txBody>
+      </p:sp>
+      <p:sp>
+        <p:nvSpPr>
+          <p:cNvPr id="15" name="Text 13"/>
+          <p:cNvSpPr/>
+          <p:nvPr/>
+        </p:nvSpPr>
+        <p:spPr>
+          <a:xfrm>
+            <a:off x="7818120" y="3300984"/>
+            <a:ext cx="3090672" cy="877824"/>
+          </a:xfrm>
+          <a:prstGeom prst="rect">
+            <a:avLst/>
+          </a:prstGeom>
+          <a:noFill/>
+          <a:ln/>
+        </p:spPr>
+        <p:txBody>
+          <a:bodyPr wrap="square" lIns="254" tIns="254" rIns="254" bIns="254" rtlCol="0" anchor="t">
+            <a:normAutofit/>
+          </a:bodyPr>
+          <a:lstStyle/>
+          <a:p>
+            <a:r>
+              <a:rPr lang="en-US" sz="1380" dirty="0">
+                <a:solidFill>
+                  <a:srgbClr val="17364A"/>
+                </a:solidFill>
+                <a:latin typeface="Aptos" pitchFamily="34" charset="0"/>
+                <a:ea typeface="Aptos" pitchFamily="34" charset="-122"/>
+                <a:cs typeface="Aptos" pitchFamily="34" charset="-120"/>
+              </a:rPr>
+              <a:t>Where does this topic appear in your agency, program, or workflow?</a:t>
+            </a:r>
+            <a:endParaRPr lang="en-US" sz="1380" dirty="0"/>
+          </a:p>
+          <a:p>
+            <a:r>
+              <a:rPr lang="en-US" sz="1380" dirty="0">
+                <a:solidFill>
+                  <a:srgbClr val="17364A"/>
+                </a:solidFill>
+                <a:latin typeface="Aptos" pitchFamily="34" charset="0"/>
+                <a:ea typeface="Aptos" pitchFamily="34" charset="-122"/>
+                <a:cs typeface="Aptos" pitchFamily="34" charset="-120"/>
+              </a:rPr>
+              <a:t>Which staff roles would need to understand or apply this concept before AI use is approved?</a:t>
+            </a:r>
+            <a:endParaRPr lang="en-US" sz="1380" dirty="0"/>
+          </a:p>
+          <a:p>
+            <a:r>
+              <a:rPr lang="en-US" sz="1380" dirty="0">
+                <a:solidFill>
+                  <a:srgbClr val="17364A"/>
+                </a:solidFill>
+                <a:latin typeface="Aptos" pitchFamily="34" charset="0"/>
+                <a:ea typeface="Aptos" pitchFamily="34" charset="-122"/>
+                <a:cs typeface="Aptos" pitchFamily="34" charset="-120"/>
+              </a:rPr>
+              <a:t>What could go wrong if this topic is not addressed before implementation?</a:t>
+            </a:r>
+            <a:endParaRPr lang="en-US" sz="1380" dirty="0"/>
+          </a:p>
+        </p:txBody>
       </p:sp>
       <p:sp>
         <p:nvSpPr>
           <p:cNvPr id="16" name="Shape 14"/>
-          <p:cNvSpPr/>
-          <p:nvPr/>
-        </p:nvSpPr>
-        <p:spPr>
-          <a:xfrm>
-            <a:off x="9089136" y="3456432"/>
-            <a:ext cx="566928" cy="566928"/>
-          </a:xfrm>
-          <a:prstGeom prst="ellipse">
-            <a:avLst/>
-          </a:prstGeom>
-          <a:solidFill>
-            <a:srgbClr val="6A4CA3"/>
-          </a:solidFill>
-          <a:ln w="12700">
-            <a:solidFill>
-              <a:srgbClr val="6A4CA3"/>
-            </a:solidFill>
-            <a:prstDash val="solid"/>
-          </a:ln>
-        </p:spPr>
-      </p:sp>
-      <p:sp>
-        <p:nvSpPr>
-          <p:cNvPr id="17" name="Shape 15"/>
-          <p:cNvSpPr/>
-          <p:nvPr/>
-        </p:nvSpPr>
-        <p:spPr>
-          <a:xfrm>
-            <a:off x="8385048" y="3419856"/>
-            <a:ext cx="1975104" cy="0"/>
-          </a:xfrm>
-          <a:prstGeom prst="line">
-            <a:avLst/>
-          </a:prstGeom>
-          <a:noFill/>
-          <a:ln w="25400">
-            <a:solidFill>
-              <a:srgbClr val="8ABBD8"/>
-            </a:solidFill>
-            <a:prstDash val="solid"/>
-          </a:ln>
-        </p:spPr>
-      </p:sp>
-      <p:sp>
-        <p:nvSpPr>
-          <p:cNvPr id="18" name="Shape 16"/>
-          <p:cNvSpPr/>
-          <p:nvPr/>
-        </p:nvSpPr>
-        <p:spPr>
-          <a:xfrm>
-            <a:off x="8202168" y="3630168"/>
-            <a:ext cx="1170432" cy="118872"/>
-          </a:xfrm>
-          <a:prstGeom prst="line">
-            <a:avLst/>
-          </a:prstGeom>
-          <a:noFill/>
-          <a:ln w="25400">
-            <a:solidFill>
-              <a:srgbClr val="8ABBD8"/>
-            </a:solidFill>
-            <a:prstDash val="solid"/>
-          </a:ln>
-        </p:spPr>
-      </p:sp>
-      <p:sp>
-        <p:nvSpPr>
-          <p:cNvPr id="19" name="Shape 17"/>
-          <p:cNvSpPr/>
-          <p:nvPr/>
-        </p:nvSpPr>
-        <p:spPr>
-          <a:xfrm>
-            <a:off x="10543032" y="3630168"/>
-            <a:ext cx="-1170432" cy="118872"/>
-          </a:xfrm>
-          <a:prstGeom prst="line">
-            <a:avLst/>
-          </a:prstGeom>
-          <a:noFill/>
-          <a:ln w="25400">
-            <a:solidFill>
-              <a:srgbClr val="8ABBD8"/>
-            </a:solidFill>
-            <a:prstDash val="solid"/>
-          </a:ln>
-        </p:spPr>
-      </p:sp>
-      <p:sp>
-        <p:nvSpPr>
-          <p:cNvPr id="20" name="Text 18"/>
-          <p:cNvSpPr/>
-          <p:nvPr/>
-        </p:nvSpPr>
-        <p:spPr>
-          <a:xfrm>
-            <a:off x="7863840" y="4069080"/>
-            <a:ext cx="3017520" cy="164592"/>
-          </a:xfrm>
-          <a:prstGeom prst="rect">
-            <a:avLst/>
-          </a:prstGeom>
-          <a:noFill/>
-          <a:ln/>
-        </p:spPr>
-        <p:txBody>
-          <a:bodyPr wrap="square" lIns="0" tIns="0" rIns="0" bIns="0" rtlCol="0" anchor="ctr"/>
-          <a:lstStyle/>
-          <a:p>
-            <a:pPr algn="ctr" indent="0" marL="0">
-              <a:buNone/>
-            </a:pPr>
-            <a:r>
-              <a:rPr lang="en-US" sz="900" b="1" dirty="0">
-                <a:solidFill>
-                  <a:srgbClr val="003A63"/>
-                </a:solidFill>
-                <a:latin typeface="Aptos" pitchFamily="34" charset="0"/>
-                <a:ea typeface="Aptos" pitchFamily="34" charset="-122"/>
-                <a:cs typeface="Aptos" pitchFamily="34" charset="-120"/>
-              </a:rPr>
-              <a:t>Decision rights</a:t>
-            </a:r>
-            <a:endParaRPr lang="en-US" sz="900" dirty="0"/>
-          </a:p>
-        </p:txBody>
-      </p:sp>
-      <p:sp>
-        <p:nvSpPr>
-          <p:cNvPr id="21" name="Shape 19"/>
           <p:cNvSpPr/>
           <p:nvPr/>
         </p:nvSpPr>
@@ -7698,7 +7218,7 @@
       </p:sp>
       <p:sp>
         <p:nvSpPr>
-          <p:cNvPr id="22" name="Text 20"/>
+          <p:cNvPr id="17" name="Text 15"/>
           <p:cNvSpPr/>
           <p:nvPr/>
         </p:nvSpPr>
@@ -7737,7 +7257,7 @@
       </p:sp>
       <p:sp>
         <p:nvSpPr>
-          <p:cNvPr id="23" name="Text 21"/>
+          <p:cNvPr id="18" name="Text 16"/>
           <p:cNvSpPr/>
           <p:nvPr/>
         </p:nvSpPr>
@@ -8231,13 +7751,11 @@
             </a:avLst>
           </a:prstGeom>
           <a:solidFill>
-            <a:srgbClr val="FFFFFF">
-              <a:alpha val="88000"/>
-            </a:srgbClr>
+            <a:srgbClr val="FFFFFF"/>
           </a:solidFill>
           <a:ln w="12700">
             <a:solidFill>
-              <a:srgbClr val="D6E8F2"/>
+              <a:srgbClr val="B9D7E6"/>
             </a:solidFill>
             <a:prstDash val="solid"/>
           </a:ln>
@@ -8245,190 +7763,98 @@
       </p:sp>
       <p:sp>
         <p:nvSpPr>
-          <p:cNvPr id="14" name="Shape 12"/>
-          <p:cNvSpPr/>
-          <p:nvPr/>
-        </p:nvSpPr>
-        <p:spPr>
-          <a:xfrm>
-            <a:off x="7891272" y="3108960"/>
-            <a:ext cx="566928" cy="566928"/>
-          </a:xfrm>
-          <a:prstGeom prst="ellipse">
-            <a:avLst/>
-          </a:prstGeom>
-          <a:solidFill>
-            <a:srgbClr val="0068B7"/>
-          </a:solidFill>
-          <a:ln w="12700">
-            <a:solidFill>
-              <a:srgbClr val="0068B7"/>
-            </a:solidFill>
-            <a:prstDash val="solid"/>
-          </a:ln>
-        </p:spPr>
-      </p:sp>
-      <p:sp>
-        <p:nvSpPr>
-          <p:cNvPr id="15" name="Shape 13"/>
-          <p:cNvSpPr/>
-          <p:nvPr/>
-        </p:nvSpPr>
-        <p:spPr>
-          <a:xfrm>
-            <a:off x="10287000" y="3108960"/>
-            <a:ext cx="566928" cy="566928"/>
-          </a:xfrm>
-          <a:prstGeom prst="ellipse">
-            <a:avLst/>
-          </a:prstGeom>
-          <a:solidFill>
-            <a:srgbClr val="2F8A28"/>
-          </a:solidFill>
-          <a:ln w="12700">
-            <a:solidFill>
-              <a:srgbClr val="2F8A28"/>
-            </a:solidFill>
-            <a:prstDash val="solid"/>
-          </a:ln>
-        </p:spPr>
+          <p:cNvPr id="14" name="Text 12"/>
+          <p:cNvSpPr/>
+          <p:nvPr/>
+        </p:nvSpPr>
+        <p:spPr>
+          <a:xfrm>
+            <a:off x="7799832" y="2935224"/>
+            <a:ext cx="3145536" cy="256032"/>
+          </a:xfrm>
+          <a:prstGeom prst="rect">
+            <a:avLst/>
+          </a:prstGeom>
+          <a:noFill/>
+          <a:ln/>
+        </p:spPr>
+        <p:txBody>
+          <a:bodyPr wrap="square" lIns="0" tIns="0" rIns="0" bIns="0" rtlCol="0" anchor="ctr"/>
+          <a:lstStyle/>
+          <a:p>
+            <a:pPr indent="0" marL="0">
+              <a:buNone/>
+            </a:pPr>
+            <a:r>
+              <a:rPr lang="en-US" sz="1300" b="1" dirty="0">
+                <a:solidFill>
+                  <a:srgbClr val="0068B7"/>
+                </a:solidFill>
+                <a:latin typeface="Aptos" pitchFamily="34" charset="0"/>
+                <a:ea typeface="Aptos" pitchFamily="34" charset="-122"/>
+                <a:cs typeface="Aptos" pitchFamily="34" charset="-120"/>
+              </a:rPr>
+              <a:t>Concept checkpoints</a:t>
+            </a:r>
+            <a:endParaRPr lang="en-US" sz="1300" dirty="0"/>
+          </a:p>
+        </p:txBody>
+      </p:sp>
+      <p:sp>
+        <p:nvSpPr>
+          <p:cNvPr id="15" name="Text 13"/>
+          <p:cNvSpPr/>
+          <p:nvPr/>
+        </p:nvSpPr>
+        <p:spPr>
+          <a:xfrm>
+            <a:off x="7818120" y="3300984"/>
+            <a:ext cx="3090672" cy="877824"/>
+          </a:xfrm>
+          <a:prstGeom prst="rect">
+            <a:avLst/>
+          </a:prstGeom>
+          <a:noFill/>
+          <a:ln/>
+        </p:spPr>
+        <p:txBody>
+          <a:bodyPr wrap="square" lIns="254" tIns="254" rIns="254" bIns="254" rtlCol="0" anchor="t">
+            <a:normAutofit/>
+          </a:bodyPr>
+          <a:lstStyle/>
+          <a:p>
+            <a:r>
+              <a:rPr lang="en-US" sz="1380" dirty="0">
+                <a:solidFill>
+                  <a:srgbClr val="17364A"/>
+                </a:solidFill>
+                <a:latin typeface="Aptos" pitchFamily="34" charset="0"/>
+                <a:ea typeface="Aptos" pitchFamily="34" charset="-122"/>
+                <a:cs typeface="Aptos" pitchFamily="34" charset="-120"/>
+              </a:rPr>
+              <a:t>What evidence would governance, leadership, or operations staff need before moving forward?</a:t>
+            </a:r>
+            <a:endParaRPr lang="en-US" sz="1380" dirty="0"/>
+          </a:p>
+          <a:p>
+            <a:r>
+              <a:rPr lang="en-US" sz="1380" dirty="0">
+                <a:solidFill>
+                  <a:srgbClr val="17364A"/>
+                </a:solidFill>
+                <a:latin typeface="Aptos" pitchFamily="34" charset="0"/>
+                <a:ea typeface="Aptos" pitchFamily="34" charset="-122"/>
+                <a:cs typeface="Aptos" pitchFamily="34" charset="-120"/>
+              </a:rPr>
+              <a:t>Which policy, data, equity, privacy, security, or workflow questions remain unresolved?</a:t>
+            </a:r>
+            <a:endParaRPr lang="en-US" sz="1380" dirty="0"/>
+          </a:p>
+        </p:txBody>
       </p:sp>
       <p:sp>
         <p:nvSpPr>
           <p:cNvPr id="16" name="Shape 14"/>
-          <p:cNvSpPr/>
-          <p:nvPr/>
-        </p:nvSpPr>
-        <p:spPr>
-          <a:xfrm>
-            <a:off x="9089136" y="3456432"/>
-            <a:ext cx="566928" cy="566928"/>
-          </a:xfrm>
-          <a:prstGeom prst="ellipse">
-            <a:avLst/>
-          </a:prstGeom>
-          <a:solidFill>
-            <a:srgbClr val="6A4CA3"/>
-          </a:solidFill>
-          <a:ln w="12700">
-            <a:solidFill>
-              <a:srgbClr val="6A4CA3"/>
-            </a:solidFill>
-            <a:prstDash val="solid"/>
-          </a:ln>
-        </p:spPr>
-      </p:sp>
-      <p:sp>
-        <p:nvSpPr>
-          <p:cNvPr id="17" name="Shape 15"/>
-          <p:cNvSpPr/>
-          <p:nvPr/>
-        </p:nvSpPr>
-        <p:spPr>
-          <a:xfrm>
-            <a:off x="8385048" y="3419856"/>
-            <a:ext cx="1975104" cy="0"/>
-          </a:xfrm>
-          <a:prstGeom prst="line">
-            <a:avLst/>
-          </a:prstGeom>
-          <a:noFill/>
-          <a:ln w="25400">
-            <a:solidFill>
-              <a:srgbClr val="8ABBD8"/>
-            </a:solidFill>
-            <a:prstDash val="solid"/>
-          </a:ln>
-        </p:spPr>
-      </p:sp>
-      <p:sp>
-        <p:nvSpPr>
-          <p:cNvPr id="18" name="Shape 16"/>
-          <p:cNvSpPr/>
-          <p:nvPr/>
-        </p:nvSpPr>
-        <p:spPr>
-          <a:xfrm>
-            <a:off x="8202168" y="3630168"/>
-            <a:ext cx="1170432" cy="118872"/>
-          </a:xfrm>
-          <a:prstGeom prst="line">
-            <a:avLst/>
-          </a:prstGeom>
-          <a:noFill/>
-          <a:ln w="25400">
-            <a:solidFill>
-              <a:srgbClr val="8ABBD8"/>
-            </a:solidFill>
-            <a:prstDash val="solid"/>
-          </a:ln>
-        </p:spPr>
-      </p:sp>
-      <p:sp>
-        <p:nvSpPr>
-          <p:cNvPr id="19" name="Shape 17"/>
-          <p:cNvSpPr/>
-          <p:nvPr/>
-        </p:nvSpPr>
-        <p:spPr>
-          <a:xfrm>
-            <a:off x="10543032" y="3630168"/>
-            <a:ext cx="-1170432" cy="118872"/>
-          </a:xfrm>
-          <a:prstGeom prst="line">
-            <a:avLst/>
-          </a:prstGeom>
-          <a:noFill/>
-          <a:ln w="25400">
-            <a:solidFill>
-              <a:srgbClr val="8ABBD8"/>
-            </a:solidFill>
-            <a:prstDash val="solid"/>
-          </a:ln>
-        </p:spPr>
-      </p:sp>
-      <p:sp>
-        <p:nvSpPr>
-          <p:cNvPr id="20" name="Text 18"/>
-          <p:cNvSpPr/>
-          <p:nvPr/>
-        </p:nvSpPr>
-        <p:spPr>
-          <a:xfrm>
-            <a:off x="7863840" y="4069080"/>
-            <a:ext cx="3017520" cy="164592"/>
-          </a:xfrm>
-          <a:prstGeom prst="rect">
-            <a:avLst/>
-          </a:prstGeom>
-          <a:noFill/>
-          <a:ln/>
-        </p:spPr>
-        <p:txBody>
-          <a:bodyPr wrap="square" lIns="0" tIns="0" rIns="0" bIns="0" rtlCol="0" anchor="ctr"/>
-          <a:lstStyle/>
-          <a:p>
-            <a:pPr algn="ctr" indent="0" marL="0">
-              <a:buNone/>
-            </a:pPr>
-            <a:r>
-              <a:rPr lang="en-US" sz="900" b="1" dirty="0">
-                <a:solidFill>
-                  <a:srgbClr val="003A63"/>
-                </a:solidFill>
-                <a:latin typeface="Aptos" pitchFamily="34" charset="0"/>
-                <a:ea typeface="Aptos" pitchFamily="34" charset="-122"/>
-                <a:cs typeface="Aptos" pitchFamily="34" charset="-120"/>
-              </a:rPr>
-              <a:t>Decision rights</a:t>
-            </a:r>
-            <a:endParaRPr lang="en-US" sz="900" dirty="0"/>
-          </a:p>
-        </p:txBody>
-      </p:sp>
-      <p:sp>
-        <p:nvSpPr>
-          <p:cNvPr id="21" name="Shape 19"/>
           <p:cNvSpPr/>
           <p:nvPr/>
         </p:nvSpPr>
@@ -8455,7 +7881,7 @@
       </p:sp>
       <p:sp>
         <p:nvSpPr>
-          <p:cNvPr id="22" name="Text 20"/>
+          <p:cNvPr id="17" name="Text 15"/>
           <p:cNvSpPr/>
           <p:nvPr/>
         </p:nvSpPr>
@@ -8494,7 +7920,7 @@
       </p:sp>
       <p:sp>
         <p:nvSpPr>
-          <p:cNvPr id="23" name="Text 21"/>
+          <p:cNvPr id="18" name="Text 16"/>
           <p:cNvSpPr/>
           <p:nvPr/>
         </p:nvSpPr>
@@ -8988,13 +8414,11 @@
             </a:avLst>
           </a:prstGeom>
           <a:solidFill>
-            <a:srgbClr val="FFFFFF">
-              <a:alpha val="88000"/>
-            </a:srgbClr>
+            <a:srgbClr val="FFFFFF"/>
           </a:solidFill>
           <a:ln w="12700">
             <a:solidFill>
-              <a:srgbClr val="D6E8F2"/>
+              <a:srgbClr val="B9D7E6"/>
             </a:solidFill>
             <a:prstDash val="solid"/>
           </a:ln>
@@ -9002,190 +8426,98 @@
       </p:sp>
       <p:sp>
         <p:nvSpPr>
-          <p:cNvPr id="14" name="Shape 12"/>
-          <p:cNvSpPr/>
-          <p:nvPr/>
-        </p:nvSpPr>
-        <p:spPr>
-          <a:xfrm>
-            <a:off x="7891272" y="3108960"/>
-            <a:ext cx="566928" cy="566928"/>
-          </a:xfrm>
-          <a:prstGeom prst="ellipse">
-            <a:avLst/>
-          </a:prstGeom>
-          <a:solidFill>
-            <a:srgbClr val="0068B7"/>
-          </a:solidFill>
-          <a:ln w="12700">
-            <a:solidFill>
-              <a:srgbClr val="0068B7"/>
-            </a:solidFill>
-            <a:prstDash val="solid"/>
-          </a:ln>
-        </p:spPr>
-      </p:sp>
-      <p:sp>
-        <p:nvSpPr>
-          <p:cNvPr id="15" name="Shape 13"/>
-          <p:cNvSpPr/>
-          <p:nvPr/>
-        </p:nvSpPr>
-        <p:spPr>
-          <a:xfrm>
-            <a:off x="10287000" y="3108960"/>
-            <a:ext cx="566928" cy="566928"/>
-          </a:xfrm>
-          <a:prstGeom prst="ellipse">
-            <a:avLst/>
-          </a:prstGeom>
-          <a:solidFill>
-            <a:srgbClr val="2F8A28"/>
-          </a:solidFill>
-          <a:ln w="12700">
-            <a:solidFill>
-              <a:srgbClr val="2F8A28"/>
-            </a:solidFill>
-            <a:prstDash val="solid"/>
-          </a:ln>
-        </p:spPr>
+          <p:cNvPr id="14" name="Text 12"/>
+          <p:cNvSpPr/>
+          <p:nvPr/>
+        </p:nvSpPr>
+        <p:spPr>
+          <a:xfrm>
+            <a:off x="7799832" y="2935224"/>
+            <a:ext cx="3145536" cy="256032"/>
+          </a:xfrm>
+          <a:prstGeom prst="rect">
+            <a:avLst/>
+          </a:prstGeom>
+          <a:noFill/>
+          <a:ln/>
+        </p:spPr>
+        <p:txBody>
+          <a:bodyPr wrap="square" lIns="0" tIns="0" rIns="0" bIns="0" rtlCol="0" anchor="ctr"/>
+          <a:lstStyle/>
+          <a:p>
+            <a:pPr indent="0" marL="0">
+              <a:buNone/>
+            </a:pPr>
+            <a:r>
+              <a:rPr lang="en-US" sz="1300" b="1" dirty="0">
+                <a:solidFill>
+                  <a:srgbClr val="0068B7"/>
+                </a:solidFill>
+                <a:latin typeface="Aptos" pitchFamily="34" charset="0"/>
+                <a:ea typeface="Aptos" pitchFamily="34" charset="-122"/>
+                <a:cs typeface="Aptos" pitchFamily="34" charset="-120"/>
+              </a:rPr>
+              <a:t>Concept checkpoints</a:t>
+            </a:r>
+            <a:endParaRPr lang="en-US" sz="1300" dirty="0"/>
+          </a:p>
+        </p:txBody>
+      </p:sp>
+      <p:sp>
+        <p:nvSpPr>
+          <p:cNvPr id="15" name="Text 13"/>
+          <p:cNvSpPr/>
+          <p:nvPr/>
+        </p:nvSpPr>
+        <p:spPr>
+          <a:xfrm>
+            <a:off x="7818120" y="3300984"/>
+            <a:ext cx="3090672" cy="877824"/>
+          </a:xfrm>
+          <a:prstGeom prst="rect">
+            <a:avLst/>
+          </a:prstGeom>
+          <a:noFill/>
+          <a:ln/>
+        </p:spPr>
+        <p:txBody>
+          <a:bodyPr wrap="square" lIns="254" tIns="254" rIns="254" bIns="254" rtlCol="0" anchor="t">
+            <a:normAutofit/>
+          </a:bodyPr>
+          <a:lstStyle/>
+          <a:p>
+            <a:r>
+              <a:rPr lang="en-US" sz="1380" dirty="0">
+                <a:solidFill>
+                  <a:srgbClr val="17364A"/>
+                </a:solidFill>
+                <a:latin typeface="Aptos" pitchFamily="34" charset="0"/>
+                <a:ea typeface="Aptos" pitchFamily="34" charset="-122"/>
+                <a:cs typeface="Aptos" pitchFamily="34" charset="-120"/>
+              </a:rPr>
+              <a:t>Create a public health AI policy scan and regulatory readiness memo.</a:t>
+            </a:r>
+            <a:endParaRPr lang="en-US" sz="1380" dirty="0"/>
+          </a:p>
+          <a:p>
+            <a:r>
+              <a:rPr lang="en-US" sz="1380" dirty="0">
+                <a:solidFill>
+                  <a:srgbClr val="17364A"/>
+                </a:solidFill>
+                <a:latin typeface="Aptos" pitchFamily="34" charset="0"/>
+                <a:ea typeface="Aptos" pitchFamily="34" charset="-122"/>
+                <a:cs typeface="Aptos" pitchFamily="34" charset="-120"/>
+              </a:rPr>
+              <a:t>Identify relevant policy domains, sources to monitor, current agency policy gaps, likely.</a:t>
+            </a:r>
+            <a:endParaRPr lang="en-US" sz="1380" dirty="0"/>
+          </a:p>
+        </p:txBody>
       </p:sp>
       <p:sp>
         <p:nvSpPr>
           <p:cNvPr id="16" name="Shape 14"/>
-          <p:cNvSpPr/>
-          <p:nvPr/>
-        </p:nvSpPr>
-        <p:spPr>
-          <a:xfrm>
-            <a:off x="9089136" y="3456432"/>
-            <a:ext cx="566928" cy="566928"/>
-          </a:xfrm>
-          <a:prstGeom prst="ellipse">
-            <a:avLst/>
-          </a:prstGeom>
-          <a:solidFill>
-            <a:srgbClr val="6A4CA3"/>
-          </a:solidFill>
-          <a:ln w="12700">
-            <a:solidFill>
-              <a:srgbClr val="6A4CA3"/>
-            </a:solidFill>
-            <a:prstDash val="solid"/>
-          </a:ln>
-        </p:spPr>
-      </p:sp>
-      <p:sp>
-        <p:nvSpPr>
-          <p:cNvPr id="17" name="Shape 15"/>
-          <p:cNvSpPr/>
-          <p:nvPr/>
-        </p:nvSpPr>
-        <p:spPr>
-          <a:xfrm>
-            <a:off x="8385048" y="3419856"/>
-            <a:ext cx="1975104" cy="0"/>
-          </a:xfrm>
-          <a:prstGeom prst="line">
-            <a:avLst/>
-          </a:prstGeom>
-          <a:noFill/>
-          <a:ln w="25400">
-            <a:solidFill>
-              <a:srgbClr val="8ABBD8"/>
-            </a:solidFill>
-            <a:prstDash val="solid"/>
-          </a:ln>
-        </p:spPr>
-      </p:sp>
-      <p:sp>
-        <p:nvSpPr>
-          <p:cNvPr id="18" name="Shape 16"/>
-          <p:cNvSpPr/>
-          <p:nvPr/>
-        </p:nvSpPr>
-        <p:spPr>
-          <a:xfrm>
-            <a:off x="8202168" y="3630168"/>
-            <a:ext cx="1170432" cy="118872"/>
-          </a:xfrm>
-          <a:prstGeom prst="line">
-            <a:avLst/>
-          </a:prstGeom>
-          <a:noFill/>
-          <a:ln w="25400">
-            <a:solidFill>
-              <a:srgbClr val="8ABBD8"/>
-            </a:solidFill>
-            <a:prstDash val="solid"/>
-          </a:ln>
-        </p:spPr>
-      </p:sp>
-      <p:sp>
-        <p:nvSpPr>
-          <p:cNvPr id="19" name="Shape 17"/>
-          <p:cNvSpPr/>
-          <p:nvPr/>
-        </p:nvSpPr>
-        <p:spPr>
-          <a:xfrm>
-            <a:off x="10543032" y="3630168"/>
-            <a:ext cx="-1170432" cy="118872"/>
-          </a:xfrm>
-          <a:prstGeom prst="line">
-            <a:avLst/>
-          </a:prstGeom>
-          <a:noFill/>
-          <a:ln w="25400">
-            <a:solidFill>
-              <a:srgbClr val="8ABBD8"/>
-            </a:solidFill>
-            <a:prstDash val="solid"/>
-          </a:ln>
-        </p:spPr>
-      </p:sp>
-      <p:sp>
-        <p:nvSpPr>
-          <p:cNvPr id="20" name="Text 18"/>
-          <p:cNvSpPr/>
-          <p:nvPr/>
-        </p:nvSpPr>
-        <p:spPr>
-          <a:xfrm>
-            <a:off x="7863840" y="4069080"/>
-            <a:ext cx="3017520" cy="164592"/>
-          </a:xfrm>
-          <a:prstGeom prst="rect">
-            <a:avLst/>
-          </a:prstGeom>
-          <a:noFill/>
-          <a:ln/>
-        </p:spPr>
-        <p:txBody>
-          <a:bodyPr wrap="square" lIns="0" tIns="0" rIns="0" bIns="0" rtlCol="0" anchor="ctr"/>
-          <a:lstStyle/>
-          <a:p>
-            <a:pPr algn="ctr" indent="0" marL="0">
-              <a:buNone/>
-            </a:pPr>
-            <a:r>
-              <a:rPr lang="en-US" sz="900" b="1" dirty="0">
-                <a:solidFill>
-                  <a:srgbClr val="003A63"/>
-                </a:solidFill>
-                <a:latin typeface="Aptos" pitchFamily="34" charset="0"/>
-                <a:ea typeface="Aptos" pitchFamily="34" charset="-122"/>
-                <a:cs typeface="Aptos" pitchFamily="34" charset="-120"/>
-              </a:rPr>
-              <a:t>Decision rights</a:t>
-            </a:r>
-            <a:endParaRPr lang="en-US" sz="900" dirty="0"/>
-          </a:p>
-        </p:txBody>
-      </p:sp>
-      <p:sp>
-        <p:nvSpPr>
-          <p:cNvPr id="21" name="Shape 19"/>
           <p:cNvSpPr/>
           <p:nvPr/>
         </p:nvSpPr>
@@ -9212,7 +8544,7 @@
       </p:sp>
       <p:sp>
         <p:nvSpPr>
-          <p:cNvPr id="22" name="Text 20"/>
+          <p:cNvPr id="17" name="Text 15"/>
           <p:cNvSpPr/>
           <p:nvPr/>
         </p:nvSpPr>
@@ -9251,7 +8583,7 @@
       </p:sp>
       <p:sp>
         <p:nvSpPr>
-          <p:cNvPr id="23" name="Text 21"/>
+          <p:cNvPr id="18" name="Text 16"/>
           <p:cNvSpPr/>
           <p:nvPr/>
         </p:nvSpPr>
@@ -9759,13 +9091,11 @@
             </a:avLst>
           </a:prstGeom>
           <a:solidFill>
-            <a:srgbClr val="FFFFFF">
-              <a:alpha val="88000"/>
-            </a:srgbClr>
+            <a:srgbClr val="FFFFFF"/>
           </a:solidFill>
           <a:ln w="12700">
             <a:solidFill>
-              <a:srgbClr val="D6E8F2"/>
+              <a:srgbClr val="B9D7E6"/>
             </a:solidFill>
             <a:prstDash val="solid"/>
           </a:ln>
@@ -9773,190 +9103,112 @@
       </p:sp>
       <p:sp>
         <p:nvSpPr>
-          <p:cNvPr id="14" name="Shape 12"/>
-          <p:cNvSpPr/>
-          <p:nvPr/>
-        </p:nvSpPr>
-        <p:spPr>
-          <a:xfrm>
-            <a:off x="7891272" y="3108960"/>
-            <a:ext cx="566928" cy="566928"/>
-          </a:xfrm>
-          <a:prstGeom prst="ellipse">
-            <a:avLst/>
-          </a:prstGeom>
-          <a:solidFill>
-            <a:srgbClr val="0068B7"/>
-          </a:solidFill>
-          <a:ln w="12700">
-            <a:solidFill>
-              <a:srgbClr val="0068B7"/>
-            </a:solidFill>
-            <a:prstDash val="solid"/>
-          </a:ln>
-        </p:spPr>
-      </p:sp>
-      <p:sp>
-        <p:nvSpPr>
-          <p:cNvPr id="15" name="Shape 13"/>
-          <p:cNvSpPr/>
-          <p:nvPr/>
-        </p:nvSpPr>
-        <p:spPr>
-          <a:xfrm>
-            <a:off x="10287000" y="3108960"/>
-            <a:ext cx="566928" cy="566928"/>
-          </a:xfrm>
-          <a:prstGeom prst="ellipse">
-            <a:avLst/>
-          </a:prstGeom>
-          <a:solidFill>
-            <a:srgbClr val="2F8A28"/>
-          </a:solidFill>
-          <a:ln w="12700">
-            <a:solidFill>
-              <a:srgbClr val="2F8A28"/>
-            </a:solidFill>
-            <a:prstDash val="solid"/>
-          </a:ln>
-        </p:spPr>
+          <p:cNvPr id="14" name="Text 12"/>
+          <p:cNvSpPr/>
+          <p:nvPr/>
+        </p:nvSpPr>
+        <p:spPr>
+          <a:xfrm>
+            <a:off x="7799832" y="2935224"/>
+            <a:ext cx="3145536" cy="256032"/>
+          </a:xfrm>
+          <a:prstGeom prst="rect">
+            <a:avLst/>
+          </a:prstGeom>
+          <a:noFill/>
+          <a:ln/>
+        </p:spPr>
+        <p:txBody>
+          <a:bodyPr wrap="square" lIns="0" tIns="0" rIns="0" bIns="0" rtlCol="0" anchor="ctr"/>
+          <a:lstStyle/>
+          <a:p>
+            <a:pPr indent="0" marL="0">
+              <a:buNone/>
+            </a:pPr>
+            <a:r>
+              <a:rPr lang="en-US" sz="1300" b="1" dirty="0">
+                <a:solidFill>
+                  <a:srgbClr val="0068B7"/>
+                </a:solidFill>
+                <a:latin typeface="Aptos" pitchFamily="34" charset="0"/>
+                <a:ea typeface="Aptos" pitchFamily="34" charset="-122"/>
+                <a:cs typeface="Aptos" pitchFamily="34" charset="-120"/>
+              </a:rPr>
+              <a:t>Concept checkpoints</a:t>
+            </a:r>
+            <a:endParaRPr lang="en-US" sz="1300" dirty="0"/>
+          </a:p>
+        </p:txBody>
+      </p:sp>
+      <p:sp>
+        <p:nvSpPr>
+          <p:cNvPr id="15" name="Text 13"/>
+          <p:cNvSpPr/>
+          <p:nvPr/>
+        </p:nvSpPr>
+        <p:spPr>
+          <a:xfrm>
+            <a:off x="7818120" y="3300984"/>
+            <a:ext cx="3090672" cy="877824"/>
+          </a:xfrm>
+          <a:prstGeom prst="rect">
+            <a:avLst/>
+          </a:prstGeom>
+          <a:noFill/>
+          <a:ln/>
+        </p:spPr>
+        <p:txBody>
+          <a:bodyPr wrap="square" lIns="254" tIns="254" rIns="254" bIns="254" rtlCol="0" anchor="t">
+            <a:normAutofit/>
+          </a:bodyPr>
+          <a:lstStyle/>
+          <a:p>
+            <a:r>
+              <a:rPr lang="en-US" sz="1380" dirty="0">
+                <a:solidFill>
+                  <a:srgbClr val="17364A"/>
+                </a:solidFill>
+                <a:latin typeface="Aptos" pitchFamily="34" charset="0"/>
+                <a:ea typeface="Aptos" pitchFamily="34" charset="-122"/>
+                <a:cs typeface="Aptos" pitchFamily="34" charset="-120"/>
+              </a:rPr>
+              <a:t>AI policy scan plan</a:t>
+            </a:r>
+            <a:endParaRPr lang="en-US" sz="1380" dirty="0"/>
+          </a:p>
+          <a:p>
+            <a:r>
+              <a:rPr lang="en-US" sz="1380" dirty="0">
+                <a:solidFill>
+                  <a:srgbClr val="17364A"/>
+                </a:solidFill>
+                <a:latin typeface="Aptos" pitchFamily="34" charset="0"/>
+                <a:ea typeface="Aptos" pitchFamily="34" charset="-122"/>
+                <a:cs typeface="Aptos" pitchFamily="34" charset="-120"/>
+              </a:rPr>
+              <a:t>Regulatory readiness memo</a:t>
+            </a:r>
+            <a:endParaRPr lang="en-US" sz="1380" dirty="0"/>
+          </a:p>
+          <a:p>
+            <a:r>
+              <a:rPr lang="en-US" sz="1380" dirty="0">
+                <a:solidFill>
+                  <a:srgbClr val="17364A"/>
+                </a:solidFill>
+                <a:latin typeface="Aptos" pitchFamily="34" charset="0"/>
+                <a:ea typeface="Aptos" pitchFamily="34" charset="-122"/>
+                <a:cs typeface="Aptos" pitchFamily="34" charset="-120"/>
+              </a:rPr>
+              <a:t>Policy-domain crosswalk</a:t>
+            </a:r>
+            <a:endParaRPr lang="en-US" sz="1380" dirty="0"/>
+          </a:p>
+        </p:txBody>
       </p:sp>
       <p:sp>
         <p:nvSpPr>
           <p:cNvPr id="16" name="Shape 14"/>
-          <p:cNvSpPr/>
-          <p:nvPr/>
-        </p:nvSpPr>
-        <p:spPr>
-          <a:xfrm>
-            <a:off x="9089136" y="3456432"/>
-            <a:ext cx="566928" cy="566928"/>
-          </a:xfrm>
-          <a:prstGeom prst="ellipse">
-            <a:avLst/>
-          </a:prstGeom>
-          <a:solidFill>
-            <a:srgbClr val="6A4CA3"/>
-          </a:solidFill>
-          <a:ln w="12700">
-            <a:solidFill>
-              <a:srgbClr val="6A4CA3"/>
-            </a:solidFill>
-            <a:prstDash val="solid"/>
-          </a:ln>
-        </p:spPr>
-      </p:sp>
-      <p:sp>
-        <p:nvSpPr>
-          <p:cNvPr id="17" name="Shape 15"/>
-          <p:cNvSpPr/>
-          <p:nvPr/>
-        </p:nvSpPr>
-        <p:spPr>
-          <a:xfrm>
-            <a:off x="8385048" y="3419856"/>
-            <a:ext cx="1975104" cy="0"/>
-          </a:xfrm>
-          <a:prstGeom prst="line">
-            <a:avLst/>
-          </a:prstGeom>
-          <a:noFill/>
-          <a:ln w="25400">
-            <a:solidFill>
-              <a:srgbClr val="8ABBD8"/>
-            </a:solidFill>
-            <a:prstDash val="solid"/>
-          </a:ln>
-        </p:spPr>
-      </p:sp>
-      <p:sp>
-        <p:nvSpPr>
-          <p:cNvPr id="18" name="Shape 16"/>
-          <p:cNvSpPr/>
-          <p:nvPr/>
-        </p:nvSpPr>
-        <p:spPr>
-          <a:xfrm>
-            <a:off x="8202168" y="3630168"/>
-            <a:ext cx="1170432" cy="118872"/>
-          </a:xfrm>
-          <a:prstGeom prst="line">
-            <a:avLst/>
-          </a:prstGeom>
-          <a:noFill/>
-          <a:ln w="25400">
-            <a:solidFill>
-              <a:srgbClr val="8ABBD8"/>
-            </a:solidFill>
-            <a:prstDash val="solid"/>
-          </a:ln>
-        </p:spPr>
-      </p:sp>
-      <p:sp>
-        <p:nvSpPr>
-          <p:cNvPr id="19" name="Shape 17"/>
-          <p:cNvSpPr/>
-          <p:nvPr/>
-        </p:nvSpPr>
-        <p:spPr>
-          <a:xfrm>
-            <a:off x="10543032" y="3630168"/>
-            <a:ext cx="-1170432" cy="118872"/>
-          </a:xfrm>
-          <a:prstGeom prst="line">
-            <a:avLst/>
-          </a:prstGeom>
-          <a:noFill/>
-          <a:ln w="25400">
-            <a:solidFill>
-              <a:srgbClr val="8ABBD8"/>
-            </a:solidFill>
-            <a:prstDash val="solid"/>
-          </a:ln>
-        </p:spPr>
-      </p:sp>
-      <p:sp>
-        <p:nvSpPr>
-          <p:cNvPr id="20" name="Text 18"/>
-          <p:cNvSpPr/>
-          <p:nvPr/>
-        </p:nvSpPr>
-        <p:spPr>
-          <a:xfrm>
-            <a:off x="7863840" y="4069080"/>
-            <a:ext cx="3017520" cy="164592"/>
-          </a:xfrm>
-          <a:prstGeom prst="rect">
-            <a:avLst/>
-          </a:prstGeom>
-          <a:noFill/>
-          <a:ln/>
-        </p:spPr>
-        <p:txBody>
-          <a:bodyPr wrap="square" lIns="0" tIns="0" rIns="0" bIns="0" rtlCol="0" anchor="ctr"/>
-          <a:lstStyle/>
-          <a:p>
-            <a:pPr algn="ctr" indent="0" marL="0">
-              <a:buNone/>
-            </a:pPr>
-            <a:r>
-              <a:rPr lang="en-US" sz="900" b="1" dirty="0">
-                <a:solidFill>
-                  <a:srgbClr val="003A63"/>
-                </a:solidFill>
-                <a:latin typeface="Aptos" pitchFamily="34" charset="0"/>
-                <a:ea typeface="Aptos" pitchFamily="34" charset="-122"/>
-                <a:cs typeface="Aptos" pitchFamily="34" charset="-120"/>
-              </a:rPr>
-              <a:t>Decision rights</a:t>
-            </a:r>
-            <a:endParaRPr lang="en-US" sz="900" dirty="0"/>
-          </a:p>
-        </p:txBody>
-      </p:sp>
-      <p:sp>
-        <p:nvSpPr>
-          <p:cNvPr id="21" name="Shape 19"/>
           <p:cNvSpPr/>
           <p:nvPr/>
         </p:nvSpPr>
@@ -9983,7 +9235,7 @@
       </p:sp>
       <p:sp>
         <p:nvSpPr>
-          <p:cNvPr id="22" name="Text 20"/>
+          <p:cNvPr id="17" name="Text 15"/>
           <p:cNvSpPr/>
           <p:nvPr/>
         </p:nvSpPr>
@@ -10022,7 +9274,7 @@
       </p:sp>
       <p:sp>
         <p:nvSpPr>
-          <p:cNvPr id="23" name="Text 21"/>
+          <p:cNvPr id="18" name="Text 16"/>
           <p:cNvSpPr/>
           <p:nvPr/>
         </p:nvSpPr>
@@ -10516,13 +9768,11 @@
             </a:avLst>
           </a:prstGeom>
           <a:solidFill>
-            <a:srgbClr val="FFFFFF">
-              <a:alpha val="88000"/>
-            </a:srgbClr>
+            <a:srgbClr val="FFFFFF"/>
           </a:solidFill>
           <a:ln w="12700">
             <a:solidFill>
-              <a:srgbClr val="D6E8F2"/>
+              <a:srgbClr val="B9D7E6"/>
             </a:solidFill>
             <a:prstDash val="solid"/>
           </a:ln>
@@ -10530,190 +9780,98 @@
       </p:sp>
       <p:sp>
         <p:nvSpPr>
-          <p:cNvPr id="14" name="Shape 12"/>
-          <p:cNvSpPr/>
-          <p:nvPr/>
-        </p:nvSpPr>
-        <p:spPr>
-          <a:xfrm>
-            <a:off x="7891272" y="3108960"/>
-            <a:ext cx="566928" cy="566928"/>
-          </a:xfrm>
-          <a:prstGeom prst="ellipse">
-            <a:avLst/>
-          </a:prstGeom>
-          <a:solidFill>
-            <a:srgbClr val="0068B7"/>
-          </a:solidFill>
-          <a:ln w="12700">
-            <a:solidFill>
-              <a:srgbClr val="0068B7"/>
-            </a:solidFill>
-            <a:prstDash val="solid"/>
-          </a:ln>
-        </p:spPr>
-      </p:sp>
-      <p:sp>
-        <p:nvSpPr>
-          <p:cNvPr id="15" name="Shape 13"/>
-          <p:cNvSpPr/>
-          <p:nvPr/>
-        </p:nvSpPr>
-        <p:spPr>
-          <a:xfrm>
-            <a:off x="10287000" y="3108960"/>
-            <a:ext cx="566928" cy="566928"/>
-          </a:xfrm>
-          <a:prstGeom prst="ellipse">
-            <a:avLst/>
-          </a:prstGeom>
-          <a:solidFill>
-            <a:srgbClr val="2F8A28"/>
-          </a:solidFill>
-          <a:ln w="12700">
-            <a:solidFill>
-              <a:srgbClr val="2F8A28"/>
-            </a:solidFill>
-            <a:prstDash val="solid"/>
-          </a:ln>
-        </p:spPr>
+          <p:cNvPr id="14" name="Text 12"/>
+          <p:cNvSpPr/>
+          <p:nvPr/>
+        </p:nvSpPr>
+        <p:spPr>
+          <a:xfrm>
+            <a:off x="7799832" y="2935224"/>
+            <a:ext cx="3145536" cy="256032"/>
+          </a:xfrm>
+          <a:prstGeom prst="rect">
+            <a:avLst/>
+          </a:prstGeom>
+          <a:noFill/>
+          <a:ln/>
+        </p:spPr>
+        <p:txBody>
+          <a:bodyPr wrap="square" lIns="0" tIns="0" rIns="0" bIns="0" rtlCol="0" anchor="ctr"/>
+          <a:lstStyle/>
+          <a:p>
+            <a:pPr indent="0" marL="0">
+              <a:buNone/>
+            </a:pPr>
+            <a:r>
+              <a:rPr lang="en-US" sz="1300" b="1" dirty="0">
+                <a:solidFill>
+                  <a:srgbClr val="0068B7"/>
+                </a:solidFill>
+                <a:latin typeface="Aptos" pitchFamily="34" charset="0"/>
+                <a:ea typeface="Aptos" pitchFamily="34" charset="-122"/>
+                <a:cs typeface="Aptos" pitchFamily="34" charset="-120"/>
+              </a:rPr>
+              <a:t>Concept checkpoints</a:t>
+            </a:r>
+            <a:endParaRPr lang="en-US" sz="1300" dirty="0"/>
+          </a:p>
+        </p:txBody>
+      </p:sp>
+      <p:sp>
+        <p:nvSpPr>
+          <p:cNvPr id="15" name="Text 13"/>
+          <p:cNvSpPr/>
+          <p:nvPr/>
+        </p:nvSpPr>
+        <p:spPr>
+          <a:xfrm>
+            <a:off x="7818120" y="3300984"/>
+            <a:ext cx="3090672" cy="877824"/>
+          </a:xfrm>
+          <a:prstGeom prst="rect">
+            <a:avLst/>
+          </a:prstGeom>
+          <a:noFill/>
+          <a:ln/>
+        </p:spPr>
+        <p:txBody>
+          <a:bodyPr wrap="square" lIns="254" tIns="254" rIns="254" bIns="254" rtlCol="0" anchor="t">
+            <a:normAutofit/>
+          </a:bodyPr>
+          <a:lstStyle/>
+          <a:p>
+            <a:r>
+              <a:rPr lang="en-US" sz="1380" dirty="0">
+                <a:solidFill>
+                  <a:srgbClr val="17364A"/>
+                </a:solidFill>
+                <a:latin typeface="Aptos" pitchFamily="34" charset="0"/>
+                <a:ea typeface="Aptos" pitchFamily="34" charset="-122"/>
+                <a:cs typeface="Aptos" pitchFamily="34" charset="-120"/>
+              </a:rPr>
+              <a:t>Recommended policy updates</a:t>
+            </a:r>
+            <a:endParaRPr lang="en-US" sz="1380" dirty="0"/>
+          </a:p>
+          <a:p>
+            <a:r>
+              <a:rPr lang="en-US" sz="1380" dirty="0">
+                <a:solidFill>
+                  <a:srgbClr val="17364A"/>
+                </a:solidFill>
+                <a:latin typeface="Aptos" pitchFamily="34" charset="0"/>
+                <a:ea typeface="Aptos" pitchFamily="34" charset="-122"/>
+                <a:cs typeface="Aptos" pitchFamily="34" charset="-120"/>
+              </a:rPr>
+              <a:t>Ongoing monitoring process</a:t>
+            </a:r>
+            <a:endParaRPr lang="en-US" sz="1380" dirty="0"/>
+          </a:p>
+        </p:txBody>
       </p:sp>
       <p:sp>
         <p:nvSpPr>
           <p:cNvPr id="16" name="Shape 14"/>
-          <p:cNvSpPr/>
-          <p:nvPr/>
-        </p:nvSpPr>
-        <p:spPr>
-          <a:xfrm>
-            <a:off x="9089136" y="3456432"/>
-            <a:ext cx="566928" cy="566928"/>
-          </a:xfrm>
-          <a:prstGeom prst="ellipse">
-            <a:avLst/>
-          </a:prstGeom>
-          <a:solidFill>
-            <a:srgbClr val="6A4CA3"/>
-          </a:solidFill>
-          <a:ln w="12700">
-            <a:solidFill>
-              <a:srgbClr val="6A4CA3"/>
-            </a:solidFill>
-            <a:prstDash val="solid"/>
-          </a:ln>
-        </p:spPr>
-      </p:sp>
-      <p:sp>
-        <p:nvSpPr>
-          <p:cNvPr id="17" name="Shape 15"/>
-          <p:cNvSpPr/>
-          <p:nvPr/>
-        </p:nvSpPr>
-        <p:spPr>
-          <a:xfrm>
-            <a:off x="8385048" y="3419856"/>
-            <a:ext cx="1975104" cy="0"/>
-          </a:xfrm>
-          <a:prstGeom prst="line">
-            <a:avLst/>
-          </a:prstGeom>
-          <a:noFill/>
-          <a:ln w="25400">
-            <a:solidFill>
-              <a:srgbClr val="8ABBD8"/>
-            </a:solidFill>
-            <a:prstDash val="solid"/>
-          </a:ln>
-        </p:spPr>
-      </p:sp>
-      <p:sp>
-        <p:nvSpPr>
-          <p:cNvPr id="18" name="Shape 16"/>
-          <p:cNvSpPr/>
-          <p:nvPr/>
-        </p:nvSpPr>
-        <p:spPr>
-          <a:xfrm>
-            <a:off x="8202168" y="3630168"/>
-            <a:ext cx="1170432" cy="118872"/>
-          </a:xfrm>
-          <a:prstGeom prst="line">
-            <a:avLst/>
-          </a:prstGeom>
-          <a:noFill/>
-          <a:ln w="25400">
-            <a:solidFill>
-              <a:srgbClr val="8ABBD8"/>
-            </a:solidFill>
-            <a:prstDash val="solid"/>
-          </a:ln>
-        </p:spPr>
-      </p:sp>
-      <p:sp>
-        <p:nvSpPr>
-          <p:cNvPr id="19" name="Shape 17"/>
-          <p:cNvSpPr/>
-          <p:nvPr/>
-        </p:nvSpPr>
-        <p:spPr>
-          <a:xfrm>
-            <a:off x="10543032" y="3630168"/>
-            <a:ext cx="-1170432" cy="118872"/>
-          </a:xfrm>
-          <a:prstGeom prst="line">
-            <a:avLst/>
-          </a:prstGeom>
-          <a:noFill/>
-          <a:ln w="25400">
-            <a:solidFill>
-              <a:srgbClr val="8ABBD8"/>
-            </a:solidFill>
-            <a:prstDash val="solid"/>
-          </a:ln>
-        </p:spPr>
-      </p:sp>
-      <p:sp>
-        <p:nvSpPr>
-          <p:cNvPr id="20" name="Text 18"/>
-          <p:cNvSpPr/>
-          <p:nvPr/>
-        </p:nvSpPr>
-        <p:spPr>
-          <a:xfrm>
-            <a:off x="7863840" y="4069080"/>
-            <a:ext cx="3017520" cy="164592"/>
-          </a:xfrm>
-          <a:prstGeom prst="rect">
-            <a:avLst/>
-          </a:prstGeom>
-          <a:noFill/>
-          <a:ln/>
-        </p:spPr>
-        <p:txBody>
-          <a:bodyPr wrap="square" lIns="0" tIns="0" rIns="0" bIns="0" rtlCol="0" anchor="ctr"/>
-          <a:lstStyle/>
-          <a:p>
-            <a:pPr algn="ctr" indent="0" marL="0">
-              <a:buNone/>
-            </a:pPr>
-            <a:r>
-              <a:rPr lang="en-US" sz="900" b="1" dirty="0">
-                <a:solidFill>
-                  <a:srgbClr val="003A63"/>
-                </a:solidFill>
-                <a:latin typeface="Aptos" pitchFamily="34" charset="0"/>
-                <a:ea typeface="Aptos" pitchFamily="34" charset="-122"/>
-                <a:cs typeface="Aptos" pitchFamily="34" charset="-120"/>
-              </a:rPr>
-              <a:t>Decision rights</a:t>
-            </a:r>
-            <a:endParaRPr lang="en-US" sz="900" dirty="0"/>
-          </a:p>
-        </p:txBody>
-      </p:sp>
-      <p:sp>
-        <p:nvSpPr>
-          <p:cNvPr id="21" name="Shape 19"/>
           <p:cNvSpPr/>
           <p:nvPr/>
         </p:nvSpPr>
@@ -10740,7 +9898,7 @@
       </p:sp>
       <p:sp>
         <p:nvSpPr>
-          <p:cNvPr id="22" name="Text 20"/>
+          <p:cNvPr id="17" name="Text 15"/>
           <p:cNvSpPr/>
           <p:nvPr/>
         </p:nvSpPr>
@@ -10779,7 +9937,7 @@
       </p:sp>
       <p:sp>
         <p:nvSpPr>
-          <p:cNvPr id="23" name="Text 21"/>
+          <p:cNvPr id="18" name="Text 16"/>
           <p:cNvSpPr/>
           <p:nvPr/>
         </p:nvSpPr>
@@ -11312,20 +10470,20 @@
         </p:nvSpPr>
         <p:spPr>
           <a:xfrm>
-            <a:off x="7635240" y="3730752"/>
-            <a:ext cx="1033272" cy="749808"/>
+            <a:off x="7909560" y="3675888"/>
+            <a:ext cx="3154680" cy="1691640"/>
           </a:xfrm>
           <a:prstGeom prst="roundRect">
             <a:avLst>
-              <a:gd name="adj" fmla="val 14634"/>
+              <a:gd name="adj" fmla="val 6486"/>
             </a:avLst>
           </a:prstGeom>
           <a:solidFill>
-            <a:srgbClr val="0068B7"/>
+            <a:srgbClr val="FFFFFF"/>
           </a:solidFill>
           <a:ln w="12700">
             <a:solidFill>
-              <a:srgbClr val="0068B7"/>
+              <a:srgbClr val="B9D7E6"/>
             </a:solidFill>
             <a:prstDash val="solid"/>
           </a:ln>
@@ -11339,172 +10497,100 @@
         </p:nvSpPr>
         <p:spPr>
           <a:xfrm>
-            <a:off x="7708392" y="3922776"/>
-            <a:ext cx="886968" cy="310896"/>
-          </a:xfrm>
-          <a:prstGeom prst="rect">
-            <a:avLst/>
-          </a:prstGeom>
-          <a:noFill/>
-          <a:ln/>
-        </p:spPr>
-        <p:txBody>
-          <a:bodyPr wrap="square" lIns="0" tIns="0" rIns="0" bIns="0" rtlCol="0" anchor="ctr">
+            <a:off x="8074152" y="3822192"/>
+            <a:ext cx="2825496" cy="256032"/>
+          </a:xfrm>
+          <a:prstGeom prst="rect">
+            <a:avLst/>
+          </a:prstGeom>
+          <a:noFill/>
+          <a:ln/>
+        </p:spPr>
+        <p:txBody>
+          <a:bodyPr wrap="square" lIns="0" tIns="0" rIns="0" bIns="0" rtlCol="0" anchor="ctr"/>
+          <a:lstStyle/>
+          <a:p>
+            <a:pPr indent="0" marL="0">
+              <a:buNone/>
+            </a:pPr>
+            <a:r>
+              <a:rPr lang="en-US" sz="1300" b="1" dirty="0">
+                <a:solidFill>
+                  <a:srgbClr val="0068B7"/>
+                </a:solidFill>
+                <a:latin typeface="Aptos" pitchFamily="34" charset="0"/>
+                <a:ea typeface="Aptos" pitchFamily="34" charset="-122"/>
+                <a:cs typeface="Aptos" pitchFamily="34" charset="-120"/>
+              </a:rPr>
+              <a:t>Learning sequence</a:t>
+            </a:r>
+            <a:endParaRPr lang="en-US" sz="1300" dirty="0"/>
+          </a:p>
+        </p:txBody>
+      </p:sp>
+      <p:sp>
+        <p:nvSpPr>
+          <p:cNvPr id="15" name="Text 13"/>
+          <p:cNvSpPr/>
+          <p:nvPr/>
+        </p:nvSpPr>
+        <p:spPr>
+          <a:xfrm>
+            <a:off x="8092440" y="4187952"/>
+            <a:ext cx="2770632" cy="1033272"/>
+          </a:xfrm>
+          <a:prstGeom prst="rect">
+            <a:avLst/>
+          </a:prstGeom>
+          <a:noFill/>
+          <a:ln/>
+        </p:spPr>
+        <p:txBody>
+          <a:bodyPr wrap="square" lIns="254" tIns="254" rIns="254" bIns="254" rtlCol="0" anchor="t">
             <a:normAutofit/>
           </a:bodyPr>
           <a:lstStyle/>
           <a:p>
-            <a:pPr algn="ctr" indent="0" marL="0">
-              <a:buNone/>
-            </a:pPr>
-            <a:r>
-              <a:rPr lang="en-US" sz="1500" b="1" dirty="0">
-                <a:solidFill>
-                  <a:srgbClr val="FFFFFF"/>
-                </a:solidFill>
-                <a:latin typeface="Aptos" pitchFamily="34" charset="0"/>
-                <a:ea typeface="Aptos" pitchFamily="34" charset="-122"/>
-                <a:cs typeface="Aptos" pitchFamily="34" charset="-120"/>
-              </a:rPr>
-              <a:t>Learn</a:t>
-            </a:r>
-            <a:endParaRPr lang="en-US" sz="1500" dirty="0"/>
-          </a:p>
-        </p:txBody>
-      </p:sp>
-      <p:sp>
-        <p:nvSpPr>
-          <p:cNvPr id="15" name="Shape 13"/>
-          <p:cNvSpPr/>
-          <p:nvPr/>
-        </p:nvSpPr>
-        <p:spPr>
-          <a:xfrm>
-            <a:off x="8924544" y="3730752"/>
-            <a:ext cx="1033272" cy="749808"/>
-          </a:xfrm>
-          <a:prstGeom prst="roundRect">
-            <a:avLst>
-              <a:gd name="adj" fmla="val 14634"/>
-            </a:avLst>
-          </a:prstGeom>
-          <a:solidFill>
-            <a:srgbClr val="2F8A28"/>
-          </a:solidFill>
-          <a:ln w="12700">
-            <a:solidFill>
-              <a:srgbClr val="2F8A28"/>
-            </a:solidFill>
-            <a:prstDash val="solid"/>
-          </a:ln>
-        </p:spPr>
-      </p:sp>
-      <p:sp>
-        <p:nvSpPr>
-          <p:cNvPr id="16" name="Text 14"/>
-          <p:cNvSpPr/>
-          <p:nvPr/>
-        </p:nvSpPr>
-        <p:spPr>
-          <a:xfrm>
-            <a:off x="8997696" y="3922776"/>
-            <a:ext cx="886968" cy="310896"/>
-          </a:xfrm>
-          <a:prstGeom prst="rect">
-            <a:avLst/>
-          </a:prstGeom>
-          <a:noFill/>
-          <a:ln/>
-        </p:spPr>
-        <p:txBody>
-          <a:bodyPr wrap="square" lIns="0" tIns="0" rIns="0" bIns="0" rtlCol="0" anchor="ctr">
-            <a:normAutofit/>
-          </a:bodyPr>
-          <a:lstStyle/>
-          <a:p>
-            <a:pPr algn="ctr" indent="0" marL="0">
-              <a:buNone/>
-            </a:pPr>
-            <a:r>
-              <a:rPr lang="en-US" sz="1500" b="1" dirty="0">
-                <a:solidFill>
-                  <a:srgbClr val="FFFFFF"/>
-                </a:solidFill>
-                <a:latin typeface="Aptos" pitchFamily="34" charset="0"/>
-                <a:ea typeface="Aptos" pitchFamily="34" charset="-122"/>
-                <a:cs typeface="Aptos" pitchFamily="34" charset="-120"/>
-              </a:rPr>
-              <a:t>Apply</a:t>
-            </a:r>
-            <a:endParaRPr lang="en-US" sz="1500" dirty="0"/>
-          </a:p>
-        </p:txBody>
-      </p:sp>
-      <p:sp>
-        <p:nvSpPr>
-          <p:cNvPr id="17" name="Shape 15"/>
-          <p:cNvSpPr/>
-          <p:nvPr/>
-        </p:nvSpPr>
-        <p:spPr>
-          <a:xfrm>
-            <a:off x="10213848" y="3730752"/>
-            <a:ext cx="1033272" cy="749808"/>
-          </a:xfrm>
-          <a:prstGeom prst="roundRect">
-            <a:avLst>
-              <a:gd name="adj" fmla="val 14634"/>
-            </a:avLst>
-          </a:prstGeom>
-          <a:solidFill>
-            <a:srgbClr val="6A4CA3"/>
-          </a:solidFill>
-          <a:ln w="12700">
-            <a:solidFill>
-              <a:srgbClr val="6A4CA3"/>
-            </a:solidFill>
-            <a:prstDash val="solid"/>
-          </a:ln>
-        </p:spPr>
-      </p:sp>
-      <p:sp>
-        <p:nvSpPr>
-          <p:cNvPr id="18" name="Text 16"/>
-          <p:cNvSpPr/>
-          <p:nvPr/>
-        </p:nvSpPr>
-        <p:spPr>
-          <a:xfrm>
-            <a:off x="10287000" y="3922776"/>
-            <a:ext cx="886968" cy="310896"/>
-          </a:xfrm>
-          <a:prstGeom prst="rect">
-            <a:avLst/>
-          </a:prstGeom>
-          <a:noFill/>
-          <a:ln/>
-        </p:spPr>
-        <p:txBody>
-          <a:bodyPr wrap="square" lIns="0" tIns="0" rIns="0" bIns="0" rtlCol="0" anchor="ctr">
-            <a:normAutofit/>
-          </a:bodyPr>
-          <a:lstStyle/>
-          <a:p>
-            <a:pPr algn="ctr" indent="0" marL="0">
-              <a:buNone/>
-            </a:pPr>
-            <a:r>
-              <a:rPr lang="en-US" sz="1500" b="1" dirty="0">
-                <a:solidFill>
-                  <a:srgbClr val="FFFFFF"/>
-                </a:solidFill>
-                <a:latin typeface="Aptos" pitchFamily="34" charset="0"/>
-                <a:ea typeface="Aptos" pitchFamily="34" charset="-122"/>
-                <a:cs typeface="Aptos" pitchFamily="34" charset="-120"/>
-              </a:rPr>
-              <a:t>Document</a:t>
-            </a:r>
-            <a:endParaRPr lang="en-US" sz="1500" dirty="0"/>
+            <a:r>
+              <a:rPr lang="en-US" sz="1380" dirty="0">
+                <a:solidFill>
+                  <a:srgbClr val="17364A"/>
+                </a:solidFill>
+                <a:latin typeface="Aptos" pitchFamily="34" charset="0"/>
+                <a:ea typeface="Aptos" pitchFamily="34" charset="-122"/>
+                <a:cs typeface="Aptos" pitchFamily="34" charset="-120"/>
+              </a:rPr>
+              <a:t>Read the module for shared vocabulary and context.</a:t>
+            </a:r>
+            <a:endParaRPr lang="en-US" sz="1380" dirty="0"/>
+          </a:p>
+          <a:p>
+            <a:r>
+              <a:rPr lang="en-US" sz="1380" dirty="0">
+                <a:solidFill>
+                  <a:srgbClr val="17364A"/>
+                </a:solidFill>
+                <a:latin typeface="Aptos" pitchFamily="34" charset="0"/>
+                <a:ea typeface="Aptos" pitchFamily="34" charset="-122"/>
+                <a:cs typeface="Aptos" pitchFamily="34" charset="-120"/>
+              </a:rPr>
+              <a:t>Complete the practical exercise to apply the concept.</a:t>
+            </a:r>
+            <a:endParaRPr lang="en-US" sz="1380" dirty="0"/>
+          </a:p>
+          <a:p>
+            <a:r>
+              <a:rPr lang="en-US" sz="1380" dirty="0">
+                <a:solidFill>
+                  <a:srgbClr val="17364A"/>
+                </a:solidFill>
+                <a:latin typeface="Aptos" pitchFamily="34" charset="0"/>
+                <a:ea typeface="Aptos" pitchFamily="34" charset="-122"/>
+                <a:cs typeface="Aptos" pitchFamily="34" charset="-120"/>
+              </a:rPr>
+              <a:t>Use the notes and references for deeper review.</a:t>
+            </a:r>
+            <a:endParaRPr lang="en-US" sz="1380" dirty="0"/>
           </a:p>
         </p:txBody>
       </p:sp>
@@ -11977,13 +11063,11 @@
             </a:avLst>
           </a:prstGeom>
           <a:solidFill>
-            <a:srgbClr val="FFFFFF">
-              <a:alpha val="88000"/>
-            </a:srgbClr>
+            <a:srgbClr val="FFFFFF"/>
           </a:solidFill>
           <a:ln w="12700">
             <a:solidFill>
-              <a:srgbClr val="D6E8F2"/>
+              <a:srgbClr val="B9D7E6"/>
             </a:solidFill>
             <a:prstDash val="solid"/>
           </a:ln>
@@ -11991,190 +11075,98 @@
       </p:sp>
       <p:sp>
         <p:nvSpPr>
-          <p:cNvPr id="14" name="Shape 12"/>
-          <p:cNvSpPr/>
-          <p:nvPr/>
-        </p:nvSpPr>
-        <p:spPr>
-          <a:xfrm>
-            <a:off x="7891272" y="3108960"/>
-            <a:ext cx="566928" cy="566928"/>
-          </a:xfrm>
-          <a:prstGeom prst="ellipse">
-            <a:avLst/>
-          </a:prstGeom>
-          <a:solidFill>
-            <a:srgbClr val="0068B7"/>
-          </a:solidFill>
-          <a:ln w="12700">
-            <a:solidFill>
-              <a:srgbClr val="0068B7"/>
-            </a:solidFill>
-            <a:prstDash val="solid"/>
-          </a:ln>
-        </p:spPr>
-      </p:sp>
-      <p:sp>
-        <p:nvSpPr>
-          <p:cNvPr id="15" name="Shape 13"/>
-          <p:cNvSpPr/>
-          <p:nvPr/>
-        </p:nvSpPr>
-        <p:spPr>
-          <a:xfrm>
-            <a:off x="10287000" y="3108960"/>
-            <a:ext cx="566928" cy="566928"/>
-          </a:xfrm>
-          <a:prstGeom prst="ellipse">
-            <a:avLst/>
-          </a:prstGeom>
-          <a:solidFill>
-            <a:srgbClr val="2F8A28"/>
-          </a:solidFill>
-          <a:ln w="12700">
-            <a:solidFill>
-              <a:srgbClr val="2F8A28"/>
-            </a:solidFill>
-            <a:prstDash val="solid"/>
-          </a:ln>
-        </p:spPr>
+          <p:cNvPr id="14" name="Text 12"/>
+          <p:cNvSpPr/>
+          <p:nvPr/>
+        </p:nvSpPr>
+        <p:spPr>
+          <a:xfrm>
+            <a:off x="7799832" y="2935224"/>
+            <a:ext cx="3145536" cy="256032"/>
+          </a:xfrm>
+          <a:prstGeom prst="rect">
+            <a:avLst/>
+          </a:prstGeom>
+          <a:noFill/>
+          <a:ln/>
+        </p:spPr>
+        <p:txBody>
+          <a:bodyPr wrap="square" lIns="0" tIns="0" rIns="0" bIns="0" rtlCol="0" anchor="ctr"/>
+          <a:lstStyle/>
+          <a:p>
+            <a:pPr indent="0" marL="0">
+              <a:buNone/>
+            </a:pPr>
+            <a:r>
+              <a:rPr lang="en-US" sz="1300" b="1" dirty="0">
+                <a:solidFill>
+                  <a:srgbClr val="0068B7"/>
+                </a:solidFill>
+                <a:latin typeface="Aptos" pitchFamily="34" charset="0"/>
+                <a:ea typeface="Aptos" pitchFamily="34" charset="-122"/>
+                <a:cs typeface="Aptos" pitchFamily="34" charset="-120"/>
+              </a:rPr>
+              <a:t>Concept checkpoints</a:t>
+            </a:r>
+            <a:endParaRPr lang="en-US" sz="1300" dirty="0"/>
+          </a:p>
+        </p:txBody>
+      </p:sp>
+      <p:sp>
+        <p:nvSpPr>
+          <p:cNvPr id="15" name="Text 13"/>
+          <p:cNvSpPr/>
+          <p:nvPr/>
+        </p:nvSpPr>
+        <p:spPr>
+          <a:xfrm>
+            <a:off x="7818120" y="3300984"/>
+            <a:ext cx="3090672" cy="877824"/>
+          </a:xfrm>
+          <a:prstGeom prst="rect">
+            <a:avLst/>
+          </a:prstGeom>
+          <a:noFill/>
+          <a:ln/>
+        </p:spPr>
+        <p:txBody>
+          <a:bodyPr wrap="square" lIns="254" tIns="254" rIns="254" bIns="254" rtlCol="0" anchor="t">
+            <a:normAutofit/>
+          </a:bodyPr>
+          <a:lstStyle/>
+          <a:p>
+            <a:r>
+              <a:rPr lang="en-US" sz="1380" dirty="0">
+                <a:solidFill>
+                  <a:srgbClr val="17364A"/>
+                </a:solidFill>
+                <a:latin typeface="Aptos" pitchFamily="34" charset="0"/>
+                <a:ea typeface="Aptos" pitchFamily="34" charset="-122"/>
+                <a:cs typeface="Aptos" pitchFamily="34" charset="-120"/>
+              </a:rPr>
+              <a:t>Recommended policy updates</a:t>
+            </a:r>
+            <a:endParaRPr lang="en-US" sz="1380" dirty="0"/>
+          </a:p>
+          <a:p>
+            <a:r>
+              <a:rPr lang="en-US" sz="1380" dirty="0">
+                <a:solidFill>
+                  <a:srgbClr val="17364A"/>
+                </a:solidFill>
+                <a:latin typeface="Aptos" pitchFamily="34" charset="0"/>
+                <a:ea typeface="Aptos" pitchFamily="34" charset="-122"/>
+                <a:cs typeface="Aptos" pitchFamily="34" charset="-120"/>
+              </a:rPr>
+              <a:t>Ongoing monitoring process</a:t>
+            </a:r>
+            <a:endParaRPr lang="en-US" sz="1380" dirty="0"/>
+          </a:p>
+        </p:txBody>
       </p:sp>
       <p:sp>
         <p:nvSpPr>
           <p:cNvPr id="16" name="Shape 14"/>
-          <p:cNvSpPr/>
-          <p:nvPr/>
-        </p:nvSpPr>
-        <p:spPr>
-          <a:xfrm>
-            <a:off x="9089136" y="3456432"/>
-            <a:ext cx="566928" cy="566928"/>
-          </a:xfrm>
-          <a:prstGeom prst="ellipse">
-            <a:avLst/>
-          </a:prstGeom>
-          <a:solidFill>
-            <a:srgbClr val="6A4CA3"/>
-          </a:solidFill>
-          <a:ln w="12700">
-            <a:solidFill>
-              <a:srgbClr val="6A4CA3"/>
-            </a:solidFill>
-            <a:prstDash val="solid"/>
-          </a:ln>
-        </p:spPr>
-      </p:sp>
-      <p:sp>
-        <p:nvSpPr>
-          <p:cNvPr id="17" name="Shape 15"/>
-          <p:cNvSpPr/>
-          <p:nvPr/>
-        </p:nvSpPr>
-        <p:spPr>
-          <a:xfrm>
-            <a:off x="8385048" y="3419856"/>
-            <a:ext cx="1975104" cy="0"/>
-          </a:xfrm>
-          <a:prstGeom prst="line">
-            <a:avLst/>
-          </a:prstGeom>
-          <a:noFill/>
-          <a:ln w="25400">
-            <a:solidFill>
-              <a:srgbClr val="8ABBD8"/>
-            </a:solidFill>
-            <a:prstDash val="solid"/>
-          </a:ln>
-        </p:spPr>
-      </p:sp>
-      <p:sp>
-        <p:nvSpPr>
-          <p:cNvPr id="18" name="Shape 16"/>
-          <p:cNvSpPr/>
-          <p:nvPr/>
-        </p:nvSpPr>
-        <p:spPr>
-          <a:xfrm>
-            <a:off x="8202168" y="3630168"/>
-            <a:ext cx="1170432" cy="118872"/>
-          </a:xfrm>
-          <a:prstGeom prst="line">
-            <a:avLst/>
-          </a:prstGeom>
-          <a:noFill/>
-          <a:ln w="25400">
-            <a:solidFill>
-              <a:srgbClr val="8ABBD8"/>
-            </a:solidFill>
-            <a:prstDash val="solid"/>
-          </a:ln>
-        </p:spPr>
-      </p:sp>
-      <p:sp>
-        <p:nvSpPr>
-          <p:cNvPr id="19" name="Shape 17"/>
-          <p:cNvSpPr/>
-          <p:nvPr/>
-        </p:nvSpPr>
-        <p:spPr>
-          <a:xfrm>
-            <a:off x="10543032" y="3630168"/>
-            <a:ext cx="-1170432" cy="118872"/>
-          </a:xfrm>
-          <a:prstGeom prst="line">
-            <a:avLst/>
-          </a:prstGeom>
-          <a:noFill/>
-          <a:ln w="25400">
-            <a:solidFill>
-              <a:srgbClr val="8ABBD8"/>
-            </a:solidFill>
-            <a:prstDash val="solid"/>
-          </a:ln>
-        </p:spPr>
-      </p:sp>
-      <p:sp>
-        <p:nvSpPr>
-          <p:cNvPr id="20" name="Text 18"/>
-          <p:cNvSpPr/>
-          <p:nvPr/>
-        </p:nvSpPr>
-        <p:spPr>
-          <a:xfrm>
-            <a:off x="7863840" y="4069080"/>
-            <a:ext cx="3017520" cy="164592"/>
-          </a:xfrm>
-          <a:prstGeom prst="rect">
-            <a:avLst/>
-          </a:prstGeom>
-          <a:noFill/>
-          <a:ln/>
-        </p:spPr>
-        <p:txBody>
-          <a:bodyPr wrap="square" lIns="0" tIns="0" rIns="0" bIns="0" rtlCol="0" anchor="ctr"/>
-          <a:lstStyle/>
-          <a:p>
-            <a:pPr algn="ctr" indent="0" marL="0">
-              <a:buNone/>
-            </a:pPr>
-            <a:r>
-              <a:rPr lang="en-US" sz="900" b="1" dirty="0">
-                <a:solidFill>
-                  <a:srgbClr val="003A63"/>
-                </a:solidFill>
-                <a:latin typeface="Aptos" pitchFamily="34" charset="0"/>
-                <a:ea typeface="Aptos" pitchFamily="34" charset="-122"/>
-                <a:cs typeface="Aptos" pitchFamily="34" charset="-120"/>
-              </a:rPr>
-              <a:t>Decision rights</a:t>
-            </a:r>
-            <a:endParaRPr lang="en-US" sz="900" dirty="0"/>
-          </a:p>
-        </p:txBody>
-      </p:sp>
-      <p:sp>
-        <p:nvSpPr>
-          <p:cNvPr id="21" name="Shape 19"/>
           <p:cNvSpPr/>
           <p:nvPr/>
         </p:nvSpPr>
@@ -12201,7 +11193,7 @@
       </p:sp>
       <p:sp>
         <p:nvSpPr>
-          <p:cNvPr id="22" name="Text 20"/>
+          <p:cNvPr id="17" name="Text 15"/>
           <p:cNvSpPr/>
           <p:nvPr/>
         </p:nvSpPr>
@@ -12240,7 +11232,7 @@
       </p:sp>
       <p:sp>
         <p:nvSpPr>
-          <p:cNvPr id="23" name="Text 21"/>
+          <p:cNvPr id="18" name="Text 16"/>
           <p:cNvSpPr/>
           <p:nvPr/>
         </p:nvSpPr>
@@ -12748,13 +11740,11 @@
             </a:avLst>
           </a:prstGeom>
           <a:solidFill>
-            <a:srgbClr val="FFFFFF">
-              <a:alpha val="88000"/>
-            </a:srgbClr>
+            <a:srgbClr val="FFFFFF"/>
           </a:solidFill>
           <a:ln w="12700">
             <a:solidFill>
-              <a:srgbClr val="D6E8F2"/>
+              <a:srgbClr val="B9D7E6"/>
             </a:solidFill>
             <a:prstDash val="solid"/>
           </a:ln>
@@ -12762,190 +11752,112 @@
       </p:sp>
       <p:sp>
         <p:nvSpPr>
-          <p:cNvPr id="14" name="Shape 12"/>
-          <p:cNvSpPr/>
-          <p:nvPr/>
-        </p:nvSpPr>
-        <p:spPr>
-          <a:xfrm>
-            <a:off x="7891272" y="3108960"/>
-            <a:ext cx="566928" cy="566928"/>
-          </a:xfrm>
-          <a:prstGeom prst="ellipse">
-            <a:avLst/>
-          </a:prstGeom>
-          <a:solidFill>
-            <a:srgbClr val="0068B7"/>
-          </a:solidFill>
-          <a:ln w="12700">
-            <a:solidFill>
-              <a:srgbClr val="0068B7"/>
-            </a:solidFill>
-            <a:prstDash val="solid"/>
-          </a:ln>
-        </p:spPr>
-      </p:sp>
-      <p:sp>
-        <p:nvSpPr>
-          <p:cNvPr id="15" name="Shape 13"/>
-          <p:cNvSpPr/>
-          <p:nvPr/>
-        </p:nvSpPr>
-        <p:spPr>
-          <a:xfrm>
-            <a:off x="10287000" y="3108960"/>
-            <a:ext cx="566928" cy="566928"/>
-          </a:xfrm>
-          <a:prstGeom prst="ellipse">
-            <a:avLst/>
-          </a:prstGeom>
-          <a:solidFill>
-            <a:srgbClr val="2F8A28"/>
-          </a:solidFill>
-          <a:ln w="12700">
-            <a:solidFill>
-              <a:srgbClr val="2F8A28"/>
-            </a:solidFill>
-            <a:prstDash val="solid"/>
-          </a:ln>
-        </p:spPr>
+          <p:cNvPr id="14" name="Text 12"/>
+          <p:cNvSpPr/>
+          <p:nvPr/>
+        </p:nvSpPr>
+        <p:spPr>
+          <a:xfrm>
+            <a:off x="7799832" y="2935224"/>
+            <a:ext cx="3145536" cy="256032"/>
+          </a:xfrm>
+          <a:prstGeom prst="rect">
+            <a:avLst/>
+          </a:prstGeom>
+          <a:noFill/>
+          <a:ln/>
+        </p:spPr>
+        <p:txBody>
+          <a:bodyPr wrap="square" lIns="0" tIns="0" rIns="0" bIns="0" rtlCol="0" anchor="ctr"/>
+          <a:lstStyle/>
+          <a:p>
+            <a:pPr indent="0" marL="0">
+              <a:buNone/>
+            </a:pPr>
+            <a:r>
+              <a:rPr lang="en-US" sz="1300" b="1" dirty="0">
+                <a:solidFill>
+                  <a:srgbClr val="0068B7"/>
+                </a:solidFill>
+                <a:latin typeface="Aptos" pitchFamily="34" charset="0"/>
+                <a:ea typeface="Aptos" pitchFamily="34" charset="-122"/>
+                <a:cs typeface="Aptos" pitchFamily="34" charset="-120"/>
+              </a:rPr>
+              <a:t>Concept checkpoints</a:t>
+            </a:r>
+            <a:endParaRPr lang="en-US" sz="1300" dirty="0"/>
+          </a:p>
+        </p:txBody>
+      </p:sp>
+      <p:sp>
+        <p:nvSpPr>
+          <p:cNvPr id="15" name="Text 13"/>
+          <p:cNvSpPr/>
+          <p:nvPr/>
+        </p:nvSpPr>
+        <p:spPr>
+          <a:xfrm>
+            <a:off x="7818120" y="3300984"/>
+            <a:ext cx="3090672" cy="877824"/>
+          </a:xfrm>
+          <a:prstGeom prst="rect">
+            <a:avLst/>
+          </a:prstGeom>
+          <a:noFill/>
+          <a:ln/>
+        </p:spPr>
+        <p:txBody>
+          <a:bodyPr wrap="square" lIns="254" tIns="254" rIns="254" bIns="254" rtlCol="0" anchor="t">
+            <a:normAutofit/>
+          </a:bodyPr>
+          <a:lstStyle/>
+          <a:p>
+            <a:r>
+              <a:rPr lang="en-US" sz="1380" dirty="0">
+                <a:solidFill>
+                  <a:srgbClr val="17364A"/>
+                </a:solidFill>
+                <a:latin typeface="Aptos" pitchFamily="34" charset="0"/>
+                <a:ea typeface="Aptos" pitchFamily="34" charset="-122"/>
+                <a:cs typeface="Aptos" pitchFamily="34" charset="-120"/>
+              </a:rPr>
+              <a:t>1.</a:t>
+            </a:r>
+            <a:endParaRPr lang="en-US" sz="1380" dirty="0"/>
+          </a:p>
+          <a:p>
+            <a:r>
+              <a:rPr lang="en-US" sz="1380" dirty="0">
+                <a:solidFill>
+                  <a:srgbClr val="17364A"/>
+                </a:solidFill>
+                <a:latin typeface="Aptos" pitchFamily="34" charset="0"/>
+                <a:ea typeface="Aptos" pitchFamily="34" charset="-122"/>
+                <a:cs typeface="Aptos" pitchFamily="34" charset="-120"/>
+              </a:rPr>
+              <a:t>What does regulatory readiness mean in this module?</a:t>
+            </a:r>
+            <a:endParaRPr lang="en-US" sz="1380" dirty="0"/>
+          </a:p>
+          <a:p>
+            <a:r>
+              <a:rPr lang="en-US" sz="1380" dirty="0">
+                <a:solidFill>
+                  <a:srgbClr val="17364A"/>
+                </a:solidFill>
+                <a:latin typeface="Aptos" pitchFamily="34" charset="0"/>
+                <a:ea typeface="Aptos" pitchFamily="34" charset="-122"/>
+                <a:cs typeface="Aptos" pitchFamily="34" charset="-120"/>
+              </a:rPr>
+              <a:t>2.</a:t>
+            </a:r>
+            <a:endParaRPr lang="en-US" sz="1380" dirty="0"/>
+          </a:p>
+        </p:txBody>
       </p:sp>
       <p:sp>
         <p:nvSpPr>
           <p:cNvPr id="16" name="Shape 14"/>
-          <p:cNvSpPr/>
-          <p:nvPr/>
-        </p:nvSpPr>
-        <p:spPr>
-          <a:xfrm>
-            <a:off x="9089136" y="3456432"/>
-            <a:ext cx="566928" cy="566928"/>
-          </a:xfrm>
-          <a:prstGeom prst="ellipse">
-            <a:avLst/>
-          </a:prstGeom>
-          <a:solidFill>
-            <a:srgbClr val="6A4CA3"/>
-          </a:solidFill>
-          <a:ln w="12700">
-            <a:solidFill>
-              <a:srgbClr val="6A4CA3"/>
-            </a:solidFill>
-            <a:prstDash val="solid"/>
-          </a:ln>
-        </p:spPr>
-      </p:sp>
-      <p:sp>
-        <p:nvSpPr>
-          <p:cNvPr id="17" name="Shape 15"/>
-          <p:cNvSpPr/>
-          <p:nvPr/>
-        </p:nvSpPr>
-        <p:spPr>
-          <a:xfrm>
-            <a:off x="8385048" y="3419856"/>
-            <a:ext cx="1975104" cy="0"/>
-          </a:xfrm>
-          <a:prstGeom prst="line">
-            <a:avLst/>
-          </a:prstGeom>
-          <a:noFill/>
-          <a:ln w="25400">
-            <a:solidFill>
-              <a:srgbClr val="8ABBD8"/>
-            </a:solidFill>
-            <a:prstDash val="solid"/>
-          </a:ln>
-        </p:spPr>
-      </p:sp>
-      <p:sp>
-        <p:nvSpPr>
-          <p:cNvPr id="18" name="Shape 16"/>
-          <p:cNvSpPr/>
-          <p:nvPr/>
-        </p:nvSpPr>
-        <p:spPr>
-          <a:xfrm>
-            <a:off x="8202168" y="3630168"/>
-            <a:ext cx="1170432" cy="118872"/>
-          </a:xfrm>
-          <a:prstGeom prst="line">
-            <a:avLst/>
-          </a:prstGeom>
-          <a:noFill/>
-          <a:ln w="25400">
-            <a:solidFill>
-              <a:srgbClr val="8ABBD8"/>
-            </a:solidFill>
-            <a:prstDash val="solid"/>
-          </a:ln>
-        </p:spPr>
-      </p:sp>
-      <p:sp>
-        <p:nvSpPr>
-          <p:cNvPr id="19" name="Shape 17"/>
-          <p:cNvSpPr/>
-          <p:nvPr/>
-        </p:nvSpPr>
-        <p:spPr>
-          <a:xfrm>
-            <a:off x="10543032" y="3630168"/>
-            <a:ext cx="-1170432" cy="118872"/>
-          </a:xfrm>
-          <a:prstGeom prst="line">
-            <a:avLst/>
-          </a:prstGeom>
-          <a:noFill/>
-          <a:ln w="25400">
-            <a:solidFill>
-              <a:srgbClr val="8ABBD8"/>
-            </a:solidFill>
-            <a:prstDash val="solid"/>
-          </a:ln>
-        </p:spPr>
-      </p:sp>
-      <p:sp>
-        <p:nvSpPr>
-          <p:cNvPr id="20" name="Text 18"/>
-          <p:cNvSpPr/>
-          <p:nvPr/>
-        </p:nvSpPr>
-        <p:spPr>
-          <a:xfrm>
-            <a:off x="7863840" y="4069080"/>
-            <a:ext cx="3017520" cy="164592"/>
-          </a:xfrm>
-          <a:prstGeom prst="rect">
-            <a:avLst/>
-          </a:prstGeom>
-          <a:noFill/>
-          <a:ln/>
-        </p:spPr>
-        <p:txBody>
-          <a:bodyPr wrap="square" lIns="0" tIns="0" rIns="0" bIns="0" rtlCol="0" anchor="ctr"/>
-          <a:lstStyle/>
-          <a:p>
-            <a:pPr algn="ctr" indent="0" marL="0">
-              <a:buNone/>
-            </a:pPr>
-            <a:r>
-              <a:rPr lang="en-US" sz="900" b="1" dirty="0">
-                <a:solidFill>
-                  <a:srgbClr val="003A63"/>
-                </a:solidFill>
-                <a:latin typeface="Aptos" pitchFamily="34" charset="0"/>
-                <a:ea typeface="Aptos" pitchFamily="34" charset="-122"/>
-                <a:cs typeface="Aptos" pitchFamily="34" charset="-120"/>
-              </a:rPr>
-              <a:t>Decision rights</a:t>
-            </a:r>
-            <a:endParaRPr lang="en-US" sz="900" dirty="0"/>
-          </a:p>
-        </p:txBody>
-      </p:sp>
-      <p:sp>
-        <p:nvSpPr>
-          <p:cNvPr id="21" name="Shape 19"/>
           <p:cNvSpPr/>
           <p:nvPr/>
         </p:nvSpPr>
@@ -12972,7 +11884,7 @@
       </p:sp>
       <p:sp>
         <p:nvSpPr>
-          <p:cNvPr id="22" name="Text 20"/>
+          <p:cNvPr id="17" name="Text 15"/>
           <p:cNvSpPr/>
           <p:nvPr/>
         </p:nvSpPr>
@@ -13011,7 +11923,7 @@
       </p:sp>
       <p:sp>
         <p:nvSpPr>
-          <p:cNvPr id="23" name="Text 21"/>
+          <p:cNvPr id="18" name="Text 16"/>
           <p:cNvSpPr/>
           <p:nvPr/>
         </p:nvSpPr>
@@ -13519,13 +12431,11 @@
             </a:avLst>
           </a:prstGeom>
           <a:solidFill>
-            <a:srgbClr val="FFFFFF">
-              <a:alpha val="88000"/>
-            </a:srgbClr>
+            <a:srgbClr val="FFFFFF"/>
           </a:solidFill>
           <a:ln w="12700">
             <a:solidFill>
-              <a:srgbClr val="D6E8F2"/>
+              <a:srgbClr val="B9D7E6"/>
             </a:solidFill>
             <a:prstDash val="solid"/>
           </a:ln>
@@ -13533,190 +12443,112 @@
       </p:sp>
       <p:sp>
         <p:nvSpPr>
-          <p:cNvPr id="14" name="Shape 12"/>
-          <p:cNvSpPr/>
-          <p:nvPr/>
-        </p:nvSpPr>
-        <p:spPr>
-          <a:xfrm>
-            <a:off x="7891272" y="3108960"/>
-            <a:ext cx="566928" cy="566928"/>
-          </a:xfrm>
-          <a:prstGeom prst="ellipse">
-            <a:avLst/>
-          </a:prstGeom>
-          <a:solidFill>
-            <a:srgbClr val="0068B7"/>
-          </a:solidFill>
-          <a:ln w="12700">
-            <a:solidFill>
-              <a:srgbClr val="0068B7"/>
-            </a:solidFill>
-            <a:prstDash val="solid"/>
-          </a:ln>
-        </p:spPr>
-      </p:sp>
-      <p:sp>
-        <p:nvSpPr>
-          <p:cNvPr id="15" name="Shape 13"/>
-          <p:cNvSpPr/>
-          <p:nvPr/>
-        </p:nvSpPr>
-        <p:spPr>
-          <a:xfrm>
-            <a:off x="10287000" y="3108960"/>
-            <a:ext cx="566928" cy="566928"/>
-          </a:xfrm>
-          <a:prstGeom prst="ellipse">
-            <a:avLst/>
-          </a:prstGeom>
-          <a:solidFill>
-            <a:srgbClr val="2F8A28"/>
-          </a:solidFill>
-          <a:ln w="12700">
-            <a:solidFill>
-              <a:srgbClr val="2F8A28"/>
-            </a:solidFill>
-            <a:prstDash val="solid"/>
-          </a:ln>
-        </p:spPr>
+          <p:cNvPr id="14" name="Text 12"/>
+          <p:cNvSpPr/>
+          <p:nvPr/>
+        </p:nvSpPr>
+        <p:spPr>
+          <a:xfrm>
+            <a:off x="7799832" y="2935224"/>
+            <a:ext cx="3145536" cy="256032"/>
+          </a:xfrm>
+          <a:prstGeom prst="rect">
+            <a:avLst/>
+          </a:prstGeom>
+          <a:noFill/>
+          <a:ln/>
+        </p:spPr>
+        <p:txBody>
+          <a:bodyPr wrap="square" lIns="0" tIns="0" rIns="0" bIns="0" rtlCol="0" anchor="ctr"/>
+          <a:lstStyle/>
+          <a:p>
+            <a:pPr indent="0" marL="0">
+              <a:buNone/>
+            </a:pPr>
+            <a:r>
+              <a:rPr lang="en-US" sz="1300" b="1" dirty="0">
+                <a:solidFill>
+                  <a:srgbClr val="0068B7"/>
+                </a:solidFill>
+                <a:latin typeface="Aptos" pitchFamily="34" charset="0"/>
+                <a:ea typeface="Aptos" pitchFamily="34" charset="-122"/>
+                <a:cs typeface="Aptos" pitchFamily="34" charset="-120"/>
+              </a:rPr>
+              <a:t>Concept checkpoints</a:t>
+            </a:r>
+            <a:endParaRPr lang="en-US" sz="1300" dirty="0"/>
+          </a:p>
+        </p:txBody>
+      </p:sp>
+      <p:sp>
+        <p:nvSpPr>
+          <p:cNvPr id="15" name="Text 13"/>
+          <p:cNvSpPr/>
+          <p:nvPr/>
+        </p:nvSpPr>
+        <p:spPr>
+          <a:xfrm>
+            <a:off x="7818120" y="3300984"/>
+            <a:ext cx="3090672" cy="877824"/>
+          </a:xfrm>
+          <a:prstGeom prst="rect">
+            <a:avLst/>
+          </a:prstGeom>
+          <a:noFill/>
+          <a:ln/>
+        </p:spPr>
+        <p:txBody>
+          <a:bodyPr wrap="square" lIns="254" tIns="254" rIns="254" bIns="254" rtlCol="0" anchor="t">
+            <a:normAutofit/>
+          </a:bodyPr>
+          <a:lstStyle/>
+          <a:p>
+            <a:r>
+              <a:rPr lang="en-US" sz="1380" dirty="0">
+                <a:solidFill>
+                  <a:srgbClr val="17364A"/>
+                </a:solidFill>
+                <a:latin typeface="Aptos" pitchFamily="34" charset="0"/>
+                <a:ea typeface="Aptos" pitchFamily="34" charset="-122"/>
+                <a:cs typeface="Aptos" pitchFamily="34" charset="-120"/>
+              </a:rPr>
+              <a:t>NIST Artificial Intelligence Risk Management Framework:.</a:t>
+            </a:r>
+            <a:endParaRPr lang="en-US" sz="1380" dirty="0"/>
+          </a:p>
+          <a:p>
+            <a:r>
+              <a:rPr lang="en-US" sz="1380" dirty="0">
+                <a:solidFill>
+                  <a:srgbClr val="17364A"/>
+                </a:solidFill>
+                <a:latin typeface="Aptos" pitchFamily="34" charset="0"/>
+                <a:ea typeface="Aptos" pitchFamily="34" charset="-122"/>
+                <a:cs typeface="Aptos" pitchFamily="34" charset="-120"/>
+              </a:rPr>
+              <a:t>OWASP guidance for LLM application security</a:t>
+            </a:r>
+            <a:endParaRPr lang="en-US" sz="1380" dirty="0"/>
+          </a:p>
+          <a:p>
+            <a:r>
+              <a:rPr lang="en-US" sz="1380" dirty="0">
+                <a:solidFill>
+                  <a:srgbClr val="17364A"/>
+                </a:solidFill>
+                <a:latin typeface="Aptos" pitchFamily="34" charset="0"/>
+                <a:ea typeface="Aptos" pitchFamily="34" charset="-122"/>
+                <a:cs typeface="Aptos" pitchFamily="34" charset="-120"/>
+              </a:rPr>
+              <a:t>Agency policies for privacy, cybersecurity, records, procurement, accessibility, and.</a:t>
+            </a:r>
+            <a:endParaRPr lang="en-US" sz="1380" dirty="0"/>
+          </a:p>
+        </p:txBody>
       </p:sp>
       <p:sp>
         <p:nvSpPr>
           <p:cNvPr id="16" name="Shape 14"/>
-          <p:cNvSpPr/>
-          <p:nvPr/>
-        </p:nvSpPr>
-        <p:spPr>
-          <a:xfrm>
-            <a:off x="9089136" y="3456432"/>
-            <a:ext cx="566928" cy="566928"/>
-          </a:xfrm>
-          <a:prstGeom prst="ellipse">
-            <a:avLst/>
-          </a:prstGeom>
-          <a:solidFill>
-            <a:srgbClr val="6A4CA3"/>
-          </a:solidFill>
-          <a:ln w="12700">
-            <a:solidFill>
-              <a:srgbClr val="6A4CA3"/>
-            </a:solidFill>
-            <a:prstDash val="solid"/>
-          </a:ln>
-        </p:spPr>
-      </p:sp>
-      <p:sp>
-        <p:nvSpPr>
-          <p:cNvPr id="17" name="Shape 15"/>
-          <p:cNvSpPr/>
-          <p:nvPr/>
-        </p:nvSpPr>
-        <p:spPr>
-          <a:xfrm>
-            <a:off x="8385048" y="3419856"/>
-            <a:ext cx="1975104" cy="0"/>
-          </a:xfrm>
-          <a:prstGeom prst="line">
-            <a:avLst/>
-          </a:prstGeom>
-          <a:noFill/>
-          <a:ln w="25400">
-            <a:solidFill>
-              <a:srgbClr val="8ABBD8"/>
-            </a:solidFill>
-            <a:prstDash val="solid"/>
-          </a:ln>
-        </p:spPr>
-      </p:sp>
-      <p:sp>
-        <p:nvSpPr>
-          <p:cNvPr id="18" name="Shape 16"/>
-          <p:cNvSpPr/>
-          <p:nvPr/>
-        </p:nvSpPr>
-        <p:spPr>
-          <a:xfrm>
-            <a:off x="8202168" y="3630168"/>
-            <a:ext cx="1170432" cy="118872"/>
-          </a:xfrm>
-          <a:prstGeom prst="line">
-            <a:avLst/>
-          </a:prstGeom>
-          <a:noFill/>
-          <a:ln w="25400">
-            <a:solidFill>
-              <a:srgbClr val="8ABBD8"/>
-            </a:solidFill>
-            <a:prstDash val="solid"/>
-          </a:ln>
-        </p:spPr>
-      </p:sp>
-      <p:sp>
-        <p:nvSpPr>
-          <p:cNvPr id="19" name="Shape 17"/>
-          <p:cNvSpPr/>
-          <p:nvPr/>
-        </p:nvSpPr>
-        <p:spPr>
-          <a:xfrm>
-            <a:off x="10543032" y="3630168"/>
-            <a:ext cx="-1170432" cy="118872"/>
-          </a:xfrm>
-          <a:prstGeom prst="line">
-            <a:avLst/>
-          </a:prstGeom>
-          <a:noFill/>
-          <a:ln w="25400">
-            <a:solidFill>
-              <a:srgbClr val="8ABBD8"/>
-            </a:solidFill>
-            <a:prstDash val="solid"/>
-          </a:ln>
-        </p:spPr>
-      </p:sp>
-      <p:sp>
-        <p:nvSpPr>
-          <p:cNvPr id="20" name="Text 18"/>
-          <p:cNvSpPr/>
-          <p:nvPr/>
-        </p:nvSpPr>
-        <p:spPr>
-          <a:xfrm>
-            <a:off x="7863840" y="4069080"/>
-            <a:ext cx="3017520" cy="164592"/>
-          </a:xfrm>
-          <a:prstGeom prst="rect">
-            <a:avLst/>
-          </a:prstGeom>
-          <a:noFill/>
-          <a:ln/>
-        </p:spPr>
-        <p:txBody>
-          <a:bodyPr wrap="square" lIns="0" tIns="0" rIns="0" bIns="0" rtlCol="0" anchor="ctr"/>
-          <a:lstStyle/>
-          <a:p>
-            <a:pPr algn="ctr" indent="0" marL="0">
-              <a:buNone/>
-            </a:pPr>
-            <a:r>
-              <a:rPr lang="en-US" sz="900" b="1" dirty="0">
-                <a:solidFill>
-                  <a:srgbClr val="003A63"/>
-                </a:solidFill>
-                <a:latin typeface="Aptos" pitchFamily="34" charset="0"/>
-                <a:ea typeface="Aptos" pitchFamily="34" charset="-122"/>
-                <a:cs typeface="Aptos" pitchFamily="34" charset="-120"/>
-              </a:rPr>
-              <a:t>Decision rights</a:t>
-            </a:r>
-            <a:endParaRPr lang="en-US" sz="900" dirty="0"/>
-          </a:p>
-        </p:txBody>
-      </p:sp>
-      <p:sp>
-        <p:nvSpPr>
-          <p:cNvPr id="21" name="Shape 19"/>
           <p:cNvSpPr/>
           <p:nvPr/>
         </p:nvSpPr>
@@ -13743,7 +12575,7 @@
       </p:sp>
       <p:sp>
         <p:nvSpPr>
-          <p:cNvPr id="22" name="Text 20"/>
+          <p:cNvPr id="17" name="Text 15"/>
           <p:cNvSpPr/>
           <p:nvPr/>
         </p:nvSpPr>
@@ -13782,7 +12614,7 @@
       </p:sp>
       <p:sp>
         <p:nvSpPr>
-          <p:cNvPr id="23" name="Text 21"/>
+          <p:cNvPr id="18" name="Text 16"/>
           <p:cNvSpPr/>
           <p:nvPr/>
         </p:nvSpPr>
@@ -14262,13 +13094,11 @@
             </a:avLst>
           </a:prstGeom>
           <a:solidFill>
-            <a:srgbClr val="FFFFFF">
-              <a:alpha val="88000"/>
-            </a:srgbClr>
+            <a:srgbClr val="FFFFFF"/>
           </a:solidFill>
           <a:ln w="12700">
             <a:solidFill>
-              <a:srgbClr val="D6E8F2"/>
+              <a:srgbClr val="B9D7E6"/>
             </a:solidFill>
             <a:prstDash val="solid"/>
           </a:ln>
@@ -14276,190 +13106,84 @@
       </p:sp>
       <p:sp>
         <p:nvSpPr>
-          <p:cNvPr id="14" name="Shape 12"/>
-          <p:cNvSpPr/>
-          <p:nvPr/>
-        </p:nvSpPr>
-        <p:spPr>
-          <a:xfrm>
-            <a:off x="7891272" y="3108960"/>
-            <a:ext cx="566928" cy="566928"/>
-          </a:xfrm>
-          <a:prstGeom prst="ellipse">
-            <a:avLst/>
-          </a:prstGeom>
-          <a:solidFill>
-            <a:srgbClr val="0068B7"/>
-          </a:solidFill>
-          <a:ln w="12700">
-            <a:solidFill>
-              <a:srgbClr val="0068B7"/>
-            </a:solidFill>
-            <a:prstDash val="solid"/>
-          </a:ln>
-        </p:spPr>
-      </p:sp>
-      <p:sp>
-        <p:nvSpPr>
-          <p:cNvPr id="15" name="Shape 13"/>
-          <p:cNvSpPr/>
-          <p:nvPr/>
-        </p:nvSpPr>
-        <p:spPr>
-          <a:xfrm>
-            <a:off x="10287000" y="3108960"/>
-            <a:ext cx="566928" cy="566928"/>
-          </a:xfrm>
-          <a:prstGeom prst="ellipse">
-            <a:avLst/>
-          </a:prstGeom>
-          <a:solidFill>
-            <a:srgbClr val="2F8A28"/>
-          </a:solidFill>
-          <a:ln w="12700">
-            <a:solidFill>
-              <a:srgbClr val="2F8A28"/>
-            </a:solidFill>
-            <a:prstDash val="solid"/>
-          </a:ln>
-        </p:spPr>
+          <p:cNvPr id="14" name="Text 12"/>
+          <p:cNvSpPr/>
+          <p:nvPr/>
+        </p:nvSpPr>
+        <p:spPr>
+          <a:xfrm>
+            <a:off x="7799832" y="2935224"/>
+            <a:ext cx="3145536" cy="256032"/>
+          </a:xfrm>
+          <a:prstGeom prst="rect">
+            <a:avLst/>
+          </a:prstGeom>
+          <a:noFill/>
+          <a:ln/>
+        </p:spPr>
+        <p:txBody>
+          <a:bodyPr wrap="square" lIns="0" tIns="0" rIns="0" bIns="0" rtlCol="0" anchor="ctr"/>
+          <a:lstStyle/>
+          <a:p>
+            <a:pPr indent="0" marL="0">
+              <a:buNone/>
+            </a:pPr>
+            <a:r>
+              <a:rPr lang="en-US" sz="1300" b="1" dirty="0">
+                <a:solidFill>
+                  <a:srgbClr val="0068B7"/>
+                </a:solidFill>
+                <a:latin typeface="Aptos" pitchFamily="34" charset="0"/>
+                <a:ea typeface="Aptos" pitchFamily="34" charset="-122"/>
+                <a:cs typeface="Aptos" pitchFamily="34" charset="-120"/>
+              </a:rPr>
+              <a:t>Concept checkpoints</a:t>
+            </a:r>
+            <a:endParaRPr lang="en-US" sz="1300" dirty="0"/>
+          </a:p>
+        </p:txBody>
+      </p:sp>
+      <p:sp>
+        <p:nvSpPr>
+          <p:cNvPr id="15" name="Text 13"/>
+          <p:cNvSpPr/>
+          <p:nvPr/>
+        </p:nvSpPr>
+        <p:spPr>
+          <a:xfrm>
+            <a:off x="7818120" y="3300984"/>
+            <a:ext cx="3090672" cy="877824"/>
+          </a:xfrm>
+          <a:prstGeom prst="rect">
+            <a:avLst/>
+          </a:prstGeom>
+          <a:noFill/>
+          <a:ln/>
+        </p:spPr>
+        <p:txBody>
+          <a:bodyPr wrap="square" lIns="254" tIns="254" rIns="254" bIns="254" rtlCol="0" anchor="t">
+            <a:normAutofit/>
+          </a:bodyPr>
+          <a:lstStyle/>
+          <a:p>
+            <a:r>
+              <a:rPr lang="en-US" sz="1380" dirty="0">
+                <a:solidFill>
+                  <a:srgbClr val="17364A"/>
+                </a:solidFill>
+                <a:latin typeface="Aptos" pitchFamily="34" charset="0"/>
+                <a:ea typeface="Aptos" pitchFamily="34" charset="-122"/>
+                <a:cs typeface="Aptos" pitchFamily="34" charset="-120"/>
+              </a:rPr>
+              <a:t>Relevant public health program SOPs, data governance documentation, and implementation plans</a:t>
+            </a:r>
+            <a:endParaRPr lang="en-US" sz="1380" dirty="0"/>
+          </a:p>
+        </p:txBody>
       </p:sp>
       <p:sp>
         <p:nvSpPr>
           <p:cNvPr id="16" name="Shape 14"/>
-          <p:cNvSpPr/>
-          <p:nvPr/>
-        </p:nvSpPr>
-        <p:spPr>
-          <a:xfrm>
-            <a:off x="9089136" y="3456432"/>
-            <a:ext cx="566928" cy="566928"/>
-          </a:xfrm>
-          <a:prstGeom prst="ellipse">
-            <a:avLst/>
-          </a:prstGeom>
-          <a:solidFill>
-            <a:srgbClr val="6A4CA3"/>
-          </a:solidFill>
-          <a:ln w="12700">
-            <a:solidFill>
-              <a:srgbClr val="6A4CA3"/>
-            </a:solidFill>
-            <a:prstDash val="solid"/>
-          </a:ln>
-        </p:spPr>
-      </p:sp>
-      <p:sp>
-        <p:nvSpPr>
-          <p:cNvPr id="17" name="Shape 15"/>
-          <p:cNvSpPr/>
-          <p:nvPr/>
-        </p:nvSpPr>
-        <p:spPr>
-          <a:xfrm>
-            <a:off x="8385048" y="3419856"/>
-            <a:ext cx="1975104" cy="0"/>
-          </a:xfrm>
-          <a:prstGeom prst="line">
-            <a:avLst/>
-          </a:prstGeom>
-          <a:noFill/>
-          <a:ln w="25400">
-            <a:solidFill>
-              <a:srgbClr val="8ABBD8"/>
-            </a:solidFill>
-            <a:prstDash val="solid"/>
-          </a:ln>
-        </p:spPr>
-      </p:sp>
-      <p:sp>
-        <p:nvSpPr>
-          <p:cNvPr id="18" name="Shape 16"/>
-          <p:cNvSpPr/>
-          <p:nvPr/>
-        </p:nvSpPr>
-        <p:spPr>
-          <a:xfrm>
-            <a:off x="8202168" y="3630168"/>
-            <a:ext cx="1170432" cy="118872"/>
-          </a:xfrm>
-          <a:prstGeom prst="line">
-            <a:avLst/>
-          </a:prstGeom>
-          <a:noFill/>
-          <a:ln w="25400">
-            <a:solidFill>
-              <a:srgbClr val="8ABBD8"/>
-            </a:solidFill>
-            <a:prstDash val="solid"/>
-          </a:ln>
-        </p:spPr>
-      </p:sp>
-      <p:sp>
-        <p:nvSpPr>
-          <p:cNvPr id="19" name="Shape 17"/>
-          <p:cNvSpPr/>
-          <p:nvPr/>
-        </p:nvSpPr>
-        <p:spPr>
-          <a:xfrm>
-            <a:off x="10543032" y="3630168"/>
-            <a:ext cx="-1170432" cy="118872"/>
-          </a:xfrm>
-          <a:prstGeom prst="line">
-            <a:avLst/>
-          </a:prstGeom>
-          <a:noFill/>
-          <a:ln w="25400">
-            <a:solidFill>
-              <a:srgbClr val="8ABBD8"/>
-            </a:solidFill>
-            <a:prstDash val="solid"/>
-          </a:ln>
-        </p:spPr>
-      </p:sp>
-      <p:sp>
-        <p:nvSpPr>
-          <p:cNvPr id="20" name="Text 18"/>
-          <p:cNvSpPr/>
-          <p:nvPr/>
-        </p:nvSpPr>
-        <p:spPr>
-          <a:xfrm>
-            <a:off x="7863840" y="4069080"/>
-            <a:ext cx="3017520" cy="164592"/>
-          </a:xfrm>
-          <a:prstGeom prst="rect">
-            <a:avLst/>
-          </a:prstGeom>
-          <a:noFill/>
-          <a:ln/>
-        </p:spPr>
-        <p:txBody>
-          <a:bodyPr wrap="square" lIns="0" tIns="0" rIns="0" bIns="0" rtlCol="0" anchor="ctr"/>
-          <a:lstStyle/>
-          <a:p>
-            <a:pPr algn="ctr" indent="0" marL="0">
-              <a:buNone/>
-            </a:pPr>
-            <a:r>
-              <a:rPr lang="en-US" sz="900" b="1" dirty="0">
-                <a:solidFill>
-                  <a:srgbClr val="003A63"/>
-                </a:solidFill>
-                <a:latin typeface="Aptos" pitchFamily="34" charset="0"/>
-                <a:ea typeface="Aptos" pitchFamily="34" charset="-122"/>
-                <a:cs typeface="Aptos" pitchFamily="34" charset="-120"/>
-              </a:rPr>
-              <a:t>Decision rights</a:t>
-            </a:r>
-            <a:endParaRPr lang="en-US" sz="900" dirty="0"/>
-          </a:p>
-        </p:txBody>
-      </p:sp>
-      <p:sp>
-        <p:nvSpPr>
-          <p:cNvPr id="21" name="Shape 19"/>
           <p:cNvSpPr/>
           <p:nvPr/>
         </p:nvSpPr>
@@ -14486,7 +13210,7 @@
       </p:sp>
       <p:sp>
         <p:nvSpPr>
-          <p:cNvPr id="22" name="Text 20"/>
+          <p:cNvPr id="17" name="Text 15"/>
           <p:cNvSpPr/>
           <p:nvPr/>
         </p:nvSpPr>
@@ -14525,7 +13249,7 @@
       </p:sp>
       <p:sp>
         <p:nvSpPr>
-          <p:cNvPr id="23" name="Text 21"/>
+          <p:cNvPr id="18" name="Text 16"/>
           <p:cNvSpPr/>
           <p:nvPr/>
         </p:nvSpPr>
@@ -15038,20 +13762,20 @@
         </p:nvSpPr>
         <p:spPr>
           <a:xfrm>
-            <a:off x="7818120" y="3977640"/>
-            <a:ext cx="972312" cy="749808"/>
+            <a:off x="8046720" y="3794760"/>
+            <a:ext cx="3063240" cy="1600200"/>
           </a:xfrm>
           <a:prstGeom prst="roundRect">
             <a:avLst>
-              <a:gd name="adj" fmla="val 14634"/>
+              <a:gd name="adj" fmla="val 6857"/>
             </a:avLst>
           </a:prstGeom>
           <a:solidFill>
-            <a:srgbClr val="0068B7"/>
+            <a:srgbClr val="FFFFFF"/>
           </a:solidFill>
           <a:ln w="12700">
             <a:solidFill>
-              <a:srgbClr val="0068B7"/>
+              <a:srgbClr val="B9D7E6"/>
             </a:solidFill>
             <a:prstDash val="solid"/>
           </a:ln>
@@ -15065,172 +13789,100 @@
         </p:nvSpPr>
         <p:spPr>
           <a:xfrm>
-            <a:off x="7891272" y="4169664"/>
-            <a:ext cx="826008" cy="310896"/>
-          </a:xfrm>
-          <a:prstGeom prst="rect">
-            <a:avLst/>
-          </a:prstGeom>
-          <a:noFill/>
-          <a:ln/>
-        </p:spPr>
-        <p:txBody>
-          <a:bodyPr wrap="square" lIns="0" tIns="0" rIns="0" bIns="0" rtlCol="0" anchor="ctr">
+            <a:off x="8211312" y="3941064"/>
+            <a:ext cx="2734056" cy="256032"/>
+          </a:xfrm>
+          <a:prstGeom prst="rect">
+            <a:avLst/>
+          </a:prstGeom>
+          <a:noFill/>
+          <a:ln/>
+        </p:spPr>
+        <p:txBody>
+          <a:bodyPr wrap="square" lIns="0" tIns="0" rIns="0" bIns="0" rtlCol="0" anchor="ctr"/>
+          <a:lstStyle/>
+          <a:p>
+            <a:pPr indent="0" marL="0">
+              <a:buNone/>
+            </a:pPr>
+            <a:r>
+              <a:rPr lang="en-US" sz="1300" b="1" dirty="0">
+                <a:solidFill>
+                  <a:srgbClr val="0068B7"/>
+                </a:solidFill>
+                <a:latin typeface="Aptos" pitchFamily="34" charset="0"/>
+                <a:ea typeface="Aptos" pitchFamily="34" charset="-122"/>
+                <a:cs typeface="Aptos" pitchFamily="34" charset="-120"/>
+              </a:rPr>
+              <a:t>Use the play links to</a:t>
+            </a:r>
+            <a:endParaRPr lang="en-US" sz="1300" dirty="0"/>
+          </a:p>
+        </p:txBody>
+      </p:sp>
+      <p:sp>
+        <p:nvSpPr>
+          <p:cNvPr id="15" name="Text 13"/>
+          <p:cNvSpPr/>
+          <p:nvPr/>
+        </p:nvSpPr>
+        <p:spPr>
+          <a:xfrm>
+            <a:off x="8229600" y="4306824"/>
+            <a:ext cx="2679192" cy="941832"/>
+          </a:xfrm>
+          <a:prstGeom prst="rect">
+            <a:avLst/>
+          </a:prstGeom>
+          <a:noFill/>
+          <a:ln/>
+        </p:spPr>
+        <p:txBody>
+          <a:bodyPr wrap="square" lIns="254" tIns="254" rIns="254" bIns="254" rtlCol="0" anchor="t">
             <a:normAutofit/>
           </a:bodyPr>
           <a:lstStyle/>
           <a:p>
-            <a:pPr algn="ctr" indent="0" marL="0">
-              <a:buNone/>
-            </a:pPr>
-            <a:r>
-              <a:rPr lang="en-US" sz="1500" b="1" dirty="0">
-                <a:solidFill>
-                  <a:srgbClr val="FFFFFF"/>
-                </a:solidFill>
-                <a:latin typeface="Aptos" pitchFamily="34" charset="0"/>
-                <a:ea typeface="Aptos" pitchFamily="34" charset="-122"/>
-                <a:cs typeface="Aptos" pitchFamily="34" charset="-120"/>
-              </a:rPr>
-              <a:t>Lesson</a:t>
-            </a:r>
-            <a:endParaRPr lang="en-US" sz="1500" dirty="0"/>
-          </a:p>
-        </p:txBody>
-      </p:sp>
-      <p:sp>
-        <p:nvSpPr>
-          <p:cNvPr id="15" name="Shape 13"/>
-          <p:cNvSpPr/>
-          <p:nvPr/>
-        </p:nvSpPr>
-        <p:spPr>
-          <a:xfrm>
-            <a:off x="9046464" y="3977640"/>
-            <a:ext cx="972312" cy="749808"/>
-          </a:xfrm>
-          <a:prstGeom prst="roundRect">
-            <a:avLst>
-              <a:gd name="adj" fmla="val 14634"/>
-            </a:avLst>
-          </a:prstGeom>
-          <a:solidFill>
-            <a:srgbClr val="2F8A28"/>
-          </a:solidFill>
-          <a:ln w="12700">
-            <a:solidFill>
-              <a:srgbClr val="2F8A28"/>
-            </a:solidFill>
-            <a:prstDash val="solid"/>
-          </a:ln>
-        </p:spPr>
-      </p:sp>
-      <p:sp>
-        <p:nvSpPr>
-          <p:cNvPr id="16" name="Text 14"/>
-          <p:cNvSpPr/>
-          <p:nvPr/>
-        </p:nvSpPr>
-        <p:spPr>
-          <a:xfrm>
-            <a:off x="9119616" y="4169664"/>
-            <a:ext cx="826008" cy="310896"/>
-          </a:xfrm>
-          <a:prstGeom prst="rect">
-            <a:avLst/>
-          </a:prstGeom>
-          <a:noFill/>
-          <a:ln/>
-        </p:spPr>
-        <p:txBody>
-          <a:bodyPr wrap="square" lIns="0" tIns="0" rIns="0" bIns="0" rtlCol="0" anchor="ctr">
-            <a:normAutofit/>
-          </a:bodyPr>
-          <a:lstStyle/>
-          <a:p>
-            <a:pPr algn="ctr" indent="0" marL="0">
-              <a:buNone/>
-            </a:pPr>
-            <a:r>
-              <a:rPr lang="en-US" sz="1500" b="1" dirty="0">
-                <a:solidFill>
-                  <a:srgbClr val="FFFFFF"/>
-                </a:solidFill>
-                <a:latin typeface="Aptos" pitchFamily="34" charset="0"/>
-                <a:ea typeface="Aptos" pitchFamily="34" charset="-122"/>
-                <a:cs typeface="Aptos" pitchFamily="34" charset="-120"/>
-              </a:rPr>
-              <a:t>Plays</a:t>
-            </a:r>
-            <a:endParaRPr lang="en-US" sz="1500" dirty="0"/>
-          </a:p>
-        </p:txBody>
-      </p:sp>
-      <p:sp>
-        <p:nvSpPr>
-          <p:cNvPr id="17" name="Shape 15"/>
-          <p:cNvSpPr/>
-          <p:nvPr/>
-        </p:nvSpPr>
-        <p:spPr>
-          <a:xfrm>
-            <a:off x="10274808" y="3977640"/>
-            <a:ext cx="972312" cy="749808"/>
-          </a:xfrm>
-          <a:prstGeom prst="roundRect">
-            <a:avLst>
-              <a:gd name="adj" fmla="val 14634"/>
-            </a:avLst>
-          </a:prstGeom>
-          <a:solidFill>
-            <a:srgbClr val="6A4CA3"/>
-          </a:solidFill>
-          <a:ln w="12700">
-            <a:solidFill>
-              <a:srgbClr val="6A4CA3"/>
-            </a:solidFill>
-            <a:prstDash val="solid"/>
-          </a:ln>
-        </p:spPr>
-      </p:sp>
-      <p:sp>
-        <p:nvSpPr>
-          <p:cNvPr id="18" name="Text 16"/>
-          <p:cNvSpPr/>
-          <p:nvPr/>
-        </p:nvSpPr>
-        <p:spPr>
-          <a:xfrm>
-            <a:off x="10347960" y="4169664"/>
-            <a:ext cx="826008" cy="310896"/>
-          </a:xfrm>
-          <a:prstGeom prst="rect">
-            <a:avLst/>
-          </a:prstGeom>
-          <a:noFill/>
-          <a:ln/>
-        </p:spPr>
-        <p:txBody>
-          <a:bodyPr wrap="square" lIns="0" tIns="0" rIns="0" bIns="0" rtlCol="0" anchor="ctr">
-            <a:normAutofit/>
-          </a:bodyPr>
-          <a:lstStyle/>
-          <a:p>
-            <a:pPr algn="ctr" indent="0" marL="0">
-              <a:buNone/>
-            </a:pPr>
-            <a:r>
-              <a:rPr lang="en-US" sz="1500" b="1" dirty="0">
-                <a:solidFill>
-                  <a:srgbClr val="FFFFFF"/>
-                </a:solidFill>
-                <a:latin typeface="Aptos" pitchFamily="34" charset="0"/>
-                <a:ea typeface="Aptos" pitchFamily="34" charset="-122"/>
-                <a:cs typeface="Aptos" pitchFamily="34" charset="-120"/>
-              </a:rPr>
-              <a:t>Action</a:t>
-            </a:r>
-            <a:endParaRPr lang="en-US" sz="1500" dirty="0"/>
+            <a:r>
+              <a:rPr lang="en-US" sz="1380" dirty="0">
+                <a:solidFill>
+                  <a:srgbClr val="17364A"/>
+                </a:solidFill>
+                <a:latin typeface="Aptos" pitchFamily="34" charset="0"/>
+                <a:ea typeface="Aptos" pitchFamily="34" charset="-122"/>
+                <a:cs typeface="Aptos" pitchFamily="34" charset="-120"/>
+              </a:rPr>
+              <a:t>Locate the decision point in the playbook sequence.</a:t>
+            </a:r>
+            <a:endParaRPr lang="en-US" sz="1380" dirty="0"/>
+          </a:p>
+          <a:p>
+            <a:r>
+              <a:rPr lang="en-US" sz="1380" dirty="0">
+                <a:solidFill>
+                  <a:srgbClr val="17364A"/>
+                </a:solidFill>
+                <a:latin typeface="Aptos" pitchFamily="34" charset="0"/>
+                <a:ea typeface="Aptos" pitchFamily="34" charset="-122"/>
+                <a:cs typeface="Aptos" pitchFamily="34" charset="-120"/>
+              </a:rPr>
+              <a:t>Identify who should participate in the work.</a:t>
+            </a:r>
+            <a:endParaRPr lang="en-US" sz="1380" dirty="0"/>
+          </a:p>
+          <a:p>
+            <a:r>
+              <a:rPr lang="en-US" sz="1380" dirty="0">
+                <a:solidFill>
+                  <a:srgbClr val="17364A"/>
+                </a:solidFill>
+                <a:latin typeface="Aptos" pitchFamily="34" charset="0"/>
+                <a:ea typeface="Aptos" pitchFamily="34" charset="-122"/>
+                <a:cs typeface="Aptos" pitchFamily="34" charset="-120"/>
+              </a:rPr>
+              <a:t>Document the review, approval, or implementation step.</a:t>
+            </a:r>
+            <a:endParaRPr lang="en-US" sz="1380" dirty="0"/>
           </a:p>
         </p:txBody>
       </p:sp>
@@ -15708,20 +14360,20 @@
         </p:nvSpPr>
         <p:spPr>
           <a:xfrm>
-            <a:off x="7818120" y="3977640"/>
-            <a:ext cx="972312" cy="749808"/>
+            <a:off x="8046720" y="3794760"/>
+            <a:ext cx="3063240" cy="1600200"/>
           </a:xfrm>
           <a:prstGeom prst="roundRect">
             <a:avLst>
-              <a:gd name="adj" fmla="val 14634"/>
+              <a:gd name="adj" fmla="val 6857"/>
             </a:avLst>
           </a:prstGeom>
           <a:solidFill>
-            <a:srgbClr val="0068B7"/>
+            <a:srgbClr val="FFFFFF"/>
           </a:solidFill>
           <a:ln w="12700">
             <a:solidFill>
-              <a:srgbClr val="0068B7"/>
+              <a:srgbClr val="B9D7E6"/>
             </a:solidFill>
             <a:prstDash val="solid"/>
           </a:ln>
@@ -15735,172 +14387,100 @@
         </p:nvSpPr>
         <p:spPr>
           <a:xfrm>
-            <a:off x="7891272" y="4169664"/>
-            <a:ext cx="826008" cy="310896"/>
-          </a:xfrm>
-          <a:prstGeom prst="rect">
-            <a:avLst/>
-          </a:prstGeom>
-          <a:noFill/>
-          <a:ln/>
-        </p:spPr>
-        <p:txBody>
-          <a:bodyPr wrap="square" lIns="0" tIns="0" rIns="0" bIns="0" rtlCol="0" anchor="ctr">
+            <a:off x="8211312" y="3941064"/>
+            <a:ext cx="2734056" cy="256032"/>
+          </a:xfrm>
+          <a:prstGeom prst="rect">
+            <a:avLst/>
+          </a:prstGeom>
+          <a:noFill/>
+          <a:ln/>
+        </p:spPr>
+        <p:txBody>
+          <a:bodyPr wrap="square" lIns="0" tIns="0" rIns="0" bIns="0" rtlCol="0" anchor="ctr"/>
+          <a:lstStyle/>
+          <a:p>
+            <a:pPr indent="0" marL="0">
+              <a:buNone/>
+            </a:pPr>
+            <a:r>
+              <a:rPr lang="en-US" sz="1300" b="1" dirty="0">
+                <a:solidFill>
+                  <a:srgbClr val="0068B7"/>
+                </a:solidFill>
+                <a:latin typeface="Aptos" pitchFamily="34" charset="0"/>
+                <a:ea typeface="Aptos" pitchFamily="34" charset="-122"/>
+                <a:cs typeface="Aptos" pitchFamily="34" charset="-120"/>
+              </a:rPr>
+              <a:t>Tool selection cues</a:t>
+            </a:r>
+            <a:endParaRPr lang="en-US" sz="1300" dirty="0"/>
+          </a:p>
+        </p:txBody>
+      </p:sp>
+      <p:sp>
+        <p:nvSpPr>
+          <p:cNvPr id="15" name="Text 13"/>
+          <p:cNvSpPr/>
+          <p:nvPr/>
+        </p:nvSpPr>
+        <p:spPr>
+          <a:xfrm>
+            <a:off x="8229600" y="4306824"/>
+            <a:ext cx="2679192" cy="941832"/>
+          </a:xfrm>
+          <a:prstGeom prst="rect">
+            <a:avLst/>
+          </a:prstGeom>
+          <a:noFill/>
+          <a:ln/>
+        </p:spPr>
+        <p:txBody>
+          <a:bodyPr wrap="square" lIns="254" tIns="254" rIns="254" bIns="254" rtlCol="0" anchor="t">
             <a:normAutofit/>
           </a:bodyPr>
           <a:lstStyle/>
           <a:p>
-            <a:pPr algn="ctr" indent="0" marL="0">
-              <a:buNone/>
-            </a:pPr>
-            <a:r>
-              <a:rPr lang="en-US" sz="1500" b="1" dirty="0">
-                <a:solidFill>
-                  <a:srgbClr val="FFFFFF"/>
-                </a:solidFill>
-                <a:latin typeface="Aptos" pitchFamily="34" charset="0"/>
-                <a:ea typeface="Aptos" pitchFamily="34" charset="-122"/>
-                <a:cs typeface="Aptos" pitchFamily="34" charset="-120"/>
-              </a:rPr>
-              <a:t>Concept</a:t>
-            </a:r>
-            <a:endParaRPr lang="en-US" sz="1500" dirty="0"/>
-          </a:p>
-        </p:txBody>
-      </p:sp>
-      <p:sp>
-        <p:nvSpPr>
-          <p:cNvPr id="15" name="Shape 13"/>
-          <p:cNvSpPr/>
-          <p:nvPr/>
-        </p:nvSpPr>
-        <p:spPr>
-          <a:xfrm>
-            <a:off x="9046464" y="3977640"/>
-            <a:ext cx="972312" cy="749808"/>
-          </a:xfrm>
-          <a:prstGeom prst="roundRect">
-            <a:avLst>
-              <a:gd name="adj" fmla="val 14634"/>
-            </a:avLst>
-          </a:prstGeom>
-          <a:solidFill>
-            <a:srgbClr val="2F8A28"/>
-          </a:solidFill>
-          <a:ln w="12700">
-            <a:solidFill>
-              <a:srgbClr val="2F8A28"/>
-            </a:solidFill>
-            <a:prstDash val="solid"/>
-          </a:ln>
-        </p:spPr>
-      </p:sp>
-      <p:sp>
-        <p:nvSpPr>
-          <p:cNvPr id="16" name="Text 14"/>
-          <p:cNvSpPr/>
-          <p:nvPr/>
-        </p:nvSpPr>
-        <p:spPr>
-          <a:xfrm>
-            <a:off x="9119616" y="4169664"/>
-            <a:ext cx="826008" cy="310896"/>
-          </a:xfrm>
-          <a:prstGeom prst="rect">
-            <a:avLst/>
-          </a:prstGeom>
-          <a:noFill/>
-          <a:ln/>
-        </p:spPr>
-        <p:txBody>
-          <a:bodyPr wrap="square" lIns="0" tIns="0" rIns="0" bIns="0" rtlCol="0" anchor="ctr">
-            <a:normAutofit/>
-          </a:bodyPr>
-          <a:lstStyle/>
-          <a:p>
-            <a:pPr algn="ctr" indent="0" marL="0">
-              <a:buNone/>
-            </a:pPr>
-            <a:r>
-              <a:rPr lang="en-US" sz="1500" b="1" dirty="0">
-                <a:solidFill>
-                  <a:srgbClr val="FFFFFF"/>
-                </a:solidFill>
-                <a:latin typeface="Aptos" pitchFamily="34" charset="0"/>
-                <a:ea typeface="Aptos" pitchFamily="34" charset="-122"/>
-                <a:cs typeface="Aptos" pitchFamily="34" charset="-120"/>
-              </a:rPr>
-              <a:t>Tool</a:t>
-            </a:r>
-            <a:endParaRPr lang="en-US" sz="1500" dirty="0"/>
-          </a:p>
-        </p:txBody>
-      </p:sp>
-      <p:sp>
-        <p:nvSpPr>
-          <p:cNvPr id="17" name="Shape 15"/>
-          <p:cNvSpPr/>
-          <p:nvPr/>
-        </p:nvSpPr>
-        <p:spPr>
-          <a:xfrm>
-            <a:off x="10274808" y="3977640"/>
-            <a:ext cx="972312" cy="749808"/>
-          </a:xfrm>
-          <a:prstGeom prst="roundRect">
-            <a:avLst>
-              <a:gd name="adj" fmla="val 14634"/>
-            </a:avLst>
-          </a:prstGeom>
-          <a:solidFill>
-            <a:srgbClr val="D69A2D"/>
-          </a:solidFill>
-          <a:ln w="12700">
-            <a:solidFill>
-              <a:srgbClr val="D69A2D"/>
-            </a:solidFill>
-            <a:prstDash val="solid"/>
-          </a:ln>
-        </p:spPr>
-      </p:sp>
-      <p:sp>
-        <p:nvSpPr>
-          <p:cNvPr id="18" name="Text 16"/>
-          <p:cNvSpPr/>
-          <p:nvPr/>
-        </p:nvSpPr>
-        <p:spPr>
-          <a:xfrm>
-            <a:off x="10347960" y="4169664"/>
-            <a:ext cx="826008" cy="310896"/>
-          </a:xfrm>
-          <a:prstGeom prst="rect">
-            <a:avLst/>
-          </a:prstGeom>
-          <a:noFill/>
-          <a:ln/>
-        </p:spPr>
-        <p:txBody>
-          <a:bodyPr wrap="square" lIns="0" tIns="0" rIns="0" bIns="0" rtlCol="0" anchor="ctr">
-            <a:normAutofit/>
-          </a:bodyPr>
-          <a:lstStyle/>
-          <a:p>
-            <a:pPr algn="ctr" indent="0" marL="0">
-              <a:buNone/>
-            </a:pPr>
-            <a:r>
-              <a:rPr lang="en-US" sz="1500" b="1" dirty="0">
-                <a:solidFill>
-                  <a:srgbClr val="FFFFFF"/>
-                </a:solidFill>
-                <a:latin typeface="Aptos" pitchFamily="34" charset="0"/>
-                <a:ea typeface="Aptos" pitchFamily="34" charset="-122"/>
-                <a:cs typeface="Aptos" pitchFamily="34" charset="-120"/>
-              </a:rPr>
-              <a:t>Artifact</a:t>
-            </a:r>
-            <a:endParaRPr lang="en-US" sz="1500" dirty="0"/>
+            <a:r>
+              <a:rPr lang="en-US" sz="1380" dirty="0">
+                <a:solidFill>
+                  <a:srgbClr val="17364A"/>
+                </a:solidFill>
+                <a:latin typeface="Aptos" pitchFamily="34" charset="0"/>
+                <a:ea typeface="Aptos" pitchFamily="34" charset="-122"/>
+                <a:cs typeface="Aptos" pitchFamily="34" charset="-120"/>
+              </a:rPr>
+              <a:t>Use a tool when no comparable local process exists.</a:t>
+            </a:r>
+            <a:endParaRPr lang="en-US" sz="1380" dirty="0"/>
+          </a:p>
+          <a:p>
+            <a:r>
+              <a:rPr lang="en-US" sz="1380" dirty="0">
+                <a:solidFill>
+                  <a:srgbClr val="17364A"/>
+                </a:solidFill>
+                <a:latin typeface="Aptos" pitchFamily="34" charset="0"/>
+                <a:ea typeface="Aptos" pitchFamily="34" charset="-122"/>
+                <a:cs typeface="Aptos" pitchFamily="34" charset="-120"/>
+              </a:rPr>
+              <a:t>Adapt existing department templates when they already fit the purpose.</a:t>
+            </a:r>
+            <a:endParaRPr lang="en-US" sz="1380" dirty="0"/>
+          </a:p>
+          <a:p>
+            <a:r>
+              <a:rPr lang="en-US" sz="1380" dirty="0">
+                <a:solidFill>
+                  <a:srgbClr val="17364A"/>
+                </a:solidFill>
+                <a:latin typeface="Aptos" pitchFamily="34" charset="0"/>
+                <a:ea typeface="Aptos" pitchFamily="34" charset="-122"/>
+                <a:cs typeface="Aptos" pitchFamily="34" charset="-120"/>
+              </a:rPr>
+              <a:t>Save the completed artifact as evidence of the decision.</a:t>
+            </a:r>
+            <a:endParaRPr lang="en-US" sz="1380" dirty="0"/>
           </a:p>
         </p:txBody>
       </p:sp>
@@ -16373,13 +14953,11 @@
             </a:avLst>
           </a:prstGeom>
           <a:solidFill>
-            <a:srgbClr val="FFFFFF">
-              <a:alpha val="88000"/>
-            </a:srgbClr>
+            <a:srgbClr val="FFFFFF"/>
           </a:solidFill>
           <a:ln w="12700">
             <a:solidFill>
-              <a:srgbClr val="D6E8F2"/>
+              <a:srgbClr val="B9D7E6"/>
             </a:solidFill>
             <a:prstDash val="solid"/>
           </a:ln>
@@ -16387,190 +14965,112 @@
       </p:sp>
       <p:sp>
         <p:nvSpPr>
-          <p:cNvPr id="14" name="Shape 12"/>
-          <p:cNvSpPr/>
-          <p:nvPr/>
-        </p:nvSpPr>
-        <p:spPr>
-          <a:xfrm>
-            <a:off x="7891272" y="3108960"/>
-            <a:ext cx="566928" cy="566928"/>
-          </a:xfrm>
-          <a:prstGeom prst="ellipse">
-            <a:avLst/>
-          </a:prstGeom>
-          <a:solidFill>
-            <a:srgbClr val="0068B7"/>
-          </a:solidFill>
-          <a:ln w="12700">
-            <a:solidFill>
-              <a:srgbClr val="0068B7"/>
-            </a:solidFill>
-            <a:prstDash val="solid"/>
-          </a:ln>
-        </p:spPr>
-      </p:sp>
-      <p:sp>
-        <p:nvSpPr>
-          <p:cNvPr id="15" name="Shape 13"/>
-          <p:cNvSpPr/>
-          <p:nvPr/>
-        </p:nvSpPr>
-        <p:spPr>
-          <a:xfrm>
-            <a:off x="10287000" y="3108960"/>
-            <a:ext cx="566928" cy="566928"/>
-          </a:xfrm>
-          <a:prstGeom prst="ellipse">
-            <a:avLst/>
-          </a:prstGeom>
-          <a:solidFill>
-            <a:srgbClr val="2F8A28"/>
-          </a:solidFill>
-          <a:ln w="12700">
-            <a:solidFill>
-              <a:srgbClr val="2F8A28"/>
-            </a:solidFill>
-            <a:prstDash val="solid"/>
-          </a:ln>
-        </p:spPr>
+          <p:cNvPr id="14" name="Text 12"/>
+          <p:cNvSpPr/>
+          <p:nvPr/>
+        </p:nvSpPr>
+        <p:spPr>
+          <a:xfrm>
+            <a:off x="7799832" y="2935224"/>
+            <a:ext cx="3145536" cy="256032"/>
+          </a:xfrm>
+          <a:prstGeom prst="rect">
+            <a:avLst/>
+          </a:prstGeom>
+          <a:noFill/>
+          <a:ln/>
+        </p:spPr>
+        <p:txBody>
+          <a:bodyPr wrap="square" lIns="0" tIns="0" rIns="0" bIns="0" rtlCol="0" anchor="ctr"/>
+          <a:lstStyle/>
+          <a:p>
+            <a:pPr indent="0" marL="0">
+              <a:buNone/>
+            </a:pPr>
+            <a:r>
+              <a:rPr lang="en-US" sz="1300" b="1" dirty="0">
+                <a:solidFill>
+                  <a:srgbClr val="0068B7"/>
+                </a:solidFill>
+                <a:latin typeface="Aptos" pitchFamily="34" charset="0"/>
+                <a:ea typeface="Aptos" pitchFamily="34" charset="-122"/>
+                <a:cs typeface="Aptos" pitchFamily="34" charset="-120"/>
+              </a:rPr>
+              <a:t>Concept checkpoints</a:t>
+            </a:r>
+            <a:endParaRPr lang="en-US" sz="1300" dirty="0"/>
+          </a:p>
+        </p:txBody>
+      </p:sp>
+      <p:sp>
+        <p:nvSpPr>
+          <p:cNvPr id="15" name="Text 13"/>
+          <p:cNvSpPr/>
+          <p:nvPr/>
+        </p:nvSpPr>
+        <p:spPr>
+          <a:xfrm>
+            <a:off x="7818120" y="3300984"/>
+            <a:ext cx="3090672" cy="877824"/>
+          </a:xfrm>
+          <a:prstGeom prst="rect">
+            <a:avLst/>
+          </a:prstGeom>
+          <a:noFill/>
+          <a:ln/>
+        </p:spPr>
+        <p:txBody>
+          <a:bodyPr wrap="square" lIns="254" tIns="254" rIns="254" bIns="254" rtlCol="0" anchor="t">
+            <a:normAutofit/>
+          </a:bodyPr>
+          <a:lstStyle/>
+          <a:p>
+            <a:r>
+              <a:rPr lang="en-US" sz="1380" dirty="0">
+                <a:solidFill>
+                  <a:srgbClr val="17364A"/>
+                </a:solidFill>
+                <a:latin typeface="Aptos" pitchFamily="34" charset="0"/>
+                <a:ea typeface="Aptos" pitchFamily="34" charset="-122"/>
+                <a:cs typeface="Aptos" pitchFamily="34" charset="-120"/>
+              </a:rPr>
+              <a:t>Explain why regulatory readiness requires monitoring, interpretation, documentation, and.</a:t>
+            </a:r>
+            <a:endParaRPr lang="en-US" sz="1380" dirty="0"/>
+          </a:p>
+          <a:p>
+            <a:r>
+              <a:rPr lang="en-US" sz="1380" dirty="0">
+                <a:solidFill>
+                  <a:srgbClr val="17364A"/>
+                </a:solidFill>
+                <a:latin typeface="Aptos" pitchFamily="34" charset="0"/>
+                <a:ea typeface="Aptos" pitchFamily="34" charset="-122"/>
+                <a:cs typeface="Aptos" pitchFamily="34" charset="-120"/>
+              </a:rPr>
+              <a:t>Distinguish between binding requirements, agency policy, professional guidance, standards,.</a:t>
+            </a:r>
+            <a:endParaRPr lang="en-US" sz="1380" dirty="0"/>
+          </a:p>
+          <a:p>
+            <a:r>
+              <a:rPr lang="en-US" sz="1380" dirty="0">
+                <a:solidFill>
+                  <a:srgbClr val="17364A"/>
+                </a:solidFill>
+                <a:latin typeface="Aptos" pitchFamily="34" charset="0"/>
+                <a:ea typeface="Aptos" pitchFamily="34" charset="-122"/>
+                <a:cs typeface="Aptos" pitchFamily="34" charset="-120"/>
+              </a:rPr>
+              <a:t>Create a policy scan process for AI-related developments.</a:t>
+            </a:r>
+            <a:endParaRPr lang="en-US" sz="1380" dirty="0"/>
+          </a:p>
+        </p:txBody>
       </p:sp>
       <p:sp>
         <p:nvSpPr>
           <p:cNvPr id="16" name="Shape 14"/>
-          <p:cNvSpPr/>
-          <p:nvPr/>
-        </p:nvSpPr>
-        <p:spPr>
-          <a:xfrm>
-            <a:off x="9089136" y="3456432"/>
-            <a:ext cx="566928" cy="566928"/>
-          </a:xfrm>
-          <a:prstGeom prst="ellipse">
-            <a:avLst/>
-          </a:prstGeom>
-          <a:solidFill>
-            <a:srgbClr val="6A4CA3"/>
-          </a:solidFill>
-          <a:ln w="12700">
-            <a:solidFill>
-              <a:srgbClr val="6A4CA3"/>
-            </a:solidFill>
-            <a:prstDash val="solid"/>
-          </a:ln>
-        </p:spPr>
-      </p:sp>
-      <p:sp>
-        <p:nvSpPr>
-          <p:cNvPr id="17" name="Shape 15"/>
-          <p:cNvSpPr/>
-          <p:nvPr/>
-        </p:nvSpPr>
-        <p:spPr>
-          <a:xfrm>
-            <a:off x="8385048" y="3419856"/>
-            <a:ext cx="1975104" cy="0"/>
-          </a:xfrm>
-          <a:prstGeom prst="line">
-            <a:avLst/>
-          </a:prstGeom>
-          <a:noFill/>
-          <a:ln w="25400">
-            <a:solidFill>
-              <a:srgbClr val="8ABBD8"/>
-            </a:solidFill>
-            <a:prstDash val="solid"/>
-          </a:ln>
-        </p:spPr>
-      </p:sp>
-      <p:sp>
-        <p:nvSpPr>
-          <p:cNvPr id="18" name="Shape 16"/>
-          <p:cNvSpPr/>
-          <p:nvPr/>
-        </p:nvSpPr>
-        <p:spPr>
-          <a:xfrm>
-            <a:off x="8202168" y="3630168"/>
-            <a:ext cx="1170432" cy="118872"/>
-          </a:xfrm>
-          <a:prstGeom prst="line">
-            <a:avLst/>
-          </a:prstGeom>
-          <a:noFill/>
-          <a:ln w="25400">
-            <a:solidFill>
-              <a:srgbClr val="8ABBD8"/>
-            </a:solidFill>
-            <a:prstDash val="solid"/>
-          </a:ln>
-        </p:spPr>
-      </p:sp>
-      <p:sp>
-        <p:nvSpPr>
-          <p:cNvPr id="19" name="Shape 17"/>
-          <p:cNvSpPr/>
-          <p:nvPr/>
-        </p:nvSpPr>
-        <p:spPr>
-          <a:xfrm>
-            <a:off x="10543032" y="3630168"/>
-            <a:ext cx="-1170432" cy="118872"/>
-          </a:xfrm>
-          <a:prstGeom prst="line">
-            <a:avLst/>
-          </a:prstGeom>
-          <a:noFill/>
-          <a:ln w="25400">
-            <a:solidFill>
-              <a:srgbClr val="8ABBD8"/>
-            </a:solidFill>
-            <a:prstDash val="solid"/>
-          </a:ln>
-        </p:spPr>
-      </p:sp>
-      <p:sp>
-        <p:nvSpPr>
-          <p:cNvPr id="20" name="Text 18"/>
-          <p:cNvSpPr/>
-          <p:nvPr/>
-        </p:nvSpPr>
-        <p:spPr>
-          <a:xfrm>
-            <a:off x="7863840" y="4069080"/>
-            <a:ext cx="3017520" cy="164592"/>
-          </a:xfrm>
-          <a:prstGeom prst="rect">
-            <a:avLst/>
-          </a:prstGeom>
-          <a:noFill/>
-          <a:ln/>
-        </p:spPr>
-        <p:txBody>
-          <a:bodyPr wrap="square" lIns="0" tIns="0" rIns="0" bIns="0" rtlCol="0" anchor="ctr"/>
-          <a:lstStyle/>
-          <a:p>
-            <a:pPr algn="ctr" indent="0" marL="0">
-              <a:buNone/>
-            </a:pPr>
-            <a:r>
-              <a:rPr lang="en-US" sz="900" b="1" dirty="0">
-                <a:solidFill>
-                  <a:srgbClr val="003A63"/>
-                </a:solidFill>
-                <a:latin typeface="Aptos" pitchFamily="34" charset="0"/>
-                <a:ea typeface="Aptos" pitchFamily="34" charset="-122"/>
-                <a:cs typeface="Aptos" pitchFamily="34" charset="-120"/>
-              </a:rPr>
-              <a:t>Decision rights</a:t>
-            </a:r>
-            <a:endParaRPr lang="en-US" sz="900" dirty="0"/>
-          </a:p>
-        </p:txBody>
-      </p:sp>
-      <p:sp>
-        <p:nvSpPr>
-          <p:cNvPr id="21" name="Shape 19"/>
           <p:cNvSpPr/>
           <p:nvPr/>
         </p:nvSpPr>
@@ -16597,7 +15097,7 @@
       </p:sp>
       <p:sp>
         <p:nvSpPr>
-          <p:cNvPr id="22" name="Text 20"/>
+          <p:cNvPr id="17" name="Text 15"/>
           <p:cNvSpPr/>
           <p:nvPr/>
         </p:nvSpPr>
@@ -16636,7 +15136,7 @@
       </p:sp>
       <p:sp>
         <p:nvSpPr>
-          <p:cNvPr id="23" name="Text 21"/>
+          <p:cNvPr id="18" name="Text 16"/>
           <p:cNvSpPr/>
           <p:nvPr/>
         </p:nvSpPr>
@@ -17144,13 +15644,11 @@
             </a:avLst>
           </a:prstGeom>
           <a:solidFill>
-            <a:srgbClr val="FFFFFF">
-              <a:alpha val="88000"/>
-            </a:srgbClr>
+            <a:srgbClr val="FFFFFF"/>
           </a:solidFill>
           <a:ln w="12700">
             <a:solidFill>
-              <a:srgbClr val="D6E8F2"/>
+              <a:srgbClr val="B9D7E6"/>
             </a:solidFill>
             <a:prstDash val="solid"/>
           </a:ln>
@@ -17158,190 +15656,112 @@
       </p:sp>
       <p:sp>
         <p:nvSpPr>
-          <p:cNvPr id="14" name="Shape 12"/>
-          <p:cNvSpPr/>
-          <p:nvPr/>
-        </p:nvSpPr>
-        <p:spPr>
-          <a:xfrm>
-            <a:off x="7891272" y="3108960"/>
-            <a:ext cx="566928" cy="566928"/>
-          </a:xfrm>
-          <a:prstGeom prst="ellipse">
-            <a:avLst/>
-          </a:prstGeom>
-          <a:solidFill>
-            <a:srgbClr val="0068B7"/>
-          </a:solidFill>
-          <a:ln w="12700">
-            <a:solidFill>
-              <a:srgbClr val="0068B7"/>
-            </a:solidFill>
-            <a:prstDash val="solid"/>
-          </a:ln>
-        </p:spPr>
-      </p:sp>
-      <p:sp>
-        <p:nvSpPr>
-          <p:cNvPr id="15" name="Shape 13"/>
-          <p:cNvSpPr/>
-          <p:nvPr/>
-        </p:nvSpPr>
-        <p:spPr>
-          <a:xfrm>
-            <a:off x="10287000" y="3108960"/>
-            <a:ext cx="566928" cy="566928"/>
-          </a:xfrm>
-          <a:prstGeom prst="ellipse">
-            <a:avLst/>
-          </a:prstGeom>
-          <a:solidFill>
-            <a:srgbClr val="2F8A28"/>
-          </a:solidFill>
-          <a:ln w="12700">
-            <a:solidFill>
-              <a:srgbClr val="2F8A28"/>
-            </a:solidFill>
-            <a:prstDash val="solid"/>
-          </a:ln>
-        </p:spPr>
+          <p:cNvPr id="14" name="Text 12"/>
+          <p:cNvSpPr/>
+          <p:nvPr/>
+        </p:nvSpPr>
+        <p:spPr>
+          <a:xfrm>
+            <a:off x="7799832" y="2935224"/>
+            <a:ext cx="3145536" cy="256032"/>
+          </a:xfrm>
+          <a:prstGeom prst="rect">
+            <a:avLst/>
+          </a:prstGeom>
+          <a:noFill/>
+          <a:ln/>
+        </p:spPr>
+        <p:txBody>
+          <a:bodyPr wrap="square" lIns="0" tIns="0" rIns="0" bIns="0" rtlCol="0" anchor="ctr"/>
+          <a:lstStyle/>
+          <a:p>
+            <a:pPr indent="0" marL="0">
+              <a:buNone/>
+            </a:pPr>
+            <a:r>
+              <a:rPr lang="en-US" sz="1300" b="1" dirty="0">
+                <a:solidFill>
+                  <a:srgbClr val="0068B7"/>
+                </a:solidFill>
+                <a:latin typeface="Aptos" pitchFamily="34" charset="0"/>
+                <a:ea typeface="Aptos" pitchFamily="34" charset="-122"/>
+                <a:cs typeface="Aptos" pitchFamily="34" charset="-120"/>
+              </a:rPr>
+              <a:t>Concept checkpoints</a:t>
+            </a:r>
+            <a:endParaRPr lang="en-US" sz="1300" dirty="0"/>
+          </a:p>
+        </p:txBody>
+      </p:sp>
+      <p:sp>
+        <p:nvSpPr>
+          <p:cNvPr id="15" name="Text 13"/>
+          <p:cNvSpPr/>
+          <p:nvPr/>
+        </p:nvSpPr>
+        <p:spPr>
+          <a:xfrm>
+            <a:off x="7818120" y="3300984"/>
+            <a:ext cx="3090672" cy="877824"/>
+          </a:xfrm>
+          <a:prstGeom prst="rect">
+            <a:avLst/>
+          </a:prstGeom>
+          <a:noFill/>
+          <a:ln/>
+        </p:spPr>
+        <p:txBody>
+          <a:bodyPr wrap="square" lIns="254" tIns="254" rIns="254" bIns="254" rtlCol="0" anchor="t">
+            <a:normAutofit/>
+          </a:bodyPr>
+          <a:lstStyle/>
+          <a:p>
+            <a:r>
+              <a:rPr lang="en-US" sz="1380" dirty="0">
+                <a:solidFill>
+                  <a:srgbClr val="17364A"/>
+                </a:solidFill>
+                <a:latin typeface="Aptos" pitchFamily="34" charset="0"/>
+                <a:ea typeface="Aptos" pitchFamily="34" charset="-122"/>
+                <a:cs typeface="Aptos" pitchFamily="34" charset="-120"/>
+              </a:rPr>
+              <a:t>The public health AI policy landscape is evolving quickly across federal agencies, states,.</a:t>
+            </a:r>
+            <a:endParaRPr lang="en-US" sz="1380" dirty="0"/>
+          </a:p>
+          <a:p>
+            <a:r>
+              <a:rPr lang="en-US" sz="1380" dirty="0">
+                <a:solidFill>
+                  <a:srgbClr val="17364A"/>
+                </a:solidFill>
+                <a:latin typeface="Aptos" pitchFamily="34" charset="0"/>
+                <a:ea typeface="Aptos" pitchFamily="34" charset="-122"/>
+                <a:cs typeface="Aptos" pitchFamily="34" charset="-120"/>
+              </a:rPr>
+              <a:t>Public health agencies do not need to wait for every rule to be settled before acting.</a:t>
+            </a:r>
+            <a:endParaRPr lang="en-US" sz="1380" dirty="0"/>
+          </a:p>
+          <a:p>
+            <a:r>
+              <a:rPr lang="en-US" sz="1380" dirty="0">
+                <a:solidFill>
+                  <a:srgbClr val="17364A"/>
+                </a:solidFill>
+                <a:latin typeface="Aptos" pitchFamily="34" charset="0"/>
+                <a:ea typeface="Aptos" pitchFamily="34" charset="-122"/>
+                <a:cs typeface="Aptos" pitchFamily="34" charset="-120"/>
+              </a:rPr>
+              <a:t>Regulatory readiness means the agency can identify relevant requirements, update internal.</a:t>
+            </a:r>
+            <a:endParaRPr lang="en-US" sz="1380" dirty="0"/>
+          </a:p>
+        </p:txBody>
       </p:sp>
       <p:sp>
         <p:nvSpPr>
           <p:cNvPr id="16" name="Shape 14"/>
-          <p:cNvSpPr/>
-          <p:nvPr/>
-        </p:nvSpPr>
-        <p:spPr>
-          <a:xfrm>
-            <a:off x="9089136" y="3456432"/>
-            <a:ext cx="566928" cy="566928"/>
-          </a:xfrm>
-          <a:prstGeom prst="ellipse">
-            <a:avLst/>
-          </a:prstGeom>
-          <a:solidFill>
-            <a:srgbClr val="6A4CA3"/>
-          </a:solidFill>
-          <a:ln w="12700">
-            <a:solidFill>
-              <a:srgbClr val="6A4CA3"/>
-            </a:solidFill>
-            <a:prstDash val="solid"/>
-          </a:ln>
-        </p:spPr>
-      </p:sp>
-      <p:sp>
-        <p:nvSpPr>
-          <p:cNvPr id="17" name="Shape 15"/>
-          <p:cNvSpPr/>
-          <p:nvPr/>
-        </p:nvSpPr>
-        <p:spPr>
-          <a:xfrm>
-            <a:off x="8385048" y="3419856"/>
-            <a:ext cx="1975104" cy="0"/>
-          </a:xfrm>
-          <a:prstGeom prst="line">
-            <a:avLst/>
-          </a:prstGeom>
-          <a:noFill/>
-          <a:ln w="25400">
-            <a:solidFill>
-              <a:srgbClr val="8ABBD8"/>
-            </a:solidFill>
-            <a:prstDash val="solid"/>
-          </a:ln>
-        </p:spPr>
-      </p:sp>
-      <p:sp>
-        <p:nvSpPr>
-          <p:cNvPr id="18" name="Shape 16"/>
-          <p:cNvSpPr/>
-          <p:nvPr/>
-        </p:nvSpPr>
-        <p:spPr>
-          <a:xfrm>
-            <a:off x="8202168" y="3630168"/>
-            <a:ext cx="1170432" cy="118872"/>
-          </a:xfrm>
-          <a:prstGeom prst="line">
-            <a:avLst/>
-          </a:prstGeom>
-          <a:noFill/>
-          <a:ln w="25400">
-            <a:solidFill>
-              <a:srgbClr val="8ABBD8"/>
-            </a:solidFill>
-            <a:prstDash val="solid"/>
-          </a:ln>
-        </p:spPr>
-      </p:sp>
-      <p:sp>
-        <p:nvSpPr>
-          <p:cNvPr id="19" name="Shape 17"/>
-          <p:cNvSpPr/>
-          <p:nvPr/>
-        </p:nvSpPr>
-        <p:spPr>
-          <a:xfrm>
-            <a:off x="10543032" y="3630168"/>
-            <a:ext cx="-1170432" cy="118872"/>
-          </a:xfrm>
-          <a:prstGeom prst="line">
-            <a:avLst/>
-          </a:prstGeom>
-          <a:noFill/>
-          <a:ln w="25400">
-            <a:solidFill>
-              <a:srgbClr val="8ABBD8"/>
-            </a:solidFill>
-            <a:prstDash val="solid"/>
-          </a:ln>
-        </p:spPr>
-      </p:sp>
-      <p:sp>
-        <p:nvSpPr>
-          <p:cNvPr id="20" name="Text 18"/>
-          <p:cNvSpPr/>
-          <p:nvPr/>
-        </p:nvSpPr>
-        <p:spPr>
-          <a:xfrm>
-            <a:off x="7863840" y="4069080"/>
-            <a:ext cx="3017520" cy="164592"/>
-          </a:xfrm>
-          <a:prstGeom prst="rect">
-            <a:avLst/>
-          </a:prstGeom>
-          <a:noFill/>
-          <a:ln/>
-        </p:spPr>
-        <p:txBody>
-          <a:bodyPr wrap="square" lIns="0" tIns="0" rIns="0" bIns="0" rtlCol="0" anchor="ctr"/>
-          <a:lstStyle/>
-          <a:p>
-            <a:pPr algn="ctr" indent="0" marL="0">
-              <a:buNone/>
-            </a:pPr>
-            <a:r>
-              <a:rPr lang="en-US" sz="900" b="1" dirty="0">
-                <a:solidFill>
-                  <a:srgbClr val="003A63"/>
-                </a:solidFill>
-                <a:latin typeface="Aptos" pitchFamily="34" charset="0"/>
-                <a:ea typeface="Aptos" pitchFamily="34" charset="-122"/>
-                <a:cs typeface="Aptos" pitchFamily="34" charset="-120"/>
-              </a:rPr>
-              <a:t>Decision rights</a:t>
-            </a:r>
-            <a:endParaRPr lang="en-US" sz="900" dirty="0"/>
-          </a:p>
-        </p:txBody>
-      </p:sp>
-      <p:sp>
-        <p:nvSpPr>
-          <p:cNvPr id="21" name="Shape 19"/>
           <p:cNvSpPr/>
           <p:nvPr/>
         </p:nvSpPr>
@@ -17368,7 +15788,7 @@
       </p:sp>
       <p:sp>
         <p:nvSpPr>
-          <p:cNvPr id="22" name="Text 20"/>
+          <p:cNvPr id="17" name="Text 15"/>
           <p:cNvSpPr/>
           <p:nvPr/>
         </p:nvSpPr>
@@ -17407,7 +15827,7 @@
       </p:sp>
       <p:sp>
         <p:nvSpPr>
-          <p:cNvPr id="23" name="Text 21"/>
+          <p:cNvPr id="18" name="Text 16"/>
           <p:cNvSpPr/>
           <p:nvPr/>
         </p:nvSpPr>
@@ -17915,13 +16335,11 @@
             </a:avLst>
           </a:prstGeom>
           <a:solidFill>
-            <a:srgbClr val="FFFFFF">
-              <a:alpha val="88000"/>
-            </a:srgbClr>
+            <a:srgbClr val="FFFFFF"/>
           </a:solidFill>
           <a:ln w="12700">
             <a:solidFill>
-              <a:srgbClr val="D6E8F2"/>
+              <a:srgbClr val="B9D7E6"/>
             </a:solidFill>
             <a:prstDash val="solid"/>
           </a:ln>
@@ -17929,190 +16347,112 @@
       </p:sp>
       <p:sp>
         <p:nvSpPr>
-          <p:cNvPr id="14" name="Shape 12"/>
-          <p:cNvSpPr/>
-          <p:nvPr/>
-        </p:nvSpPr>
-        <p:spPr>
-          <a:xfrm>
-            <a:off x="7891272" y="3108960"/>
-            <a:ext cx="566928" cy="566928"/>
-          </a:xfrm>
-          <a:prstGeom prst="ellipse">
-            <a:avLst/>
-          </a:prstGeom>
-          <a:solidFill>
-            <a:srgbClr val="0068B7"/>
-          </a:solidFill>
-          <a:ln w="12700">
-            <a:solidFill>
-              <a:srgbClr val="0068B7"/>
-            </a:solidFill>
-            <a:prstDash val="solid"/>
-          </a:ln>
-        </p:spPr>
-      </p:sp>
-      <p:sp>
-        <p:nvSpPr>
-          <p:cNvPr id="15" name="Shape 13"/>
-          <p:cNvSpPr/>
-          <p:nvPr/>
-        </p:nvSpPr>
-        <p:spPr>
-          <a:xfrm>
-            <a:off x="10287000" y="3108960"/>
-            <a:ext cx="566928" cy="566928"/>
-          </a:xfrm>
-          <a:prstGeom prst="ellipse">
-            <a:avLst/>
-          </a:prstGeom>
-          <a:solidFill>
-            <a:srgbClr val="2F8A28"/>
-          </a:solidFill>
-          <a:ln w="12700">
-            <a:solidFill>
-              <a:srgbClr val="2F8A28"/>
-            </a:solidFill>
-            <a:prstDash val="solid"/>
-          </a:ln>
-        </p:spPr>
+          <p:cNvPr id="14" name="Text 12"/>
+          <p:cNvSpPr/>
+          <p:nvPr/>
+        </p:nvSpPr>
+        <p:spPr>
+          <a:xfrm>
+            <a:off x="7799832" y="2935224"/>
+            <a:ext cx="3145536" cy="256032"/>
+          </a:xfrm>
+          <a:prstGeom prst="rect">
+            <a:avLst/>
+          </a:prstGeom>
+          <a:noFill/>
+          <a:ln/>
+        </p:spPr>
+        <p:txBody>
+          <a:bodyPr wrap="square" lIns="0" tIns="0" rIns="0" bIns="0" rtlCol="0" anchor="ctr"/>
+          <a:lstStyle/>
+          <a:p>
+            <a:pPr indent="0" marL="0">
+              <a:buNone/>
+            </a:pPr>
+            <a:r>
+              <a:rPr lang="en-US" sz="1300" b="1" dirty="0">
+                <a:solidFill>
+                  <a:srgbClr val="0068B7"/>
+                </a:solidFill>
+                <a:latin typeface="Aptos" pitchFamily="34" charset="0"/>
+                <a:ea typeface="Aptos" pitchFamily="34" charset="-122"/>
+                <a:cs typeface="Aptos" pitchFamily="34" charset="-120"/>
+              </a:rPr>
+              <a:t>Concept checkpoints</a:t>
+            </a:r>
+            <a:endParaRPr lang="en-US" sz="1300" dirty="0"/>
+          </a:p>
+        </p:txBody>
+      </p:sp>
+      <p:sp>
+        <p:nvSpPr>
+          <p:cNvPr id="15" name="Text 13"/>
+          <p:cNvSpPr/>
+          <p:nvPr/>
+        </p:nvSpPr>
+        <p:spPr>
+          <a:xfrm>
+            <a:off x="7818120" y="3300984"/>
+            <a:ext cx="3090672" cy="877824"/>
+          </a:xfrm>
+          <a:prstGeom prst="rect">
+            <a:avLst/>
+          </a:prstGeom>
+          <a:noFill/>
+          <a:ln/>
+        </p:spPr>
+        <p:txBody>
+          <a:bodyPr wrap="square" lIns="254" tIns="254" rIns="254" bIns="254" rtlCol="0" anchor="t">
+            <a:normAutofit/>
+          </a:bodyPr>
+          <a:lstStyle/>
+          <a:p>
+            <a:r>
+              <a:rPr lang="en-US" sz="1380" dirty="0">
+                <a:solidFill>
+                  <a:srgbClr val="17364A"/>
+                </a:solidFill>
+                <a:latin typeface="Aptos" pitchFamily="34" charset="0"/>
+                <a:ea typeface="Aptos" pitchFamily="34" charset="-122"/>
+                <a:cs typeface="Aptos" pitchFamily="34" charset="-120"/>
+              </a:rPr>
+              <a:t>It is not legal advice and does not replace review by agency legal counsel, privacy.</a:t>
+            </a:r>
+            <a:endParaRPr lang="en-US" sz="1380" dirty="0"/>
+          </a:p>
+          <a:p>
+            <a:r>
+              <a:rPr lang="en-US" sz="1380" dirty="0">
+                <a:solidFill>
+                  <a:srgbClr val="17364A"/>
+                </a:solidFill>
+                <a:latin typeface="Aptos" pitchFamily="34" charset="0"/>
+                <a:ea typeface="Aptos" pitchFamily="34" charset="-122"/>
+                <a:cs typeface="Aptos" pitchFamily="34" charset="-120"/>
+              </a:rPr>
+              <a:t>Requirements may vary by state, locality, territory, Tribe, agency, funding source,.</a:t>
+            </a:r>
+            <a:endParaRPr lang="en-US" sz="1380" dirty="0"/>
+          </a:p>
+          <a:p>
+            <a:r>
+              <a:rPr lang="en-US" sz="1380" dirty="0">
+                <a:solidFill>
+                  <a:srgbClr val="17364A"/>
+                </a:solidFill>
+                <a:latin typeface="Aptos" pitchFamily="34" charset="0"/>
+                <a:ea typeface="Aptos" pitchFamily="34" charset="-122"/>
+                <a:cs typeface="Aptos" pitchFamily="34" charset="-120"/>
+              </a:rPr>
+              <a:t>Learners should use this module to identify the issues that require review and should.</a:t>
+            </a:r>
+            <a:endParaRPr lang="en-US" sz="1380" dirty="0"/>
+          </a:p>
+        </p:txBody>
       </p:sp>
       <p:sp>
         <p:nvSpPr>
           <p:cNvPr id="16" name="Shape 14"/>
-          <p:cNvSpPr/>
-          <p:nvPr/>
-        </p:nvSpPr>
-        <p:spPr>
-          <a:xfrm>
-            <a:off x="9089136" y="3456432"/>
-            <a:ext cx="566928" cy="566928"/>
-          </a:xfrm>
-          <a:prstGeom prst="ellipse">
-            <a:avLst/>
-          </a:prstGeom>
-          <a:solidFill>
-            <a:srgbClr val="6A4CA3"/>
-          </a:solidFill>
-          <a:ln w="12700">
-            <a:solidFill>
-              <a:srgbClr val="6A4CA3"/>
-            </a:solidFill>
-            <a:prstDash val="solid"/>
-          </a:ln>
-        </p:spPr>
-      </p:sp>
-      <p:sp>
-        <p:nvSpPr>
-          <p:cNvPr id="17" name="Shape 15"/>
-          <p:cNvSpPr/>
-          <p:nvPr/>
-        </p:nvSpPr>
-        <p:spPr>
-          <a:xfrm>
-            <a:off x="8385048" y="3419856"/>
-            <a:ext cx="1975104" cy="0"/>
-          </a:xfrm>
-          <a:prstGeom prst="line">
-            <a:avLst/>
-          </a:prstGeom>
-          <a:noFill/>
-          <a:ln w="25400">
-            <a:solidFill>
-              <a:srgbClr val="8ABBD8"/>
-            </a:solidFill>
-            <a:prstDash val="solid"/>
-          </a:ln>
-        </p:spPr>
-      </p:sp>
-      <p:sp>
-        <p:nvSpPr>
-          <p:cNvPr id="18" name="Shape 16"/>
-          <p:cNvSpPr/>
-          <p:nvPr/>
-        </p:nvSpPr>
-        <p:spPr>
-          <a:xfrm>
-            <a:off x="8202168" y="3630168"/>
-            <a:ext cx="1170432" cy="118872"/>
-          </a:xfrm>
-          <a:prstGeom prst="line">
-            <a:avLst/>
-          </a:prstGeom>
-          <a:noFill/>
-          <a:ln w="25400">
-            <a:solidFill>
-              <a:srgbClr val="8ABBD8"/>
-            </a:solidFill>
-            <a:prstDash val="solid"/>
-          </a:ln>
-        </p:spPr>
-      </p:sp>
-      <p:sp>
-        <p:nvSpPr>
-          <p:cNvPr id="19" name="Shape 17"/>
-          <p:cNvSpPr/>
-          <p:nvPr/>
-        </p:nvSpPr>
-        <p:spPr>
-          <a:xfrm>
-            <a:off x="10543032" y="3630168"/>
-            <a:ext cx="-1170432" cy="118872"/>
-          </a:xfrm>
-          <a:prstGeom prst="line">
-            <a:avLst/>
-          </a:prstGeom>
-          <a:noFill/>
-          <a:ln w="25400">
-            <a:solidFill>
-              <a:srgbClr val="8ABBD8"/>
-            </a:solidFill>
-            <a:prstDash val="solid"/>
-          </a:ln>
-        </p:spPr>
-      </p:sp>
-      <p:sp>
-        <p:nvSpPr>
-          <p:cNvPr id="20" name="Text 18"/>
-          <p:cNvSpPr/>
-          <p:nvPr/>
-        </p:nvSpPr>
-        <p:spPr>
-          <a:xfrm>
-            <a:off x="7863840" y="4069080"/>
-            <a:ext cx="3017520" cy="164592"/>
-          </a:xfrm>
-          <a:prstGeom prst="rect">
-            <a:avLst/>
-          </a:prstGeom>
-          <a:noFill/>
-          <a:ln/>
-        </p:spPr>
-        <p:txBody>
-          <a:bodyPr wrap="square" lIns="0" tIns="0" rIns="0" bIns="0" rtlCol="0" anchor="ctr"/>
-          <a:lstStyle/>
-          <a:p>
-            <a:pPr algn="ctr" indent="0" marL="0">
-              <a:buNone/>
-            </a:pPr>
-            <a:r>
-              <a:rPr lang="en-US" sz="900" b="1" dirty="0">
-                <a:solidFill>
-                  <a:srgbClr val="003A63"/>
-                </a:solidFill>
-                <a:latin typeface="Aptos" pitchFamily="34" charset="0"/>
-                <a:ea typeface="Aptos" pitchFamily="34" charset="-122"/>
-                <a:cs typeface="Aptos" pitchFamily="34" charset="-120"/>
-              </a:rPr>
-              <a:t>Decision rights</a:t>
-            </a:r>
-            <a:endParaRPr lang="en-US" sz="900" dirty="0"/>
-          </a:p>
-        </p:txBody>
-      </p:sp>
-      <p:sp>
-        <p:nvSpPr>
-          <p:cNvPr id="21" name="Shape 19"/>
           <p:cNvSpPr/>
           <p:nvPr/>
         </p:nvSpPr>
@@ -18139,7 +16479,7 @@
       </p:sp>
       <p:sp>
         <p:nvSpPr>
-          <p:cNvPr id="22" name="Text 20"/>
+          <p:cNvPr id="17" name="Text 15"/>
           <p:cNvSpPr/>
           <p:nvPr/>
         </p:nvSpPr>
@@ -18178,7 +16518,7 @@
       </p:sp>
       <p:sp>
         <p:nvSpPr>
-          <p:cNvPr id="23" name="Text 21"/>
+          <p:cNvPr id="18" name="Text 16"/>
           <p:cNvSpPr/>
           <p:nvPr/>
         </p:nvSpPr>
@@ -18686,13 +17026,11 @@
             </a:avLst>
           </a:prstGeom>
           <a:solidFill>
-            <a:srgbClr val="FFFFFF">
-              <a:alpha val="88000"/>
-            </a:srgbClr>
+            <a:srgbClr val="FFFFFF"/>
           </a:solidFill>
           <a:ln w="12700">
             <a:solidFill>
-              <a:srgbClr val="D6E8F2"/>
+              <a:srgbClr val="B9D7E6"/>
             </a:solidFill>
             <a:prstDash val="solid"/>
           </a:ln>
@@ -18700,190 +17038,112 @@
       </p:sp>
       <p:sp>
         <p:nvSpPr>
-          <p:cNvPr id="14" name="Shape 12"/>
-          <p:cNvSpPr/>
-          <p:nvPr/>
-        </p:nvSpPr>
-        <p:spPr>
-          <a:xfrm>
-            <a:off x="7891272" y="3108960"/>
-            <a:ext cx="566928" cy="566928"/>
-          </a:xfrm>
-          <a:prstGeom prst="ellipse">
-            <a:avLst/>
-          </a:prstGeom>
-          <a:solidFill>
-            <a:srgbClr val="0068B7"/>
-          </a:solidFill>
-          <a:ln w="12700">
-            <a:solidFill>
-              <a:srgbClr val="0068B7"/>
-            </a:solidFill>
-            <a:prstDash val="solid"/>
-          </a:ln>
-        </p:spPr>
-      </p:sp>
-      <p:sp>
-        <p:nvSpPr>
-          <p:cNvPr id="15" name="Shape 13"/>
-          <p:cNvSpPr/>
-          <p:nvPr/>
-        </p:nvSpPr>
-        <p:spPr>
-          <a:xfrm>
-            <a:off x="10287000" y="3108960"/>
-            <a:ext cx="566928" cy="566928"/>
-          </a:xfrm>
-          <a:prstGeom prst="ellipse">
-            <a:avLst/>
-          </a:prstGeom>
-          <a:solidFill>
-            <a:srgbClr val="2F8A28"/>
-          </a:solidFill>
-          <a:ln w="12700">
-            <a:solidFill>
-              <a:srgbClr val="2F8A28"/>
-            </a:solidFill>
-            <a:prstDash val="solid"/>
-          </a:ln>
-        </p:spPr>
+          <p:cNvPr id="14" name="Text 12"/>
+          <p:cNvSpPr/>
+          <p:nvPr/>
+        </p:nvSpPr>
+        <p:spPr>
+          <a:xfrm>
+            <a:off x="7799832" y="2935224"/>
+            <a:ext cx="3145536" cy="256032"/>
+          </a:xfrm>
+          <a:prstGeom prst="rect">
+            <a:avLst/>
+          </a:prstGeom>
+          <a:noFill/>
+          <a:ln/>
+        </p:spPr>
+        <p:txBody>
+          <a:bodyPr wrap="square" lIns="0" tIns="0" rIns="0" bIns="0" rtlCol="0" anchor="ctr"/>
+          <a:lstStyle/>
+          <a:p>
+            <a:pPr indent="0" marL="0">
+              <a:buNone/>
+            </a:pPr>
+            <a:r>
+              <a:rPr lang="en-US" sz="1300" b="1" dirty="0">
+                <a:solidFill>
+                  <a:srgbClr val="0068B7"/>
+                </a:solidFill>
+                <a:latin typeface="Aptos" pitchFamily="34" charset="0"/>
+                <a:ea typeface="Aptos" pitchFamily="34" charset="-122"/>
+                <a:cs typeface="Aptos" pitchFamily="34" charset="-120"/>
+              </a:rPr>
+              <a:t>Concept checkpoints</a:t>
+            </a:r>
+            <a:endParaRPr lang="en-US" sz="1300" dirty="0"/>
+          </a:p>
+        </p:txBody>
+      </p:sp>
+      <p:sp>
+        <p:nvSpPr>
+          <p:cNvPr id="15" name="Text 13"/>
+          <p:cNvSpPr/>
+          <p:nvPr/>
+        </p:nvSpPr>
+        <p:spPr>
+          <a:xfrm>
+            <a:off x="7818120" y="3300984"/>
+            <a:ext cx="3090672" cy="877824"/>
+          </a:xfrm>
+          <a:prstGeom prst="rect">
+            <a:avLst/>
+          </a:prstGeom>
+          <a:noFill/>
+          <a:ln/>
+        </p:spPr>
+        <p:txBody>
+          <a:bodyPr wrap="square" lIns="254" tIns="254" rIns="254" bIns="254" rtlCol="0" anchor="t">
+            <a:normAutofit/>
+          </a:bodyPr>
+          <a:lstStyle/>
+          <a:p>
+            <a:r>
+              <a:rPr lang="en-US" sz="1380" dirty="0">
+                <a:solidFill>
+                  <a:srgbClr val="17364A"/>
+                </a:solidFill>
+                <a:latin typeface="Aptos" pitchFamily="34" charset="0"/>
+                <a:ea typeface="Aptos" pitchFamily="34" charset="-122"/>
+                <a:cs typeface="Aptos" pitchFamily="34" charset="-120"/>
+              </a:rPr>
+              <a:t>A local health department is considering AI tools for translation, complaint triage, and.</a:t>
+            </a:r>
+            <a:endParaRPr lang="en-US" sz="1380" dirty="0"/>
+          </a:p>
+          <a:p>
+            <a:r>
+              <a:rPr lang="en-US" sz="1380" dirty="0">
+                <a:solidFill>
+                  <a:srgbClr val="17364A"/>
+                </a:solidFill>
+                <a:latin typeface="Aptos" pitchFamily="34" charset="0"/>
+                <a:ea typeface="Aptos" pitchFamily="34" charset="-122"/>
+                <a:cs typeface="Aptos" pitchFamily="34" charset="-120"/>
+              </a:rPr>
+              <a:t>A policy scan identifies privacy, public records, procurement, accessibility,.</a:t>
+            </a:r>
+            <a:endParaRPr lang="en-US" sz="1380" dirty="0"/>
+          </a:p>
+          <a:p>
+            <a:r>
+              <a:rPr lang="en-US" sz="1380" dirty="0">
+                <a:solidFill>
+                  <a:srgbClr val="17364A"/>
+                </a:solidFill>
+                <a:latin typeface="Aptos" pitchFamily="34" charset="0"/>
+                <a:ea typeface="Aptos" pitchFamily="34" charset="-122"/>
+                <a:cs typeface="Aptos" pitchFamily="34" charset="-120"/>
+              </a:rPr>
+              <a:t>The agency creates a readiness memo that distinguishes existing requirements from emerging.</a:t>
+            </a:r>
+            <a:endParaRPr lang="en-US" sz="1380" dirty="0"/>
+          </a:p>
+        </p:txBody>
       </p:sp>
       <p:sp>
         <p:nvSpPr>
           <p:cNvPr id="16" name="Shape 14"/>
-          <p:cNvSpPr/>
-          <p:nvPr/>
-        </p:nvSpPr>
-        <p:spPr>
-          <a:xfrm>
-            <a:off x="9089136" y="3456432"/>
-            <a:ext cx="566928" cy="566928"/>
-          </a:xfrm>
-          <a:prstGeom prst="ellipse">
-            <a:avLst/>
-          </a:prstGeom>
-          <a:solidFill>
-            <a:srgbClr val="6A4CA3"/>
-          </a:solidFill>
-          <a:ln w="12700">
-            <a:solidFill>
-              <a:srgbClr val="6A4CA3"/>
-            </a:solidFill>
-            <a:prstDash val="solid"/>
-          </a:ln>
-        </p:spPr>
-      </p:sp>
-      <p:sp>
-        <p:nvSpPr>
-          <p:cNvPr id="17" name="Shape 15"/>
-          <p:cNvSpPr/>
-          <p:nvPr/>
-        </p:nvSpPr>
-        <p:spPr>
-          <a:xfrm>
-            <a:off x="8385048" y="3419856"/>
-            <a:ext cx="1975104" cy="0"/>
-          </a:xfrm>
-          <a:prstGeom prst="line">
-            <a:avLst/>
-          </a:prstGeom>
-          <a:noFill/>
-          <a:ln w="25400">
-            <a:solidFill>
-              <a:srgbClr val="8ABBD8"/>
-            </a:solidFill>
-            <a:prstDash val="solid"/>
-          </a:ln>
-        </p:spPr>
-      </p:sp>
-      <p:sp>
-        <p:nvSpPr>
-          <p:cNvPr id="18" name="Shape 16"/>
-          <p:cNvSpPr/>
-          <p:nvPr/>
-        </p:nvSpPr>
-        <p:spPr>
-          <a:xfrm>
-            <a:off x="8202168" y="3630168"/>
-            <a:ext cx="1170432" cy="118872"/>
-          </a:xfrm>
-          <a:prstGeom prst="line">
-            <a:avLst/>
-          </a:prstGeom>
-          <a:noFill/>
-          <a:ln w="25400">
-            <a:solidFill>
-              <a:srgbClr val="8ABBD8"/>
-            </a:solidFill>
-            <a:prstDash val="solid"/>
-          </a:ln>
-        </p:spPr>
-      </p:sp>
-      <p:sp>
-        <p:nvSpPr>
-          <p:cNvPr id="19" name="Shape 17"/>
-          <p:cNvSpPr/>
-          <p:nvPr/>
-        </p:nvSpPr>
-        <p:spPr>
-          <a:xfrm>
-            <a:off x="10543032" y="3630168"/>
-            <a:ext cx="-1170432" cy="118872"/>
-          </a:xfrm>
-          <a:prstGeom prst="line">
-            <a:avLst/>
-          </a:prstGeom>
-          <a:noFill/>
-          <a:ln w="25400">
-            <a:solidFill>
-              <a:srgbClr val="8ABBD8"/>
-            </a:solidFill>
-            <a:prstDash val="solid"/>
-          </a:ln>
-        </p:spPr>
-      </p:sp>
-      <p:sp>
-        <p:nvSpPr>
-          <p:cNvPr id="20" name="Text 18"/>
-          <p:cNvSpPr/>
-          <p:nvPr/>
-        </p:nvSpPr>
-        <p:spPr>
-          <a:xfrm>
-            <a:off x="7863840" y="4069080"/>
-            <a:ext cx="3017520" cy="164592"/>
-          </a:xfrm>
-          <a:prstGeom prst="rect">
-            <a:avLst/>
-          </a:prstGeom>
-          <a:noFill/>
-          <a:ln/>
-        </p:spPr>
-        <p:txBody>
-          <a:bodyPr wrap="square" lIns="0" tIns="0" rIns="0" bIns="0" rtlCol="0" anchor="ctr"/>
-          <a:lstStyle/>
-          <a:p>
-            <a:pPr algn="ctr" indent="0" marL="0">
-              <a:buNone/>
-            </a:pPr>
-            <a:r>
-              <a:rPr lang="en-US" sz="900" b="1" dirty="0">
-                <a:solidFill>
-                  <a:srgbClr val="003A63"/>
-                </a:solidFill>
-                <a:latin typeface="Aptos" pitchFamily="34" charset="0"/>
-                <a:ea typeface="Aptos" pitchFamily="34" charset="-122"/>
-                <a:cs typeface="Aptos" pitchFamily="34" charset="-120"/>
-              </a:rPr>
-              <a:t>Decision rights</a:t>
-            </a:r>
-            <a:endParaRPr lang="en-US" sz="900" dirty="0"/>
-          </a:p>
-        </p:txBody>
-      </p:sp>
-      <p:sp>
-        <p:nvSpPr>
-          <p:cNvPr id="21" name="Shape 19"/>
           <p:cNvSpPr/>
           <p:nvPr/>
         </p:nvSpPr>
@@ -18910,7 +17170,7 @@
       </p:sp>
       <p:sp>
         <p:nvSpPr>
-          <p:cNvPr id="22" name="Text 20"/>
+          <p:cNvPr id="17" name="Text 15"/>
           <p:cNvSpPr/>
           <p:nvPr/>
         </p:nvSpPr>
@@ -18949,7 +17209,7 @@
       </p:sp>
       <p:sp>
         <p:nvSpPr>
-          <p:cNvPr id="23" name="Text 21"/>
+          <p:cNvPr id="18" name="Text 16"/>
           <p:cNvSpPr/>
           <p:nvPr/>
         </p:nvSpPr>
@@ -19457,13 +17717,11 @@
             </a:avLst>
           </a:prstGeom>
           <a:solidFill>
-            <a:srgbClr val="FFFFFF">
-              <a:alpha val="88000"/>
-            </a:srgbClr>
+            <a:srgbClr val="FFFFFF"/>
           </a:solidFill>
           <a:ln w="12700">
             <a:solidFill>
-              <a:srgbClr val="D6E8F2"/>
+              <a:srgbClr val="B9D7E6"/>
             </a:solidFill>
             <a:prstDash val="solid"/>
           </a:ln>
@@ -19471,190 +17729,112 @@
       </p:sp>
       <p:sp>
         <p:nvSpPr>
-          <p:cNvPr id="14" name="Shape 12"/>
-          <p:cNvSpPr/>
-          <p:nvPr/>
-        </p:nvSpPr>
-        <p:spPr>
-          <a:xfrm>
-            <a:off x="7891272" y="3108960"/>
-            <a:ext cx="566928" cy="566928"/>
-          </a:xfrm>
-          <a:prstGeom prst="ellipse">
-            <a:avLst/>
-          </a:prstGeom>
-          <a:solidFill>
-            <a:srgbClr val="0068B7"/>
-          </a:solidFill>
-          <a:ln w="12700">
-            <a:solidFill>
-              <a:srgbClr val="0068B7"/>
-            </a:solidFill>
-            <a:prstDash val="solid"/>
-          </a:ln>
-        </p:spPr>
-      </p:sp>
-      <p:sp>
-        <p:nvSpPr>
-          <p:cNvPr id="15" name="Shape 13"/>
-          <p:cNvSpPr/>
-          <p:nvPr/>
-        </p:nvSpPr>
-        <p:spPr>
-          <a:xfrm>
-            <a:off x="10287000" y="3108960"/>
-            <a:ext cx="566928" cy="566928"/>
-          </a:xfrm>
-          <a:prstGeom prst="ellipse">
-            <a:avLst/>
-          </a:prstGeom>
-          <a:solidFill>
-            <a:srgbClr val="2F8A28"/>
-          </a:solidFill>
-          <a:ln w="12700">
-            <a:solidFill>
-              <a:srgbClr val="2F8A28"/>
-            </a:solidFill>
-            <a:prstDash val="solid"/>
-          </a:ln>
-        </p:spPr>
+          <p:cNvPr id="14" name="Text 12"/>
+          <p:cNvSpPr/>
+          <p:nvPr/>
+        </p:nvSpPr>
+        <p:spPr>
+          <a:xfrm>
+            <a:off x="7799832" y="2935224"/>
+            <a:ext cx="3145536" cy="256032"/>
+          </a:xfrm>
+          <a:prstGeom prst="rect">
+            <a:avLst/>
+          </a:prstGeom>
+          <a:noFill/>
+          <a:ln/>
+        </p:spPr>
+        <p:txBody>
+          <a:bodyPr wrap="square" lIns="0" tIns="0" rIns="0" bIns="0" rtlCol="0" anchor="ctr"/>
+          <a:lstStyle/>
+          <a:p>
+            <a:pPr indent="0" marL="0">
+              <a:buNone/>
+            </a:pPr>
+            <a:r>
+              <a:rPr lang="en-US" sz="1300" b="1" dirty="0">
+                <a:solidFill>
+                  <a:srgbClr val="0068B7"/>
+                </a:solidFill>
+                <a:latin typeface="Aptos" pitchFamily="34" charset="0"/>
+                <a:ea typeface="Aptos" pitchFamily="34" charset="-122"/>
+                <a:cs typeface="Aptos" pitchFamily="34" charset="-120"/>
+              </a:rPr>
+              <a:t>Concept checkpoints</a:t>
+            </a:r>
+            <a:endParaRPr lang="en-US" sz="1300" dirty="0"/>
+          </a:p>
+        </p:txBody>
+      </p:sp>
+      <p:sp>
+        <p:nvSpPr>
+          <p:cNvPr id="15" name="Text 13"/>
+          <p:cNvSpPr/>
+          <p:nvPr/>
+        </p:nvSpPr>
+        <p:spPr>
+          <a:xfrm>
+            <a:off x="7818120" y="3300984"/>
+            <a:ext cx="3090672" cy="877824"/>
+          </a:xfrm>
+          <a:prstGeom prst="rect">
+            <a:avLst/>
+          </a:prstGeom>
+          <a:noFill/>
+          <a:ln/>
+        </p:spPr>
+        <p:txBody>
+          <a:bodyPr wrap="square" lIns="254" tIns="254" rIns="254" bIns="254" rtlCol="0" anchor="t">
+            <a:normAutofit/>
+          </a:bodyPr>
+          <a:lstStyle/>
+          <a:p>
+            <a:r>
+              <a:rPr lang="en-US" sz="1380" dirty="0">
+                <a:solidFill>
+                  <a:srgbClr val="17364A"/>
+                </a:solidFill>
+                <a:latin typeface="Aptos" pitchFamily="34" charset="0"/>
+                <a:ea typeface="Aptos" pitchFamily="34" charset="-122"/>
+                <a:cs typeface="Aptos" pitchFamily="34" charset="-120"/>
+              </a:rPr>
+              <a:t>Public health AI may be affected by health privacy rules, state confidentiality laws,.</a:t>
+            </a:r>
+            <a:endParaRPr lang="en-US" sz="1380" dirty="0"/>
+          </a:p>
+          <a:p>
+            <a:r>
+              <a:rPr lang="en-US" sz="1380" dirty="0">
+                <a:solidFill>
+                  <a:srgbClr val="17364A"/>
+                </a:solidFill>
+                <a:latin typeface="Aptos" pitchFamily="34" charset="0"/>
+                <a:ea typeface="Aptos" pitchFamily="34" charset="-122"/>
+                <a:cs typeface="Aptos" pitchFamily="34" charset="-120"/>
+              </a:rPr>
+              <a:t>Agencies should distinguish between different levels of authority.</a:t>
+            </a:r>
+            <a:endParaRPr lang="en-US" sz="1380" dirty="0"/>
+          </a:p>
+          <a:p>
+            <a:r>
+              <a:rPr lang="en-US" sz="1380" dirty="0">
+                <a:solidFill>
+                  <a:srgbClr val="17364A"/>
+                </a:solidFill>
+                <a:latin typeface="Aptos" pitchFamily="34" charset="0"/>
+                <a:ea typeface="Aptos" pitchFamily="34" charset="-122"/>
+                <a:cs typeface="Aptos" pitchFamily="34" charset="-120"/>
+              </a:rPr>
+              <a:t>A statute, regulation, contract clause, grant requirement, executive order, agency policy,.</a:t>
+            </a:r>
+            <a:endParaRPr lang="en-US" sz="1380" dirty="0"/>
+          </a:p>
+        </p:txBody>
       </p:sp>
       <p:sp>
         <p:nvSpPr>
           <p:cNvPr id="16" name="Shape 14"/>
-          <p:cNvSpPr/>
-          <p:nvPr/>
-        </p:nvSpPr>
-        <p:spPr>
-          <a:xfrm>
-            <a:off x="9089136" y="3456432"/>
-            <a:ext cx="566928" cy="566928"/>
-          </a:xfrm>
-          <a:prstGeom prst="ellipse">
-            <a:avLst/>
-          </a:prstGeom>
-          <a:solidFill>
-            <a:srgbClr val="6A4CA3"/>
-          </a:solidFill>
-          <a:ln w="12700">
-            <a:solidFill>
-              <a:srgbClr val="6A4CA3"/>
-            </a:solidFill>
-            <a:prstDash val="solid"/>
-          </a:ln>
-        </p:spPr>
-      </p:sp>
-      <p:sp>
-        <p:nvSpPr>
-          <p:cNvPr id="17" name="Shape 15"/>
-          <p:cNvSpPr/>
-          <p:nvPr/>
-        </p:nvSpPr>
-        <p:spPr>
-          <a:xfrm>
-            <a:off x="8385048" y="3419856"/>
-            <a:ext cx="1975104" cy="0"/>
-          </a:xfrm>
-          <a:prstGeom prst="line">
-            <a:avLst/>
-          </a:prstGeom>
-          <a:noFill/>
-          <a:ln w="25400">
-            <a:solidFill>
-              <a:srgbClr val="8ABBD8"/>
-            </a:solidFill>
-            <a:prstDash val="solid"/>
-          </a:ln>
-        </p:spPr>
-      </p:sp>
-      <p:sp>
-        <p:nvSpPr>
-          <p:cNvPr id="18" name="Shape 16"/>
-          <p:cNvSpPr/>
-          <p:nvPr/>
-        </p:nvSpPr>
-        <p:spPr>
-          <a:xfrm>
-            <a:off x="8202168" y="3630168"/>
-            <a:ext cx="1170432" cy="118872"/>
-          </a:xfrm>
-          <a:prstGeom prst="line">
-            <a:avLst/>
-          </a:prstGeom>
-          <a:noFill/>
-          <a:ln w="25400">
-            <a:solidFill>
-              <a:srgbClr val="8ABBD8"/>
-            </a:solidFill>
-            <a:prstDash val="solid"/>
-          </a:ln>
-        </p:spPr>
-      </p:sp>
-      <p:sp>
-        <p:nvSpPr>
-          <p:cNvPr id="19" name="Shape 17"/>
-          <p:cNvSpPr/>
-          <p:nvPr/>
-        </p:nvSpPr>
-        <p:spPr>
-          <a:xfrm>
-            <a:off x="10543032" y="3630168"/>
-            <a:ext cx="-1170432" cy="118872"/>
-          </a:xfrm>
-          <a:prstGeom prst="line">
-            <a:avLst/>
-          </a:prstGeom>
-          <a:noFill/>
-          <a:ln w="25400">
-            <a:solidFill>
-              <a:srgbClr val="8ABBD8"/>
-            </a:solidFill>
-            <a:prstDash val="solid"/>
-          </a:ln>
-        </p:spPr>
-      </p:sp>
-      <p:sp>
-        <p:nvSpPr>
-          <p:cNvPr id="20" name="Text 18"/>
-          <p:cNvSpPr/>
-          <p:nvPr/>
-        </p:nvSpPr>
-        <p:spPr>
-          <a:xfrm>
-            <a:off x="7863840" y="4069080"/>
-            <a:ext cx="3017520" cy="164592"/>
-          </a:xfrm>
-          <a:prstGeom prst="rect">
-            <a:avLst/>
-          </a:prstGeom>
-          <a:noFill/>
-          <a:ln/>
-        </p:spPr>
-        <p:txBody>
-          <a:bodyPr wrap="square" lIns="0" tIns="0" rIns="0" bIns="0" rtlCol="0" anchor="ctr"/>
-          <a:lstStyle/>
-          <a:p>
-            <a:pPr algn="ctr" indent="0" marL="0">
-              <a:buNone/>
-            </a:pPr>
-            <a:r>
-              <a:rPr lang="en-US" sz="900" b="1" dirty="0">
-                <a:solidFill>
-                  <a:srgbClr val="003A63"/>
-                </a:solidFill>
-                <a:latin typeface="Aptos" pitchFamily="34" charset="0"/>
-                <a:ea typeface="Aptos" pitchFamily="34" charset="-122"/>
-                <a:cs typeface="Aptos" pitchFamily="34" charset="-120"/>
-              </a:rPr>
-              <a:t>Decision rights</a:t>
-            </a:r>
-            <a:endParaRPr lang="en-US" sz="900" dirty="0"/>
-          </a:p>
-        </p:txBody>
-      </p:sp>
-      <p:sp>
-        <p:nvSpPr>
-          <p:cNvPr id="21" name="Shape 19"/>
           <p:cNvSpPr/>
           <p:nvPr/>
         </p:nvSpPr>
@@ -19681,7 +17861,7 @@
       </p:sp>
       <p:sp>
         <p:nvSpPr>
-          <p:cNvPr id="22" name="Text 20"/>
+          <p:cNvPr id="17" name="Text 15"/>
           <p:cNvSpPr/>
           <p:nvPr/>
         </p:nvSpPr>
@@ -19720,7 +17900,7 @@
       </p:sp>
       <p:sp>
         <p:nvSpPr>
-          <p:cNvPr id="23" name="Text 21"/>
+          <p:cNvPr id="18" name="Text 16"/>
           <p:cNvSpPr/>
           <p:nvPr/>
         </p:nvSpPr>

--- a/downloads/presentations/modules/pol-300.pptx
+++ b/downloads/presentations/modules/pol-300.pptx
@@ -3447,49 +3447,58 @@
           <a:ln/>
         </p:spPr>
         <p:txBody>
-          <a:bodyPr wrap="square" lIns="635" tIns="635" rIns="635" bIns="635" rtlCol="0" anchor="t">
+          <a:bodyPr wrap="square" lIns="1016" tIns="1016" rIns="1016" bIns="1016" rtlCol="0" anchor="t">
             <a:normAutofit/>
           </a:bodyPr>
           <a:lstStyle/>
           <a:p>
+            <a:pPr indent="0" marL="0">
+              <a:buNone/>
+            </a:pPr>
             <a:r>
               <a:rPr lang="en-US" sz="2100" dirty="0">
                 <a:solidFill>
-                  <a:srgbClr val="17364A"/>
-                </a:solidFill>
-                <a:latin typeface="Aptos" pitchFamily="34" charset="0"/>
-                <a:ea typeface="Aptos" pitchFamily="34" charset="-122"/>
-                <a:cs typeface="Aptos" pitchFamily="34" charset="-120"/>
-              </a:rPr>
-              <a:t>Regulatory readiness also requires change management.</a:t>
+                  <a:srgbClr val="003A63"/>
+                </a:solidFill>
+                <a:latin typeface="Aptos" pitchFamily="34" charset="0"/>
+                <a:ea typeface="Aptos" pitchFamily="34" charset="-122"/>
+                <a:cs typeface="Aptos" pitchFamily="34" charset="-120"/>
+              </a:rPr>
+              <a:t>• Regulatory readiness also requires change management.</a:t>
             </a:r>
             <a:endParaRPr lang="en-US" sz="2100" dirty="0"/>
           </a:p>
           <a:p>
+            <a:pPr indent="0" marL="0">
+              <a:buNone/>
+            </a:pPr>
             <a:r>
               <a:rPr lang="en-US" sz="2100" dirty="0">
                 <a:solidFill>
-                  <a:srgbClr val="17364A"/>
-                </a:solidFill>
-                <a:latin typeface="Aptos" pitchFamily="34" charset="0"/>
-                <a:ea typeface="Aptos" pitchFamily="34" charset="-122"/>
-                <a:cs typeface="Aptos" pitchFamily="34" charset="-120"/>
-              </a:rPr>
-              <a:t>When policy requirements change, the agency may need to update SOPs, procurement language, risk tiers,.</a:t>
+                  <a:srgbClr val="003A63"/>
+                </a:solidFill>
+                <a:latin typeface="Aptos" pitchFamily="34" charset="0"/>
+                <a:ea typeface="Aptos" pitchFamily="34" charset="-122"/>
+                <a:cs typeface="Aptos" pitchFamily="34" charset="-120"/>
+              </a:rPr>
+              <a:t>• When policy requirements change, the agency may need to update SOPs, procurement language,.</a:t>
             </a:r>
             <a:endParaRPr lang="en-US" sz="2100" dirty="0"/>
           </a:p>
           <a:p>
+            <a:pPr indent="0" marL="0">
+              <a:buNone/>
+            </a:pPr>
             <a:r>
               <a:rPr lang="en-US" sz="2100" dirty="0">
                 <a:solidFill>
-                  <a:srgbClr val="17364A"/>
-                </a:solidFill>
-                <a:latin typeface="Aptos" pitchFamily="34" charset="0"/>
-                <a:ea typeface="Aptos" pitchFamily="34" charset="-122"/>
-                <a:cs typeface="Aptos" pitchFamily="34" charset="-120"/>
-              </a:rPr>
-              <a:t>A policy update is not complete until it has been translated into operational practice.</a:t>
+                  <a:srgbClr val="003A63"/>
+                </a:solidFill>
+                <a:latin typeface="Aptos" pitchFamily="34" charset="0"/>
+                <a:ea typeface="Aptos" pitchFamily="34" charset="-122"/>
+                <a:cs typeface="Aptos" pitchFamily="34" charset="-120"/>
+              </a:rPr>
+              <a:t>• A policy update is not complete until it has been translated into operational practice.</a:t>
             </a:r>
             <a:endParaRPr lang="en-US" sz="2100" dirty="0"/>
           </a:p>
@@ -3569,17 +3578,17 @@
         </p:nvSpPr>
         <p:spPr>
           <a:xfrm>
-            <a:off x="7799832" y="1828800"/>
-            <a:ext cx="3145536" cy="685800"/>
-          </a:xfrm>
-          <a:prstGeom prst="rect">
-            <a:avLst/>
-          </a:prstGeom>
-          <a:noFill/>
-          <a:ln/>
-        </p:spPr>
-        <p:txBody>
-          <a:bodyPr wrap="square" lIns="0" tIns="0" rIns="0" bIns="0" rtlCol="0" anchor="t">
+            <a:off x="7799832" y="1801368"/>
+            <a:ext cx="3145536" cy="758952"/>
+          </a:xfrm>
+          <a:prstGeom prst="rect">
+            <a:avLst/>
+          </a:prstGeom>
+          <a:noFill/>
+          <a:ln/>
+        </p:spPr>
+        <p:txBody>
+          <a:bodyPr wrap="square" lIns="254" tIns="254" rIns="254" bIns="254" rtlCol="0" anchor="t">
             <a:normAutofit/>
           </a:bodyPr>
           <a:lstStyle/>
@@ -3588,7 +3597,7 @@
               <a:buNone/>
             </a:pPr>
             <a:r>
-              <a:rPr lang="en-US" sz="1550" dirty="0">
+              <a:rPr lang="en-US" sz="1320" dirty="0">
                 <a:solidFill>
                   <a:srgbClr val="17364A"/>
                 </a:solidFill>
@@ -3598,7 +3607,7 @@
               </a:rPr>
               <a:t>Regulatory readiness also requires change management.</a:t>
             </a:r>
-            <a:endParaRPr lang="en-US" sz="1550" dirty="0"/>
+            <a:endParaRPr lang="en-US" sz="1320" dirty="0"/>
           </a:p>
         </p:txBody>
       </p:sp>
@@ -3686,13 +3695,16 @@
           <a:ln/>
         </p:spPr>
         <p:txBody>
-          <a:bodyPr wrap="square" lIns="254" tIns="254" rIns="254" bIns="254" rtlCol="0" anchor="t">
+          <a:bodyPr wrap="square" lIns="508" tIns="508" rIns="508" bIns="508" rtlCol="0" anchor="t">
             <a:normAutofit/>
           </a:bodyPr>
           <a:lstStyle/>
           <a:p>
-            <a:r>
-              <a:rPr lang="en-US" sz="1380" dirty="0">
+            <a:pPr indent="0" marL="0">
+              <a:buNone/>
+            </a:pPr>
+            <a:r>
+              <a:rPr lang="en-US" sz="1220" dirty="0">
                 <a:solidFill>
                   <a:srgbClr val="17364A"/>
                 </a:solidFill>
@@ -3702,11 +3714,14 @@
               </a:rPr>
               <a:t>Regulatory readiness also requires change management.</a:t>
             </a:r>
-            <a:endParaRPr lang="en-US" sz="1380" dirty="0"/>
-          </a:p>
-          <a:p>
-            <a:r>
-              <a:rPr lang="en-US" sz="1380" dirty="0">
+            <a:endParaRPr lang="en-US" sz="1220" dirty="0"/>
+          </a:p>
+          <a:p>
+            <a:pPr indent="0" marL="0">
+              <a:buNone/>
+            </a:pPr>
+            <a:r>
+              <a:rPr lang="en-US" sz="1220" dirty="0">
                 <a:solidFill>
                   <a:srgbClr val="17364A"/>
                 </a:solidFill>
@@ -3714,13 +3729,16 @@
                 <a:ea typeface="Aptos" pitchFamily="34" charset="-122"/>
                 <a:cs typeface="Aptos" pitchFamily="34" charset="-120"/>
               </a:rPr>
-              <a:t>When policy requirements change, the agency may need to update SOPs, procurement language,.</a:t>
-            </a:r>
-            <a:endParaRPr lang="en-US" sz="1380" dirty="0"/>
-          </a:p>
-          <a:p>
-            <a:r>
-              <a:rPr lang="en-US" sz="1380" dirty="0">
+              <a:t>When policy requirements change, the agency may need to update.</a:t>
+            </a:r>
+            <a:endParaRPr lang="en-US" sz="1220" dirty="0"/>
+          </a:p>
+          <a:p>
+            <a:pPr indent="0" marL="0">
+              <a:buNone/>
+            </a:pPr>
+            <a:r>
+              <a:rPr lang="en-US" sz="1220" dirty="0">
                 <a:solidFill>
                   <a:srgbClr val="17364A"/>
                 </a:solidFill>
@@ -3728,9 +3746,9 @@
                 <a:ea typeface="Aptos" pitchFamily="34" charset="-122"/>
                 <a:cs typeface="Aptos" pitchFamily="34" charset="-120"/>
               </a:rPr>
-              <a:t>A policy update is not complete until it has been translated into operational practice.</a:t>
-            </a:r>
-            <a:endParaRPr lang="en-US" sz="1380" dirty="0"/>
+              <a:t>A policy update is not complete until it has been translated into.</a:t>
+            </a:r>
+            <a:endParaRPr lang="en-US" sz="1220" dirty="0"/>
           </a:p>
         </p:txBody>
       </p:sp>
@@ -3808,17 +3826,17 @@
         </p:nvSpPr>
         <p:spPr>
           <a:xfrm>
-            <a:off x="7799832" y="5001768"/>
-            <a:ext cx="3145536" cy="502920"/>
-          </a:xfrm>
-          <a:prstGeom prst="rect">
-            <a:avLst/>
-          </a:prstGeom>
-          <a:noFill/>
-          <a:ln/>
-        </p:spPr>
-        <p:txBody>
-          <a:bodyPr wrap="square" lIns="0" tIns="0" rIns="0" bIns="0" rtlCol="0" anchor="t">
+            <a:off x="7799832" y="4974336"/>
+            <a:ext cx="3145536" cy="576072"/>
+          </a:xfrm>
+          <a:prstGeom prst="rect">
+            <a:avLst/>
+          </a:prstGeom>
+          <a:noFill/>
+          <a:ln/>
+        </p:spPr>
+        <p:txBody>
+          <a:bodyPr wrap="square" lIns="254" tIns="254" rIns="254" bIns="254" rtlCol="0" anchor="t">
             <a:normAutofit/>
           </a:bodyPr>
           <a:lstStyle/>
@@ -3827,7 +3845,7 @@
               <a:buNone/>
             </a:pPr>
             <a:r>
-              <a:rPr lang="en-US" sz="1550" dirty="0">
+              <a:rPr lang="en-US" sz="1320" dirty="0">
                 <a:solidFill>
                   <a:srgbClr val="17364A"/>
                 </a:solidFill>
@@ -3835,9 +3853,9 @@
                 <a:ea typeface="Aptos" pitchFamily="34" charset="-122"/>
                 <a:cs typeface="Aptos" pitchFamily="34" charset="-120"/>
               </a:rPr>
-              <a:t>Translate this concept into clear decision rights, review steps, documentation expectations, and escalation paths before an AI-supported workflow is approved.</a:t>
-            </a:r>
-            <a:endParaRPr lang="en-US" sz="1550" dirty="0"/>
+              <a:t>Translate this concept into clear decision rights, review steps, documentation expectations, and escalation paths before.</a:t>
+            </a:r>
+            <a:endParaRPr lang="en-US" sz="1320" dirty="0"/>
           </a:p>
         </p:txBody>
       </p:sp>
@@ -4138,49 +4156,58 @@
           <a:ln/>
         </p:spPr>
         <p:txBody>
-          <a:bodyPr wrap="square" lIns="635" tIns="635" rIns="635" bIns="635" rtlCol="0" anchor="t">
+          <a:bodyPr wrap="square" lIns="1016" tIns="1016" rIns="1016" bIns="1016" rtlCol="0" anchor="t">
             <a:normAutofit/>
           </a:bodyPr>
           <a:lstStyle/>
           <a:p>
+            <a:pPr indent="0" marL="0">
+              <a:buNone/>
+            </a:pPr>
             <a:r>
               <a:rPr lang="en-US" sz="2100" dirty="0">
                 <a:solidFill>
-                  <a:srgbClr val="17364A"/>
-                </a:solidFill>
-                <a:latin typeface="Aptos" pitchFamily="34" charset="0"/>
-                <a:ea typeface="Aptos" pitchFamily="34" charset="-122"/>
-                <a:cs typeface="Aptos" pitchFamily="34" charset="-120"/>
-              </a:rPr>
-              <a:t>Risks and failure modes include the following:</a:t>
+                  <a:srgbClr val="003A63"/>
+                </a:solidFill>
+                <a:latin typeface="Aptos" pitchFamily="34" charset="0"/>
+                <a:ea typeface="Aptos" pitchFamily="34" charset="-122"/>
+                <a:cs typeface="Aptos" pitchFamily="34" charset="-120"/>
+              </a:rPr>
+              <a:t>• Risks and failure modes include the following:</a:t>
             </a:r>
             <a:endParaRPr lang="en-US" sz="2100" dirty="0"/>
           </a:p>
           <a:p>
+            <a:pPr indent="0" marL="0">
+              <a:buNone/>
+            </a:pPr>
             <a:r>
               <a:rPr lang="en-US" sz="2100" dirty="0">
                 <a:solidFill>
-                  <a:srgbClr val="17364A"/>
-                </a:solidFill>
-                <a:latin typeface="Aptos" pitchFamily="34" charset="0"/>
-                <a:ea typeface="Aptos" pitchFamily="34" charset="-122"/>
-                <a:cs typeface="Aptos" pitchFamily="34" charset="-120"/>
-              </a:rPr>
-              <a:t>Assuming there is no policy risk because there is no single AI statute.</a:t>
+                  <a:srgbClr val="003A63"/>
+                </a:solidFill>
+                <a:latin typeface="Aptos" pitchFamily="34" charset="0"/>
+                <a:ea typeface="Aptos" pitchFamily="34" charset="-122"/>
+                <a:cs typeface="Aptos" pitchFamily="34" charset="-120"/>
+              </a:rPr>
+              <a:t>• Assuming there is no policy risk because there is no single AI statute.</a:t>
             </a:r>
             <a:endParaRPr lang="en-US" sz="2100" dirty="0"/>
           </a:p>
           <a:p>
+            <a:pPr indent="0" marL="0">
+              <a:buNone/>
+            </a:pPr>
             <a:r>
               <a:rPr lang="en-US" sz="2100" dirty="0">
                 <a:solidFill>
-                  <a:srgbClr val="17364A"/>
-                </a:solidFill>
-                <a:latin typeface="Aptos" pitchFamily="34" charset="0"/>
-                <a:ea typeface="Aptos" pitchFamily="34" charset="-122"/>
-                <a:cs typeface="Aptos" pitchFamily="34" charset="-120"/>
-              </a:rPr>
-              <a:t>Treating nonbinding guidance as irrelevant even when it reflects expected practice.</a:t>
+                  <a:srgbClr val="003A63"/>
+                </a:solidFill>
+                <a:latin typeface="Aptos" pitchFamily="34" charset="0"/>
+                <a:ea typeface="Aptos" pitchFamily="34" charset="-122"/>
+                <a:cs typeface="Aptos" pitchFamily="34" charset="-120"/>
+              </a:rPr>
+              <a:t>• Treating nonbinding guidance as irrelevant even when it reflects expected practice.</a:t>
             </a:r>
             <a:endParaRPr lang="en-US" sz="2100" dirty="0"/>
           </a:p>
@@ -4260,17 +4287,17 @@
         </p:nvSpPr>
         <p:spPr>
           <a:xfrm>
-            <a:off x="7799832" y="1828800"/>
-            <a:ext cx="3145536" cy="685800"/>
-          </a:xfrm>
-          <a:prstGeom prst="rect">
-            <a:avLst/>
-          </a:prstGeom>
-          <a:noFill/>
-          <a:ln/>
-        </p:spPr>
-        <p:txBody>
-          <a:bodyPr wrap="square" lIns="0" tIns="0" rIns="0" bIns="0" rtlCol="0" anchor="t">
+            <a:off x="7799832" y="1801368"/>
+            <a:ext cx="3145536" cy="758952"/>
+          </a:xfrm>
+          <a:prstGeom prst="rect">
+            <a:avLst/>
+          </a:prstGeom>
+          <a:noFill/>
+          <a:ln/>
+        </p:spPr>
+        <p:txBody>
+          <a:bodyPr wrap="square" lIns="254" tIns="254" rIns="254" bIns="254" rtlCol="0" anchor="t">
             <a:normAutofit/>
           </a:bodyPr>
           <a:lstStyle/>
@@ -4279,7 +4306,7 @@
               <a:buNone/>
             </a:pPr>
             <a:r>
-              <a:rPr lang="en-US" sz="1550" dirty="0">
+              <a:rPr lang="en-US" sz="1320" dirty="0">
                 <a:solidFill>
                   <a:srgbClr val="17364A"/>
                 </a:solidFill>
@@ -4289,7 +4316,7 @@
               </a:rPr>
               <a:t>Risks and failure modes include the following:</a:t>
             </a:r>
-            <a:endParaRPr lang="en-US" sz="1550" dirty="0"/>
+            <a:endParaRPr lang="en-US" sz="1320" dirty="0"/>
           </a:p>
         </p:txBody>
       </p:sp>
@@ -4377,13 +4404,16 @@
           <a:ln/>
         </p:spPr>
         <p:txBody>
-          <a:bodyPr wrap="square" lIns="254" tIns="254" rIns="254" bIns="254" rtlCol="0" anchor="t">
+          <a:bodyPr wrap="square" lIns="508" tIns="508" rIns="508" bIns="508" rtlCol="0" anchor="t">
             <a:normAutofit/>
           </a:bodyPr>
           <a:lstStyle/>
           <a:p>
-            <a:r>
-              <a:rPr lang="en-US" sz="1380" dirty="0">
+            <a:pPr indent="0" marL="0">
+              <a:buNone/>
+            </a:pPr>
+            <a:r>
+              <a:rPr lang="en-US" sz="1220" dirty="0">
                 <a:solidFill>
                   <a:srgbClr val="17364A"/>
                 </a:solidFill>
@@ -4393,11 +4423,14 @@
               </a:rPr>
               <a:t>Risks and failure modes include the following:</a:t>
             </a:r>
-            <a:endParaRPr lang="en-US" sz="1380" dirty="0"/>
-          </a:p>
-          <a:p>
-            <a:r>
-              <a:rPr lang="en-US" sz="1380" dirty="0">
+            <a:endParaRPr lang="en-US" sz="1220" dirty="0"/>
+          </a:p>
+          <a:p>
+            <a:pPr indent="0" marL="0">
+              <a:buNone/>
+            </a:pPr>
+            <a:r>
+              <a:rPr lang="en-US" sz="1220" dirty="0">
                 <a:solidFill>
                   <a:srgbClr val="17364A"/>
                 </a:solidFill>
@@ -4405,13 +4438,16 @@
                 <a:ea typeface="Aptos" pitchFamily="34" charset="-122"/>
                 <a:cs typeface="Aptos" pitchFamily="34" charset="-120"/>
               </a:rPr>
-              <a:t>Assuming there is no policy risk because there is no single AI statute.</a:t>
-            </a:r>
-            <a:endParaRPr lang="en-US" sz="1380" dirty="0"/>
-          </a:p>
-          <a:p>
-            <a:r>
-              <a:rPr lang="en-US" sz="1380" dirty="0">
+              <a:t>Assuming there is no policy risk because there is no single AI.</a:t>
+            </a:r>
+            <a:endParaRPr lang="en-US" sz="1220" dirty="0"/>
+          </a:p>
+          <a:p>
+            <a:pPr indent="0" marL="0">
+              <a:buNone/>
+            </a:pPr>
+            <a:r>
+              <a:rPr lang="en-US" sz="1220" dirty="0">
                 <a:solidFill>
                   <a:srgbClr val="17364A"/>
                 </a:solidFill>
@@ -4419,9 +4455,9 @@
                 <a:ea typeface="Aptos" pitchFamily="34" charset="-122"/>
                 <a:cs typeface="Aptos" pitchFamily="34" charset="-120"/>
               </a:rPr>
-              <a:t>Treating nonbinding guidance as irrelevant even when it reflects expected practice.</a:t>
-            </a:r>
-            <a:endParaRPr lang="en-US" sz="1380" dirty="0"/>
+              <a:t>Treating nonbinding guidance as irrelevant even when it reflects.</a:t>
+            </a:r>
+            <a:endParaRPr lang="en-US" sz="1220" dirty="0"/>
           </a:p>
         </p:txBody>
       </p:sp>
@@ -4499,17 +4535,17 @@
         </p:nvSpPr>
         <p:spPr>
           <a:xfrm>
-            <a:off x="7799832" y="5001768"/>
-            <a:ext cx="3145536" cy="502920"/>
-          </a:xfrm>
-          <a:prstGeom prst="rect">
-            <a:avLst/>
-          </a:prstGeom>
-          <a:noFill/>
-          <a:ln/>
-        </p:spPr>
-        <p:txBody>
-          <a:bodyPr wrap="square" lIns="0" tIns="0" rIns="0" bIns="0" rtlCol="0" anchor="t">
+            <a:off x="7799832" y="4974336"/>
+            <a:ext cx="3145536" cy="576072"/>
+          </a:xfrm>
+          <a:prstGeom prst="rect">
+            <a:avLst/>
+          </a:prstGeom>
+          <a:noFill/>
+          <a:ln/>
+        </p:spPr>
+        <p:txBody>
+          <a:bodyPr wrap="square" lIns="254" tIns="254" rIns="254" bIns="254" rtlCol="0" anchor="t">
             <a:normAutofit/>
           </a:bodyPr>
           <a:lstStyle/>
@@ -4518,7 +4554,7 @@
               <a:buNone/>
             </a:pPr>
             <a:r>
-              <a:rPr lang="en-US" sz="1550" dirty="0">
+              <a:rPr lang="en-US" sz="1320" dirty="0">
                 <a:solidFill>
                   <a:srgbClr val="17364A"/>
                 </a:solidFill>
@@ -4526,9 +4562,9 @@
                 <a:ea typeface="Aptos" pitchFamily="34" charset="-122"/>
                 <a:cs typeface="Aptos" pitchFamily="34" charset="-120"/>
               </a:rPr>
-              <a:t>Translate this concept into clear decision rights, review steps, documentation expectations, and escalation paths before an AI-supported workflow is approved.</a:t>
-            </a:r>
-            <a:endParaRPr lang="en-US" sz="1550" dirty="0"/>
+              <a:t>Translate this concept into clear decision rights, review steps, documentation expectations, and escalation paths before.</a:t>
+            </a:r>
+            <a:endParaRPr lang="en-US" sz="1320" dirty="0"/>
           </a:p>
         </p:txBody>
       </p:sp>
@@ -4829,49 +4865,58 @@
           <a:ln/>
         </p:spPr>
         <p:txBody>
-          <a:bodyPr wrap="square" lIns="635" tIns="635" rIns="635" bIns="635" rtlCol="0" anchor="t">
+          <a:bodyPr wrap="square" lIns="1016" tIns="1016" rIns="1016" bIns="1016" rtlCol="0" anchor="t">
             <a:normAutofit/>
           </a:bodyPr>
           <a:lstStyle/>
           <a:p>
+            <a:pPr indent="0" marL="0">
+              <a:buNone/>
+            </a:pPr>
             <a:r>
               <a:rPr lang="en-US" sz="2100" dirty="0">
                 <a:solidFill>
-                  <a:srgbClr val="17364A"/>
-                </a:solidFill>
-                <a:latin typeface="Aptos" pitchFamily="34" charset="0"/>
-                <a:ea typeface="Aptos" pitchFamily="34" charset="-122"/>
-                <a:cs typeface="Aptos" pitchFamily="34" charset="-120"/>
-              </a:rPr>
-              <a:t>Failing to update internal policies after legal, procurement, privacy, or cybersecurity changes.</a:t>
+                  <a:srgbClr val="003A63"/>
+                </a:solidFill>
+                <a:latin typeface="Aptos" pitchFamily="34" charset="0"/>
+                <a:ea typeface="Aptos" pitchFamily="34" charset="-122"/>
+                <a:cs typeface="Aptos" pitchFamily="34" charset="-120"/>
+              </a:rPr>
+              <a:t>• Failing to update internal policies after legal, procurement, privacy, or cybersecurity changes.</a:t>
             </a:r>
             <a:endParaRPr lang="en-US" sz="2100" dirty="0"/>
           </a:p>
           <a:p>
+            <a:pPr indent="0" marL="0">
+              <a:buNone/>
+            </a:pPr>
             <a:r>
               <a:rPr lang="en-US" sz="2100" dirty="0">
                 <a:solidFill>
-                  <a:srgbClr val="17364A"/>
-                </a:solidFill>
-                <a:latin typeface="Aptos" pitchFamily="34" charset="0"/>
-                <a:ea typeface="Aptos" pitchFamily="34" charset="-122"/>
-                <a:cs typeface="Aptos" pitchFamily="34" charset="-120"/>
-              </a:rPr>
-              <a:t>Allowing vendors to define compliance obligations without agency review.</a:t>
+                  <a:srgbClr val="003A63"/>
+                </a:solidFill>
+                <a:latin typeface="Aptos" pitchFamily="34" charset="0"/>
+                <a:ea typeface="Aptos" pitchFamily="34" charset="-122"/>
+                <a:cs typeface="Aptos" pitchFamily="34" charset="-120"/>
+              </a:rPr>
+              <a:t>• Allowing vendors to define compliance obligations without agency review.</a:t>
             </a:r>
             <a:endParaRPr lang="en-US" sz="2100" dirty="0"/>
           </a:p>
           <a:p>
+            <a:pPr indent="0" marL="0">
+              <a:buNone/>
+            </a:pPr>
             <a:r>
               <a:rPr lang="en-US" sz="2100" dirty="0">
                 <a:solidFill>
-                  <a:srgbClr val="17364A"/>
-                </a:solidFill>
-                <a:latin typeface="Aptos" pitchFamily="34" charset="0"/>
-                <a:ea typeface="Aptos" pitchFamily="34" charset="-122"/>
-                <a:cs typeface="Aptos" pitchFamily="34" charset="-120"/>
-              </a:rPr>
-              <a:t>Maintaining policies that are too vague to guide real decisions.</a:t>
+                  <a:srgbClr val="003A63"/>
+                </a:solidFill>
+                <a:latin typeface="Aptos" pitchFamily="34" charset="0"/>
+                <a:ea typeface="Aptos" pitchFamily="34" charset="-122"/>
+                <a:cs typeface="Aptos" pitchFamily="34" charset="-120"/>
+              </a:rPr>
+              <a:t>• Maintaining policies that are too vague to guide real decisions.</a:t>
             </a:r>
             <a:endParaRPr lang="en-US" sz="2100" dirty="0"/>
           </a:p>
@@ -4951,17 +4996,17 @@
         </p:nvSpPr>
         <p:spPr>
           <a:xfrm>
-            <a:off x="7799832" y="1828800"/>
-            <a:ext cx="3145536" cy="685800"/>
-          </a:xfrm>
-          <a:prstGeom prst="rect">
-            <a:avLst/>
-          </a:prstGeom>
-          <a:noFill/>
-          <a:ln/>
-        </p:spPr>
-        <p:txBody>
-          <a:bodyPr wrap="square" lIns="0" tIns="0" rIns="0" bIns="0" rtlCol="0" anchor="t">
+            <a:off x="7799832" y="1801368"/>
+            <a:ext cx="3145536" cy="758952"/>
+          </a:xfrm>
+          <a:prstGeom prst="rect">
+            <a:avLst/>
+          </a:prstGeom>
+          <a:noFill/>
+          <a:ln/>
+        </p:spPr>
+        <p:txBody>
+          <a:bodyPr wrap="square" lIns="254" tIns="254" rIns="254" bIns="254" rtlCol="0" anchor="t">
             <a:normAutofit/>
           </a:bodyPr>
           <a:lstStyle/>
@@ -4970,7 +5015,7 @@
               <a:buNone/>
             </a:pPr>
             <a:r>
-              <a:rPr lang="en-US" sz="1550" dirty="0">
+              <a:rPr lang="en-US" sz="1320" dirty="0">
                 <a:solidFill>
                   <a:srgbClr val="17364A"/>
                 </a:solidFill>
@@ -4980,7 +5025,7 @@
               </a:rPr>
               <a:t>Failing to update internal policies after legal, procurement, privacy, or cybersecurity changes.</a:t>
             </a:r>
-            <a:endParaRPr lang="en-US" sz="1550" dirty="0"/>
+            <a:endParaRPr lang="en-US" sz="1320" dirty="0"/>
           </a:p>
         </p:txBody>
       </p:sp>
@@ -5068,13 +5113,16 @@
           <a:ln/>
         </p:spPr>
         <p:txBody>
-          <a:bodyPr wrap="square" lIns="254" tIns="254" rIns="254" bIns="254" rtlCol="0" anchor="t">
+          <a:bodyPr wrap="square" lIns="508" tIns="508" rIns="508" bIns="508" rtlCol="0" anchor="t">
             <a:normAutofit/>
           </a:bodyPr>
           <a:lstStyle/>
           <a:p>
-            <a:r>
-              <a:rPr lang="en-US" sz="1380" dirty="0">
+            <a:pPr indent="0" marL="0">
+              <a:buNone/>
+            </a:pPr>
+            <a:r>
+              <a:rPr lang="en-US" sz="1220" dirty="0">
                 <a:solidFill>
                   <a:srgbClr val="17364A"/>
                 </a:solidFill>
@@ -5082,13 +5130,16 @@
                 <a:ea typeface="Aptos" pitchFamily="34" charset="-122"/>
                 <a:cs typeface="Aptos" pitchFamily="34" charset="-120"/>
               </a:rPr>
-              <a:t>Failing to update internal policies after legal, procurement, privacy, or cybersecurity.</a:t>
-            </a:r>
-            <a:endParaRPr lang="en-US" sz="1380" dirty="0"/>
-          </a:p>
-          <a:p>
-            <a:r>
-              <a:rPr lang="en-US" sz="1380" dirty="0">
+              <a:t>Failing to update internal policies after legal, procurement,.</a:t>
+            </a:r>
+            <a:endParaRPr lang="en-US" sz="1220" dirty="0"/>
+          </a:p>
+          <a:p>
+            <a:pPr indent="0" marL="0">
+              <a:buNone/>
+            </a:pPr>
+            <a:r>
+              <a:rPr lang="en-US" sz="1220" dirty="0">
                 <a:solidFill>
                   <a:srgbClr val="17364A"/>
                 </a:solidFill>
@@ -5096,13 +5147,16 @@
                 <a:ea typeface="Aptos" pitchFamily="34" charset="-122"/>
                 <a:cs typeface="Aptos" pitchFamily="34" charset="-120"/>
               </a:rPr>
-              <a:t>Allowing vendors to define compliance obligations without agency review.</a:t>
-            </a:r>
-            <a:endParaRPr lang="en-US" sz="1380" dirty="0"/>
-          </a:p>
-          <a:p>
-            <a:r>
-              <a:rPr lang="en-US" sz="1380" dirty="0">
+              <a:t>Allowing vendors to define compliance obligations without agency.</a:t>
+            </a:r>
+            <a:endParaRPr lang="en-US" sz="1220" dirty="0"/>
+          </a:p>
+          <a:p>
+            <a:pPr indent="0" marL="0">
+              <a:buNone/>
+            </a:pPr>
+            <a:r>
+              <a:rPr lang="en-US" sz="1220" dirty="0">
                 <a:solidFill>
                   <a:srgbClr val="17364A"/>
                 </a:solidFill>
@@ -5112,7 +5166,7 @@
               </a:rPr>
               <a:t>Maintaining policies that are too vague to guide real decisions.</a:t>
             </a:r>
-            <a:endParaRPr lang="en-US" sz="1380" dirty="0"/>
+            <a:endParaRPr lang="en-US" sz="1220" dirty="0"/>
           </a:p>
         </p:txBody>
       </p:sp>
@@ -5190,17 +5244,17 @@
         </p:nvSpPr>
         <p:spPr>
           <a:xfrm>
-            <a:off x="7799832" y="5001768"/>
-            <a:ext cx="3145536" cy="502920"/>
-          </a:xfrm>
-          <a:prstGeom prst="rect">
-            <a:avLst/>
-          </a:prstGeom>
-          <a:noFill/>
-          <a:ln/>
-        </p:spPr>
-        <p:txBody>
-          <a:bodyPr wrap="square" lIns="0" tIns="0" rIns="0" bIns="0" rtlCol="0" anchor="t">
+            <a:off x="7799832" y="4974336"/>
+            <a:ext cx="3145536" cy="576072"/>
+          </a:xfrm>
+          <a:prstGeom prst="rect">
+            <a:avLst/>
+          </a:prstGeom>
+          <a:noFill/>
+          <a:ln/>
+        </p:spPr>
+        <p:txBody>
+          <a:bodyPr wrap="square" lIns="254" tIns="254" rIns="254" bIns="254" rtlCol="0" anchor="t">
             <a:normAutofit/>
           </a:bodyPr>
           <a:lstStyle/>
@@ -5209,7 +5263,7 @@
               <a:buNone/>
             </a:pPr>
             <a:r>
-              <a:rPr lang="en-US" sz="1550" dirty="0">
+              <a:rPr lang="en-US" sz="1320" dirty="0">
                 <a:solidFill>
                   <a:srgbClr val="17364A"/>
                 </a:solidFill>
@@ -5217,9 +5271,9 @@
                 <a:ea typeface="Aptos" pitchFamily="34" charset="-122"/>
                 <a:cs typeface="Aptos" pitchFamily="34" charset="-120"/>
               </a:rPr>
-              <a:t>Translate this concept into clear decision rights, review steps, documentation expectations, and escalation paths before an AI-supported workflow is approved.</a:t>
-            </a:r>
-            <a:endParaRPr lang="en-US" sz="1550" dirty="0"/>
+              <a:t>Translate this concept into clear decision rights, review steps, documentation expectations, and escalation paths before.</a:t>
+            </a:r>
+            <a:endParaRPr lang="en-US" sz="1320" dirty="0"/>
           </a:p>
         </p:txBody>
       </p:sp>
@@ -5520,49 +5574,58 @@
           <a:ln/>
         </p:spPr>
         <p:txBody>
-          <a:bodyPr wrap="square" lIns="635" tIns="635" rIns="635" bIns="635" rtlCol="0" anchor="t">
+          <a:bodyPr wrap="square" lIns="1016" tIns="1016" rIns="1016" bIns="1016" rtlCol="0" anchor="t">
             <a:normAutofit/>
           </a:bodyPr>
           <a:lstStyle/>
           <a:p>
+            <a:pPr indent="0" marL="0">
+              <a:buNone/>
+            </a:pPr>
             <a:r>
               <a:rPr lang="en-US" sz="2100" dirty="0">
                 <a:solidFill>
-                  <a:srgbClr val="17364A"/>
-                </a:solidFill>
-                <a:latin typeface="Aptos" pitchFamily="34" charset="0"/>
-                <a:ea typeface="Aptos" pitchFamily="34" charset="-122"/>
-                <a:cs typeface="Aptos" pitchFamily="34" charset="-120"/>
-              </a:rPr>
-              <a:t>Recommended guardrails include the following:</a:t>
+                  <a:srgbClr val="003A63"/>
+                </a:solidFill>
+                <a:latin typeface="Aptos" pitchFamily="34" charset="0"/>
+                <a:ea typeface="Aptos" pitchFamily="34" charset="-122"/>
+                <a:cs typeface="Aptos" pitchFamily="34" charset="-120"/>
+              </a:rPr>
+              <a:t>• Recommended guardrails include the following:</a:t>
             </a:r>
             <a:endParaRPr lang="en-US" sz="2100" dirty="0"/>
           </a:p>
           <a:p>
+            <a:pPr indent="0" marL="0">
+              <a:buNone/>
+            </a:pPr>
             <a:r>
               <a:rPr lang="en-US" sz="2100" dirty="0">
                 <a:solidFill>
-                  <a:srgbClr val="17364A"/>
-                </a:solidFill>
-                <a:latin typeface="Aptos" pitchFamily="34" charset="0"/>
-                <a:ea typeface="Aptos" pitchFamily="34" charset="-122"/>
-                <a:cs typeface="Aptos" pitchFamily="34" charset="-120"/>
-              </a:rPr>
-              <a:t>Assign responsibility for AI policy scanning and interpretation.</a:t>
+                  <a:srgbClr val="003A63"/>
+                </a:solidFill>
+                <a:latin typeface="Aptos" pitchFamily="34" charset="0"/>
+                <a:ea typeface="Aptos" pitchFamily="34" charset="-122"/>
+                <a:cs typeface="Aptos" pitchFamily="34" charset="-120"/>
+              </a:rPr>
+              <a:t>• Assign responsibility for AI policy scanning and interpretation.</a:t>
             </a:r>
             <a:endParaRPr lang="en-US" sz="2100" dirty="0"/>
           </a:p>
           <a:p>
+            <a:pPr indent="0" marL="0">
+              <a:buNone/>
+            </a:pPr>
             <a:r>
               <a:rPr lang="en-US" sz="2100" dirty="0">
                 <a:solidFill>
-                  <a:srgbClr val="17364A"/>
-                </a:solidFill>
-                <a:latin typeface="Aptos" pitchFamily="34" charset="0"/>
-                <a:ea typeface="Aptos" pitchFamily="34" charset="-122"/>
-                <a:cs typeface="Aptos" pitchFamily="34" charset="-120"/>
-              </a:rPr>
-              <a:t>Distinguish binding requirements from guidance and best practices.</a:t>
+                  <a:srgbClr val="003A63"/>
+                </a:solidFill>
+                <a:latin typeface="Aptos" pitchFamily="34" charset="0"/>
+                <a:ea typeface="Aptos" pitchFamily="34" charset="-122"/>
+                <a:cs typeface="Aptos" pitchFamily="34" charset="-120"/>
+              </a:rPr>
+              <a:t>• Distinguish binding requirements from guidance and best practices.</a:t>
             </a:r>
             <a:endParaRPr lang="en-US" sz="2100" dirty="0"/>
           </a:p>
@@ -5642,17 +5705,17 @@
         </p:nvSpPr>
         <p:spPr>
           <a:xfrm>
-            <a:off x="7799832" y="1828800"/>
-            <a:ext cx="3145536" cy="685800"/>
-          </a:xfrm>
-          <a:prstGeom prst="rect">
-            <a:avLst/>
-          </a:prstGeom>
-          <a:noFill/>
-          <a:ln/>
-        </p:spPr>
-        <p:txBody>
-          <a:bodyPr wrap="square" lIns="0" tIns="0" rIns="0" bIns="0" rtlCol="0" anchor="t">
+            <a:off x="7799832" y="1801368"/>
+            <a:ext cx="3145536" cy="758952"/>
+          </a:xfrm>
+          <a:prstGeom prst="rect">
+            <a:avLst/>
+          </a:prstGeom>
+          <a:noFill/>
+          <a:ln/>
+        </p:spPr>
+        <p:txBody>
+          <a:bodyPr wrap="square" lIns="254" tIns="254" rIns="254" bIns="254" rtlCol="0" anchor="t">
             <a:normAutofit/>
           </a:bodyPr>
           <a:lstStyle/>
@@ -5661,7 +5724,7 @@
               <a:buNone/>
             </a:pPr>
             <a:r>
-              <a:rPr lang="en-US" sz="1550" dirty="0">
+              <a:rPr lang="en-US" sz="1320" dirty="0">
                 <a:solidFill>
                   <a:srgbClr val="17364A"/>
                 </a:solidFill>
@@ -5671,7 +5734,7 @@
               </a:rPr>
               <a:t>Recommended guardrails include the following:</a:t>
             </a:r>
-            <a:endParaRPr lang="en-US" sz="1550" dirty="0"/>
+            <a:endParaRPr lang="en-US" sz="1320" dirty="0"/>
           </a:p>
         </p:txBody>
       </p:sp>
@@ -5759,13 +5822,16 @@
           <a:ln/>
         </p:spPr>
         <p:txBody>
-          <a:bodyPr wrap="square" lIns="254" tIns="254" rIns="254" bIns="254" rtlCol="0" anchor="t">
+          <a:bodyPr wrap="square" lIns="508" tIns="508" rIns="508" bIns="508" rtlCol="0" anchor="t">
             <a:normAutofit/>
           </a:bodyPr>
           <a:lstStyle/>
           <a:p>
-            <a:r>
-              <a:rPr lang="en-US" sz="1380" dirty="0">
+            <a:pPr indent="0" marL="0">
+              <a:buNone/>
+            </a:pPr>
+            <a:r>
+              <a:rPr lang="en-US" sz="1220" dirty="0">
                 <a:solidFill>
                   <a:srgbClr val="17364A"/>
                 </a:solidFill>
@@ -5775,11 +5841,14 @@
               </a:rPr>
               <a:t>Recommended guardrails include the following:</a:t>
             </a:r>
-            <a:endParaRPr lang="en-US" sz="1380" dirty="0"/>
-          </a:p>
-          <a:p>
-            <a:r>
-              <a:rPr lang="en-US" sz="1380" dirty="0">
+            <a:endParaRPr lang="en-US" sz="1220" dirty="0"/>
+          </a:p>
+          <a:p>
+            <a:pPr indent="0" marL="0">
+              <a:buNone/>
+            </a:pPr>
+            <a:r>
+              <a:rPr lang="en-US" sz="1220" dirty="0">
                 <a:solidFill>
                   <a:srgbClr val="17364A"/>
                 </a:solidFill>
@@ -5789,11 +5858,14 @@
               </a:rPr>
               <a:t>Assign responsibility for AI policy scanning and interpretation.</a:t>
             </a:r>
-            <a:endParaRPr lang="en-US" sz="1380" dirty="0"/>
-          </a:p>
-          <a:p>
-            <a:r>
-              <a:rPr lang="en-US" sz="1380" dirty="0">
+            <a:endParaRPr lang="en-US" sz="1220" dirty="0"/>
+          </a:p>
+          <a:p>
+            <a:pPr indent="0" marL="0">
+              <a:buNone/>
+            </a:pPr>
+            <a:r>
+              <a:rPr lang="en-US" sz="1220" dirty="0">
                 <a:solidFill>
                   <a:srgbClr val="17364A"/>
                 </a:solidFill>
@@ -5803,7 +5875,7 @@
               </a:rPr>
               <a:t>Distinguish binding requirements from guidance and best practices.</a:t>
             </a:r>
-            <a:endParaRPr lang="en-US" sz="1380" dirty="0"/>
+            <a:endParaRPr lang="en-US" sz="1220" dirty="0"/>
           </a:p>
         </p:txBody>
       </p:sp>
@@ -5881,17 +5953,17 @@
         </p:nvSpPr>
         <p:spPr>
           <a:xfrm>
-            <a:off x="7799832" y="5001768"/>
-            <a:ext cx="3145536" cy="502920"/>
-          </a:xfrm>
-          <a:prstGeom prst="rect">
-            <a:avLst/>
-          </a:prstGeom>
-          <a:noFill/>
-          <a:ln/>
-        </p:spPr>
-        <p:txBody>
-          <a:bodyPr wrap="square" lIns="0" tIns="0" rIns="0" bIns="0" rtlCol="0" anchor="t">
+            <a:off x="7799832" y="4974336"/>
+            <a:ext cx="3145536" cy="576072"/>
+          </a:xfrm>
+          <a:prstGeom prst="rect">
+            <a:avLst/>
+          </a:prstGeom>
+          <a:noFill/>
+          <a:ln/>
+        </p:spPr>
+        <p:txBody>
+          <a:bodyPr wrap="square" lIns="254" tIns="254" rIns="254" bIns="254" rtlCol="0" anchor="t">
             <a:normAutofit/>
           </a:bodyPr>
           <a:lstStyle/>
@@ -5900,7 +5972,7 @@
               <a:buNone/>
             </a:pPr>
             <a:r>
-              <a:rPr lang="en-US" sz="1550" dirty="0">
+              <a:rPr lang="en-US" sz="1320" dirty="0">
                 <a:solidFill>
                   <a:srgbClr val="17364A"/>
                 </a:solidFill>
@@ -5908,9 +5980,9 @@
                 <a:ea typeface="Aptos" pitchFamily="34" charset="-122"/>
                 <a:cs typeface="Aptos" pitchFamily="34" charset="-120"/>
               </a:rPr>
-              <a:t>Translate this concept into clear decision rights, review steps, documentation expectations, and escalation paths before an AI-supported workflow is approved.</a:t>
-            </a:r>
-            <a:endParaRPr lang="en-US" sz="1550" dirty="0"/>
+              <a:t>Translate this concept into clear decision rights, review steps, documentation expectations, and escalation paths before.</a:t>
+            </a:r>
+            <a:endParaRPr lang="en-US" sz="1320" dirty="0"/>
           </a:p>
         </p:txBody>
       </p:sp>
@@ -6211,49 +6283,58 @@
           <a:ln/>
         </p:spPr>
         <p:txBody>
-          <a:bodyPr wrap="square" lIns="635" tIns="635" rIns="635" bIns="635" rtlCol="0" anchor="t">
+          <a:bodyPr wrap="square" lIns="1016" tIns="1016" rIns="1016" bIns="1016" rtlCol="0" anchor="t">
             <a:normAutofit/>
           </a:bodyPr>
           <a:lstStyle/>
           <a:p>
+            <a:pPr indent="0" marL="0">
+              <a:buNone/>
+            </a:pPr>
             <a:r>
               <a:rPr lang="en-US" sz="2100" dirty="0">
                 <a:solidFill>
-                  <a:srgbClr val="17364A"/>
-                </a:solidFill>
-                <a:latin typeface="Aptos" pitchFamily="34" charset="0"/>
-                <a:ea typeface="Aptos" pitchFamily="34" charset="-122"/>
-                <a:cs typeface="Aptos" pitchFamily="34" charset="-120"/>
-              </a:rPr>
-              <a:t>Maintain a crosswalk from external requirements to internal policies and procedures.</a:t>
+                  <a:srgbClr val="003A63"/>
+                </a:solidFill>
+                <a:latin typeface="Aptos" pitchFamily="34" charset="0"/>
+                <a:ea typeface="Aptos" pitchFamily="34" charset="-122"/>
+                <a:cs typeface="Aptos" pitchFamily="34" charset="-120"/>
+              </a:rPr>
+              <a:t>• Maintain a crosswalk from external requirements to internal policies and procedures.</a:t>
             </a:r>
             <a:endParaRPr lang="en-US" sz="2100" dirty="0"/>
           </a:p>
           <a:p>
+            <a:pPr indent="0" marL="0">
+              <a:buNone/>
+            </a:pPr>
             <a:r>
               <a:rPr lang="en-US" sz="2100" dirty="0">
                 <a:solidFill>
-                  <a:srgbClr val="17364A"/>
-                </a:solidFill>
-                <a:latin typeface="Aptos" pitchFamily="34" charset="0"/>
-                <a:ea typeface="Aptos" pitchFamily="34" charset="-122"/>
-                <a:cs typeface="Aptos" pitchFamily="34" charset="-120"/>
-              </a:rPr>
-              <a:t>Update training, SOPs, and procurement language when policies change.</a:t>
+                  <a:srgbClr val="003A63"/>
+                </a:solidFill>
+                <a:latin typeface="Aptos" pitchFamily="34" charset="0"/>
+                <a:ea typeface="Aptos" pitchFamily="34" charset="-122"/>
+                <a:cs typeface="Aptos" pitchFamily="34" charset="-120"/>
+              </a:rPr>
+              <a:t>• Update training, SOPs, and procurement language when policies change.</a:t>
             </a:r>
             <a:endParaRPr lang="en-US" sz="2100" dirty="0"/>
           </a:p>
           <a:p>
+            <a:pPr indent="0" marL="0">
+              <a:buNone/>
+            </a:pPr>
             <a:r>
               <a:rPr lang="en-US" sz="2100" dirty="0">
                 <a:solidFill>
-                  <a:srgbClr val="17364A"/>
-                </a:solidFill>
-                <a:latin typeface="Aptos" pitchFamily="34" charset="0"/>
-                <a:ea typeface="Aptos" pitchFamily="34" charset="-122"/>
-                <a:cs typeface="Aptos" pitchFamily="34" charset="-120"/>
-              </a:rPr>
-              <a:t>Document assumptions, decisions, and unresolved legal or policy questions.</a:t>
+                  <a:srgbClr val="003A63"/>
+                </a:solidFill>
+                <a:latin typeface="Aptos" pitchFamily="34" charset="0"/>
+                <a:ea typeface="Aptos" pitchFamily="34" charset="-122"/>
+                <a:cs typeface="Aptos" pitchFamily="34" charset="-120"/>
+              </a:rPr>
+              <a:t>• Document assumptions, decisions, and unresolved legal or policy questions.</a:t>
             </a:r>
             <a:endParaRPr lang="en-US" sz="2100" dirty="0"/>
           </a:p>
@@ -6333,17 +6414,17 @@
         </p:nvSpPr>
         <p:spPr>
           <a:xfrm>
-            <a:off x="7799832" y="1828800"/>
-            <a:ext cx="3145536" cy="685800"/>
-          </a:xfrm>
-          <a:prstGeom prst="rect">
-            <a:avLst/>
-          </a:prstGeom>
-          <a:noFill/>
-          <a:ln/>
-        </p:spPr>
-        <p:txBody>
-          <a:bodyPr wrap="square" lIns="0" tIns="0" rIns="0" bIns="0" rtlCol="0" anchor="t">
+            <a:off x="7799832" y="1801368"/>
+            <a:ext cx="3145536" cy="758952"/>
+          </a:xfrm>
+          <a:prstGeom prst="rect">
+            <a:avLst/>
+          </a:prstGeom>
+          <a:noFill/>
+          <a:ln/>
+        </p:spPr>
+        <p:txBody>
+          <a:bodyPr wrap="square" lIns="254" tIns="254" rIns="254" bIns="254" rtlCol="0" anchor="t">
             <a:normAutofit/>
           </a:bodyPr>
           <a:lstStyle/>
@@ -6352,7 +6433,7 @@
               <a:buNone/>
             </a:pPr>
             <a:r>
-              <a:rPr lang="en-US" sz="1550" dirty="0">
+              <a:rPr lang="en-US" sz="1320" dirty="0">
                 <a:solidFill>
                   <a:srgbClr val="17364A"/>
                 </a:solidFill>
@@ -6362,7 +6443,7 @@
               </a:rPr>
               <a:t>Maintain a crosswalk from external requirements to internal policies and procedures.</a:t>
             </a:r>
-            <a:endParaRPr lang="en-US" sz="1550" dirty="0"/>
+            <a:endParaRPr lang="en-US" sz="1320" dirty="0"/>
           </a:p>
         </p:txBody>
       </p:sp>
@@ -6450,13 +6531,16 @@
           <a:ln/>
         </p:spPr>
         <p:txBody>
-          <a:bodyPr wrap="square" lIns="254" tIns="254" rIns="254" bIns="254" rtlCol="0" anchor="t">
+          <a:bodyPr wrap="square" lIns="508" tIns="508" rIns="508" bIns="508" rtlCol="0" anchor="t">
             <a:normAutofit/>
           </a:bodyPr>
           <a:lstStyle/>
           <a:p>
-            <a:r>
-              <a:rPr lang="en-US" sz="1380" dirty="0">
+            <a:pPr indent="0" marL="0">
+              <a:buNone/>
+            </a:pPr>
+            <a:r>
+              <a:rPr lang="en-US" sz="1220" dirty="0">
                 <a:solidFill>
                   <a:srgbClr val="17364A"/>
                 </a:solidFill>
@@ -6464,13 +6548,16 @@
                 <a:ea typeface="Aptos" pitchFamily="34" charset="-122"/>
                 <a:cs typeface="Aptos" pitchFamily="34" charset="-120"/>
               </a:rPr>
-              <a:t>Maintain a crosswalk from external requirements to internal policies and procedures.</a:t>
-            </a:r>
-            <a:endParaRPr lang="en-US" sz="1380" dirty="0"/>
-          </a:p>
-          <a:p>
-            <a:r>
-              <a:rPr lang="en-US" sz="1380" dirty="0">
+              <a:t>Maintain a crosswalk from external requirements to internal.</a:t>
+            </a:r>
+            <a:endParaRPr lang="en-US" sz="1220" dirty="0"/>
+          </a:p>
+          <a:p>
+            <a:pPr indent="0" marL="0">
+              <a:buNone/>
+            </a:pPr>
+            <a:r>
+              <a:rPr lang="en-US" sz="1220" dirty="0">
                 <a:solidFill>
                   <a:srgbClr val="17364A"/>
                 </a:solidFill>
@@ -6478,13 +6565,16 @@
                 <a:ea typeface="Aptos" pitchFamily="34" charset="-122"/>
                 <a:cs typeface="Aptos" pitchFamily="34" charset="-120"/>
               </a:rPr>
-              <a:t>Update training, SOPs, and procurement language when policies change.</a:t>
-            </a:r>
-            <a:endParaRPr lang="en-US" sz="1380" dirty="0"/>
-          </a:p>
-          <a:p>
-            <a:r>
-              <a:rPr lang="en-US" sz="1380" dirty="0">
+              <a:t>Update training, SOPs, and procurement language when policies.</a:t>
+            </a:r>
+            <a:endParaRPr lang="en-US" sz="1220" dirty="0"/>
+          </a:p>
+          <a:p>
+            <a:pPr indent="0" marL="0">
+              <a:buNone/>
+            </a:pPr>
+            <a:r>
+              <a:rPr lang="en-US" sz="1220" dirty="0">
                 <a:solidFill>
                   <a:srgbClr val="17364A"/>
                 </a:solidFill>
@@ -6492,9 +6582,9 @@
                 <a:ea typeface="Aptos" pitchFamily="34" charset="-122"/>
                 <a:cs typeface="Aptos" pitchFamily="34" charset="-120"/>
               </a:rPr>
-              <a:t>Document assumptions, decisions, and unresolved legal or policy questions.</a:t>
-            </a:r>
-            <a:endParaRPr lang="en-US" sz="1380" dirty="0"/>
+              <a:t>Document assumptions, decisions, and unresolved legal or policy.</a:t>
+            </a:r>
+            <a:endParaRPr lang="en-US" sz="1220" dirty="0"/>
           </a:p>
         </p:txBody>
       </p:sp>
@@ -6572,17 +6662,17 @@
         </p:nvSpPr>
         <p:spPr>
           <a:xfrm>
-            <a:off x="7799832" y="5001768"/>
-            <a:ext cx="3145536" cy="502920"/>
-          </a:xfrm>
-          <a:prstGeom prst="rect">
-            <a:avLst/>
-          </a:prstGeom>
-          <a:noFill/>
-          <a:ln/>
-        </p:spPr>
-        <p:txBody>
-          <a:bodyPr wrap="square" lIns="0" tIns="0" rIns="0" bIns="0" rtlCol="0" anchor="t">
+            <a:off x="7799832" y="4974336"/>
+            <a:ext cx="3145536" cy="576072"/>
+          </a:xfrm>
+          <a:prstGeom prst="rect">
+            <a:avLst/>
+          </a:prstGeom>
+          <a:noFill/>
+          <a:ln/>
+        </p:spPr>
+        <p:txBody>
+          <a:bodyPr wrap="square" lIns="254" tIns="254" rIns="254" bIns="254" rtlCol="0" anchor="t">
             <a:normAutofit/>
           </a:bodyPr>
           <a:lstStyle/>
@@ -6591,7 +6681,7 @@
               <a:buNone/>
             </a:pPr>
             <a:r>
-              <a:rPr lang="en-US" sz="1550" dirty="0">
+              <a:rPr lang="en-US" sz="1320" dirty="0">
                 <a:solidFill>
                   <a:srgbClr val="17364A"/>
                 </a:solidFill>
@@ -6599,9 +6689,9 @@
                 <a:ea typeface="Aptos" pitchFamily="34" charset="-122"/>
                 <a:cs typeface="Aptos" pitchFamily="34" charset="-120"/>
               </a:rPr>
-              <a:t>Translate this concept into clear decision rights, review steps, documentation expectations, and escalation paths before an AI-supported workflow is approved.</a:t>
-            </a:r>
-            <a:endParaRPr lang="en-US" sz="1550" dirty="0"/>
+              <a:t>Translate this concept into clear decision rights, review steps, documentation expectations, and escalation paths before.</a:t>
+            </a:r>
+            <a:endParaRPr lang="en-US" sz="1320" dirty="0"/>
           </a:p>
         </p:txBody>
       </p:sp>
@@ -6902,49 +6992,58 @@
           <a:ln/>
         </p:spPr>
         <p:txBody>
-          <a:bodyPr wrap="square" lIns="635" tIns="635" rIns="635" bIns="635" rtlCol="0" anchor="t">
+          <a:bodyPr wrap="square" lIns="1016" tIns="1016" rIns="1016" bIns="1016" rtlCol="0" anchor="t">
             <a:normAutofit/>
           </a:bodyPr>
           <a:lstStyle/>
           <a:p>
+            <a:pPr indent="0" marL="0">
+              <a:buNone/>
+            </a:pPr>
             <a:r>
               <a:rPr lang="en-US" sz="2100" dirty="0">
                 <a:solidFill>
-                  <a:srgbClr val="17364A"/>
-                </a:solidFill>
-                <a:latin typeface="Aptos" pitchFamily="34" charset="0"/>
-                <a:ea typeface="Aptos" pitchFamily="34" charset="-122"/>
-                <a:cs typeface="Aptos" pitchFamily="34" charset="-120"/>
-              </a:rPr>
-              <a:t>Where does this topic appear in your agency, program, or workflow?</a:t>
+                  <a:srgbClr val="003A63"/>
+                </a:solidFill>
+                <a:latin typeface="Aptos" pitchFamily="34" charset="0"/>
+                <a:ea typeface="Aptos" pitchFamily="34" charset="-122"/>
+                <a:cs typeface="Aptos" pitchFamily="34" charset="-120"/>
+              </a:rPr>
+              <a:t>• Where does this topic appear in your agency, program, or workflow?</a:t>
             </a:r>
             <a:endParaRPr lang="en-US" sz="2100" dirty="0"/>
           </a:p>
           <a:p>
+            <a:pPr indent="0" marL="0">
+              <a:buNone/>
+            </a:pPr>
             <a:r>
               <a:rPr lang="en-US" sz="2100" dirty="0">
                 <a:solidFill>
-                  <a:srgbClr val="17364A"/>
-                </a:solidFill>
-                <a:latin typeface="Aptos" pitchFamily="34" charset="0"/>
-                <a:ea typeface="Aptos" pitchFamily="34" charset="-122"/>
-                <a:cs typeface="Aptos" pitchFamily="34" charset="-120"/>
-              </a:rPr>
-              <a:t>Which staff roles would need to understand or apply this concept before AI use is approved?</a:t>
+                  <a:srgbClr val="003A63"/>
+                </a:solidFill>
+                <a:latin typeface="Aptos" pitchFamily="34" charset="0"/>
+                <a:ea typeface="Aptos" pitchFamily="34" charset="-122"/>
+                <a:cs typeface="Aptos" pitchFamily="34" charset="-120"/>
+              </a:rPr>
+              <a:t>• Which staff roles would need to understand or apply this concept before AI use is approved?</a:t>
             </a:r>
             <a:endParaRPr lang="en-US" sz="2100" dirty="0"/>
           </a:p>
           <a:p>
+            <a:pPr indent="0" marL="0">
+              <a:buNone/>
+            </a:pPr>
             <a:r>
               <a:rPr lang="en-US" sz="2100" dirty="0">
                 <a:solidFill>
-                  <a:srgbClr val="17364A"/>
-                </a:solidFill>
-                <a:latin typeface="Aptos" pitchFamily="34" charset="0"/>
-                <a:ea typeface="Aptos" pitchFamily="34" charset="-122"/>
-                <a:cs typeface="Aptos" pitchFamily="34" charset="-120"/>
-              </a:rPr>
-              <a:t>What could go wrong if this topic is not addressed before implementation?</a:t>
+                  <a:srgbClr val="003A63"/>
+                </a:solidFill>
+                <a:latin typeface="Aptos" pitchFamily="34" charset="0"/>
+                <a:ea typeface="Aptos" pitchFamily="34" charset="-122"/>
+                <a:cs typeface="Aptos" pitchFamily="34" charset="-120"/>
+              </a:rPr>
+              <a:t>• What could go wrong if this topic is not addressed before implementation?</a:t>
             </a:r>
             <a:endParaRPr lang="en-US" sz="2100" dirty="0"/>
           </a:p>
@@ -7024,17 +7123,17 @@
         </p:nvSpPr>
         <p:spPr>
           <a:xfrm>
-            <a:off x="7799832" y="1828800"/>
-            <a:ext cx="3145536" cy="685800"/>
-          </a:xfrm>
-          <a:prstGeom prst="rect">
-            <a:avLst/>
-          </a:prstGeom>
-          <a:noFill/>
-          <a:ln/>
-        </p:spPr>
-        <p:txBody>
-          <a:bodyPr wrap="square" lIns="0" tIns="0" rIns="0" bIns="0" rtlCol="0" anchor="t">
+            <a:off x="7799832" y="1801368"/>
+            <a:ext cx="3145536" cy="758952"/>
+          </a:xfrm>
+          <a:prstGeom prst="rect">
+            <a:avLst/>
+          </a:prstGeom>
+          <a:noFill/>
+          <a:ln/>
+        </p:spPr>
+        <p:txBody>
+          <a:bodyPr wrap="square" lIns="254" tIns="254" rIns="254" bIns="254" rtlCol="0" anchor="t">
             <a:normAutofit/>
           </a:bodyPr>
           <a:lstStyle/>
@@ -7043,7 +7142,7 @@
               <a:buNone/>
             </a:pPr>
             <a:r>
-              <a:rPr lang="en-US" sz="1550" dirty="0">
+              <a:rPr lang="en-US" sz="1320" dirty="0">
                 <a:solidFill>
                   <a:srgbClr val="17364A"/>
                 </a:solidFill>
@@ -7053,7 +7152,7 @@
               </a:rPr>
               <a:t>Where does this topic appear in your agency, program, or workflow?</a:t>
             </a:r>
-            <a:endParaRPr lang="en-US" sz="1550" dirty="0"/>
+            <a:endParaRPr lang="en-US" sz="1320" dirty="0"/>
           </a:p>
         </p:txBody>
       </p:sp>
@@ -7141,13 +7240,16 @@
           <a:ln/>
         </p:spPr>
         <p:txBody>
-          <a:bodyPr wrap="square" lIns="254" tIns="254" rIns="254" bIns="254" rtlCol="0" anchor="t">
+          <a:bodyPr wrap="square" lIns="508" tIns="508" rIns="508" bIns="508" rtlCol="0" anchor="t">
             <a:normAutofit/>
           </a:bodyPr>
           <a:lstStyle/>
           <a:p>
-            <a:r>
-              <a:rPr lang="en-US" sz="1380" dirty="0">
+            <a:pPr indent="0" marL="0">
+              <a:buNone/>
+            </a:pPr>
+            <a:r>
+              <a:rPr lang="en-US" sz="1220" dirty="0">
                 <a:solidFill>
                   <a:srgbClr val="17364A"/>
                 </a:solidFill>
@@ -7157,11 +7259,14 @@
               </a:rPr>
               <a:t>Where does this topic appear in your agency, program, or workflow?</a:t>
             </a:r>
-            <a:endParaRPr lang="en-US" sz="1380" dirty="0"/>
-          </a:p>
-          <a:p>
-            <a:r>
-              <a:rPr lang="en-US" sz="1380" dirty="0">
+            <a:endParaRPr lang="en-US" sz="1220" dirty="0"/>
+          </a:p>
+          <a:p>
+            <a:pPr indent="0" marL="0">
+              <a:buNone/>
+            </a:pPr>
+            <a:r>
+              <a:rPr lang="en-US" sz="1220" dirty="0">
                 <a:solidFill>
                   <a:srgbClr val="17364A"/>
                 </a:solidFill>
@@ -7169,13 +7274,16 @@
                 <a:ea typeface="Aptos" pitchFamily="34" charset="-122"/>
                 <a:cs typeface="Aptos" pitchFamily="34" charset="-120"/>
               </a:rPr>
-              <a:t>Which staff roles would need to understand or apply this concept before AI use is approved?</a:t>
-            </a:r>
-            <a:endParaRPr lang="en-US" sz="1380" dirty="0"/>
-          </a:p>
-          <a:p>
-            <a:r>
-              <a:rPr lang="en-US" sz="1380" dirty="0">
+              <a:t>Which staff roles would need to understand or apply this concept.</a:t>
+            </a:r>
+            <a:endParaRPr lang="en-US" sz="1220" dirty="0"/>
+          </a:p>
+          <a:p>
+            <a:pPr indent="0" marL="0">
+              <a:buNone/>
+            </a:pPr>
+            <a:r>
+              <a:rPr lang="en-US" sz="1220" dirty="0">
                 <a:solidFill>
                   <a:srgbClr val="17364A"/>
                 </a:solidFill>
@@ -7183,9 +7291,9 @@
                 <a:ea typeface="Aptos" pitchFamily="34" charset="-122"/>
                 <a:cs typeface="Aptos" pitchFamily="34" charset="-120"/>
               </a:rPr>
-              <a:t>What could go wrong if this topic is not addressed before implementation?</a:t>
-            </a:r>
-            <a:endParaRPr lang="en-US" sz="1380" dirty="0"/>
+              <a:t>What could go wrong if this topic is not addressed before.</a:t>
+            </a:r>
+            <a:endParaRPr lang="en-US" sz="1220" dirty="0"/>
           </a:p>
         </p:txBody>
       </p:sp>
@@ -7263,17 +7371,17 @@
         </p:nvSpPr>
         <p:spPr>
           <a:xfrm>
-            <a:off x="7799832" y="5001768"/>
-            <a:ext cx="3145536" cy="502920"/>
-          </a:xfrm>
-          <a:prstGeom prst="rect">
-            <a:avLst/>
-          </a:prstGeom>
-          <a:noFill/>
-          <a:ln/>
-        </p:spPr>
-        <p:txBody>
-          <a:bodyPr wrap="square" lIns="0" tIns="0" rIns="0" bIns="0" rtlCol="0" anchor="t">
+            <a:off x="7799832" y="4974336"/>
+            <a:ext cx="3145536" cy="576072"/>
+          </a:xfrm>
+          <a:prstGeom prst="rect">
+            <a:avLst/>
+          </a:prstGeom>
+          <a:noFill/>
+          <a:ln/>
+        </p:spPr>
+        <p:txBody>
+          <a:bodyPr wrap="square" lIns="254" tIns="254" rIns="254" bIns="254" rtlCol="0" anchor="t">
             <a:normAutofit/>
           </a:bodyPr>
           <a:lstStyle/>
@@ -7282,7 +7390,7 @@
               <a:buNone/>
             </a:pPr>
             <a:r>
-              <a:rPr lang="en-US" sz="1550" dirty="0">
+              <a:rPr lang="en-US" sz="1320" dirty="0">
                 <a:solidFill>
                   <a:srgbClr val="17364A"/>
                 </a:solidFill>
@@ -7290,9 +7398,9 @@
                 <a:ea typeface="Aptos" pitchFamily="34" charset="-122"/>
                 <a:cs typeface="Aptos" pitchFamily="34" charset="-120"/>
               </a:rPr>
-              <a:t>Translate this concept into clear decision rights, review steps, documentation expectations, and escalation paths before an AI-supported workflow is approved.</a:t>
-            </a:r>
-            <a:endParaRPr lang="en-US" sz="1550" dirty="0"/>
+              <a:t>Translate this concept into clear decision rights, review steps, documentation expectations, and escalation paths before.</a:t>
+            </a:r>
+            <a:endParaRPr lang="en-US" sz="1320" dirty="0"/>
           </a:p>
         </p:txBody>
       </p:sp>
@@ -7593,35 +7701,41 @@
           <a:ln/>
         </p:spPr>
         <p:txBody>
-          <a:bodyPr wrap="square" lIns="635" tIns="635" rIns="635" bIns="635" rtlCol="0" anchor="t">
+          <a:bodyPr wrap="square" lIns="1016" tIns="1016" rIns="1016" bIns="1016" rtlCol="0" anchor="t">
             <a:normAutofit/>
           </a:bodyPr>
           <a:lstStyle/>
           <a:p>
+            <a:pPr indent="0" marL="0">
+              <a:buNone/>
+            </a:pPr>
             <a:r>
               <a:rPr lang="en-US" sz="2100" dirty="0">
                 <a:solidFill>
-                  <a:srgbClr val="17364A"/>
-                </a:solidFill>
-                <a:latin typeface="Aptos" pitchFamily="34" charset="0"/>
-                <a:ea typeface="Aptos" pitchFamily="34" charset="-122"/>
-                <a:cs typeface="Aptos" pitchFamily="34" charset="-120"/>
-              </a:rPr>
-              <a:t>What evidence would governance, leadership, or operations staff need before moving forward?</a:t>
+                  <a:srgbClr val="003A63"/>
+                </a:solidFill>
+                <a:latin typeface="Aptos" pitchFamily="34" charset="0"/>
+                <a:ea typeface="Aptos" pitchFamily="34" charset="-122"/>
+                <a:cs typeface="Aptos" pitchFamily="34" charset="-120"/>
+              </a:rPr>
+              <a:t>• What evidence would governance, leadership, or operations staff need before moving forward?</a:t>
             </a:r>
             <a:endParaRPr lang="en-US" sz="2100" dirty="0"/>
           </a:p>
           <a:p>
+            <a:pPr indent="0" marL="0">
+              <a:buNone/>
+            </a:pPr>
             <a:r>
               <a:rPr lang="en-US" sz="2100" dirty="0">
                 <a:solidFill>
-                  <a:srgbClr val="17364A"/>
-                </a:solidFill>
-                <a:latin typeface="Aptos" pitchFamily="34" charset="0"/>
-                <a:ea typeface="Aptos" pitchFamily="34" charset="-122"/>
-                <a:cs typeface="Aptos" pitchFamily="34" charset="-120"/>
-              </a:rPr>
-              <a:t>Which policy, data, equity, privacy, security, or workflow questions remain unresolved?</a:t>
+                  <a:srgbClr val="003A63"/>
+                </a:solidFill>
+                <a:latin typeface="Aptos" pitchFamily="34" charset="0"/>
+                <a:ea typeface="Aptos" pitchFamily="34" charset="-122"/>
+                <a:cs typeface="Aptos" pitchFamily="34" charset="-120"/>
+              </a:rPr>
+              <a:t>• Which policy, data, equity, privacy, security, or workflow questions remain unresolved?</a:t>
             </a:r>
             <a:endParaRPr lang="en-US" sz="2100" dirty="0"/>
           </a:p>
@@ -7701,17 +7815,17 @@
         </p:nvSpPr>
         <p:spPr>
           <a:xfrm>
-            <a:off x="7799832" y="1828800"/>
-            <a:ext cx="3145536" cy="685800"/>
-          </a:xfrm>
-          <a:prstGeom prst="rect">
-            <a:avLst/>
-          </a:prstGeom>
-          <a:noFill/>
-          <a:ln/>
-        </p:spPr>
-        <p:txBody>
-          <a:bodyPr wrap="square" lIns="0" tIns="0" rIns="0" bIns="0" rtlCol="0" anchor="t">
+            <a:off x="7799832" y="1801368"/>
+            <a:ext cx="3145536" cy="758952"/>
+          </a:xfrm>
+          <a:prstGeom prst="rect">
+            <a:avLst/>
+          </a:prstGeom>
+          <a:noFill/>
+          <a:ln/>
+        </p:spPr>
+        <p:txBody>
+          <a:bodyPr wrap="square" lIns="254" tIns="254" rIns="254" bIns="254" rtlCol="0" anchor="t">
             <a:normAutofit/>
           </a:bodyPr>
           <a:lstStyle/>
@@ -7720,7 +7834,7 @@
               <a:buNone/>
             </a:pPr>
             <a:r>
-              <a:rPr lang="en-US" sz="1550" dirty="0">
+              <a:rPr lang="en-US" sz="1320" dirty="0">
                 <a:solidFill>
                   <a:srgbClr val="17364A"/>
                 </a:solidFill>
@@ -7730,7 +7844,7 @@
               </a:rPr>
               <a:t>What evidence would governance, leadership, or operations staff need before moving forward?</a:t>
             </a:r>
-            <a:endParaRPr lang="en-US" sz="1550" dirty="0"/>
+            <a:endParaRPr lang="en-US" sz="1320" dirty="0"/>
           </a:p>
         </p:txBody>
       </p:sp>
@@ -7818,13 +7932,16 @@
           <a:ln/>
         </p:spPr>
         <p:txBody>
-          <a:bodyPr wrap="square" lIns="254" tIns="254" rIns="254" bIns="254" rtlCol="0" anchor="t">
+          <a:bodyPr wrap="square" lIns="508" tIns="508" rIns="508" bIns="508" rtlCol="0" anchor="t">
             <a:normAutofit/>
           </a:bodyPr>
           <a:lstStyle/>
           <a:p>
-            <a:r>
-              <a:rPr lang="en-US" sz="1380" dirty="0">
+            <a:pPr indent="0" marL="0">
+              <a:buNone/>
+            </a:pPr>
+            <a:r>
+              <a:rPr lang="en-US" sz="1220" dirty="0">
                 <a:solidFill>
                   <a:srgbClr val="17364A"/>
                 </a:solidFill>
@@ -7832,13 +7949,16 @@
                 <a:ea typeface="Aptos" pitchFamily="34" charset="-122"/>
                 <a:cs typeface="Aptos" pitchFamily="34" charset="-120"/>
               </a:rPr>
-              <a:t>What evidence would governance, leadership, or operations staff need before moving forward?</a:t>
-            </a:r>
-            <a:endParaRPr lang="en-US" sz="1380" dirty="0"/>
-          </a:p>
-          <a:p>
-            <a:r>
-              <a:rPr lang="en-US" sz="1380" dirty="0">
+              <a:t>What evidence would governance, leadership, or operations staff.</a:t>
+            </a:r>
+            <a:endParaRPr lang="en-US" sz="1220" dirty="0"/>
+          </a:p>
+          <a:p>
+            <a:pPr indent="0" marL="0">
+              <a:buNone/>
+            </a:pPr>
+            <a:r>
+              <a:rPr lang="en-US" sz="1220" dirty="0">
                 <a:solidFill>
                   <a:srgbClr val="17364A"/>
                 </a:solidFill>
@@ -7846,9 +7966,9 @@
                 <a:ea typeface="Aptos" pitchFamily="34" charset="-122"/>
                 <a:cs typeface="Aptos" pitchFamily="34" charset="-120"/>
               </a:rPr>
-              <a:t>Which policy, data, equity, privacy, security, or workflow questions remain unresolved?</a:t>
-            </a:r>
-            <a:endParaRPr lang="en-US" sz="1380" dirty="0"/>
+              <a:t>Which policy, data, equity, privacy, security, or workflow.</a:t>
+            </a:r>
+            <a:endParaRPr lang="en-US" sz="1220" dirty="0"/>
           </a:p>
         </p:txBody>
       </p:sp>
@@ -7926,17 +8046,17 @@
         </p:nvSpPr>
         <p:spPr>
           <a:xfrm>
-            <a:off x="7799832" y="5001768"/>
-            <a:ext cx="3145536" cy="502920"/>
-          </a:xfrm>
-          <a:prstGeom prst="rect">
-            <a:avLst/>
-          </a:prstGeom>
-          <a:noFill/>
-          <a:ln/>
-        </p:spPr>
-        <p:txBody>
-          <a:bodyPr wrap="square" lIns="0" tIns="0" rIns="0" bIns="0" rtlCol="0" anchor="t">
+            <a:off x="7799832" y="4974336"/>
+            <a:ext cx="3145536" cy="576072"/>
+          </a:xfrm>
+          <a:prstGeom prst="rect">
+            <a:avLst/>
+          </a:prstGeom>
+          <a:noFill/>
+          <a:ln/>
+        </p:spPr>
+        <p:txBody>
+          <a:bodyPr wrap="square" lIns="254" tIns="254" rIns="254" bIns="254" rtlCol="0" anchor="t">
             <a:normAutofit/>
           </a:bodyPr>
           <a:lstStyle/>
@@ -7945,7 +8065,7 @@
               <a:buNone/>
             </a:pPr>
             <a:r>
-              <a:rPr lang="en-US" sz="1550" dirty="0">
+              <a:rPr lang="en-US" sz="1320" dirty="0">
                 <a:solidFill>
                   <a:srgbClr val="17364A"/>
                 </a:solidFill>
@@ -7953,9 +8073,9 @@
                 <a:ea typeface="Aptos" pitchFamily="34" charset="-122"/>
                 <a:cs typeface="Aptos" pitchFamily="34" charset="-120"/>
               </a:rPr>
-              <a:t>Translate this concept into clear decision rights, review steps, documentation expectations, and escalation paths before an AI-supported workflow is approved.</a:t>
-            </a:r>
-            <a:endParaRPr lang="en-US" sz="1550" dirty="0"/>
+              <a:t>Translate this concept into clear decision rights, review steps, documentation expectations, and escalation paths before.</a:t>
+            </a:r>
+            <a:endParaRPr lang="en-US" sz="1320" dirty="0"/>
           </a:p>
         </p:txBody>
       </p:sp>
@@ -8256,35 +8376,41 @@
           <a:ln/>
         </p:spPr>
         <p:txBody>
-          <a:bodyPr wrap="square" lIns="635" tIns="635" rIns="635" bIns="635" rtlCol="0" anchor="t">
+          <a:bodyPr wrap="square" lIns="1016" tIns="1016" rIns="1016" bIns="1016" rtlCol="0" anchor="t">
             <a:normAutofit/>
           </a:bodyPr>
           <a:lstStyle/>
           <a:p>
+            <a:pPr indent="0" marL="0">
+              <a:buNone/>
+            </a:pPr>
             <a:r>
               <a:rPr lang="en-US" sz="2100" dirty="0">
                 <a:solidFill>
-                  <a:srgbClr val="17364A"/>
-                </a:solidFill>
-                <a:latin typeface="Aptos" pitchFamily="34" charset="0"/>
-                <a:ea typeface="Aptos" pitchFamily="34" charset="-122"/>
-                <a:cs typeface="Aptos" pitchFamily="34" charset="-120"/>
-              </a:rPr>
-              <a:t>Create a public health AI policy scan and regulatory readiness memo.</a:t>
+                  <a:srgbClr val="003A63"/>
+                </a:solidFill>
+                <a:latin typeface="Aptos" pitchFamily="34" charset="0"/>
+                <a:ea typeface="Aptos" pitchFamily="34" charset="-122"/>
+                <a:cs typeface="Aptos" pitchFamily="34" charset="-120"/>
+              </a:rPr>
+              <a:t>• Create a public health AI policy scan and regulatory readiness memo.</a:t>
             </a:r>
             <a:endParaRPr lang="en-US" sz="2100" dirty="0"/>
           </a:p>
           <a:p>
+            <a:pPr indent="0" marL="0">
+              <a:buNone/>
+            </a:pPr>
             <a:r>
               <a:rPr lang="en-US" sz="2100" dirty="0">
                 <a:solidFill>
-                  <a:srgbClr val="17364A"/>
-                </a:solidFill>
-                <a:latin typeface="Aptos" pitchFamily="34" charset="0"/>
-                <a:ea typeface="Aptos" pitchFamily="34" charset="-122"/>
-                <a:cs typeface="Aptos" pitchFamily="34" charset="-120"/>
-              </a:rPr>
-              <a:t>Identify relevant policy domains, sources to monitor, current agency policy gaps, likely operational.</a:t>
+                  <a:srgbClr val="003A63"/>
+                </a:solidFill>
+                <a:latin typeface="Aptos" pitchFamily="34" charset="0"/>
+                <a:ea typeface="Aptos" pitchFamily="34" charset="-122"/>
+                <a:cs typeface="Aptos" pitchFamily="34" charset="-120"/>
+              </a:rPr>
+              <a:t>• Identify relevant policy domains, sources to monitor, current agency policy gaps, likely.</a:t>
             </a:r>
             <a:endParaRPr lang="en-US" sz="2100" dirty="0"/>
           </a:p>
@@ -8364,17 +8490,17 @@
         </p:nvSpPr>
         <p:spPr>
           <a:xfrm>
-            <a:off x="7799832" y="1828800"/>
-            <a:ext cx="3145536" cy="685800"/>
-          </a:xfrm>
-          <a:prstGeom prst="rect">
-            <a:avLst/>
-          </a:prstGeom>
-          <a:noFill/>
-          <a:ln/>
-        </p:spPr>
-        <p:txBody>
-          <a:bodyPr wrap="square" lIns="0" tIns="0" rIns="0" bIns="0" rtlCol="0" anchor="t">
+            <a:off x="7799832" y="1801368"/>
+            <a:ext cx="3145536" cy="758952"/>
+          </a:xfrm>
+          <a:prstGeom prst="rect">
+            <a:avLst/>
+          </a:prstGeom>
+          <a:noFill/>
+          <a:ln/>
+        </p:spPr>
+        <p:txBody>
+          <a:bodyPr wrap="square" lIns="254" tIns="254" rIns="254" bIns="254" rtlCol="0" anchor="t">
             <a:normAutofit/>
           </a:bodyPr>
           <a:lstStyle/>
@@ -8383,7 +8509,7 @@
               <a:buNone/>
             </a:pPr>
             <a:r>
-              <a:rPr lang="en-US" sz="1550" dirty="0">
+              <a:rPr lang="en-US" sz="1320" dirty="0">
                 <a:solidFill>
                   <a:srgbClr val="17364A"/>
                 </a:solidFill>
@@ -8393,7 +8519,7 @@
               </a:rPr>
               <a:t>Create a public health AI policy scan and regulatory readiness memo.</a:t>
             </a:r>
-            <a:endParaRPr lang="en-US" sz="1550" dirty="0"/>
+            <a:endParaRPr lang="en-US" sz="1320" dirty="0"/>
           </a:p>
         </p:txBody>
       </p:sp>
@@ -8481,13 +8607,16 @@
           <a:ln/>
         </p:spPr>
         <p:txBody>
-          <a:bodyPr wrap="square" lIns="254" tIns="254" rIns="254" bIns="254" rtlCol="0" anchor="t">
+          <a:bodyPr wrap="square" lIns="508" tIns="508" rIns="508" bIns="508" rtlCol="0" anchor="t">
             <a:normAutofit/>
           </a:bodyPr>
           <a:lstStyle/>
           <a:p>
-            <a:r>
-              <a:rPr lang="en-US" sz="1380" dirty="0">
+            <a:pPr indent="0" marL="0">
+              <a:buNone/>
+            </a:pPr>
+            <a:r>
+              <a:rPr lang="en-US" sz="1220" dirty="0">
                 <a:solidFill>
                   <a:srgbClr val="17364A"/>
                 </a:solidFill>
@@ -8497,11 +8626,14 @@
               </a:rPr>
               <a:t>Create a public health AI policy scan and regulatory readiness memo.</a:t>
             </a:r>
-            <a:endParaRPr lang="en-US" sz="1380" dirty="0"/>
-          </a:p>
-          <a:p>
-            <a:r>
-              <a:rPr lang="en-US" sz="1380" dirty="0">
+            <a:endParaRPr lang="en-US" sz="1220" dirty="0"/>
+          </a:p>
+          <a:p>
+            <a:pPr indent="0" marL="0">
+              <a:buNone/>
+            </a:pPr>
+            <a:r>
+              <a:rPr lang="en-US" sz="1220" dirty="0">
                 <a:solidFill>
                   <a:srgbClr val="17364A"/>
                 </a:solidFill>
@@ -8509,9 +8641,9 @@
                 <a:ea typeface="Aptos" pitchFamily="34" charset="-122"/>
                 <a:cs typeface="Aptos" pitchFamily="34" charset="-120"/>
               </a:rPr>
-              <a:t>Identify relevant policy domains, sources to monitor, current agency policy gaps, likely.</a:t>
-            </a:r>
-            <a:endParaRPr lang="en-US" sz="1380" dirty="0"/>
+              <a:t>Identify relevant policy domains, sources to monitor, current.</a:t>
+            </a:r>
+            <a:endParaRPr lang="en-US" sz="1220" dirty="0"/>
           </a:p>
         </p:txBody>
       </p:sp>
@@ -8589,17 +8721,17 @@
         </p:nvSpPr>
         <p:spPr>
           <a:xfrm>
-            <a:off x="7799832" y="5001768"/>
-            <a:ext cx="3145536" cy="502920"/>
-          </a:xfrm>
-          <a:prstGeom prst="rect">
-            <a:avLst/>
-          </a:prstGeom>
-          <a:noFill/>
-          <a:ln/>
-        </p:spPr>
-        <p:txBody>
-          <a:bodyPr wrap="square" lIns="0" tIns="0" rIns="0" bIns="0" rtlCol="0" anchor="t">
+            <a:off x="7799832" y="4974336"/>
+            <a:ext cx="3145536" cy="576072"/>
+          </a:xfrm>
+          <a:prstGeom prst="rect">
+            <a:avLst/>
+          </a:prstGeom>
+          <a:noFill/>
+          <a:ln/>
+        </p:spPr>
+        <p:txBody>
+          <a:bodyPr wrap="square" lIns="254" tIns="254" rIns="254" bIns="254" rtlCol="0" anchor="t">
             <a:normAutofit/>
           </a:bodyPr>
           <a:lstStyle/>
@@ -8608,7 +8740,7 @@
               <a:buNone/>
             </a:pPr>
             <a:r>
-              <a:rPr lang="en-US" sz="1550" dirty="0">
+              <a:rPr lang="en-US" sz="1320" dirty="0">
                 <a:solidFill>
                   <a:srgbClr val="17364A"/>
                 </a:solidFill>
@@ -8616,9 +8748,9 @@
                 <a:ea typeface="Aptos" pitchFamily="34" charset="-122"/>
                 <a:cs typeface="Aptos" pitchFamily="34" charset="-120"/>
               </a:rPr>
-              <a:t>Use the assignment to test whether you can explain the concept, apply it to a realistic public health situation, and identify what would need review before the work moves forward.</a:t>
-            </a:r>
-            <a:endParaRPr lang="en-US" sz="1550" dirty="0"/>
+              <a:t>Use the assignment to test whether you can explain the concept, apply it to a realistic public health situation, and.</a:t>
+            </a:r>
+            <a:endParaRPr lang="en-US" sz="1320" dirty="0"/>
           </a:p>
         </p:txBody>
       </p:sp>
@@ -8919,49 +9051,58 @@
           <a:ln/>
         </p:spPr>
         <p:txBody>
-          <a:bodyPr wrap="square" lIns="635" tIns="635" rIns="635" bIns="635" rtlCol="0" anchor="t">
+          <a:bodyPr wrap="square" lIns="1016" tIns="1016" rIns="1016" bIns="1016" rtlCol="0" anchor="t">
             <a:normAutofit/>
           </a:bodyPr>
           <a:lstStyle/>
           <a:p>
+            <a:pPr indent="0" marL="0">
+              <a:buNone/>
+            </a:pPr>
             <a:r>
               <a:rPr lang="en-US" sz="2100" dirty="0">
                 <a:solidFill>
-                  <a:srgbClr val="17364A"/>
-                </a:solidFill>
-                <a:latin typeface="Aptos" pitchFamily="34" charset="0"/>
-                <a:ea typeface="Aptos" pitchFamily="34" charset="-122"/>
-                <a:cs typeface="Aptos" pitchFamily="34" charset="-120"/>
-              </a:rPr>
-              <a:t>AI policy scan plan</a:t>
+                  <a:srgbClr val="003A63"/>
+                </a:solidFill>
+                <a:latin typeface="Aptos" pitchFamily="34" charset="0"/>
+                <a:ea typeface="Aptos" pitchFamily="34" charset="-122"/>
+                <a:cs typeface="Aptos" pitchFamily="34" charset="-120"/>
+              </a:rPr>
+              <a:t>• AI policy scan plan</a:t>
             </a:r>
             <a:endParaRPr lang="en-US" sz="2100" dirty="0"/>
           </a:p>
           <a:p>
+            <a:pPr indent="0" marL="0">
+              <a:buNone/>
+            </a:pPr>
             <a:r>
               <a:rPr lang="en-US" sz="2100" dirty="0">
                 <a:solidFill>
-                  <a:srgbClr val="17364A"/>
-                </a:solidFill>
-                <a:latin typeface="Aptos" pitchFamily="34" charset="0"/>
-                <a:ea typeface="Aptos" pitchFamily="34" charset="-122"/>
-                <a:cs typeface="Aptos" pitchFamily="34" charset="-120"/>
-              </a:rPr>
-              <a:t>Regulatory readiness memo</a:t>
+                  <a:srgbClr val="003A63"/>
+                </a:solidFill>
+                <a:latin typeface="Aptos" pitchFamily="34" charset="0"/>
+                <a:ea typeface="Aptos" pitchFamily="34" charset="-122"/>
+                <a:cs typeface="Aptos" pitchFamily="34" charset="-120"/>
+              </a:rPr>
+              <a:t>• Regulatory readiness memo</a:t>
             </a:r>
             <a:endParaRPr lang="en-US" sz="2100" dirty="0"/>
           </a:p>
           <a:p>
+            <a:pPr indent="0" marL="0">
+              <a:buNone/>
+            </a:pPr>
             <a:r>
               <a:rPr lang="en-US" sz="2100" dirty="0">
                 <a:solidFill>
-                  <a:srgbClr val="17364A"/>
-                </a:solidFill>
-                <a:latin typeface="Aptos" pitchFamily="34" charset="0"/>
-                <a:ea typeface="Aptos" pitchFamily="34" charset="-122"/>
-                <a:cs typeface="Aptos" pitchFamily="34" charset="-120"/>
-              </a:rPr>
-              <a:t>Policy-domain crosswalk</a:t>
+                  <a:srgbClr val="003A63"/>
+                </a:solidFill>
+                <a:latin typeface="Aptos" pitchFamily="34" charset="0"/>
+                <a:ea typeface="Aptos" pitchFamily="34" charset="-122"/>
+                <a:cs typeface="Aptos" pitchFamily="34" charset="-120"/>
+              </a:rPr>
+              <a:t>• Policy-domain crosswalk</a:t>
             </a:r>
             <a:endParaRPr lang="en-US" sz="2100" dirty="0"/>
           </a:p>
@@ -9041,17 +9182,17 @@
         </p:nvSpPr>
         <p:spPr>
           <a:xfrm>
-            <a:off x="7799832" y="1828800"/>
-            <a:ext cx="3145536" cy="685800"/>
-          </a:xfrm>
-          <a:prstGeom prst="rect">
-            <a:avLst/>
-          </a:prstGeom>
-          <a:noFill/>
-          <a:ln/>
-        </p:spPr>
-        <p:txBody>
-          <a:bodyPr wrap="square" lIns="0" tIns="0" rIns="0" bIns="0" rtlCol="0" anchor="t">
+            <a:off x="7799832" y="1801368"/>
+            <a:ext cx="3145536" cy="758952"/>
+          </a:xfrm>
+          <a:prstGeom prst="rect">
+            <a:avLst/>
+          </a:prstGeom>
+          <a:noFill/>
+          <a:ln/>
+        </p:spPr>
+        <p:txBody>
+          <a:bodyPr wrap="square" lIns="254" tIns="254" rIns="254" bIns="254" rtlCol="0" anchor="t">
             <a:normAutofit/>
           </a:bodyPr>
           <a:lstStyle/>
@@ -9060,7 +9201,7 @@
               <a:buNone/>
             </a:pPr>
             <a:r>
-              <a:rPr lang="en-US" sz="1550" dirty="0">
+              <a:rPr lang="en-US" sz="1320" dirty="0">
                 <a:solidFill>
                   <a:srgbClr val="17364A"/>
                 </a:solidFill>
@@ -9070,7 +9211,7 @@
               </a:rPr>
               <a:t>AI policy scan plan</a:t>
             </a:r>
-            <a:endParaRPr lang="en-US" sz="1550" dirty="0"/>
+            <a:endParaRPr lang="en-US" sz="1320" dirty="0"/>
           </a:p>
         </p:txBody>
       </p:sp>
@@ -9158,13 +9299,16 @@
           <a:ln/>
         </p:spPr>
         <p:txBody>
-          <a:bodyPr wrap="square" lIns="254" tIns="254" rIns="254" bIns="254" rtlCol="0" anchor="t">
+          <a:bodyPr wrap="square" lIns="508" tIns="508" rIns="508" bIns="508" rtlCol="0" anchor="t">
             <a:normAutofit/>
           </a:bodyPr>
           <a:lstStyle/>
           <a:p>
-            <a:r>
-              <a:rPr lang="en-US" sz="1380" dirty="0">
+            <a:pPr indent="0" marL="0">
+              <a:buNone/>
+            </a:pPr>
+            <a:r>
+              <a:rPr lang="en-US" sz="1220" dirty="0">
                 <a:solidFill>
                   <a:srgbClr val="17364A"/>
                 </a:solidFill>
@@ -9174,11 +9318,14 @@
               </a:rPr>
               <a:t>AI policy scan plan</a:t>
             </a:r>
-            <a:endParaRPr lang="en-US" sz="1380" dirty="0"/>
-          </a:p>
-          <a:p>
-            <a:r>
-              <a:rPr lang="en-US" sz="1380" dirty="0">
+            <a:endParaRPr lang="en-US" sz="1220" dirty="0"/>
+          </a:p>
+          <a:p>
+            <a:pPr indent="0" marL="0">
+              <a:buNone/>
+            </a:pPr>
+            <a:r>
+              <a:rPr lang="en-US" sz="1220" dirty="0">
                 <a:solidFill>
                   <a:srgbClr val="17364A"/>
                 </a:solidFill>
@@ -9188,11 +9335,14 @@
               </a:rPr>
               <a:t>Regulatory readiness memo</a:t>
             </a:r>
-            <a:endParaRPr lang="en-US" sz="1380" dirty="0"/>
-          </a:p>
-          <a:p>
-            <a:r>
-              <a:rPr lang="en-US" sz="1380" dirty="0">
+            <a:endParaRPr lang="en-US" sz="1220" dirty="0"/>
+          </a:p>
+          <a:p>
+            <a:pPr indent="0" marL="0">
+              <a:buNone/>
+            </a:pPr>
+            <a:r>
+              <a:rPr lang="en-US" sz="1220" dirty="0">
                 <a:solidFill>
                   <a:srgbClr val="17364A"/>
                 </a:solidFill>
@@ -9202,7 +9352,7 @@
               </a:rPr>
               <a:t>Policy-domain crosswalk</a:t>
             </a:r>
-            <a:endParaRPr lang="en-US" sz="1380" dirty="0"/>
+            <a:endParaRPr lang="en-US" sz="1220" dirty="0"/>
           </a:p>
         </p:txBody>
       </p:sp>
@@ -9280,17 +9430,17 @@
         </p:nvSpPr>
         <p:spPr>
           <a:xfrm>
-            <a:off x="7799832" y="5001768"/>
-            <a:ext cx="3145536" cy="502920"/>
-          </a:xfrm>
-          <a:prstGeom prst="rect">
-            <a:avLst/>
-          </a:prstGeom>
-          <a:noFill/>
-          <a:ln/>
-        </p:spPr>
-        <p:txBody>
-          <a:bodyPr wrap="square" lIns="0" tIns="0" rIns="0" bIns="0" rtlCol="0" anchor="t">
+            <a:off x="7799832" y="4974336"/>
+            <a:ext cx="3145536" cy="576072"/>
+          </a:xfrm>
+          <a:prstGeom prst="rect">
+            <a:avLst/>
+          </a:prstGeom>
+          <a:noFill/>
+          <a:ln/>
+        </p:spPr>
+        <p:txBody>
+          <a:bodyPr wrap="square" lIns="254" tIns="254" rIns="254" bIns="254" rtlCol="0" anchor="t">
             <a:normAutofit/>
           </a:bodyPr>
           <a:lstStyle/>
@@ -9299,7 +9449,7 @@
               <a:buNone/>
             </a:pPr>
             <a:r>
-              <a:rPr lang="en-US" sz="1550" dirty="0">
+              <a:rPr lang="en-US" sz="1320" dirty="0">
                 <a:solidFill>
                   <a:srgbClr val="17364A"/>
                 </a:solidFill>
@@ -9307,9 +9457,9 @@
                 <a:ea typeface="Aptos" pitchFamily="34" charset="-122"/>
                 <a:cs typeface="Aptos" pitchFamily="34" charset="-120"/>
               </a:rPr>
-              <a:t>Translate this concept into clear decision rights, review steps, documentation expectations, and escalation paths before an AI-supported workflow is approved.</a:t>
-            </a:r>
-            <a:endParaRPr lang="en-US" sz="1550" dirty="0"/>
+              <a:t>Translate this concept into clear decision rights, review steps, documentation expectations, and escalation paths before.</a:t>
+            </a:r>
+            <a:endParaRPr lang="en-US" sz="1320" dirty="0"/>
           </a:p>
         </p:txBody>
       </p:sp>
@@ -9610,35 +9760,41 @@
           <a:ln/>
         </p:spPr>
         <p:txBody>
-          <a:bodyPr wrap="square" lIns="635" tIns="635" rIns="635" bIns="635" rtlCol="0" anchor="t">
+          <a:bodyPr wrap="square" lIns="1016" tIns="1016" rIns="1016" bIns="1016" rtlCol="0" anchor="t">
             <a:normAutofit/>
           </a:bodyPr>
           <a:lstStyle/>
           <a:p>
+            <a:pPr indent="0" marL="0">
+              <a:buNone/>
+            </a:pPr>
             <a:r>
               <a:rPr lang="en-US" sz="2100" dirty="0">
                 <a:solidFill>
-                  <a:srgbClr val="17364A"/>
-                </a:solidFill>
-                <a:latin typeface="Aptos" pitchFamily="34" charset="0"/>
-                <a:ea typeface="Aptos" pitchFamily="34" charset="-122"/>
-                <a:cs typeface="Aptos" pitchFamily="34" charset="-120"/>
-              </a:rPr>
-              <a:t>Recommended policy updates</a:t>
+                  <a:srgbClr val="003A63"/>
+                </a:solidFill>
+                <a:latin typeface="Aptos" pitchFamily="34" charset="0"/>
+                <a:ea typeface="Aptos" pitchFamily="34" charset="-122"/>
+                <a:cs typeface="Aptos" pitchFamily="34" charset="-120"/>
+              </a:rPr>
+              <a:t>• Recommended policy updates</a:t>
             </a:r>
             <a:endParaRPr lang="en-US" sz="2100" dirty="0"/>
           </a:p>
           <a:p>
+            <a:pPr indent="0" marL="0">
+              <a:buNone/>
+            </a:pPr>
             <a:r>
               <a:rPr lang="en-US" sz="2100" dirty="0">
                 <a:solidFill>
-                  <a:srgbClr val="17364A"/>
-                </a:solidFill>
-                <a:latin typeface="Aptos" pitchFamily="34" charset="0"/>
-                <a:ea typeface="Aptos" pitchFamily="34" charset="-122"/>
-                <a:cs typeface="Aptos" pitchFamily="34" charset="-120"/>
-              </a:rPr>
-              <a:t>Ongoing monitoring process</a:t>
+                  <a:srgbClr val="003A63"/>
+                </a:solidFill>
+                <a:latin typeface="Aptos" pitchFamily="34" charset="0"/>
+                <a:ea typeface="Aptos" pitchFamily="34" charset="-122"/>
+                <a:cs typeface="Aptos" pitchFamily="34" charset="-120"/>
+              </a:rPr>
+              <a:t>• Ongoing monitoring process</a:t>
             </a:r>
             <a:endParaRPr lang="en-US" sz="2100" dirty="0"/>
           </a:p>
@@ -9718,17 +9874,17 @@
         </p:nvSpPr>
         <p:spPr>
           <a:xfrm>
-            <a:off x="7799832" y="1828800"/>
-            <a:ext cx="3145536" cy="685800"/>
-          </a:xfrm>
-          <a:prstGeom prst="rect">
-            <a:avLst/>
-          </a:prstGeom>
-          <a:noFill/>
-          <a:ln/>
-        </p:spPr>
-        <p:txBody>
-          <a:bodyPr wrap="square" lIns="0" tIns="0" rIns="0" bIns="0" rtlCol="0" anchor="t">
+            <a:off x="7799832" y="1801368"/>
+            <a:ext cx="3145536" cy="758952"/>
+          </a:xfrm>
+          <a:prstGeom prst="rect">
+            <a:avLst/>
+          </a:prstGeom>
+          <a:noFill/>
+          <a:ln/>
+        </p:spPr>
+        <p:txBody>
+          <a:bodyPr wrap="square" lIns="254" tIns="254" rIns="254" bIns="254" rtlCol="0" anchor="t">
             <a:normAutofit/>
           </a:bodyPr>
           <a:lstStyle/>
@@ -9737,7 +9893,7 @@
               <a:buNone/>
             </a:pPr>
             <a:r>
-              <a:rPr lang="en-US" sz="1550" dirty="0">
+              <a:rPr lang="en-US" sz="1320" dirty="0">
                 <a:solidFill>
                   <a:srgbClr val="17364A"/>
                 </a:solidFill>
@@ -9747,7 +9903,7 @@
               </a:rPr>
               <a:t>Recommended policy updates</a:t>
             </a:r>
-            <a:endParaRPr lang="en-US" sz="1550" dirty="0"/>
+            <a:endParaRPr lang="en-US" sz="1320" dirty="0"/>
           </a:p>
         </p:txBody>
       </p:sp>
@@ -9835,13 +9991,16 @@
           <a:ln/>
         </p:spPr>
         <p:txBody>
-          <a:bodyPr wrap="square" lIns="254" tIns="254" rIns="254" bIns="254" rtlCol="0" anchor="t">
+          <a:bodyPr wrap="square" lIns="508" tIns="508" rIns="508" bIns="508" rtlCol="0" anchor="t">
             <a:normAutofit/>
           </a:bodyPr>
           <a:lstStyle/>
           <a:p>
-            <a:r>
-              <a:rPr lang="en-US" sz="1380" dirty="0">
+            <a:pPr indent="0" marL="0">
+              <a:buNone/>
+            </a:pPr>
+            <a:r>
+              <a:rPr lang="en-US" sz="1220" dirty="0">
                 <a:solidFill>
                   <a:srgbClr val="17364A"/>
                 </a:solidFill>
@@ -9851,11 +10010,14 @@
               </a:rPr>
               <a:t>Recommended policy updates</a:t>
             </a:r>
-            <a:endParaRPr lang="en-US" sz="1380" dirty="0"/>
-          </a:p>
-          <a:p>
-            <a:r>
-              <a:rPr lang="en-US" sz="1380" dirty="0">
+            <a:endParaRPr lang="en-US" sz="1220" dirty="0"/>
+          </a:p>
+          <a:p>
+            <a:pPr indent="0" marL="0">
+              <a:buNone/>
+            </a:pPr>
+            <a:r>
+              <a:rPr lang="en-US" sz="1220" dirty="0">
                 <a:solidFill>
                   <a:srgbClr val="17364A"/>
                 </a:solidFill>
@@ -9865,7 +10027,7 @@
               </a:rPr>
               <a:t>Ongoing monitoring process</a:t>
             </a:r>
-            <a:endParaRPr lang="en-US" sz="1380" dirty="0"/>
+            <a:endParaRPr lang="en-US" sz="1220" dirty="0"/>
           </a:p>
         </p:txBody>
       </p:sp>
@@ -9943,17 +10105,17 @@
         </p:nvSpPr>
         <p:spPr>
           <a:xfrm>
-            <a:off x="7799832" y="5001768"/>
-            <a:ext cx="3145536" cy="502920"/>
-          </a:xfrm>
-          <a:prstGeom prst="rect">
-            <a:avLst/>
-          </a:prstGeom>
-          <a:noFill/>
-          <a:ln/>
-        </p:spPr>
-        <p:txBody>
-          <a:bodyPr wrap="square" lIns="0" tIns="0" rIns="0" bIns="0" rtlCol="0" anchor="t">
+            <a:off x="7799832" y="4974336"/>
+            <a:ext cx="3145536" cy="576072"/>
+          </a:xfrm>
+          <a:prstGeom prst="rect">
+            <a:avLst/>
+          </a:prstGeom>
+          <a:noFill/>
+          <a:ln/>
+        </p:spPr>
+        <p:txBody>
+          <a:bodyPr wrap="square" lIns="254" tIns="254" rIns="254" bIns="254" rtlCol="0" anchor="t">
             <a:normAutofit/>
           </a:bodyPr>
           <a:lstStyle/>
@@ -9962,7 +10124,7 @@
               <a:buNone/>
             </a:pPr>
             <a:r>
-              <a:rPr lang="en-US" sz="1550" dirty="0">
+              <a:rPr lang="en-US" sz="1320" dirty="0">
                 <a:solidFill>
                   <a:srgbClr val="17364A"/>
                 </a:solidFill>
@@ -9970,9 +10132,9 @@
                 <a:ea typeface="Aptos" pitchFamily="34" charset="-122"/>
                 <a:cs typeface="Aptos" pitchFamily="34" charset="-120"/>
               </a:rPr>
-              <a:t>Translate this concept into clear decision rights, review steps, documentation expectations, and escalation paths before an AI-supported workflow is approved.</a:t>
-            </a:r>
-            <a:endParaRPr lang="en-US" sz="1550" dirty="0"/>
+              <a:t>Translate this concept into clear decision rights, review steps, documentation expectations, and escalation paths before.</a:t>
+            </a:r>
+            <a:endParaRPr lang="en-US" sz="1320" dirty="0"/>
           </a:p>
         </p:txBody>
       </p:sp>
@@ -10273,49 +10435,58 @@
           <a:ln/>
         </p:spPr>
         <p:txBody>
-          <a:bodyPr wrap="square" lIns="635" tIns="635" rIns="635" bIns="635" rtlCol="0" anchor="t">
+          <a:bodyPr wrap="square" lIns="1016" tIns="1016" rIns="1016" bIns="1016" rtlCol="0" anchor="t">
             <a:normAutofit/>
           </a:bodyPr>
           <a:lstStyle/>
           <a:p>
+            <a:pPr indent="0" marL="0">
+              <a:buNone/>
+            </a:pPr>
             <a:r>
               <a:rPr lang="en-US" sz="2100" dirty="0">
                 <a:solidFill>
-                  <a:srgbClr val="17364A"/>
-                </a:solidFill>
-                <a:latin typeface="Aptos" pitchFamily="34" charset="0"/>
-                <a:ea typeface="Aptos" pitchFamily="34" charset="-122"/>
-                <a:cs typeface="Aptos" pitchFamily="34" charset="-120"/>
-              </a:rPr>
-              <a:t>The public health AI policy landscape is evolving quickly across federal agencies, states, local governments,.</a:t>
+                  <a:srgbClr val="003A63"/>
+                </a:solidFill>
+                <a:latin typeface="Aptos" pitchFamily="34" charset="0"/>
+                <a:ea typeface="Aptos" pitchFamily="34" charset="-122"/>
+                <a:cs typeface="Aptos" pitchFamily="34" charset="-120"/>
+              </a:rPr>
+              <a:t>• The public health AI policy landscape is evolving quickly across federal agencies, states,.</a:t>
             </a:r>
             <a:endParaRPr lang="en-US" sz="2100" dirty="0"/>
           </a:p>
           <a:p>
+            <a:pPr indent="0" marL="0">
+              <a:buNone/>
+            </a:pPr>
             <a:r>
               <a:rPr lang="en-US" sz="2100" dirty="0">
                 <a:solidFill>
-                  <a:srgbClr val="17364A"/>
-                </a:solidFill>
-                <a:latin typeface="Aptos" pitchFamily="34" charset="0"/>
-                <a:ea typeface="Aptos" pitchFamily="34" charset="-122"/>
-                <a:cs typeface="Aptos" pitchFamily="34" charset="-120"/>
-              </a:rPr>
-              <a:t>Public health agencies do not need to wait for every rule to be settled before acting responsibly, but they do.</a:t>
+                  <a:srgbClr val="003A63"/>
+                </a:solidFill>
+                <a:latin typeface="Aptos" pitchFamily="34" charset="0"/>
+                <a:ea typeface="Aptos" pitchFamily="34" charset="-122"/>
+                <a:cs typeface="Aptos" pitchFamily="34" charset="-120"/>
+              </a:rPr>
+              <a:t>• Public health agencies do not need to wait for every rule to be settled before acting.</a:t>
             </a:r>
             <a:endParaRPr lang="en-US" sz="2100" dirty="0"/>
           </a:p>
           <a:p>
+            <a:pPr indent="0" marL="0">
+              <a:buNone/>
+            </a:pPr>
             <a:r>
               <a:rPr lang="en-US" sz="2100" dirty="0">
                 <a:solidFill>
-                  <a:srgbClr val="17364A"/>
-                </a:solidFill>
-                <a:latin typeface="Aptos" pitchFamily="34" charset="0"/>
-                <a:ea typeface="Aptos" pitchFamily="34" charset="-122"/>
-                <a:cs typeface="Aptos" pitchFamily="34" charset="-120"/>
-              </a:rPr>
-              <a:t>Regulatory readiness means the agency can identify relevant requirements, update internal policies, and document.</a:t>
+                  <a:srgbClr val="003A63"/>
+                </a:solidFill>
+                <a:latin typeface="Aptos" pitchFamily="34" charset="0"/>
+                <a:ea typeface="Aptos" pitchFamily="34" charset="-122"/>
+                <a:cs typeface="Aptos" pitchFamily="34" charset="-120"/>
+              </a:rPr>
+              <a:t>• Regulatory readiness means the agency can identify relevant requirements, update internal.</a:t>
             </a:r>
             <a:endParaRPr lang="en-US" sz="2100" dirty="0"/>
           </a:p>
@@ -10395,17 +10566,17 @@
         </p:nvSpPr>
         <p:spPr>
           <a:xfrm>
-            <a:off x="8074152" y="1920240"/>
-            <a:ext cx="2825496" cy="1280160"/>
-          </a:xfrm>
-          <a:prstGeom prst="rect">
-            <a:avLst/>
-          </a:prstGeom>
-          <a:noFill/>
-          <a:ln/>
-        </p:spPr>
-        <p:txBody>
-          <a:bodyPr wrap="square" lIns="0" tIns="0" rIns="0" bIns="0" rtlCol="0" anchor="t">
+            <a:off x="8074152" y="1892808"/>
+            <a:ext cx="2825496" cy="1353312"/>
+          </a:xfrm>
+          <a:prstGeom prst="rect">
+            <a:avLst/>
+          </a:prstGeom>
+          <a:noFill/>
+          <a:ln/>
+        </p:spPr>
+        <p:txBody>
+          <a:bodyPr wrap="square" lIns="254" tIns="254" rIns="254" bIns="254" rtlCol="0" anchor="t">
             <a:normAutofit/>
           </a:bodyPr>
           <a:lstStyle/>
@@ -10414,7 +10585,7 @@
               <a:buNone/>
             </a:pPr>
             <a:r>
-              <a:rPr lang="en-US" sz="1550" dirty="0">
+              <a:rPr lang="en-US" sz="1320" dirty="0">
                 <a:solidFill>
                   <a:srgbClr val="17364A"/>
                 </a:solidFill>
@@ -10422,43 +10593,9 @@
                 <a:ea typeface="Aptos" pitchFamily="34" charset="-122"/>
                 <a:cs typeface="Aptos" pitchFamily="34" charset="-120"/>
               </a:rPr>
-              <a:t>Level: intermediate/practitioner</a:t>
-            </a:r>
-            <a:endParaRPr lang="en-US" sz="1550" dirty="0"/>
-          </a:p>
-          <a:p>
-            <a:pPr indent="0" marL="0">
-              <a:buNone/>
-            </a:pPr>
-            <a:r>
-              <a:rPr lang="en-US" sz="1550" dirty="0">
-                <a:solidFill>
-                  <a:srgbClr val="17364A"/>
-                </a:solidFill>
-                <a:latin typeface="Aptos" pitchFamily="34" charset="0"/>
-                <a:ea typeface="Aptos" pitchFamily="34" charset="-122"/>
-                <a:cs typeface="Aptos" pitchFamily="34" charset="-120"/>
-              </a:rPr>
-              <a:t>Primary track: Policy Role-Based Track</a:t>
-            </a:r>
-            <a:endParaRPr lang="en-US" sz="1550" dirty="0"/>
-          </a:p>
-          <a:p>
-            <a:pPr indent="0" marL="0">
-              <a:buNone/>
-            </a:pPr>
-            <a:r>
-              <a:rPr lang="en-US" sz="1550" dirty="0">
-                <a:solidFill>
-                  <a:srgbClr val="17364A"/>
-                </a:solidFill>
-                <a:latin typeface="Aptos" pitchFamily="34" charset="0"/>
-                <a:ea typeface="Aptos" pitchFamily="34" charset="-122"/>
-                <a:cs typeface="Aptos" pitchFamily="34" charset="-120"/>
-              </a:rPr>
-              <a:t>Appears in tracks: policy, governance-and-security, public-health-executive-leadership, program-management</a:t>
-            </a:r>
-            <a:endParaRPr lang="en-US" sz="1550" dirty="0"/>
+              <a:t>Level: intermediate/practitioner Primary track: Policy Role-Based Track Appears in tracks: policy,.</a:t>
+            </a:r>
+            <a:endParaRPr lang="en-US" sz="1320" dirty="0"/>
           </a:p>
         </p:txBody>
       </p:sp>
@@ -10546,13 +10683,16 @@
           <a:ln/>
         </p:spPr>
         <p:txBody>
-          <a:bodyPr wrap="square" lIns="254" tIns="254" rIns="254" bIns="254" rtlCol="0" anchor="t">
+          <a:bodyPr wrap="square" lIns="508" tIns="508" rIns="508" bIns="508" rtlCol="0" anchor="t">
             <a:normAutofit/>
           </a:bodyPr>
           <a:lstStyle/>
           <a:p>
-            <a:r>
-              <a:rPr lang="en-US" sz="1380" dirty="0">
+            <a:pPr indent="0" marL="0">
+              <a:buNone/>
+            </a:pPr>
+            <a:r>
+              <a:rPr lang="en-US" sz="1220" dirty="0">
                 <a:solidFill>
                   <a:srgbClr val="17364A"/>
                 </a:solidFill>
@@ -10562,11 +10702,14 @@
               </a:rPr>
               <a:t>Read the module for shared vocabulary and context.</a:t>
             </a:r>
-            <a:endParaRPr lang="en-US" sz="1380" dirty="0"/>
-          </a:p>
-          <a:p>
-            <a:r>
-              <a:rPr lang="en-US" sz="1380" dirty="0">
+            <a:endParaRPr lang="en-US" sz="1220" dirty="0"/>
+          </a:p>
+          <a:p>
+            <a:pPr indent="0" marL="0">
+              <a:buNone/>
+            </a:pPr>
+            <a:r>
+              <a:rPr lang="en-US" sz="1220" dirty="0">
                 <a:solidFill>
                   <a:srgbClr val="17364A"/>
                 </a:solidFill>
@@ -10576,11 +10719,14 @@
               </a:rPr>
               <a:t>Complete the practical exercise to apply the concept.</a:t>
             </a:r>
-            <a:endParaRPr lang="en-US" sz="1380" dirty="0"/>
-          </a:p>
-          <a:p>
-            <a:r>
-              <a:rPr lang="en-US" sz="1380" dirty="0">
+            <a:endParaRPr lang="en-US" sz="1220" dirty="0"/>
+          </a:p>
+          <a:p>
+            <a:pPr indent="0" marL="0">
+              <a:buNone/>
+            </a:pPr>
+            <a:r>
+              <a:rPr lang="en-US" sz="1220" dirty="0">
                 <a:solidFill>
                   <a:srgbClr val="17364A"/>
                 </a:solidFill>
@@ -10590,7 +10736,7 @@
               </a:rPr>
               <a:t>Use the notes and references for deeper review.</a:t>
             </a:r>
-            <a:endParaRPr lang="en-US" sz="1380" dirty="0"/>
+            <a:endParaRPr lang="en-US" sz="1220" dirty="0"/>
           </a:p>
         </p:txBody>
       </p:sp>
@@ -10891,49 +11037,58 @@
           <a:ln/>
         </p:spPr>
         <p:txBody>
-          <a:bodyPr wrap="square" lIns="635" tIns="635" rIns="635" bIns="635" rtlCol="0" anchor="t">
+          <a:bodyPr wrap="square" lIns="1016" tIns="1016" rIns="1016" bIns="1016" rtlCol="0" anchor="t">
             <a:normAutofit/>
           </a:bodyPr>
           <a:lstStyle/>
           <a:p>
+            <a:pPr indent="0" marL="0">
+              <a:buNone/>
+            </a:pPr>
             <a:r>
               <a:rPr lang="en-US" sz="2100" dirty="0">
                 <a:solidFill>
-                  <a:srgbClr val="17364A"/>
-                </a:solidFill>
-                <a:latin typeface="Aptos" pitchFamily="34" charset="0"/>
-                <a:ea typeface="Aptos" pitchFamily="34" charset="-122"/>
-                <a:cs typeface="Aptos" pitchFamily="34" charset="-120"/>
-              </a:rPr>
-              <a:t>AI policy scan plan</a:t>
+                  <a:srgbClr val="003A63"/>
+                </a:solidFill>
+                <a:latin typeface="Aptos" pitchFamily="34" charset="0"/>
+                <a:ea typeface="Aptos" pitchFamily="34" charset="-122"/>
+                <a:cs typeface="Aptos" pitchFamily="34" charset="-120"/>
+              </a:rPr>
+              <a:t>• AI policy scan plan</a:t>
             </a:r>
             <a:endParaRPr lang="en-US" sz="2100" dirty="0"/>
           </a:p>
           <a:p>
+            <a:pPr indent="0" marL="0">
+              <a:buNone/>
+            </a:pPr>
             <a:r>
               <a:rPr lang="en-US" sz="2100" dirty="0">
                 <a:solidFill>
-                  <a:srgbClr val="17364A"/>
-                </a:solidFill>
-                <a:latin typeface="Aptos" pitchFamily="34" charset="0"/>
-                <a:ea typeface="Aptos" pitchFamily="34" charset="-122"/>
-                <a:cs typeface="Aptos" pitchFamily="34" charset="-120"/>
-              </a:rPr>
-              <a:t>Regulatory readiness memo</a:t>
+                  <a:srgbClr val="003A63"/>
+                </a:solidFill>
+                <a:latin typeface="Aptos" pitchFamily="34" charset="0"/>
+                <a:ea typeface="Aptos" pitchFamily="34" charset="-122"/>
+                <a:cs typeface="Aptos" pitchFamily="34" charset="-120"/>
+              </a:rPr>
+              <a:t>• Regulatory readiness memo</a:t>
             </a:r>
             <a:endParaRPr lang="en-US" sz="2100" dirty="0"/>
           </a:p>
           <a:p>
+            <a:pPr indent="0" marL="0">
+              <a:buNone/>
+            </a:pPr>
             <a:r>
               <a:rPr lang="en-US" sz="2100" dirty="0">
                 <a:solidFill>
-                  <a:srgbClr val="17364A"/>
-                </a:solidFill>
-                <a:latin typeface="Aptos" pitchFamily="34" charset="0"/>
-                <a:ea typeface="Aptos" pitchFamily="34" charset="-122"/>
-                <a:cs typeface="Aptos" pitchFamily="34" charset="-120"/>
-              </a:rPr>
-              <a:t>Policy-domain crosswalk</a:t>
+                  <a:srgbClr val="003A63"/>
+                </a:solidFill>
+                <a:latin typeface="Aptos" pitchFamily="34" charset="0"/>
+                <a:ea typeface="Aptos" pitchFamily="34" charset="-122"/>
+                <a:cs typeface="Aptos" pitchFamily="34" charset="-120"/>
+              </a:rPr>
+              <a:t>• Policy-domain crosswalk</a:t>
             </a:r>
             <a:endParaRPr lang="en-US" sz="2100" dirty="0"/>
           </a:p>
@@ -11013,17 +11168,17 @@
         </p:nvSpPr>
         <p:spPr>
           <a:xfrm>
-            <a:off x="7799832" y="1828800"/>
-            <a:ext cx="3145536" cy="685800"/>
-          </a:xfrm>
-          <a:prstGeom prst="rect">
-            <a:avLst/>
-          </a:prstGeom>
-          <a:noFill/>
-          <a:ln/>
-        </p:spPr>
-        <p:txBody>
-          <a:bodyPr wrap="square" lIns="0" tIns="0" rIns="0" bIns="0" rtlCol="0" anchor="t">
+            <a:off x="7799832" y="1801368"/>
+            <a:ext cx="3145536" cy="758952"/>
+          </a:xfrm>
+          <a:prstGeom prst="rect">
+            <a:avLst/>
+          </a:prstGeom>
+          <a:noFill/>
+          <a:ln/>
+        </p:spPr>
+        <p:txBody>
+          <a:bodyPr wrap="square" lIns="254" tIns="254" rIns="254" bIns="254" rtlCol="0" anchor="t">
             <a:normAutofit/>
           </a:bodyPr>
           <a:lstStyle/>
@@ -11032,7 +11187,7 @@
               <a:buNone/>
             </a:pPr>
             <a:r>
-              <a:rPr lang="en-US" sz="1550" dirty="0">
+              <a:rPr lang="en-US" sz="1320" dirty="0">
                 <a:solidFill>
                   <a:srgbClr val="17364A"/>
                 </a:solidFill>
@@ -11042,7 +11197,7 @@
               </a:rPr>
               <a:t>AI policy scan plan</a:t>
             </a:r>
-            <a:endParaRPr lang="en-US" sz="1550" dirty="0"/>
+            <a:endParaRPr lang="en-US" sz="1320" dirty="0"/>
           </a:p>
         </p:txBody>
       </p:sp>
@@ -11130,13 +11285,16 @@
           <a:ln/>
         </p:spPr>
         <p:txBody>
-          <a:bodyPr wrap="square" lIns="254" tIns="254" rIns="254" bIns="254" rtlCol="0" anchor="t">
+          <a:bodyPr wrap="square" lIns="508" tIns="508" rIns="508" bIns="508" rtlCol="0" anchor="t">
             <a:normAutofit/>
           </a:bodyPr>
           <a:lstStyle/>
           <a:p>
-            <a:r>
-              <a:rPr lang="en-US" sz="1380" dirty="0">
+            <a:pPr indent="0" marL="0">
+              <a:buNone/>
+            </a:pPr>
+            <a:r>
+              <a:rPr lang="en-US" sz="1220" dirty="0">
                 <a:solidFill>
                   <a:srgbClr val="17364A"/>
                 </a:solidFill>
@@ -11146,11 +11304,14 @@
               </a:rPr>
               <a:t>Recommended policy updates</a:t>
             </a:r>
-            <a:endParaRPr lang="en-US" sz="1380" dirty="0"/>
-          </a:p>
-          <a:p>
-            <a:r>
-              <a:rPr lang="en-US" sz="1380" dirty="0">
+            <a:endParaRPr lang="en-US" sz="1220" dirty="0"/>
+          </a:p>
+          <a:p>
+            <a:pPr indent="0" marL="0">
+              <a:buNone/>
+            </a:pPr>
+            <a:r>
+              <a:rPr lang="en-US" sz="1220" dirty="0">
                 <a:solidFill>
                   <a:srgbClr val="17364A"/>
                 </a:solidFill>
@@ -11160,7 +11321,7 @@
               </a:rPr>
               <a:t>Ongoing monitoring process</a:t>
             </a:r>
-            <a:endParaRPr lang="en-US" sz="1380" dirty="0"/>
+            <a:endParaRPr lang="en-US" sz="1220" dirty="0"/>
           </a:p>
         </p:txBody>
       </p:sp>
@@ -11238,17 +11399,17 @@
         </p:nvSpPr>
         <p:spPr>
           <a:xfrm>
-            <a:off x="7799832" y="5001768"/>
-            <a:ext cx="3145536" cy="502920"/>
-          </a:xfrm>
-          <a:prstGeom prst="rect">
-            <a:avLst/>
-          </a:prstGeom>
-          <a:noFill/>
-          <a:ln/>
-        </p:spPr>
-        <p:txBody>
-          <a:bodyPr wrap="square" lIns="0" tIns="0" rIns="0" bIns="0" rtlCol="0" anchor="t">
+            <a:off x="7799832" y="4974336"/>
+            <a:ext cx="3145536" cy="576072"/>
+          </a:xfrm>
+          <a:prstGeom prst="rect">
+            <a:avLst/>
+          </a:prstGeom>
+          <a:noFill/>
+          <a:ln/>
+        </p:spPr>
+        <p:txBody>
+          <a:bodyPr wrap="square" lIns="254" tIns="254" rIns="254" bIns="254" rtlCol="0" anchor="t">
             <a:normAutofit/>
           </a:bodyPr>
           <a:lstStyle/>
@@ -11257,7 +11418,7 @@
               <a:buNone/>
             </a:pPr>
             <a:r>
-              <a:rPr lang="en-US" sz="1550" dirty="0">
+              <a:rPr lang="en-US" sz="1320" dirty="0">
                 <a:solidFill>
                   <a:srgbClr val="17364A"/>
                 </a:solidFill>
@@ -11265,9 +11426,9 @@
                 <a:ea typeface="Aptos" pitchFamily="34" charset="-122"/>
                 <a:cs typeface="Aptos" pitchFamily="34" charset="-120"/>
               </a:rPr>
-              <a:t>Use the assignment to test whether you can explain the concept, apply it to a realistic public health situation, and identify what would need review before the work moves forward.</a:t>
-            </a:r>
-            <a:endParaRPr lang="en-US" sz="1550" dirty="0"/>
+              <a:t>Use the assignment to test whether you can explain the concept, apply it to a realistic public health situation, and.</a:t>
+            </a:r>
+            <a:endParaRPr lang="en-US" sz="1320" dirty="0"/>
           </a:p>
         </p:txBody>
       </p:sp>
@@ -11568,49 +11729,58 @@
           <a:ln/>
         </p:spPr>
         <p:txBody>
-          <a:bodyPr wrap="square" lIns="635" tIns="635" rIns="635" bIns="635" rtlCol="0" anchor="t">
+          <a:bodyPr wrap="square" lIns="1016" tIns="1016" rIns="1016" bIns="1016" rtlCol="0" anchor="t">
             <a:normAutofit/>
           </a:bodyPr>
           <a:lstStyle/>
           <a:p>
+            <a:pPr indent="0" marL="0">
+              <a:buNone/>
+            </a:pPr>
             <a:r>
               <a:rPr lang="en-US" sz="2100" dirty="0">
                 <a:solidFill>
-                  <a:srgbClr val="17364A"/>
-                </a:solidFill>
-                <a:latin typeface="Aptos" pitchFamily="34" charset="0"/>
-                <a:ea typeface="Aptos" pitchFamily="34" charset="-122"/>
-                <a:cs typeface="Aptos" pitchFamily="34" charset="-120"/>
-              </a:rPr>
-              <a:t>1. What does regulatory readiness mean in this module?</a:t>
+                  <a:srgbClr val="003A63"/>
+                </a:solidFill>
+                <a:latin typeface="Aptos" pitchFamily="34" charset="0"/>
+                <a:ea typeface="Aptos" pitchFamily="34" charset="-122"/>
+                <a:cs typeface="Aptos" pitchFamily="34" charset="-120"/>
+              </a:rPr>
+              <a:t>• 1. What does regulatory readiness mean in this module?</a:t>
             </a:r>
             <a:endParaRPr lang="en-US" sz="2100" dirty="0"/>
           </a:p>
           <a:p>
+            <a:pPr indent="0" marL="0">
+              <a:buNone/>
+            </a:pPr>
             <a:r>
               <a:rPr lang="en-US" sz="2100" dirty="0">
                 <a:solidFill>
-                  <a:srgbClr val="17364A"/>
-                </a:solidFill>
-                <a:latin typeface="Aptos" pitchFamily="34" charset="0"/>
-                <a:ea typeface="Aptos" pitchFamily="34" charset="-122"/>
-                <a:cs typeface="Aptos" pitchFamily="34" charset="-120"/>
-              </a:rPr>
-              <a:t>2. Which statement is most accurate?</a:t>
+                  <a:srgbClr val="003A63"/>
+                </a:solidFill>
+                <a:latin typeface="Aptos" pitchFamily="34" charset="0"/>
+                <a:ea typeface="Aptos" pitchFamily="34" charset="-122"/>
+                <a:cs typeface="Aptos" pitchFamily="34" charset="-120"/>
+              </a:rPr>
+              <a:t>• 2. Which statement is most accurate?</a:t>
             </a:r>
             <a:endParaRPr lang="en-US" sz="2100" dirty="0"/>
           </a:p>
           <a:p>
+            <a:pPr indent="0" marL="0">
+              <a:buNone/>
+            </a:pPr>
             <a:r>
               <a:rPr lang="en-US" sz="2100" dirty="0">
                 <a:solidFill>
-                  <a:srgbClr val="17364A"/>
-                </a:solidFill>
-                <a:latin typeface="Aptos" pitchFamily="34" charset="0"/>
-                <a:ea typeface="Aptos" pitchFamily="34" charset="-122"/>
-                <a:cs typeface="Aptos" pitchFamily="34" charset="-120"/>
-              </a:rPr>
-              <a:t>3. What is a policy scan?</a:t>
+                  <a:srgbClr val="003A63"/>
+                </a:solidFill>
+                <a:latin typeface="Aptos" pitchFamily="34" charset="0"/>
+                <a:ea typeface="Aptos" pitchFamily="34" charset="-122"/>
+                <a:cs typeface="Aptos" pitchFamily="34" charset="-120"/>
+              </a:rPr>
+              <a:t>• 3. What is a policy scan?</a:t>
             </a:r>
             <a:endParaRPr lang="en-US" sz="2100" dirty="0"/>
           </a:p>
@@ -11690,17 +11860,17 @@
         </p:nvSpPr>
         <p:spPr>
           <a:xfrm>
-            <a:off x="7799832" y="1828800"/>
-            <a:ext cx="3145536" cy="685800"/>
-          </a:xfrm>
-          <a:prstGeom prst="rect">
-            <a:avLst/>
-          </a:prstGeom>
-          <a:noFill/>
-          <a:ln/>
-        </p:spPr>
-        <p:txBody>
-          <a:bodyPr wrap="square" lIns="0" tIns="0" rIns="0" bIns="0" rtlCol="0" anchor="t">
+            <a:off x="7799832" y="1801368"/>
+            <a:ext cx="3145536" cy="758952"/>
+          </a:xfrm>
+          <a:prstGeom prst="rect">
+            <a:avLst/>
+          </a:prstGeom>
+          <a:noFill/>
+          <a:ln/>
+        </p:spPr>
+        <p:txBody>
+          <a:bodyPr wrap="square" lIns="254" tIns="254" rIns="254" bIns="254" rtlCol="0" anchor="t">
             <a:normAutofit/>
           </a:bodyPr>
           <a:lstStyle/>
@@ -11709,7 +11879,7 @@
               <a:buNone/>
             </a:pPr>
             <a:r>
-              <a:rPr lang="en-US" sz="1550" dirty="0">
+              <a:rPr lang="en-US" sz="1320" dirty="0">
                 <a:solidFill>
                   <a:srgbClr val="17364A"/>
                 </a:solidFill>
@@ -11719,7 +11889,7 @@
               </a:rPr>
               <a:t>1. What does regulatory readiness mean in this module?</a:t>
             </a:r>
-            <a:endParaRPr lang="en-US" sz="1550" dirty="0"/>
+            <a:endParaRPr lang="en-US" sz="1320" dirty="0"/>
           </a:p>
         </p:txBody>
       </p:sp>
@@ -11807,13 +11977,16 @@
           <a:ln/>
         </p:spPr>
         <p:txBody>
-          <a:bodyPr wrap="square" lIns="254" tIns="254" rIns="254" bIns="254" rtlCol="0" anchor="t">
+          <a:bodyPr wrap="square" lIns="508" tIns="508" rIns="508" bIns="508" rtlCol="0" anchor="t">
             <a:normAutofit/>
           </a:bodyPr>
           <a:lstStyle/>
           <a:p>
-            <a:r>
-              <a:rPr lang="en-US" sz="1380" dirty="0">
+            <a:pPr indent="0" marL="0">
+              <a:buNone/>
+            </a:pPr>
+            <a:r>
+              <a:rPr lang="en-US" sz="1220" dirty="0">
                 <a:solidFill>
                   <a:srgbClr val="17364A"/>
                 </a:solidFill>
@@ -11823,11 +11996,14 @@
               </a:rPr>
               <a:t>1.</a:t>
             </a:r>
-            <a:endParaRPr lang="en-US" sz="1380" dirty="0"/>
-          </a:p>
-          <a:p>
-            <a:r>
-              <a:rPr lang="en-US" sz="1380" dirty="0">
+            <a:endParaRPr lang="en-US" sz="1220" dirty="0"/>
+          </a:p>
+          <a:p>
+            <a:pPr indent="0" marL="0">
+              <a:buNone/>
+            </a:pPr>
+            <a:r>
+              <a:rPr lang="en-US" sz="1220" dirty="0">
                 <a:solidFill>
                   <a:srgbClr val="17364A"/>
                 </a:solidFill>
@@ -11837,11 +12013,14 @@
               </a:rPr>
               <a:t>What does regulatory readiness mean in this module?</a:t>
             </a:r>
-            <a:endParaRPr lang="en-US" sz="1380" dirty="0"/>
-          </a:p>
-          <a:p>
-            <a:r>
-              <a:rPr lang="en-US" sz="1380" dirty="0">
+            <a:endParaRPr lang="en-US" sz="1220" dirty="0"/>
+          </a:p>
+          <a:p>
+            <a:pPr indent="0" marL="0">
+              <a:buNone/>
+            </a:pPr>
+            <a:r>
+              <a:rPr lang="en-US" sz="1220" dirty="0">
                 <a:solidFill>
                   <a:srgbClr val="17364A"/>
                 </a:solidFill>
@@ -11851,7 +12030,7 @@
               </a:rPr>
               <a:t>2.</a:t>
             </a:r>
-            <a:endParaRPr lang="en-US" sz="1380" dirty="0"/>
+            <a:endParaRPr lang="en-US" sz="1220" dirty="0"/>
           </a:p>
         </p:txBody>
       </p:sp>
@@ -11929,17 +12108,17 @@
         </p:nvSpPr>
         <p:spPr>
           <a:xfrm>
-            <a:off x="7799832" y="5001768"/>
-            <a:ext cx="3145536" cy="502920"/>
-          </a:xfrm>
-          <a:prstGeom prst="rect">
-            <a:avLst/>
-          </a:prstGeom>
-          <a:noFill/>
-          <a:ln/>
-        </p:spPr>
-        <p:txBody>
-          <a:bodyPr wrap="square" lIns="0" tIns="0" rIns="0" bIns="0" rtlCol="0" anchor="t">
+            <a:off x="7799832" y="4974336"/>
+            <a:ext cx="3145536" cy="576072"/>
+          </a:xfrm>
+          <a:prstGeom prst="rect">
+            <a:avLst/>
+          </a:prstGeom>
+          <a:noFill/>
+          <a:ln/>
+        </p:spPr>
+        <p:txBody>
+          <a:bodyPr wrap="square" lIns="254" tIns="254" rIns="254" bIns="254" rtlCol="0" anchor="t">
             <a:normAutofit/>
           </a:bodyPr>
           <a:lstStyle/>
@@ -11948,7 +12127,7 @@
               <a:buNone/>
             </a:pPr>
             <a:r>
-              <a:rPr lang="en-US" sz="1550" dirty="0">
+              <a:rPr lang="en-US" sz="1320" dirty="0">
                 <a:solidFill>
                   <a:srgbClr val="17364A"/>
                 </a:solidFill>
@@ -11956,9 +12135,9 @@
                 <a:ea typeface="Aptos" pitchFamily="34" charset="-122"/>
                 <a:cs typeface="Aptos" pitchFamily="34" charset="-120"/>
               </a:rPr>
-              <a:t>Use the assignment to test whether you can explain the concept, apply it to a realistic public health situation, and identify what would need review before the work moves forward.</a:t>
-            </a:r>
-            <a:endParaRPr lang="en-US" sz="1550" dirty="0"/>
+              <a:t>Use the assignment to test whether you can explain the concept, apply it to a realistic public health situation, and.</a:t>
+            </a:r>
+            <a:endParaRPr lang="en-US" sz="1320" dirty="0"/>
           </a:p>
         </p:txBody>
       </p:sp>
@@ -12259,49 +12438,58 @@
           <a:ln/>
         </p:spPr>
         <p:txBody>
-          <a:bodyPr wrap="square" lIns="635" tIns="635" rIns="635" bIns="635" rtlCol="0" anchor="t">
+          <a:bodyPr wrap="square" lIns="1016" tIns="1016" rIns="1016" bIns="1016" rtlCol="0" anchor="t">
             <a:normAutofit/>
           </a:bodyPr>
           <a:lstStyle/>
           <a:p>
+            <a:pPr indent="0" marL="0">
+              <a:buNone/>
+            </a:pPr>
             <a:r>
               <a:rPr lang="en-US" sz="2100" dirty="0">
                 <a:solidFill>
-                  <a:srgbClr val="17364A"/>
-                </a:solidFill>
-                <a:latin typeface="Aptos" pitchFamily="34" charset="0"/>
-                <a:ea typeface="Aptos" pitchFamily="34" charset="-122"/>
-                <a:cs typeface="Aptos" pitchFamily="34" charset="-120"/>
-              </a:rPr>
-              <a:t>NIST Artificial Intelligence Risk Management Framework:.</a:t>
+                  <a:srgbClr val="003A63"/>
+                </a:solidFill>
+                <a:latin typeface="Aptos" pitchFamily="34" charset="0"/>
+                <a:ea typeface="Aptos" pitchFamily="34" charset="-122"/>
+                <a:cs typeface="Aptos" pitchFamily="34" charset="-120"/>
+              </a:rPr>
+              <a:t>• NIST Artificial Intelligence Risk Management Framework:.</a:t>
             </a:r>
             <a:endParaRPr lang="en-US" sz="2100" dirty="0"/>
           </a:p>
           <a:p>
+            <a:pPr indent="0" marL="0">
+              <a:buNone/>
+            </a:pPr>
             <a:r>
               <a:rPr lang="en-US" sz="2100" dirty="0">
                 <a:solidFill>
-                  <a:srgbClr val="17364A"/>
-                </a:solidFill>
-                <a:latin typeface="Aptos" pitchFamily="34" charset="0"/>
-                <a:ea typeface="Aptos" pitchFamily="34" charset="-122"/>
-                <a:cs typeface="Aptos" pitchFamily="34" charset="-120"/>
-              </a:rPr>
-              <a:t>NIST Generative AI Profile:.</a:t>
+                  <a:srgbClr val="003A63"/>
+                </a:solidFill>
+                <a:latin typeface="Aptos" pitchFamily="34" charset="0"/>
+                <a:ea typeface="Aptos" pitchFamily="34" charset="-122"/>
+                <a:cs typeface="Aptos" pitchFamily="34" charset="-120"/>
+              </a:rPr>
+              <a:t>• NIST Generative AI Profile:.</a:t>
             </a:r>
             <a:endParaRPr lang="en-US" sz="2100" dirty="0"/>
           </a:p>
           <a:p>
+            <a:pPr indent="0" marL="0">
+              <a:buNone/>
+            </a:pPr>
             <a:r>
               <a:rPr lang="en-US" sz="2100" dirty="0">
                 <a:solidFill>
-                  <a:srgbClr val="17364A"/>
-                </a:solidFill>
-                <a:latin typeface="Aptos" pitchFamily="34" charset="0"/>
-                <a:ea typeface="Aptos" pitchFamily="34" charset="-122"/>
-                <a:cs typeface="Aptos" pitchFamily="34" charset="-120"/>
-              </a:rPr>
-              <a:t>CDC Public Health Data Strategy and Data Modernization resources:.</a:t>
+                  <a:srgbClr val="003A63"/>
+                </a:solidFill>
+                <a:latin typeface="Aptos" pitchFamily="34" charset="0"/>
+                <a:ea typeface="Aptos" pitchFamily="34" charset="-122"/>
+                <a:cs typeface="Aptos" pitchFamily="34" charset="-120"/>
+              </a:rPr>
+              <a:t>• CDC Public Health Data Strategy and Data Modernization resources:.</a:t>
             </a:r>
             <a:endParaRPr lang="en-US" sz="2100" dirty="0"/>
           </a:p>
@@ -12381,17 +12569,17 @@
         </p:nvSpPr>
         <p:spPr>
           <a:xfrm>
-            <a:off x="7799832" y="1828800"/>
-            <a:ext cx="3145536" cy="685800"/>
-          </a:xfrm>
-          <a:prstGeom prst="rect">
-            <a:avLst/>
-          </a:prstGeom>
-          <a:noFill/>
-          <a:ln/>
-        </p:spPr>
-        <p:txBody>
-          <a:bodyPr wrap="square" lIns="0" tIns="0" rIns="0" bIns="0" rtlCol="0" anchor="t">
+            <a:off x="7799832" y="1801368"/>
+            <a:ext cx="3145536" cy="758952"/>
+          </a:xfrm>
+          <a:prstGeom prst="rect">
+            <a:avLst/>
+          </a:prstGeom>
+          <a:noFill/>
+          <a:ln/>
+        </p:spPr>
+        <p:txBody>
+          <a:bodyPr wrap="square" lIns="254" tIns="254" rIns="254" bIns="254" rtlCol="0" anchor="t">
             <a:normAutofit/>
           </a:bodyPr>
           <a:lstStyle/>
@@ -12400,7 +12588,7 @@
               <a:buNone/>
             </a:pPr>
             <a:r>
-              <a:rPr lang="en-US" sz="1550" dirty="0">
+              <a:rPr lang="en-US" sz="1320" dirty="0">
                 <a:solidFill>
                   <a:srgbClr val="17364A"/>
                 </a:solidFill>
@@ -12410,7 +12598,7 @@
               </a:rPr>
               <a:t>NIST Artificial Intelligence Risk Management Framework:.</a:t>
             </a:r>
-            <a:endParaRPr lang="en-US" sz="1550" dirty="0"/>
+            <a:endParaRPr lang="en-US" sz="1320" dirty="0"/>
           </a:p>
         </p:txBody>
       </p:sp>
@@ -12498,13 +12686,16 @@
           <a:ln/>
         </p:spPr>
         <p:txBody>
-          <a:bodyPr wrap="square" lIns="254" tIns="254" rIns="254" bIns="254" rtlCol="0" anchor="t">
+          <a:bodyPr wrap="square" lIns="508" tIns="508" rIns="508" bIns="508" rtlCol="0" anchor="t">
             <a:normAutofit/>
           </a:bodyPr>
           <a:lstStyle/>
           <a:p>
-            <a:r>
-              <a:rPr lang="en-US" sz="1380" dirty="0">
+            <a:pPr indent="0" marL="0">
+              <a:buNone/>
+            </a:pPr>
+            <a:r>
+              <a:rPr lang="en-US" sz="1220" dirty="0">
                 <a:solidFill>
                   <a:srgbClr val="17364A"/>
                 </a:solidFill>
@@ -12514,11 +12705,14 @@
               </a:rPr>
               <a:t>NIST Artificial Intelligence Risk Management Framework:.</a:t>
             </a:r>
-            <a:endParaRPr lang="en-US" sz="1380" dirty="0"/>
-          </a:p>
-          <a:p>
-            <a:r>
-              <a:rPr lang="en-US" sz="1380" dirty="0">
+            <a:endParaRPr lang="en-US" sz="1220" dirty="0"/>
+          </a:p>
+          <a:p>
+            <a:pPr indent="0" marL="0">
+              <a:buNone/>
+            </a:pPr>
+            <a:r>
+              <a:rPr lang="en-US" sz="1220" dirty="0">
                 <a:solidFill>
                   <a:srgbClr val="17364A"/>
                 </a:solidFill>
@@ -12528,11 +12722,14 @@
               </a:rPr>
               <a:t>OWASP guidance for LLM application security</a:t>
             </a:r>
-            <a:endParaRPr lang="en-US" sz="1380" dirty="0"/>
-          </a:p>
-          <a:p>
-            <a:r>
-              <a:rPr lang="en-US" sz="1380" dirty="0">
+            <a:endParaRPr lang="en-US" sz="1220" dirty="0"/>
+          </a:p>
+          <a:p>
+            <a:pPr indent="0" marL="0">
+              <a:buNone/>
+            </a:pPr>
+            <a:r>
+              <a:rPr lang="en-US" sz="1220" dirty="0">
                 <a:solidFill>
                   <a:srgbClr val="17364A"/>
                 </a:solidFill>
@@ -12540,9 +12737,9 @@
                 <a:ea typeface="Aptos" pitchFamily="34" charset="-122"/>
                 <a:cs typeface="Aptos" pitchFamily="34" charset="-120"/>
               </a:rPr>
-              <a:t>Agency policies for privacy, cybersecurity, records, procurement, accessibility, and.</a:t>
-            </a:r>
-            <a:endParaRPr lang="en-US" sz="1380" dirty="0"/>
+              <a:t>Agency policies for privacy, cybersecurity, records, procurement,.</a:t>
+            </a:r>
+            <a:endParaRPr lang="en-US" sz="1220" dirty="0"/>
           </a:p>
         </p:txBody>
       </p:sp>
@@ -12620,17 +12817,17 @@
         </p:nvSpPr>
         <p:spPr>
           <a:xfrm>
-            <a:off x="7799832" y="5001768"/>
-            <a:ext cx="3145536" cy="502920"/>
-          </a:xfrm>
-          <a:prstGeom prst="rect">
-            <a:avLst/>
-          </a:prstGeom>
-          <a:noFill/>
-          <a:ln/>
-        </p:spPr>
-        <p:txBody>
-          <a:bodyPr wrap="square" lIns="0" tIns="0" rIns="0" bIns="0" rtlCol="0" anchor="t">
+            <a:off x="7799832" y="4974336"/>
+            <a:ext cx="3145536" cy="576072"/>
+          </a:xfrm>
+          <a:prstGeom prst="rect">
+            <a:avLst/>
+          </a:prstGeom>
+          <a:noFill/>
+          <a:ln/>
+        </p:spPr>
+        <p:txBody>
+          <a:bodyPr wrap="square" lIns="254" tIns="254" rIns="254" bIns="254" rtlCol="0" anchor="t">
             <a:normAutofit/>
           </a:bodyPr>
           <a:lstStyle/>
@@ -12639,7 +12836,7 @@
               <a:buNone/>
             </a:pPr>
             <a:r>
-              <a:rPr lang="en-US" sz="1550" dirty="0">
+              <a:rPr lang="en-US" sz="1320" dirty="0">
                 <a:solidFill>
                   <a:srgbClr val="17364A"/>
                 </a:solidFill>
@@ -12647,9 +12844,9 @@
                 <a:ea typeface="Aptos" pitchFamily="34" charset="-122"/>
                 <a:cs typeface="Aptos" pitchFamily="34" charset="-120"/>
               </a:rPr>
-              <a:t>Translate this concept into clear decision rights, review steps, documentation expectations, and escalation paths before an AI-supported workflow is approved.</a:t>
-            </a:r>
-            <a:endParaRPr lang="en-US" sz="1550" dirty="0"/>
+              <a:t>Translate this concept into clear decision rights, review steps, documentation expectations, and escalation paths before.</a:t>
+            </a:r>
+            <a:endParaRPr lang="en-US" sz="1320" dirty="0"/>
           </a:p>
         </p:txBody>
       </p:sp>
@@ -12950,21 +13147,24 @@
           <a:ln/>
         </p:spPr>
         <p:txBody>
-          <a:bodyPr wrap="square" lIns="635" tIns="635" rIns="635" bIns="635" rtlCol="0" anchor="t">
+          <a:bodyPr wrap="square" lIns="1016" tIns="1016" rIns="1016" bIns="1016" rtlCol="0" anchor="t">
             <a:normAutofit/>
           </a:bodyPr>
           <a:lstStyle/>
           <a:p>
+            <a:pPr indent="0" marL="0">
+              <a:buNone/>
+            </a:pPr>
             <a:r>
               <a:rPr lang="en-US" sz="2100" dirty="0">
                 <a:solidFill>
-                  <a:srgbClr val="17364A"/>
-                </a:solidFill>
-                <a:latin typeface="Aptos" pitchFamily="34" charset="0"/>
-                <a:ea typeface="Aptos" pitchFamily="34" charset="-122"/>
-                <a:cs typeface="Aptos" pitchFamily="34" charset="-120"/>
-              </a:rPr>
-              <a:t>Relevant public health program SOPs, data governance documentation, and implementation plans</a:t>
+                  <a:srgbClr val="003A63"/>
+                </a:solidFill>
+                <a:latin typeface="Aptos" pitchFamily="34" charset="0"/>
+                <a:ea typeface="Aptos" pitchFamily="34" charset="-122"/>
+                <a:cs typeface="Aptos" pitchFamily="34" charset="-120"/>
+              </a:rPr>
+              <a:t>• Relevant public health program SOPs, data governance documentation, and implementation plans</a:t>
             </a:r>
             <a:endParaRPr lang="en-US" sz="2100" dirty="0"/>
           </a:p>
@@ -13044,17 +13244,17 @@
         </p:nvSpPr>
         <p:spPr>
           <a:xfrm>
-            <a:off x="7799832" y="1828800"/>
-            <a:ext cx="3145536" cy="685800"/>
-          </a:xfrm>
-          <a:prstGeom prst="rect">
-            <a:avLst/>
-          </a:prstGeom>
-          <a:noFill/>
-          <a:ln/>
-        </p:spPr>
-        <p:txBody>
-          <a:bodyPr wrap="square" lIns="0" tIns="0" rIns="0" bIns="0" rtlCol="0" anchor="t">
+            <a:off x="7799832" y="1801368"/>
+            <a:ext cx="3145536" cy="758952"/>
+          </a:xfrm>
+          <a:prstGeom prst="rect">
+            <a:avLst/>
+          </a:prstGeom>
+          <a:noFill/>
+          <a:ln/>
+        </p:spPr>
+        <p:txBody>
+          <a:bodyPr wrap="square" lIns="254" tIns="254" rIns="254" bIns="254" rtlCol="0" anchor="t">
             <a:normAutofit/>
           </a:bodyPr>
           <a:lstStyle/>
@@ -13063,7 +13263,7 @@
               <a:buNone/>
             </a:pPr>
             <a:r>
-              <a:rPr lang="en-US" sz="1550" dirty="0">
+              <a:rPr lang="en-US" sz="1320" dirty="0">
                 <a:solidFill>
                   <a:srgbClr val="17364A"/>
                 </a:solidFill>
@@ -13073,7 +13273,7 @@
               </a:rPr>
               <a:t>Relevant public health program SOPs, data governance documentation, and implementation plans</a:t>
             </a:r>
-            <a:endParaRPr lang="en-US" sz="1550" dirty="0"/>
+            <a:endParaRPr lang="en-US" sz="1320" dirty="0"/>
           </a:p>
         </p:txBody>
       </p:sp>
@@ -13161,13 +13361,16 @@
           <a:ln/>
         </p:spPr>
         <p:txBody>
-          <a:bodyPr wrap="square" lIns="254" tIns="254" rIns="254" bIns="254" rtlCol="0" anchor="t">
+          <a:bodyPr wrap="square" lIns="508" tIns="508" rIns="508" bIns="508" rtlCol="0" anchor="t">
             <a:normAutofit/>
           </a:bodyPr>
           <a:lstStyle/>
           <a:p>
-            <a:r>
-              <a:rPr lang="en-US" sz="1380" dirty="0">
+            <a:pPr indent="0" marL="0">
+              <a:buNone/>
+            </a:pPr>
+            <a:r>
+              <a:rPr lang="en-US" sz="1220" dirty="0">
                 <a:solidFill>
                   <a:srgbClr val="17364A"/>
                 </a:solidFill>
@@ -13175,9 +13378,9 @@
                 <a:ea typeface="Aptos" pitchFamily="34" charset="-122"/>
                 <a:cs typeface="Aptos" pitchFamily="34" charset="-120"/>
               </a:rPr>
-              <a:t>Relevant public health program SOPs, data governance documentation, and implementation plans</a:t>
-            </a:r>
-            <a:endParaRPr lang="en-US" sz="1380" dirty="0"/>
+              <a:t>Relevant public health program SOPs, data governance.</a:t>
+            </a:r>
+            <a:endParaRPr lang="en-US" sz="1220" dirty="0"/>
           </a:p>
         </p:txBody>
       </p:sp>
@@ -13255,17 +13458,17 @@
         </p:nvSpPr>
         <p:spPr>
           <a:xfrm>
-            <a:off x="7799832" y="5001768"/>
-            <a:ext cx="3145536" cy="502920"/>
-          </a:xfrm>
-          <a:prstGeom prst="rect">
-            <a:avLst/>
-          </a:prstGeom>
-          <a:noFill/>
-          <a:ln/>
-        </p:spPr>
-        <p:txBody>
-          <a:bodyPr wrap="square" lIns="0" tIns="0" rIns="0" bIns="0" rtlCol="0" anchor="t">
+            <a:off x="7799832" y="4974336"/>
+            <a:ext cx="3145536" cy="576072"/>
+          </a:xfrm>
+          <a:prstGeom prst="rect">
+            <a:avLst/>
+          </a:prstGeom>
+          <a:noFill/>
+          <a:ln/>
+        </p:spPr>
+        <p:txBody>
+          <a:bodyPr wrap="square" lIns="254" tIns="254" rIns="254" bIns="254" rtlCol="0" anchor="t">
             <a:normAutofit/>
           </a:bodyPr>
           <a:lstStyle/>
@@ -13274,7 +13477,7 @@
               <a:buNone/>
             </a:pPr>
             <a:r>
-              <a:rPr lang="en-US" sz="1550" dirty="0">
+              <a:rPr lang="en-US" sz="1320" dirty="0">
                 <a:solidFill>
                   <a:srgbClr val="17364A"/>
                 </a:solidFill>
@@ -13282,9 +13485,9 @@
                 <a:ea typeface="Aptos" pitchFamily="34" charset="-122"/>
                 <a:cs typeface="Aptos" pitchFamily="34" charset="-120"/>
               </a:rPr>
-              <a:t>Translate this concept into clear decision rights, review steps, documentation expectations, and escalation paths before an AI-supported workflow is approved.</a:t>
-            </a:r>
-            <a:endParaRPr lang="en-US" sz="1550" dirty="0"/>
+              <a:t>Translate this concept into clear decision rights, review steps, documentation expectations, and escalation paths before.</a:t>
+            </a:r>
+            <a:endParaRPr lang="en-US" sz="1320" dirty="0"/>
           </a:p>
         </p:txBody>
       </p:sp>
@@ -13585,63 +13788,75 @@
           <a:ln/>
         </p:spPr>
         <p:txBody>
-          <a:bodyPr wrap="square" lIns="635" tIns="635" rIns="635" bIns="635" rtlCol="0" anchor="t">
+          <a:bodyPr wrap="square" lIns="1016" tIns="1016" rIns="1016" bIns="1016" rtlCol="0" anchor="t">
             <a:normAutofit/>
           </a:bodyPr>
           <a:lstStyle/>
           <a:p>
+            <a:pPr indent="0" marL="0">
+              <a:buNone/>
+            </a:pPr>
             <a:r>
               <a:rPr lang="en-US" sz="1900" dirty="0">
                 <a:solidFill>
-                  <a:srgbClr val="17364A"/>
-                </a:solidFill>
-                <a:latin typeface="Aptos" pitchFamily="34" charset="0"/>
-                <a:ea typeface="Aptos" pitchFamily="34" charset="-122"/>
-                <a:cs typeface="Aptos" pitchFamily="34" charset="-120"/>
-              </a:rPr>
-              <a:t>Play 3: Establish AI Governance - This lesson informs Play 3 by helping learners connect the lesson topic to.</a:t>
+                  <a:srgbClr val="003A63"/>
+                </a:solidFill>
+                <a:latin typeface="Aptos" pitchFamily="34" charset="0"/>
+                <a:ea typeface="Aptos" pitchFamily="34" charset="-122"/>
+                <a:cs typeface="Aptos" pitchFamily="34" charset="-120"/>
+              </a:rPr>
+              <a:t>• Play 3: Establish AI Governance - This lesson informs Play 3 by helping learners connect the.</a:t>
             </a:r>
             <a:endParaRPr lang="en-US" sz="1900" dirty="0"/>
           </a:p>
           <a:p>
+            <a:pPr indent="0" marL="0">
+              <a:buNone/>
+            </a:pPr>
             <a:r>
               <a:rPr lang="en-US" sz="1900" dirty="0">
                 <a:solidFill>
-                  <a:srgbClr val="17364A"/>
-                </a:solidFill>
-                <a:latin typeface="Aptos" pitchFamily="34" charset="0"/>
-                <a:ea typeface="Aptos" pitchFamily="34" charset="-122"/>
-                <a:cs typeface="Aptos" pitchFamily="34" charset="-120"/>
-              </a:rPr>
-              <a:t>Play 12: Execute Governance and Oversight - This lesson informs Play 12 by helping learners connect the.</a:t>
+                  <a:srgbClr val="003A63"/>
+                </a:solidFill>
+                <a:latin typeface="Aptos" pitchFamily="34" charset="0"/>
+                <a:ea typeface="Aptos" pitchFamily="34" charset="-122"/>
+                <a:cs typeface="Aptos" pitchFamily="34" charset="-120"/>
+              </a:rPr>
+              <a:t>• Play 12: Execute Governance and Oversight - This lesson informs Play 12 by helping learners.</a:t>
             </a:r>
             <a:endParaRPr lang="en-US" sz="1900" dirty="0"/>
           </a:p>
           <a:p>
+            <a:pPr indent="0" marL="0">
+              <a:buNone/>
+            </a:pPr>
             <a:r>
               <a:rPr lang="en-US" sz="1900" dirty="0">
                 <a:solidFill>
-                  <a:srgbClr val="17364A"/>
-                </a:solidFill>
-                <a:latin typeface="Aptos" pitchFamily="34" charset="0"/>
-                <a:ea typeface="Aptos" pitchFamily="34" charset="-122"/>
-                <a:cs typeface="Aptos" pitchFamily="34" charset="-120"/>
-              </a:rPr>
-              <a:t>Play 11: Build and Deploy AI Solutions - This lesson informs Play 11 by helping learners connect the lesson.</a:t>
+                  <a:srgbClr val="003A63"/>
+                </a:solidFill>
+                <a:latin typeface="Aptos" pitchFamily="34" charset="0"/>
+                <a:ea typeface="Aptos" pitchFamily="34" charset="-122"/>
+                <a:cs typeface="Aptos" pitchFamily="34" charset="-120"/>
+              </a:rPr>
+              <a:t>• Play 11: Build and Deploy AI Solutions - This lesson informs Play 11 by helping learners.</a:t>
             </a:r>
             <a:endParaRPr lang="en-US" sz="1900" dirty="0"/>
           </a:p>
           <a:p>
+            <a:pPr indent="0" marL="0">
+              <a:buNone/>
+            </a:pPr>
             <a:r>
               <a:rPr lang="en-US" sz="1900" dirty="0">
                 <a:solidFill>
-                  <a:srgbClr val="17364A"/>
-                </a:solidFill>
-                <a:latin typeface="Aptos" pitchFamily="34" charset="0"/>
-                <a:ea typeface="Aptos" pitchFamily="34" charset="-122"/>
-                <a:cs typeface="Aptos" pitchFamily="34" charset="-120"/>
-              </a:rPr>
-              <a:t>Play 8: Develop a Funding Strategy - This lesson informs Play 8 by helping learners connect the lesson topic.</a:t>
+                  <a:srgbClr val="003A63"/>
+                </a:solidFill>
+                <a:latin typeface="Aptos" pitchFamily="34" charset="0"/>
+                <a:ea typeface="Aptos" pitchFamily="34" charset="-122"/>
+                <a:cs typeface="Aptos" pitchFamily="34" charset="-120"/>
+              </a:rPr>
+              <a:t>• Play 8: Develop a Funding Strategy - This lesson informs Play 8 by helping learners connect.</a:t>
             </a:r>
             <a:endParaRPr lang="en-US" sz="1900" dirty="0"/>
           </a:p>
@@ -13721,17 +13936,17 @@
         </p:nvSpPr>
         <p:spPr>
           <a:xfrm>
-            <a:off x="8211312" y="1920240"/>
-            <a:ext cx="2734056" cy="1463040"/>
-          </a:xfrm>
-          <a:prstGeom prst="rect">
-            <a:avLst/>
-          </a:prstGeom>
-          <a:noFill/>
-          <a:ln/>
-        </p:spPr>
-        <p:txBody>
-          <a:bodyPr wrap="square" lIns="0" tIns="0" rIns="0" bIns="0" rtlCol="0" anchor="t">
+            <a:off x="8211312" y="1892808"/>
+            <a:ext cx="2734056" cy="1536192"/>
+          </a:xfrm>
+          <a:prstGeom prst="rect">
+            <a:avLst/>
+          </a:prstGeom>
+          <a:noFill/>
+          <a:ln/>
+        </p:spPr>
+        <p:txBody>
+          <a:bodyPr wrap="square" lIns="254" tIns="254" rIns="254" bIns="254" rtlCol="0" anchor="t">
             <a:normAutofit/>
           </a:bodyPr>
           <a:lstStyle/>
@@ -13740,7 +13955,7 @@
               <a:buNone/>
             </a:pPr>
             <a:r>
-              <a:rPr lang="en-US" sz="1550" dirty="0">
+              <a:rPr lang="en-US" sz="1320" dirty="0">
                 <a:solidFill>
                   <a:srgbClr val="17364A"/>
                 </a:solidFill>
@@ -13748,9 +13963,9 @@
                 <a:ea typeface="Aptos" pitchFamily="34" charset="-122"/>
                 <a:cs typeface="Aptos" pitchFamily="34" charset="-120"/>
               </a:rPr>
-              <a:t>Use the related plays to identify decisions, participants, timing, approvals, and documentation needed for responsible implementation.</a:t>
-            </a:r>
-            <a:endParaRPr lang="en-US" sz="1550" dirty="0"/>
+              <a:t>Use the related plays to identify decisions, participants, timing, approvals, and documentation needed for responsible.</a:t>
+            </a:r>
+            <a:endParaRPr lang="en-US" sz="1320" dirty="0"/>
           </a:p>
         </p:txBody>
       </p:sp>
@@ -13838,13 +14053,16 @@
           <a:ln/>
         </p:spPr>
         <p:txBody>
-          <a:bodyPr wrap="square" lIns="254" tIns="254" rIns="254" bIns="254" rtlCol="0" anchor="t">
+          <a:bodyPr wrap="square" lIns="508" tIns="508" rIns="508" bIns="508" rtlCol="0" anchor="t">
             <a:normAutofit/>
           </a:bodyPr>
           <a:lstStyle/>
           <a:p>
-            <a:r>
-              <a:rPr lang="en-US" sz="1380" dirty="0">
+            <a:pPr indent="0" marL="0">
+              <a:buNone/>
+            </a:pPr>
+            <a:r>
+              <a:rPr lang="en-US" sz="1220" dirty="0">
                 <a:solidFill>
                   <a:srgbClr val="17364A"/>
                 </a:solidFill>
@@ -13854,11 +14072,14 @@
               </a:rPr>
               <a:t>Locate the decision point in the playbook sequence.</a:t>
             </a:r>
-            <a:endParaRPr lang="en-US" sz="1380" dirty="0"/>
-          </a:p>
-          <a:p>
-            <a:r>
-              <a:rPr lang="en-US" sz="1380" dirty="0">
+            <a:endParaRPr lang="en-US" sz="1220" dirty="0"/>
+          </a:p>
+          <a:p>
+            <a:pPr indent="0" marL="0">
+              <a:buNone/>
+            </a:pPr>
+            <a:r>
+              <a:rPr lang="en-US" sz="1220" dirty="0">
                 <a:solidFill>
                   <a:srgbClr val="17364A"/>
                 </a:solidFill>
@@ -13868,11 +14089,14 @@
               </a:rPr>
               <a:t>Identify who should participate in the work.</a:t>
             </a:r>
-            <a:endParaRPr lang="en-US" sz="1380" dirty="0"/>
-          </a:p>
-          <a:p>
-            <a:r>
-              <a:rPr lang="en-US" sz="1380" dirty="0">
+            <a:endParaRPr lang="en-US" sz="1220" dirty="0"/>
+          </a:p>
+          <a:p>
+            <a:pPr indent="0" marL="0">
+              <a:buNone/>
+            </a:pPr>
+            <a:r>
+              <a:rPr lang="en-US" sz="1220" dirty="0">
                 <a:solidFill>
                   <a:srgbClr val="17364A"/>
                 </a:solidFill>
@@ -13882,7 +14106,7 @@
               </a:rPr>
               <a:t>Document the review, approval, or implementation step.</a:t>
             </a:r>
-            <a:endParaRPr lang="en-US" sz="1380" dirty="0"/>
+            <a:endParaRPr lang="en-US" sz="1220" dirty="0"/>
           </a:p>
         </p:txBody>
       </p:sp>
@@ -14183,63 +14407,75 @@
           <a:ln/>
         </p:spPr>
         <p:txBody>
-          <a:bodyPr wrap="square" lIns="635" tIns="635" rIns="635" bIns="635" rtlCol="0" anchor="t">
+          <a:bodyPr wrap="square" lIns="1016" tIns="1016" rIns="1016" bIns="1016" rtlCol="0" anchor="t">
             <a:normAutofit/>
           </a:bodyPr>
           <a:lstStyle/>
           <a:p>
+            <a:pPr indent="0" marL="0">
+              <a:buNone/>
+            </a:pPr>
             <a:r>
               <a:rPr lang="en-US" sz="1850" dirty="0">
                 <a:solidFill>
-                  <a:srgbClr val="17364A"/>
-                </a:solidFill>
-                <a:latin typeface="Aptos" pitchFamily="34" charset="0"/>
-                <a:ea typeface="Aptos" pitchFamily="34" charset="-122"/>
-                <a:cs typeface="Aptos" pitchFamily="34" charset="-120"/>
-              </a:rPr>
-              <a:t>Tool 16: Incident Response Checklist (Checklist) - Use this tool to complete or strengthen the practical.</a:t>
+                  <a:srgbClr val="003A63"/>
+                </a:solidFill>
+                <a:latin typeface="Aptos" pitchFamily="34" charset="0"/>
+                <a:ea typeface="Aptos" pitchFamily="34" charset="-122"/>
+                <a:cs typeface="Aptos" pitchFamily="34" charset="-120"/>
+              </a:rPr>
+              <a:t>• Tool 16: Incident Response Checklist (Checklist) - Use this tool to complete or strengthen the.</a:t>
             </a:r>
             <a:endParaRPr lang="en-US" sz="1850" dirty="0"/>
           </a:p>
           <a:p>
+            <a:pPr indent="0" marL="0">
+              <a:buNone/>
+            </a:pPr>
             <a:r>
               <a:rPr lang="en-US" sz="1850" dirty="0">
                 <a:solidFill>
-                  <a:srgbClr val="17364A"/>
-                </a:solidFill>
-                <a:latin typeface="Aptos" pitchFamily="34" charset="0"/>
-                <a:ea typeface="Aptos" pitchFamily="34" charset="-122"/>
-                <a:cs typeface="Aptos" pitchFamily="34" charset="-120"/>
-              </a:rPr>
-              <a:t>Tool 17: Compliance Audit Checklist (Checklist) - Use this tool to complete or strengthen the practical.</a:t>
+                  <a:srgbClr val="003A63"/>
+                </a:solidFill>
+                <a:latin typeface="Aptos" pitchFamily="34" charset="0"/>
+                <a:ea typeface="Aptos" pitchFamily="34" charset="-122"/>
+                <a:cs typeface="Aptos" pitchFamily="34" charset="-120"/>
+              </a:rPr>
+              <a:t>• Tool 17: Compliance Audit Checklist (Checklist) - Use this tool to complete or strengthen the.</a:t>
             </a:r>
             <a:endParaRPr lang="en-US" sz="1850" dirty="0"/>
           </a:p>
           <a:p>
+            <a:pPr indent="0" marL="0">
+              <a:buNone/>
+            </a:pPr>
             <a:r>
               <a:rPr lang="en-US" sz="1850" dirty="0">
                 <a:solidFill>
-                  <a:srgbClr val="17364A"/>
-                </a:solidFill>
-                <a:latin typeface="Aptos" pitchFamily="34" charset="0"/>
-                <a:ea typeface="Aptos" pitchFamily="34" charset="-122"/>
-                <a:cs typeface="Aptos" pitchFamily="34" charset="-120"/>
-              </a:rPr>
-              <a:t>Tool 18: Policy Update &amp; Version Control Log (Log) - Use this tool to complete or strengthen the practical.</a:t>
+                  <a:srgbClr val="003A63"/>
+                </a:solidFill>
+                <a:latin typeface="Aptos" pitchFamily="34" charset="0"/>
+                <a:ea typeface="Aptos" pitchFamily="34" charset="-122"/>
+                <a:cs typeface="Aptos" pitchFamily="34" charset="-120"/>
+              </a:rPr>
+              <a:t>• Tool 18: Policy Update &amp; Version Control Log (Log) - Use this tool to complete or strengthen.</a:t>
             </a:r>
             <a:endParaRPr lang="en-US" sz="1850" dirty="0"/>
           </a:p>
           <a:p>
+            <a:pPr indent="0" marL="0">
+              <a:buNone/>
+            </a:pPr>
             <a:r>
               <a:rPr lang="en-US" sz="1850" dirty="0">
                 <a:solidFill>
-                  <a:srgbClr val="17364A"/>
-                </a:solidFill>
-                <a:latin typeface="Aptos" pitchFamily="34" charset="0"/>
-                <a:ea typeface="Aptos" pitchFamily="34" charset="-122"/>
-                <a:cs typeface="Aptos" pitchFamily="34" charset="-120"/>
-              </a:rPr>
-              <a:t>Tool 19: Plain-Language AI Public Notice Template (Template) - Use this tool to complete or strengthen the.</a:t>
+                  <a:srgbClr val="003A63"/>
+                </a:solidFill>
+                <a:latin typeface="Aptos" pitchFamily="34" charset="0"/>
+                <a:ea typeface="Aptos" pitchFamily="34" charset="-122"/>
+                <a:cs typeface="Aptos" pitchFamily="34" charset="-120"/>
+              </a:rPr>
+              <a:t>• Tool 19: Plain-Language AI Public Notice Template (Template) - Use this tool to complete or.</a:t>
             </a:r>
             <a:endParaRPr lang="en-US" sz="1850" dirty="0"/>
           </a:p>
@@ -14319,17 +14555,17 @@
         </p:nvSpPr>
         <p:spPr>
           <a:xfrm>
-            <a:off x="8211312" y="1920240"/>
-            <a:ext cx="2734056" cy="1463040"/>
-          </a:xfrm>
-          <a:prstGeom prst="rect">
-            <a:avLst/>
-          </a:prstGeom>
-          <a:noFill/>
-          <a:ln/>
-        </p:spPr>
-        <p:txBody>
-          <a:bodyPr wrap="square" lIns="0" tIns="0" rIns="0" bIns="0" rtlCol="0" anchor="t">
+            <a:off x="8211312" y="1892808"/>
+            <a:ext cx="2734056" cy="1536192"/>
+          </a:xfrm>
+          <a:prstGeom prst="rect">
+            <a:avLst/>
+          </a:prstGeom>
+          <a:noFill/>
+          <a:ln/>
+        </p:spPr>
+        <p:txBody>
+          <a:bodyPr wrap="square" lIns="254" tIns="254" rIns="254" bIns="254" rtlCol="0" anchor="t">
             <a:normAutofit/>
           </a:bodyPr>
           <a:lstStyle/>
@@ -14338,7 +14574,7 @@
               <a:buNone/>
             </a:pPr>
             <a:r>
-              <a:rPr lang="en-US" sz="1550" dirty="0">
+              <a:rPr lang="en-US" sz="1320" dirty="0">
                 <a:solidFill>
                   <a:srgbClr val="17364A"/>
                 </a:solidFill>
@@ -14346,9 +14582,9 @@
                 <a:ea typeface="Aptos" pitchFamily="34" charset="-122"/>
                 <a:cs typeface="Aptos" pitchFamily="34" charset="-120"/>
               </a:rPr>
-              <a:t>Use linked tools when your department needs a structured worksheet, template, checklist, review process, or documentation artifact.</a:t>
-            </a:r>
-            <a:endParaRPr lang="en-US" sz="1550" dirty="0"/>
+              <a:t>Use linked tools when your department needs a structured worksheet, template, checklist, review process, or.</a:t>
+            </a:r>
+            <a:endParaRPr lang="en-US" sz="1320" dirty="0"/>
           </a:p>
         </p:txBody>
       </p:sp>
@@ -14436,13 +14672,16 @@
           <a:ln/>
         </p:spPr>
         <p:txBody>
-          <a:bodyPr wrap="square" lIns="254" tIns="254" rIns="254" bIns="254" rtlCol="0" anchor="t">
+          <a:bodyPr wrap="square" lIns="508" tIns="508" rIns="508" bIns="508" rtlCol="0" anchor="t">
             <a:normAutofit/>
           </a:bodyPr>
           <a:lstStyle/>
           <a:p>
-            <a:r>
-              <a:rPr lang="en-US" sz="1380" dirty="0">
+            <a:pPr indent="0" marL="0">
+              <a:buNone/>
+            </a:pPr>
+            <a:r>
+              <a:rPr lang="en-US" sz="1220" dirty="0">
                 <a:solidFill>
                   <a:srgbClr val="17364A"/>
                 </a:solidFill>
@@ -14452,11 +14691,14 @@
               </a:rPr>
               <a:t>Use a tool when no comparable local process exists.</a:t>
             </a:r>
-            <a:endParaRPr lang="en-US" sz="1380" dirty="0"/>
-          </a:p>
-          <a:p>
-            <a:r>
-              <a:rPr lang="en-US" sz="1380" dirty="0">
+            <a:endParaRPr lang="en-US" sz="1220" dirty="0"/>
+          </a:p>
+          <a:p>
+            <a:pPr indent="0" marL="0">
+              <a:buNone/>
+            </a:pPr>
+            <a:r>
+              <a:rPr lang="en-US" sz="1220" dirty="0">
                 <a:solidFill>
                   <a:srgbClr val="17364A"/>
                 </a:solidFill>
@@ -14464,13 +14706,16 @@
                 <a:ea typeface="Aptos" pitchFamily="34" charset="-122"/>
                 <a:cs typeface="Aptos" pitchFamily="34" charset="-120"/>
               </a:rPr>
-              <a:t>Adapt existing department templates when they already fit the purpose.</a:t>
-            </a:r>
-            <a:endParaRPr lang="en-US" sz="1380" dirty="0"/>
-          </a:p>
-          <a:p>
-            <a:r>
-              <a:rPr lang="en-US" sz="1380" dirty="0">
+              <a:t>Adapt existing department templates when they already fit the.</a:t>
+            </a:r>
+            <a:endParaRPr lang="en-US" sz="1220" dirty="0"/>
+          </a:p>
+          <a:p>
+            <a:pPr indent="0" marL="0">
+              <a:buNone/>
+            </a:pPr>
+            <a:r>
+              <a:rPr lang="en-US" sz="1220" dirty="0">
                 <a:solidFill>
                   <a:srgbClr val="17364A"/>
                 </a:solidFill>
@@ -14480,7 +14725,7 @@
               </a:rPr>
               <a:t>Save the completed artifact as evidence of the decision.</a:t>
             </a:r>
-            <a:endParaRPr lang="en-US" sz="1380" dirty="0"/>
+            <a:endParaRPr lang="en-US" sz="1220" dirty="0"/>
           </a:p>
         </p:txBody>
       </p:sp>
@@ -14781,49 +15026,58 @@
           <a:ln/>
         </p:spPr>
         <p:txBody>
-          <a:bodyPr wrap="square" lIns="635" tIns="635" rIns="635" bIns="635" rtlCol="0" anchor="t">
+          <a:bodyPr wrap="square" lIns="1016" tIns="1016" rIns="1016" bIns="1016" rtlCol="0" anchor="t">
             <a:normAutofit/>
           </a:bodyPr>
           <a:lstStyle/>
           <a:p>
+            <a:pPr indent="0" marL="0">
+              <a:buNone/>
+            </a:pPr>
             <a:r>
               <a:rPr lang="en-US" sz="2100" dirty="0">
                 <a:solidFill>
-                  <a:srgbClr val="17364A"/>
-                </a:solidFill>
-                <a:latin typeface="Aptos" pitchFamily="34" charset="0"/>
-                <a:ea typeface="Aptos" pitchFamily="34" charset="-122"/>
-                <a:cs typeface="Aptos" pitchFamily="34" charset="-120"/>
-              </a:rPr>
-              <a:t>Identify categories of law, policy, standards, and guidance that may affect public health AI.</a:t>
+                  <a:srgbClr val="003A63"/>
+                </a:solidFill>
+                <a:latin typeface="Aptos" pitchFamily="34" charset="0"/>
+                <a:ea typeface="Aptos" pitchFamily="34" charset="-122"/>
+                <a:cs typeface="Aptos" pitchFamily="34" charset="-120"/>
+              </a:rPr>
+              <a:t>• Identify categories of law, policy, standards, and guidance that may affect public health AI.</a:t>
             </a:r>
             <a:endParaRPr lang="en-US" sz="2100" dirty="0"/>
           </a:p>
           <a:p>
+            <a:pPr indent="0" marL="0">
+              <a:buNone/>
+            </a:pPr>
             <a:r>
               <a:rPr lang="en-US" sz="2100" dirty="0">
                 <a:solidFill>
-                  <a:srgbClr val="17364A"/>
-                </a:solidFill>
-                <a:latin typeface="Aptos" pitchFamily="34" charset="0"/>
-                <a:ea typeface="Aptos" pitchFamily="34" charset="-122"/>
-                <a:cs typeface="Aptos" pitchFamily="34" charset="-120"/>
-              </a:rPr>
-              <a:t>Explain why regulatory readiness requires monitoring, interpretation, documentation, and policy.</a:t>
+                  <a:srgbClr val="003A63"/>
+                </a:solidFill>
+                <a:latin typeface="Aptos" pitchFamily="34" charset="0"/>
+                <a:ea typeface="Aptos" pitchFamily="34" charset="-122"/>
+                <a:cs typeface="Aptos" pitchFamily="34" charset="-120"/>
+              </a:rPr>
+              <a:t>• Explain why regulatory readiness requires monitoring, interpretation, documentation, and policy.</a:t>
             </a:r>
             <a:endParaRPr lang="en-US" sz="2100" dirty="0"/>
           </a:p>
           <a:p>
+            <a:pPr indent="0" marL="0">
+              <a:buNone/>
+            </a:pPr>
             <a:r>
               <a:rPr lang="en-US" sz="2100" dirty="0">
                 <a:solidFill>
-                  <a:srgbClr val="17364A"/>
-                </a:solidFill>
-                <a:latin typeface="Aptos" pitchFamily="34" charset="0"/>
-                <a:ea typeface="Aptos" pitchFamily="34" charset="-122"/>
-                <a:cs typeface="Aptos" pitchFamily="34" charset="-120"/>
-              </a:rPr>
-              <a:t>Distinguish between binding requirements, agency policy, professional guidance, standards, and best.</a:t>
+                  <a:srgbClr val="003A63"/>
+                </a:solidFill>
+                <a:latin typeface="Aptos" pitchFamily="34" charset="0"/>
+                <a:ea typeface="Aptos" pitchFamily="34" charset="-122"/>
+                <a:cs typeface="Aptos" pitchFamily="34" charset="-120"/>
+              </a:rPr>
+              <a:t>• Distinguish between binding requirements, agency policy, professional guidance, standards, and.</a:t>
             </a:r>
             <a:endParaRPr lang="en-US" sz="2100" dirty="0"/>
           </a:p>
@@ -14903,17 +15157,17 @@
         </p:nvSpPr>
         <p:spPr>
           <a:xfrm>
-            <a:off x="7799832" y="1828800"/>
-            <a:ext cx="3145536" cy="685800"/>
-          </a:xfrm>
-          <a:prstGeom prst="rect">
-            <a:avLst/>
-          </a:prstGeom>
-          <a:noFill/>
-          <a:ln/>
-        </p:spPr>
-        <p:txBody>
-          <a:bodyPr wrap="square" lIns="0" tIns="0" rIns="0" bIns="0" rtlCol="0" anchor="t">
+            <a:off x="7799832" y="1801368"/>
+            <a:ext cx="3145536" cy="758952"/>
+          </a:xfrm>
+          <a:prstGeom prst="rect">
+            <a:avLst/>
+          </a:prstGeom>
+          <a:noFill/>
+          <a:ln/>
+        </p:spPr>
+        <p:txBody>
+          <a:bodyPr wrap="square" lIns="254" tIns="254" rIns="254" bIns="254" rtlCol="0" anchor="t">
             <a:normAutofit/>
           </a:bodyPr>
           <a:lstStyle/>
@@ -14922,7 +15176,7 @@
               <a:buNone/>
             </a:pPr>
             <a:r>
-              <a:rPr lang="en-US" sz="1550" dirty="0">
+              <a:rPr lang="en-US" sz="1320" dirty="0">
                 <a:solidFill>
                   <a:srgbClr val="17364A"/>
                 </a:solidFill>
@@ -14932,7 +15186,7 @@
               </a:rPr>
               <a:t>Identify categories of law, policy, standards, and guidance that may affect public health AI.</a:t>
             </a:r>
-            <a:endParaRPr lang="en-US" sz="1550" dirty="0"/>
+            <a:endParaRPr lang="en-US" sz="1320" dirty="0"/>
           </a:p>
         </p:txBody>
       </p:sp>
@@ -15020,13 +15274,16 @@
           <a:ln/>
         </p:spPr>
         <p:txBody>
-          <a:bodyPr wrap="square" lIns="254" tIns="254" rIns="254" bIns="254" rtlCol="0" anchor="t">
+          <a:bodyPr wrap="square" lIns="508" tIns="508" rIns="508" bIns="508" rtlCol="0" anchor="t">
             <a:normAutofit/>
           </a:bodyPr>
           <a:lstStyle/>
           <a:p>
-            <a:r>
-              <a:rPr lang="en-US" sz="1380" dirty="0">
+            <a:pPr indent="0" marL="0">
+              <a:buNone/>
+            </a:pPr>
+            <a:r>
+              <a:rPr lang="en-US" sz="1220" dirty="0">
                 <a:solidFill>
                   <a:srgbClr val="17364A"/>
                 </a:solidFill>
@@ -15034,13 +15291,16 @@
                 <a:ea typeface="Aptos" pitchFamily="34" charset="-122"/>
                 <a:cs typeface="Aptos" pitchFamily="34" charset="-120"/>
               </a:rPr>
-              <a:t>Explain why regulatory readiness requires monitoring, interpretation, documentation, and.</a:t>
-            </a:r>
-            <a:endParaRPr lang="en-US" sz="1380" dirty="0"/>
-          </a:p>
-          <a:p>
-            <a:r>
-              <a:rPr lang="en-US" sz="1380" dirty="0">
+              <a:t>Explain why regulatory readiness requires monitoring,.</a:t>
+            </a:r>
+            <a:endParaRPr lang="en-US" sz="1220" dirty="0"/>
+          </a:p>
+          <a:p>
+            <a:pPr indent="0" marL="0">
+              <a:buNone/>
+            </a:pPr>
+            <a:r>
+              <a:rPr lang="en-US" sz="1220" dirty="0">
                 <a:solidFill>
                   <a:srgbClr val="17364A"/>
                 </a:solidFill>
@@ -15048,13 +15308,16 @@
                 <a:ea typeface="Aptos" pitchFamily="34" charset="-122"/>
                 <a:cs typeface="Aptos" pitchFamily="34" charset="-120"/>
               </a:rPr>
-              <a:t>Distinguish between binding requirements, agency policy, professional guidance, standards,.</a:t>
-            </a:r>
-            <a:endParaRPr lang="en-US" sz="1380" dirty="0"/>
-          </a:p>
-          <a:p>
-            <a:r>
-              <a:rPr lang="en-US" sz="1380" dirty="0">
+              <a:t>Distinguish between binding requirements, agency policy,.</a:t>
+            </a:r>
+            <a:endParaRPr lang="en-US" sz="1220" dirty="0"/>
+          </a:p>
+          <a:p>
+            <a:pPr indent="0" marL="0">
+              <a:buNone/>
+            </a:pPr>
+            <a:r>
+              <a:rPr lang="en-US" sz="1220" dirty="0">
                 <a:solidFill>
                   <a:srgbClr val="17364A"/>
                 </a:solidFill>
@@ -15064,7 +15327,7 @@
               </a:rPr>
               <a:t>Create a policy scan process for AI-related developments.</a:t>
             </a:r>
-            <a:endParaRPr lang="en-US" sz="1380" dirty="0"/>
+            <a:endParaRPr lang="en-US" sz="1220" dirty="0"/>
           </a:p>
         </p:txBody>
       </p:sp>
@@ -15142,17 +15405,17 @@
         </p:nvSpPr>
         <p:spPr>
           <a:xfrm>
-            <a:off x="7799832" y="5001768"/>
-            <a:ext cx="3145536" cy="502920"/>
-          </a:xfrm>
-          <a:prstGeom prst="rect">
-            <a:avLst/>
-          </a:prstGeom>
-          <a:noFill/>
-          <a:ln/>
-        </p:spPr>
-        <p:txBody>
-          <a:bodyPr wrap="square" lIns="0" tIns="0" rIns="0" bIns="0" rtlCol="0" anchor="t">
+            <a:off x="7799832" y="4974336"/>
+            <a:ext cx="3145536" cy="576072"/>
+          </a:xfrm>
+          <a:prstGeom prst="rect">
+            <a:avLst/>
+          </a:prstGeom>
+          <a:noFill/>
+          <a:ln/>
+        </p:spPr>
+        <p:txBody>
+          <a:bodyPr wrap="square" lIns="254" tIns="254" rIns="254" bIns="254" rtlCol="0" anchor="t">
             <a:normAutofit/>
           </a:bodyPr>
           <a:lstStyle/>
@@ -15161,7 +15424,7 @@
               <a:buNone/>
             </a:pPr>
             <a:r>
-              <a:rPr lang="en-US" sz="1550" dirty="0">
+              <a:rPr lang="en-US" sz="1320" dirty="0">
                 <a:solidFill>
                   <a:srgbClr val="17364A"/>
                 </a:solidFill>
@@ -15169,9 +15432,9 @@
                 <a:ea typeface="Aptos" pitchFamily="34" charset="-122"/>
                 <a:cs typeface="Aptos" pitchFamily="34" charset="-120"/>
               </a:rPr>
-              <a:t>Use the assignment to test whether you can explain the concept, apply it to a realistic public health situation, and identify what would need review before the work moves forward.</a:t>
-            </a:r>
-            <a:endParaRPr lang="en-US" sz="1550" dirty="0"/>
+              <a:t>Use the assignment to test whether you can explain the concept, apply it to a realistic public health situation, and.</a:t>
+            </a:r>
+            <a:endParaRPr lang="en-US" sz="1320" dirty="0"/>
           </a:p>
         </p:txBody>
       </p:sp>
@@ -15472,49 +15735,58 @@
           <a:ln/>
         </p:spPr>
         <p:txBody>
-          <a:bodyPr wrap="square" lIns="635" tIns="635" rIns="635" bIns="635" rtlCol="0" anchor="t">
+          <a:bodyPr wrap="square" lIns="1016" tIns="1016" rIns="1016" bIns="1016" rtlCol="0" anchor="t">
             <a:normAutofit/>
           </a:bodyPr>
           <a:lstStyle/>
           <a:p>
+            <a:pPr indent="0" marL="0">
+              <a:buNone/>
+            </a:pPr>
             <a:r>
               <a:rPr lang="en-US" sz="2100" dirty="0">
                 <a:solidFill>
-                  <a:srgbClr val="17364A"/>
-                </a:solidFill>
-                <a:latin typeface="Aptos" pitchFamily="34" charset="0"/>
-                <a:ea typeface="Aptos" pitchFamily="34" charset="-122"/>
-                <a:cs typeface="Aptos" pitchFamily="34" charset="-120"/>
-              </a:rPr>
-              <a:t>The public health AI policy landscape is evolving quickly across federal agencies, states, local.</a:t>
+                  <a:srgbClr val="003A63"/>
+                </a:solidFill>
+                <a:latin typeface="Aptos" pitchFamily="34" charset="0"/>
+                <a:ea typeface="Aptos" pitchFamily="34" charset="-122"/>
+                <a:cs typeface="Aptos" pitchFamily="34" charset="-120"/>
+              </a:rPr>
+              <a:t>• The public health AI policy landscape is evolving quickly across federal agencies, states,.</a:t>
             </a:r>
             <a:endParaRPr lang="en-US" sz="2100" dirty="0"/>
           </a:p>
           <a:p>
+            <a:pPr indent="0" marL="0">
+              <a:buNone/>
+            </a:pPr>
             <a:r>
               <a:rPr lang="en-US" sz="2100" dirty="0">
                 <a:solidFill>
-                  <a:srgbClr val="17364A"/>
-                </a:solidFill>
-                <a:latin typeface="Aptos" pitchFamily="34" charset="0"/>
-                <a:ea typeface="Aptos" pitchFamily="34" charset="-122"/>
-                <a:cs typeface="Aptos" pitchFamily="34" charset="-120"/>
-              </a:rPr>
-              <a:t>Public health agencies do not need to wait for every rule to be settled before acting responsibly, but.</a:t>
+                  <a:srgbClr val="003A63"/>
+                </a:solidFill>
+                <a:latin typeface="Aptos" pitchFamily="34" charset="0"/>
+                <a:ea typeface="Aptos" pitchFamily="34" charset="-122"/>
+                <a:cs typeface="Aptos" pitchFamily="34" charset="-120"/>
+              </a:rPr>
+              <a:t>• Public health agencies do not need to wait for every rule to be settled before acting.</a:t>
             </a:r>
             <a:endParaRPr lang="en-US" sz="2100" dirty="0"/>
           </a:p>
           <a:p>
+            <a:pPr indent="0" marL="0">
+              <a:buNone/>
+            </a:pPr>
             <a:r>
               <a:rPr lang="en-US" sz="2100" dirty="0">
                 <a:solidFill>
-                  <a:srgbClr val="17364A"/>
-                </a:solidFill>
-                <a:latin typeface="Aptos" pitchFamily="34" charset="0"/>
-                <a:ea typeface="Aptos" pitchFamily="34" charset="-122"/>
-                <a:cs typeface="Aptos" pitchFamily="34" charset="-120"/>
-              </a:rPr>
-              <a:t>Regulatory readiness means the agency can identify relevant requirements, update internal policies, and.</a:t>
+                  <a:srgbClr val="003A63"/>
+                </a:solidFill>
+                <a:latin typeface="Aptos" pitchFamily="34" charset="0"/>
+                <a:ea typeface="Aptos" pitchFamily="34" charset="-122"/>
+                <a:cs typeface="Aptos" pitchFamily="34" charset="-120"/>
+              </a:rPr>
+              <a:t>• Regulatory readiness means the agency can identify relevant requirements, update internal.</a:t>
             </a:r>
             <a:endParaRPr lang="en-US" sz="2100" dirty="0"/>
           </a:p>
@@ -15594,17 +15866,17 @@
         </p:nvSpPr>
         <p:spPr>
           <a:xfrm>
-            <a:off x="7799832" y="1828800"/>
-            <a:ext cx="3145536" cy="685800"/>
-          </a:xfrm>
-          <a:prstGeom prst="rect">
-            <a:avLst/>
-          </a:prstGeom>
-          <a:noFill/>
-          <a:ln/>
-        </p:spPr>
-        <p:txBody>
-          <a:bodyPr wrap="square" lIns="0" tIns="0" rIns="0" bIns="0" rtlCol="0" anchor="t">
+            <a:off x="7799832" y="1801368"/>
+            <a:ext cx="3145536" cy="758952"/>
+          </a:xfrm>
+          <a:prstGeom prst="rect">
+            <a:avLst/>
+          </a:prstGeom>
+          <a:noFill/>
+          <a:ln/>
+        </p:spPr>
+        <p:txBody>
+          <a:bodyPr wrap="square" lIns="254" tIns="254" rIns="254" bIns="254" rtlCol="0" anchor="t">
             <a:normAutofit/>
           </a:bodyPr>
           <a:lstStyle/>
@@ -15613,7 +15885,7 @@
               <a:buNone/>
             </a:pPr>
             <a:r>
-              <a:rPr lang="en-US" sz="1550" dirty="0">
+              <a:rPr lang="en-US" sz="1320" dirty="0">
                 <a:solidFill>
                   <a:srgbClr val="17364A"/>
                 </a:solidFill>
@@ -15623,7 +15895,7 @@
               </a:rPr>
               <a:t>The public health AI policy landscape is evolving quickly across federal agencies, states, local.</a:t>
             </a:r>
-            <a:endParaRPr lang="en-US" sz="1550" dirty="0"/>
+            <a:endParaRPr lang="en-US" sz="1320" dirty="0"/>
           </a:p>
         </p:txBody>
       </p:sp>
@@ -15711,13 +15983,16 @@
           <a:ln/>
         </p:spPr>
         <p:txBody>
-          <a:bodyPr wrap="square" lIns="254" tIns="254" rIns="254" bIns="254" rtlCol="0" anchor="t">
+          <a:bodyPr wrap="square" lIns="508" tIns="508" rIns="508" bIns="508" rtlCol="0" anchor="t">
             <a:normAutofit/>
           </a:bodyPr>
           <a:lstStyle/>
           <a:p>
-            <a:r>
-              <a:rPr lang="en-US" sz="1380" dirty="0">
+            <a:pPr indent="0" marL="0">
+              <a:buNone/>
+            </a:pPr>
+            <a:r>
+              <a:rPr lang="en-US" sz="1220" dirty="0">
                 <a:solidFill>
                   <a:srgbClr val="17364A"/>
                 </a:solidFill>
@@ -15725,13 +16000,16 @@
                 <a:ea typeface="Aptos" pitchFamily="34" charset="-122"/>
                 <a:cs typeface="Aptos" pitchFamily="34" charset="-120"/>
               </a:rPr>
-              <a:t>The public health AI policy landscape is evolving quickly across federal agencies, states,.</a:t>
-            </a:r>
-            <a:endParaRPr lang="en-US" sz="1380" dirty="0"/>
-          </a:p>
-          <a:p>
-            <a:r>
-              <a:rPr lang="en-US" sz="1380" dirty="0">
+              <a:t>The public health AI policy landscape is evolving quickly across.</a:t>
+            </a:r>
+            <a:endParaRPr lang="en-US" sz="1220" dirty="0"/>
+          </a:p>
+          <a:p>
+            <a:pPr indent="0" marL="0">
+              <a:buNone/>
+            </a:pPr>
+            <a:r>
+              <a:rPr lang="en-US" sz="1220" dirty="0">
                 <a:solidFill>
                   <a:srgbClr val="17364A"/>
                 </a:solidFill>
@@ -15739,13 +16017,16 @@
                 <a:ea typeface="Aptos" pitchFamily="34" charset="-122"/>
                 <a:cs typeface="Aptos" pitchFamily="34" charset="-120"/>
               </a:rPr>
-              <a:t>Public health agencies do not need to wait for every rule to be settled before acting.</a:t>
-            </a:r>
-            <a:endParaRPr lang="en-US" sz="1380" dirty="0"/>
-          </a:p>
-          <a:p>
-            <a:r>
-              <a:rPr lang="en-US" sz="1380" dirty="0">
+              <a:t>Public health agencies do not need to wait for every rule to be.</a:t>
+            </a:r>
+            <a:endParaRPr lang="en-US" sz="1220" dirty="0"/>
+          </a:p>
+          <a:p>
+            <a:pPr indent="0" marL="0">
+              <a:buNone/>
+            </a:pPr>
+            <a:r>
+              <a:rPr lang="en-US" sz="1220" dirty="0">
                 <a:solidFill>
                   <a:srgbClr val="17364A"/>
                 </a:solidFill>
@@ -15753,9 +16034,9 @@
                 <a:ea typeface="Aptos" pitchFamily="34" charset="-122"/>
                 <a:cs typeface="Aptos" pitchFamily="34" charset="-120"/>
               </a:rPr>
-              <a:t>Regulatory readiness means the agency can identify relevant requirements, update internal.</a:t>
-            </a:r>
-            <a:endParaRPr lang="en-US" sz="1380" dirty="0"/>
+              <a:t>Regulatory readiness means the agency can identify relevant.</a:t>
+            </a:r>
+            <a:endParaRPr lang="en-US" sz="1220" dirty="0"/>
           </a:p>
         </p:txBody>
       </p:sp>
@@ -15833,17 +16114,17 @@
         </p:nvSpPr>
         <p:spPr>
           <a:xfrm>
-            <a:off x="7799832" y="5001768"/>
-            <a:ext cx="3145536" cy="502920"/>
-          </a:xfrm>
-          <a:prstGeom prst="rect">
-            <a:avLst/>
-          </a:prstGeom>
-          <a:noFill/>
-          <a:ln/>
-        </p:spPr>
-        <p:txBody>
-          <a:bodyPr wrap="square" lIns="0" tIns="0" rIns="0" bIns="0" rtlCol="0" anchor="t">
+            <a:off x="7799832" y="4974336"/>
+            <a:ext cx="3145536" cy="576072"/>
+          </a:xfrm>
+          <a:prstGeom prst="rect">
+            <a:avLst/>
+          </a:prstGeom>
+          <a:noFill/>
+          <a:ln/>
+        </p:spPr>
+        <p:txBody>
+          <a:bodyPr wrap="square" lIns="254" tIns="254" rIns="254" bIns="254" rtlCol="0" anchor="t">
             <a:normAutofit/>
           </a:bodyPr>
           <a:lstStyle/>
@@ -15852,7 +16133,7 @@
               <a:buNone/>
             </a:pPr>
             <a:r>
-              <a:rPr lang="en-US" sz="1550" dirty="0">
+              <a:rPr lang="en-US" sz="1320" dirty="0">
                 <a:solidFill>
                   <a:srgbClr val="17364A"/>
                 </a:solidFill>
@@ -15860,9 +16141,9 @@
                 <a:ea typeface="Aptos" pitchFamily="34" charset="-122"/>
                 <a:cs typeface="Aptos" pitchFamily="34" charset="-120"/>
               </a:rPr>
-              <a:t>Translate this concept into clear decision rights, review steps, documentation expectations, and escalation paths before an AI-supported workflow is approved.</a:t>
-            </a:r>
-            <a:endParaRPr lang="en-US" sz="1550" dirty="0"/>
+              <a:t>Translate this concept into clear decision rights, review steps, documentation expectations, and escalation paths before.</a:t>
+            </a:r>
+            <a:endParaRPr lang="en-US" sz="1320" dirty="0"/>
           </a:p>
         </p:txBody>
       </p:sp>
@@ -16163,49 +16444,58 @@
           <a:ln/>
         </p:spPr>
         <p:txBody>
-          <a:bodyPr wrap="square" lIns="635" tIns="635" rIns="635" bIns="635" rtlCol="0" anchor="t">
+          <a:bodyPr wrap="square" lIns="1016" tIns="1016" rIns="1016" bIns="1016" rtlCol="0" anchor="t">
             <a:normAutofit/>
           </a:bodyPr>
           <a:lstStyle/>
           <a:p>
+            <a:pPr indent="0" marL="0">
+              <a:buNone/>
+            </a:pPr>
             <a:r>
               <a:rPr lang="en-US" sz="2100" dirty="0">
                 <a:solidFill>
-                  <a:srgbClr val="17364A"/>
-                </a:solidFill>
-                <a:latin typeface="Aptos" pitchFamily="34" charset="0"/>
-                <a:ea typeface="Aptos" pitchFamily="34" charset="-122"/>
-                <a:cs typeface="Aptos" pitchFamily="34" charset="-120"/>
-              </a:rPr>
-              <a:t>This module provides national-level training guidance for public health agencies and partners.</a:t>
+                  <a:srgbClr val="003A63"/>
+                </a:solidFill>
+                <a:latin typeface="Aptos" pitchFamily="34" charset="0"/>
+                <a:ea typeface="Aptos" pitchFamily="34" charset="-122"/>
+                <a:cs typeface="Aptos" pitchFamily="34" charset="-120"/>
+              </a:rPr>
+              <a:t>• This module provides national-level training guidance for public health agencies and partners.</a:t>
             </a:r>
             <a:endParaRPr lang="en-US" sz="2100" dirty="0"/>
           </a:p>
           <a:p>
+            <a:pPr indent="0" marL="0">
+              <a:buNone/>
+            </a:pPr>
             <a:r>
               <a:rPr lang="en-US" sz="2100" dirty="0">
                 <a:solidFill>
-                  <a:srgbClr val="17364A"/>
-                </a:solidFill>
-                <a:latin typeface="Aptos" pitchFamily="34" charset="0"/>
-                <a:ea typeface="Aptos" pitchFamily="34" charset="-122"/>
-                <a:cs typeface="Aptos" pitchFamily="34" charset="-120"/>
-              </a:rPr>
-              <a:t>It is not legal advice and does not replace review by agency legal counsel, privacy officers,.</a:t>
+                  <a:srgbClr val="003A63"/>
+                </a:solidFill>
+                <a:latin typeface="Aptos" pitchFamily="34" charset="0"/>
+                <a:ea typeface="Aptos" pitchFamily="34" charset="-122"/>
+                <a:cs typeface="Aptos" pitchFamily="34" charset="-120"/>
+              </a:rPr>
+              <a:t>• It is not legal advice and does not replace review by agency legal counsel, privacy officers,.</a:t>
             </a:r>
             <a:endParaRPr lang="en-US" sz="2100" dirty="0"/>
           </a:p>
           <a:p>
+            <a:pPr indent="0" marL="0">
+              <a:buNone/>
+            </a:pPr>
             <a:r>
               <a:rPr lang="en-US" sz="2100" dirty="0">
                 <a:solidFill>
-                  <a:srgbClr val="17364A"/>
-                </a:solidFill>
-                <a:latin typeface="Aptos" pitchFamily="34" charset="0"/>
-                <a:ea typeface="Aptos" pitchFamily="34" charset="-122"/>
-                <a:cs typeface="Aptos" pitchFamily="34" charset="-120"/>
-              </a:rPr>
-              <a:t>Requirements may vary by state, locality, territory, Tribe, agency, funding source, data-sharing.</a:t>
+                  <a:srgbClr val="003A63"/>
+                </a:solidFill>
+                <a:latin typeface="Aptos" pitchFamily="34" charset="0"/>
+                <a:ea typeface="Aptos" pitchFamily="34" charset="-122"/>
+                <a:cs typeface="Aptos" pitchFamily="34" charset="-120"/>
+              </a:rPr>
+              <a:t>• Requirements may vary by state, locality, territory, Tribe, agency, funding source,.</a:t>
             </a:r>
             <a:endParaRPr lang="en-US" sz="2100" dirty="0"/>
           </a:p>
@@ -16285,17 +16575,17 @@
         </p:nvSpPr>
         <p:spPr>
           <a:xfrm>
-            <a:off x="7799832" y="1828800"/>
-            <a:ext cx="3145536" cy="685800"/>
-          </a:xfrm>
-          <a:prstGeom prst="rect">
-            <a:avLst/>
-          </a:prstGeom>
-          <a:noFill/>
-          <a:ln/>
-        </p:spPr>
-        <p:txBody>
-          <a:bodyPr wrap="square" lIns="0" tIns="0" rIns="0" bIns="0" rtlCol="0" anchor="t">
+            <a:off x="7799832" y="1801368"/>
+            <a:ext cx="3145536" cy="758952"/>
+          </a:xfrm>
+          <a:prstGeom prst="rect">
+            <a:avLst/>
+          </a:prstGeom>
+          <a:noFill/>
+          <a:ln/>
+        </p:spPr>
+        <p:txBody>
+          <a:bodyPr wrap="square" lIns="254" tIns="254" rIns="254" bIns="254" rtlCol="0" anchor="t">
             <a:normAutofit/>
           </a:bodyPr>
           <a:lstStyle/>
@@ -16304,7 +16594,7 @@
               <a:buNone/>
             </a:pPr>
             <a:r>
-              <a:rPr lang="en-US" sz="1550" dirty="0">
+              <a:rPr lang="en-US" sz="1320" dirty="0">
                 <a:solidFill>
                   <a:srgbClr val="17364A"/>
                 </a:solidFill>
@@ -16314,7 +16604,7 @@
               </a:rPr>
               <a:t>This module provides national-level training guidance for public health agencies and partners.</a:t>
             </a:r>
-            <a:endParaRPr lang="en-US" sz="1550" dirty="0"/>
+            <a:endParaRPr lang="en-US" sz="1320" dirty="0"/>
           </a:p>
         </p:txBody>
       </p:sp>
@@ -16402,13 +16692,16 @@
           <a:ln/>
         </p:spPr>
         <p:txBody>
-          <a:bodyPr wrap="square" lIns="254" tIns="254" rIns="254" bIns="254" rtlCol="0" anchor="t">
+          <a:bodyPr wrap="square" lIns="508" tIns="508" rIns="508" bIns="508" rtlCol="0" anchor="t">
             <a:normAutofit/>
           </a:bodyPr>
           <a:lstStyle/>
           <a:p>
-            <a:r>
-              <a:rPr lang="en-US" sz="1380" dirty="0">
+            <a:pPr indent="0" marL="0">
+              <a:buNone/>
+            </a:pPr>
+            <a:r>
+              <a:rPr lang="en-US" sz="1220" dirty="0">
                 <a:solidFill>
                   <a:srgbClr val="17364A"/>
                 </a:solidFill>
@@ -16416,13 +16709,16 @@
                 <a:ea typeface="Aptos" pitchFamily="34" charset="-122"/>
                 <a:cs typeface="Aptos" pitchFamily="34" charset="-120"/>
               </a:rPr>
-              <a:t>It is not legal advice and does not replace review by agency legal counsel, privacy.</a:t>
-            </a:r>
-            <a:endParaRPr lang="en-US" sz="1380" dirty="0"/>
-          </a:p>
-          <a:p>
-            <a:r>
-              <a:rPr lang="en-US" sz="1380" dirty="0">
+              <a:t>It is not legal advice and does not replace review by agency legal.</a:t>
+            </a:r>
+            <a:endParaRPr lang="en-US" sz="1220" dirty="0"/>
+          </a:p>
+          <a:p>
+            <a:pPr indent="0" marL="0">
+              <a:buNone/>
+            </a:pPr>
+            <a:r>
+              <a:rPr lang="en-US" sz="1220" dirty="0">
                 <a:solidFill>
                   <a:srgbClr val="17364A"/>
                 </a:solidFill>
@@ -16430,13 +16726,16 @@
                 <a:ea typeface="Aptos" pitchFamily="34" charset="-122"/>
                 <a:cs typeface="Aptos" pitchFamily="34" charset="-120"/>
               </a:rPr>
-              <a:t>Requirements may vary by state, locality, territory, Tribe, agency, funding source,.</a:t>
-            </a:r>
-            <a:endParaRPr lang="en-US" sz="1380" dirty="0"/>
-          </a:p>
-          <a:p>
-            <a:r>
-              <a:rPr lang="en-US" sz="1380" dirty="0">
+              <a:t>Requirements may vary by state, locality, territory, Tribe,.</a:t>
+            </a:r>
+            <a:endParaRPr lang="en-US" sz="1220" dirty="0"/>
+          </a:p>
+          <a:p>
+            <a:pPr indent="0" marL="0">
+              <a:buNone/>
+            </a:pPr>
+            <a:r>
+              <a:rPr lang="en-US" sz="1220" dirty="0">
                 <a:solidFill>
                   <a:srgbClr val="17364A"/>
                 </a:solidFill>
@@ -16444,9 +16743,9 @@
                 <a:ea typeface="Aptos" pitchFamily="34" charset="-122"/>
                 <a:cs typeface="Aptos" pitchFamily="34" charset="-120"/>
               </a:rPr>
-              <a:t>Learners should use this module to identify the issues that require review and should.</a:t>
-            </a:r>
-            <a:endParaRPr lang="en-US" sz="1380" dirty="0"/>
+              <a:t>Learners should use this module to identify the issues that.</a:t>
+            </a:r>
+            <a:endParaRPr lang="en-US" sz="1220" dirty="0"/>
           </a:p>
         </p:txBody>
       </p:sp>
@@ -16524,17 +16823,17 @@
         </p:nvSpPr>
         <p:spPr>
           <a:xfrm>
-            <a:off x="7799832" y="5001768"/>
-            <a:ext cx="3145536" cy="502920"/>
-          </a:xfrm>
-          <a:prstGeom prst="rect">
-            <a:avLst/>
-          </a:prstGeom>
-          <a:noFill/>
-          <a:ln/>
-        </p:spPr>
-        <p:txBody>
-          <a:bodyPr wrap="square" lIns="0" tIns="0" rIns="0" bIns="0" rtlCol="0" anchor="t">
+            <a:off x="7799832" y="4974336"/>
+            <a:ext cx="3145536" cy="576072"/>
+          </a:xfrm>
+          <a:prstGeom prst="rect">
+            <a:avLst/>
+          </a:prstGeom>
+          <a:noFill/>
+          <a:ln/>
+        </p:spPr>
+        <p:txBody>
+          <a:bodyPr wrap="square" lIns="254" tIns="254" rIns="254" bIns="254" rtlCol="0" anchor="t">
             <a:normAutofit/>
           </a:bodyPr>
           <a:lstStyle/>
@@ -16543,7 +16842,7 @@
               <a:buNone/>
             </a:pPr>
             <a:r>
-              <a:rPr lang="en-US" sz="1550" dirty="0">
+              <a:rPr lang="en-US" sz="1320" dirty="0">
                 <a:solidFill>
                   <a:srgbClr val="17364A"/>
                 </a:solidFill>
@@ -16551,9 +16850,9 @@
                 <a:ea typeface="Aptos" pitchFamily="34" charset="-122"/>
                 <a:cs typeface="Aptos" pitchFamily="34" charset="-120"/>
               </a:rPr>
-              <a:t>Translate this concept into clear decision rights, review steps, documentation expectations, and escalation paths before an AI-supported workflow is approved.</a:t>
-            </a:r>
-            <a:endParaRPr lang="en-US" sz="1550" dirty="0"/>
+              <a:t>Translate this concept into clear decision rights, review steps, documentation expectations, and escalation paths before.</a:t>
+            </a:r>
+            <a:endParaRPr lang="en-US" sz="1320" dirty="0"/>
           </a:p>
         </p:txBody>
       </p:sp>
@@ -16854,49 +17153,58 @@
           <a:ln/>
         </p:spPr>
         <p:txBody>
-          <a:bodyPr wrap="square" lIns="635" tIns="635" rIns="635" bIns="635" rtlCol="0" anchor="t">
+          <a:bodyPr wrap="square" lIns="1016" tIns="1016" rIns="1016" bIns="1016" rtlCol="0" anchor="t">
             <a:normAutofit/>
           </a:bodyPr>
           <a:lstStyle/>
           <a:p>
+            <a:pPr indent="0" marL="0">
+              <a:buNone/>
+            </a:pPr>
             <a:r>
               <a:rPr lang="en-US" sz="2100" dirty="0">
                 <a:solidFill>
-                  <a:srgbClr val="17364A"/>
-                </a:solidFill>
-                <a:latin typeface="Aptos" pitchFamily="34" charset="0"/>
-                <a:ea typeface="Aptos" pitchFamily="34" charset="-122"/>
-                <a:cs typeface="Aptos" pitchFamily="34" charset="-120"/>
-              </a:rPr>
-              <a:t>A local health department is considering AI tools for translation, complaint triage, and case note.</a:t>
+                  <a:srgbClr val="003A63"/>
+                </a:solidFill>
+                <a:latin typeface="Aptos" pitchFamily="34" charset="0"/>
+                <a:ea typeface="Aptos" pitchFamily="34" charset="-122"/>
+                <a:cs typeface="Aptos" pitchFamily="34" charset="-120"/>
+              </a:rPr>
+              <a:t>• A local health department is considering AI tools for translation, complaint triage, and case.</a:t>
             </a:r>
             <a:endParaRPr lang="en-US" sz="2100" dirty="0"/>
           </a:p>
           <a:p>
+            <a:pPr indent="0" marL="0">
+              <a:buNone/>
+            </a:pPr>
             <a:r>
               <a:rPr lang="en-US" sz="2100" dirty="0">
                 <a:solidFill>
-                  <a:srgbClr val="17364A"/>
-                </a:solidFill>
-                <a:latin typeface="Aptos" pitchFamily="34" charset="0"/>
-                <a:ea typeface="Aptos" pitchFamily="34" charset="-122"/>
-                <a:cs typeface="Aptos" pitchFamily="34" charset="-120"/>
-              </a:rPr>
-              <a:t>A policy scan identifies privacy, public records, procurement, accessibility, cybersecurity, and civil.</a:t>
+                  <a:srgbClr val="003A63"/>
+                </a:solidFill>
+                <a:latin typeface="Aptos" pitchFamily="34" charset="0"/>
+                <a:ea typeface="Aptos" pitchFamily="34" charset="-122"/>
+                <a:cs typeface="Aptos" pitchFamily="34" charset="-120"/>
+              </a:rPr>
+              <a:t>• A policy scan identifies privacy, public records, procurement, accessibility, cybersecurity,.</a:t>
             </a:r>
             <a:endParaRPr lang="en-US" sz="2100" dirty="0"/>
           </a:p>
           <a:p>
+            <a:pPr indent="0" marL="0">
+              <a:buNone/>
+            </a:pPr>
             <a:r>
               <a:rPr lang="en-US" sz="2100" dirty="0">
                 <a:solidFill>
-                  <a:srgbClr val="17364A"/>
-                </a:solidFill>
-                <a:latin typeface="Aptos" pitchFamily="34" charset="0"/>
-                <a:ea typeface="Aptos" pitchFamily="34" charset="-122"/>
-                <a:cs typeface="Aptos" pitchFamily="34" charset="-120"/>
-              </a:rPr>
-              <a:t>The agency creates a readiness memo that distinguishes existing requirements from emerging guidance,.</a:t>
+                  <a:srgbClr val="003A63"/>
+                </a:solidFill>
+                <a:latin typeface="Aptos" pitchFamily="34" charset="0"/>
+                <a:ea typeface="Aptos" pitchFamily="34" charset="-122"/>
+                <a:cs typeface="Aptos" pitchFamily="34" charset="-120"/>
+              </a:rPr>
+              <a:t>• The agency creates a readiness memo that distinguishes existing requirements from emerging.</a:t>
             </a:r>
             <a:endParaRPr lang="en-US" sz="2100" dirty="0"/>
           </a:p>
@@ -16976,17 +17284,17 @@
         </p:nvSpPr>
         <p:spPr>
           <a:xfrm>
-            <a:off x="7799832" y="1828800"/>
-            <a:ext cx="3145536" cy="685800"/>
-          </a:xfrm>
-          <a:prstGeom prst="rect">
-            <a:avLst/>
-          </a:prstGeom>
-          <a:noFill/>
-          <a:ln/>
-        </p:spPr>
-        <p:txBody>
-          <a:bodyPr wrap="square" lIns="0" tIns="0" rIns="0" bIns="0" rtlCol="0" anchor="t">
+            <a:off x="7799832" y="1801368"/>
+            <a:ext cx="3145536" cy="758952"/>
+          </a:xfrm>
+          <a:prstGeom prst="rect">
+            <a:avLst/>
+          </a:prstGeom>
+          <a:noFill/>
+          <a:ln/>
+        </p:spPr>
+        <p:txBody>
+          <a:bodyPr wrap="square" lIns="254" tIns="254" rIns="254" bIns="254" rtlCol="0" anchor="t">
             <a:normAutofit/>
           </a:bodyPr>
           <a:lstStyle/>
@@ -16995,7 +17303,7 @@
               <a:buNone/>
             </a:pPr>
             <a:r>
-              <a:rPr lang="en-US" sz="1550" dirty="0">
+              <a:rPr lang="en-US" sz="1320" dirty="0">
                 <a:solidFill>
                   <a:srgbClr val="17364A"/>
                 </a:solidFill>
@@ -17005,7 +17313,7 @@
               </a:rPr>
               <a:t>A local health department is considering AI tools for translation, complaint triage, and case note.</a:t>
             </a:r>
-            <a:endParaRPr lang="en-US" sz="1550" dirty="0"/>
+            <a:endParaRPr lang="en-US" sz="1320" dirty="0"/>
           </a:p>
         </p:txBody>
       </p:sp>
@@ -17093,13 +17401,16 @@
           <a:ln/>
         </p:spPr>
         <p:txBody>
-          <a:bodyPr wrap="square" lIns="254" tIns="254" rIns="254" bIns="254" rtlCol="0" anchor="t">
+          <a:bodyPr wrap="square" lIns="508" tIns="508" rIns="508" bIns="508" rtlCol="0" anchor="t">
             <a:normAutofit/>
           </a:bodyPr>
           <a:lstStyle/>
           <a:p>
-            <a:r>
-              <a:rPr lang="en-US" sz="1380" dirty="0">
+            <a:pPr indent="0" marL="0">
+              <a:buNone/>
+            </a:pPr>
+            <a:r>
+              <a:rPr lang="en-US" sz="1220" dirty="0">
                 <a:solidFill>
                   <a:srgbClr val="17364A"/>
                 </a:solidFill>
@@ -17107,13 +17418,16 @@
                 <a:ea typeface="Aptos" pitchFamily="34" charset="-122"/>
                 <a:cs typeface="Aptos" pitchFamily="34" charset="-120"/>
               </a:rPr>
-              <a:t>A local health department is considering AI tools for translation, complaint triage, and.</a:t>
-            </a:r>
-            <a:endParaRPr lang="en-US" sz="1380" dirty="0"/>
-          </a:p>
-          <a:p>
-            <a:r>
-              <a:rPr lang="en-US" sz="1380" dirty="0">
+              <a:t>A local health department is considering AI tools for translation,.</a:t>
+            </a:r>
+            <a:endParaRPr lang="en-US" sz="1220" dirty="0"/>
+          </a:p>
+          <a:p>
+            <a:pPr indent="0" marL="0">
+              <a:buNone/>
+            </a:pPr>
+            <a:r>
+              <a:rPr lang="en-US" sz="1220" dirty="0">
                 <a:solidFill>
                   <a:srgbClr val="17364A"/>
                 </a:solidFill>
@@ -17121,13 +17435,16 @@
                 <a:ea typeface="Aptos" pitchFamily="34" charset="-122"/>
                 <a:cs typeface="Aptos" pitchFamily="34" charset="-120"/>
               </a:rPr>
-              <a:t>A policy scan identifies privacy, public records, procurement, accessibility,.</a:t>
-            </a:r>
-            <a:endParaRPr lang="en-US" sz="1380" dirty="0"/>
-          </a:p>
-          <a:p>
-            <a:r>
-              <a:rPr lang="en-US" sz="1380" dirty="0">
+              <a:t>A policy scan identifies privacy, public records, procurement,.</a:t>
+            </a:r>
+            <a:endParaRPr lang="en-US" sz="1220" dirty="0"/>
+          </a:p>
+          <a:p>
+            <a:pPr indent="0" marL="0">
+              <a:buNone/>
+            </a:pPr>
+            <a:r>
+              <a:rPr lang="en-US" sz="1220" dirty="0">
                 <a:solidFill>
                   <a:srgbClr val="17364A"/>
                 </a:solidFill>
@@ -17135,9 +17452,9 @@
                 <a:ea typeface="Aptos" pitchFamily="34" charset="-122"/>
                 <a:cs typeface="Aptos" pitchFamily="34" charset="-120"/>
               </a:rPr>
-              <a:t>The agency creates a readiness memo that distinguishes existing requirements from emerging.</a:t>
-            </a:r>
-            <a:endParaRPr lang="en-US" sz="1380" dirty="0"/>
+              <a:t>The agency creates a readiness memo that distinguishes existing.</a:t>
+            </a:r>
+            <a:endParaRPr lang="en-US" sz="1220" dirty="0"/>
           </a:p>
         </p:txBody>
       </p:sp>
@@ -17215,17 +17532,17 @@
         </p:nvSpPr>
         <p:spPr>
           <a:xfrm>
-            <a:off x="7799832" y="5001768"/>
-            <a:ext cx="3145536" cy="502920"/>
-          </a:xfrm>
-          <a:prstGeom prst="rect">
-            <a:avLst/>
-          </a:prstGeom>
-          <a:noFill/>
-          <a:ln/>
-        </p:spPr>
-        <p:txBody>
-          <a:bodyPr wrap="square" lIns="0" tIns="0" rIns="0" bIns="0" rtlCol="0" anchor="t">
+            <a:off x="7799832" y="4974336"/>
+            <a:ext cx="3145536" cy="576072"/>
+          </a:xfrm>
+          <a:prstGeom prst="rect">
+            <a:avLst/>
+          </a:prstGeom>
+          <a:noFill/>
+          <a:ln/>
+        </p:spPr>
+        <p:txBody>
+          <a:bodyPr wrap="square" lIns="254" tIns="254" rIns="254" bIns="254" rtlCol="0" anchor="t">
             <a:normAutofit/>
           </a:bodyPr>
           <a:lstStyle/>
@@ -17234,7 +17551,7 @@
               <a:buNone/>
             </a:pPr>
             <a:r>
-              <a:rPr lang="en-US" sz="1550" dirty="0">
+              <a:rPr lang="en-US" sz="1320" dirty="0">
                 <a:solidFill>
                   <a:srgbClr val="17364A"/>
                 </a:solidFill>
@@ -17242,9 +17559,9 @@
                 <a:ea typeface="Aptos" pitchFamily="34" charset="-122"/>
                 <a:cs typeface="Aptos" pitchFamily="34" charset="-120"/>
               </a:rPr>
-              <a:t>Translate this concept into clear decision rights, review steps, documentation expectations, and escalation paths before an AI-supported workflow is approved.</a:t>
-            </a:r>
-            <a:endParaRPr lang="en-US" sz="1550" dirty="0"/>
+              <a:t>Translate this concept into clear decision rights, review steps, documentation expectations, and escalation paths before.</a:t>
+            </a:r>
+            <a:endParaRPr lang="en-US" sz="1320" dirty="0"/>
           </a:p>
         </p:txBody>
       </p:sp>
@@ -17545,49 +17862,58 @@
           <a:ln/>
         </p:spPr>
         <p:txBody>
-          <a:bodyPr wrap="square" lIns="635" tIns="635" rIns="635" bIns="635" rtlCol="0" anchor="t">
+          <a:bodyPr wrap="square" lIns="1016" tIns="1016" rIns="1016" bIns="1016" rtlCol="0" anchor="t">
             <a:normAutofit/>
           </a:bodyPr>
           <a:lstStyle/>
           <a:p>
+            <a:pPr indent="0" marL="0">
+              <a:buNone/>
+            </a:pPr>
             <a:r>
               <a:rPr lang="en-US" sz="2100" dirty="0">
                 <a:solidFill>
-                  <a:srgbClr val="17364A"/>
-                </a:solidFill>
-                <a:latin typeface="Aptos" pitchFamily="34" charset="0"/>
-                <a:ea typeface="Aptos" pitchFamily="34" charset="-122"/>
-                <a:cs typeface="Aptos" pitchFamily="34" charset="-120"/>
-              </a:rPr>
-              <a:t>Policy readiness begins by identifying relevant domains rather than looking for a single AI law.</a:t>
+                  <a:srgbClr val="003A63"/>
+                </a:solidFill>
+                <a:latin typeface="Aptos" pitchFamily="34" charset="0"/>
+                <a:ea typeface="Aptos" pitchFamily="34" charset="-122"/>
+                <a:cs typeface="Aptos" pitchFamily="34" charset="-120"/>
+              </a:rPr>
+              <a:t>• Policy readiness begins by identifying relevant domains rather than looking for a single AI law.</a:t>
             </a:r>
             <a:endParaRPr lang="en-US" sz="2100" dirty="0"/>
           </a:p>
           <a:p>
+            <a:pPr indent="0" marL="0">
+              <a:buNone/>
+            </a:pPr>
             <a:r>
               <a:rPr lang="en-US" sz="2100" dirty="0">
                 <a:solidFill>
-                  <a:srgbClr val="17364A"/>
-                </a:solidFill>
-                <a:latin typeface="Aptos" pitchFamily="34" charset="0"/>
-                <a:ea typeface="Aptos" pitchFamily="34" charset="-122"/>
-                <a:cs typeface="Aptos" pitchFamily="34" charset="-120"/>
-              </a:rPr>
-              <a:t>Public health AI may be affected by health privacy rules, state confidentiality laws, public records.</a:t>
+                  <a:srgbClr val="003A63"/>
+                </a:solidFill>
+                <a:latin typeface="Aptos" pitchFamily="34" charset="0"/>
+                <a:ea typeface="Aptos" pitchFamily="34" charset="-122"/>
+                <a:cs typeface="Aptos" pitchFamily="34" charset="-120"/>
+              </a:rPr>
+              <a:t>• Public health AI may be affected by health privacy rules, state confidentiality laws, public.</a:t>
             </a:r>
             <a:endParaRPr lang="en-US" sz="2100" dirty="0"/>
           </a:p>
           <a:p>
+            <a:pPr indent="0" marL="0">
+              <a:buNone/>
+            </a:pPr>
             <a:r>
               <a:rPr lang="en-US" sz="2100" dirty="0">
                 <a:solidFill>
-                  <a:srgbClr val="17364A"/>
-                </a:solidFill>
-                <a:latin typeface="Aptos" pitchFamily="34" charset="0"/>
-                <a:ea typeface="Aptos" pitchFamily="34" charset="-122"/>
-                <a:cs typeface="Aptos" pitchFamily="34" charset="-120"/>
-              </a:rPr>
-              <a:t>AI-specific policy should be layered onto this existing policy environment.</a:t>
+                  <a:srgbClr val="003A63"/>
+                </a:solidFill>
+                <a:latin typeface="Aptos" pitchFamily="34" charset="0"/>
+                <a:ea typeface="Aptos" pitchFamily="34" charset="-122"/>
+                <a:cs typeface="Aptos" pitchFamily="34" charset="-120"/>
+              </a:rPr>
+              <a:t>• AI-specific policy should be layered onto this existing policy environment.</a:t>
             </a:r>
             <a:endParaRPr lang="en-US" sz="2100" dirty="0"/>
           </a:p>
@@ -17667,17 +17993,17 @@
         </p:nvSpPr>
         <p:spPr>
           <a:xfrm>
-            <a:off x="7799832" y="1828800"/>
-            <a:ext cx="3145536" cy="685800"/>
-          </a:xfrm>
-          <a:prstGeom prst="rect">
-            <a:avLst/>
-          </a:prstGeom>
-          <a:noFill/>
-          <a:ln/>
-        </p:spPr>
-        <p:txBody>
-          <a:bodyPr wrap="square" lIns="0" tIns="0" rIns="0" bIns="0" rtlCol="0" anchor="t">
+            <a:off x="7799832" y="1801368"/>
+            <a:ext cx="3145536" cy="758952"/>
+          </a:xfrm>
+          <a:prstGeom prst="rect">
+            <a:avLst/>
+          </a:prstGeom>
+          <a:noFill/>
+          <a:ln/>
+        </p:spPr>
+        <p:txBody>
+          <a:bodyPr wrap="square" lIns="254" tIns="254" rIns="254" bIns="254" rtlCol="0" anchor="t">
             <a:normAutofit/>
           </a:bodyPr>
           <a:lstStyle/>
@@ -17686,7 +18012,7 @@
               <a:buNone/>
             </a:pPr>
             <a:r>
-              <a:rPr lang="en-US" sz="1550" dirty="0">
+              <a:rPr lang="en-US" sz="1320" dirty="0">
                 <a:solidFill>
                   <a:srgbClr val="17364A"/>
                 </a:solidFill>
@@ -17696,7 +18022,7 @@
               </a:rPr>
               <a:t>Policy readiness begins by identifying relevant domains rather than looking for a single AI law.</a:t>
             </a:r>
-            <a:endParaRPr lang="en-US" sz="1550" dirty="0"/>
+            <a:endParaRPr lang="en-US" sz="1320" dirty="0"/>
           </a:p>
         </p:txBody>
       </p:sp>
@@ -17784,13 +18110,16 @@
           <a:ln/>
         </p:spPr>
         <p:txBody>
-          <a:bodyPr wrap="square" lIns="254" tIns="254" rIns="254" bIns="254" rtlCol="0" anchor="t">
+          <a:bodyPr wrap="square" lIns="508" tIns="508" rIns="508" bIns="508" rtlCol="0" anchor="t">
             <a:normAutofit/>
           </a:bodyPr>
           <a:lstStyle/>
           <a:p>
-            <a:r>
-              <a:rPr lang="en-US" sz="1380" dirty="0">
+            <a:pPr indent="0" marL="0">
+              <a:buNone/>
+            </a:pPr>
+            <a:r>
+              <a:rPr lang="en-US" sz="1220" dirty="0">
                 <a:solidFill>
                   <a:srgbClr val="17364A"/>
                 </a:solidFill>
@@ -17798,13 +18127,16 @@
                 <a:ea typeface="Aptos" pitchFamily="34" charset="-122"/>
                 <a:cs typeface="Aptos" pitchFamily="34" charset="-120"/>
               </a:rPr>
-              <a:t>Public health AI may be affected by health privacy rules, state confidentiality laws,.</a:t>
-            </a:r>
-            <a:endParaRPr lang="en-US" sz="1380" dirty="0"/>
-          </a:p>
-          <a:p>
-            <a:r>
-              <a:rPr lang="en-US" sz="1380" dirty="0">
+              <a:t>Public health AI may be affected by health privacy rules, state.</a:t>
+            </a:r>
+            <a:endParaRPr lang="en-US" sz="1220" dirty="0"/>
+          </a:p>
+          <a:p>
+            <a:pPr indent="0" marL="0">
+              <a:buNone/>
+            </a:pPr>
+            <a:r>
+              <a:rPr lang="en-US" sz="1220" dirty="0">
                 <a:solidFill>
                   <a:srgbClr val="17364A"/>
                 </a:solidFill>
@@ -17814,11 +18146,14 @@
               </a:rPr>
               <a:t>Agencies should distinguish between different levels of authority.</a:t>
             </a:r>
-            <a:endParaRPr lang="en-US" sz="1380" dirty="0"/>
-          </a:p>
-          <a:p>
-            <a:r>
-              <a:rPr lang="en-US" sz="1380" dirty="0">
+            <a:endParaRPr lang="en-US" sz="1220" dirty="0"/>
+          </a:p>
+          <a:p>
+            <a:pPr indent="0" marL="0">
+              <a:buNone/>
+            </a:pPr>
+            <a:r>
+              <a:rPr lang="en-US" sz="1220" dirty="0">
                 <a:solidFill>
                   <a:srgbClr val="17364A"/>
                 </a:solidFill>
@@ -17826,9 +18161,9 @@
                 <a:ea typeface="Aptos" pitchFamily="34" charset="-122"/>
                 <a:cs typeface="Aptos" pitchFamily="34" charset="-120"/>
               </a:rPr>
-              <a:t>A statute, regulation, contract clause, grant requirement, executive order, agency policy,.</a:t>
-            </a:r>
-            <a:endParaRPr lang="en-US" sz="1380" dirty="0"/>
+              <a:t>A statute, regulation, contract clause, grant requirement,.</a:t>
+            </a:r>
+            <a:endParaRPr lang="en-US" sz="1220" dirty="0"/>
           </a:p>
         </p:txBody>
       </p:sp>
@@ -17906,17 +18241,17 @@
         </p:nvSpPr>
         <p:spPr>
           <a:xfrm>
-            <a:off x="7799832" y="5001768"/>
-            <a:ext cx="3145536" cy="502920"/>
-          </a:xfrm>
-          <a:prstGeom prst="rect">
-            <a:avLst/>
-          </a:prstGeom>
-          <a:noFill/>
-          <a:ln/>
-        </p:spPr>
-        <p:txBody>
-          <a:bodyPr wrap="square" lIns="0" tIns="0" rIns="0" bIns="0" rtlCol="0" anchor="t">
+            <a:off x="7799832" y="4974336"/>
+            <a:ext cx="3145536" cy="576072"/>
+          </a:xfrm>
+          <a:prstGeom prst="rect">
+            <a:avLst/>
+          </a:prstGeom>
+          <a:noFill/>
+          <a:ln/>
+        </p:spPr>
+        <p:txBody>
+          <a:bodyPr wrap="square" lIns="254" tIns="254" rIns="254" bIns="254" rtlCol="0" anchor="t">
             <a:normAutofit/>
           </a:bodyPr>
           <a:lstStyle/>
@@ -17925,7 +18260,7 @@
               <a:buNone/>
             </a:pPr>
             <a:r>
-              <a:rPr lang="en-US" sz="1550" dirty="0">
+              <a:rPr lang="en-US" sz="1320" dirty="0">
                 <a:solidFill>
                   <a:srgbClr val="17364A"/>
                 </a:solidFill>
@@ -17933,9 +18268,9 @@
                 <a:ea typeface="Aptos" pitchFamily="34" charset="-122"/>
                 <a:cs typeface="Aptos" pitchFamily="34" charset="-120"/>
               </a:rPr>
-              <a:t>Translate this concept into clear decision rights, review steps, documentation expectations, and escalation paths before an AI-supported workflow is approved.</a:t>
-            </a:r>
-            <a:endParaRPr lang="en-US" sz="1550" dirty="0"/>
+              <a:t>Translate this concept into clear decision rights, review steps, documentation expectations, and escalation paths before.</a:t>
+            </a:r>
+            <a:endParaRPr lang="en-US" sz="1320" dirty="0"/>
           </a:p>
         </p:txBody>
       </p:sp>

--- a/downloads/presentations/modules/pol-300.pptx
+++ b/downloads/presentations/modules/pol-300.pptx
@@ -3513,11 +3513,11 @@
         <p:spPr>
           <a:xfrm>
             <a:off x="7635240" y="1325880"/>
-            <a:ext cx="3474720" cy="1325880"/>
+            <a:ext cx="3474720" cy="1207008"/>
           </a:xfrm>
           <a:prstGeom prst="roundRect">
             <a:avLst>
-              <a:gd name="adj" fmla="val 8276"/>
+              <a:gd name="adj" fmla="val 9091"/>
             </a:avLst>
           </a:prstGeom>
           <a:solidFill>
@@ -3579,7 +3579,7 @@
         <p:spPr>
           <a:xfrm>
             <a:off x="7799832" y="1801368"/>
-            <a:ext cx="3145536" cy="758952"/>
+            <a:ext cx="3145536" cy="640080"/>
           </a:xfrm>
           <a:prstGeom prst="rect">
             <a:avLst/>
@@ -3619,12 +3619,12 @@
         </p:nvSpPr>
         <p:spPr>
           <a:xfrm>
-            <a:off x="7635240" y="2788920"/>
-            <a:ext cx="3474720" cy="1536192"/>
+            <a:off x="7635240" y="2670048"/>
+            <a:ext cx="3474720" cy="1377086"/>
           </a:xfrm>
           <a:prstGeom prst="roundRect">
             <a:avLst>
-              <a:gd name="adj" fmla="val 7143"/>
+              <a:gd name="adj" fmla="val 7968"/>
             </a:avLst>
           </a:prstGeom>
           <a:solidFill>
@@ -3646,7 +3646,7 @@
         </p:nvSpPr>
         <p:spPr>
           <a:xfrm>
-            <a:off x="7799832" y="2935224"/>
+            <a:off x="7799832" y="2816352"/>
             <a:ext cx="3145536" cy="256032"/>
           </a:xfrm>
           <a:prstGeom prst="rect">
@@ -3685,8 +3685,8 @@
         </p:nvSpPr>
         <p:spPr>
           <a:xfrm>
-            <a:off x="7818120" y="3300984"/>
-            <a:ext cx="3090672" cy="877824"/>
+            <a:off x="7818120" y="3182112"/>
+            <a:ext cx="3090672" cy="718718"/>
           </a:xfrm>
           <a:prstGeom prst="rect">
             <a:avLst/>
@@ -3760,12 +3760,12 @@
         </p:nvSpPr>
         <p:spPr>
           <a:xfrm>
-            <a:off x="7635240" y="4498848"/>
-            <a:ext cx="3474720" cy="1143000"/>
+            <a:off x="7635240" y="4184294"/>
+            <a:ext cx="3474720" cy="1466698"/>
           </a:xfrm>
           <a:prstGeom prst="roundRect">
             <a:avLst>
-              <a:gd name="adj" fmla="val 9600"/>
+              <a:gd name="adj" fmla="val 7481"/>
             </a:avLst>
           </a:prstGeom>
           <a:solidFill>
@@ -3787,7 +3787,7 @@
         </p:nvSpPr>
         <p:spPr>
           <a:xfrm>
-            <a:off x="7799832" y="4645152"/>
+            <a:off x="7799832" y="4330598"/>
             <a:ext cx="3145536" cy="256032"/>
           </a:xfrm>
           <a:prstGeom prst="rect">
@@ -3826,8 +3826,8 @@
         </p:nvSpPr>
         <p:spPr>
           <a:xfrm>
-            <a:off x="7799832" y="4974336"/>
-            <a:ext cx="3145536" cy="576072"/>
+            <a:off x="7799832" y="4659782"/>
+            <a:ext cx="3145536" cy="899770"/>
           </a:xfrm>
           <a:prstGeom prst="rect">
             <a:avLst/>
@@ -3853,7 +3853,7 @@
                 <a:ea typeface="Aptos" pitchFamily="34" charset="-122"/>
                 <a:cs typeface="Aptos" pitchFamily="34" charset="-120"/>
               </a:rPr>
-              <a:t>Translate this concept into clear decision rights, review steps, documentation expectations, and escalation paths before.</a:t>
+              <a:t>Translate this concept into clear decision rights, review steps, documentation expectations, and escalation paths before an AI-supported workflow is approved.</a:t>
             </a:r>
             <a:endParaRPr lang="en-US" sz="1320" dirty="0"/>
           </a:p>
@@ -4222,11 +4222,11 @@
         <p:spPr>
           <a:xfrm>
             <a:off x="7635240" y="1325880"/>
-            <a:ext cx="3474720" cy="1325880"/>
+            <a:ext cx="3474720" cy="1207008"/>
           </a:xfrm>
           <a:prstGeom prst="roundRect">
             <a:avLst>
-              <a:gd name="adj" fmla="val 8276"/>
+              <a:gd name="adj" fmla="val 9091"/>
             </a:avLst>
           </a:prstGeom>
           <a:solidFill>
@@ -4288,7 +4288,7 @@
         <p:spPr>
           <a:xfrm>
             <a:off x="7799832" y="1801368"/>
-            <a:ext cx="3145536" cy="758952"/>
+            <a:ext cx="3145536" cy="640080"/>
           </a:xfrm>
           <a:prstGeom prst="rect">
             <a:avLst/>
@@ -4328,12 +4328,12 @@
         </p:nvSpPr>
         <p:spPr>
           <a:xfrm>
-            <a:off x="7635240" y="2788920"/>
-            <a:ext cx="3474720" cy="1536192"/>
+            <a:off x="7635240" y="2670048"/>
+            <a:ext cx="3474720" cy="1377086"/>
           </a:xfrm>
           <a:prstGeom prst="roundRect">
             <a:avLst>
-              <a:gd name="adj" fmla="val 7143"/>
+              <a:gd name="adj" fmla="val 7968"/>
             </a:avLst>
           </a:prstGeom>
           <a:solidFill>
@@ -4355,7 +4355,7 @@
         </p:nvSpPr>
         <p:spPr>
           <a:xfrm>
-            <a:off x="7799832" y="2935224"/>
+            <a:off x="7799832" y="2816352"/>
             <a:ext cx="3145536" cy="256032"/>
           </a:xfrm>
           <a:prstGeom prst="rect">
@@ -4394,8 +4394,8 @@
         </p:nvSpPr>
         <p:spPr>
           <a:xfrm>
-            <a:off x="7818120" y="3300984"/>
-            <a:ext cx="3090672" cy="877824"/>
+            <a:off x="7818120" y="3182112"/>
+            <a:ext cx="3090672" cy="718718"/>
           </a:xfrm>
           <a:prstGeom prst="rect">
             <a:avLst/>
@@ -4469,12 +4469,12 @@
         </p:nvSpPr>
         <p:spPr>
           <a:xfrm>
-            <a:off x="7635240" y="4498848"/>
-            <a:ext cx="3474720" cy="1143000"/>
+            <a:off x="7635240" y="4184294"/>
+            <a:ext cx="3474720" cy="1466698"/>
           </a:xfrm>
           <a:prstGeom prst="roundRect">
             <a:avLst>
-              <a:gd name="adj" fmla="val 9600"/>
+              <a:gd name="adj" fmla="val 7481"/>
             </a:avLst>
           </a:prstGeom>
           <a:solidFill>
@@ -4496,7 +4496,7 @@
         </p:nvSpPr>
         <p:spPr>
           <a:xfrm>
-            <a:off x="7799832" y="4645152"/>
+            <a:off x="7799832" y="4330598"/>
             <a:ext cx="3145536" cy="256032"/>
           </a:xfrm>
           <a:prstGeom prst="rect">
@@ -4535,8 +4535,8 @@
         </p:nvSpPr>
         <p:spPr>
           <a:xfrm>
-            <a:off x="7799832" y="4974336"/>
-            <a:ext cx="3145536" cy="576072"/>
+            <a:off x="7799832" y="4659782"/>
+            <a:ext cx="3145536" cy="899770"/>
           </a:xfrm>
           <a:prstGeom prst="rect">
             <a:avLst/>
@@ -4562,7 +4562,7 @@
                 <a:ea typeface="Aptos" pitchFamily="34" charset="-122"/>
                 <a:cs typeface="Aptos" pitchFamily="34" charset="-120"/>
               </a:rPr>
-              <a:t>Translate this concept into clear decision rights, review steps, documentation expectations, and escalation paths before.</a:t>
+              <a:t>Translate this concept into clear decision rights, review steps, documentation expectations, and escalation paths before an AI-supported workflow is approved.</a:t>
             </a:r>
             <a:endParaRPr lang="en-US" sz="1320" dirty="0"/>
           </a:p>
@@ -4931,11 +4931,11 @@
         <p:spPr>
           <a:xfrm>
             <a:off x="7635240" y="1325880"/>
-            <a:ext cx="3474720" cy="1325880"/>
+            <a:ext cx="3474720" cy="1255471"/>
           </a:xfrm>
           <a:prstGeom prst="roundRect">
             <a:avLst>
-              <a:gd name="adj" fmla="val 8276"/>
+              <a:gd name="adj" fmla="val 8740"/>
             </a:avLst>
           </a:prstGeom>
           <a:solidFill>
@@ -4997,7 +4997,7 @@
         <p:spPr>
           <a:xfrm>
             <a:off x="7799832" y="1801368"/>
-            <a:ext cx="3145536" cy="758952"/>
+            <a:ext cx="3145536" cy="688543"/>
           </a:xfrm>
           <a:prstGeom prst="rect">
             <a:avLst/>
@@ -5037,12 +5037,12 @@
         </p:nvSpPr>
         <p:spPr>
           <a:xfrm>
-            <a:off x="7635240" y="2788920"/>
-            <a:ext cx="3474720" cy="1536192"/>
+            <a:off x="7635240" y="2718511"/>
+            <a:ext cx="3474720" cy="1328623"/>
           </a:xfrm>
           <a:prstGeom prst="roundRect">
             <a:avLst>
-              <a:gd name="adj" fmla="val 7143"/>
+              <a:gd name="adj" fmla="val 8259"/>
             </a:avLst>
           </a:prstGeom>
           <a:solidFill>
@@ -5064,7 +5064,7 @@
         </p:nvSpPr>
         <p:spPr>
           <a:xfrm>
-            <a:off x="7799832" y="2935224"/>
+            <a:off x="7799832" y="2864815"/>
             <a:ext cx="3145536" cy="256032"/>
           </a:xfrm>
           <a:prstGeom prst="rect">
@@ -5103,8 +5103,8 @@
         </p:nvSpPr>
         <p:spPr>
           <a:xfrm>
-            <a:off x="7818120" y="3300984"/>
-            <a:ext cx="3090672" cy="877824"/>
+            <a:off x="7818120" y="3230575"/>
+            <a:ext cx="3090672" cy="670255"/>
           </a:xfrm>
           <a:prstGeom prst="rect">
             <a:avLst/>
@@ -5178,12 +5178,12 @@
         </p:nvSpPr>
         <p:spPr>
           <a:xfrm>
-            <a:off x="7635240" y="4498848"/>
-            <a:ext cx="3474720" cy="1143000"/>
+            <a:off x="7635240" y="4184294"/>
+            <a:ext cx="3474720" cy="1466698"/>
           </a:xfrm>
           <a:prstGeom prst="roundRect">
             <a:avLst>
-              <a:gd name="adj" fmla="val 9600"/>
+              <a:gd name="adj" fmla="val 7481"/>
             </a:avLst>
           </a:prstGeom>
           <a:solidFill>
@@ -5205,7 +5205,7 @@
         </p:nvSpPr>
         <p:spPr>
           <a:xfrm>
-            <a:off x="7799832" y="4645152"/>
+            <a:off x="7799832" y="4330598"/>
             <a:ext cx="3145536" cy="256032"/>
           </a:xfrm>
           <a:prstGeom prst="rect">
@@ -5244,8 +5244,8 @@
         </p:nvSpPr>
         <p:spPr>
           <a:xfrm>
-            <a:off x="7799832" y="4974336"/>
-            <a:ext cx="3145536" cy="576072"/>
+            <a:off x="7799832" y="4659782"/>
+            <a:ext cx="3145536" cy="899770"/>
           </a:xfrm>
           <a:prstGeom prst="rect">
             <a:avLst/>
@@ -5271,7 +5271,7 @@
                 <a:ea typeface="Aptos" pitchFamily="34" charset="-122"/>
                 <a:cs typeface="Aptos" pitchFamily="34" charset="-120"/>
               </a:rPr>
-              <a:t>Translate this concept into clear decision rights, review steps, documentation expectations, and escalation paths before.</a:t>
+              <a:t>Translate this concept into clear decision rights, review steps, documentation expectations, and escalation paths before an AI-supported workflow is approved.</a:t>
             </a:r>
             <a:endParaRPr lang="en-US" sz="1320" dirty="0"/>
           </a:p>
@@ -5640,11 +5640,11 @@
         <p:spPr>
           <a:xfrm>
             <a:off x="7635240" y="1325880"/>
-            <a:ext cx="3474720" cy="1325880"/>
+            <a:ext cx="3474720" cy="1207008"/>
           </a:xfrm>
           <a:prstGeom prst="roundRect">
             <a:avLst>
-              <a:gd name="adj" fmla="val 8276"/>
+              <a:gd name="adj" fmla="val 9091"/>
             </a:avLst>
           </a:prstGeom>
           <a:solidFill>
@@ -5706,7 +5706,7 @@
         <p:spPr>
           <a:xfrm>
             <a:off x="7799832" y="1801368"/>
-            <a:ext cx="3145536" cy="758952"/>
+            <a:ext cx="3145536" cy="640080"/>
           </a:xfrm>
           <a:prstGeom prst="rect">
             <a:avLst/>
@@ -5746,12 +5746,12 @@
         </p:nvSpPr>
         <p:spPr>
           <a:xfrm>
-            <a:off x="7635240" y="2788920"/>
-            <a:ext cx="3474720" cy="1536192"/>
+            <a:off x="7635240" y="2670048"/>
+            <a:ext cx="3474720" cy="1377086"/>
           </a:xfrm>
           <a:prstGeom prst="roundRect">
             <a:avLst>
-              <a:gd name="adj" fmla="val 7143"/>
+              <a:gd name="adj" fmla="val 7968"/>
             </a:avLst>
           </a:prstGeom>
           <a:solidFill>
@@ -5773,7 +5773,7 @@
         </p:nvSpPr>
         <p:spPr>
           <a:xfrm>
-            <a:off x="7799832" y="2935224"/>
+            <a:off x="7799832" y="2816352"/>
             <a:ext cx="3145536" cy="256032"/>
           </a:xfrm>
           <a:prstGeom prst="rect">
@@ -5812,8 +5812,8 @@
         </p:nvSpPr>
         <p:spPr>
           <a:xfrm>
-            <a:off x="7818120" y="3300984"/>
-            <a:ext cx="3090672" cy="877824"/>
+            <a:off x="7818120" y="3182112"/>
+            <a:ext cx="3090672" cy="718718"/>
           </a:xfrm>
           <a:prstGeom prst="rect">
             <a:avLst/>
@@ -5887,12 +5887,12 @@
         </p:nvSpPr>
         <p:spPr>
           <a:xfrm>
-            <a:off x="7635240" y="4498848"/>
-            <a:ext cx="3474720" cy="1143000"/>
+            <a:off x="7635240" y="4184294"/>
+            <a:ext cx="3474720" cy="1466698"/>
           </a:xfrm>
           <a:prstGeom prst="roundRect">
             <a:avLst>
-              <a:gd name="adj" fmla="val 9600"/>
+              <a:gd name="adj" fmla="val 7481"/>
             </a:avLst>
           </a:prstGeom>
           <a:solidFill>
@@ -5914,7 +5914,7 @@
         </p:nvSpPr>
         <p:spPr>
           <a:xfrm>
-            <a:off x="7799832" y="4645152"/>
+            <a:off x="7799832" y="4330598"/>
             <a:ext cx="3145536" cy="256032"/>
           </a:xfrm>
           <a:prstGeom prst="rect">
@@ -5953,8 +5953,8 @@
         </p:nvSpPr>
         <p:spPr>
           <a:xfrm>
-            <a:off x="7799832" y="4974336"/>
-            <a:ext cx="3145536" cy="576072"/>
+            <a:off x="7799832" y="4659782"/>
+            <a:ext cx="3145536" cy="899770"/>
           </a:xfrm>
           <a:prstGeom prst="rect">
             <a:avLst/>
@@ -5980,7 +5980,7 @@
                 <a:ea typeface="Aptos" pitchFamily="34" charset="-122"/>
                 <a:cs typeface="Aptos" pitchFamily="34" charset="-120"/>
               </a:rPr>
-              <a:t>Translate this concept into clear decision rights, review steps, documentation expectations, and escalation paths before.</a:t>
+              <a:t>Translate this concept into clear decision rights, review steps, documentation expectations, and escalation paths before an AI-supported workflow is approved.</a:t>
             </a:r>
             <a:endParaRPr lang="en-US" sz="1320" dirty="0"/>
           </a:p>
@@ -6349,11 +6349,11 @@
         <p:spPr>
           <a:xfrm>
             <a:off x="7635240" y="1325880"/>
-            <a:ext cx="3474720" cy="1325880"/>
+            <a:ext cx="3474720" cy="1207008"/>
           </a:xfrm>
           <a:prstGeom prst="roundRect">
             <a:avLst>
-              <a:gd name="adj" fmla="val 8276"/>
+              <a:gd name="adj" fmla="val 9091"/>
             </a:avLst>
           </a:prstGeom>
           <a:solidFill>
@@ -6415,7 +6415,7 @@
         <p:spPr>
           <a:xfrm>
             <a:off x="7799832" y="1801368"/>
-            <a:ext cx="3145536" cy="758952"/>
+            <a:ext cx="3145536" cy="640080"/>
           </a:xfrm>
           <a:prstGeom prst="rect">
             <a:avLst/>
@@ -6455,12 +6455,12 @@
         </p:nvSpPr>
         <p:spPr>
           <a:xfrm>
-            <a:off x="7635240" y="2788920"/>
-            <a:ext cx="3474720" cy="1536192"/>
+            <a:off x="7635240" y="2670048"/>
+            <a:ext cx="3474720" cy="1377086"/>
           </a:xfrm>
           <a:prstGeom prst="roundRect">
             <a:avLst>
-              <a:gd name="adj" fmla="val 7143"/>
+              <a:gd name="adj" fmla="val 7968"/>
             </a:avLst>
           </a:prstGeom>
           <a:solidFill>
@@ -6482,7 +6482,7 @@
         </p:nvSpPr>
         <p:spPr>
           <a:xfrm>
-            <a:off x="7799832" y="2935224"/>
+            <a:off x="7799832" y="2816352"/>
             <a:ext cx="3145536" cy="256032"/>
           </a:xfrm>
           <a:prstGeom prst="rect">
@@ -6521,8 +6521,8 @@
         </p:nvSpPr>
         <p:spPr>
           <a:xfrm>
-            <a:off x="7818120" y="3300984"/>
-            <a:ext cx="3090672" cy="877824"/>
+            <a:off x="7818120" y="3182112"/>
+            <a:ext cx="3090672" cy="718718"/>
           </a:xfrm>
           <a:prstGeom prst="rect">
             <a:avLst/>
@@ -6596,12 +6596,12 @@
         </p:nvSpPr>
         <p:spPr>
           <a:xfrm>
-            <a:off x="7635240" y="4498848"/>
-            <a:ext cx="3474720" cy="1143000"/>
+            <a:off x="7635240" y="4184294"/>
+            <a:ext cx="3474720" cy="1466698"/>
           </a:xfrm>
           <a:prstGeom prst="roundRect">
             <a:avLst>
-              <a:gd name="adj" fmla="val 9600"/>
+              <a:gd name="adj" fmla="val 7481"/>
             </a:avLst>
           </a:prstGeom>
           <a:solidFill>
@@ -6623,7 +6623,7 @@
         </p:nvSpPr>
         <p:spPr>
           <a:xfrm>
-            <a:off x="7799832" y="4645152"/>
+            <a:off x="7799832" y="4330598"/>
             <a:ext cx="3145536" cy="256032"/>
           </a:xfrm>
           <a:prstGeom prst="rect">
@@ -6662,8 +6662,8 @@
         </p:nvSpPr>
         <p:spPr>
           <a:xfrm>
-            <a:off x="7799832" y="4974336"/>
-            <a:ext cx="3145536" cy="576072"/>
+            <a:off x="7799832" y="4659782"/>
+            <a:ext cx="3145536" cy="899770"/>
           </a:xfrm>
           <a:prstGeom prst="rect">
             <a:avLst/>
@@ -6689,7 +6689,7 @@
                 <a:ea typeface="Aptos" pitchFamily="34" charset="-122"/>
                 <a:cs typeface="Aptos" pitchFamily="34" charset="-120"/>
               </a:rPr>
-              <a:t>Translate this concept into clear decision rights, review steps, documentation expectations, and escalation paths before.</a:t>
+              <a:t>Translate this concept into clear decision rights, review steps, documentation expectations, and escalation paths before an AI-supported workflow is approved.</a:t>
             </a:r>
             <a:endParaRPr lang="en-US" sz="1320" dirty="0"/>
           </a:p>
@@ -7058,11 +7058,11 @@
         <p:spPr>
           <a:xfrm>
             <a:off x="7635240" y="1325880"/>
-            <a:ext cx="3474720" cy="1325880"/>
+            <a:ext cx="3474720" cy="1207008"/>
           </a:xfrm>
           <a:prstGeom prst="roundRect">
             <a:avLst>
-              <a:gd name="adj" fmla="val 8276"/>
+              <a:gd name="adj" fmla="val 9091"/>
             </a:avLst>
           </a:prstGeom>
           <a:solidFill>
@@ -7124,7 +7124,7 @@
         <p:spPr>
           <a:xfrm>
             <a:off x="7799832" y="1801368"/>
-            <a:ext cx="3145536" cy="758952"/>
+            <a:ext cx="3145536" cy="640080"/>
           </a:xfrm>
           <a:prstGeom prst="rect">
             <a:avLst/>
@@ -7164,12 +7164,12 @@
         </p:nvSpPr>
         <p:spPr>
           <a:xfrm>
-            <a:off x="7635240" y="2788920"/>
-            <a:ext cx="3474720" cy="1536192"/>
+            <a:off x="7635240" y="2670048"/>
+            <a:ext cx="3474720" cy="1377086"/>
           </a:xfrm>
           <a:prstGeom prst="roundRect">
             <a:avLst>
-              <a:gd name="adj" fmla="val 7143"/>
+              <a:gd name="adj" fmla="val 7968"/>
             </a:avLst>
           </a:prstGeom>
           <a:solidFill>
@@ -7191,7 +7191,7 @@
         </p:nvSpPr>
         <p:spPr>
           <a:xfrm>
-            <a:off x="7799832" y="2935224"/>
+            <a:off x="7799832" y="2816352"/>
             <a:ext cx="3145536" cy="256032"/>
           </a:xfrm>
           <a:prstGeom prst="rect">
@@ -7230,8 +7230,8 @@
         </p:nvSpPr>
         <p:spPr>
           <a:xfrm>
-            <a:off x="7818120" y="3300984"/>
-            <a:ext cx="3090672" cy="877824"/>
+            <a:off x="7818120" y="3182112"/>
+            <a:ext cx="3090672" cy="718718"/>
           </a:xfrm>
           <a:prstGeom prst="rect">
             <a:avLst/>
@@ -7305,12 +7305,12 @@
         </p:nvSpPr>
         <p:spPr>
           <a:xfrm>
-            <a:off x="7635240" y="4498848"/>
-            <a:ext cx="3474720" cy="1143000"/>
+            <a:off x="7635240" y="4184294"/>
+            <a:ext cx="3474720" cy="1466698"/>
           </a:xfrm>
           <a:prstGeom prst="roundRect">
             <a:avLst>
-              <a:gd name="adj" fmla="val 9600"/>
+              <a:gd name="adj" fmla="val 7481"/>
             </a:avLst>
           </a:prstGeom>
           <a:solidFill>
@@ -7332,7 +7332,7 @@
         </p:nvSpPr>
         <p:spPr>
           <a:xfrm>
-            <a:off x="7799832" y="4645152"/>
+            <a:off x="7799832" y="4330598"/>
             <a:ext cx="3145536" cy="256032"/>
           </a:xfrm>
           <a:prstGeom prst="rect">
@@ -7371,8 +7371,8 @@
         </p:nvSpPr>
         <p:spPr>
           <a:xfrm>
-            <a:off x="7799832" y="4974336"/>
-            <a:ext cx="3145536" cy="576072"/>
+            <a:off x="7799832" y="4659782"/>
+            <a:ext cx="3145536" cy="899770"/>
           </a:xfrm>
           <a:prstGeom prst="rect">
             <a:avLst/>
@@ -7398,7 +7398,7 @@
                 <a:ea typeface="Aptos" pitchFamily="34" charset="-122"/>
                 <a:cs typeface="Aptos" pitchFamily="34" charset="-120"/>
               </a:rPr>
-              <a:t>Translate this concept into clear decision rights, review steps, documentation expectations, and escalation paths before.</a:t>
+              <a:t>Translate this concept into clear decision rights, review steps, documentation expectations, and escalation paths before an AI-supported workflow is approved.</a:t>
             </a:r>
             <a:endParaRPr lang="en-US" sz="1320" dirty="0"/>
           </a:p>
@@ -7750,11 +7750,11 @@
         <p:spPr>
           <a:xfrm>
             <a:off x="7635240" y="1325880"/>
-            <a:ext cx="3474720" cy="1325880"/>
+            <a:ext cx="3474720" cy="1207008"/>
           </a:xfrm>
           <a:prstGeom prst="roundRect">
             <a:avLst>
-              <a:gd name="adj" fmla="val 8276"/>
+              <a:gd name="adj" fmla="val 9091"/>
             </a:avLst>
           </a:prstGeom>
           <a:solidFill>
@@ -7816,7 +7816,7 @@
         <p:spPr>
           <a:xfrm>
             <a:off x="7799832" y="1801368"/>
-            <a:ext cx="3145536" cy="758952"/>
+            <a:ext cx="3145536" cy="640080"/>
           </a:xfrm>
           <a:prstGeom prst="rect">
             <a:avLst/>
@@ -7842,7 +7842,7 @@
                 <a:ea typeface="Aptos" pitchFamily="34" charset="-122"/>
                 <a:cs typeface="Aptos" pitchFamily="34" charset="-120"/>
               </a:rPr>
-              <a:t>What evidence would governance, leadership, or operations staff need before moving forward?</a:t>
+              <a:t>What evidence would governance, leadership, or operations staff need before moving.</a:t>
             </a:r>
             <a:endParaRPr lang="en-US" sz="1320" dirty="0"/>
           </a:p>
@@ -7856,12 +7856,12 @@
         </p:nvSpPr>
         <p:spPr>
           <a:xfrm>
-            <a:off x="7635240" y="2788920"/>
-            <a:ext cx="3474720" cy="1536192"/>
+            <a:off x="7635240" y="2670048"/>
+            <a:ext cx="3474720" cy="1377086"/>
           </a:xfrm>
           <a:prstGeom prst="roundRect">
             <a:avLst>
-              <a:gd name="adj" fmla="val 7143"/>
+              <a:gd name="adj" fmla="val 7968"/>
             </a:avLst>
           </a:prstGeom>
           <a:solidFill>
@@ -7883,7 +7883,7 @@
         </p:nvSpPr>
         <p:spPr>
           <a:xfrm>
-            <a:off x="7799832" y="2935224"/>
+            <a:off x="7799832" y="2816352"/>
             <a:ext cx="3145536" cy="256032"/>
           </a:xfrm>
           <a:prstGeom prst="rect">
@@ -7922,8 +7922,8 @@
         </p:nvSpPr>
         <p:spPr>
           <a:xfrm>
-            <a:off x="7818120" y="3300984"/>
-            <a:ext cx="3090672" cy="877824"/>
+            <a:off x="7818120" y="3182112"/>
+            <a:ext cx="3090672" cy="718718"/>
           </a:xfrm>
           <a:prstGeom prst="rect">
             <a:avLst/>
@@ -7980,12 +7980,12 @@
         </p:nvSpPr>
         <p:spPr>
           <a:xfrm>
-            <a:off x="7635240" y="4498848"/>
-            <a:ext cx="3474720" cy="1143000"/>
+            <a:off x="7635240" y="4184294"/>
+            <a:ext cx="3474720" cy="1466698"/>
           </a:xfrm>
           <a:prstGeom prst="roundRect">
             <a:avLst>
-              <a:gd name="adj" fmla="val 9600"/>
+              <a:gd name="adj" fmla="val 7481"/>
             </a:avLst>
           </a:prstGeom>
           <a:solidFill>
@@ -8007,7 +8007,7 @@
         </p:nvSpPr>
         <p:spPr>
           <a:xfrm>
-            <a:off x="7799832" y="4645152"/>
+            <a:off x="7799832" y="4330598"/>
             <a:ext cx="3145536" cy="256032"/>
           </a:xfrm>
           <a:prstGeom prst="rect">
@@ -8046,8 +8046,8 @@
         </p:nvSpPr>
         <p:spPr>
           <a:xfrm>
-            <a:off x="7799832" y="4974336"/>
-            <a:ext cx="3145536" cy="576072"/>
+            <a:off x="7799832" y="4659782"/>
+            <a:ext cx="3145536" cy="899770"/>
           </a:xfrm>
           <a:prstGeom prst="rect">
             <a:avLst/>
@@ -8073,7 +8073,7 @@
                 <a:ea typeface="Aptos" pitchFamily="34" charset="-122"/>
                 <a:cs typeface="Aptos" pitchFamily="34" charset="-120"/>
               </a:rPr>
-              <a:t>Translate this concept into clear decision rights, review steps, documentation expectations, and escalation paths before.</a:t>
+              <a:t>Translate this concept into clear decision rights, review steps, documentation expectations, and escalation paths before an AI-supported workflow is approved.</a:t>
             </a:r>
             <a:endParaRPr lang="en-US" sz="1320" dirty="0"/>
           </a:p>
@@ -8425,11 +8425,11 @@
         <p:spPr>
           <a:xfrm>
             <a:off x="7635240" y="1325880"/>
-            <a:ext cx="3474720" cy="1325880"/>
+            <a:ext cx="3474720" cy="1207008"/>
           </a:xfrm>
           <a:prstGeom prst="roundRect">
             <a:avLst>
-              <a:gd name="adj" fmla="val 8276"/>
+              <a:gd name="adj" fmla="val 9091"/>
             </a:avLst>
           </a:prstGeom>
           <a:solidFill>
@@ -8491,7 +8491,7 @@
         <p:spPr>
           <a:xfrm>
             <a:off x="7799832" y="1801368"/>
-            <a:ext cx="3145536" cy="758952"/>
+            <a:ext cx="3145536" cy="640080"/>
           </a:xfrm>
           <a:prstGeom prst="rect">
             <a:avLst/>
@@ -8531,12 +8531,12 @@
         </p:nvSpPr>
         <p:spPr>
           <a:xfrm>
-            <a:off x="7635240" y="2788920"/>
-            <a:ext cx="3474720" cy="1536192"/>
+            <a:off x="7635240" y="2670048"/>
+            <a:ext cx="3474720" cy="1377086"/>
           </a:xfrm>
           <a:prstGeom prst="roundRect">
             <a:avLst>
-              <a:gd name="adj" fmla="val 7143"/>
+              <a:gd name="adj" fmla="val 7968"/>
             </a:avLst>
           </a:prstGeom>
           <a:solidFill>
@@ -8558,7 +8558,7 @@
         </p:nvSpPr>
         <p:spPr>
           <a:xfrm>
-            <a:off x="7799832" y="2935224"/>
+            <a:off x="7799832" y="2816352"/>
             <a:ext cx="3145536" cy="256032"/>
           </a:xfrm>
           <a:prstGeom prst="rect">
@@ -8597,8 +8597,8 @@
         </p:nvSpPr>
         <p:spPr>
           <a:xfrm>
-            <a:off x="7818120" y="3300984"/>
-            <a:ext cx="3090672" cy="877824"/>
+            <a:off x="7818120" y="3182112"/>
+            <a:ext cx="3090672" cy="718718"/>
           </a:xfrm>
           <a:prstGeom prst="rect">
             <a:avLst/>
@@ -8655,12 +8655,12 @@
         </p:nvSpPr>
         <p:spPr>
           <a:xfrm>
-            <a:off x="7635240" y="4498848"/>
-            <a:ext cx="3474720" cy="1143000"/>
+            <a:off x="7635240" y="4184294"/>
+            <a:ext cx="3474720" cy="1466698"/>
           </a:xfrm>
           <a:prstGeom prst="roundRect">
             <a:avLst>
-              <a:gd name="adj" fmla="val 9600"/>
+              <a:gd name="adj" fmla="val 7481"/>
             </a:avLst>
           </a:prstGeom>
           <a:solidFill>
@@ -8682,7 +8682,7 @@
         </p:nvSpPr>
         <p:spPr>
           <a:xfrm>
-            <a:off x="7799832" y="4645152"/>
+            <a:off x="7799832" y="4330598"/>
             <a:ext cx="3145536" cy="256032"/>
           </a:xfrm>
           <a:prstGeom prst="rect">
@@ -8721,8 +8721,8 @@
         </p:nvSpPr>
         <p:spPr>
           <a:xfrm>
-            <a:off x="7799832" y="4974336"/>
-            <a:ext cx="3145536" cy="576072"/>
+            <a:off x="7799832" y="4659782"/>
+            <a:ext cx="3145536" cy="899770"/>
           </a:xfrm>
           <a:prstGeom prst="rect">
             <a:avLst/>
@@ -8748,7 +8748,7 @@
                 <a:ea typeface="Aptos" pitchFamily="34" charset="-122"/>
                 <a:cs typeface="Aptos" pitchFamily="34" charset="-120"/>
               </a:rPr>
-              <a:t>Use the assignment to test whether you can explain the concept, apply it to a realistic public health situation, and.</a:t>
+              <a:t>Use the assignment to test whether you can explain the concept, apply it to a realistic public health situation, and identify what would need review before the work moves forward.</a:t>
             </a:r>
             <a:endParaRPr lang="en-US" sz="1320" dirty="0"/>
           </a:p>
@@ -9117,11 +9117,11 @@
         <p:spPr>
           <a:xfrm>
             <a:off x="7635240" y="1325880"/>
-            <a:ext cx="3474720" cy="1325880"/>
+            <a:ext cx="3474720" cy="1207008"/>
           </a:xfrm>
           <a:prstGeom prst="roundRect">
             <a:avLst>
-              <a:gd name="adj" fmla="val 8276"/>
+              <a:gd name="adj" fmla="val 9091"/>
             </a:avLst>
           </a:prstGeom>
           <a:solidFill>
@@ -9183,7 +9183,7 @@
         <p:spPr>
           <a:xfrm>
             <a:off x="7799832" y="1801368"/>
-            <a:ext cx="3145536" cy="758952"/>
+            <a:ext cx="3145536" cy="640080"/>
           </a:xfrm>
           <a:prstGeom prst="rect">
             <a:avLst/>
@@ -9223,12 +9223,12 @@
         </p:nvSpPr>
         <p:spPr>
           <a:xfrm>
-            <a:off x="7635240" y="2788920"/>
-            <a:ext cx="3474720" cy="1536192"/>
+            <a:off x="7635240" y="2670048"/>
+            <a:ext cx="3474720" cy="1377086"/>
           </a:xfrm>
           <a:prstGeom prst="roundRect">
             <a:avLst>
-              <a:gd name="adj" fmla="val 7143"/>
+              <a:gd name="adj" fmla="val 7968"/>
             </a:avLst>
           </a:prstGeom>
           <a:solidFill>
@@ -9250,7 +9250,7 @@
         </p:nvSpPr>
         <p:spPr>
           <a:xfrm>
-            <a:off x="7799832" y="2935224"/>
+            <a:off x="7799832" y="2816352"/>
             <a:ext cx="3145536" cy="256032"/>
           </a:xfrm>
           <a:prstGeom prst="rect">
@@ -9289,8 +9289,8 @@
         </p:nvSpPr>
         <p:spPr>
           <a:xfrm>
-            <a:off x="7818120" y="3300984"/>
-            <a:ext cx="3090672" cy="877824"/>
+            <a:off x="7818120" y="3182112"/>
+            <a:ext cx="3090672" cy="718718"/>
           </a:xfrm>
           <a:prstGeom prst="rect">
             <a:avLst/>
@@ -9364,12 +9364,12 @@
         </p:nvSpPr>
         <p:spPr>
           <a:xfrm>
-            <a:off x="7635240" y="4498848"/>
-            <a:ext cx="3474720" cy="1143000"/>
+            <a:off x="7635240" y="4184294"/>
+            <a:ext cx="3474720" cy="1466698"/>
           </a:xfrm>
           <a:prstGeom prst="roundRect">
             <a:avLst>
-              <a:gd name="adj" fmla="val 9600"/>
+              <a:gd name="adj" fmla="val 7481"/>
             </a:avLst>
           </a:prstGeom>
           <a:solidFill>
@@ -9391,7 +9391,7 @@
         </p:nvSpPr>
         <p:spPr>
           <a:xfrm>
-            <a:off x="7799832" y="4645152"/>
+            <a:off x="7799832" y="4330598"/>
             <a:ext cx="3145536" cy="256032"/>
           </a:xfrm>
           <a:prstGeom prst="rect">
@@ -9430,8 +9430,8 @@
         </p:nvSpPr>
         <p:spPr>
           <a:xfrm>
-            <a:off x="7799832" y="4974336"/>
-            <a:ext cx="3145536" cy="576072"/>
+            <a:off x="7799832" y="4659782"/>
+            <a:ext cx="3145536" cy="899770"/>
           </a:xfrm>
           <a:prstGeom prst="rect">
             <a:avLst/>
@@ -9457,7 +9457,7 @@
                 <a:ea typeface="Aptos" pitchFamily="34" charset="-122"/>
                 <a:cs typeface="Aptos" pitchFamily="34" charset="-120"/>
               </a:rPr>
-              <a:t>Translate this concept into clear decision rights, review steps, documentation expectations, and escalation paths before.</a:t>
+              <a:t>Translate this concept into clear decision rights, review steps, documentation expectations, and escalation paths before an AI-supported workflow is approved.</a:t>
             </a:r>
             <a:endParaRPr lang="en-US" sz="1320" dirty="0"/>
           </a:p>
@@ -9809,11 +9809,11 @@
         <p:spPr>
           <a:xfrm>
             <a:off x="7635240" y="1325880"/>
-            <a:ext cx="3474720" cy="1325880"/>
+            <a:ext cx="3474720" cy="1207008"/>
           </a:xfrm>
           <a:prstGeom prst="roundRect">
             <a:avLst>
-              <a:gd name="adj" fmla="val 8276"/>
+              <a:gd name="adj" fmla="val 9091"/>
             </a:avLst>
           </a:prstGeom>
           <a:solidFill>
@@ -9875,7 +9875,7 @@
         <p:spPr>
           <a:xfrm>
             <a:off x="7799832" y="1801368"/>
-            <a:ext cx="3145536" cy="758952"/>
+            <a:ext cx="3145536" cy="640080"/>
           </a:xfrm>
           <a:prstGeom prst="rect">
             <a:avLst/>
@@ -9915,12 +9915,12 @@
         </p:nvSpPr>
         <p:spPr>
           <a:xfrm>
-            <a:off x="7635240" y="2788920"/>
-            <a:ext cx="3474720" cy="1536192"/>
+            <a:off x="7635240" y="2670048"/>
+            <a:ext cx="3474720" cy="1377086"/>
           </a:xfrm>
           <a:prstGeom prst="roundRect">
             <a:avLst>
-              <a:gd name="adj" fmla="val 7143"/>
+              <a:gd name="adj" fmla="val 7968"/>
             </a:avLst>
           </a:prstGeom>
           <a:solidFill>
@@ -9942,7 +9942,7 @@
         </p:nvSpPr>
         <p:spPr>
           <a:xfrm>
-            <a:off x="7799832" y="2935224"/>
+            <a:off x="7799832" y="2816352"/>
             <a:ext cx="3145536" cy="256032"/>
           </a:xfrm>
           <a:prstGeom prst="rect">
@@ -9981,8 +9981,8 @@
         </p:nvSpPr>
         <p:spPr>
           <a:xfrm>
-            <a:off x="7818120" y="3300984"/>
-            <a:ext cx="3090672" cy="877824"/>
+            <a:off x="7818120" y="3182112"/>
+            <a:ext cx="3090672" cy="718718"/>
           </a:xfrm>
           <a:prstGeom prst="rect">
             <a:avLst/>
@@ -10039,12 +10039,12 @@
         </p:nvSpPr>
         <p:spPr>
           <a:xfrm>
-            <a:off x="7635240" y="4498848"/>
-            <a:ext cx="3474720" cy="1143000"/>
+            <a:off x="7635240" y="4184294"/>
+            <a:ext cx="3474720" cy="1466698"/>
           </a:xfrm>
           <a:prstGeom prst="roundRect">
             <a:avLst>
-              <a:gd name="adj" fmla="val 9600"/>
+              <a:gd name="adj" fmla="val 7481"/>
             </a:avLst>
           </a:prstGeom>
           <a:solidFill>
@@ -10066,7 +10066,7 @@
         </p:nvSpPr>
         <p:spPr>
           <a:xfrm>
-            <a:off x="7799832" y="4645152"/>
+            <a:off x="7799832" y="4330598"/>
             <a:ext cx="3145536" cy="256032"/>
           </a:xfrm>
           <a:prstGeom prst="rect">
@@ -10105,8 +10105,8 @@
         </p:nvSpPr>
         <p:spPr>
           <a:xfrm>
-            <a:off x="7799832" y="4974336"/>
-            <a:ext cx="3145536" cy="576072"/>
+            <a:off x="7799832" y="4659782"/>
+            <a:ext cx="3145536" cy="899770"/>
           </a:xfrm>
           <a:prstGeom prst="rect">
             <a:avLst/>
@@ -10132,7 +10132,7 @@
                 <a:ea typeface="Aptos" pitchFamily="34" charset="-122"/>
                 <a:cs typeface="Aptos" pitchFamily="34" charset="-120"/>
               </a:rPr>
-              <a:t>Translate this concept into clear decision rights, review steps, documentation expectations, and escalation paths before.</a:t>
+              <a:t>Translate this concept into clear decision rights, review steps, documentation expectations, and escalation paths before an AI-supported workflow is approved.</a:t>
             </a:r>
             <a:endParaRPr lang="en-US" sz="1320" dirty="0"/>
           </a:p>
@@ -10593,7 +10593,7 @@
                 <a:ea typeface="Aptos" pitchFamily="34" charset="-122"/>
                 <a:cs typeface="Aptos" pitchFamily="34" charset="-120"/>
               </a:rPr>
-              <a:t>Level: intermediate/practitioner Primary track: Policy Role-Based Track Appears in tracks: policy,.</a:t>
+              <a:t>Level: intermediate/practitioner Primary track: Policy Role-Based Track Appears in tracks: policy, governance-and-security, public-health-executive-leadership, program-management</a:t>
             </a:r>
             <a:endParaRPr lang="en-US" sz="1320" dirty="0"/>
           </a:p>
@@ -11103,11 +11103,11 @@
         <p:spPr>
           <a:xfrm>
             <a:off x="7635240" y="1325880"/>
-            <a:ext cx="3474720" cy="1325880"/>
+            <a:ext cx="3474720" cy="1207008"/>
           </a:xfrm>
           <a:prstGeom prst="roundRect">
             <a:avLst>
-              <a:gd name="adj" fmla="val 8276"/>
+              <a:gd name="adj" fmla="val 9091"/>
             </a:avLst>
           </a:prstGeom>
           <a:solidFill>
@@ -11169,7 +11169,7 @@
         <p:spPr>
           <a:xfrm>
             <a:off x="7799832" y="1801368"/>
-            <a:ext cx="3145536" cy="758952"/>
+            <a:ext cx="3145536" cy="640080"/>
           </a:xfrm>
           <a:prstGeom prst="rect">
             <a:avLst/>
@@ -11209,12 +11209,12 @@
         </p:nvSpPr>
         <p:spPr>
           <a:xfrm>
-            <a:off x="7635240" y="2788920"/>
-            <a:ext cx="3474720" cy="1536192"/>
+            <a:off x="7635240" y="2670048"/>
+            <a:ext cx="3474720" cy="1377086"/>
           </a:xfrm>
           <a:prstGeom prst="roundRect">
             <a:avLst>
-              <a:gd name="adj" fmla="val 7143"/>
+              <a:gd name="adj" fmla="val 7968"/>
             </a:avLst>
           </a:prstGeom>
           <a:solidFill>
@@ -11236,7 +11236,7 @@
         </p:nvSpPr>
         <p:spPr>
           <a:xfrm>
-            <a:off x="7799832" y="2935224"/>
+            <a:off x="7799832" y="2816352"/>
             <a:ext cx="3145536" cy="256032"/>
           </a:xfrm>
           <a:prstGeom prst="rect">
@@ -11275,8 +11275,8 @@
         </p:nvSpPr>
         <p:spPr>
           <a:xfrm>
-            <a:off x="7818120" y="3300984"/>
-            <a:ext cx="3090672" cy="877824"/>
+            <a:off x="7818120" y="3182112"/>
+            <a:ext cx="3090672" cy="718718"/>
           </a:xfrm>
           <a:prstGeom prst="rect">
             <a:avLst/>
@@ -11333,12 +11333,12 @@
         </p:nvSpPr>
         <p:spPr>
           <a:xfrm>
-            <a:off x="7635240" y="4498848"/>
-            <a:ext cx="3474720" cy="1143000"/>
+            <a:off x="7635240" y="4184294"/>
+            <a:ext cx="3474720" cy="1466698"/>
           </a:xfrm>
           <a:prstGeom prst="roundRect">
             <a:avLst>
-              <a:gd name="adj" fmla="val 9600"/>
+              <a:gd name="adj" fmla="val 7481"/>
             </a:avLst>
           </a:prstGeom>
           <a:solidFill>
@@ -11360,7 +11360,7 @@
         </p:nvSpPr>
         <p:spPr>
           <a:xfrm>
-            <a:off x="7799832" y="4645152"/>
+            <a:off x="7799832" y="4330598"/>
             <a:ext cx="3145536" cy="256032"/>
           </a:xfrm>
           <a:prstGeom prst="rect">
@@ -11399,8 +11399,8 @@
         </p:nvSpPr>
         <p:spPr>
           <a:xfrm>
-            <a:off x="7799832" y="4974336"/>
-            <a:ext cx="3145536" cy="576072"/>
+            <a:off x="7799832" y="4659782"/>
+            <a:ext cx="3145536" cy="899770"/>
           </a:xfrm>
           <a:prstGeom prst="rect">
             <a:avLst/>
@@ -11426,7 +11426,7 @@
                 <a:ea typeface="Aptos" pitchFamily="34" charset="-122"/>
                 <a:cs typeface="Aptos" pitchFamily="34" charset="-120"/>
               </a:rPr>
-              <a:t>Use the assignment to test whether you can explain the concept, apply it to a realistic public health situation, and.</a:t>
+              <a:t>Use the assignment to test whether you can explain the concept, apply it to a realistic public health situation, and identify what would need review before the work moves forward.</a:t>
             </a:r>
             <a:endParaRPr lang="en-US" sz="1320" dirty="0"/>
           </a:p>
@@ -11795,11 +11795,11 @@
         <p:spPr>
           <a:xfrm>
             <a:off x="7635240" y="1325880"/>
-            <a:ext cx="3474720" cy="1325880"/>
+            <a:ext cx="3474720" cy="1207008"/>
           </a:xfrm>
           <a:prstGeom prst="roundRect">
             <a:avLst>
-              <a:gd name="adj" fmla="val 8276"/>
+              <a:gd name="adj" fmla="val 9091"/>
             </a:avLst>
           </a:prstGeom>
           <a:solidFill>
@@ -11861,7 +11861,7 @@
         <p:spPr>
           <a:xfrm>
             <a:off x="7799832" y="1801368"/>
-            <a:ext cx="3145536" cy="758952"/>
+            <a:ext cx="3145536" cy="640080"/>
           </a:xfrm>
           <a:prstGeom prst="rect">
             <a:avLst/>
@@ -11901,12 +11901,12 @@
         </p:nvSpPr>
         <p:spPr>
           <a:xfrm>
-            <a:off x="7635240" y="2788920"/>
-            <a:ext cx="3474720" cy="1536192"/>
+            <a:off x="7635240" y="2670048"/>
+            <a:ext cx="3474720" cy="1377086"/>
           </a:xfrm>
           <a:prstGeom prst="roundRect">
             <a:avLst>
-              <a:gd name="adj" fmla="val 7143"/>
+              <a:gd name="adj" fmla="val 7968"/>
             </a:avLst>
           </a:prstGeom>
           <a:solidFill>
@@ -11928,7 +11928,7 @@
         </p:nvSpPr>
         <p:spPr>
           <a:xfrm>
-            <a:off x="7799832" y="2935224"/>
+            <a:off x="7799832" y="2816352"/>
             <a:ext cx="3145536" cy="256032"/>
           </a:xfrm>
           <a:prstGeom prst="rect">
@@ -11967,8 +11967,8 @@
         </p:nvSpPr>
         <p:spPr>
           <a:xfrm>
-            <a:off x="7818120" y="3300984"/>
-            <a:ext cx="3090672" cy="877824"/>
+            <a:off x="7818120" y="3182112"/>
+            <a:ext cx="3090672" cy="718718"/>
           </a:xfrm>
           <a:prstGeom prst="rect">
             <a:avLst/>
@@ -12042,12 +12042,12 @@
         </p:nvSpPr>
         <p:spPr>
           <a:xfrm>
-            <a:off x="7635240" y="4498848"/>
-            <a:ext cx="3474720" cy="1143000"/>
+            <a:off x="7635240" y="4184294"/>
+            <a:ext cx="3474720" cy="1466698"/>
           </a:xfrm>
           <a:prstGeom prst="roundRect">
             <a:avLst>
-              <a:gd name="adj" fmla="val 9600"/>
+              <a:gd name="adj" fmla="val 7481"/>
             </a:avLst>
           </a:prstGeom>
           <a:solidFill>
@@ -12069,7 +12069,7 @@
         </p:nvSpPr>
         <p:spPr>
           <a:xfrm>
-            <a:off x="7799832" y="4645152"/>
+            <a:off x="7799832" y="4330598"/>
             <a:ext cx="3145536" cy="256032"/>
           </a:xfrm>
           <a:prstGeom prst="rect">
@@ -12108,8 +12108,8 @@
         </p:nvSpPr>
         <p:spPr>
           <a:xfrm>
-            <a:off x="7799832" y="4974336"/>
-            <a:ext cx="3145536" cy="576072"/>
+            <a:off x="7799832" y="4659782"/>
+            <a:ext cx="3145536" cy="899770"/>
           </a:xfrm>
           <a:prstGeom prst="rect">
             <a:avLst/>
@@ -12135,7 +12135,7 @@
                 <a:ea typeface="Aptos" pitchFamily="34" charset="-122"/>
                 <a:cs typeface="Aptos" pitchFamily="34" charset="-120"/>
               </a:rPr>
-              <a:t>Use the assignment to test whether you can explain the concept, apply it to a realistic public health situation, and.</a:t>
+              <a:t>Use the assignment to test whether you can explain the concept, apply it to a realistic public health situation, and identify what would need review before the work moves forward.</a:t>
             </a:r>
             <a:endParaRPr lang="en-US" sz="1320" dirty="0"/>
           </a:p>
@@ -12504,11 +12504,11 @@
         <p:spPr>
           <a:xfrm>
             <a:off x="7635240" y="1325880"/>
-            <a:ext cx="3474720" cy="1325880"/>
+            <a:ext cx="3474720" cy="1207008"/>
           </a:xfrm>
           <a:prstGeom prst="roundRect">
             <a:avLst>
-              <a:gd name="adj" fmla="val 8276"/>
+              <a:gd name="adj" fmla="val 9091"/>
             </a:avLst>
           </a:prstGeom>
           <a:solidFill>
@@ -12570,7 +12570,7 @@
         <p:spPr>
           <a:xfrm>
             <a:off x="7799832" y="1801368"/>
-            <a:ext cx="3145536" cy="758952"/>
+            <a:ext cx="3145536" cy="640080"/>
           </a:xfrm>
           <a:prstGeom prst="rect">
             <a:avLst/>
@@ -12610,12 +12610,12 @@
         </p:nvSpPr>
         <p:spPr>
           <a:xfrm>
-            <a:off x="7635240" y="2788920"/>
-            <a:ext cx="3474720" cy="1536192"/>
+            <a:off x="7635240" y="2670048"/>
+            <a:ext cx="3474720" cy="1377086"/>
           </a:xfrm>
           <a:prstGeom prst="roundRect">
             <a:avLst>
-              <a:gd name="adj" fmla="val 7143"/>
+              <a:gd name="adj" fmla="val 7968"/>
             </a:avLst>
           </a:prstGeom>
           <a:solidFill>
@@ -12637,7 +12637,7 @@
         </p:nvSpPr>
         <p:spPr>
           <a:xfrm>
-            <a:off x="7799832" y="2935224"/>
+            <a:off x="7799832" y="2816352"/>
             <a:ext cx="3145536" cy="256032"/>
           </a:xfrm>
           <a:prstGeom prst="rect">
@@ -12676,8 +12676,8 @@
         </p:nvSpPr>
         <p:spPr>
           <a:xfrm>
-            <a:off x="7818120" y="3300984"/>
-            <a:ext cx="3090672" cy="877824"/>
+            <a:off x="7818120" y="3182112"/>
+            <a:ext cx="3090672" cy="718718"/>
           </a:xfrm>
           <a:prstGeom prst="rect">
             <a:avLst/>
@@ -12751,12 +12751,12 @@
         </p:nvSpPr>
         <p:spPr>
           <a:xfrm>
-            <a:off x="7635240" y="4498848"/>
-            <a:ext cx="3474720" cy="1143000"/>
+            <a:off x="7635240" y="4184294"/>
+            <a:ext cx="3474720" cy="1466698"/>
           </a:xfrm>
           <a:prstGeom prst="roundRect">
             <a:avLst>
-              <a:gd name="adj" fmla="val 9600"/>
+              <a:gd name="adj" fmla="val 7481"/>
             </a:avLst>
           </a:prstGeom>
           <a:solidFill>
@@ -12778,7 +12778,7 @@
         </p:nvSpPr>
         <p:spPr>
           <a:xfrm>
-            <a:off x="7799832" y="4645152"/>
+            <a:off x="7799832" y="4330598"/>
             <a:ext cx="3145536" cy="256032"/>
           </a:xfrm>
           <a:prstGeom prst="rect">
@@ -12817,8 +12817,8 @@
         </p:nvSpPr>
         <p:spPr>
           <a:xfrm>
-            <a:off x="7799832" y="4974336"/>
-            <a:ext cx="3145536" cy="576072"/>
+            <a:off x="7799832" y="4659782"/>
+            <a:ext cx="3145536" cy="899770"/>
           </a:xfrm>
           <a:prstGeom prst="rect">
             <a:avLst/>
@@ -12844,7 +12844,7 @@
                 <a:ea typeface="Aptos" pitchFamily="34" charset="-122"/>
                 <a:cs typeface="Aptos" pitchFamily="34" charset="-120"/>
               </a:rPr>
-              <a:t>Translate this concept into clear decision rights, review steps, documentation expectations, and escalation paths before.</a:t>
+              <a:t>Translate this concept into clear decision rights, review steps, documentation expectations, and escalation paths before an AI-supported workflow is approved.</a:t>
             </a:r>
             <a:endParaRPr lang="en-US" sz="1320" dirty="0"/>
           </a:p>
@@ -13179,11 +13179,11 @@
         <p:spPr>
           <a:xfrm>
             <a:off x="7635240" y="1325880"/>
-            <a:ext cx="3474720" cy="1325880"/>
+            <a:ext cx="3474720" cy="1207008"/>
           </a:xfrm>
           <a:prstGeom prst="roundRect">
             <a:avLst>
-              <a:gd name="adj" fmla="val 8276"/>
+              <a:gd name="adj" fmla="val 9091"/>
             </a:avLst>
           </a:prstGeom>
           <a:solidFill>
@@ -13245,7 +13245,7 @@
         <p:spPr>
           <a:xfrm>
             <a:off x="7799832" y="1801368"/>
-            <a:ext cx="3145536" cy="758952"/>
+            <a:ext cx="3145536" cy="640080"/>
           </a:xfrm>
           <a:prstGeom prst="rect">
             <a:avLst/>
@@ -13271,7 +13271,7 @@
                 <a:ea typeface="Aptos" pitchFamily="34" charset="-122"/>
                 <a:cs typeface="Aptos" pitchFamily="34" charset="-120"/>
               </a:rPr>
-              <a:t>Relevant public health program SOPs, data governance documentation, and implementation plans</a:t>
+              <a:t>Relevant public health program SOPs, data governance documentation, and implementation.</a:t>
             </a:r>
             <a:endParaRPr lang="en-US" sz="1320" dirty="0"/>
           </a:p>
@@ -13285,12 +13285,12 @@
         </p:nvSpPr>
         <p:spPr>
           <a:xfrm>
-            <a:off x="7635240" y="2788920"/>
-            <a:ext cx="3474720" cy="1536192"/>
+            <a:off x="7635240" y="2670048"/>
+            <a:ext cx="3474720" cy="1377086"/>
           </a:xfrm>
           <a:prstGeom prst="roundRect">
             <a:avLst>
-              <a:gd name="adj" fmla="val 7143"/>
+              <a:gd name="adj" fmla="val 7968"/>
             </a:avLst>
           </a:prstGeom>
           <a:solidFill>
@@ -13312,7 +13312,7 @@
         </p:nvSpPr>
         <p:spPr>
           <a:xfrm>
-            <a:off x="7799832" y="2935224"/>
+            <a:off x="7799832" y="2816352"/>
             <a:ext cx="3145536" cy="256032"/>
           </a:xfrm>
           <a:prstGeom prst="rect">
@@ -13351,8 +13351,8 @@
         </p:nvSpPr>
         <p:spPr>
           <a:xfrm>
-            <a:off x="7818120" y="3300984"/>
-            <a:ext cx="3090672" cy="877824"/>
+            <a:off x="7818120" y="3182112"/>
+            <a:ext cx="3090672" cy="718718"/>
           </a:xfrm>
           <a:prstGeom prst="rect">
             <a:avLst/>
@@ -13392,12 +13392,12 @@
         </p:nvSpPr>
         <p:spPr>
           <a:xfrm>
-            <a:off x="7635240" y="4498848"/>
-            <a:ext cx="3474720" cy="1143000"/>
+            <a:off x="7635240" y="4184294"/>
+            <a:ext cx="3474720" cy="1466698"/>
           </a:xfrm>
           <a:prstGeom prst="roundRect">
             <a:avLst>
-              <a:gd name="adj" fmla="val 9600"/>
+              <a:gd name="adj" fmla="val 7481"/>
             </a:avLst>
           </a:prstGeom>
           <a:solidFill>
@@ -13419,7 +13419,7 @@
         </p:nvSpPr>
         <p:spPr>
           <a:xfrm>
-            <a:off x="7799832" y="4645152"/>
+            <a:off x="7799832" y="4330598"/>
             <a:ext cx="3145536" cy="256032"/>
           </a:xfrm>
           <a:prstGeom prst="rect">
@@ -13458,8 +13458,8 @@
         </p:nvSpPr>
         <p:spPr>
           <a:xfrm>
-            <a:off x="7799832" y="4974336"/>
-            <a:ext cx="3145536" cy="576072"/>
+            <a:off x="7799832" y="4659782"/>
+            <a:ext cx="3145536" cy="899770"/>
           </a:xfrm>
           <a:prstGeom prst="rect">
             <a:avLst/>
@@ -13485,7 +13485,7 @@
                 <a:ea typeface="Aptos" pitchFamily="34" charset="-122"/>
                 <a:cs typeface="Aptos" pitchFamily="34" charset="-120"/>
               </a:rPr>
-              <a:t>Translate this concept into clear decision rights, review steps, documentation expectations, and escalation paths before.</a:t>
+              <a:t>Translate this concept into clear decision rights, review steps, documentation expectations, and escalation paths before an AI-supported workflow is approved.</a:t>
             </a:r>
             <a:endParaRPr lang="en-US" sz="1320" dirty="0"/>
           </a:p>
@@ -13963,7 +13963,7 @@
                 <a:ea typeface="Aptos" pitchFamily="34" charset="-122"/>
                 <a:cs typeface="Aptos" pitchFamily="34" charset="-120"/>
               </a:rPr>
-              <a:t>Use the related plays to identify decisions, participants, timing, approvals, and documentation needed for responsible.</a:t>
+              <a:t>Use the related plays to identify decisions, participants, timing, approvals, and documentation needed for responsible implementation.</a:t>
             </a:r>
             <a:endParaRPr lang="en-US" sz="1320" dirty="0"/>
           </a:p>
@@ -14582,7 +14582,7 @@
                 <a:ea typeface="Aptos" pitchFamily="34" charset="-122"/>
                 <a:cs typeface="Aptos" pitchFamily="34" charset="-120"/>
               </a:rPr>
-              <a:t>Use linked tools when your department needs a structured worksheet, template, checklist, review process, or.</a:t>
+              <a:t>Use linked tools when your department needs a structured worksheet, template, checklist, review process, or documentation artifact.</a:t>
             </a:r>
             <a:endParaRPr lang="en-US" sz="1320" dirty="0"/>
           </a:p>
@@ -15092,11 +15092,11 @@
         <p:spPr>
           <a:xfrm>
             <a:off x="7635240" y="1325880"/>
-            <a:ext cx="3474720" cy="1325880"/>
+            <a:ext cx="3474720" cy="1207008"/>
           </a:xfrm>
           <a:prstGeom prst="roundRect">
             <a:avLst>
-              <a:gd name="adj" fmla="val 8276"/>
+              <a:gd name="adj" fmla="val 9091"/>
             </a:avLst>
           </a:prstGeom>
           <a:solidFill>
@@ -15158,7 +15158,7 @@
         <p:spPr>
           <a:xfrm>
             <a:off x="7799832" y="1801368"/>
-            <a:ext cx="3145536" cy="758952"/>
+            <a:ext cx="3145536" cy="640080"/>
           </a:xfrm>
           <a:prstGeom prst="rect">
             <a:avLst/>
@@ -15184,7 +15184,7 @@
                 <a:ea typeface="Aptos" pitchFamily="34" charset="-122"/>
                 <a:cs typeface="Aptos" pitchFamily="34" charset="-120"/>
               </a:rPr>
-              <a:t>Identify categories of law, policy, standards, and guidance that may affect public health AI.</a:t>
+              <a:t>Identify categories of law, policy, standards, and guidance that may affect public.</a:t>
             </a:r>
             <a:endParaRPr lang="en-US" sz="1320" dirty="0"/>
           </a:p>
@@ -15198,12 +15198,12 @@
         </p:nvSpPr>
         <p:spPr>
           <a:xfrm>
-            <a:off x="7635240" y="2788920"/>
-            <a:ext cx="3474720" cy="1536192"/>
+            <a:off x="7635240" y="2670048"/>
+            <a:ext cx="3474720" cy="1377086"/>
           </a:xfrm>
           <a:prstGeom prst="roundRect">
             <a:avLst>
-              <a:gd name="adj" fmla="val 7143"/>
+              <a:gd name="adj" fmla="val 7968"/>
             </a:avLst>
           </a:prstGeom>
           <a:solidFill>
@@ -15225,7 +15225,7 @@
         </p:nvSpPr>
         <p:spPr>
           <a:xfrm>
-            <a:off x="7799832" y="2935224"/>
+            <a:off x="7799832" y="2816352"/>
             <a:ext cx="3145536" cy="256032"/>
           </a:xfrm>
           <a:prstGeom prst="rect">
@@ -15264,8 +15264,8 @@
         </p:nvSpPr>
         <p:spPr>
           <a:xfrm>
-            <a:off x="7818120" y="3300984"/>
-            <a:ext cx="3090672" cy="877824"/>
+            <a:off x="7818120" y="3182112"/>
+            <a:ext cx="3090672" cy="718718"/>
           </a:xfrm>
           <a:prstGeom prst="rect">
             <a:avLst/>
@@ -15339,12 +15339,12 @@
         </p:nvSpPr>
         <p:spPr>
           <a:xfrm>
-            <a:off x="7635240" y="4498848"/>
-            <a:ext cx="3474720" cy="1143000"/>
+            <a:off x="7635240" y="4184294"/>
+            <a:ext cx="3474720" cy="1466698"/>
           </a:xfrm>
           <a:prstGeom prst="roundRect">
             <a:avLst>
-              <a:gd name="adj" fmla="val 9600"/>
+              <a:gd name="adj" fmla="val 7481"/>
             </a:avLst>
           </a:prstGeom>
           <a:solidFill>
@@ -15366,7 +15366,7 @@
         </p:nvSpPr>
         <p:spPr>
           <a:xfrm>
-            <a:off x="7799832" y="4645152"/>
+            <a:off x="7799832" y="4330598"/>
             <a:ext cx="3145536" cy="256032"/>
           </a:xfrm>
           <a:prstGeom prst="rect">
@@ -15405,8 +15405,8 @@
         </p:nvSpPr>
         <p:spPr>
           <a:xfrm>
-            <a:off x="7799832" y="4974336"/>
-            <a:ext cx="3145536" cy="576072"/>
+            <a:off x="7799832" y="4659782"/>
+            <a:ext cx="3145536" cy="899770"/>
           </a:xfrm>
           <a:prstGeom prst="rect">
             <a:avLst/>
@@ -15432,7 +15432,7 @@
                 <a:ea typeface="Aptos" pitchFamily="34" charset="-122"/>
                 <a:cs typeface="Aptos" pitchFamily="34" charset="-120"/>
               </a:rPr>
-              <a:t>Use the assignment to test whether you can explain the concept, apply it to a realistic public health situation, and.</a:t>
+              <a:t>Use the assignment to test whether you can explain the concept, apply it to a realistic public health situation, and identify what would need review before the work moves forward.</a:t>
             </a:r>
             <a:endParaRPr lang="en-US" sz="1320" dirty="0"/>
           </a:p>
@@ -15801,11 +15801,11 @@
         <p:spPr>
           <a:xfrm>
             <a:off x="7635240" y="1325880"/>
-            <a:ext cx="3474720" cy="1325880"/>
+            <a:ext cx="3474720" cy="1255471"/>
           </a:xfrm>
           <a:prstGeom prst="roundRect">
             <a:avLst>
-              <a:gd name="adj" fmla="val 8276"/>
+              <a:gd name="adj" fmla="val 8740"/>
             </a:avLst>
           </a:prstGeom>
           <a:solidFill>
@@ -15867,7 +15867,7 @@
         <p:spPr>
           <a:xfrm>
             <a:off x="7799832" y="1801368"/>
-            <a:ext cx="3145536" cy="758952"/>
+            <a:ext cx="3145536" cy="688543"/>
           </a:xfrm>
           <a:prstGeom prst="rect">
             <a:avLst/>
@@ -15907,12 +15907,12 @@
         </p:nvSpPr>
         <p:spPr>
           <a:xfrm>
-            <a:off x="7635240" y="2788920"/>
-            <a:ext cx="3474720" cy="1536192"/>
+            <a:off x="7635240" y="2718511"/>
+            <a:ext cx="3474720" cy="1328623"/>
           </a:xfrm>
           <a:prstGeom prst="roundRect">
             <a:avLst>
-              <a:gd name="adj" fmla="val 7143"/>
+              <a:gd name="adj" fmla="val 8259"/>
             </a:avLst>
           </a:prstGeom>
           <a:solidFill>
@@ -15934,8 +15934,8 @@
         </p:nvSpPr>
         <p:spPr>
           <a:xfrm>
-            <a:off x="7799832" y="2935224"/>
-            <a:ext cx="3145536" cy="256032"/>
+            <a:off x="7799832" y="2846527"/>
+            <a:ext cx="3145536" cy="237744"/>
           </a:xfrm>
           <a:prstGeom prst="rect">
             <a:avLst/>
@@ -15951,7 +15951,7 @@
               <a:buNone/>
             </a:pPr>
             <a:r>
-              <a:rPr lang="en-US" sz="1300" b="1" dirty="0">
+              <a:rPr lang="en-US" sz="1250" b="1" dirty="0">
                 <a:solidFill>
                   <a:srgbClr val="0068B7"/>
                 </a:solidFill>
@@ -15959,101 +15959,317 @@
                 <a:ea typeface="Aptos" pitchFamily="34" charset="-122"/>
                 <a:cs typeface="Aptos" pitchFamily="34" charset="-120"/>
               </a:rPr>
-              <a:t>Concept checkpoints</a:t>
-            </a:r>
-            <a:endParaRPr lang="en-US" sz="1300" dirty="0"/>
-          </a:p>
-        </p:txBody>
-      </p:sp>
-      <p:sp>
-        <p:nvSpPr>
-          <p:cNvPr id="15" name="Text 13"/>
-          <p:cNvSpPr/>
-          <p:nvPr/>
-        </p:nvSpPr>
-        <p:spPr>
-          <a:xfrm>
-            <a:off x="7818120" y="3300984"/>
-            <a:ext cx="3090672" cy="877824"/>
-          </a:xfrm>
-          <a:prstGeom prst="rect">
-            <a:avLst/>
-          </a:prstGeom>
-          <a:noFill/>
-          <a:ln/>
-        </p:spPr>
-        <p:txBody>
-          <a:bodyPr wrap="square" lIns="508" tIns="508" rIns="508" bIns="508" rtlCol="0" anchor="t">
+              <a:t>Governance pathway</a:t>
+            </a:r>
+            <a:endParaRPr lang="en-US" sz="1250" dirty="0"/>
+          </a:p>
+        </p:txBody>
+      </p:sp>
+      <p:sp>
+        <p:nvSpPr>
+          <p:cNvPr id="15" name="Shape 13"/>
+          <p:cNvSpPr/>
+          <p:nvPr/>
+        </p:nvSpPr>
+        <p:spPr>
+          <a:xfrm>
+            <a:off x="8763000" y="3399739"/>
+            <a:ext cx="164592" cy="0"/>
+          </a:xfrm>
+          <a:prstGeom prst="line">
+            <a:avLst/>
+          </a:prstGeom>
+          <a:noFill/>
+          <a:ln w="15240">
+            <a:solidFill>
+              <a:srgbClr val="8ABBD8"/>
+            </a:solidFill>
+            <a:prstDash val="solid"/>
+          </a:ln>
+        </p:spPr>
+      </p:sp>
+      <p:sp>
+        <p:nvSpPr>
+          <p:cNvPr id="16" name="Shape 14"/>
+          <p:cNvSpPr/>
+          <p:nvPr/>
+        </p:nvSpPr>
+        <p:spPr>
+          <a:xfrm>
+            <a:off x="7872984" y="3248863"/>
+            <a:ext cx="890016" cy="301752"/>
+          </a:xfrm>
+          <a:prstGeom prst="roundRect">
+            <a:avLst>
+              <a:gd name="adj" fmla="val 24242"/>
+            </a:avLst>
+          </a:prstGeom>
+          <a:solidFill>
+            <a:srgbClr val="0068B7"/>
+          </a:solidFill>
+          <a:ln w="12700">
+            <a:solidFill>
+              <a:srgbClr val="0068B7"/>
+            </a:solidFill>
+            <a:prstDash val="solid"/>
+          </a:ln>
+        </p:spPr>
+      </p:sp>
+      <p:sp>
+        <p:nvSpPr>
+          <p:cNvPr id="17" name="Text 15"/>
+          <p:cNvSpPr/>
+          <p:nvPr/>
+        </p:nvSpPr>
+        <p:spPr>
+          <a:xfrm>
+            <a:off x="7909560" y="3322015"/>
+            <a:ext cx="816864" cy="146304"/>
+          </a:xfrm>
+          <a:prstGeom prst="rect">
+            <a:avLst/>
+          </a:prstGeom>
+          <a:noFill/>
+          <a:ln/>
+        </p:spPr>
+        <p:txBody>
+          <a:bodyPr wrap="square" lIns="0" tIns="0" rIns="0" bIns="0" rtlCol="0" anchor="ctr">
             <a:normAutofit/>
           </a:bodyPr>
           <a:lstStyle/>
           <a:p>
-            <a:pPr indent="0" marL="0">
-              <a:buNone/>
-            </a:pPr>
-            <a:r>
-              <a:rPr lang="en-US" sz="1220" dirty="0">
-                <a:solidFill>
-                  <a:srgbClr val="17364A"/>
-                </a:solidFill>
-                <a:latin typeface="Aptos" pitchFamily="34" charset="0"/>
-                <a:ea typeface="Aptos" pitchFamily="34" charset="-122"/>
-                <a:cs typeface="Aptos" pitchFamily="34" charset="-120"/>
-              </a:rPr>
-              <a:t>The public health AI policy landscape is evolving quickly across.</a:t>
-            </a:r>
-            <a:endParaRPr lang="en-US" sz="1220" dirty="0"/>
-          </a:p>
-          <a:p>
-            <a:pPr indent="0" marL="0">
-              <a:buNone/>
-            </a:pPr>
-            <a:r>
-              <a:rPr lang="en-US" sz="1220" dirty="0">
-                <a:solidFill>
-                  <a:srgbClr val="17364A"/>
-                </a:solidFill>
-                <a:latin typeface="Aptos" pitchFamily="34" charset="0"/>
-                <a:ea typeface="Aptos" pitchFamily="34" charset="-122"/>
-                <a:cs typeface="Aptos" pitchFamily="34" charset="-120"/>
-              </a:rPr>
-              <a:t>Public health agencies do not need to wait for every rule to be.</a:t>
-            </a:r>
-            <a:endParaRPr lang="en-US" sz="1220" dirty="0"/>
-          </a:p>
-          <a:p>
-            <a:pPr indent="0" marL="0">
-              <a:buNone/>
-            </a:pPr>
-            <a:r>
-              <a:rPr lang="en-US" sz="1220" dirty="0">
-                <a:solidFill>
-                  <a:srgbClr val="17364A"/>
-                </a:solidFill>
-                <a:latin typeface="Aptos" pitchFamily="34" charset="0"/>
-                <a:ea typeface="Aptos" pitchFamily="34" charset="-122"/>
-                <a:cs typeface="Aptos" pitchFamily="34" charset="-120"/>
-              </a:rPr>
-              <a:t>Regulatory readiness means the agency can identify relevant.</a:t>
-            </a:r>
-            <a:endParaRPr lang="en-US" sz="1220" dirty="0"/>
-          </a:p>
-        </p:txBody>
-      </p:sp>
-      <p:sp>
-        <p:nvSpPr>
-          <p:cNvPr id="16" name="Shape 14"/>
-          <p:cNvSpPr/>
-          <p:nvPr/>
-        </p:nvSpPr>
-        <p:spPr>
-          <a:xfrm>
-            <a:off x="7635240" y="4498848"/>
-            <a:ext cx="3474720" cy="1143000"/>
+            <a:pPr algn="ctr" indent="0" marL="0">
+              <a:buNone/>
+            </a:pPr>
+            <a:r>
+              <a:rPr lang="en-US" sz="880" b="1" dirty="0">
+                <a:solidFill>
+                  <a:srgbClr val="FFFFFF"/>
+                </a:solidFill>
+                <a:latin typeface="Aptos" pitchFamily="34" charset="0"/>
+                <a:ea typeface="Aptos" pitchFamily="34" charset="-122"/>
+                <a:cs typeface="Aptos" pitchFamily="34" charset="-120"/>
+              </a:rPr>
+              <a:t>Submit</a:t>
+            </a:r>
+            <a:endParaRPr lang="en-US" sz="880" dirty="0"/>
+          </a:p>
+        </p:txBody>
+      </p:sp>
+      <p:sp>
+        <p:nvSpPr>
+          <p:cNvPr id="18" name="Shape 16"/>
+          <p:cNvSpPr/>
+          <p:nvPr/>
+        </p:nvSpPr>
+        <p:spPr>
+          <a:xfrm>
+            <a:off x="9817608" y="3399739"/>
+            <a:ext cx="164592" cy="0"/>
+          </a:xfrm>
+          <a:prstGeom prst="line">
+            <a:avLst/>
+          </a:prstGeom>
+          <a:noFill/>
+          <a:ln w="15240">
+            <a:solidFill>
+              <a:srgbClr val="8ABBD8"/>
+            </a:solidFill>
+            <a:prstDash val="solid"/>
+          </a:ln>
+        </p:spPr>
+      </p:sp>
+      <p:sp>
+        <p:nvSpPr>
+          <p:cNvPr id="19" name="Shape 17"/>
+          <p:cNvSpPr/>
+          <p:nvPr/>
+        </p:nvSpPr>
+        <p:spPr>
+          <a:xfrm>
+            <a:off x="8927592" y="3248863"/>
+            <a:ext cx="890016" cy="301752"/>
           </a:xfrm>
           <a:prstGeom prst="roundRect">
             <a:avLst>
-              <a:gd name="adj" fmla="val 9600"/>
+              <a:gd name="adj" fmla="val 24242"/>
+            </a:avLst>
+          </a:prstGeom>
+          <a:solidFill>
+            <a:srgbClr val="2F8A28"/>
+          </a:solidFill>
+          <a:ln w="12700">
+            <a:solidFill>
+              <a:srgbClr val="2F8A28"/>
+            </a:solidFill>
+            <a:prstDash val="solid"/>
+          </a:ln>
+        </p:spPr>
+      </p:sp>
+      <p:sp>
+        <p:nvSpPr>
+          <p:cNvPr id="20" name="Text 18"/>
+          <p:cNvSpPr/>
+          <p:nvPr/>
+        </p:nvSpPr>
+        <p:spPr>
+          <a:xfrm>
+            <a:off x="8964168" y="3322015"/>
+            <a:ext cx="816864" cy="146304"/>
+          </a:xfrm>
+          <a:prstGeom prst="rect">
+            <a:avLst/>
+          </a:prstGeom>
+          <a:noFill/>
+          <a:ln/>
+        </p:spPr>
+        <p:txBody>
+          <a:bodyPr wrap="square" lIns="0" tIns="0" rIns="0" bIns="0" rtlCol="0" anchor="ctr">
+            <a:normAutofit/>
+          </a:bodyPr>
+          <a:lstStyle/>
+          <a:p>
+            <a:pPr algn="ctr" indent="0" marL="0">
+              <a:buNone/>
+            </a:pPr>
+            <a:r>
+              <a:rPr lang="en-US" sz="880" b="1" dirty="0">
+                <a:solidFill>
+                  <a:srgbClr val="FFFFFF"/>
+                </a:solidFill>
+                <a:latin typeface="Aptos" pitchFamily="34" charset="0"/>
+                <a:ea typeface="Aptos" pitchFamily="34" charset="-122"/>
+                <a:cs typeface="Aptos" pitchFamily="34" charset="-120"/>
+              </a:rPr>
+              <a:t>Review</a:t>
+            </a:r>
+            <a:endParaRPr lang="en-US" sz="880" dirty="0"/>
+          </a:p>
+        </p:txBody>
+      </p:sp>
+      <p:sp>
+        <p:nvSpPr>
+          <p:cNvPr id="21" name="Shape 19"/>
+          <p:cNvSpPr/>
+          <p:nvPr/>
+        </p:nvSpPr>
+        <p:spPr>
+          <a:xfrm>
+            <a:off x="9982200" y="3248863"/>
+            <a:ext cx="890016" cy="301752"/>
+          </a:xfrm>
+          <a:prstGeom prst="roundRect">
+            <a:avLst>
+              <a:gd name="adj" fmla="val 24242"/>
+            </a:avLst>
+          </a:prstGeom>
+          <a:solidFill>
+            <a:srgbClr val="6A4CA3"/>
+          </a:solidFill>
+          <a:ln w="12700">
+            <a:solidFill>
+              <a:srgbClr val="6A4CA3"/>
+            </a:solidFill>
+            <a:prstDash val="solid"/>
+          </a:ln>
+        </p:spPr>
+      </p:sp>
+      <p:sp>
+        <p:nvSpPr>
+          <p:cNvPr id="22" name="Text 20"/>
+          <p:cNvSpPr/>
+          <p:nvPr/>
+        </p:nvSpPr>
+        <p:spPr>
+          <a:xfrm>
+            <a:off x="10018776" y="3322015"/>
+            <a:ext cx="816864" cy="146304"/>
+          </a:xfrm>
+          <a:prstGeom prst="rect">
+            <a:avLst/>
+          </a:prstGeom>
+          <a:noFill/>
+          <a:ln/>
+        </p:spPr>
+        <p:txBody>
+          <a:bodyPr wrap="square" lIns="0" tIns="0" rIns="0" bIns="0" rtlCol="0" anchor="ctr">
+            <a:normAutofit/>
+          </a:bodyPr>
+          <a:lstStyle/>
+          <a:p>
+            <a:pPr algn="ctr" indent="0" marL="0">
+              <a:buNone/>
+            </a:pPr>
+            <a:r>
+              <a:rPr lang="en-US" sz="880" b="1" dirty="0">
+                <a:solidFill>
+                  <a:srgbClr val="FFFFFF"/>
+                </a:solidFill>
+                <a:latin typeface="Aptos" pitchFamily="34" charset="0"/>
+                <a:ea typeface="Aptos" pitchFamily="34" charset="-122"/>
+                <a:cs typeface="Aptos" pitchFamily="34" charset="-120"/>
+              </a:rPr>
+              <a:t>Oversee</a:t>
+            </a:r>
+            <a:endParaRPr lang="en-US" sz="880" dirty="0"/>
+          </a:p>
+        </p:txBody>
+      </p:sp>
+      <p:sp>
+        <p:nvSpPr>
+          <p:cNvPr id="23" name="Text 21"/>
+          <p:cNvSpPr/>
+          <p:nvPr/>
+        </p:nvSpPr>
+        <p:spPr>
+          <a:xfrm>
+            <a:off x="7854696" y="3742639"/>
+            <a:ext cx="3035808" cy="158191"/>
+          </a:xfrm>
+          <a:prstGeom prst="rect">
+            <a:avLst/>
+          </a:prstGeom>
+          <a:noFill/>
+          <a:ln/>
+        </p:spPr>
+        <p:txBody>
+          <a:bodyPr wrap="square" lIns="254" tIns="254" rIns="254" bIns="254" rtlCol="0" anchor="t">
+            <a:normAutofit/>
+          </a:bodyPr>
+          <a:lstStyle/>
+          <a:p>
+            <a:pPr indent="0" marL="0">
+              <a:buNone/>
+            </a:pPr>
+            <a:r>
+              <a:rPr lang="en-US" sz="1120" dirty="0">
+                <a:solidFill>
+                  <a:srgbClr val="17364A"/>
+                </a:solidFill>
+                <a:latin typeface="Aptos" pitchFamily="34" charset="0"/>
+                <a:ea typeface="Aptos" pitchFamily="34" charset="-122"/>
+                <a:cs typeface="Aptos" pitchFamily="34" charset="-120"/>
+              </a:rPr>
+              <a:t>A proposed AI use should move through documented review before it becomes an operational workflow.</a:t>
+            </a:r>
+            <a:endParaRPr lang="en-US" sz="1120" dirty="0"/>
+          </a:p>
+        </p:txBody>
+      </p:sp>
+      <p:sp>
+        <p:nvSpPr>
+          <p:cNvPr id="24" name="Shape 22"/>
+          <p:cNvSpPr/>
+          <p:nvPr/>
+        </p:nvSpPr>
+        <p:spPr>
+          <a:xfrm>
+            <a:off x="7635240" y="4184294"/>
+            <a:ext cx="3474720" cy="1466698"/>
+          </a:xfrm>
+          <a:prstGeom prst="roundRect">
+            <a:avLst>
+              <a:gd name="adj" fmla="val 7481"/>
             </a:avLst>
           </a:prstGeom>
           <a:solidFill>
@@ -16069,13 +16285,13 @@
       </p:sp>
       <p:sp>
         <p:nvSpPr>
-          <p:cNvPr id="17" name="Text 15"/>
-          <p:cNvSpPr/>
-          <p:nvPr/>
-        </p:nvSpPr>
-        <p:spPr>
-          <a:xfrm>
-            <a:off x="7799832" y="4645152"/>
+          <p:cNvPr id="25" name="Text 23"/>
+          <p:cNvSpPr/>
+          <p:nvPr/>
+        </p:nvSpPr>
+        <p:spPr>
+          <a:xfrm>
+            <a:off x="7799832" y="4330598"/>
             <a:ext cx="3145536" cy="256032"/>
           </a:xfrm>
           <a:prstGeom prst="rect">
@@ -16108,14 +16324,14 @@
       </p:sp>
       <p:sp>
         <p:nvSpPr>
-          <p:cNvPr id="18" name="Text 16"/>
-          <p:cNvSpPr/>
-          <p:nvPr/>
-        </p:nvSpPr>
-        <p:spPr>
-          <a:xfrm>
-            <a:off x="7799832" y="4974336"/>
-            <a:ext cx="3145536" cy="576072"/>
+          <p:cNvPr id="26" name="Text 24"/>
+          <p:cNvSpPr/>
+          <p:nvPr/>
+        </p:nvSpPr>
+        <p:spPr>
+          <a:xfrm>
+            <a:off x="7799832" y="4659782"/>
+            <a:ext cx="3145536" cy="899770"/>
           </a:xfrm>
           <a:prstGeom prst="rect">
             <a:avLst/>
@@ -16141,7 +16357,7 @@
                 <a:ea typeface="Aptos" pitchFamily="34" charset="-122"/>
                 <a:cs typeface="Aptos" pitchFamily="34" charset="-120"/>
               </a:rPr>
-              <a:t>Translate this concept into clear decision rights, review steps, documentation expectations, and escalation paths before.</a:t>
+              <a:t>Translate this concept into clear decision rights, review steps, documentation expectations, and escalation paths before an AI-supported workflow is approved.</a:t>
             </a:r>
             <a:endParaRPr lang="en-US" sz="1320" dirty="0"/>
           </a:p>
@@ -16510,11 +16726,11 @@
         <p:spPr>
           <a:xfrm>
             <a:off x="7635240" y="1325880"/>
-            <a:ext cx="3474720" cy="1325880"/>
+            <a:ext cx="3474720" cy="1207008"/>
           </a:xfrm>
           <a:prstGeom prst="roundRect">
             <a:avLst>
-              <a:gd name="adj" fmla="val 8276"/>
+              <a:gd name="adj" fmla="val 9091"/>
             </a:avLst>
           </a:prstGeom>
           <a:solidFill>
@@ -16576,7 +16792,7 @@
         <p:spPr>
           <a:xfrm>
             <a:off x="7799832" y="1801368"/>
-            <a:ext cx="3145536" cy="758952"/>
+            <a:ext cx="3145536" cy="640080"/>
           </a:xfrm>
           <a:prstGeom prst="rect">
             <a:avLst/>
@@ -16602,7 +16818,7 @@
                 <a:ea typeface="Aptos" pitchFamily="34" charset="-122"/>
                 <a:cs typeface="Aptos" pitchFamily="34" charset="-120"/>
               </a:rPr>
-              <a:t>This module provides national-level training guidance for public health agencies and partners.</a:t>
+              <a:t>This module provides national-level training guidance for public health agencies and.</a:t>
             </a:r>
             <a:endParaRPr lang="en-US" sz="1320" dirty="0"/>
           </a:p>
@@ -16616,12 +16832,12 @@
         </p:nvSpPr>
         <p:spPr>
           <a:xfrm>
-            <a:off x="7635240" y="2788920"/>
-            <a:ext cx="3474720" cy="1536192"/>
+            <a:off x="7635240" y="2670048"/>
+            <a:ext cx="3474720" cy="1377086"/>
           </a:xfrm>
           <a:prstGeom prst="roundRect">
             <a:avLst>
-              <a:gd name="adj" fmla="val 7143"/>
+              <a:gd name="adj" fmla="val 7968"/>
             </a:avLst>
           </a:prstGeom>
           <a:solidFill>
@@ -16643,8 +16859,8 @@
         </p:nvSpPr>
         <p:spPr>
           <a:xfrm>
-            <a:off x="7799832" y="2935224"/>
-            <a:ext cx="3145536" cy="256032"/>
+            <a:off x="7799832" y="2798064"/>
+            <a:ext cx="3145536" cy="237744"/>
           </a:xfrm>
           <a:prstGeom prst="rect">
             <a:avLst/>
@@ -16660,7 +16876,7 @@
               <a:buNone/>
             </a:pPr>
             <a:r>
-              <a:rPr lang="en-US" sz="1300" b="1" dirty="0">
+              <a:rPr lang="en-US" sz="1250" b="1" dirty="0">
                 <a:solidFill>
                   <a:srgbClr val="0068B7"/>
                 </a:solidFill>
@@ -16668,101 +16884,317 @@
                 <a:ea typeface="Aptos" pitchFamily="34" charset="-122"/>
                 <a:cs typeface="Aptos" pitchFamily="34" charset="-120"/>
               </a:rPr>
-              <a:t>Concept checkpoints</a:t>
-            </a:r>
-            <a:endParaRPr lang="en-US" sz="1300" dirty="0"/>
-          </a:p>
-        </p:txBody>
-      </p:sp>
-      <p:sp>
-        <p:nvSpPr>
-          <p:cNvPr id="15" name="Text 13"/>
-          <p:cNvSpPr/>
-          <p:nvPr/>
-        </p:nvSpPr>
-        <p:spPr>
-          <a:xfrm>
-            <a:off x="7818120" y="3300984"/>
-            <a:ext cx="3090672" cy="877824"/>
-          </a:xfrm>
-          <a:prstGeom prst="rect">
-            <a:avLst/>
-          </a:prstGeom>
-          <a:noFill/>
-          <a:ln/>
-        </p:spPr>
-        <p:txBody>
-          <a:bodyPr wrap="square" lIns="508" tIns="508" rIns="508" bIns="508" rtlCol="0" anchor="t">
+              <a:t>Governance pathway</a:t>
+            </a:r>
+            <a:endParaRPr lang="en-US" sz="1250" dirty="0"/>
+          </a:p>
+        </p:txBody>
+      </p:sp>
+      <p:sp>
+        <p:nvSpPr>
+          <p:cNvPr id="15" name="Shape 13"/>
+          <p:cNvSpPr/>
+          <p:nvPr/>
+        </p:nvSpPr>
+        <p:spPr>
+          <a:xfrm>
+            <a:off x="8763000" y="3351276"/>
+            <a:ext cx="164592" cy="0"/>
+          </a:xfrm>
+          <a:prstGeom prst="line">
+            <a:avLst/>
+          </a:prstGeom>
+          <a:noFill/>
+          <a:ln w="15240">
+            <a:solidFill>
+              <a:srgbClr val="8ABBD8"/>
+            </a:solidFill>
+            <a:prstDash val="solid"/>
+          </a:ln>
+        </p:spPr>
+      </p:sp>
+      <p:sp>
+        <p:nvSpPr>
+          <p:cNvPr id="16" name="Shape 14"/>
+          <p:cNvSpPr/>
+          <p:nvPr/>
+        </p:nvSpPr>
+        <p:spPr>
+          <a:xfrm>
+            <a:off x="7872984" y="3200400"/>
+            <a:ext cx="890016" cy="301752"/>
+          </a:xfrm>
+          <a:prstGeom prst="roundRect">
+            <a:avLst>
+              <a:gd name="adj" fmla="val 24242"/>
+            </a:avLst>
+          </a:prstGeom>
+          <a:solidFill>
+            <a:srgbClr val="0068B7"/>
+          </a:solidFill>
+          <a:ln w="12700">
+            <a:solidFill>
+              <a:srgbClr val="0068B7"/>
+            </a:solidFill>
+            <a:prstDash val="solid"/>
+          </a:ln>
+        </p:spPr>
+      </p:sp>
+      <p:sp>
+        <p:nvSpPr>
+          <p:cNvPr id="17" name="Text 15"/>
+          <p:cNvSpPr/>
+          <p:nvPr/>
+        </p:nvSpPr>
+        <p:spPr>
+          <a:xfrm>
+            <a:off x="7909560" y="3273552"/>
+            <a:ext cx="816864" cy="146304"/>
+          </a:xfrm>
+          <a:prstGeom prst="rect">
+            <a:avLst/>
+          </a:prstGeom>
+          <a:noFill/>
+          <a:ln/>
+        </p:spPr>
+        <p:txBody>
+          <a:bodyPr wrap="square" lIns="0" tIns="0" rIns="0" bIns="0" rtlCol="0" anchor="ctr">
             <a:normAutofit/>
           </a:bodyPr>
           <a:lstStyle/>
           <a:p>
-            <a:pPr indent="0" marL="0">
-              <a:buNone/>
-            </a:pPr>
-            <a:r>
-              <a:rPr lang="en-US" sz="1220" dirty="0">
-                <a:solidFill>
-                  <a:srgbClr val="17364A"/>
-                </a:solidFill>
-                <a:latin typeface="Aptos" pitchFamily="34" charset="0"/>
-                <a:ea typeface="Aptos" pitchFamily="34" charset="-122"/>
-                <a:cs typeface="Aptos" pitchFamily="34" charset="-120"/>
-              </a:rPr>
-              <a:t>It is not legal advice and does not replace review by agency legal.</a:t>
-            </a:r>
-            <a:endParaRPr lang="en-US" sz="1220" dirty="0"/>
-          </a:p>
-          <a:p>
-            <a:pPr indent="0" marL="0">
-              <a:buNone/>
-            </a:pPr>
-            <a:r>
-              <a:rPr lang="en-US" sz="1220" dirty="0">
-                <a:solidFill>
-                  <a:srgbClr val="17364A"/>
-                </a:solidFill>
-                <a:latin typeface="Aptos" pitchFamily="34" charset="0"/>
-                <a:ea typeface="Aptos" pitchFamily="34" charset="-122"/>
-                <a:cs typeface="Aptos" pitchFamily="34" charset="-120"/>
-              </a:rPr>
-              <a:t>Requirements may vary by state, locality, territory, Tribe,.</a:t>
-            </a:r>
-            <a:endParaRPr lang="en-US" sz="1220" dirty="0"/>
-          </a:p>
-          <a:p>
-            <a:pPr indent="0" marL="0">
-              <a:buNone/>
-            </a:pPr>
-            <a:r>
-              <a:rPr lang="en-US" sz="1220" dirty="0">
-                <a:solidFill>
-                  <a:srgbClr val="17364A"/>
-                </a:solidFill>
-                <a:latin typeface="Aptos" pitchFamily="34" charset="0"/>
-                <a:ea typeface="Aptos" pitchFamily="34" charset="-122"/>
-                <a:cs typeface="Aptos" pitchFamily="34" charset="-120"/>
-              </a:rPr>
-              <a:t>Learners should use this module to identify the issues that.</a:t>
-            </a:r>
-            <a:endParaRPr lang="en-US" sz="1220" dirty="0"/>
-          </a:p>
-        </p:txBody>
-      </p:sp>
-      <p:sp>
-        <p:nvSpPr>
-          <p:cNvPr id="16" name="Shape 14"/>
-          <p:cNvSpPr/>
-          <p:nvPr/>
-        </p:nvSpPr>
-        <p:spPr>
-          <a:xfrm>
-            <a:off x="7635240" y="4498848"/>
-            <a:ext cx="3474720" cy="1143000"/>
+            <a:pPr algn="ctr" indent="0" marL="0">
+              <a:buNone/>
+            </a:pPr>
+            <a:r>
+              <a:rPr lang="en-US" sz="880" b="1" dirty="0">
+                <a:solidFill>
+                  <a:srgbClr val="FFFFFF"/>
+                </a:solidFill>
+                <a:latin typeface="Aptos" pitchFamily="34" charset="0"/>
+                <a:ea typeface="Aptos" pitchFamily="34" charset="-122"/>
+                <a:cs typeface="Aptos" pitchFamily="34" charset="-120"/>
+              </a:rPr>
+              <a:t>Submit</a:t>
+            </a:r>
+            <a:endParaRPr lang="en-US" sz="880" dirty="0"/>
+          </a:p>
+        </p:txBody>
+      </p:sp>
+      <p:sp>
+        <p:nvSpPr>
+          <p:cNvPr id="18" name="Shape 16"/>
+          <p:cNvSpPr/>
+          <p:nvPr/>
+        </p:nvSpPr>
+        <p:spPr>
+          <a:xfrm>
+            <a:off x="9817608" y="3351276"/>
+            <a:ext cx="164592" cy="0"/>
+          </a:xfrm>
+          <a:prstGeom prst="line">
+            <a:avLst/>
+          </a:prstGeom>
+          <a:noFill/>
+          <a:ln w="15240">
+            <a:solidFill>
+              <a:srgbClr val="8ABBD8"/>
+            </a:solidFill>
+            <a:prstDash val="solid"/>
+          </a:ln>
+        </p:spPr>
+      </p:sp>
+      <p:sp>
+        <p:nvSpPr>
+          <p:cNvPr id="19" name="Shape 17"/>
+          <p:cNvSpPr/>
+          <p:nvPr/>
+        </p:nvSpPr>
+        <p:spPr>
+          <a:xfrm>
+            <a:off x="8927592" y="3200400"/>
+            <a:ext cx="890016" cy="301752"/>
           </a:xfrm>
           <a:prstGeom prst="roundRect">
             <a:avLst>
-              <a:gd name="adj" fmla="val 9600"/>
+              <a:gd name="adj" fmla="val 24242"/>
+            </a:avLst>
+          </a:prstGeom>
+          <a:solidFill>
+            <a:srgbClr val="2F8A28"/>
+          </a:solidFill>
+          <a:ln w="12700">
+            <a:solidFill>
+              <a:srgbClr val="2F8A28"/>
+            </a:solidFill>
+            <a:prstDash val="solid"/>
+          </a:ln>
+        </p:spPr>
+      </p:sp>
+      <p:sp>
+        <p:nvSpPr>
+          <p:cNvPr id="20" name="Text 18"/>
+          <p:cNvSpPr/>
+          <p:nvPr/>
+        </p:nvSpPr>
+        <p:spPr>
+          <a:xfrm>
+            <a:off x="8964168" y="3273552"/>
+            <a:ext cx="816864" cy="146304"/>
+          </a:xfrm>
+          <a:prstGeom prst="rect">
+            <a:avLst/>
+          </a:prstGeom>
+          <a:noFill/>
+          <a:ln/>
+        </p:spPr>
+        <p:txBody>
+          <a:bodyPr wrap="square" lIns="0" tIns="0" rIns="0" bIns="0" rtlCol="0" anchor="ctr">
+            <a:normAutofit/>
+          </a:bodyPr>
+          <a:lstStyle/>
+          <a:p>
+            <a:pPr algn="ctr" indent="0" marL="0">
+              <a:buNone/>
+            </a:pPr>
+            <a:r>
+              <a:rPr lang="en-US" sz="880" b="1" dirty="0">
+                <a:solidFill>
+                  <a:srgbClr val="FFFFFF"/>
+                </a:solidFill>
+                <a:latin typeface="Aptos" pitchFamily="34" charset="0"/>
+                <a:ea typeface="Aptos" pitchFamily="34" charset="-122"/>
+                <a:cs typeface="Aptos" pitchFamily="34" charset="-120"/>
+              </a:rPr>
+              <a:t>Review</a:t>
+            </a:r>
+            <a:endParaRPr lang="en-US" sz="880" dirty="0"/>
+          </a:p>
+        </p:txBody>
+      </p:sp>
+      <p:sp>
+        <p:nvSpPr>
+          <p:cNvPr id="21" name="Shape 19"/>
+          <p:cNvSpPr/>
+          <p:nvPr/>
+        </p:nvSpPr>
+        <p:spPr>
+          <a:xfrm>
+            <a:off x="9982200" y="3200400"/>
+            <a:ext cx="890016" cy="301752"/>
+          </a:xfrm>
+          <a:prstGeom prst="roundRect">
+            <a:avLst>
+              <a:gd name="adj" fmla="val 24242"/>
+            </a:avLst>
+          </a:prstGeom>
+          <a:solidFill>
+            <a:srgbClr val="6A4CA3"/>
+          </a:solidFill>
+          <a:ln w="12700">
+            <a:solidFill>
+              <a:srgbClr val="6A4CA3"/>
+            </a:solidFill>
+            <a:prstDash val="solid"/>
+          </a:ln>
+        </p:spPr>
+      </p:sp>
+      <p:sp>
+        <p:nvSpPr>
+          <p:cNvPr id="22" name="Text 20"/>
+          <p:cNvSpPr/>
+          <p:nvPr/>
+        </p:nvSpPr>
+        <p:spPr>
+          <a:xfrm>
+            <a:off x="10018776" y="3273552"/>
+            <a:ext cx="816864" cy="146304"/>
+          </a:xfrm>
+          <a:prstGeom prst="rect">
+            <a:avLst/>
+          </a:prstGeom>
+          <a:noFill/>
+          <a:ln/>
+        </p:spPr>
+        <p:txBody>
+          <a:bodyPr wrap="square" lIns="0" tIns="0" rIns="0" bIns="0" rtlCol="0" anchor="ctr">
+            <a:normAutofit/>
+          </a:bodyPr>
+          <a:lstStyle/>
+          <a:p>
+            <a:pPr algn="ctr" indent="0" marL="0">
+              <a:buNone/>
+            </a:pPr>
+            <a:r>
+              <a:rPr lang="en-US" sz="880" b="1" dirty="0">
+                <a:solidFill>
+                  <a:srgbClr val="FFFFFF"/>
+                </a:solidFill>
+                <a:latin typeface="Aptos" pitchFamily="34" charset="0"/>
+                <a:ea typeface="Aptos" pitchFamily="34" charset="-122"/>
+                <a:cs typeface="Aptos" pitchFamily="34" charset="-120"/>
+              </a:rPr>
+              <a:t>Oversee</a:t>
+            </a:r>
+            <a:endParaRPr lang="en-US" sz="880" dirty="0"/>
+          </a:p>
+        </p:txBody>
+      </p:sp>
+      <p:sp>
+        <p:nvSpPr>
+          <p:cNvPr id="23" name="Text 21"/>
+          <p:cNvSpPr/>
+          <p:nvPr/>
+        </p:nvSpPr>
+        <p:spPr>
+          <a:xfrm>
+            <a:off x="7854696" y="3694176"/>
+            <a:ext cx="3035808" cy="206654"/>
+          </a:xfrm>
+          <a:prstGeom prst="rect">
+            <a:avLst/>
+          </a:prstGeom>
+          <a:noFill/>
+          <a:ln/>
+        </p:spPr>
+        <p:txBody>
+          <a:bodyPr wrap="square" lIns="254" tIns="254" rIns="254" bIns="254" rtlCol="0" anchor="t">
+            <a:normAutofit/>
+          </a:bodyPr>
+          <a:lstStyle/>
+          <a:p>
+            <a:pPr indent="0" marL="0">
+              <a:buNone/>
+            </a:pPr>
+            <a:r>
+              <a:rPr lang="en-US" sz="1120" dirty="0">
+                <a:solidFill>
+                  <a:srgbClr val="17364A"/>
+                </a:solidFill>
+                <a:latin typeface="Aptos" pitchFamily="34" charset="0"/>
+                <a:ea typeface="Aptos" pitchFamily="34" charset="-122"/>
+                <a:cs typeface="Aptos" pitchFamily="34" charset="-120"/>
+              </a:rPr>
+              <a:t>A proposed AI use should move through documented review before it becomes an operational workflow.</a:t>
+            </a:r>
+            <a:endParaRPr lang="en-US" sz="1120" dirty="0"/>
+          </a:p>
+        </p:txBody>
+      </p:sp>
+      <p:sp>
+        <p:nvSpPr>
+          <p:cNvPr id="24" name="Shape 22"/>
+          <p:cNvSpPr/>
+          <p:nvPr/>
+        </p:nvSpPr>
+        <p:spPr>
+          <a:xfrm>
+            <a:off x="7635240" y="4184294"/>
+            <a:ext cx="3474720" cy="1466698"/>
+          </a:xfrm>
+          <a:prstGeom prst="roundRect">
+            <a:avLst>
+              <a:gd name="adj" fmla="val 7481"/>
             </a:avLst>
           </a:prstGeom>
           <a:solidFill>
@@ -16778,13 +17210,13 @@
       </p:sp>
       <p:sp>
         <p:nvSpPr>
-          <p:cNvPr id="17" name="Text 15"/>
-          <p:cNvSpPr/>
-          <p:nvPr/>
-        </p:nvSpPr>
-        <p:spPr>
-          <a:xfrm>
-            <a:off x="7799832" y="4645152"/>
+          <p:cNvPr id="25" name="Text 23"/>
+          <p:cNvSpPr/>
+          <p:nvPr/>
+        </p:nvSpPr>
+        <p:spPr>
+          <a:xfrm>
+            <a:off x="7799832" y="4330598"/>
             <a:ext cx="3145536" cy="256032"/>
           </a:xfrm>
           <a:prstGeom prst="rect">
@@ -16817,14 +17249,14 @@
       </p:sp>
       <p:sp>
         <p:nvSpPr>
-          <p:cNvPr id="18" name="Text 16"/>
-          <p:cNvSpPr/>
-          <p:nvPr/>
-        </p:nvSpPr>
-        <p:spPr>
-          <a:xfrm>
-            <a:off x="7799832" y="4974336"/>
-            <a:ext cx="3145536" cy="576072"/>
+          <p:cNvPr id="26" name="Text 24"/>
+          <p:cNvSpPr/>
+          <p:nvPr/>
+        </p:nvSpPr>
+        <p:spPr>
+          <a:xfrm>
+            <a:off x="7799832" y="4659782"/>
+            <a:ext cx="3145536" cy="899770"/>
           </a:xfrm>
           <a:prstGeom prst="rect">
             <a:avLst/>
@@ -16850,7 +17282,7 @@
                 <a:ea typeface="Aptos" pitchFamily="34" charset="-122"/>
                 <a:cs typeface="Aptos" pitchFamily="34" charset="-120"/>
               </a:rPr>
-              <a:t>Translate this concept into clear decision rights, review steps, documentation expectations, and escalation paths before.</a:t>
+              <a:t>Translate this concept into clear decision rights, review steps, documentation expectations, and escalation paths before an AI-supported workflow is approved.</a:t>
             </a:r>
             <a:endParaRPr lang="en-US" sz="1320" dirty="0"/>
           </a:p>
@@ -17219,11 +17651,11 @@
         <p:spPr>
           <a:xfrm>
             <a:off x="7635240" y="1325880"/>
-            <a:ext cx="3474720" cy="1325880"/>
+            <a:ext cx="3474720" cy="1255471"/>
           </a:xfrm>
           <a:prstGeom prst="roundRect">
             <a:avLst>
-              <a:gd name="adj" fmla="val 8276"/>
+              <a:gd name="adj" fmla="val 8740"/>
             </a:avLst>
           </a:prstGeom>
           <a:solidFill>
@@ -17285,7 +17717,7 @@
         <p:spPr>
           <a:xfrm>
             <a:off x="7799832" y="1801368"/>
-            <a:ext cx="3145536" cy="758952"/>
+            <a:ext cx="3145536" cy="688543"/>
           </a:xfrm>
           <a:prstGeom prst="rect">
             <a:avLst/>
@@ -17325,12 +17757,12 @@
         </p:nvSpPr>
         <p:spPr>
           <a:xfrm>
-            <a:off x="7635240" y="2788920"/>
-            <a:ext cx="3474720" cy="1536192"/>
+            <a:off x="7635240" y="2718511"/>
+            <a:ext cx="3474720" cy="1328623"/>
           </a:xfrm>
           <a:prstGeom prst="roundRect">
             <a:avLst>
-              <a:gd name="adj" fmla="val 7143"/>
+              <a:gd name="adj" fmla="val 8259"/>
             </a:avLst>
           </a:prstGeom>
           <a:solidFill>
@@ -17352,7 +17784,7 @@
         </p:nvSpPr>
         <p:spPr>
           <a:xfrm>
-            <a:off x="7799832" y="2935224"/>
+            <a:off x="7799832" y="2864815"/>
             <a:ext cx="3145536" cy="256032"/>
           </a:xfrm>
           <a:prstGeom prst="rect">
@@ -17391,8 +17823,8 @@
         </p:nvSpPr>
         <p:spPr>
           <a:xfrm>
-            <a:off x="7818120" y="3300984"/>
-            <a:ext cx="3090672" cy="877824"/>
+            <a:off x="7818120" y="3230575"/>
+            <a:ext cx="3090672" cy="670255"/>
           </a:xfrm>
           <a:prstGeom prst="rect">
             <a:avLst/>
@@ -17466,12 +17898,12 @@
         </p:nvSpPr>
         <p:spPr>
           <a:xfrm>
-            <a:off x="7635240" y="4498848"/>
-            <a:ext cx="3474720" cy="1143000"/>
+            <a:off x="7635240" y="4184294"/>
+            <a:ext cx="3474720" cy="1466698"/>
           </a:xfrm>
           <a:prstGeom prst="roundRect">
             <a:avLst>
-              <a:gd name="adj" fmla="val 9600"/>
+              <a:gd name="adj" fmla="val 7481"/>
             </a:avLst>
           </a:prstGeom>
           <a:solidFill>
@@ -17493,7 +17925,7 @@
         </p:nvSpPr>
         <p:spPr>
           <a:xfrm>
-            <a:off x="7799832" y="4645152"/>
+            <a:off x="7799832" y="4330598"/>
             <a:ext cx="3145536" cy="256032"/>
           </a:xfrm>
           <a:prstGeom prst="rect">
@@ -17532,8 +17964,8 @@
         </p:nvSpPr>
         <p:spPr>
           <a:xfrm>
-            <a:off x="7799832" y="4974336"/>
-            <a:ext cx="3145536" cy="576072"/>
+            <a:off x="7799832" y="4659782"/>
+            <a:ext cx="3145536" cy="899770"/>
           </a:xfrm>
           <a:prstGeom prst="rect">
             <a:avLst/>
@@ -17559,7 +17991,7 @@
                 <a:ea typeface="Aptos" pitchFamily="34" charset="-122"/>
                 <a:cs typeface="Aptos" pitchFamily="34" charset="-120"/>
               </a:rPr>
-              <a:t>Translate this concept into clear decision rights, review steps, documentation expectations, and escalation paths before.</a:t>
+              <a:t>Translate this concept into clear decision rights, review steps, documentation expectations, and escalation paths before an AI-supported workflow is approved.</a:t>
             </a:r>
             <a:endParaRPr lang="en-US" sz="1320" dirty="0"/>
           </a:p>
@@ -17928,11 +18360,11 @@
         <p:spPr>
           <a:xfrm>
             <a:off x="7635240" y="1325880"/>
-            <a:ext cx="3474720" cy="1325880"/>
+            <a:ext cx="3474720" cy="1255471"/>
           </a:xfrm>
           <a:prstGeom prst="roundRect">
             <a:avLst>
-              <a:gd name="adj" fmla="val 8276"/>
+              <a:gd name="adj" fmla="val 8740"/>
             </a:avLst>
           </a:prstGeom>
           <a:solidFill>
@@ -17994,7 +18426,7 @@
         <p:spPr>
           <a:xfrm>
             <a:off x="7799832" y="1801368"/>
-            <a:ext cx="3145536" cy="758952"/>
+            <a:ext cx="3145536" cy="688543"/>
           </a:xfrm>
           <a:prstGeom prst="rect">
             <a:avLst/>
@@ -18034,12 +18466,12 @@
         </p:nvSpPr>
         <p:spPr>
           <a:xfrm>
-            <a:off x="7635240" y="2788920"/>
-            <a:ext cx="3474720" cy="1536192"/>
+            <a:off x="7635240" y="2718511"/>
+            <a:ext cx="3474720" cy="1328623"/>
           </a:xfrm>
           <a:prstGeom prst="roundRect">
             <a:avLst>
-              <a:gd name="adj" fmla="val 7143"/>
+              <a:gd name="adj" fmla="val 8259"/>
             </a:avLst>
           </a:prstGeom>
           <a:solidFill>
@@ -18061,8 +18493,8 @@
         </p:nvSpPr>
         <p:spPr>
           <a:xfrm>
-            <a:off x="7799832" y="2935224"/>
-            <a:ext cx="3145536" cy="256032"/>
+            <a:off x="7799832" y="2846527"/>
+            <a:ext cx="3145536" cy="237744"/>
           </a:xfrm>
           <a:prstGeom prst="rect">
             <a:avLst/>
@@ -18078,7 +18510,7 @@
               <a:buNone/>
             </a:pPr>
             <a:r>
-              <a:rPr lang="en-US" sz="1300" b="1" dirty="0">
+              <a:rPr lang="en-US" sz="1250" b="1" dirty="0">
                 <a:solidFill>
                   <a:srgbClr val="0068B7"/>
                 </a:solidFill>
@@ -18086,101 +18518,317 @@
                 <a:ea typeface="Aptos" pitchFamily="34" charset="-122"/>
                 <a:cs typeface="Aptos" pitchFamily="34" charset="-120"/>
               </a:rPr>
-              <a:t>Concept checkpoints</a:t>
-            </a:r>
-            <a:endParaRPr lang="en-US" sz="1300" dirty="0"/>
-          </a:p>
-        </p:txBody>
-      </p:sp>
-      <p:sp>
-        <p:nvSpPr>
-          <p:cNvPr id="15" name="Text 13"/>
-          <p:cNvSpPr/>
-          <p:nvPr/>
-        </p:nvSpPr>
-        <p:spPr>
-          <a:xfrm>
-            <a:off x="7818120" y="3300984"/>
-            <a:ext cx="3090672" cy="877824"/>
-          </a:xfrm>
-          <a:prstGeom prst="rect">
-            <a:avLst/>
-          </a:prstGeom>
-          <a:noFill/>
-          <a:ln/>
-        </p:spPr>
-        <p:txBody>
-          <a:bodyPr wrap="square" lIns="508" tIns="508" rIns="508" bIns="508" rtlCol="0" anchor="t">
+              <a:t>Governance pathway</a:t>
+            </a:r>
+            <a:endParaRPr lang="en-US" sz="1250" dirty="0"/>
+          </a:p>
+        </p:txBody>
+      </p:sp>
+      <p:sp>
+        <p:nvSpPr>
+          <p:cNvPr id="15" name="Shape 13"/>
+          <p:cNvSpPr/>
+          <p:nvPr/>
+        </p:nvSpPr>
+        <p:spPr>
+          <a:xfrm>
+            <a:off x="8763000" y="3399739"/>
+            <a:ext cx="164592" cy="0"/>
+          </a:xfrm>
+          <a:prstGeom prst="line">
+            <a:avLst/>
+          </a:prstGeom>
+          <a:noFill/>
+          <a:ln w="15240">
+            <a:solidFill>
+              <a:srgbClr val="8ABBD8"/>
+            </a:solidFill>
+            <a:prstDash val="solid"/>
+          </a:ln>
+        </p:spPr>
+      </p:sp>
+      <p:sp>
+        <p:nvSpPr>
+          <p:cNvPr id="16" name="Shape 14"/>
+          <p:cNvSpPr/>
+          <p:nvPr/>
+        </p:nvSpPr>
+        <p:spPr>
+          <a:xfrm>
+            <a:off x="7872984" y="3248863"/>
+            <a:ext cx="890016" cy="301752"/>
+          </a:xfrm>
+          <a:prstGeom prst="roundRect">
+            <a:avLst>
+              <a:gd name="adj" fmla="val 24242"/>
+            </a:avLst>
+          </a:prstGeom>
+          <a:solidFill>
+            <a:srgbClr val="0068B7"/>
+          </a:solidFill>
+          <a:ln w="12700">
+            <a:solidFill>
+              <a:srgbClr val="0068B7"/>
+            </a:solidFill>
+            <a:prstDash val="solid"/>
+          </a:ln>
+        </p:spPr>
+      </p:sp>
+      <p:sp>
+        <p:nvSpPr>
+          <p:cNvPr id="17" name="Text 15"/>
+          <p:cNvSpPr/>
+          <p:nvPr/>
+        </p:nvSpPr>
+        <p:spPr>
+          <a:xfrm>
+            <a:off x="7909560" y="3322015"/>
+            <a:ext cx="816864" cy="146304"/>
+          </a:xfrm>
+          <a:prstGeom prst="rect">
+            <a:avLst/>
+          </a:prstGeom>
+          <a:noFill/>
+          <a:ln/>
+        </p:spPr>
+        <p:txBody>
+          <a:bodyPr wrap="square" lIns="0" tIns="0" rIns="0" bIns="0" rtlCol="0" anchor="ctr">
             <a:normAutofit/>
           </a:bodyPr>
           <a:lstStyle/>
           <a:p>
-            <a:pPr indent="0" marL="0">
-              <a:buNone/>
-            </a:pPr>
-            <a:r>
-              <a:rPr lang="en-US" sz="1220" dirty="0">
-                <a:solidFill>
-                  <a:srgbClr val="17364A"/>
-                </a:solidFill>
-                <a:latin typeface="Aptos" pitchFamily="34" charset="0"/>
-                <a:ea typeface="Aptos" pitchFamily="34" charset="-122"/>
-                <a:cs typeface="Aptos" pitchFamily="34" charset="-120"/>
-              </a:rPr>
-              <a:t>Public health AI may be affected by health privacy rules, state.</a:t>
-            </a:r>
-            <a:endParaRPr lang="en-US" sz="1220" dirty="0"/>
-          </a:p>
-          <a:p>
-            <a:pPr indent="0" marL="0">
-              <a:buNone/>
-            </a:pPr>
-            <a:r>
-              <a:rPr lang="en-US" sz="1220" dirty="0">
-                <a:solidFill>
-                  <a:srgbClr val="17364A"/>
-                </a:solidFill>
-                <a:latin typeface="Aptos" pitchFamily="34" charset="0"/>
-                <a:ea typeface="Aptos" pitchFamily="34" charset="-122"/>
-                <a:cs typeface="Aptos" pitchFamily="34" charset="-120"/>
-              </a:rPr>
-              <a:t>Agencies should distinguish between different levels of authority.</a:t>
-            </a:r>
-            <a:endParaRPr lang="en-US" sz="1220" dirty="0"/>
-          </a:p>
-          <a:p>
-            <a:pPr indent="0" marL="0">
-              <a:buNone/>
-            </a:pPr>
-            <a:r>
-              <a:rPr lang="en-US" sz="1220" dirty="0">
-                <a:solidFill>
-                  <a:srgbClr val="17364A"/>
-                </a:solidFill>
-                <a:latin typeface="Aptos" pitchFamily="34" charset="0"/>
-                <a:ea typeface="Aptos" pitchFamily="34" charset="-122"/>
-                <a:cs typeface="Aptos" pitchFamily="34" charset="-120"/>
-              </a:rPr>
-              <a:t>A statute, regulation, contract clause, grant requirement,.</a:t>
-            </a:r>
-            <a:endParaRPr lang="en-US" sz="1220" dirty="0"/>
-          </a:p>
-        </p:txBody>
-      </p:sp>
-      <p:sp>
-        <p:nvSpPr>
-          <p:cNvPr id="16" name="Shape 14"/>
-          <p:cNvSpPr/>
-          <p:nvPr/>
-        </p:nvSpPr>
-        <p:spPr>
-          <a:xfrm>
-            <a:off x="7635240" y="4498848"/>
-            <a:ext cx="3474720" cy="1143000"/>
+            <a:pPr algn="ctr" indent="0" marL="0">
+              <a:buNone/>
+            </a:pPr>
+            <a:r>
+              <a:rPr lang="en-US" sz="880" b="1" dirty="0">
+                <a:solidFill>
+                  <a:srgbClr val="FFFFFF"/>
+                </a:solidFill>
+                <a:latin typeface="Aptos" pitchFamily="34" charset="0"/>
+                <a:ea typeface="Aptos" pitchFamily="34" charset="-122"/>
+                <a:cs typeface="Aptos" pitchFamily="34" charset="-120"/>
+              </a:rPr>
+              <a:t>Submit</a:t>
+            </a:r>
+            <a:endParaRPr lang="en-US" sz="880" dirty="0"/>
+          </a:p>
+        </p:txBody>
+      </p:sp>
+      <p:sp>
+        <p:nvSpPr>
+          <p:cNvPr id="18" name="Shape 16"/>
+          <p:cNvSpPr/>
+          <p:nvPr/>
+        </p:nvSpPr>
+        <p:spPr>
+          <a:xfrm>
+            <a:off x="9817608" y="3399739"/>
+            <a:ext cx="164592" cy="0"/>
+          </a:xfrm>
+          <a:prstGeom prst="line">
+            <a:avLst/>
+          </a:prstGeom>
+          <a:noFill/>
+          <a:ln w="15240">
+            <a:solidFill>
+              <a:srgbClr val="8ABBD8"/>
+            </a:solidFill>
+            <a:prstDash val="solid"/>
+          </a:ln>
+        </p:spPr>
+      </p:sp>
+      <p:sp>
+        <p:nvSpPr>
+          <p:cNvPr id="19" name="Shape 17"/>
+          <p:cNvSpPr/>
+          <p:nvPr/>
+        </p:nvSpPr>
+        <p:spPr>
+          <a:xfrm>
+            <a:off x="8927592" y="3248863"/>
+            <a:ext cx="890016" cy="301752"/>
           </a:xfrm>
           <a:prstGeom prst="roundRect">
             <a:avLst>
-              <a:gd name="adj" fmla="val 9600"/>
+              <a:gd name="adj" fmla="val 24242"/>
+            </a:avLst>
+          </a:prstGeom>
+          <a:solidFill>
+            <a:srgbClr val="2F8A28"/>
+          </a:solidFill>
+          <a:ln w="12700">
+            <a:solidFill>
+              <a:srgbClr val="2F8A28"/>
+            </a:solidFill>
+            <a:prstDash val="solid"/>
+          </a:ln>
+        </p:spPr>
+      </p:sp>
+      <p:sp>
+        <p:nvSpPr>
+          <p:cNvPr id="20" name="Text 18"/>
+          <p:cNvSpPr/>
+          <p:nvPr/>
+        </p:nvSpPr>
+        <p:spPr>
+          <a:xfrm>
+            <a:off x="8964168" y="3322015"/>
+            <a:ext cx="816864" cy="146304"/>
+          </a:xfrm>
+          <a:prstGeom prst="rect">
+            <a:avLst/>
+          </a:prstGeom>
+          <a:noFill/>
+          <a:ln/>
+        </p:spPr>
+        <p:txBody>
+          <a:bodyPr wrap="square" lIns="0" tIns="0" rIns="0" bIns="0" rtlCol="0" anchor="ctr">
+            <a:normAutofit/>
+          </a:bodyPr>
+          <a:lstStyle/>
+          <a:p>
+            <a:pPr algn="ctr" indent="0" marL="0">
+              <a:buNone/>
+            </a:pPr>
+            <a:r>
+              <a:rPr lang="en-US" sz="880" b="1" dirty="0">
+                <a:solidFill>
+                  <a:srgbClr val="FFFFFF"/>
+                </a:solidFill>
+                <a:latin typeface="Aptos" pitchFamily="34" charset="0"/>
+                <a:ea typeface="Aptos" pitchFamily="34" charset="-122"/>
+                <a:cs typeface="Aptos" pitchFamily="34" charset="-120"/>
+              </a:rPr>
+              <a:t>Review</a:t>
+            </a:r>
+            <a:endParaRPr lang="en-US" sz="880" dirty="0"/>
+          </a:p>
+        </p:txBody>
+      </p:sp>
+      <p:sp>
+        <p:nvSpPr>
+          <p:cNvPr id="21" name="Shape 19"/>
+          <p:cNvSpPr/>
+          <p:nvPr/>
+        </p:nvSpPr>
+        <p:spPr>
+          <a:xfrm>
+            <a:off x="9982200" y="3248863"/>
+            <a:ext cx="890016" cy="301752"/>
+          </a:xfrm>
+          <a:prstGeom prst="roundRect">
+            <a:avLst>
+              <a:gd name="adj" fmla="val 24242"/>
+            </a:avLst>
+          </a:prstGeom>
+          <a:solidFill>
+            <a:srgbClr val="6A4CA3"/>
+          </a:solidFill>
+          <a:ln w="12700">
+            <a:solidFill>
+              <a:srgbClr val="6A4CA3"/>
+            </a:solidFill>
+            <a:prstDash val="solid"/>
+          </a:ln>
+        </p:spPr>
+      </p:sp>
+      <p:sp>
+        <p:nvSpPr>
+          <p:cNvPr id="22" name="Text 20"/>
+          <p:cNvSpPr/>
+          <p:nvPr/>
+        </p:nvSpPr>
+        <p:spPr>
+          <a:xfrm>
+            <a:off x="10018776" y="3322015"/>
+            <a:ext cx="816864" cy="146304"/>
+          </a:xfrm>
+          <a:prstGeom prst="rect">
+            <a:avLst/>
+          </a:prstGeom>
+          <a:noFill/>
+          <a:ln/>
+        </p:spPr>
+        <p:txBody>
+          <a:bodyPr wrap="square" lIns="0" tIns="0" rIns="0" bIns="0" rtlCol="0" anchor="ctr">
+            <a:normAutofit/>
+          </a:bodyPr>
+          <a:lstStyle/>
+          <a:p>
+            <a:pPr algn="ctr" indent="0" marL="0">
+              <a:buNone/>
+            </a:pPr>
+            <a:r>
+              <a:rPr lang="en-US" sz="880" b="1" dirty="0">
+                <a:solidFill>
+                  <a:srgbClr val="FFFFFF"/>
+                </a:solidFill>
+                <a:latin typeface="Aptos" pitchFamily="34" charset="0"/>
+                <a:ea typeface="Aptos" pitchFamily="34" charset="-122"/>
+                <a:cs typeface="Aptos" pitchFamily="34" charset="-120"/>
+              </a:rPr>
+              <a:t>Oversee</a:t>
+            </a:r>
+            <a:endParaRPr lang="en-US" sz="880" dirty="0"/>
+          </a:p>
+        </p:txBody>
+      </p:sp>
+      <p:sp>
+        <p:nvSpPr>
+          <p:cNvPr id="23" name="Text 21"/>
+          <p:cNvSpPr/>
+          <p:nvPr/>
+        </p:nvSpPr>
+        <p:spPr>
+          <a:xfrm>
+            <a:off x="7854696" y="3742639"/>
+            <a:ext cx="3035808" cy="158191"/>
+          </a:xfrm>
+          <a:prstGeom prst="rect">
+            <a:avLst/>
+          </a:prstGeom>
+          <a:noFill/>
+          <a:ln/>
+        </p:spPr>
+        <p:txBody>
+          <a:bodyPr wrap="square" lIns="254" tIns="254" rIns="254" bIns="254" rtlCol="0" anchor="t">
+            <a:normAutofit/>
+          </a:bodyPr>
+          <a:lstStyle/>
+          <a:p>
+            <a:pPr indent="0" marL="0">
+              <a:buNone/>
+            </a:pPr>
+            <a:r>
+              <a:rPr lang="en-US" sz="1120" dirty="0">
+                <a:solidFill>
+                  <a:srgbClr val="17364A"/>
+                </a:solidFill>
+                <a:latin typeface="Aptos" pitchFamily="34" charset="0"/>
+                <a:ea typeface="Aptos" pitchFamily="34" charset="-122"/>
+                <a:cs typeface="Aptos" pitchFamily="34" charset="-120"/>
+              </a:rPr>
+              <a:t>A proposed AI use should move through documented review before it becomes an operational workflow.</a:t>
+            </a:r>
+            <a:endParaRPr lang="en-US" sz="1120" dirty="0"/>
+          </a:p>
+        </p:txBody>
+      </p:sp>
+      <p:sp>
+        <p:nvSpPr>
+          <p:cNvPr id="24" name="Shape 22"/>
+          <p:cNvSpPr/>
+          <p:nvPr/>
+        </p:nvSpPr>
+        <p:spPr>
+          <a:xfrm>
+            <a:off x="7635240" y="4184294"/>
+            <a:ext cx="3474720" cy="1466698"/>
+          </a:xfrm>
+          <a:prstGeom prst="roundRect">
+            <a:avLst>
+              <a:gd name="adj" fmla="val 7481"/>
             </a:avLst>
           </a:prstGeom>
           <a:solidFill>
@@ -18196,13 +18844,13 @@
       </p:sp>
       <p:sp>
         <p:nvSpPr>
-          <p:cNvPr id="17" name="Text 15"/>
-          <p:cNvSpPr/>
-          <p:nvPr/>
-        </p:nvSpPr>
-        <p:spPr>
-          <a:xfrm>
-            <a:off x="7799832" y="4645152"/>
+          <p:cNvPr id="25" name="Text 23"/>
+          <p:cNvSpPr/>
+          <p:nvPr/>
+        </p:nvSpPr>
+        <p:spPr>
+          <a:xfrm>
+            <a:off x="7799832" y="4330598"/>
             <a:ext cx="3145536" cy="256032"/>
           </a:xfrm>
           <a:prstGeom prst="rect">
@@ -18235,14 +18883,14 @@
       </p:sp>
       <p:sp>
         <p:nvSpPr>
-          <p:cNvPr id="18" name="Text 16"/>
-          <p:cNvSpPr/>
-          <p:nvPr/>
-        </p:nvSpPr>
-        <p:spPr>
-          <a:xfrm>
-            <a:off x="7799832" y="4974336"/>
-            <a:ext cx="3145536" cy="576072"/>
+          <p:cNvPr id="26" name="Text 24"/>
+          <p:cNvSpPr/>
+          <p:nvPr/>
+        </p:nvSpPr>
+        <p:spPr>
+          <a:xfrm>
+            <a:off x="7799832" y="4659782"/>
+            <a:ext cx="3145536" cy="899770"/>
           </a:xfrm>
           <a:prstGeom prst="rect">
             <a:avLst/>
@@ -18268,7 +18916,7 @@
                 <a:ea typeface="Aptos" pitchFamily="34" charset="-122"/>
                 <a:cs typeface="Aptos" pitchFamily="34" charset="-120"/>
               </a:rPr>
-              <a:t>Translate this concept into clear decision rights, review steps, documentation expectations, and escalation paths before.</a:t>
+              <a:t>Translate this concept into clear decision rights, review steps, documentation expectations, and escalation paths before an AI-supported workflow is approved.</a:t>
             </a:r>
             <a:endParaRPr lang="en-US" sz="1320" dirty="0"/>
           </a:p>

--- a/downloads/presentations/modules/pol-300.pptx
+++ b/downloads/presentations/modules/pol-300.pptx
@@ -3437,8 +3437,8 @@
         </p:nvSpPr>
         <p:spPr>
           <a:xfrm>
-            <a:off x="868680" y="1508760"/>
-            <a:ext cx="6309360" cy="4160520"/>
+            <a:off x="822960" y="1463040"/>
+            <a:ext cx="6565392" cy="4343400"/>
           </a:xfrm>
           <a:prstGeom prst="rect">
             <a:avLst/>
@@ -3456,7 +3456,7 @@
               <a:buNone/>
             </a:pPr>
             <a:r>
-              <a:rPr lang="en-US" sz="2100" dirty="0">
+              <a:rPr lang="en-US" sz="1920" dirty="0">
                 <a:solidFill>
                   <a:srgbClr val="003A63"/>
                 </a:solidFill>
@@ -3466,14 +3466,14 @@
               </a:rPr>
               <a:t>• Regulatory readiness also requires change management.</a:t>
             </a:r>
-            <a:endParaRPr lang="en-US" sz="2100" dirty="0"/>
-          </a:p>
-          <a:p>
-            <a:pPr indent="0" marL="0">
-              <a:buNone/>
-            </a:pPr>
-            <a:r>
-              <a:rPr lang="en-US" sz="2100" dirty="0">
+            <a:endParaRPr lang="en-US" sz="1920" dirty="0"/>
+          </a:p>
+          <a:p>
+            <a:pPr indent="0" marL="0">
+              <a:buNone/>
+            </a:pPr>
+            <a:r>
+              <a:rPr lang="en-US" sz="1920" dirty="0">
                 <a:solidFill>
                   <a:srgbClr val="003A63"/>
                 </a:solidFill>
@@ -3481,16 +3481,16 @@
                 <a:ea typeface="Aptos" pitchFamily="34" charset="-122"/>
                 <a:cs typeface="Aptos" pitchFamily="34" charset="-120"/>
               </a:rPr>
-              <a:t>• When policy requirements change, the agency may need to update SOPs, procurement language,.</a:t>
-            </a:r>
-            <a:endParaRPr lang="en-US" sz="2100" dirty="0"/>
-          </a:p>
-          <a:p>
-            <a:pPr indent="0" marL="0">
-              <a:buNone/>
-            </a:pPr>
-            <a:r>
-              <a:rPr lang="en-US" sz="2100" dirty="0">
+              <a:t>• When policy requirements change, the agency may need to update SOPs,.</a:t>
+            </a:r>
+            <a:endParaRPr lang="en-US" sz="1920" dirty="0"/>
+          </a:p>
+          <a:p>
+            <a:pPr indent="0" marL="0">
+              <a:buNone/>
+            </a:pPr>
+            <a:r>
+              <a:rPr lang="en-US" sz="1920" dirty="0">
                 <a:solidFill>
                   <a:srgbClr val="003A63"/>
                 </a:solidFill>
@@ -3498,9 +3498,9 @@
                 <a:ea typeface="Aptos" pitchFamily="34" charset="-122"/>
                 <a:cs typeface="Aptos" pitchFamily="34" charset="-120"/>
               </a:rPr>
-              <a:t>• A policy update is not complete until it has been translated into operational practice.</a:t>
-            </a:r>
-            <a:endParaRPr lang="en-US" sz="2100" dirty="0"/>
+              <a:t>• A policy update is not complete until it has been translated into.</a:t>
+            </a:r>
+            <a:endParaRPr lang="en-US" sz="1920" dirty="0"/>
           </a:p>
         </p:txBody>
       </p:sp>
@@ -3512,12 +3512,12 @@
         </p:nvSpPr>
         <p:spPr>
           <a:xfrm>
-            <a:off x="7635240" y="1325880"/>
-            <a:ext cx="3474720" cy="1207008"/>
+            <a:off x="7543800" y="1325880"/>
+            <a:ext cx="3611880" cy="1261872"/>
           </a:xfrm>
           <a:prstGeom prst="roundRect">
             <a:avLst>
-              <a:gd name="adj" fmla="val 9091"/>
+              <a:gd name="adj" fmla="val 8696"/>
             </a:avLst>
           </a:prstGeom>
           <a:solidFill>
@@ -3539,8 +3539,8 @@
         </p:nvSpPr>
         <p:spPr>
           <a:xfrm>
-            <a:off x="7799832" y="1472184"/>
-            <a:ext cx="3145536" cy="256032"/>
+            <a:off x="7708392" y="1453896"/>
+            <a:ext cx="3282696" cy="228600"/>
           </a:xfrm>
           <a:prstGeom prst="rect">
             <a:avLst/>
@@ -3556,7 +3556,7 @@
               <a:buNone/>
             </a:pPr>
             <a:r>
-              <a:rPr lang="en-US" sz="1300" b="1" dirty="0">
+              <a:rPr lang="en-US" sz="1220" b="1" dirty="0">
                 <a:solidFill>
                   <a:srgbClr val="0068B7"/>
                 </a:solidFill>
@@ -3566,7 +3566,7 @@
               </a:rPr>
               <a:t>Governance lens</a:t>
             </a:r>
-            <a:endParaRPr lang="en-US" sz="1300" dirty="0"/>
+            <a:endParaRPr lang="en-US" sz="1220" dirty="0"/>
           </a:p>
         </p:txBody>
       </p:sp>
@@ -3578,8 +3578,8 @@
         </p:nvSpPr>
         <p:spPr>
           <a:xfrm>
-            <a:off x="7799832" y="1801368"/>
-            <a:ext cx="3145536" cy="640080"/>
+            <a:off x="7708392" y="1764792"/>
+            <a:ext cx="3282696" cy="749808"/>
           </a:xfrm>
           <a:prstGeom prst="rect">
             <a:avLst/>
@@ -3597,7 +3597,7 @@
               <a:buNone/>
             </a:pPr>
             <a:r>
-              <a:rPr lang="en-US" sz="1320" dirty="0">
+              <a:rPr lang="en-US" sz="1220" dirty="0">
                 <a:solidFill>
                   <a:srgbClr val="17364A"/>
                 </a:solidFill>
@@ -3607,7 +3607,7 @@
               </a:rPr>
               <a:t>Regulatory readiness also requires change management.</a:t>
             </a:r>
-            <a:endParaRPr lang="en-US" sz="1320" dirty="0"/>
+            <a:endParaRPr lang="en-US" sz="1220" dirty="0"/>
           </a:p>
         </p:txBody>
       </p:sp>
@@ -3619,12 +3619,12 @@
         </p:nvSpPr>
         <p:spPr>
           <a:xfrm>
-            <a:off x="7635240" y="2670048"/>
-            <a:ext cx="3474720" cy="1377086"/>
+            <a:off x="7543800" y="2724912"/>
+            <a:ext cx="3611880" cy="1527048"/>
           </a:xfrm>
           <a:prstGeom prst="roundRect">
             <a:avLst>
-              <a:gd name="adj" fmla="val 7968"/>
+              <a:gd name="adj" fmla="val 7186"/>
             </a:avLst>
           </a:prstGeom>
           <a:solidFill>
@@ -3646,8 +3646,8 @@
         </p:nvSpPr>
         <p:spPr>
           <a:xfrm>
-            <a:off x="7799832" y="2816352"/>
-            <a:ext cx="3145536" cy="256032"/>
+            <a:off x="7708392" y="2852928"/>
+            <a:ext cx="3282696" cy="228600"/>
           </a:xfrm>
           <a:prstGeom prst="rect">
             <a:avLst/>
@@ -3663,7 +3663,7 @@
               <a:buNone/>
             </a:pPr>
             <a:r>
-              <a:rPr lang="en-US" sz="1300" b="1" dirty="0">
+              <a:rPr lang="en-US" sz="1220" b="1" dirty="0">
                 <a:solidFill>
                   <a:srgbClr val="0068B7"/>
                 </a:solidFill>
@@ -3673,7 +3673,7 @@
               </a:rPr>
               <a:t>Concept checkpoints</a:t>
             </a:r>
-            <a:endParaRPr lang="en-US" sz="1300" dirty="0"/>
+            <a:endParaRPr lang="en-US" sz="1220" dirty="0"/>
           </a:p>
         </p:txBody>
       </p:sp>
@@ -3685,8 +3685,8 @@
         </p:nvSpPr>
         <p:spPr>
           <a:xfrm>
-            <a:off x="7818120" y="3182112"/>
-            <a:ext cx="3090672" cy="718718"/>
+            <a:off x="7726680" y="3182112"/>
+            <a:ext cx="3227832" cy="960120"/>
           </a:xfrm>
           <a:prstGeom prst="rect">
             <a:avLst/>
@@ -3704,7 +3704,7 @@
               <a:buNone/>
             </a:pPr>
             <a:r>
-              <a:rPr lang="en-US" sz="1220" dirty="0">
+              <a:rPr lang="en-US" sz="1140" dirty="0">
                 <a:solidFill>
                   <a:srgbClr val="17364A"/>
                 </a:solidFill>
@@ -3712,16 +3712,16 @@
                 <a:ea typeface="Aptos" pitchFamily="34" charset="-122"/>
                 <a:cs typeface="Aptos" pitchFamily="34" charset="-120"/>
               </a:rPr>
-              <a:t>Regulatory readiness also requires change management.</a:t>
-            </a:r>
-            <a:endParaRPr lang="en-US" sz="1220" dirty="0"/>
-          </a:p>
-          <a:p>
-            <a:pPr indent="0" marL="0">
-              <a:buNone/>
-            </a:pPr>
-            <a:r>
-              <a:rPr lang="en-US" sz="1220" dirty="0">
+              <a:t>Regulatory readiness also requires change.</a:t>
+            </a:r>
+            <a:endParaRPr lang="en-US" sz="1140" dirty="0"/>
+          </a:p>
+          <a:p>
+            <a:pPr indent="0" marL="0">
+              <a:buNone/>
+            </a:pPr>
+            <a:r>
+              <a:rPr lang="en-US" sz="1140" dirty="0">
                 <a:solidFill>
                   <a:srgbClr val="17364A"/>
                 </a:solidFill>
@@ -3729,16 +3729,16 @@
                 <a:ea typeface="Aptos" pitchFamily="34" charset="-122"/>
                 <a:cs typeface="Aptos" pitchFamily="34" charset="-120"/>
               </a:rPr>
-              <a:t>When policy requirements change, the agency may need to update.</a:t>
-            </a:r>
-            <a:endParaRPr lang="en-US" sz="1220" dirty="0"/>
-          </a:p>
-          <a:p>
-            <a:pPr indent="0" marL="0">
-              <a:buNone/>
-            </a:pPr>
-            <a:r>
-              <a:rPr lang="en-US" sz="1220" dirty="0">
+              <a:t>When policy requirements change, the agency may.</a:t>
+            </a:r>
+            <a:endParaRPr lang="en-US" sz="1140" dirty="0"/>
+          </a:p>
+          <a:p>
+            <a:pPr indent="0" marL="0">
+              <a:buNone/>
+            </a:pPr>
+            <a:r>
+              <a:rPr lang="en-US" sz="1140" dirty="0">
                 <a:solidFill>
                   <a:srgbClr val="17364A"/>
                 </a:solidFill>
@@ -3746,9 +3746,9 @@
                 <a:ea typeface="Aptos" pitchFamily="34" charset="-122"/>
                 <a:cs typeface="Aptos" pitchFamily="34" charset="-120"/>
               </a:rPr>
-              <a:t>A policy update is not complete until it has been translated into.</a:t>
-            </a:r>
-            <a:endParaRPr lang="en-US" sz="1220" dirty="0"/>
+              <a:t>A policy update is not complete until it has been.</a:t>
+            </a:r>
+            <a:endParaRPr lang="en-US" sz="1140" dirty="0"/>
           </a:p>
         </p:txBody>
       </p:sp>
@@ -3760,12 +3760,12 @@
         </p:nvSpPr>
         <p:spPr>
           <a:xfrm>
-            <a:off x="7635240" y="4184294"/>
-            <a:ext cx="3474720" cy="1466698"/>
+            <a:off x="7543800" y="4389120"/>
+            <a:ext cx="3611880" cy="1261872"/>
           </a:xfrm>
           <a:prstGeom prst="roundRect">
             <a:avLst>
-              <a:gd name="adj" fmla="val 7481"/>
+              <a:gd name="adj" fmla="val 8696"/>
             </a:avLst>
           </a:prstGeom>
           <a:solidFill>
@@ -3787,8 +3787,8 @@
         </p:nvSpPr>
         <p:spPr>
           <a:xfrm>
-            <a:off x="7799832" y="4330598"/>
-            <a:ext cx="3145536" cy="256032"/>
+            <a:off x="7708392" y="4517136"/>
+            <a:ext cx="3282696" cy="228600"/>
           </a:xfrm>
           <a:prstGeom prst="rect">
             <a:avLst/>
@@ -3804,7 +3804,7 @@
               <a:buNone/>
             </a:pPr>
             <a:r>
-              <a:rPr lang="en-US" sz="1300" b="1" dirty="0">
+              <a:rPr lang="en-US" sz="1220" b="1" dirty="0">
                 <a:solidFill>
                   <a:srgbClr val="0068B7"/>
                 </a:solidFill>
@@ -3814,7 +3814,7 @@
               </a:rPr>
               <a:t>What to document</a:t>
             </a:r>
-            <a:endParaRPr lang="en-US" sz="1300" dirty="0"/>
+            <a:endParaRPr lang="en-US" sz="1220" dirty="0"/>
           </a:p>
         </p:txBody>
       </p:sp>
@@ -3826,8 +3826,8 @@
         </p:nvSpPr>
         <p:spPr>
           <a:xfrm>
-            <a:off x="7799832" y="4659782"/>
-            <a:ext cx="3145536" cy="899770"/>
+            <a:off x="7708392" y="4828032"/>
+            <a:ext cx="3282696" cy="749808"/>
           </a:xfrm>
           <a:prstGeom prst="rect">
             <a:avLst/>
@@ -3845,7 +3845,7 @@
               <a:buNone/>
             </a:pPr>
             <a:r>
-              <a:rPr lang="en-US" sz="1320" dirty="0">
+              <a:rPr lang="en-US" sz="1220" dirty="0">
                 <a:solidFill>
                   <a:srgbClr val="17364A"/>
                 </a:solidFill>
@@ -3853,9 +3853,9 @@
                 <a:ea typeface="Aptos" pitchFamily="34" charset="-122"/>
                 <a:cs typeface="Aptos" pitchFamily="34" charset="-120"/>
               </a:rPr>
-              <a:t>Translate this concept into clear decision rights, review steps, documentation expectations, and escalation paths before an AI-supported workflow is approved.</a:t>
-            </a:r>
-            <a:endParaRPr lang="en-US" sz="1320" dirty="0"/>
+              <a:t>Translate this concept into clear decision rights, review steps, documentation.</a:t>
+            </a:r>
+            <a:endParaRPr lang="en-US" sz="1220" dirty="0"/>
           </a:p>
         </p:txBody>
       </p:sp>
@@ -4146,8 +4146,8 @@
         </p:nvSpPr>
         <p:spPr>
           <a:xfrm>
-            <a:off x="868680" y="1508760"/>
-            <a:ext cx="6309360" cy="4160520"/>
+            <a:off x="822960" y="1463040"/>
+            <a:ext cx="6565392" cy="4343400"/>
           </a:xfrm>
           <a:prstGeom prst="rect">
             <a:avLst/>
@@ -4165,7 +4165,7 @@
               <a:buNone/>
             </a:pPr>
             <a:r>
-              <a:rPr lang="en-US" sz="2100" dirty="0">
+              <a:rPr lang="en-US" sz="1920" dirty="0">
                 <a:solidFill>
                   <a:srgbClr val="003A63"/>
                 </a:solidFill>
@@ -4175,14 +4175,14 @@
               </a:rPr>
               <a:t>• Risks and failure modes include the following:</a:t>
             </a:r>
-            <a:endParaRPr lang="en-US" sz="2100" dirty="0"/>
-          </a:p>
-          <a:p>
-            <a:pPr indent="0" marL="0">
-              <a:buNone/>
-            </a:pPr>
-            <a:r>
-              <a:rPr lang="en-US" sz="2100" dirty="0">
+            <a:endParaRPr lang="en-US" sz="1920" dirty="0"/>
+          </a:p>
+          <a:p>
+            <a:pPr indent="0" marL="0">
+              <a:buNone/>
+            </a:pPr>
+            <a:r>
+              <a:rPr lang="en-US" sz="1920" dirty="0">
                 <a:solidFill>
                   <a:srgbClr val="003A63"/>
                 </a:solidFill>
@@ -4192,14 +4192,14 @@
               </a:rPr>
               <a:t>• Assuming there is no policy risk because there is no single AI statute.</a:t>
             </a:r>
-            <a:endParaRPr lang="en-US" sz="2100" dirty="0"/>
-          </a:p>
-          <a:p>
-            <a:pPr indent="0" marL="0">
-              <a:buNone/>
-            </a:pPr>
-            <a:r>
-              <a:rPr lang="en-US" sz="2100" dirty="0">
+            <a:endParaRPr lang="en-US" sz="1920" dirty="0"/>
+          </a:p>
+          <a:p>
+            <a:pPr indent="0" marL="0">
+              <a:buNone/>
+            </a:pPr>
+            <a:r>
+              <a:rPr lang="en-US" sz="1920" dirty="0">
                 <a:solidFill>
                   <a:srgbClr val="003A63"/>
                 </a:solidFill>
@@ -4207,9 +4207,9 @@
                 <a:ea typeface="Aptos" pitchFamily="34" charset="-122"/>
                 <a:cs typeface="Aptos" pitchFamily="34" charset="-120"/>
               </a:rPr>
-              <a:t>• Treating nonbinding guidance as irrelevant even when it reflects expected practice.</a:t>
-            </a:r>
-            <a:endParaRPr lang="en-US" sz="2100" dirty="0"/>
+              <a:t>• Treating nonbinding guidance as irrelevant even when it reflects expected.</a:t>
+            </a:r>
+            <a:endParaRPr lang="en-US" sz="1920" dirty="0"/>
           </a:p>
         </p:txBody>
       </p:sp>
@@ -4221,12 +4221,12 @@
         </p:nvSpPr>
         <p:spPr>
           <a:xfrm>
-            <a:off x="7635240" y="1325880"/>
-            <a:ext cx="3474720" cy="1207008"/>
+            <a:off x="7543800" y="1325880"/>
+            <a:ext cx="3611880" cy="1261872"/>
           </a:xfrm>
           <a:prstGeom prst="roundRect">
             <a:avLst>
-              <a:gd name="adj" fmla="val 9091"/>
+              <a:gd name="adj" fmla="val 8696"/>
             </a:avLst>
           </a:prstGeom>
           <a:solidFill>
@@ -4248,8 +4248,8 @@
         </p:nvSpPr>
         <p:spPr>
           <a:xfrm>
-            <a:off x="7799832" y="1472184"/>
-            <a:ext cx="3145536" cy="256032"/>
+            <a:off x="7708392" y="1453896"/>
+            <a:ext cx="3282696" cy="228600"/>
           </a:xfrm>
           <a:prstGeom prst="rect">
             <a:avLst/>
@@ -4265,7 +4265,7 @@
               <a:buNone/>
             </a:pPr>
             <a:r>
-              <a:rPr lang="en-US" sz="1300" b="1" dirty="0">
+              <a:rPr lang="en-US" sz="1220" b="1" dirty="0">
                 <a:solidFill>
                   <a:srgbClr val="0068B7"/>
                 </a:solidFill>
@@ -4275,7 +4275,7 @@
               </a:rPr>
               <a:t>Governance lens</a:t>
             </a:r>
-            <a:endParaRPr lang="en-US" sz="1300" dirty="0"/>
+            <a:endParaRPr lang="en-US" sz="1220" dirty="0"/>
           </a:p>
         </p:txBody>
       </p:sp>
@@ -4287,8 +4287,8 @@
         </p:nvSpPr>
         <p:spPr>
           <a:xfrm>
-            <a:off x="7799832" y="1801368"/>
-            <a:ext cx="3145536" cy="640080"/>
+            <a:off x="7708392" y="1764792"/>
+            <a:ext cx="3282696" cy="749808"/>
           </a:xfrm>
           <a:prstGeom prst="rect">
             <a:avLst/>
@@ -4306,7 +4306,7 @@
               <a:buNone/>
             </a:pPr>
             <a:r>
-              <a:rPr lang="en-US" sz="1320" dirty="0">
+              <a:rPr lang="en-US" sz="1220" dirty="0">
                 <a:solidFill>
                   <a:srgbClr val="17364A"/>
                 </a:solidFill>
@@ -4316,7 +4316,7 @@
               </a:rPr>
               <a:t>Risks and failure modes include the following:</a:t>
             </a:r>
-            <a:endParaRPr lang="en-US" sz="1320" dirty="0"/>
+            <a:endParaRPr lang="en-US" sz="1220" dirty="0"/>
           </a:p>
         </p:txBody>
       </p:sp>
@@ -4328,12 +4328,12 @@
         </p:nvSpPr>
         <p:spPr>
           <a:xfrm>
-            <a:off x="7635240" y="2670048"/>
-            <a:ext cx="3474720" cy="1377086"/>
+            <a:off x="7543800" y="2724912"/>
+            <a:ext cx="3611880" cy="1527048"/>
           </a:xfrm>
           <a:prstGeom prst="roundRect">
             <a:avLst>
-              <a:gd name="adj" fmla="val 7968"/>
+              <a:gd name="adj" fmla="val 7186"/>
             </a:avLst>
           </a:prstGeom>
           <a:solidFill>
@@ -4355,8 +4355,8 @@
         </p:nvSpPr>
         <p:spPr>
           <a:xfrm>
-            <a:off x="7799832" y="2816352"/>
-            <a:ext cx="3145536" cy="256032"/>
+            <a:off x="7708392" y="2852928"/>
+            <a:ext cx="3282696" cy="228600"/>
           </a:xfrm>
           <a:prstGeom prst="rect">
             <a:avLst/>
@@ -4372,7 +4372,7 @@
               <a:buNone/>
             </a:pPr>
             <a:r>
-              <a:rPr lang="en-US" sz="1300" b="1" dirty="0">
+              <a:rPr lang="en-US" sz="1220" b="1" dirty="0">
                 <a:solidFill>
                   <a:srgbClr val="0068B7"/>
                 </a:solidFill>
@@ -4382,7 +4382,7 @@
               </a:rPr>
               <a:t>Concept checkpoints</a:t>
             </a:r>
-            <a:endParaRPr lang="en-US" sz="1300" dirty="0"/>
+            <a:endParaRPr lang="en-US" sz="1220" dirty="0"/>
           </a:p>
         </p:txBody>
       </p:sp>
@@ -4394,8 +4394,8 @@
         </p:nvSpPr>
         <p:spPr>
           <a:xfrm>
-            <a:off x="7818120" y="3182112"/>
-            <a:ext cx="3090672" cy="718718"/>
+            <a:off x="7726680" y="3182112"/>
+            <a:ext cx="3227832" cy="960120"/>
           </a:xfrm>
           <a:prstGeom prst="rect">
             <a:avLst/>
@@ -4413,7 +4413,7 @@
               <a:buNone/>
             </a:pPr>
             <a:r>
-              <a:rPr lang="en-US" sz="1220" dirty="0">
+              <a:rPr lang="en-US" sz="1140" dirty="0">
                 <a:solidFill>
                   <a:srgbClr val="17364A"/>
                 </a:solidFill>
@@ -4423,14 +4423,14 @@
               </a:rPr>
               <a:t>Risks and failure modes include the following:</a:t>
             </a:r>
-            <a:endParaRPr lang="en-US" sz="1220" dirty="0"/>
-          </a:p>
-          <a:p>
-            <a:pPr indent="0" marL="0">
-              <a:buNone/>
-            </a:pPr>
-            <a:r>
-              <a:rPr lang="en-US" sz="1220" dirty="0">
+            <a:endParaRPr lang="en-US" sz="1140" dirty="0"/>
+          </a:p>
+          <a:p>
+            <a:pPr indent="0" marL="0">
+              <a:buNone/>
+            </a:pPr>
+            <a:r>
+              <a:rPr lang="en-US" sz="1140" dirty="0">
                 <a:solidFill>
                   <a:srgbClr val="17364A"/>
                 </a:solidFill>
@@ -4438,16 +4438,16 @@
                 <a:ea typeface="Aptos" pitchFamily="34" charset="-122"/>
                 <a:cs typeface="Aptos" pitchFamily="34" charset="-120"/>
               </a:rPr>
-              <a:t>Assuming there is no policy risk because there is no single AI.</a:t>
-            </a:r>
-            <a:endParaRPr lang="en-US" sz="1220" dirty="0"/>
-          </a:p>
-          <a:p>
-            <a:pPr indent="0" marL="0">
-              <a:buNone/>
-            </a:pPr>
-            <a:r>
-              <a:rPr lang="en-US" sz="1220" dirty="0">
+              <a:t>Assuming there is no policy risk because there is.</a:t>
+            </a:r>
+            <a:endParaRPr lang="en-US" sz="1140" dirty="0"/>
+          </a:p>
+          <a:p>
+            <a:pPr indent="0" marL="0">
+              <a:buNone/>
+            </a:pPr>
+            <a:r>
+              <a:rPr lang="en-US" sz="1140" dirty="0">
                 <a:solidFill>
                   <a:srgbClr val="17364A"/>
                 </a:solidFill>
@@ -4455,9 +4455,9 @@
                 <a:ea typeface="Aptos" pitchFamily="34" charset="-122"/>
                 <a:cs typeface="Aptos" pitchFamily="34" charset="-120"/>
               </a:rPr>
-              <a:t>Treating nonbinding guidance as irrelevant even when it reflects.</a:t>
-            </a:r>
-            <a:endParaRPr lang="en-US" sz="1220" dirty="0"/>
+              <a:t>Treating nonbinding guidance as irrelevant even.</a:t>
+            </a:r>
+            <a:endParaRPr lang="en-US" sz="1140" dirty="0"/>
           </a:p>
         </p:txBody>
       </p:sp>
@@ -4469,12 +4469,12 @@
         </p:nvSpPr>
         <p:spPr>
           <a:xfrm>
-            <a:off x="7635240" y="4184294"/>
-            <a:ext cx="3474720" cy="1466698"/>
+            <a:off x="7543800" y="4389120"/>
+            <a:ext cx="3611880" cy="1261872"/>
           </a:xfrm>
           <a:prstGeom prst="roundRect">
             <a:avLst>
-              <a:gd name="adj" fmla="val 7481"/>
+              <a:gd name="adj" fmla="val 8696"/>
             </a:avLst>
           </a:prstGeom>
           <a:solidFill>
@@ -4496,8 +4496,8 @@
         </p:nvSpPr>
         <p:spPr>
           <a:xfrm>
-            <a:off x="7799832" y="4330598"/>
-            <a:ext cx="3145536" cy="256032"/>
+            <a:off x="7708392" y="4517136"/>
+            <a:ext cx="3282696" cy="228600"/>
           </a:xfrm>
           <a:prstGeom prst="rect">
             <a:avLst/>
@@ -4513,7 +4513,7 @@
               <a:buNone/>
             </a:pPr>
             <a:r>
-              <a:rPr lang="en-US" sz="1300" b="1" dirty="0">
+              <a:rPr lang="en-US" sz="1220" b="1" dirty="0">
                 <a:solidFill>
                   <a:srgbClr val="0068B7"/>
                 </a:solidFill>
@@ -4523,7 +4523,7 @@
               </a:rPr>
               <a:t>What to document</a:t>
             </a:r>
-            <a:endParaRPr lang="en-US" sz="1300" dirty="0"/>
+            <a:endParaRPr lang="en-US" sz="1220" dirty="0"/>
           </a:p>
         </p:txBody>
       </p:sp>
@@ -4535,8 +4535,8 @@
         </p:nvSpPr>
         <p:spPr>
           <a:xfrm>
-            <a:off x="7799832" y="4659782"/>
-            <a:ext cx="3145536" cy="899770"/>
+            <a:off x="7708392" y="4828032"/>
+            <a:ext cx="3282696" cy="749808"/>
           </a:xfrm>
           <a:prstGeom prst="rect">
             <a:avLst/>
@@ -4554,7 +4554,7 @@
               <a:buNone/>
             </a:pPr>
             <a:r>
-              <a:rPr lang="en-US" sz="1320" dirty="0">
+              <a:rPr lang="en-US" sz="1220" dirty="0">
                 <a:solidFill>
                   <a:srgbClr val="17364A"/>
                 </a:solidFill>
@@ -4562,9 +4562,9 @@
                 <a:ea typeface="Aptos" pitchFamily="34" charset="-122"/>
                 <a:cs typeface="Aptos" pitchFamily="34" charset="-120"/>
               </a:rPr>
-              <a:t>Translate this concept into clear decision rights, review steps, documentation expectations, and escalation paths before an AI-supported workflow is approved.</a:t>
-            </a:r>
-            <a:endParaRPr lang="en-US" sz="1320" dirty="0"/>
+              <a:t>Translate this concept into clear decision rights, review steps, documentation.</a:t>
+            </a:r>
+            <a:endParaRPr lang="en-US" sz="1220" dirty="0"/>
           </a:p>
         </p:txBody>
       </p:sp>
@@ -4855,8 +4855,8 @@
         </p:nvSpPr>
         <p:spPr>
           <a:xfrm>
-            <a:off x="868680" y="1508760"/>
-            <a:ext cx="6309360" cy="4160520"/>
+            <a:off x="822960" y="1463040"/>
+            <a:ext cx="6565392" cy="4343400"/>
           </a:xfrm>
           <a:prstGeom prst="rect">
             <a:avLst/>
@@ -4874,7 +4874,7 @@
               <a:buNone/>
             </a:pPr>
             <a:r>
-              <a:rPr lang="en-US" sz="2100" dirty="0">
+              <a:rPr lang="en-US" sz="1920" dirty="0">
                 <a:solidFill>
                   <a:srgbClr val="003A63"/>
                 </a:solidFill>
@@ -4882,16 +4882,16 @@
                 <a:ea typeface="Aptos" pitchFamily="34" charset="-122"/>
                 <a:cs typeface="Aptos" pitchFamily="34" charset="-120"/>
               </a:rPr>
-              <a:t>• Failing to update internal policies after legal, procurement, privacy, or cybersecurity changes.</a:t>
-            </a:r>
-            <a:endParaRPr lang="en-US" sz="2100" dirty="0"/>
-          </a:p>
-          <a:p>
-            <a:pPr indent="0" marL="0">
-              <a:buNone/>
-            </a:pPr>
-            <a:r>
-              <a:rPr lang="en-US" sz="2100" dirty="0">
+              <a:t>• Failing to update internal policies after legal, procurement, privacy, or.</a:t>
+            </a:r>
+            <a:endParaRPr lang="en-US" sz="1920" dirty="0"/>
+          </a:p>
+          <a:p>
+            <a:pPr indent="0" marL="0">
+              <a:buNone/>
+            </a:pPr>
+            <a:r>
+              <a:rPr lang="en-US" sz="1920" dirty="0">
                 <a:solidFill>
                   <a:srgbClr val="003A63"/>
                 </a:solidFill>
@@ -4901,14 +4901,14 @@
               </a:rPr>
               <a:t>• Allowing vendors to define compliance obligations without agency review.</a:t>
             </a:r>
-            <a:endParaRPr lang="en-US" sz="2100" dirty="0"/>
-          </a:p>
-          <a:p>
-            <a:pPr indent="0" marL="0">
-              <a:buNone/>
-            </a:pPr>
-            <a:r>
-              <a:rPr lang="en-US" sz="2100" dirty="0">
+            <a:endParaRPr lang="en-US" sz="1920" dirty="0"/>
+          </a:p>
+          <a:p>
+            <a:pPr indent="0" marL="0">
+              <a:buNone/>
+            </a:pPr>
+            <a:r>
+              <a:rPr lang="en-US" sz="1920" dirty="0">
                 <a:solidFill>
                   <a:srgbClr val="003A63"/>
                 </a:solidFill>
@@ -4918,7 +4918,7 @@
               </a:rPr>
               <a:t>• Maintaining policies that are too vague to guide real decisions.</a:t>
             </a:r>
-            <a:endParaRPr lang="en-US" sz="2100" dirty="0"/>
+            <a:endParaRPr lang="en-US" sz="1920" dirty="0"/>
           </a:p>
         </p:txBody>
       </p:sp>
@@ -4930,12 +4930,12 @@
         </p:nvSpPr>
         <p:spPr>
           <a:xfrm>
-            <a:off x="7635240" y="1325880"/>
-            <a:ext cx="3474720" cy="1255471"/>
+            <a:off x="7543800" y="1325880"/>
+            <a:ext cx="3611880" cy="1261872"/>
           </a:xfrm>
           <a:prstGeom prst="roundRect">
             <a:avLst>
-              <a:gd name="adj" fmla="val 8740"/>
+              <a:gd name="adj" fmla="val 8696"/>
             </a:avLst>
           </a:prstGeom>
           <a:solidFill>
@@ -4957,8 +4957,8 @@
         </p:nvSpPr>
         <p:spPr>
           <a:xfrm>
-            <a:off x="7799832" y="1472184"/>
-            <a:ext cx="3145536" cy="256032"/>
+            <a:off x="7708392" y="1453896"/>
+            <a:ext cx="3282696" cy="228600"/>
           </a:xfrm>
           <a:prstGeom prst="rect">
             <a:avLst/>
@@ -4974,7 +4974,7 @@
               <a:buNone/>
             </a:pPr>
             <a:r>
-              <a:rPr lang="en-US" sz="1300" b="1" dirty="0">
+              <a:rPr lang="en-US" sz="1220" b="1" dirty="0">
                 <a:solidFill>
                   <a:srgbClr val="0068B7"/>
                 </a:solidFill>
@@ -4984,7 +4984,7 @@
               </a:rPr>
               <a:t>Governance lens</a:t>
             </a:r>
-            <a:endParaRPr lang="en-US" sz="1300" dirty="0"/>
+            <a:endParaRPr lang="en-US" sz="1220" dirty="0"/>
           </a:p>
         </p:txBody>
       </p:sp>
@@ -4996,8 +4996,8 @@
         </p:nvSpPr>
         <p:spPr>
           <a:xfrm>
-            <a:off x="7799832" y="1801368"/>
-            <a:ext cx="3145536" cy="688543"/>
+            <a:off x="7708392" y="1764792"/>
+            <a:ext cx="3282696" cy="749808"/>
           </a:xfrm>
           <a:prstGeom prst="rect">
             <a:avLst/>
@@ -5015,7 +5015,7 @@
               <a:buNone/>
             </a:pPr>
             <a:r>
-              <a:rPr lang="en-US" sz="1320" dirty="0">
+              <a:rPr lang="en-US" sz="1220" dirty="0">
                 <a:solidFill>
                   <a:srgbClr val="17364A"/>
                 </a:solidFill>
@@ -5023,9 +5023,9 @@
                 <a:ea typeface="Aptos" pitchFamily="34" charset="-122"/>
                 <a:cs typeface="Aptos" pitchFamily="34" charset="-120"/>
               </a:rPr>
-              <a:t>Failing to update internal policies after legal, procurement, privacy, or cybersecurity changes.</a:t>
-            </a:r>
-            <a:endParaRPr lang="en-US" sz="1320" dirty="0"/>
+              <a:t>Failing to update internal policies after legal, procurement, privacy, or.</a:t>
+            </a:r>
+            <a:endParaRPr lang="en-US" sz="1220" dirty="0"/>
           </a:p>
         </p:txBody>
       </p:sp>
@@ -5037,12 +5037,12 @@
         </p:nvSpPr>
         <p:spPr>
           <a:xfrm>
-            <a:off x="7635240" y="2718511"/>
-            <a:ext cx="3474720" cy="1328623"/>
+            <a:off x="7543800" y="2724912"/>
+            <a:ext cx="3611880" cy="1527048"/>
           </a:xfrm>
           <a:prstGeom prst="roundRect">
             <a:avLst>
-              <a:gd name="adj" fmla="val 8259"/>
+              <a:gd name="adj" fmla="val 7186"/>
             </a:avLst>
           </a:prstGeom>
           <a:solidFill>
@@ -5064,8 +5064,8 @@
         </p:nvSpPr>
         <p:spPr>
           <a:xfrm>
-            <a:off x="7799832" y="2864815"/>
-            <a:ext cx="3145536" cy="256032"/>
+            <a:off x="7708392" y="2852928"/>
+            <a:ext cx="3282696" cy="228600"/>
           </a:xfrm>
           <a:prstGeom prst="rect">
             <a:avLst/>
@@ -5081,7 +5081,7 @@
               <a:buNone/>
             </a:pPr>
             <a:r>
-              <a:rPr lang="en-US" sz="1300" b="1" dirty="0">
+              <a:rPr lang="en-US" sz="1220" b="1" dirty="0">
                 <a:solidFill>
                   <a:srgbClr val="0068B7"/>
                 </a:solidFill>
@@ -5091,7 +5091,7 @@
               </a:rPr>
               <a:t>Concept checkpoints</a:t>
             </a:r>
-            <a:endParaRPr lang="en-US" sz="1300" dirty="0"/>
+            <a:endParaRPr lang="en-US" sz="1220" dirty="0"/>
           </a:p>
         </p:txBody>
       </p:sp>
@@ -5103,8 +5103,8 @@
         </p:nvSpPr>
         <p:spPr>
           <a:xfrm>
-            <a:off x="7818120" y="3230575"/>
-            <a:ext cx="3090672" cy="670255"/>
+            <a:off x="7726680" y="3182112"/>
+            <a:ext cx="3227832" cy="960120"/>
           </a:xfrm>
           <a:prstGeom prst="rect">
             <a:avLst/>
@@ -5122,7 +5122,7 @@
               <a:buNone/>
             </a:pPr>
             <a:r>
-              <a:rPr lang="en-US" sz="1220" dirty="0">
+              <a:rPr lang="en-US" sz="1140" dirty="0">
                 <a:solidFill>
                   <a:srgbClr val="17364A"/>
                 </a:solidFill>
@@ -5130,16 +5130,16 @@
                 <a:ea typeface="Aptos" pitchFamily="34" charset="-122"/>
                 <a:cs typeface="Aptos" pitchFamily="34" charset="-120"/>
               </a:rPr>
-              <a:t>Failing to update internal policies after legal, procurement,.</a:t>
-            </a:r>
-            <a:endParaRPr lang="en-US" sz="1220" dirty="0"/>
-          </a:p>
-          <a:p>
-            <a:pPr indent="0" marL="0">
-              <a:buNone/>
-            </a:pPr>
-            <a:r>
-              <a:rPr lang="en-US" sz="1220" dirty="0">
+              <a:t>Failing to update internal policies after legal,.</a:t>
+            </a:r>
+            <a:endParaRPr lang="en-US" sz="1140" dirty="0"/>
+          </a:p>
+          <a:p>
+            <a:pPr indent="0" marL="0">
+              <a:buNone/>
+            </a:pPr>
+            <a:r>
+              <a:rPr lang="en-US" sz="1140" dirty="0">
                 <a:solidFill>
                   <a:srgbClr val="17364A"/>
                 </a:solidFill>
@@ -5147,16 +5147,16 @@
                 <a:ea typeface="Aptos" pitchFamily="34" charset="-122"/>
                 <a:cs typeface="Aptos" pitchFamily="34" charset="-120"/>
               </a:rPr>
-              <a:t>Allowing vendors to define compliance obligations without agency.</a:t>
-            </a:r>
-            <a:endParaRPr lang="en-US" sz="1220" dirty="0"/>
-          </a:p>
-          <a:p>
-            <a:pPr indent="0" marL="0">
-              <a:buNone/>
-            </a:pPr>
-            <a:r>
-              <a:rPr lang="en-US" sz="1220" dirty="0">
+              <a:t>Allowing vendors to define compliance obligations.</a:t>
+            </a:r>
+            <a:endParaRPr lang="en-US" sz="1140" dirty="0"/>
+          </a:p>
+          <a:p>
+            <a:pPr indent="0" marL="0">
+              <a:buNone/>
+            </a:pPr>
+            <a:r>
+              <a:rPr lang="en-US" sz="1140" dirty="0">
                 <a:solidFill>
                   <a:srgbClr val="17364A"/>
                 </a:solidFill>
@@ -5164,9 +5164,9 @@
                 <a:ea typeface="Aptos" pitchFamily="34" charset="-122"/>
                 <a:cs typeface="Aptos" pitchFamily="34" charset="-120"/>
               </a:rPr>
-              <a:t>Maintaining policies that are too vague to guide real decisions.</a:t>
-            </a:r>
-            <a:endParaRPr lang="en-US" sz="1220" dirty="0"/>
+              <a:t>Maintaining policies that are too vague to guide.</a:t>
+            </a:r>
+            <a:endParaRPr lang="en-US" sz="1140" dirty="0"/>
           </a:p>
         </p:txBody>
       </p:sp>
@@ -5178,12 +5178,12 @@
         </p:nvSpPr>
         <p:spPr>
           <a:xfrm>
-            <a:off x="7635240" y="4184294"/>
-            <a:ext cx="3474720" cy="1466698"/>
+            <a:off x="7543800" y="4389120"/>
+            <a:ext cx="3611880" cy="1261872"/>
           </a:xfrm>
           <a:prstGeom prst="roundRect">
             <a:avLst>
-              <a:gd name="adj" fmla="val 7481"/>
+              <a:gd name="adj" fmla="val 8696"/>
             </a:avLst>
           </a:prstGeom>
           <a:solidFill>
@@ -5205,8 +5205,8 @@
         </p:nvSpPr>
         <p:spPr>
           <a:xfrm>
-            <a:off x="7799832" y="4330598"/>
-            <a:ext cx="3145536" cy="256032"/>
+            <a:off x="7708392" y="4517136"/>
+            <a:ext cx="3282696" cy="228600"/>
           </a:xfrm>
           <a:prstGeom prst="rect">
             <a:avLst/>
@@ -5222,7 +5222,7 @@
               <a:buNone/>
             </a:pPr>
             <a:r>
-              <a:rPr lang="en-US" sz="1300" b="1" dirty="0">
+              <a:rPr lang="en-US" sz="1220" b="1" dirty="0">
                 <a:solidFill>
                   <a:srgbClr val="0068B7"/>
                 </a:solidFill>
@@ -5232,7 +5232,7 @@
               </a:rPr>
               <a:t>What to document</a:t>
             </a:r>
-            <a:endParaRPr lang="en-US" sz="1300" dirty="0"/>
+            <a:endParaRPr lang="en-US" sz="1220" dirty="0"/>
           </a:p>
         </p:txBody>
       </p:sp>
@@ -5244,8 +5244,8 @@
         </p:nvSpPr>
         <p:spPr>
           <a:xfrm>
-            <a:off x="7799832" y="4659782"/>
-            <a:ext cx="3145536" cy="899770"/>
+            <a:off x="7708392" y="4828032"/>
+            <a:ext cx="3282696" cy="749808"/>
           </a:xfrm>
           <a:prstGeom prst="rect">
             <a:avLst/>
@@ -5263,7 +5263,7 @@
               <a:buNone/>
             </a:pPr>
             <a:r>
-              <a:rPr lang="en-US" sz="1320" dirty="0">
+              <a:rPr lang="en-US" sz="1220" dirty="0">
                 <a:solidFill>
                   <a:srgbClr val="17364A"/>
                 </a:solidFill>
@@ -5271,9 +5271,9 @@
                 <a:ea typeface="Aptos" pitchFamily="34" charset="-122"/>
                 <a:cs typeface="Aptos" pitchFamily="34" charset="-120"/>
               </a:rPr>
-              <a:t>Translate this concept into clear decision rights, review steps, documentation expectations, and escalation paths before an AI-supported workflow is approved.</a:t>
-            </a:r>
-            <a:endParaRPr lang="en-US" sz="1320" dirty="0"/>
+              <a:t>Translate this concept into clear decision rights, review steps, documentation.</a:t>
+            </a:r>
+            <a:endParaRPr lang="en-US" sz="1220" dirty="0"/>
           </a:p>
         </p:txBody>
       </p:sp>
@@ -5564,8 +5564,8 @@
         </p:nvSpPr>
         <p:spPr>
           <a:xfrm>
-            <a:off x="868680" y="1508760"/>
-            <a:ext cx="6309360" cy="4160520"/>
+            <a:off x="822960" y="1463040"/>
+            <a:ext cx="6565392" cy="4343400"/>
           </a:xfrm>
           <a:prstGeom prst="rect">
             <a:avLst/>
@@ -5583,7 +5583,7 @@
               <a:buNone/>
             </a:pPr>
             <a:r>
-              <a:rPr lang="en-US" sz="2100" dirty="0">
+              <a:rPr lang="en-US" sz="1920" dirty="0">
                 <a:solidFill>
                   <a:srgbClr val="003A63"/>
                 </a:solidFill>
@@ -5593,14 +5593,14 @@
               </a:rPr>
               <a:t>• Recommended guardrails include the following:</a:t>
             </a:r>
-            <a:endParaRPr lang="en-US" sz="2100" dirty="0"/>
-          </a:p>
-          <a:p>
-            <a:pPr indent="0" marL="0">
-              <a:buNone/>
-            </a:pPr>
-            <a:r>
-              <a:rPr lang="en-US" sz="2100" dirty="0">
+            <a:endParaRPr lang="en-US" sz="1920" dirty="0"/>
+          </a:p>
+          <a:p>
+            <a:pPr indent="0" marL="0">
+              <a:buNone/>
+            </a:pPr>
+            <a:r>
+              <a:rPr lang="en-US" sz="1920" dirty="0">
                 <a:solidFill>
                   <a:srgbClr val="003A63"/>
                 </a:solidFill>
@@ -5610,14 +5610,14 @@
               </a:rPr>
               <a:t>• Assign responsibility for AI policy scanning and interpretation.</a:t>
             </a:r>
-            <a:endParaRPr lang="en-US" sz="2100" dirty="0"/>
-          </a:p>
-          <a:p>
-            <a:pPr indent="0" marL="0">
-              <a:buNone/>
-            </a:pPr>
-            <a:r>
-              <a:rPr lang="en-US" sz="2100" dirty="0">
+            <a:endParaRPr lang="en-US" sz="1920" dirty="0"/>
+          </a:p>
+          <a:p>
+            <a:pPr indent="0" marL="0">
+              <a:buNone/>
+            </a:pPr>
+            <a:r>
+              <a:rPr lang="en-US" sz="1920" dirty="0">
                 <a:solidFill>
                   <a:srgbClr val="003A63"/>
                 </a:solidFill>
@@ -5627,7 +5627,7 @@
               </a:rPr>
               <a:t>• Distinguish binding requirements from guidance and best practices.</a:t>
             </a:r>
-            <a:endParaRPr lang="en-US" sz="2100" dirty="0"/>
+            <a:endParaRPr lang="en-US" sz="1920" dirty="0"/>
           </a:p>
         </p:txBody>
       </p:sp>
@@ -5639,12 +5639,12 @@
         </p:nvSpPr>
         <p:spPr>
           <a:xfrm>
-            <a:off x="7635240" y="1325880"/>
-            <a:ext cx="3474720" cy="1207008"/>
+            <a:off x="7543800" y="1325880"/>
+            <a:ext cx="3611880" cy="1261872"/>
           </a:xfrm>
           <a:prstGeom prst="roundRect">
             <a:avLst>
-              <a:gd name="adj" fmla="val 9091"/>
+              <a:gd name="adj" fmla="val 8696"/>
             </a:avLst>
           </a:prstGeom>
           <a:solidFill>
@@ -5666,8 +5666,8 @@
         </p:nvSpPr>
         <p:spPr>
           <a:xfrm>
-            <a:off x="7799832" y="1472184"/>
-            <a:ext cx="3145536" cy="256032"/>
+            <a:off x="7708392" y="1453896"/>
+            <a:ext cx="3282696" cy="228600"/>
           </a:xfrm>
           <a:prstGeom prst="rect">
             <a:avLst/>
@@ -5683,7 +5683,7 @@
               <a:buNone/>
             </a:pPr>
             <a:r>
-              <a:rPr lang="en-US" sz="1300" b="1" dirty="0">
+              <a:rPr lang="en-US" sz="1220" b="1" dirty="0">
                 <a:solidFill>
                   <a:srgbClr val="0068B7"/>
                 </a:solidFill>
@@ -5693,7 +5693,7 @@
               </a:rPr>
               <a:t>Governance lens</a:t>
             </a:r>
-            <a:endParaRPr lang="en-US" sz="1300" dirty="0"/>
+            <a:endParaRPr lang="en-US" sz="1220" dirty="0"/>
           </a:p>
         </p:txBody>
       </p:sp>
@@ -5705,8 +5705,8 @@
         </p:nvSpPr>
         <p:spPr>
           <a:xfrm>
-            <a:off x="7799832" y="1801368"/>
-            <a:ext cx="3145536" cy="640080"/>
+            <a:off x="7708392" y="1764792"/>
+            <a:ext cx="3282696" cy="749808"/>
           </a:xfrm>
           <a:prstGeom prst="rect">
             <a:avLst/>
@@ -5724,7 +5724,7 @@
               <a:buNone/>
             </a:pPr>
             <a:r>
-              <a:rPr lang="en-US" sz="1320" dirty="0">
+              <a:rPr lang="en-US" sz="1220" dirty="0">
                 <a:solidFill>
                   <a:srgbClr val="17364A"/>
                 </a:solidFill>
@@ -5734,7 +5734,7 @@
               </a:rPr>
               <a:t>Recommended guardrails include the following:</a:t>
             </a:r>
-            <a:endParaRPr lang="en-US" sz="1320" dirty="0"/>
+            <a:endParaRPr lang="en-US" sz="1220" dirty="0"/>
           </a:p>
         </p:txBody>
       </p:sp>
@@ -5746,12 +5746,12 @@
         </p:nvSpPr>
         <p:spPr>
           <a:xfrm>
-            <a:off x="7635240" y="2670048"/>
-            <a:ext cx="3474720" cy="1377086"/>
+            <a:off x="7543800" y="2724912"/>
+            <a:ext cx="3611880" cy="1527048"/>
           </a:xfrm>
           <a:prstGeom prst="roundRect">
             <a:avLst>
-              <a:gd name="adj" fmla="val 7968"/>
+              <a:gd name="adj" fmla="val 7186"/>
             </a:avLst>
           </a:prstGeom>
           <a:solidFill>
@@ -5773,8 +5773,8 @@
         </p:nvSpPr>
         <p:spPr>
           <a:xfrm>
-            <a:off x="7799832" y="2816352"/>
-            <a:ext cx="3145536" cy="256032"/>
+            <a:off x="7708392" y="2852928"/>
+            <a:ext cx="3282696" cy="228600"/>
           </a:xfrm>
           <a:prstGeom prst="rect">
             <a:avLst/>
@@ -5790,7 +5790,7 @@
               <a:buNone/>
             </a:pPr>
             <a:r>
-              <a:rPr lang="en-US" sz="1300" b="1" dirty="0">
+              <a:rPr lang="en-US" sz="1220" b="1" dirty="0">
                 <a:solidFill>
                   <a:srgbClr val="0068B7"/>
                 </a:solidFill>
@@ -5800,7 +5800,7 @@
               </a:rPr>
               <a:t>Concept checkpoints</a:t>
             </a:r>
-            <a:endParaRPr lang="en-US" sz="1300" dirty="0"/>
+            <a:endParaRPr lang="en-US" sz="1220" dirty="0"/>
           </a:p>
         </p:txBody>
       </p:sp>
@@ -5812,8 +5812,8 @@
         </p:nvSpPr>
         <p:spPr>
           <a:xfrm>
-            <a:off x="7818120" y="3182112"/>
-            <a:ext cx="3090672" cy="718718"/>
+            <a:off x="7726680" y="3182112"/>
+            <a:ext cx="3227832" cy="960120"/>
           </a:xfrm>
           <a:prstGeom prst="rect">
             <a:avLst/>
@@ -5831,7 +5831,7 @@
               <a:buNone/>
             </a:pPr>
             <a:r>
-              <a:rPr lang="en-US" sz="1220" dirty="0">
+              <a:rPr lang="en-US" sz="1140" dirty="0">
                 <a:solidFill>
                   <a:srgbClr val="17364A"/>
                 </a:solidFill>
@@ -5841,14 +5841,14 @@
               </a:rPr>
               <a:t>Recommended guardrails include the following:</a:t>
             </a:r>
-            <a:endParaRPr lang="en-US" sz="1220" dirty="0"/>
-          </a:p>
-          <a:p>
-            <a:pPr indent="0" marL="0">
-              <a:buNone/>
-            </a:pPr>
-            <a:r>
-              <a:rPr lang="en-US" sz="1220" dirty="0">
+            <a:endParaRPr lang="en-US" sz="1140" dirty="0"/>
+          </a:p>
+          <a:p>
+            <a:pPr indent="0" marL="0">
+              <a:buNone/>
+            </a:pPr>
+            <a:r>
+              <a:rPr lang="en-US" sz="1140" dirty="0">
                 <a:solidFill>
                   <a:srgbClr val="17364A"/>
                 </a:solidFill>
@@ -5856,16 +5856,16 @@
                 <a:ea typeface="Aptos" pitchFamily="34" charset="-122"/>
                 <a:cs typeface="Aptos" pitchFamily="34" charset="-120"/>
               </a:rPr>
-              <a:t>Assign responsibility for AI policy scanning and interpretation.</a:t>
-            </a:r>
-            <a:endParaRPr lang="en-US" sz="1220" dirty="0"/>
-          </a:p>
-          <a:p>
-            <a:pPr indent="0" marL="0">
-              <a:buNone/>
-            </a:pPr>
-            <a:r>
-              <a:rPr lang="en-US" sz="1220" dirty="0">
+              <a:t>Assign responsibility for AI policy scanning and.</a:t>
+            </a:r>
+            <a:endParaRPr lang="en-US" sz="1140" dirty="0"/>
+          </a:p>
+          <a:p>
+            <a:pPr indent="0" marL="0">
+              <a:buNone/>
+            </a:pPr>
+            <a:r>
+              <a:rPr lang="en-US" sz="1140" dirty="0">
                 <a:solidFill>
                   <a:srgbClr val="17364A"/>
                 </a:solidFill>
@@ -5873,9 +5873,9 @@
                 <a:ea typeface="Aptos" pitchFamily="34" charset="-122"/>
                 <a:cs typeface="Aptos" pitchFamily="34" charset="-120"/>
               </a:rPr>
-              <a:t>Distinguish binding requirements from guidance and best practices.</a:t>
-            </a:r>
-            <a:endParaRPr lang="en-US" sz="1220" dirty="0"/>
+              <a:t>Distinguish binding requirements from guidance and.</a:t>
+            </a:r>
+            <a:endParaRPr lang="en-US" sz="1140" dirty="0"/>
           </a:p>
         </p:txBody>
       </p:sp>
@@ -5887,12 +5887,12 @@
         </p:nvSpPr>
         <p:spPr>
           <a:xfrm>
-            <a:off x="7635240" y="4184294"/>
-            <a:ext cx="3474720" cy="1466698"/>
+            <a:off x="7543800" y="4389120"/>
+            <a:ext cx="3611880" cy="1261872"/>
           </a:xfrm>
           <a:prstGeom prst="roundRect">
             <a:avLst>
-              <a:gd name="adj" fmla="val 7481"/>
+              <a:gd name="adj" fmla="val 8696"/>
             </a:avLst>
           </a:prstGeom>
           <a:solidFill>
@@ -5914,8 +5914,8 @@
         </p:nvSpPr>
         <p:spPr>
           <a:xfrm>
-            <a:off x="7799832" y="4330598"/>
-            <a:ext cx="3145536" cy="256032"/>
+            <a:off x="7708392" y="4517136"/>
+            <a:ext cx="3282696" cy="228600"/>
           </a:xfrm>
           <a:prstGeom prst="rect">
             <a:avLst/>
@@ -5931,7 +5931,7 @@
               <a:buNone/>
             </a:pPr>
             <a:r>
-              <a:rPr lang="en-US" sz="1300" b="1" dirty="0">
+              <a:rPr lang="en-US" sz="1220" b="1" dirty="0">
                 <a:solidFill>
                   <a:srgbClr val="0068B7"/>
                 </a:solidFill>
@@ -5941,7 +5941,7 @@
               </a:rPr>
               <a:t>What to document</a:t>
             </a:r>
-            <a:endParaRPr lang="en-US" sz="1300" dirty="0"/>
+            <a:endParaRPr lang="en-US" sz="1220" dirty="0"/>
           </a:p>
         </p:txBody>
       </p:sp>
@@ -5953,8 +5953,8 @@
         </p:nvSpPr>
         <p:spPr>
           <a:xfrm>
-            <a:off x="7799832" y="4659782"/>
-            <a:ext cx="3145536" cy="899770"/>
+            <a:off x="7708392" y="4828032"/>
+            <a:ext cx="3282696" cy="749808"/>
           </a:xfrm>
           <a:prstGeom prst="rect">
             <a:avLst/>
@@ -5972,7 +5972,7 @@
               <a:buNone/>
             </a:pPr>
             <a:r>
-              <a:rPr lang="en-US" sz="1320" dirty="0">
+              <a:rPr lang="en-US" sz="1220" dirty="0">
                 <a:solidFill>
                   <a:srgbClr val="17364A"/>
                 </a:solidFill>
@@ -5980,9 +5980,9 @@
                 <a:ea typeface="Aptos" pitchFamily="34" charset="-122"/>
                 <a:cs typeface="Aptos" pitchFamily="34" charset="-120"/>
               </a:rPr>
-              <a:t>Translate this concept into clear decision rights, review steps, documentation expectations, and escalation paths before an AI-supported workflow is approved.</a:t>
-            </a:r>
-            <a:endParaRPr lang="en-US" sz="1320" dirty="0"/>
+              <a:t>Translate this concept into clear decision rights, review steps, documentation.</a:t>
+            </a:r>
+            <a:endParaRPr lang="en-US" sz="1220" dirty="0"/>
           </a:p>
         </p:txBody>
       </p:sp>
@@ -6273,8 +6273,8 @@
         </p:nvSpPr>
         <p:spPr>
           <a:xfrm>
-            <a:off x="868680" y="1508760"/>
-            <a:ext cx="6309360" cy="4160520"/>
+            <a:off x="822960" y="1463040"/>
+            <a:ext cx="6565392" cy="4343400"/>
           </a:xfrm>
           <a:prstGeom prst="rect">
             <a:avLst/>
@@ -6292,7 +6292,7 @@
               <a:buNone/>
             </a:pPr>
             <a:r>
-              <a:rPr lang="en-US" sz="2100" dirty="0">
+              <a:rPr lang="en-US" sz="1920" dirty="0">
                 <a:solidFill>
                   <a:srgbClr val="003A63"/>
                 </a:solidFill>
@@ -6300,16 +6300,16 @@
                 <a:ea typeface="Aptos" pitchFamily="34" charset="-122"/>
                 <a:cs typeface="Aptos" pitchFamily="34" charset="-120"/>
               </a:rPr>
-              <a:t>• Maintain a crosswalk from external requirements to internal policies and procedures.</a:t>
-            </a:r>
-            <a:endParaRPr lang="en-US" sz="2100" dirty="0"/>
-          </a:p>
-          <a:p>
-            <a:pPr indent="0" marL="0">
-              <a:buNone/>
-            </a:pPr>
-            <a:r>
-              <a:rPr lang="en-US" sz="2100" dirty="0">
+              <a:t>• Maintain a crosswalk from external requirements to internal policies and.</a:t>
+            </a:r>
+            <a:endParaRPr lang="en-US" sz="1920" dirty="0"/>
+          </a:p>
+          <a:p>
+            <a:pPr indent="0" marL="0">
+              <a:buNone/>
+            </a:pPr>
+            <a:r>
+              <a:rPr lang="en-US" sz="1920" dirty="0">
                 <a:solidFill>
                   <a:srgbClr val="003A63"/>
                 </a:solidFill>
@@ -6319,14 +6319,14 @@
               </a:rPr>
               <a:t>• Update training, SOPs, and procurement language when policies change.</a:t>
             </a:r>
-            <a:endParaRPr lang="en-US" sz="2100" dirty="0"/>
-          </a:p>
-          <a:p>
-            <a:pPr indent="0" marL="0">
-              <a:buNone/>
-            </a:pPr>
-            <a:r>
-              <a:rPr lang="en-US" sz="2100" dirty="0">
+            <a:endParaRPr lang="en-US" sz="1920" dirty="0"/>
+          </a:p>
+          <a:p>
+            <a:pPr indent="0" marL="0">
+              <a:buNone/>
+            </a:pPr>
+            <a:r>
+              <a:rPr lang="en-US" sz="1920" dirty="0">
                 <a:solidFill>
                   <a:srgbClr val="003A63"/>
                 </a:solidFill>
@@ -6336,7 +6336,7 @@
               </a:rPr>
               <a:t>• Document assumptions, decisions, and unresolved legal or policy questions.</a:t>
             </a:r>
-            <a:endParaRPr lang="en-US" sz="2100" dirty="0"/>
+            <a:endParaRPr lang="en-US" sz="1920" dirty="0"/>
           </a:p>
         </p:txBody>
       </p:sp>
@@ -6348,12 +6348,12 @@
         </p:nvSpPr>
         <p:spPr>
           <a:xfrm>
-            <a:off x="7635240" y="1325880"/>
-            <a:ext cx="3474720" cy="1207008"/>
+            <a:off x="7543800" y="1325880"/>
+            <a:ext cx="3611880" cy="1261872"/>
           </a:xfrm>
           <a:prstGeom prst="roundRect">
             <a:avLst>
-              <a:gd name="adj" fmla="val 9091"/>
+              <a:gd name="adj" fmla="val 8696"/>
             </a:avLst>
           </a:prstGeom>
           <a:solidFill>
@@ -6375,8 +6375,8 @@
         </p:nvSpPr>
         <p:spPr>
           <a:xfrm>
-            <a:off x="7799832" y="1472184"/>
-            <a:ext cx="3145536" cy="256032"/>
+            <a:off x="7708392" y="1453896"/>
+            <a:ext cx="3282696" cy="228600"/>
           </a:xfrm>
           <a:prstGeom prst="rect">
             <a:avLst/>
@@ -6392,7 +6392,7 @@
               <a:buNone/>
             </a:pPr>
             <a:r>
-              <a:rPr lang="en-US" sz="1300" b="1" dirty="0">
+              <a:rPr lang="en-US" sz="1220" b="1" dirty="0">
                 <a:solidFill>
                   <a:srgbClr val="0068B7"/>
                 </a:solidFill>
@@ -6402,7 +6402,7 @@
               </a:rPr>
               <a:t>Governance lens</a:t>
             </a:r>
-            <a:endParaRPr lang="en-US" sz="1300" dirty="0"/>
+            <a:endParaRPr lang="en-US" sz="1220" dirty="0"/>
           </a:p>
         </p:txBody>
       </p:sp>
@@ -6414,8 +6414,8 @@
         </p:nvSpPr>
         <p:spPr>
           <a:xfrm>
-            <a:off x="7799832" y="1801368"/>
-            <a:ext cx="3145536" cy="640080"/>
+            <a:off x="7708392" y="1764792"/>
+            <a:ext cx="3282696" cy="749808"/>
           </a:xfrm>
           <a:prstGeom prst="rect">
             <a:avLst/>
@@ -6433,7 +6433,7 @@
               <a:buNone/>
             </a:pPr>
             <a:r>
-              <a:rPr lang="en-US" sz="1320" dirty="0">
+              <a:rPr lang="en-US" sz="1220" dirty="0">
                 <a:solidFill>
                   <a:srgbClr val="17364A"/>
                 </a:solidFill>
@@ -6441,9 +6441,9 @@
                 <a:ea typeface="Aptos" pitchFamily="34" charset="-122"/>
                 <a:cs typeface="Aptos" pitchFamily="34" charset="-120"/>
               </a:rPr>
-              <a:t>Maintain a crosswalk from external requirements to internal policies and procedures.</a:t>
-            </a:r>
-            <a:endParaRPr lang="en-US" sz="1320" dirty="0"/>
+              <a:t>Maintain a crosswalk from external requirements to internal policies and.</a:t>
+            </a:r>
+            <a:endParaRPr lang="en-US" sz="1220" dirty="0"/>
           </a:p>
         </p:txBody>
       </p:sp>
@@ -6455,12 +6455,12 @@
         </p:nvSpPr>
         <p:spPr>
           <a:xfrm>
-            <a:off x="7635240" y="2670048"/>
-            <a:ext cx="3474720" cy="1377086"/>
+            <a:off x="7543800" y="2724912"/>
+            <a:ext cx="3611880" cy="1527048"/>
           </a:xfrm>
           <a:prstGeom prst="roundRect">
             <a:avLst>
-              <a:gd name="adj" fmla="val 7968"/>
+              <a:gd name="adj" fmla="val 7186"/>
             </a:avLst>
           </a:prstGeom>
           <a:solidFill>
@@ -6482,8 +6482,8 @@
         </p:nvSpPr>
         <p:spPr>
           <a:xfrm>
-            <a:off x="7799832" y="2816352"/>
-            <a:ext cx="3145536" cy="256032"/>
+            <a:off x="7708392" y="2852928"/>
+            <a:ext cx="3282696" cy="228600"/>
           </a:xfrm>
           <a:prstGeom prst="rect">
             <a:avLst/>
@@ -6499,7 +6499,7 @@
               <a:buNone/>
             </a:pPr>
             <a:r>
-              <a:rPr lang="en-US" sz="1300" b="1" dirty="0">
+              <a:rPr lang="en-US" sz="1220" b="1" dirty="0">
                 <a:solidFill>
                   <a:srgbClr val="0068B7"/>
                 </a:solidFill>
@@ -6509,7 +6509,7 @@
               </a:rPr>
               <a:t>Concept checkpoints</a:t>
             </a:r>
-            <a:endParaRPr lang="en-US" sz="1300" dirty="0"/>
+            <a:endParaRPr lang="en-US" sz="1220" dirty="0"/>
           </a:p>
         </p:txBody>
       </p:sp>
@@ -6521,8 +6521,8 @@
         </p:nvSpPr>
         <p:spPr>
           <a:xfrm>
-            <a:off x="7818120" y="3182112"/>
-            <a:ext cx="3090672" cy="718718"/>
+            <a:off x="7726680" y="3182112"/>
+            <a:ext cx="3227832" cy="960120"/>
           </a:xfrm>
           <a:prstGeom prst="rect">
             <a:avLst/>
@@ -6540,7 +6540,7 @@
               <a:buNone/>
             </a:pPr>
             <a:r>
-              <a:rPr lang="en-US" sz="1220" dirty="0">
+              <a:rPr lang="en-US" sz="1140" dirty="0">
                 <a:solidFill>
                   <a:srgbClr val="17364A"/>
                 </a:solidFill>
@@ -6548,16 +6548,16 @@
                 <a:ea typeface="Aptos" pitchFamily="34" charset="-122"/>
                 <a:cs typeface="Aptos" pitchFamily="34" charset="-120"/>
               </a:rPr>
-              <a:t>Maintain a crosswalk from external requirements to internal.</a:t>
-            </a:r>
-            <a:endParaRPr lang="en-US" sz="1220" dirty="0"/>
-          </a:p>
-          <a:p>
-            <a:pPr indent="0" marL="0">
-              <a:buNone/>
-            </a:pPr>
-            <a:r>
-              <a:rPr lang="en-US" sz="1220" dirty="0">
+              <a:t>Maintain a crosswalk from external requirements to.</a:t>
+            </a:r>
+            <a:endParaRPr lang="en-US" sz="1140" dirty="0"/>
+          </a:p>
+          <a:p>
+            <a:pPr indent="0" marL="0">
+              <a:buNone/>
+            </a:pPr>
+            <a:r>
+              <a:rPr lang="en-US" sz="1140" dirty="0">
                 <a:solidFill>
                   <a:srgbClr val="17364A"/>
                 </a:solidFill>
@@ -6565,16 +6565,16 @@
                 <a:ea typeface="Aptos" pitchFamily="34" charset="-122"/>
                 <a:cs typeface="Aptos" pitchFamily="34" charset="-120"/>
               </a:rPr>
-              <a:t>Update training, SOPs, and procurement language when policies.</a:t>
-            </a:r>
-            <a:endParaRPr lang="en-US" sz="1220" dirty="0"/>
-          </a:p>
-          <a:p>
-            <a:pPr indent="0" marL="0">
-              <a:buNone/>
-            </a:pPr>
-            <a:r>
-              <a:rPr lang="en-US" sz="1220" dirty="0">
+              <a:t>Update training, SOPs, and procurement language.</a:t>
+            </a:r>
+            <a:endParaRPr lang="en-US" sz="1140" dirty="0"/>
+          </a:p>
+          <a:p>
+            <a:pPr indent="0" marL="0">
+              <a:buNone/>
+            </a:pPr>
+            <a:r>
+              <a:rPr lang="en-US" sz="1140" dirty="0">
                 <a:solidFill>
                   <a:srgbClr val="17364A"/>
                 </a:solidFill>
@@ -6582,9 +6582,9 @@
                 <a:ea typeface="Aptos" pitchFamily="34" charset="-122"/>
                 <a:cs typeface="Aptos" pitchFamily="34" charset="-120"/>
               </a:rPr>
-              <a:t>Document assumptions, decisions, and unresolved legal or policy.</a:t>
-            </a:r>
-            <a:endParaRPr lang="en-US" sz="1220" dirty="0"/>
+              <a:t>Document assumptions, decisions, and unresolved.</a:t>
+            </a:r>
+            <a:endParaRPr lang="en-US" sz="1140" dirty="0"/>
           </a:p>
         </p:txBody>
       </p:sp>
@@ -6596,12 +6596,12 @@
         </p:nvSpPr>
         <p:spPr>
           <a:xfrm>
-            <a:off x="7635240" y="4184294"/>
-            <a:ext cx="3474720" cy="1466698"/>
+            <a:off x="7543800" y="4389120"/>
+            <a:ext cx="3611880" cy="1261872"/>
           </a:xfrm>
           <a:prstGeom prst="roundRect">
             <a:avLst>
-              <a:gd name="adj" fmla="val 7481"/>
+              <a:gd name="adj" fmla="val 8696"/>
             </a:avLst>
           </a:prstGeom>
           <a:solidFill>
@@ -6623,8 +6623,8 @@
         </p:nvSpPr>
         <p:spPr>
           <a:xfrm>
-            <a:off x="7799832" y="4330598"/>
-            <a:ext cx="3145536" cy="256032"/>
+            <a:off x="7708392" y="4517136"/>
+            <a:ext cx="3282696" cy="228600"/>
           </a:xfrm>
           <a:prstGeom prst="rect">
             <a:avLst/>
@@ -6640,7 +6640,7 @@
               <a:buNone/>
             </a:pPr>
             <a:r>
-              <a:rPr lang="en-US" sz="1300" b="1" dirty="0">
+              <a:rPr lang="en-US" sz="1220" b="1" dirty="0">
                 <a:solidFill>
                   <a:srgbClr val="0068B7"/>
                 </a:solidFill>
@@ -6650,7 +6650,7 @@
               </a:rPr>
               <a:t>What to document</a:t>
             </a:r>
-            <a:endParaRPr lang="en-US" sz="1300" dirty="0"/>
+            <a:endParaRPr lang="en-US" sz="1220" dirty="0"/>
           </a:p>
         </p:txBody>
       </p:sp>
@@ -6662,8 +6662,8 @@
         </p:nvSpPr>
         <p:spPr>
           <a:xfrm>
-            <a:off x="7799832" y="4659782"/>
-            <a:ext cx="3145536" cy="899770"/>
+            <a:off x="7708392" y="4828032"/>
+            <a:ext cx="3282696" cy="749808"/>
           </a:xfrm>
           <a:prstGeom prst="rect">
             <a:avLst/>
@@ -6681,7 +6681,7 @@
               <a:buNone/>
             </a:pPr>
             <a:r>
-              <a:rPr lang="en-US" sz="1320" dirty="0">
+              <a:rPr lang="en-US" sz="1220" dirty="0">
                 <a:solidFill>
                   <a:srgbClr val="17364A"/>
                 </a:solidFill>
@@ -6689,9 +6689,9 @@
                 <a:ea typeface="Aptos" pitchFamily="34" charset="-122"/>
                 <a:cs typeface="Aptos" pitchFamily="34" charset="-120"/>
               </a:rPr>
-              <a:t>Translate this concept into clear decision rights, review steps, documentation expectations, and escalation paths before an AI-supported workflow is approved.</a:t>
-            </a:r>
-            <a:endParaRPr lang="en-US" sz="1320" dirty="0"/>
+              <a:t>Translate this concept into clear decision rights, review steps, documentation.</a:t>
+            </a:r>
+            <a:endParaRPr lang="en-US" sz="1220" dirty="0"/>
           </a:p>
         </p:txBody>
       </p:sp>
@@ -6982,8 +6982,8 @@
         </p:nvSpPr>
         <p:spPr>
           <a:xfrm>
-            <a:off x="868680" y="1508760"/>
-            <a:ext cx="6309360" cy="4160520"/>
+            <a:off x="822960" y="1463040"/>
+            <a:ext cx="6565392" cy="4343400"/>
           </a:xfrm>
           <a:prstGeom prst="rect">
             <a:avLst/>
@@ -7001,7 +7001,7 @@
               <a:buNone/>
             </a:pPr>
             <a:r>
-              <a:rPr lang="en-US" sz="2100" dirty="0">
+              <a:rPr lang="en-US" sz="1920" dirty="0">
                 <a:solidFill>
                   <a:srgbClr val="003A63"/>
                 </a:solidFill>
@@ -7011,14 +7011,14 @@
               </a:rPr>
               <a:t>• Where does this topic appear in your agency, program, or workflow?</a:t>
             </a:r>
-            <a:endParaRPr lang="en-US" sz="2100" dirty="0"/>
-          </a:p>
-          <a:p>
-            <a:pPr indent="0" marL="0">
-              <a:buNone/>
-            </a:pPr>
-            <a:r>
-              <a:rPr lang="en-US" sz="2100" dirty="0">
+            <a:endParaRPr lang="en-US" sz="1920" dirty="0"/>
+          </a:p>
+          <a:p>
+            <a:pPr indent="0" marL="0">
+              <a:buNone/>
+            </a:pPr>
+            <a:r>
+              <a:rPr lang="en-US" sz="1920" dirty="0">
                 <a:solidFill>
                   <a:srgbClr val="003A63"/>
                 </a:solidFill>
@@ -7026,16 +7026,16 @@
                 <a:ea typeface="Aptos" pitchFamily="34" charset="-122"/>
                 <a:cs typeface="Aptos" pitchFamily="34" charset="-120"/>
               </a:rPr>
-              <a:t>• Which staff roles would need to understand or apply this concept before AI use is approved?</a:t>
-            </a:r>
-            <a:endParaRPr lang="en-US" sz="2100" dirty="0"/>
-          </a:p>
-          <a:p>
-            <a:pPr indent="0" marL="0">
-              <a:buNone/>
-            </a:pPr>
-            <a:r>
-              <a:rPr lang="en-US" sz="2100" dirty="0">
+              <a:t>• Which staff roles would need to understand or apply this concept before AI.</a:t>
+            </a:r>
+            <a:endParaRPr lang="en-US" sz="1920" dirty="0"/>
+          </a:p>
+          <a:p>
+            <a:pPr indent="0" marL="0">
+              <a:buNone/>
+            </a:pPr>
+            <a:r>
+              <a:rPr lang="en-US" sz="1920" dirty="0">
                 <a:solidFill>
                   <a:srgbClr val="003A63"/>
                 </a:solidFill>
@@ -7045,7 +7045,7 @@
               </a:rPr>
               <a:t>• What could go wrong if this topic is not addressed before implementation?</a:t>
             </a:r>
-            <a:endParaRPr lang="en-US" sz="2100" dirty="0"/>
+            <a:endParaRPr lang="en-US" sz="1920" dirty="0"/>
           </a:p>
         </p:txBody>
       </p:sp>
@@ -7057,12 +7057,12 @@
         </p:nvSpPr>
         <p:spPr>
           <a:xfrm>
-            <a:off x="7635240" y="1325880"/>
-            <a:ext cx="3474720" cy="1207008"/>
+            <a:off x="7543800" y="1325880"/>
+            <a:ext cx="3611880" cy="1261872"/>
           </a:xfrm>
           <a:prstGeom prst="roundRect">
             <a:avLst>
-              <a:gd name="adj" fmla="val 9091"/>
+              <a:gd name="adj" fmla="val 8696"/>
             </a:avLst>
           </a:prstGeom>
           <a:solidFill>
@@ -7084,8 +7084,8 @@
         </p:nvSpPr>
         <p:spPr>
           <a:xfrm>
-            <a:off x="7799832" y="1472184"/>
-            <a:ext cx="3145536" cy="256032"/>
+            <a:off x="7708392" y="1453896"/>
+            <a:ext cx="3282696" cy="228600"/>
           </a:xfrm>
           <a:prstGeom prst="rect">
             <a:avLst/>
@@ -7101,7 +7101,7 @@
               <a:buNone/>
             </a:pPr>
             <a:r>
-              <a:rPr lang="en-US" sz="1300" b="1" dirty="0">
+              <a:rPr lang="en-US" sz="1220" b="1" dirty="0">
                 <a:solidFill>
                   <a:srgbClr val="0068B7"/>
                 </a:solidFill>
@@ -7111,7 +7111,7 @@
               </a:rPr>
               <a:t>Governance lens</a:t>
             </a:r>
-            <a:endParaRPr lang="en-US" sz="1300" dirty="0"/>
+            <a:endParaRPr lang="en-US" sz="1220" dirty="0"/>
           </a:p>
         </p:txBody>
       </p:sp>
@@ -7123,8 +7123,8 @@
         </p:nvSpPr>
         <p:spPr>
           <a:xfrm>
-            <a:off x="7799832" y="1801368"/>
-            <a:ext cx="3145536" cy="640080"/>
+            <a:off x="7708392" y="1764792"/>
+            <a:ext cx="3282696" cy="749808"/>
           </a:xfrm>
           <a:prstGeom prst="rect">
             <a:avLst/>
@@ -7142,7 +7142,7 @@
               <a:buNone/>
             </a:pPr>
             <a:r>
-              <a:rPr lang="en-US" sz="1320" dirty="0">
+              <a:rPr lang="en-US" sz="1220" dirty="0">
                 <a:solidFill>
                   <a:srgbClr val="17364A"/>
                 </a:solidFill>
@@ -7152,7 +7152,7 @@
               </a:rPr>
               <a:t>Where does this topic appear in your agency, program, or workflow?</a:t>
             </a:r>
-            <a:endParaRPr lang="en-US" sz="1320" dirty="0"/>
+            <a:endParaRPr lang="en-US" sz="1220" dirty="0"/>
           </a:p>
         </p:txBody>
       </p:sp>
@@ -7164,12 +7164,12 @@
         </p:nvSpPr>
         <p:spPr>
           <a:xfrm>
-            <a:off x="7635240" y="2670048"/>
-            <a:ext cx="3474720" cy="1377086"/>
+            <a:off x="7543800" y="2724912"/>
+            <a:ext cx="3611880" cy="1527048"/>
           </a:xfrm>
           <a:prstGeom prst="roundRect">
             <a:avLst>
-              <a:gd name="adj" fmla="val 7968"/>
+              <a:gd name="adj" fmla="val 7186"/>
             </a:avLst>
           </a:prstGeom>
           <a:solidFill>
@@ -7191,8 +7191,8 @@
         </p:nvSpPr>
         <p:spPr>
           <a:xfrm>
-            <a:off x="7799832" y="2816352"/>
-            <a:ext cx="3145536" cy="256032"/>
+            <a:off x="7708392" y="2852928"/>
+            <a:ext cx="3282696" cy="228600"/>
           </a:xfrm>
           <a:prstGeom prst="rect">
             <a:avLst/>
@@ -7208,7 +7208,7 @@
               <a:buNone/>
             </a:pPr>
             <a:r>
-              <a:rPr lang="en-US" sz="1300" b="1" dirty="0">
+              <a:rPr lang="en-US" sz="1220" b="1" dirty="0">
                 <a:solidFill>
                   <a:srgbClr val="0068B7"/>
                 </a:solidFill>
@@ -7218,7 +7218,7 @@
               </a:rPr>
               <a:t>Concept checkpoints</a:t>
             </a:r>
-            <a:endParaRPr lang="en-US" sz="1300" dirty="0"/>
+            <a:endParaRPr lang="en-US" sz="1220" dirty="0"/>
           </a:p>
         </p:txBody>
       </p:sp>
@@ -7230,8 +7230,8 @@
         </p:nvSpPr>
         <p:spPr>
           <a:xfrm>
-            <a:off x="7818120" y="3182112"/>
-            <a:ext cx="3090672" cy="718718"/>
+            <a:off x="7726680" y="3182112"/>
+            <a:ext cx="3227832" cy="960120"/>
           </a:xfrm>
           <a:prstGeom prst="rect">
             <a:avLst/>
@@ -7249,7 +7249,7 @@
               <a:buNone/>
             </a:pPr>
             <a:r>
-              <a:rPr lang="en-US" sz="1220" dirty="0">
+              <a:rPr lang="en-US" sz="1140" dirty="0">
                 <a:solidFill>
                   <a:srgbClr val="17364A"/>
                 </a:solidFill>
@@ -7257,16 +7257,16 @@
                 <a:ea typeface="Aptos" pitchFamily="34" charset="-122"/>
                 <a:cs typeface="Aptos" pitchFamily="34" charset="-120"/>
               </a:rPr>
-              <a:t>Where does this topic appear in your agency, program, or workflow?</a:t>
-            </a:r>
-            <a:endParaRPr lang="en-US" sz="1220" dirty="0"/>
-          </a:p>
-          <a:p>
-            <a:pPr indent="0" marL="0">
-              <a:buNone/>
-            </a:pPr>
-            <a:r>
-              <a:rPr lang="en-US" sz="1220" dirty="0">
+              <a:t>Where does this topic appear in your agency,.</a:t>
+            </a:r>
+            <a:endParaRPr lang="en-US" sz="1140" dirty="0"/>
+          </a:p>
+          <a:p>
+            <a:pPr indent="0" marL="0">
+              <a:buNone/>
+            </a:pPr>
+            <a:r>
+              <a:rPr lang="en-US" sz="1140" dirty="0">
                 <a:solidFill>
                   <a:srgbClr val="17364A"/>
                 </a:solidFill>
@@ -7274,16 +7274,16 @@
                 <a:ea typeface="Aptos" pitchFamily="34" charset="-122"/>
                 <a:cs typeface="Aptos" pitchFamily="34" charset="-120"/>
               </a:rPr>
-              <a:t>Which staff roles would need to understand or apply this concept.</a:t>
-            </a:r>
-            <a:endParaRPr lang="en-US" sz="1220" dirty="0"/>
-          </a:p>
-          <a:p>
-            <a:pPr indent="0" marL="0">
-              <a:buNone/>
-            </a:pPr>
-            <a:r>
-              <a:rPr lang="en-US" sz="1220" dirty="0">
+              <a:t>Which staff roles would need to understand or.</a:t>
+            </a:r>
+            <a:endParaRPr lang="en-US" sz="1140" dirty="0"/>
+          </a:p>
+          <a:p>
+            <a:pPr indent="0" marL="0">
+              <a:buNone/>
+            </a:pPr>
+            <a:r>
+              <a:rPr lang="en-US" sz="1140" dirty="0">
                 <a:solidFill>
                   <a:srgbClr val="17364A"/>
                 </a:solidFill>
@@ -7291,9 +7291,9 @@
                 <a:ea typeface="Aptos" pitchFamily="34" charset="-122"/>
                 <a:cs typeface="Aptos" pitchFamily="34" charset="-120"/>
               </a:rPr>
-              <a:t>What could go wrong if this topic is not addressed before.</a:t>
-            </a:r>
-            <a:endParaRPr lang="en-US" sz="1220" dirty="0"/>
+              <a:t>What could go wrong if this topic is not addressed.</a:t>
+            </a:r>
+            <a:endParaRPr lang="en-US" sz="1140" dirty="0"/>
           </a:p>
         </p:txBody>
       </p:sp>
@@ -7305,12 +7305,12 @@
         </p:nvSpPr>
         <p:spPr>
           <a:xfrm>
-            <a:off x="7635240" y="4184294"/>
-            <a:ext cx="3474720" cy="1466698"/>
+            <a:off x="7543800" y="4389120"/>
+            <a:ext cx="3611880" cy="1261872"/>
           </a:xfrm>
           <a:prstGeom prst="roundRect">
             <a:avLst>
-              <a:gd name="adj" fmla="val 7481"/>
+              <a:gd name="adj" fmla="val 8696"/>
             </a:avLst>
           </a:prstGeom>
           <a:solidFill>
@@ -7332,8 +7332,8 @@
         </p:nvSpPr>
         <p:spPr>
           <a:xfrm>
-            <a:off x="7799832" y="4330598"/>
-            <a:ext cx="3145536" cy="256032"/>
+            <a:off x="7708392" y="4517136"/>
+            <a:ext cx="3282696" cy="228600"/>
           </a:xfrm>
           <a:prstGeom prst="rect">
             <a:avLst/>
@@ -7349,7 +7349,7 @@
               <a:buNone/>
             </a:pPr>
             <a:r>
-              <a:rPr lang="en-US" sz="1300" b="1" dirty="0">
+              <a:rPr lang="en-US" sz="1220" b="1" dirty="0">
                 <a:solidFill>
                   <a:srgbClr val="0068B7"/>
                 </a:solidFill>
@@ -7359,7 +7359,7 @@
               </a:rPr>
               <a:t>What to document</a:t>
             </a:r>
-            <a:endParaRPr lang="en-US" sz="1300" dirty="0"/>
+            <a:endParaRPr lang="en-US" sz="1220" dirty="0"/>
           </a:p>
         </p:txBody>
       </p:sp>
@@ -7371,8 +7371,8 @@
         </p:nvSpPr>
         <p:spPr>
           <a:xfrm>
-            <a:off x="7799832" y="4659782"/>
-            <a:ext cx="3145536" cy="899770"/>
+            <a:off x="7708392" y="4828032"/>
+            <a:ext cx="3282696" cy="749808"/>
           </a:xfrm>
           <a:prstGeom prst="rect">
             <a:avLst/>
@@ -7390,7 +7390,7 @@
               <a:buNone/>
             </a:pPr>
             <a:r>
-              <a:rPr lang="en-US" sz="1320" dirty="0">
+              <a:rPr lang="en-US" sz="1220" dirty="0">
                 <a:solidFill>
                   <a:srgbClr val="17364A"/>
                 </a:solidFill>
@@ -7398,9 +7398,9 @@
                 <a:ea typeface="Aptos" pitchFamily="34" charset="-122"/>
                 <a:cs typeface="Aptos" pitchFamily="34" charset="-120"/>
               </a:rPr>
-              <a:t>Translate this concept into clear decision rights, review steps, documentation expectations, and escalation paths before an AI-supported workflow is approved.</a:t>
-            </a:r>
-            <a:endParaRPr lang="en-US" sz="1320" dirty="0"/>
+              <a:t>Translate this concept into clear decision rights, review steps, documentation.</a:t>
+            </a:r>
+            <a:endParaRPr lang="en-US" sz="1220" dirty="0"/>
           </a:p>
         </p:txBody>
       </p:sp>
@@ -7691,8 +7691,8 @@
         </p:nvSpPr>
         <p:spPr>
           <a:xfrm>
-            <a:off x="868680" y="1508760"/>
-            <a:ext cx="6309360" cy="4160520"/>
+            <a:off x="822960" y="1463040"/>
+            <a:ext cx="6565392" cy="4343400"/>
           </a:xfrm>
           <a:prstGeom prst="rect">
             <a:avLst/>
@@ -7710,7 +7710,7 @@
               <a:buNone/>
             </a:pPr>
             <a:r>
-              <a:rPr lang="en-US" sz="2100" dirty="0">
+              <a:rPr lang="en-US" sz="1920" dirty="0">
                 <a:solidFill>
                   <a:srgbClr val="003A63"/>
                 </a:solidFill>
@@ -7718,16 +7718,16 @@
                 <a:ea typeface="Aptos" pitchFamily="34" charset="-122"/>
                 <a:cs typeface="Aptos" pitchFamily="34" charset="-120"/>
               </a:rPr>
-              <a:t>• What evidence would governance, leadership, or operations staff need before moving forward?</a:t>
-            </a:r>
-            <a:endParaRPr lang="en-US" sz="2100" dirty="0"/>
-          </a:p>
-          <a:p>
-            <a:pPr indent="0" marL="0">
-              <a:buNone/>
-            </a:pPr>
-            <a:r>
-              <a:rPr lang="en-US" sz="2100" dirty="0">
+              <a:t>• What evidence would governance, leadership, or operations staff need before.</a:t>
+            </a:r>
+            <a:endParaRPr lang="en-US" sz="1920" dirty="0"/>
+          </a:p>
+          <a:p>
+            <a:pPr indent="0" marL="0">
+              <a:buNone/>
+            </a:pPr>
+            <a:r>
+              <a:rPr lang="en-US" sz="1920" dirty="0">
                 <a:solidFill>
                   <a:srgbClr val="003A63"/>
                 </a:solidFill>
@@ -7735,9 +7735,9 @@
                 <a:ea typeface="Aptos" pitchFamily="34" charset="-122"/>
                 <a:cs typeface="Aptos" pitchFamily="34" charset="-120"/>
               </a:rPr>
-              <a:t>• Which policy, data, equity, privacy, security, or workflow questions remain unresolved?</a:t>
-            </a:r>
-            <a:endParaRPr lang="en-US" sz="2100" dirty="0"/>
+              <a:t>• Which policy, data, equity, privacy, security, or workflow questions remain.</a:t>
+            </a:r>
+            <a:endParaRPr lang="en-US" sz="1920" dirty="0"/>
           </a:p>
         </p:txBody>
       </p:sp>
@@ -7749,12 +7749,12 @@
         </p:nvSpPr>
         <p:spPr>
           <a:xfrm>
-            <a:off x="7635240" y="1325880"/>
-            <a:ext cx="3474720" cy="1207008"/>
+            <a:off x="7543800" y="1325880"/>
+            <a:ext cx="3611880" cy="1261872"/>
           </a:xfrm>
           <a:prstGeom prst="roundRect">
             <a:avLst>
-              <a:gd name="adj" fmla="val 9091"/>
+              <a:gd name="adj" fmla="val 8696"/>
             </a:avLst>
           </a:prstGeom>
           <a:solidFill>
@@ -7776,8 +7776,8 @@
         </p:nvSpPr>
         <p:spPr>
           <a:xfrm>
-            <a:off x="7799832" y="1472184"/>
-            <a:ext cx="3145536" cy="256032"/>
+            <a:off x="7708392" y="1453896"/>
+            <a:ext cx="3282696" cy="228600"/>
           </a:xfrm>
           <a:prstGeom prst="rect">
             <a:avLst/>
@@ -7793,7 +7793,7 @@
               <a:buNone/>
             </a:pPr>
             <a:r>
-              <a:rPr lang="en-US" sz="1300" b="1" dirty="0">
+              <a:rPr lang="en-US" sz="1220" b="1" dirty="0">
                 <a:solidFill>
                   <a:srgbClr val="0068B7"/>
                 </a:solidFill>
@@ -7803,7 +7803,7 @@
               </a:rPr>
               <a:t>Governance lens</a:t>
             </a:r>
-            <a:endParaRPr lang="en-US" sz="1300" dirty="0"/>
+            <a:endParaRPr lang="en-US" sz="1220" dirty="0"/>
           </a:p>
         </p:txBody>
       </p:sp>
@@ -7815,8 +7815,8 @@
         </p:nvSpPr>
         <p:spPr>
           <a:xfrm>
-            <a:off x="7799832" y="1801368"/>
-            <a:ext cx="3145536" cy="640080"/>
+            <a:off x="7708392" y="1764792"/>
+            <a:ext cx="3282696" cy="749808"/>
           </a:xfrm>
           <a:prstGeom prst="rect">
             <a:avLst/>
@@ -7834,7 +7834,7 @@
               <a:buNone/>
             </a:pPr>
             <a:r>
-              <a:rPr lang="en-US" sz="1320" dirty="0">
+              <a:rPr lang="en-US" sz="1220" dirty="0">
                 <a:solidFill>
                   <a:srgbClr val="17364A"/>
                 </a:solidFill>
@@ -7842,9 +7842,9 @@
                 <a:ea typeface="Aptos" pitchFamily="34" charset="-122"/>
                 <a:cs typeface="Aptos" pitchFamily="34" charset="-120"/>
               </a:rPr>
-              <a:t>What evidence would governance, leadership, or operations staff need before moving.</a:t>
-            </a:r>
-            <a:endParaRPr lang="en-US" sz="1320" dirty="0"/>
+              <a:t>What evidence would governance, leadership, or operations staff need before.</a:t>
+            </a:r>
+            <a:endParaRPr lang="en-US" sz="1220" dirty="0"/>
           </a:p>
         </p:txBody>
       </p:sp>
@@ -7856,12 +7856,12 @@
         </p:nvSpPr>
         <p:spPr>
           <a:xfrm>
-            <a:off x="7635240" y="2670048"/>
-            <a:ext cx="3474720" cy="1377086"/>
+            <a:off x="7543800" y="2724912"/>
+            <a:ext cx="3611880" cy="1527048"/>
           </a:xfrm>
           <a:prstGeom prst="roundRect">
             <a:avLst>
-              <a:gd name="adj" fmla="val 7968"/>
+              <a:gd name="adj" fmla="val 7186"/>
             </a:avLst>
           </a:prstGeom>
           <a:solidFill>
@@ -7883,8 +7883,8 @@
         </p:nvSpPr>
         <p:spPr>
           <a:xfrm>
-            <a:off x="7799832" y="2816352"/>
-            <a:ext cx="3145536" cy="256032"/>
+            <a:off x="7708392" y="2852928"/>
+            <a:ext cx="3282696" cy="228600"/>
           </a:xfrm>
           <a:prstGeom prst="rect">
             <a:avLst/>
@@ -7900,7 +7900,7 @@
               <a:buNone/>
             </a:pPr>
             <a:r>
-              <a:rPr lang="en-US" sz="1300" b="1" dirty="0">
+              <a:rPr lang="en-US" sz="1220" b="1" dirty="0">
                 <a:solidFill>
                   <a:srgbClr val="0068B7"/>
                 </a:solidFill>
@@ -7910,7 +7910,7 @@
               </a:rPr>
               <a:t>Concept checkpoints</a:t>
             </a:r>
-            <a:endParaRPr lang="en-US" sz="1300" dirty="0"/>
+            <a:endParaRPr lang="en-US" sz="1220" dirty="0"/>
           </a:p>
         </p:txBody>
       </p:sp>
@@ -7922,8 +7922,8 @@
         </p:nvSpPr>
         <p:spPr>
           <a:xfrm>
-            <a:off x="7818120" y="3182112"/>
-            <a:ext cx="3090672" cy="718718"/>
+            <a:off x="7726680" y="3182112"/>
+            <a:ext cx="3227832" cy="960120"/>
           </a:xfrm>
           <a:prstGeom prst="rect">
             <a:avLst/>
@@ -7941,7 +7941,7 @@
               <a:buNone/>
             </a:pPr>
             <a:r>
-              <a:rPr lang="en-US" sz="1220" dirty="0">
+              <a:rPr lang="en-US" sz="1140" dirty="0">
                 <a:solidFill>
                   <a:srgbClr val="17364A"/>
                 </a:solidFill>
@@ -7949,16 +7949,16 @@
                 <a:ea typeface="Aptos" pitchFamily="34" charset="-122"/>
                 <a:cs typeface="Aptos" pitchFamily="34" charset="-120"/>
               </a:rPr>
-              <a:t>What evidence would governance, leadership, or operations staff.</a:t>
-            </a:r>
-            <a:endParaRPr lang="en-US" sz="1220" dirty="0"/>
-          </a:p>
-          <a:p>
-            <a:pPr indent="0" marL="0">
-              <a:buNone/>
-            </a:pPr>
-            <a:r>
-              <a:rPr lang="en-US" sz="1220" dirty="0">
+              <a:t>What evidence would governance, leadership, or.</a:t>
+            </a:r>
+            <a:endParaRPr lang="en-US" sz="1140" dirty="0"/>
+          </a:p>
+          <a:p>
+            <a:pPr indent="0" marL="0">
+              <a:buNone/>
+            </a:pPr>
+            <a:r>
+              <a:rPr lang="en-US" sz="1140" dirty="0">
                 <a:solidFill>
                   <a:srgbClr val="17364A"/>
                 </a:solidFill>
@@ -7966,9 +7966,9 @@
                 <a:ea typeface="Aptos" pitchFamily="34" charset="-122"/>
                 <a:cs typeface="Aptos" pitchFamily="34" charset="-120"/>
               </a:rPr>
-              <a:t>Which policy, data, equity, privacy, security, or workflow.</a:t>
-            </a:r>
-            <a:endParaRPr lang="en-US" sz="1220" dirty="0"/>
+              <a:t>Which policy, data, equity, privacy, security, or.</a:t>
+            </a:r>
+            <a:endParaRPr lang="en-US" sz="1140" dirty="0"/>
           </a:p>
         </p:txBody>
       </p:sp>
@@ -7980,12 +7980,12 @@
         </p:nvSpPr>
         <p:spPr>
           <a:xfrm>
-            <a:off x="7635240" y="4184294"/>
-            <a:ext cx="3474720" cy="1466698"/>
+            <a:off x="7543800" y="4389120"/>
+            <a:ext cx="3611880" cy="1261872"/>
           </a:xfrm>
           <a:prstGeom prst="roundRect">
             <a:avLst>
-              <a:gd name="adj" fmla="val 7481"/>
+              <a:gd name="adj" fmla="val 8696"/>
             </a:avLst>
           </a:prstGeom>
           <a:solidFill>
@@ -8007,8 +8007,8 @@
         </p:nvSpPr>
         <p:spPr>
           <a:xfrm>
-            <a:off x="7799832" y="4330598"/>
-            <a:ext cx="3145536" cy="256032"/>
+            <a:off x="7708392" y="4517136"/>
+            <a:ext cx="3282696" cy="228600"/>
           </a:xfrm>
           <a:prstGeom prst="rect">
             <a:avLst/>
@@ -8024,7 +8024,7 @@
               <a:buNone/>
             </a:pPr>
             <a:r>
-              <a:rPr lang="en-US" sz="1300" b="1" dirty="0">
+              <a:rPr lang="en-US" sz="1220" b="1" dirty="0">
                 <a:solidFill>
                   <a:srgbClr val="0068B7"/>
                 </a:solidFill>
@@ -8034,7 +8034,7 @@
               </a:rPr>
               <a:t>What to document</a:t>
             </a:r>
-            <a:endParaRPr lang="en-US" sz="1300" dirty="0"/>
+            <a:endParaRPr lang="en-US" sz="1220" dirty="0"/>
           </a:p>
         </p:txBody>
       </p:sp>
@@ -8046,8 +8046,8 @@
         </p:nvSpPr>
         <p:spPr>
           <a:xfrm>
-            <a:off x="7799832" y="4659782"/>
-            <a:ext cx="3145536" cy="899770"/>
+            <a:off x="7708392" y="4828032"/>
+            <a:ext cx="3282696" cy="749808"/>
           </a:xfrm>
           <a:prstGeom prst="rect">
             <a:avLst/>
@@ -8065,7 +8065,7 @@
               <a:buNone/>
             </a:pPr>
             <a:r>
-              <a:rPr lang="en-US" sz="1320" dirty="0">
+              <a:rPr lang="en-US" sz="1220" dirty="0">
                 <a:solidFill>
                   <a:srgbClr val="17364A"/>
                 </a:solidFill>
@@ -8073,9 +8073,9 @@
                 <a:ea typeface="Aptos" pitchFamily="34" charset="-122"/>
                 <a:cs typeface="Aptos" pitchFamily="34" charset="-120"/>
               </a:rPr>
-              <a:t>Translate this concept into clear decision rights, review steps, documentation expectations, and escalation paths before an AI-supported workflow is approved.</a:t>
-            </a:r>
-            <a:endParaRPr lang="en-US" sz="1320" dirty="0"/>
+              <a:t>Translate this concept into clear decision rights, review steps, documentation.</a:t>
+            </a:r>
+            <a:endParaRPr lang="en-US" sz="1220" dirty="0"/>
           </a:p>
         </p:txBody>
       </p:sp>
@@ -8366,8 +8366,8 @@
         </p:nvSpPr>
         <p:spPr>
           <a:xfrm>
-            <a:off x="868680" y="1508760"/>
-            <a:ext cx="6309360" cy="4160520"/>
+            <a:off x="822960" y="1463040"/>
+            <a:ext cx="6565392" cy="4343400"/>
           </a:xfrm>
           <a:prstGeom prst="rect">
             <a:avLst/>
@@ -8385,7 +8385,7 @@
               <a:buNone/>
             </a:pPr>
             <a:r>
-              <a:rPr lang="en-US" sz="2100" dirty="0">
+              <a:rPr lang="en-US" sz="1920" dirty="0">
                 <a:solidFill>
                   <a:srgbClr val="003A63"/>
                 </a:solidFill>
@@ -8395,14 +8395,14 @@
               </a:rPr>
               <a:t>• Create a public health AI policy scan and regulatory readiness memo.</a:t>
             </a:r>
-            <a:endParaRPr lang="en-US" sz="2100" dirty="0"/>
-          </a:p>
-          <a:p>
-            <a:pPr indent="0" marL="0">
-              <a:buNone/>
-            </a:pPr>
-            <a:r>
-              <a:rPr lang="en-US" sz="2100" dirty="0">
+            <a:endParaRPr lang="en-US" sz="1920" dirty="0"/>
+          </a:p>
+          <a:p>
+            <a:pPr indent="0" marL="0">
+              <a:buNone/>
+            </a:pPr>
+            <a:r>
+              <a:rPr lang="en-US" sz="1920" dirty="0">
                 <a:solidFill>
                   <a:srgbClr val="003A63"/>
                 </a:solidFill>
@@ -8410,9 +8410,9 @@
                 <a:ea typeface="Aptos" pitchFamily="34" charset="-122"/>
                 <a:cs typeface="Aptos" pitchFamily="34" charset="-120"/>
               </a:rPr>
-              <a:t>• Identify relevant policy domains, sources to monitor, current agency policy gaps, likely.</a:t>
-            </a:r>
-            <a:endParaRPr lang="en-US" sz="2100" dirty="0"/>
+              <a:t>• Identify relevant policy domains, sources to monitor, current agency policy.</a:t>
+            </a:r>
+            <a:endParaRPr lang="en-US" sz="1920" dirty="0"/>
           </a:p>
         </p:txBody>
       </p:sp>
@@ -8424,12 +8424,12 @@
         </p:nvSpPr>
         <p:spPr>
           <a:xfrm>
-            <a:off x="7635240" y="1325880"/>
-            <a:ext cx="3474720" cy="1207008"/>
+            <a:off x="7543800" y="1325880"/>
+            <a:ext cx="3611880" cy="1261872"/>
           </a:xfrm>
           <a:prstGeom prst="roundRect">
             <a:avLst>
-              <a:gd name="adj" fmla="val 9091"/>
+              <a:gd name="adj" fmla="val 8696"/>
             </a:avLst>
           </a:prstGeom>
           <a:solidFill>
@@ -8451,8 +8451,8 @@
         </p:nvSpPr>
         <p:spPr>
           <a:xfrm>
-            <a:off x="7799832" y="1472184"/>
-            <a:ext cx="3145536" cy="256032"/>
+            <a:off x="7708392" y="1453896"/>
+            <a:ext cx="3282696" cy="228600"/>
           </a:xfrm>
           <a:prstGeom prst="rect">
             <a:avLst/>
@@ -8468,7 +8468,7 @@
               <a:buNone/>
             </a:pPr>
             <a:r>
-              <a:rPr lang="en-US" sz="1300" b="1" dirty="0">
+              <a:rPr lang="en-US" sz="1220" b="1" dirty="0">
                 <a:solidFill>
                   <a:srgbClr val="0068B7"/>
                 </a:solidFill>
@@ -8478,7 +8478,7 @@
               </a:rPr>
               <a:t>Governance lens</a:t>
             </a:r>
-            <a:endParaRPr lang="en-US" sz="1300" dirty="0"/>
+            <a:endParaRPr lang="en-US" sz="1220" dirty="0"/>
           </a:p>
         </p:txBody>
       </p:sp>
@@ -8490,8 +8490,8 @@
         </p:nvSpPr>
         <p:spPr>
           <a:xfrm>
-            <a:off x="7799832" y="1801368"/>
-            <a:ext cx="3145536" cy="640080"/>
+            <a:off x="7708392" y="1764792"/>
+            <a:ext cx="3282696" cy="749808"/>
           </a:xfrm>
           <a:prstGeom prst="rect">
             <a:avLst/>
@@ -8509,7 +8509,7 @@
               <a:buNone/>
             </a:pPr>
             <a:r>
-              <a:rPr lang="en-US" sz="1320" dirty="0">
+              <a:rPr lang="en-US" sz="1220" dirty="0">
                 <a:solidFill>
                   <a:srgbClr val="17364A"/>
                 </a:solidFill>
@@ -8519,7 +8519,7 @@
               </a:rPr>
               <a:t>Create a public health AI policy scan and regulatory readiness memo.</a:t>
             </a:r>
-            <a:endParaRPr lang="en-US" sz="1320" dirty="0"/>
+            <a:endParaRPr lang="en-US" sz="1220" dirty="0"/>
           </a:p>
         </p:txBody>
       </p:sp>
@@ -8531,12 +8531,12 @@
         </p:nvSpPr>
         <p:spPr>
           <a:xfrm>
-            <a:off x="7635240" y="2670048"/>
-            <a:ext cx="3474720" cy="1377086"/>
+            <a:off x="7543800" y="2724912"/>
+            <a:ext cx="3611880" cy="1527048"/>
           </a:xfrm>
           <a:prstGeom prst="roundRect">
             <a:avLst>
-              <a:gd name="adj" fmla="val 7968"/>
+              <a:gd name="adj" fmla="val 7186"/>
             </a:avLst>
           </a:prstGeom>
           <a:solidFill>
@@ -8558,8 +8558,8 @@
         </p:nvSpPr>
         <p:spPr>
           <a:xfrm>
-            <a:off x="7799832" y="2816352"/>
-            <a:ext cx="3145536" cy="256032"/>
+            <a:off x="7708392" y="2852928"/>
+            <a:ext cx="3282696" cy="228600"/>
           </a:xfrm>
           <a:prstGeom prst="rect">
             <a:avLst/>
@@ -8575,7 +8575,7 @@
               <a:buNone/>
             </a:pPr>
             <a:r>
-              <a:rPr lang="en-US" sz="1300" b="1" dirty="0">
+              <a:rPr lang="en-US" sz="1220" b="1" dirty="0">
                 <a:solidFill>
                   <a:srgbClr val="0068B7"/>
                 </a:solidFill>
@@ -8585,7 +8585,7 @@
               </a:rPr>
               <a:t>Concept checkpoints</a:t>
             </a:r>
-            <a:endParaRPr lang="en-US" sz="1300" dirty="0"/>
+            <a:endParaRPr lang="en-US" sz="1220" dirty="0"/>
           </a:p>
         </p:txBody>
       </p:sp>
@@ -8597,8 +8597,8 @@
         </p:nvSpPr>
         <p:spPr>
           <a:xfrm>
-            <a:off x="7818120" y="3182112"/>
-            <a:ext cx="3090672" cy="718718"/>
+            <a:off x="7726680" y="3182112"/>
+            <a:ext cx="3227832" cy="960120"/>
           </a:xfrm>
           <a:prstGeom prst="rect">
             <a:avLst/>
@@ -8616,7 +8616,7 @@
               <a:buNone/>
             </a:pPr>
             <a:r>
-              <a:rPr lang="en-US" sz="1220" dirty="0">
+              <a:rPr lang="en-US" sz="1140" dirty="0">
                 <a:solidFill>
                   <a:srgbClr val="17364A"/>
                 </a:solidFill>
@@ -8624,16 +8624,16 @@
                 <a:ea typeface="Aptos" pitchFamily="34" charset="-122"/>
                 <a:cs typeface="Aptos" pitchFamily="34" charset="-120"/>
               </a:rPr>
-              <a:t>Create a public health AI policy scan and regulatory readiness memo.</a:t>
-            </a:r>
-            <a:endParaRPr lang="en-US" sz="1220" dirty="0"/>
-          </a:p>
-          <a:p>
-            <a:pPr indent="0" marL="0">
-              <a:buNone/>
-            </a:pPr>
-            <a:r>
-              <a:rPr lang="en-US" sz="1220" dirty="0">
+              <a:t>Create a public health AI policy scan and.</a:t>
+            </a:r>
+            <a:endParaRPr lang="en-US" sz="1140" dirty="0"/>
+          </a:p>
+          <a:p>
+            <a:pPr indent="0" marL="0">
+              <a:buNone/>
+            </a:pPr>
+            <a:r>
+              <a:rPr lang="en-US" sz="1140" dirty="0">
                 <a:solidFill>
                   <a:srgbClr val="17364A"/>
                 </a:solidFill>
@@ -8641,9 +8641,9 @@
                 <a:ea typeface="Aptos" pitchFamily="34" charset="-122"/>
                 <a:cs typeface="Aptos" pitchFamily="34" charset="-120"/>
               </a:rPr>
-              <a:t>Identify relevant policy domains, sources to monitor, current.</a:t>
-            </a:r>
-            <a:endParaRPr lang="en-US" sz="1220" dirty="0"/>
+              <a:t>Identify relevant policy domains, sources to.</a:t>
+            </a:r>
+            <a:endParaRPr lang="en-US" sz="1140" dirty="0"/>
           </a:p>
         </p:txBody>
       </p:sp>
@@ -8655,12 +8655,12 @@
         </p:nvSpPr>
         <p:spPr>
           <a:xfrm>
-            <a:off x="7635240" y="4184294"/>
-            <a:ext cx="3474720" cy="1466698"/>
+            <a:off x="7543800" y="4389120"/>
+            <a:ext cx="3611880" cy="1261872"/>
           </a:xfrm>
           <a:prstGeom prst="roundRect">
             <a:avLst>
-              <a:gd name="adj" fmla="val 7481"/>
+              <a:gd name="adj" fmla="val 8696"/>
             </a:avLst>
           </a:prstGeom>
           <a:solidFill>
@@ -8682,8 +8682,8 @@
         </p:nvSpPr>
         <p:spPr>
           <a:xfrm>
-            <a:off x="7799832" y="4330598"/>
-            <a:ext cx="3145536" cy="256032"/>
+            <a:off x="7708392" y="4517136"/>
+            <a:ext cx="3282696" cy="228600"/>
           </a:xfrm>
           <a:prstGeom prst="rect">
             <a:avLst/>
@@ -8699,7 +8699,7 @@
               <a:buNone/>
             </a:pPr>
             <a:r>
-              <a:rPr lang="en-US" sz="1300" b="1" dirty="0">
+              <a:rPr lang="en-US" sz="1220" b="1" dirty="0">
                 <a:solidFill>
                   <a:srgbClr val="0068B7"/>
                 </a:solidFill>
@@ -8709,7 +8709,7 @@
               </a:rPr>
               <a:t>What to document</a:t>
             </a:r>
-            <a:endParaRPr lang="en-US" sz="1300" dirty="0"/>
+            <a:endParaRPr lang="en-US" sz="1220" dirty="0"/>
           </a:p>
         </p:txBody>
       </p:sp>
@@ -8721,8 +8721,8 @@
         </p:nvSpPr>
         <p:spPr>
           <a:xfrm>
-            <a:off x="7799832" y="4659782"/>
-            <a:ext cx="3145536" cy="899770"/>
+            <a:off x="7708392" y="4828032"/>
+            <a:ext cx="3282696" cy="749808"/>
           </a:xfrm>
           <a:prstGeom prst="rect">
             <a:avLst/>
@@ -8740,7 +8740,7 @@
               <a:buNone/>
             </a:pPr>
             <a:r>
-              <a:rPr lang="en-US" sz="1320" dirty="0">
+              <a:rPr lang="en-US" sz="1220" dirty="0">
                 <a:solidFill>
                   <a:srgbClr val="17364A"/>
                 </a:solidFill>
@@ -8748,9 +8748,9 @@
                 <a:ea typeface="Aptos" pitchFamily="34" charset="-122"/>
                 <a:cs typeface="Aptos" pitchFamily="34" charset="-120"/>
               </a:rPr>
-              <a:t>Use the assignment to test whether you can explain the concept, apply it to a realistic public health situation, and identify what would need review before the work moves forward.</a:t>
-            </a:r>
-            <a:endParaRPr lang="en-US" sz="1320" dirty="0"/>
+              <a:t>Use the assignment to test whether you can explain the concept, apply it to a.</a:t>
+            </a:r>
+            <a:endParaRPr lang="en-US" sz="1220" dirty="0"/>
           </a:p>
         </p:txBody>
       </p:sp>
@@ -9041,8 +9041,8 @@
         </p:nvSpPr>
         <p:spPr>
           <a:xfrm>
-            <a:off x="868680" y="1508760"/>
-            <a:ext cx="6309360" cy="4160520"/>
+            <a:off x="822960" y="1463040"/>
+            <a:ext cx="6565392" cy="4343400"/>
           </a:xfrm>
           <a:prstGeom prst="rect">
             <a:avLst/>
@@ -9060,7 +9060,7 @@
               <a:buNone/>
             </a:pPr>
             <a:r>
-              <a:rPr lang="en-US" sz="2100" dirty="0">
+              <a:rPr lang="en-US" sz="1920" dirty="0">
                 <a:solidFill>
                   <a:srgbClr val="003A63"/>
                 </a:solidFill>
@@ -9070,14 +9070,14 @@
               </a:rPr>
               <a:t>• AI policy scan plan</a:t>
             </a:r>
-            <a:endParaRPr lang="en-US" sz="2100" dirty="0"/>
-          </a:p>
-          <a:p>
-            <a:pPr indent="0" marL="0">
-              <a:buNone/>
-            </a:pPr>
-            <a:r>
-              <a:rPr lang="en-US" sz="2100" dirty="0">
+            <a:endParaRPr lang="en-US" sz="1920" dirty="0"/>
+          </a:p>
+          <a:p>
+            <a:pPr indent="0" marL="0">
+              <a:buNone/>
+            </a:pPr>
+            <a:r>
+              <a:rPr lang="en-US" sz="1920" dirty="0">
                 <a:solidFill>
                   <a:srgbClr val="003A63"/>
                 </a:solidFill>
@@ -9087,14 +9087,14 @@
               </a:rPr>
               <a:t>• Regulatory readiness memo</a:t>
             </a:r>
-            <a:endParaRPr lang="en-US" sz="2100" dirty="0"/>
-          </a:p>
-          <a:p>
-            <a:pPr indent="0" marL="0">
-              <a:buNone/>
-            </a:pPr>
-            <a:r>
-              <a:rPr lang="en-US" sz="2100" dirty="0">
+            <a:endParaRPr lang="en-US" sz="1920" dirty="0"/>
+          </a:p>
+          <a:p>
+            <a:pPr indent="0" marL="0">
+              <a:buNone/>
+            </a:pPr>
+            <a:r>
+              <a:rPr lang="en-US" sz="1920" dirty="0">
                 <a:solidFill>
                   <a:srgbClr val="003A63"/>
                 </a:solidFill>
@@ -9104,7 +9104,7 @@
               </a:rPr>
               <a:t>• Policy-domain crosswalk</a:t>
             </a:r>
-            <a:endParaRPr lang="en-US" sz="2100" dirty="0"/>
+            <a:endParaRPr lang="en-US" sz="1920" dirty="0"/>
           </a:p>
         </p:txBody>
       </p:sp>
@@ -9116,12 +9116,12 @@
         </p:nvSpPr>
         <p:spPr>
           <a:xfrm>
-            <a:off x="7635240" y="1325880"/>
-            <a:ext cx="3474720" cy="1207008"/>
+            <a:off x="7543800" y="1325880"/>
+            <a:ext cx="3611880" cy="1261872"/>
           </a:xfrm>
           <a:prstGeom prst="roundRect">
             <a:avLst>
-              <a:gd name="adj" fmla="val 9091"/>
+              <a:gd name="adj" fmla="val 8696"/>
             </a:avLst>
           </a:prstGeom>
           <a:solidFill>
@@ -9143,8 +9143,8 @@
         </p:nvSpPr>
         <p:spPr>
           <a:xfrm>
-            <a:off x="7799832" y="1472184"/>
-            <a:ext cx="3145536" cy="256032"/>
+            <a:off x="7708392" y="1453896"/>
+            <a:ext cx="3282696" cy="228600"/>
           </a:xfrm>
           <a:prstGeom prst="rect">
             <a:avLst/>
@@ -9160,7 +9160,7 @@
               <a:buNone/>
             </a:pPr>
             <a:r>
-              <a:rPr lang="en-US" sz="1300" b="1" dirty="0">
+              <a:rPr lang="en-US" sz="1220" b="1" dirty="0">
                 <a:solidFill>
                   <a:srgbClr val="0068B7"/>
                 </a:solidFill>
@@ -9170,7 +9170,7 @@
               </a:rPr>
               <a:t>Governance lens</a:t>
             </a:r>
-            <a:endParaRPr lang="en-US" sz="1300" dirty="0"/>
+            <a:endParaRPr lang="en-US" sz="1220" dirty="0"/>
           </a:p>
         </p:txBody>
       </p:sp>
@@ -9182,8 +9182,8 @@
         </p:nvSpPr>
         <p:spPr>
           <a:xfrm>
-            <a:off x="7799832" y="1801368"/>
-            <a:ext cx="3145536" cy="640080"/>
+            <a:off x="7708392" y="1764792"/>
+            <a:ext cx="3282696" cy="749808"/>
           </a:xfrm>
           <a:prstGeom prst="rect">
             <a:avLst/>
@@ -9201,7 +9201,7 @@
               <a:buNone/>
             </a:pPr>
             <a:r>
-              <a:rPr lang="en-US" sz="1320" dirty="0">
+              <a:rPr lang="en-US" sz="1220" dirty="0">
                 <a:solidFill>
                   <a:srgbClr val="17364A"/>
                 </a:solidFill>
@@ -9211,7 +9211,7 @@
               </a:rPr>
               <a:t>AI policy scan plan</a:t>
             </a:r>
-            <a:endParaRPr lang="en-US" sz="1320" dirty="0"/>
+            <a:endParaRPr lang="en-US" sz="1220" dirty="0"/>
           </a:p>
         </p:txBody>
       </p:sp>
@@ -9223,12 +9223,12 @@
         </p:nvSpPr>
         <p:spPr>
           <a:xfrm>
-            <a:off x="7635240" y="2670048"/>
-            <a:ext cx="3474720" cy="1377086"/>
+            <a:off x="7543800" y="2724912"/>
+            <a:ext cx="3611880" cy="1527048"/>
           </a:xfrm>
           <a:prstGeom prst="roundRect">
             <a:avLst>
-              <a:gd name="adj" fmla="val 7968"/>
+              <a:gd name="adj" fmla="val 7186"/>
             </a:avLst>
           </a:prstGeom>
           <a:solidFill>
@@ -9250,8 +9250,8 @@
         </p:nvSpPr>
         <p:spPr>
           <a:xfrm>
-            <a:off x="7799832" y="2816352"/>
-            <a:ext cx="3145536" cy="256032"/>
+            <a:off x="7708392" y="2852928"/>
+            <a:ext cx="3282696" cy="228600"/>
           </a:xfrm>
           <a:prstGeom prst="rect">
             <a:avLst/>
@@ -9267,7 +9267,7 @@
               <a:buNone/>
             </a:pPr>
             <a:r>
-              <a:rPr lang="en-US" sz="1300" b="1" dirty="0">
+              <a:rPr lang="en-US" sz="1220" b="1" dirty="0">
                 <a:solidFill>
                   <a:srgbClr val="0068B7"/>
                 </a:solidFill>
@@ -9277,7 +9277,7 @@
               </a:rPr>
               <a:t>Concept checkpoints</a:t>
             </a:r>
-            <a:endParaRPr lang="en-US" sz="1300" dirty="0"/>
+            <a:endParaRPr lang="en-US" sz="1220" dirty="0"/>
           </a:p>
         </p:txBody>
       </p:sp>
@@ -9289,8 +9289,8 @@
         </p:nvSpPr>
         <p:spPr>
           <a:xfrm>
-            <a:off x="7818120" y="3182112"/>
-            <a:ext cx="3090672" cy="718718"/>
+            <a:off x="7726680" y="3182112"/>
+            <a:ext cx="3227832" cy="960120"/>
           </a:xfrm>
           <a:prstGeom prst="rect">
             <a:avLst/>
@@ -9308,7 +9308,7 @@
               <a:buNone/>
             </a:pPr>
             <a:r>
-              <a:rPr lang="en-US" sz="1220" dirty="0">
+              <a:rPr lang="en-US" sz="1140" dirty="0">
                 <a:solidFill>
                   <a:srgbClr val="17364A"/>
                 </a:solidFill>
@@ -9318,14 +9318,14 @@
               </a:rPr>
               <a:t>AI policy scan plan</a:t>
             </a:r>
-            <a:endParaRPr lang="en-US" sz="1220" dirty="0"/>
-          </a:p>
-          <a:p>
-            <a:pPr indent="0" marL="0">
-              <a:buNone/>
-            </a:pPr>
-            <a:r>
-              <a:rPr lang="en-US" sz="1220" dirty="0">
+            <a:endParaRPr lang="en-US" sz="1140" dirty="0"/>
+          </a:p>
+          <a:p>
+            <a:pPr indent="0" marL="0">
+              <a:buNone/>
+            </a:pPr>
+            <a:r>
+              <a:rPr lang="en-US" sz="1140" dirty="0">
                 <a:solidFill>
                   <a:srgbClr val="17364A"/>
                 </a:solidFill>
@@ -9335,14 +9335,14 @@
               </a:rPr>
               <a:t>Regulatory readiness memo</a:t>
             </a:r>
-            <a:endParaRPr lang="en-US" sz="1220" dirty="0"/>
-          </a:p>
-          <a:p>
-            <a:pPr indent="0" marL="0">
-              <a:buNone/>
-            </a:pPr>
-            <a:r>
-              <a:rPr lang="en-US" sz="1220" dirty="0">
+            <a:endParaRPr lang="en-US" sz="1140" dirty="0"/>
+          </a:p>
+          <a:p>
+            <a:pPr indent="0" marL="0">
+              <a:buNone/>
+            </a:pPr>
+            <a:r>
+              <a:rPr lang="en-US" sz="1140" dirty="0">
                 <a:solidFill>
                   <a:srgbClr val="17364A"/>
                 </a:solidFill>
@@ -9352,7 +9352,7 @@
               </a:rPr>
               <a:t>Policy-domain crosswalk</a:t>
             </a:r>
-            <a:endParaRPr lang="en-US" sz="1220" dirty="0"/>
+            <a:endParaRPr lang="en-US" sz="1140" dirty="0"/>
           </a:p>
         </p:txBody>
       </p:sp>
@@ -9364,12 +9364,12 @@
         </p:nvSpPr>
         <p:spPr>
           <a:xfrm>
-            <a:off x="7635240" y="4184294"/>
-            <a:ext cx="3474720" cy="1466698"/>
+            <a:off x="7543800" y="4389120"/>
+            <a:ext cx="3611880" cy="1261872"/>
           </a:xfrm>
           <a:prstGeom prst="roundRect">
             <a:avLst>
-              <a:gd name="adj" fmla="val 7481"/>
+              <a:gd name="adj" fmla="val 8696"/>
             </a:avLst>
           </a:prstGeom>
           <a:solidFill>
@@ -9391,8 +9391,8 @@
         </p:nvSpPr>
         <p:spPr>
           <a:xfrm>
-            <a:off x="7799832" y="4330598"/>
-            <a:ext cx="3145536" cy="256032"/>
+            <a:off x="7708392" y="4517136"/>
+            <a:ext cx="3282696" cy="228600"/>
           </a:xfrm>
           <a:prstGeom prst="rect">
             <a:avLst/>
@@ -9408,7 +9408,7 @@
               <a:buNone/>
             </a:pPr>
             <a:r>
-              <a:rPr lang="en-US" sz="1300" b="1" dirty="0">
+              <a:rPr lang="en-US" sz="1220" b="1" dirty="0">
                 <a:solidFill>
                   <a:srgbClr val="0068B7"/>
                 </a:solidFill>
@@ -9418,7 +9418,7 @@
               </a:rPr>
               <a:t>What to document</a:t>
             </a:r>
-            <a:endParaRPr lang="en-US" sz="1300" dirty="0"/>
+            <a:endParaRPr lang="en-US" sz="1220" dirty="0"/>
           </a:p>
         </p:txBody>
       </p:sp>
@@ -9430,8 +9430,8 @@
         </p:nvSpPr>
         <p:spPr>
           <a:xfrm>
-            <a:off x="7799832" y="4659782"/>
-            <a:ext cx="3145536" cy="899770"/>
+            <a:off x="7708392" y="4828032"/>
+            <a:ext cx="3282696" cy="749808"/>
           </a:xfrm>
           <a:prstGeom prst="rect">
             <a:avLst/>
@@ -9449,7 +9449,7 @@
               <a:buNone/>
             </a:pPr>
             <a:r>
-              <a:rPr lang="en-US" sz="1320" dirty="0">
+              <a:rPr lang="en-US" sz="1220" dirty="0">
                 <a:solidFill>
                   <a:srgbClr val="17364A"/>
                 </a:solidFill>
@@ -9457,9 +9457,9 @@
                 <a:ea typeface="Aptos" pitchFamily="34" charset="-122"/>
                 <a:cs typeface="Aptos" pitchFamily="34" charset="-120"/>
               </a:rPr>
-              <a:t>Translate this concept into clear decision rights, review steps, documentation expectations, and escalation paths before an AI-supported workflow is approved.</a:t>
-            </a:r>
-            <a:endParaRPr lang="en-US" sz="1320" dirty="0"/>
+              <a:t>Translate this concept into clear decision rights, review steps, documentation.</a:t>
+            </a:r>
+            <a:endParaRPr lang="en-US" sz="1220" dirty="0"/>
           </a:p>
         </p:txBody>
       </p:sp>
@@ -9750,8 +9750,8 @@
         </p:nvSpPr>
         <p:spPr>
           <a:xfrm>
-            <a:off x="868680" y="1508760"/>
-            <a:ext cx="6309360" cy="4160520"/>
+            <a:off x="822960" y="1463040"/>
+            <a:ext cx="6565392" cy="4343400"/>
           </a:xfrm>
           <a:prstGeom prst="rect">
             <a:avLst/>
@@ -9769,7 +9769,7 @@
               <a:buNone/>
             </a:pPr>
             <a:r>
-              <a:rPr lang="en-US" sz="2100" dirty="0">
+              <a:rPr lang="en-US" sz="1920" dirty="0">
                 <a:solidFill>
                   <a:srgbClr val="003A63"/>
                 </a:solidFill>
@@ -9779,14 +9779,14 @@
               </a:rPr>
               <a:t>• Recommended policy updates</a:t>
             </a:r>
-            <a:endParaRPr lang="en-US" sz="2100" dirty="0"/>
-          </a:p>
-          <a:p>
-            <a:pPr indent="0" marL="0">
-              <a:buNone/>
-            </a:pPr>
-            <a:r>
-              <a:rPr lang="en-US" sz="2100" dirty="0">
+            <a:endParaRPr lang="en-US" sz="1920" dirty="0"/>
+          </a:p>
+          <a:p>
+            <a:pPr indent="0" marL="0">
+              <a:buNone/>
+            </a:pPr>
+            <a:r>
+              <a:rPr lang="en-US" sz="1920" dirty="0">
                 <a:solidFill>
                   <a:srgbClr val="003A63"/>
                 </a:solidFill>
@@ -9796,7 +9796,7 @@
               </a:rPr>
               <a:t>• Ongoing monitoring process</a:t>
             </a:r>
-            <a:endParaRPr lang="en-US" sz="2100" dirty="0"/>
+            <a:endParaRPr lang="en-US" sz="1920" dirty="0"/>
           </a:p>
         </p:txBody>
       </p:sp>
@@ -9808,12 +9808,12 @@
         </p:nvSpPr>
         <p:spPr>
           <a:xfrm>
-            <a:off x="7635240" y="1325880"/>
-            <a:ext cx="3474720" cy="1207008"/>
+            <a:off x="7543800" y="1325880"/>
+            <a:ext cx="3611880" cy="1261872"/>
           </a:xfrm>
           <a:prstGeom prst="roundRect">
             <a:avLst>
-              <a:gd name="adj" fmla="val 9091"/>
+              <a:gd name="adj" fmla="val 8696"/>
             </a:avLst>
           </a:prstGeom>
           <a:solidFill>
@@ -9835,8 +9835,8 @@
         </p:nvSpPr>
         <p:spPr>
           <a:xfrm>
-            <a:off x="7799832" y="1472184"/>
-            <a:ext cx="3145536" cy="256032"/>
+            <a:off x="7708392" y="1453896"/>
+            <a:ext cx="3282696" cy="228600"/>
           </a:xfrm>
           <a:prstGeom prst="rect">
             <a:avLst/>
@@ -9852,7 +9852,7 @@
               <a:buNone/>
             </a:pPr>
             <a:r>
-              <a:rPr lang="en-US" sz="1300" b="1" dirty="0">
+              <a:rPr lang="en-US" sz="1220" b="1" dirty="0">
                 <a:solidFill>
                   <a:srgbClr val="0068B7"/>
                 </a:solidFill>
@@ -9862,7 +9862,7 @@
               </a:rPr>
               <a:t>Governance lens</a:t>
             </a:r>
-            <a:endParaRPr lang="en-US" sz="1300" dirty="0"/>
+            <a:endParaRPr lang="en-US" sz="1220" dirty="0"/>
           </a:p>
         </p:txBody>
       </p:sp>
@@ -9874,8 +9874,8 @@
         </p:nvSpPr>
         <p:spPr>
           <a:xfrm>
-            <a:off x="7799832" y="1801368"/>
-            <a:ext cx="3145536" cy="640080"/>
+            <a:off x="7708392" y="1764792"/>
+            <a:ext cx="3282696" cy="749808"/>
           </a:xfrm>
           <a:prstGeom prst="rect">
             <a:avLst/>
@@ -9893,7 +9893,7 @@
               <a:buNone/>
             </a:pPr>
             <a:r>
-              <a:rPr lang="en-US" sz="1320" dirty="0">
+              <a:rPr lang="en-US" sz="1220" dirty="0">
                 <a:solidFill>
                   <a:srgbClr val="17364A"/>
                 </a:solidFill>
@@ -9903,7 +9903,7 @@
               </a:rPr>
               <a:t>Recommended policy updates</a:t>
             </a:r>
-            <a:endParaRPr lang="en-US" sz="1320" dirty="0"/>
+            <a:endParaRPr lang="en-US" sz="1220" dirty="0"/>
           </a:p>
         </p:txBody>
       </p:sp>
@@ -9915,12 +9915,12 @@
         </p:nvSpPr>
         <p:spPr>
           <a:xfrm>
-            <a:off x="7635240" y="2670048"/>
-            <a:ext cx="3474720" cy="1377086"/>
+            <a:off x="7543800" y="2724912"/>
+            <a:ext cx="3611880" cy="1527048"/>
           </a:xfrm>
           <a:prstGeom prst="roundRect">
             <a:avLst>
-              <a:gd name="adj" fmla="val 7968"/>
+              <a:gd name="adj" fmla="val 7186"/>
             </a:avLst>
           </a:prstGeom>
           <a:solidFill>
@@ -9942,8 +9942,8 @@
         </p:nvSpPr>
         <p:spPr>
           <a:xfrm>
-            <a:off x="7799832" y="2816352"/>
-            <a:ext cx="3145536" cy="256032"/>
+            <a:off x="7708392" y="2852928"/>
+            <a:ext cx="3282696" cy="228600"/>
           </a:xfrm>
           <a:prstGeom prst="rect">
             <a:avLst/>
@@ -9959,7 +9959,7 @@
               <a:buNone/>
             </a:pPr>
             <a:r>
-              <a:rPr lang="en-US" sz="1300" b="1" dirty="0">
+              <a:rPr lang="en-US" sz="1220" b="1" dirty="0">
                 <a:solidFill>
                   <a:srgbClr val="0068B7"/>
                 </a:solidFill>
@@ -9969,7 +9969,7 @@
               </a:rPr>
               <a:t>Concept checkpoints</a:t>
             </a:r>
-            <a:endParaRPr lang="en-US" sz="1300" dirty="0"/>
+            <a:endParaRPr lang="en-US" sz="1220" dirty="0"/>
           </a:p>
         </p:txBody>
       </p:sp>
@@ -9981,8 +9981,8 @@
         </p:nvSpPr>
         <p:spPr>
           <a:xfrm>
-            <a:off x="7818120" y="3182112"/>
-            <a:ext cx="3090672" cy="718718"/>
+            <a:off x="7726680" y="3182112"/>
+            <a:ext cx="3227832" cy="960120"/>
           </a:xfrm>
           <a:prstGeom prst="rect">
             <a:avLst/>
@@ -10000,7 +10000,7 @@
               <a:buNone/>
             </a:pPr>
             <a:r>
-              <a:rPr lang="en-US" sz="1220" dirty="0">
+              <a:rPr lang="en-US" sz="1140" dirty="0">
                 <a:solidFill>
                   <a:srgbClr val="17364A"/>
                 </a:solidFill>
@@ -10010,14 +10010,14 @@
               </a:rPr>
               <a:t>Recommended policy updates</a:t>
             </a:r>
-            <a:endParaRPr lang="en-US" sz="1220" dirty="0"/>
-          </a:p>
-          <a:p>
-            <a:pPr indent="0" marL="0">
-              <a:buNone/>
-            </a:pPr>
-            <a:r>
-              <a:rPr lang="en-US" sz="1220" dirty="0">
+            <a:endParaRPr lang="en-US" sz="1140" dirty="0"/>
+          </a:p>
+          <a:p>
+            <a:pPr indent="0" marL="0">
+              <a:buNone/>
+            </a:pPr>
+            <a:r>
+              <a:rPr lang="en-US" sz="1140" dirty="0">
                 <a:solidFill>
                   <a:srgbClr val="17364A"/>
                 </a:solidFill>
@@ -10027,7 +10027,7 @@
               </a:rPr>
               <a:t>Ongoing monitoring process</a:t>
             </a:r>
-            <a:endParaRPr lang="en-US" sz="1220" dirty="0"/>
+            <a:endParaRPr lang="en-US" sz="1140" dirty="0"/>
           </a:p>
         </p:txBody>
       </p:sp>
@@ -10039,12 +10039,12 @@
         </p:nvSpPr>
         <p:spPr>
           <a:xfrm>
-            <a:off x="7635240" y="4184294"/>
-            <a:ext cx="3474720" cy="1466698"/>
+            <a:off x="7543800" y="4389120"/>
+            <a:ext cx="3611880" cy="1261872"/>
           </a:xfrm>
           <a:prstGeom prst="roundRect">
             <a:avLst>
-              <a:gd name="adj" fmla="val 7481"/>
+              <a:gd name="adj" fmla="val 8696"/>
             </a:avLst>
           </a:prstGeom>
           <a:solidFill>
@@ -10066,8 +10066,8 @@
         </p:nvSpPr>
         <p:spPr>
           <a:xfrm>
-            <a:off x="7799832" y="4330598"/>
-            <a:ext cx="3145536" cy="256032"/>
+            <a:off x="7708392" y="4517136"/>
+            <a:ext cx="3282696" cy="228600"/>
           </a:xfrm>
           <a:prstGeom prst="rect">
             <a:avLst/>
@@ -10083,7 +10083,7 @@
               <a:buNone/>
             </a:pPr>
             <a:r>
-              <a:rPr lang="en-US" sz="1300" b="1" dirty="0">
+              <a:rPr lang="en-US" sz="1220" b="1" dirty="0">
                 <a:solidFill>
                   <a:srgbClr val="0068B7"/>
                 </a:solidFill>
@@ -10093,7 +10093,7 @@
               </a:rPr>
               <a:t>What to document</a:t>
             </a:r>
-            <a:endParaRPr lang="en-US" sz="1300" dirty="0"/>
+            <a:endParaRPr lang="en-US" sz="1220" dirty="0"/>
           </a:p>
         </p:txBody>
       </p:sp>
@@ -10105,8 +10105,8 @@
         </p:nvSpPr>
         <p:spPr>
           <a:xfrm>
-            <a:off x="7799832" y="4659782"/>
-            <a:ext cx="3145536" cy="899770"/>
+            <a:off x="7708392" y="4828032"/>
+            <a:ext cx="3282696" cy="749808"/>
           </a:xfrm>
           <a:prstGeom prst="rect">
             <a:avLst/>
@@ -10124,7 +10124,7 @@
               <a:buNone/>
             </a:pPr>
             <a:r>
-              <a:rPr lang="en-US" sz="1320" dirty="0">
+              <a:rPr lang="en-US" sz="1220" dirty="0">
                 <a:solidFill>
                   <a:srgbClr val="17364A"/>
                 </a:solidFill>
@@ -10132,9 +10132,9 @@
                 <a:ea typeface="Aptos" pitchFamily="34" charset="-122"/>
                 <a:cs typeface="Aptos" pitchFamily="34" charset="-120"/>
               </a:rPr>
-              <a:t>Translate this concept into clear decision rights, review steps, documentation expectations, and escalation paths before an AI-supported workflow is approved.</a:t>
-            </a:r>
-            <a:endParaRPr lang="en-US" sz="1320" dirty="0"/>
+              <a:t>Translate this concept into clear decision rights, review steps, documentation.</a:t>
+            </a:r>
+            <a:endParaRPr lang="en-US" sz="1220" dirty="0"/>
           </a:p>
         </p:txBody>
       </p:sp>
@@ -10452,7 +10452,7 @@
                 <a:ea typeface="Aptos" pitchFamily="34" charset="-122"/>
                 <a:cs typeface="Aptos" pitchFamily="34" charset="-120"/>
               </a:rPr>
-              <a:t>• The public health AI policy landscape is evolving quickly across federal agencies, states,.</a:t>
+              <a:t>• The public health AI policy landscape is evolving quickly across federal.</a:t>
             </a:r>
             <a:endParaRPr lang="en-US" sz="2100" dirty="0"/>
           </a:p>
@@ -10469,7 +10469,7 @@
                 <a:ea typeface="Aptos" pitchFamily="34" charset="-122"/>
                 <a:cs typeface="Aptos" pitchFamily="34" charset="-120"/>
               </a:rPr>
-              <a:t>• Public health agencies do not need to wait for every rule to be settled before acting.</a:t>
+              <a:t>• Public health agencies do not need to wait for every rule to be settled.</a:t>
             </a:r>
             <a:endParaRPr lang="en-US" sz="2100" dirty="0"/>
           </a:p>
@@ -10486,7 +10486,7 @@
                 <a:ea typeface="Aptos" pitchFamily="34" charset="-122"/>
                 <a:cs typeface="Aptos" pitchFamily="34" charset="-120"/>
               </a:rPr>
-              <a:t>• Regulatory readiness means the agency can identify relevant requirements, update internal.</a:t>
+              <a:t>• Regulatory readiness means the agency can identify relevant requirements,.</a:t>
             </a:r>
             <a:endParaRPr lang="en-US" sz="2100" dirty="0"/>
           </a:p>
@@ -10527,8 +10527,8 @@
         </p:nvSpPr>
         <p:spPr>
           <a:xfrm>
-            <a:off x="8074152" y="1563624"/>
-            <a:ext cx="2825496" cy="256032"/>
+            <a:off x="8074152" y="1545336"/>
+            <a:ext cx="2825496" cy="228600"/>
           </a:xfrm>
           <a:prstGeom prst="rect">
             <a:avLst/>
@@ -10544,7 +10544,7 @@
               <a:buNone/>
             </a:pPr>
             <a:r>
-              <a:rPr lang="en-US" sz="1300" b="1" dirty="0">
+              <a:rPr lang="en-US" sz="1220" b="1" dirty="0">
                 <a:solidFill>
                   <a:srgbClr val="0068B7"/>
                 </a:solidFill>
@@ -10554,7 +10554,7 @@
               </a:rPr>
               <a:t>Module details</a:t>
             </a:r>
-            <a:endParaRPr lang="en-US" sz="1300" dirty="0"/>
+            <a:endParaRPr lang="en-US" sz="1220" dirty="0"/>
           </a:p>
         </p:txBody>
       </p:sp>
@@ -10566,8 +10566,8 @@
         </p:nvSpPr>
         <p:spPr>
           <a:xfrm>
-            <a:off x="8074152" y="1892808"/>
-            <a:ext cx="2825496" cy="1353312"/>
+            <a:off x="8074152" y="1856232"/>
+            <a:ext cx="2825496" cy="1408176"/>
           </a:xfrm>
           <a:prstGeom prst="rect">
             <a:avLst/>
@@ -10585,7 +10585,7 @@
               <a:buNone/>
             </a:pPr>
             <a:r>
-              <a:rPr lang="en-US" sz="1320" dirty="0">
+              <a:rPr lang="en-US" sz="1220" dirty="0">
                 <a:solidFill>
                   <a:srgbClr val="17364A"/>
                 </a:solidFill>
@@ -10593,9 +10593,9 @@
                 <a:ea typeface="Aptos" pitchFamily="34" charset="-122"/>
                 <a:cs typeface="Aptos" pitchFamily="34" charset="-120"/>
               </a:rPr>
-              <a:t>Level: intermediate/practitioner Primary track: Policy Role-Based Track Appears in tracks: policy, governance-and-security, public-health-executive-leadership, program-management</a:t>
-            </a:r>
-            <a:endParaRPr lang="en-US" sz="1320" dirty="0"/>
+              <a:t>Level: intermediate/practitioner Primary track: Policy Role-Based Track Appears.</a:t>
+            </a:r>
+            <a:endParaRPr lang="en-US" sz="1220" dirty="0"/>
           </a:p>
         </p:txBody>
       </p:sp>
@@ -10634,8 +10634,8 @@
         </p:nvSpPr>
         <p:spPr>
           <a:xfrm>
-            <a:off x="8074152" y="3822192"/>
-            <a:ext cx="2825496" cy="256032"/>
+            <a:off x="8074152" y="3803904"/>
+            <a:ext cx="2825496" cy="228600"/>
           </a:xfrm>
           <a:prstGeom prst="rect">
             <a:avLst/>
@@ -10651,7 +10651,7 @@
               <a:buNone/>
             </a:pPr>
             <a:r>
-              <a:rPr lang="en-US" sz="1300" b="1" dirty="0">
+              <a:rPr lang="en-US" sz="1220" b="1" dirty="0">
                 <a:solidFill>
                   <a:srgbClr val="0068B7"/>
                 </a:solidFill>
@@ -10661,7 +10661,7 @@
               </a:rPr>
               <a:t>Learning sequence</a:t>
             </a:r>
-            <a:endParaRPr lang="en-US" sz="1300" dirty="0"/>
+            <a:endParaRPr lang="en-US" sz="1220" dirty="0"/>
           </a:p>
         </p:txBody>
       </p:sp>
@@ -10673,8 +10673,8 @@
         </p:nvSpPr>
         <p:spPr>
           <a:xfrm>
-            <a:off x="8092440" y="4187952"/>
-            <a:ext cx="2770632" cy="1033272"/>
+            <a:off x="8092440" y="4133088"/>
+            <a:ext cx="2770632" cy="1124712"/>
           </a:xfrm>
           <a:prstGeom prst="rect">
             <a:avLst/>
@@ -10692,7 +10692,7 @@
               <a:buNone/>
             </a:pPr>
             <a:r>
-              <a:rPr lang="en-US" sz="1220" dirty="0">
+              <a:rPr lang="en-US" sz="1140" dirty="0">
                 <a:solidFill>
                   <a:srgbClr val="17364A"/>
                 </a:solidFill>
@@ -10702,14 +10702,14 @@
               </a:rPr>
               <a:t>Read the module for shared vocabulary and context.</a:t>
             </a:r>
-            <a:endParaRPr lang="en-US" sz="1220" dirty="0"/>
-          </a:p>
-          <a:p>
-            <a:pPr indent="0" marL="0">
-              <a:buNone/>
-            </a:pPr>
-            <a:r>
-              <a:rPr lang="en-US" sz="1220" dirty="0">
+            <a:endParaRPr lang="en-US" sz="1140" dirty="0"/>
+          </a:p>
+          <a:p>
+            <a:pPr indent="0" marL="0">
+              <a:buNone/>
+            </a:pPr>
+            <a:r>
+              <a:rPr lang="en-US" sz="1140" dirty="0">
                 <a:solidFill>
                   <a:srgbClr val="17364A"/>
                 </a:solidFill>
@@ -10717,16 +10717,16 @@
                 <a:ea typeface="Aptos" pitchFamily="34" charset="-122"/>
                 <a:cs typeface="Aptos" pitchFamily="34" charset="-120"/>
               </a:rPr>
-              <a:t>Complete the practical exercise to apply the concept.</a:t>
-            </a:r>
-            <a:endParaRPr lang="en-US" sz="1220" dirty="0"/>
-          </a:p>
-          <a:p>
-            <a:pPr indent="0" marL="0">
-              <a:buNone/>
-            </a:pPr>
-            <a:r>
-              <a:rPr lang="en-US" sz="1220" dirty="0">
+              <a:t>Complete the practical exercise to apply the.</a:t>
+            </a:r>
+            <a:endParaRPr lang="en-US" sz="1140" dirty="0"/>
+          </a:p>
+          <a:p>
+            <a:pPr indent="0" marL="0">
+              <a:buNone/>
+            </a:pPr>
+            <a:r>
+              <a:rPr lang="en-US" sz="1140" dirty="0">
                 <a:solidFill>
                   <a:srgbClr val="17364A"/>
                 </a:solidFill>
@@ -10736,7 +10736,7 @@
               </a:rPr>
               <a:t>Use the notes and references for deeper review.</a:t>
             </a:r>
-            <a:endParaRPr lang="en-US" sz="1220" dirty="0"/>
+            <a:endParaRPr lang="en-US" sz="1140" dirty="0"/>
           </a:p>
         </p:txBody>
       </p:sp>
@@ -11027,8 +11027,8 @@
         </p:nvSpPr>
         <p:spPr>
           <a:xfrm>
-            <a:off x="868680" y="1508760"/>
-            <a:ext cx="6309360" cy="4160520"/>
+            <a:off x="822960" y="1463040"/>
+            <a:ext cx="6565392" cy="4343400"/>
           </a:xfrm>
           <a:prstGeom prst="rect">
             <a:avLst/>
@@ -11046,7 +11046,7 @@
               <a:buNone/>
             </a:pPr>
             <a:r>
-              <a:rPr lang="en-US" sz="2100" dirty="0">
+              <a:rPr lang="en-US" sz="1920" dirty="0">
                 <a:solidFill>
                   <a:srgbClr val="003A63"/>
                 </a:solidFill>
@@ -11056,14 +11056,14 @@
               </a:rPr>
               <a:t>• AI policy scan plan</a:t>
             </a:r>
-            <a:endParaRPr lang="en-US" sz="2100" dirty="0"/>
-          </a:p>
-          <a:p>
-            <a:pPr indent="0" marL="0">
-              <a:buNone/>
-            </a:pPr>
-            <a:r>
-              <a:rPr lang="en-US" sz="2100" dirty="0">
+            <a:endParaRPr lang="en-US" sz="1920" dirty="0"/>
+          </a:p>
+          <a:p>
+            <a:pPr indent="0" marL="0">
+              <a:buNone/>
+            </a:pPr>
+            <a:r>
+              <a:rPr lang="en-US" sz="1920" dirty="0">
                 <a:solidFill>
                   <a:srgbClr val="003A63"/>
                 </a:solidFill>
@@ -11073,14 +11073,14 @@
               </a:rPr>
               <a:t>• Regulatory readiness memo</a:t>
             </a:r>
-            <a:endParaRPr lang="en-US" sz="2100" dirty="0"/>
-          </a:p>
-          <a:p>
-            <a:pPr indent="0" marL="0">
-              <a:buNone/>
-            </a:pPr>
-            <a:r>
-              <a:rPr lang="en-US" sz="2100" dirty="0">
+            <a:endParaRPr lang="en-US" sz="1920" dirty="0"/>
+          </a:p>
+          <a:p>
+            <a:pPr indent="0" marL="0">
+              <a:buNone/>
+            </a:pPr>
+            <a:r>
+              <a:rPr lang="en-US" sz="1920" dirty="0">
                 <a:solidFill>
                   <a:srgbClr val="003A63"/>
                 </a:solidFill>
@@ -11090,7 +11090,7 @@
               </a:rPr>
               <a:t>• Policy-domain crosswalk</a:t>
             </a:r>
-            <a:endParaRPr lang="en-US" sz="2100" dirty="0"/>
+            <a:endParaRPr lang="en-US" sz="1920" dirty="0"/>
           </a:p>
         </p:txBody>
       </p:sp>
@@ -11102,12 +11102,12 @@
         </p:nvSpPr>
         <p:spPr>
           <a:xfrm>
-            <a:off x="7635240" y="1325880"/>
-            <a:ext cx="3474720" cy="1207008"/>
+            <a:off x="7543800" y="1325880"/>
+            <a:ext cx="3611880" cy="1261872"/>
           </a:xfrm>
           <a:prstGeom prst="roundRect">
             <a:avLst>
-              <a:gd name="adj" fmla="val 9091"/>
+              <a:gd name="adj" fmla="val 8696"/>
             </a:avLst>
           </a:prstGeom>
           <a:solidFill>
@@ -11129,8 +11129,8 @@
         </p:nvSpPr>
         <p:spPr>
           <a:xfrm>
-            <a:off x="7799832" y="1472184"/>
-            <a:ext cx="3145536" cy="256032"/>
+            <a:off x="7708392" y="1453896"/>
+            <a:ext cx="3282696" cy="228600"/>
           </a:xfrm>
           <a:prstGeom prst="rect">
             <a:avLst/>
@@ -11146,7 +11146,7 @@
               <a:buNone/>
             </a:pPr>
             <a:r>
-              <a:rPr lang="en-US" sz="1300" b="1" dirty="0">
+              <a:rPr lang="en-US" sz="1220" b="1" dirty="0">
                 <a:solidFill>
                   <a:srgbClr val="0068B7"/>
                 </a:solidFill>
@@ -11156,7 +11156,7 @@
               </a:rPr>
               <a:t>Governance lens</a:t>
             </a:r>
-            <a:endParaRPr lang="en-US" sz="1300" dirty="0"/>
+            <a:endParaRPr lang="en-US" sz="1220" dirty="0"/>
           </a:p>
         </p:txBody>
       </p:sp>
@@ -11168,8 +11168,8 @@
         </p:nvSpPr>
         <p:spPr>
           <a:xfrm>
-            <a:off x="7799832" y="1801368"/>
-            <a:ext cx="3145536" cy="640080"/>
+            <a:off x="7708392" y="1764792"/>
+            <a:ext cx="3282696" cy="749808"/>
           </a:xfrm>
           <a:prstGeom prst="rect">
             <a:avLst/>
@@ -11187,7 +11187,7 @@
               <a:buNone/>
             </a:pPr>
             <a:r>
-              <a:rPr lang="en-US" sz="1320" dirty="0">
+              <a:rPr lang="en-US" sz="1220" dirty="0">
                 <a:solidFill>
                   <a:srgbClr val="17364A"/>
                 </a:solidFill>
@@ -11197,7 +11197,7 @@
               </a:rPr>
               <a:t>AI policy scan plan</a:t>
             </a:r>
-            <a:endParaRPr lang="en-US" sz="1320" dirty="0"/>
+            <a:endParaRPr lang="en-US" sz="1220" dirty="0"/>
           </a:p>
         </p:txBody>
       </p:sp>
@@ -11209,12 +11209,12 @@
         </p:nvSpPr>
         <p:spPr>
           <a:xfrm>
-            <a:off x="7635240" y="2670048"/>
-            <a:ext cx="3474720" cy="1377086"/>
+            <a:off x="7543800" y="2724912"/>
+            <a:ext cx="3611880" cy="1527048"/>
           </a:xfrm>
           <a:prstGeom prst="roundRect">
             <a:avLst>
-              <a:gd name="adj" fmla="val 7968"/>
+              <a:gd name="adj" fmla="val 7186"/>
             </a:avLst>
           </a:prstGeom>
           <a:solidFill>
@@ -11236,8 +11236,8 @@
         </p:nvSpPr>
         <p:spPr>
           <a:xfrm>
-            <a:off x="7799832" y="2816352"/>
-            <a:ext cx="3145536" cy="256032"/>
+            <a:off x="7708392" y="2852928"/>
+            <a:ext cx="3282696" cy="228600"/>
           </a:xfrm>
           <a:prstGeom prst="rect">
             <a:avLst/>
@@ -11253,7 +11253,7 @@
               <a:buNone/>
             </a:pPr>
             <a:r>
-              <a:rPr lang="en-US" sz="1300" b="1" dirty="0">
+              <a:rPr lang="en-US" sz="1220" b="1" dirty="0">
                 <a:solidFill>
                   <a:srgbClr val="0068B7"/>
                 </a:solidFill>
@@ -11263,7 +11263,7 @@
               </a:rPr>
               <a:t>Concept checkpoints</a:t>
             </a:r>
-            <a:endParaRPr lang="en-US" sz="1300" dirty="0"/>
+            <a:endParaRPr lang="en-US" sz="1220" dirty="0"/>
           </a:p>
         </p:txBody>
       </p:sp>
@@ -11275,8 +11275,8 @@
         </p:nvSpPr>
         <p:spPr>
           <a:xfrm>
-            <a:off x="7818120" y="3182112"/>
-            <a:ext cx="3090672" cy="718718"/>
+            <a:off x="7726680" y="3182112"/>
+            <a:ext cx="3227832" cy="960120"/>
           </a:xfrm>
           <a:prstGeom prst="rect">
             <a:avLst/>
@@ -11294,7 +11294,7 @@
               <a:buNone/>
             </a:pPr>
             <a:r>
-              <a:rPr lang="en-US" sz="1220" dirty="0">
+              <a:rPr lang="en-US" sz="1140" dirty="0">
                 <a:solidFill>
                   <a:srgbClr val="17364A"/>
                 </a:solidFill>
@@ -11304,14 +11304,14 @@
               </a:rPr>
               <a:t>Recommended policy updates</a:t>
             </a:r>
-            <a:endParaRPr lang="en-US" sz="1220" dirty="0"/>
-          </a:p>
-          <a:p>
-            <a:pPr indent="0" marL="0">
-              <a:buNone/>
-            </a:pPr>
-            <a:r>
-              <a:rPr lang="en-US" sz="1220" dirty="0">
+            <a:endParaRPr lang="en-US" sz="1140" dirty="0"/>
+          </a:p>
+          <a:p>
+            <a:pPr indent="0" marL="0">
+              <a:buNone/>
+            </a:pPr>
+            <a:r>
+              <a:rPr lang="en-US" sz="1140" dirty="0">
                 <a:solidFill>
                   <a:srgbClr val="17364A"/>
                 </a:solidFill>
@@ -11321,7 +11321,7 @@
               </a:rPr>
               <a:t>Ongoing monitoring process</a:t>
             </a:r>
-            <a:endParaRPr lang="en-US" sz="1220" dirty="0"/>
+            <a:endParaRPr lang="en-US" sz="1140" dirty="0"/>
           </a:p>
         </p:txBody>
       </p:sp>
@@ -11333,12 +11333,12 @@
         </p:nvSpPr>
         <p:spPr>
           <a:xfrm>
-            <a:off x="7635240" y="4184294"/>
-            <a:ext cx="3474720" cy="1466698"/>
+            <a:off x="7543800" y="4389120"/>
+            <a:ext cx="3611880" cy="1261872"/>
           </a:xfrm>
           <a:prstGeom prst="roundRect">
             <a:avLst>
-              <a:gd name="adj" fmla="val 7481"/>
+              <a:gd name="adj" fmla="val 8696"/>
             </a:avLst>
           </a:prstGeom>
           <a:solidFill>
@@ -11360,8 +11360,8 @@
         </p:nvSpPr>
         <p:spPr>
           <a:xfrm>
-            <a:off x="7799832" y="4330598"/>
-            <a:ext cx="3145536" cy="256032"/>
+            <a:off x="7708392" y="4517136"/>
+            <a:ext cx="3282696" cy="228600"/>
           </a:xfrm>
           <a:prstGeom prst="rect">
             <a:avLst/>
@@ -11377,7 +11377,7 @@
               <a:buNone/>
             </a:pPr>
             <a:r>
-              <a:rPr lang="en-US" sz="1300" b="1" dirty="0">
+              <a:rPr lang="en-US" sz="1220" b="1" dirty="0">
                 <a:solidFill>
                   <a:srgbClr val="0068B7"/>
                 </a:solidFill>
@@ -11387,7 +11387,7 @@
               </a:rPr>
               <a:t>What to document</a:t>
             </a:r>
-            <a:endParaRPr lang="en-US" sz="1300" dirty="0"/>
+            <a:endParaRPr lang="en-US" sz="1220" dirty="0"/>
           </a:p>
         </p:txBody>
       </p:sp>
@@ -11399,8 +11399,8 @@
         </p:nvSpPr>
         <p:spPr>
           <a:xfrm>
-            <a:off x="7799832" y="4659782"/>
-            <a:ext cx="3145536" cy="899770"/>
+            <a:off x="7708392" y="4828032"/>
+            <a:ext cx="3282696" cy="749808"/>
           </a:xfrm>
           <a:prstGeom prst="rect">
             <a:avLst/>
@@ -11418,7 +11418,7 @@
               <a:buNone/>
             </a:pPr>
             <a:r>
-              <a:rPr lang="en-US" sz="1320" dirty="0">
+              <a:rPr lang="en-US" sz="1220" dirty="0">
                 <a:solidFill>
                   <a:srgbClr val="17364A"/>
                 </a:solidFill>
@@ -11426,9 +11426,9 @@
                 <a:ea typeface="Aptos" pitchFamily="34" charset="-122"/>
                 <a:cs typeface="Aptos" pitchFamily="34" charset="-120"/>
               </a:rPr>
-              <a:t>Use the assignment to test whether you can explain the concept, apply it to a realistic public health situation, and identify what would need review before the work moves forward.</a:t>
-            </a:r>
-            <a:endParaRPr lang="en-US" sz="1320" dirty="0"/>
+              <a:t>Use the assignment to test whether you can explain the concept, apply it to a.</a:t>
+            </a:r>
+            <a:endParaRPr lang="en-US" sz="1220" dirty="0"/>
           </a:p>
         </p:txBody>
       </p:sp>
@@ -11719,8 +11719,8 @@
         </p:nvSpPr>
         <p:spPr>
           <a:xfrm>
-            <a:off x="868680" y="1508760"/>
-            <a:ext cx="6309360" cy="4160520"/>
+            <a:off x="822960" y="1463040"/>
+            <a:ext cx="6565392" cy="4343400"/>
           </a:xfrm>
           <a:prstGeom prst="rect">
             <a:avLst/>
@@ -11738,7 +11738,7 @@
               <a:buNone/>
             </a:pPr>
             <a:r>
-              <a:rPr lang="en-US" sz="2100" dirty="0">
+              <a:rPr lang="en-US" sz="1920" dirty="0">
                 <a:solidFill>
                   <a:srgbClr val="003A63"/>
                 </a:solidFill>
@@ -11748,14 +11748,14 @@
               </a:rPr>
               <a:t>• 1. What does regulatory readiness mean in this module?</a:t>
             </a:r>
-            <a:endParaRPr lang="en-US" sz="2100" dirty="0"/>
-          </a:p>
-          <a:p>
-            <a:pPr indent="0" marL="0">
-              <a:buNone/>
-            </a:pPr>
-            <a:r>
-              <a:rPr lang="en-US" sz="2100" dirty="0">
+            <a:endParaRPr lang="en-US" sz="1920" dirty="0"/>
+          </a:p>
+          <a:p>
+            <a:pPr indent="0" marL="0">
+              <a:buNone/>
+            </a:pPr>
+            <a:r>
+              <a:rPr lang="en-US" sz="1920" dirty="0">
                 <a:solidFill>
                   <a:srgbClr val="003A63"/>
                 </a:solidFill>
@@ -11765,14 +11765,14 @@
               </a:rPr>
               <a:t>• 2. Which statement is most accurate?</a:t>
             </a:r>
-            <a:endParaRPr lang="en-US" sz="2100" dirty="0"/>
-          </a:p>
-          <a:p>
-            <a:pPr indent="0" marL="0">
-              <a:buNone/>
-            </a:pPr>
-            <a:r>
-              <a:rPr lang="en-US" sz="2100" dirty="0">
+            <a:endParaRPr lang="en-US" sz="1920" dirty="0"/>
+          </a:p>
+          <a:p>
+            <a:pPr indent="0" marL="0">
+              <a:buNone/>
+            </a:pPr>
+            <a:r>
+              <a:rPr lang="en-US" sz="1920" dirty="0">
                 <a:solidFill>
                   <a:srgbClr val="003A63"/>
                 </a:solidFill>
@@ -11782,7 +11782,7 @@
               </a:rPr>
               <a:t>• 3. What is a policy scan?</a:t>
             </a:r>
-            <a:endParaRPr lang="en-US" sz="2100" dirty="0"/>
+            <a:endParaRPr lang="en-US" sz="1920" dirty="0"/>
           </a:p>
         </p:txBody>
       </p:sp>
@@ -11794,12 +11794,12 @@
         </p:nvSpPr>
         <p:spPr>
           <a:xfrm>
-            <a:off x="7635240" y="1325880"/>
-            <a:ext cx="3474720" cy="1207008"/>
+            <a:off x="7543800" y="1325880"/>
+            <a:ext cx="3611880" cy="1261872"/>
           </a:xfrm>
           <a:prstGeom prst="roundRect">
             <a:avLst>
-              <a:gd name="adj" fmla="val 9091"/>
+              <a:gd name="adj" fmla="val 8696"/>
             </a:avLst>
           </a:prstGeom>
           <a:solidFill>
@@ -11821,8 +11821,8 @@
         </p:nvSpPr>
         <p:spPr>
           <a:xfrm>
-            <a:off x="7799832" y="1472184"/>
-            <a:ext cx="3145536" cy="256032"/>
+            <a:off x="7708392" y="1453896"/>
+            <a:ext cx="3282696" cy="228600"/>
           </a:xfrm>
           <a:prstGeom prst="rect">
             <a:avLst/>
@@ -11838,7 +11838,7 @@
               <a:buNone/>
             </a:pPr>
             <a:r>
-              <a:rPr lang="en-US" sz="1300" b="1" dirty="0">
+              <a:rPr lang="en-US" sz="1220" b="1" dirty="0">
                 <a:solidFill>
                   <a:srgbClr val="0068B7"/>
                 </a:solidFill>
@@ -11848,7 +11848,7 @@
               </a:rPr>
               <a:t>Governance lens</a:t>
             </a:r>
-            <a:endParaRPr lang="en-US" sz="1300" dirty="0"/>
+            <a:endParaRPr lang="en-US" sz="1220" dirty="0"/>
           </a:p>
         </p:txBody>
       </p:sp>
@@ -11860,8 +11860,8 @@
         </p:nvSpPr>
         <p:spPr>
           <a:xfrm>
-            <a:off x="7799832" y="1801368"/>
-            <a:ext cx="3145536" cy="640080"/>
+            <a:off x="7708392" y="1764792"/>
+            <a:ext cx="3282696" cy="749808"/>
           </a:xfrm>
           <a:prstGeom prst="rect">
             <a:avLst/>
@@ -11879,7 +11879,7 @@
               <a:buNone/>
             </a:pPr>
             <a:r>
-              <a:rPr lang="en-US" sz="1320" dirty="0">
+              <a:rPr lang="en-US" sz="1220" dirty="0">
                 <a:solidFill>
                   <a:srgbClr val="17364A"/>
                 </a:solidFill>
@@ -11889,7 +11889,7 @@
               </a:rPr>
               <a:t>1. What does regulatory readiness mean in this module?</a:t>
             </a:r>
-            <a:endParaRPr lang="en-US" sz="1320" dirty="0"/>
+            <a:endParaRPr lang="en-US" sz="1220" dirty="0"/>
           </a:p>
         </p:txBody>
       </p:sp>
@@ -11901,12 +11901,12 @@
         </p:nvSpPr>
         <p:spPr>
           <a:xfrm>
-            <a:off x="7635240" y="2670048"/>
-            <a:ext cx="3474720" cy="1377086"/>
+            <a:off x="7543800" y="2724912"/>
+            <a:ext cx="3611880" cy="1527048"/>
           </a:xfrm>
           <a:prstGeom prst="roundRect">
             <a:avLst>
-              <a:gd name="adj" fmla="val 7968"/>
+              <a:gd name="adj" fmla="val 7186"/>
             </a:avLst>
           </a:prstGeom>
           <a:solidFill>
@@ -11928,8 +11928,8 @@
         </p:nvSpPr>
         <p:spPr>
           <a:xfrm>
-            <a:off x="7799832" y="2816352"/>
-            <a:ext cx="3145536" cy="256032"/>
+            <a:off x="7708392" y="2852928"/>
+            <a:ext cx="3282696" cy="228600"/>
           </a:xfrm>
           <a:prstGeom prst="rect">
             <a:avLst/>
@@ -11945,7 +11945,7 @@
               <a:buNone/>
             </a:pPr>
             <a:r>
-              <a:rPr lang="en-US" sz="1300" b="1" dirty="0">
+              <a:rPr lang="en-US" sz="1220" b="1" dirty="0">
                 <a:solidFill>
                   <a:srgbClr val="0068B7"/>
                 </a:solidFill>
@@ -11955,7 +11955,7 @@
               </a:rPr>
               <a:t>Concept checkpoints</a:t>
             </a:r>
-            <a:endParaRPr lang="en-US" sz="1300" dirty="0"/>
+            <a:endParaRPr lang="en-US" sz="1220" dirty="0"/>
           </a:p>
         </p:txBody>
       </p:sp>
@@ -11967,8 +11967,8 @@
         </p:nvSpPr>
         <p:spPr>
           <a:xfrm>
-            <a:off x="7818120" y="3182112"/>
-            <a:ext cx="3090672" cy="718718"/>
+            <a:off x="7726680" y="3182112"/>
+            <a:ext cx="3227832" cy="960120"/>
           </a:xfrm>
           <a:prstGeom prst="rect">
             <a:avLst/>
@@ -11986,7 +11986,7 @@
               <a:buNone/>
             </a:pPr>
             <a:r>
-              <a:rPr lang="en-US" sz="1220" dirty="0">
+              <a:rPr lang="en-US" sz="1140" dirty="0">
                 <a:solidFill>
                   <a:srgbClr val="17364A"/>
                 </a:solidFill>
@@ -11996,14 +11996,14 @@
               </a:rPr>
               <a:t>1.</a:t>
             </a:r>
-            <a:endParaRPr lang="en-US" sz="1220" dirty="0"/>
-          </a:p>
-          <a:p>
-            <a:pPr indent="0" marL="0">
-              <a:buNone/>
-            </a:pPr>
-            <a:r>
-              <a:rPr lang="en-US" sz="1220" dirty="0">
+            <a:endParaRPr lang="en-US" sz="1140" dirty="0"/>
+          </a:p>
+          <a:p>
+            <a:pPr indent="0" marL="0">
+              <a:buNone/>
+            </a:pPr>
+            <a:r>
+              <a:rPr lang="en-US" sz="1140" dirty="0">
                 <a:solidFill>
                   <a:srgbClr val="17364A"/>
                 </a:solidFill>
@@ -12013,14 +12013,14 @@
               </a:rPr>
               <a:t>What does regulatory readiness mean in this module?</a:t>
             </a:r>
-            <a:endParaRPr lang="en-US" sz="1220" dirty="0"/>
-          </a:p>
-          <a:p>
-            <a:pPr indent="0" marL="0">
-              <a:buNone/>
-            </a:pPr>
-            <a:r>
-              <a:rPr lang="en-US" sz="1220" dirty="0">
+            <a:endParaRPr lang="en-US" sz="1140" dirty="0"/>
+          </a:p>
+          <a:p>
+            <a:pPr indent="0" marL="0">
+              <a:buNone/>
+            </a:pPr>
+            <a:r>
+              <a:rPr lang="en-US" sz="1140" dirty="0">
                 <a:solidFill>
                   <a:srgbClr val="17364A"/>
                 </a:solidFill>
@@ -12030,7 +12030,7 @@
               </a:rPr>
               <a:t>2.</a:t>
             </a:r>
-            <a:endParaRPr lang="en-US" sz="1220" dirty="0"/>
+            <a:endParaRPr lang="en-US" sz="1140" dirty="0"/>
           </a:p>
         </p:txBody>
       </p:sp>
@@ -12042,12 +12042,12 @@
         </p:nvSpPr>
         <p:spPr>
           <a:xfrm>
-            <a:off x="7635240" y="4184294"/>
-            <a:ext cx="3474720" cy="1466698"/>
+            <a:off x="7543800" y="4389120"/>
+            <a:ext cx="3611880" cy="1261872"/>
           </a:xfrm>
           <a:prstGeom prst="roundRect">
             <a:avLst>
-              <a:gd name="adj" fmla="val 7481"/>
+              <a:gd name="adj" fmla="val 8696"/>
             </a:avLst>
           </a:prstGeom>
           <a:solidFill>
@@ -12069,8 +12069,8 @@
         </p:nvSpPr>
         <p:spPr>
           <a:xfrm>
-            <a:off x="7799832" y="4330598"/>
-            <a:ext cx="3145536" cy="256032"/>
+            <a:off x="7708392" y="4517136"/>
+            <a:ext cx="3282696" cy="228600"/>
           </a:xfrm>
           <a:prstGeom prst="rect">
             <a:avLst/>
@@ -12086,7 +12086,7 @@
               <a:buNone/>
             </a:pPr>
             <a:r>
-              <a:rPr lang="en-US" sz="1300" b="1" dirty="0">
+              <a:rPr lang="en-US" sz="1220" b="1" dirty="0">
                 <a:solidFill>
                   <a:srgbClr val="0068B7"/>
                 </a:solidFill>
@@ -12096,7 +12096,7 @@
               </a:rPr>
               <a:t>What to document</a:t>
             </a:r>
-            <a:endParaRPr lang="en-US" sz="1300" dirty="0"/>
+            <a:endParaRPr lang="en-US" sz="1220" dirty="0"/>
           </a:p>
         </p:txBody>
       </p:sp>
@@ -12108,8 +12108,8 @@
         </p:nvSpPr>
         <p:spPr>
           <a:xfrm>
-            <a:off x="7799832" y="4659782"/>
-            <a:ext cx="3145536" cy="899770"/>
+            <a:off x="7708392" y="4828032"/>
+            <a:ext cx="3282696" cy="749808"/>
           </a:xfrm>
           <a:prstGeom prst="rect">
             <a:avLst/>
@@ -12127,7 +12127,7 @@
               <a:buNone/>
             </a:pPr>
             <a:r>
-              <a:rPr lang="en-US" sz="1320" dirty="0">
+              <a:rPr lang="en-US" sz="1220" dirty="0">
                 <a:solidFill>
                   <a:srgbClr val="17364A"/>
                 </a:solidFill>
@@ -12135,9 +12135,9 @@
                 <a:ea typeface="Aptos" pitchFamily="34" charset="-122"/>
                 <a:cs typeface="Aptos" pitchFamily="34" charset="-120"/>
               </a:rPr>
-              <a:t>Use the assignment to test whether you can explain the concept, apply it to a realistic public health situation, and identify what would need review before the work moves forward.</a:t>
-            </a:r>
-            <a:endParaRPr lang="en-US" sz="1320" dirty="0"/>
+              <a:t>Use the assignment to test whether you can explain the concept, apply it to a.</a:t>
+            </a:r>
+            <a:endParaRPr lang="en-US" sz="1220" dirty="0"/>
           </a:p>
         </p:txBody>
       </p:sp>
@@ -12428,8 +12428,8 @@
         </p:nvSpPr>
         <p:spPr>
           <a:xfrm>
-            <a:off x="868680" y="1508760"/>
-            <a:ext cx="6309360" cy="4160520"/>
+            <a:off x="822960" y="1463040"/>
+            <a:ext cx="6565392" cy="4343400"/>
           </a:xfrm>
           <a:prstGeom prst="rect">
             <a:avLst/>
@@ -12447,7 +12447,7 @@
               <a:buNone/>
             </a:pPr>
             <a:r>
-              <a:rPr lang="en-US" sz="2100" dirty="0">
+              <a:rPr lang="en-US" sz="1920" dirty="0">
                 <a:solidFill>
                   <a:srgbClr val="003A63"/>
                 </a:solidFill>
@@ -12457,14 +12457,14 @@
               </a:rPr>
               <a:t>• NIST Artificial Intelligence Risk Management Framework:.</a:t>
             </a:r>
-            <a:endParaRPr lang="en-US" sz="2100" dirty="0"/>
-          </a:p>
-          <a:p>
-            <a:pPr indent="0" marL="0">
-              <a:buNone/>
-            </a:pPr>
-            <a:r>
-              <a:rPr lang="en-US" sz="2100" dirty="0">
+            <a:endParaRPr lang="en-US" sz="1920" dirty="0"/>
+          </a:p>
+          <a:p>
+            <a:pPr indent="0" marL="0">
+              <a:buNone/>
+            </a:pPr>
+            <a:r>
+              <a:rPr lang="en-US" sz="1920" dirty="0">
                 <a:solidFill>
                   <a:srgbClr val="003A63"/>
                 </a:solidFill>
@@ -12474,14 +12474,14 @@
               </a:rPr>
               <a:t>• NIST Generative AI Profile:.</a:t>
             </a:r>
-            <a:endParaRPr lang="en-US" sz="2100" dirty="0"/>
-          </a:p>
-          <a:p>
-            <a:pPr indent="0" marL="0">
-              <a:buNone/>
-            </a:pPr>
-            <a:r>
-              <a:rPr lang="en-US" sz="2100" dirty="0">
+            <a:endParaRPr lang="en-US" sz="1920" dirty="0"/>
+          </a:p>
+          <a:p>
+            <a:pPr indent="0" marL="0">
+              <a:buNone/>
+            </a:pPr>
+            <a:r>
+              <a:rPr lang="en-US" sz="1920" dirty="0">
                 <a:solidFill>
                   <a:srgbClr val="003A63"/>
                 </a:solidFill>
@@ -12491,7 +12491,7 @@
               </a:rPr>
               <a:t>• CDC Public Health Data Strategy and Data Modernization resources:.</a:t>
             </a:r>
-            <a:endParaRPr lang="en-US" sz="2100" dirty="0"/>
+            <a:endParaRPr lang="en-US" sz="1920" dirty="0"/>
           </a:p>
         </p:txBody>
       </p:sp>
@@ -12503,12 +12503,12 @@
         </p:nvSpPr>
         <p:spPr>
           <a:xfrm>
-            <a:off x="7635240" y="1325880"/>
-            <a:ext cx="3474720" cy="1207008"/>
+            <a:off x="7543800" y="1325880"/>
+            <a:ext cx="3611880" cy="1261872"/>
           </a:xfrm>
           <a:prstGeom prst="roundRect">
             <a:avLst>
-              <a:gd name="adj" fmla="val 9091"/>
+              <a:gd name="adj" fmla="val 8696"/>
             </a:avLst>
           </a:prstGeom>
           <a:solidFill>
@@ -12530,8 +12530,8 @@
         </p:nvSpPr>
         <p:spPr>
           <a:xfrm>
-            <a:off x="7799832" y="1472184"/>
-            <a:ext cx="3145536" cy="256032"/>
+            <a:off x="7708392" y="1453896"/>
+            <a:ext cx="3282696" cy="228600"/>
           </a:xfrm>
           <a:prstGeom prst="rect">
             <a:avLst/>
@@ -12547,7 +12547,7 @@
               <a:buNone/>
             </a:pPr>
             <a:r>
-              <a:rPr lang="en-US" sz="1300" b="1" dirty="0">
+              <a:rPr lang="en-US" sz="1220" b="1" dirty="0">
                 <a:solidFill>
                   <a:srgbClr val="0068B7"/>
                 </a:solidFill>
@@ -12557,7 +12557,7 @@
               </a:rPr>
               <a:t>Governance lens</a:t>
             </a:r>
-            <a:endParaRPr lang="en-US" sz="1300" dirty="0"/>
+            <a:endParaRPr lang="en-US" sz="1220" dirty="0"/>
           </a:p>
         </p:txBody>
       </p:sp>
@@ -12569,8 +12569,8 @@
         </p:nvSpPr>
         <p:spPr>
           <a:xfrm>
-            <a:off x="7799832" y="1801368"/>
-            <a:ext cx="3145536" cy="640080"/>
+            <a:off x="7708392" y="1764792"/>
+            <a:ext cx="3282696" cy="749808"/>
           </a:xfrm>
           <a:prstGeom prst="rect">
             <a:avLst/>
@@ -12588,7 +12588,7 @@
               <a:buNone/>
             </a:pPr>
             <a:r>
-              <a:rPr lang="en-US" sz="1320" dirty="0">
+              <a:rPr lang="en-US" sz="1220" dirty="0">
                 <a:solidFill>
                   <a:srgbClr val="17364A"/>
                 </a:solidFill>
@@ -12598,7 +12598,7 @@
               </a:rPr>
               <a:t>NIST Artificial Intelligence Risk Management Framework:.</a:t>
             </a:r>
-            <a:endParaRPr lang="en-US" sz="1320" dirty="0"/>
+            <a:endParaRPr lang="en-US" sz="1220" dirty="0"/>
           </a:p>
         </p:txBody>
       </p:sp>
@@ -12610,12 +12610,12 @@
         </p:nvSpPr>
         <p:spPr>
           <a:xfrm>
-            <a:off x="7635240" y="2670048"/>
-            <a:ext cx="3474720" cy="1377086"/>
+            <a:off x="7543800" y="2724912"/>
+            <a:ext cx="3611880" cy="1527048"/>
           </a:xfrm>
           <a:prstGeom prst="roundRect">
             <a:avLst>
-              <a:gd name="adj" fmla="val 7968"/>
+              <a:gd name="adj" fmla="val 7186"/>
             </a:avLst>
           </a:prstGeom>
           <a:solidFill>
@@ -12637,8 +12637,8 @@
         </p:nvSpPr>
         <p:spPr>
           <a:xfrm>
-            <a:off x="7799832" y="2816352"/>
-            <a:ext cx="3145536" cy="256032"/>
+            <a:off x="7708392" y="2852928"/>
+            <a:ext cx="3282696" cy="228600"/>
           </a:xfrm>
           <a:prstGeom prst="rect">
             <a:avLst/>
@@ -12654,7 +12654,7 @@
               <a:buNone/>
             </a:pPr>
             <a:r>
-              <a:rPr lang="en-US" sz="1300" b="1" dirty="0">
+              <a:rPr lang="en-US" sz="1220" b="1" dirty="0">
                 <a:solidFill>
                   <a:srgbClr val="0068B7"/>
                 </a:solidFill>
@@ -12664,7 +12664,7 @@
               </a:rPr>
               <a:t>Concept checkpoints</a:t>
             </a:r>
-            <a:endParaRPr lang="en-US" sz="1300" dirty="0"/>
+            <a:endParaRPr lang="en-US" sz="1220" dirty="0"/>
           </a:p>
         </p:txBody>
       </p:sp>
@@ -12676,8 +12676,8 @@
         </p:nvSpPr>
         <p:spPr>
           <a:xfrm>
-            <a:off x="7818120" y="3182112"/>
-            <a:ext cx="3090672" cy="718718"/>
+            <a:off x="7726680" y="3182112"/>
+            <a:ext cx="3227832" cy="960120"/>
           </a:xfrm>
           <a:prstGeom prst="rect">
             <a:avLst/>
@@ -12695,7 +12695,7 @@
               <a:buNone/>
             </a:pPr>
             <a:r>
-              <a:rPr lang="en-US" sz="1220" dirty="0">
+              <a:rPr lang="en-US" sz="1140" dirty="0">
                 <a:solidFill>
                   <a:srgbClr val="17364A"/>
                 </a:solidFill>
@@ -12703,16 +12703,16 @@
                 <a:ea typeface="Aptos" pitchFamily="34" charset="-122"/>
                 <a:cs typeface="Aptos" pitchFamily="34" charset="-120"/>
               </a:rPr>
-              <a:t>NIST Artificial Intelligence Risk Management Framework:.</a:t>
-            </a:r>
-            <a:endParaRPr lang="en-US" sz="1220" dirty="0"/>
-          </a:p>
-          <a:p>
-            <a:pPr indent="0" marL="0">
-              <a:buNone/>
-            </a:pPr>
-            <a:r>
-              <a:rPr lang="en-US" sz="1220" dirty="0">
+              <a:t>NIST Artificial Intelligence Risk Management.</a:t>
+            </a:r>
+            <a:endParaRPr lang="en-US" sz="1140" dirty="0"/>
+          </a:p>
+          <a:p>
+            <a:pPr indent="0" marL="0">
+              <a:buNone/>
+            </a:pPr>
+            <a:r>
+              <a:rPr lang="en-US" sz="1140" dirty="0">
                 <a:solidFill>
                   <a:srgbClr val="17364A"/>
                 </a:solidFill>
@@ -12722,14 +12722,14 @@
               </a:rPr>
               <a:t>OWASP guidance for LLM application security</a:t>
             </a:r>
-            <a:endParaRPr lang="en-US" sz="1220" dirty="0"/>
-          </a:p>
-          <a:p>
-            <a:pPr indent="0" marL="0">
-              <a:buNone/>
-            </a:pPr>
-            <a:r>
-              <a:rPr lang="en-US" sz="1220" dirty="0">
+            <a:endParaRPr lang="en-US" sz="1140" dirty="0"/>
+          </a:p>
+          <a:p>
+            <a:pPr indent="0" marL="0">
+              <a:buNone/>
+            </a:pPr>
+            <a:r>
+              <a:rPr lang="en-US" sz="1140" dirty="0">
                 <a:solidFill>
                   <a:srgbClr val="17364A"/>
                 </a:solidFill>
@@ -12737,9 +12737,9 @@
                 <a:ea typeface="Aptos" pitchFamily="34" charset="-122"/>
                 <a:cs typeface="Aptos" pitchFamily="34" charset="-120"/>
               </a:rPr>
-              <a:t>Agency policies for privacy, cybersecurity, records, procurement,.</a:t>
-            </a:r>
-            <a:endParaRPr lang="en-US" sz="1220" dirty="0"/>
+              <a:t>Agency policies for privacy, cybersecurity,.</a:t>
+            </a:r>
+            <a:endParaRPr lang="en-US" sz="1140" dirty="0"/>
           </a:p>
         </p:txBody>
       </p:sp>
@@ -12751,12 +12751,12 @@
         </p:nvSpPr>
         <p:spPr>
           <a:xfrm>
-            <a:off x="7635240" y="4184294"/>
-            <a:ext cx="3474720" cy="1466698"/>
+            <a:off x="7543800" y="4389120"/>
+            <a:ext cx="3611880" cy="1261872"/>
           </a:xfrm>
           <a:prstGeom prst="roundRect">
             <a:avLst>
-              <a:gd name="adj" fmla="val 7481"/>
+              <a:gd name="adj" fmla="val 8696"/>
             </a:avLst>
           </a:prstGeom>
           <a:solidFill>
@@ -12778,8 +12778,8 @@
         </p:nvSpPr>
         <p:spPr>
           <a:xfrm>
-            <a:off x="7799832" y="4330598"/>
-            <a:ext cx="3145536" cy="256032"/>
+            <a:off x="7708392" y="4517136"/>
+            <a:ext cx="3282696" cy="228600"/>
           </a:xfrm>
           <a:prstGeom prst="rect">
             <a:avLst/>
@@ -12795,7 +12795,7 @@
               <a:buNone/>
             </a:pPr>
             <a:r>
-              <a:rPr lang="en-US" sz="1300" b="1" dirty="0">
+              <a:rPr lang="en-US" sz="1220" b="1" dirty="0">
                 <a:solidFill>
                   <a:srgbClr val="0068B7"/>
                 </a:solidFill>
@@ -12805,7 +12805,7 @@
               </a:rPr>
               <a:t>What to document</a:t>
             </a:r>
-            <a:endParaRPr lang="en-US" sz="1300" dirty="0"/>
+            <a:endParaRPr lang="en-US" sz="1220" dirty="0"/>
           </a:p>
         </p:txBody>
       </p:sp>
@@ -12817,8 +12817,8 @@
         </p:nvSpPr>
         <p:spPr>
           <a:xfrm>
-            <a:off x="7799832" y="4659782"/>
-            <a:ext cx="3145536" cy="899770"/>
+            <a:off x="7708392" y="4828032"/>
+            <a:ext cx="3282696" cy="749808"/>
           </a:xfrm>
           <a:prstGeom prst="rect">
             <a:avLst/>
@@ -12836,7 +12836,7 @@
               <a:buNone/>
             </a:pPr>
             <a:r>
-              <a:rPr lang="en-US" sz="1320" dirty="0">
+              <a:rPr lang="en-US" sz="1220" dirty="0">
                 <a:solidFill>
                   <a:srgbClr val="17364A"/>
                 </a:solidFill>
@@ -12844,9 +12844,9 @@
                 <a:ea typeface="Aptos" pitchFamily="34" charset="-122"/>
                 <a:cs typeface="Aptos" pitchFamily="34" charset="-120"/>
               </a:rPr>
-              <a:t>Translate this concept into clear decision rights, review steps, documentation expectations, and escalation paths before an AI-supported workflow is approved.</a:t>
-            </a:r>
-            <a:endParaRPr lang="en-US" sz="1320" dirty="0"/>
+              <a:t>Translate this concept into clear decision rights, review steps, documentation.</a:t>
+            </a:r>
+            <a:endParaRPr lang="en-US" sz="1220" dirty="0"/>
           </a:p>
         </p:txBody>
       </p:sp>
@@ -13137,8 +13137,8 @@
         </p:nvSpPr>
         <p:spPr>
           <a:xfrm>
-            <a:off x="868680" y="1508760"/>
-            <a:ext cx="6309360" cy="4160520"/>
+            <a:off x="822960" y="1463040"/>
+            <a:ext cx="6565392" cy="4343400"/>
           </a:xfrm>
           <a:prstGeom prst="rect">
             <a:avLst/>
@@ -13156,7 +13156,7 @@
               <a:buNone/>
             </a:pPr>
             <a:r>
-              <a:rPr lang="en-US" sz="2100" dirty="0">
+              <a:rPr lang="en-US" sz="1920" dirty="0">
                 <a:solidFill>
                   <a:srgbClr val="003A63"/>
                 </a:solidFill>
@@ -13164,9 +13164,9 @@
                 <a:ea typeface="Aptos" pitchFamily="34" charset="-122"/>
                 <a:cs typeface="Aptos" pitchFamily="34" charset="-120"/>
               </a:rPr>
-              <a:t>• Relevant public health program SOPs, data governance documentation, and implementation plans</a:t>
-            </a:r>
-            <a:endParaRPr lang="en-US" sz="2100" dirty="0"/>
+              <a:t>• Relevant public health program SOPs, data governance documentation, and.</a:t>
+            </a:r>
+            <a:endParaRPr lang="en-US" sz="1920" dirty="0"/>
           </a:p>
         </p:txBody>
       </p:sp>
@@ -13178,12 +13178,12 @@
         </p:nvSpPr>
         <p:spPr>
           <a:xfrm>
-            <a:off x="7635240" y="1325880"/>
-            <a:ext cx="3474720" cy="1207008"/>
+            <a:off x="7543800" y="1325880"/>
+            <a:ext cx="3611880" cy="1261872"/>
           </a:xfrm>
           <a:prstGeom prst="roundRect">
             <a:avLst>
-              <a:gd name="adj" fmla="val 9091"/>
+              <a:gd name="adj" fmla="val 8696"/>
             </a:avLst>
           </a:prstGeom>
           <a:solidFill>
@@ -13205,8 +13205,8 @@
         </p:nvSpPr>
         <p:spPr>
           <a:xfrm>
-            <a:off x="7799832" y="1472184"/>
-            <a:ext cx="3145536" cy="256032"/>
+            <a:off x="7708392" y="1453896"/>
+            <a:ext cx="3282696" cy="228600"/>
           </a:xfrm>
           <a:prstGeom prst="rect">
             <a:avLst/>
@@ -13222,7 +13222,7 @@
               <a:buNone/>
             </a:pPr>
             <a:r>
-              <a:rPr lang="en-US" sz="1300" b="1" dirty="0">
+              <a:rPr lang="en-US" sz="1220" b="1" dirty="0">
                 <a:solidFill>
                   <a:srgbClr val="0068B7"/>
                 </a:solidFill>
@@ -13232,7 +13232,7 @@
               </a:rPr>
               <a:t>Governance lens</a:t>
             </a:r>
-            <a:endParaRPr lang="en-US" sz="1300" dirty="0"/>
+            <a:endParaRPr lang="en-US" sz="1220" dirty="0"/>
           </a:p>
         </p:txBody>
       </p:sp>
@@ -13244,8 +13244,8 @@
         </p:nvSpPr>
         <p:spPr>
           <a:xfrm>
-            <a:off x="7799832" y="1801368"/>
-            <a:ext cx="3145536" cy="640080"/>
+            <a:off x="7708392" y="1764792"/>
+            <a:ext cx="3282696" cy="749808"/>
           </a:xfrm>
           <a:prstGeom prst="rect">
             <a:avLst/>
@@ -13263,7 +13263,7 @@
               <a:buNone/>
             </a:pPr>
             <a:r>
-              <a:rPr lang="en-US" sz="1320" dirty="0">
+              <a:rPr lang="en-US" sz="1220" dirty="0">
                 <a:solidFill>
                   <a:srgbClr val="17364A"/>
                 </a:solidFill>
@@ -13271,9 +13271,9 @@
                 <a:ea typeface="Aptos" pitchFamily="34" charset="-122"/>
                 <a:cs typeface="Aptos" pitchFamily="34" charset="-120"/>
               </a:rPr>
-              <a:t>Relevant public health program SOPs, data governance documentation, and implementation.</a:t>
-            </a:r>
-            <a:endParaRPr lang="en-US" sz="1320" dirty="0"/>
+              <a:t>Relevant public health program SOPs, data governance documentation, and.</a:t>
+            </a:r>
+            <a:endParaRPr lang="en-US" sz="1220" dirty="0"/>
           </a:p>
         </p:txBody>
       </p:sp>
@@ -13285,12 +13285,12 @@
         </p:nvSpPr>
         <p:spPr>
           <a:xfrm>
-            <a:off x="7635240" y="2670048"/>
-            <a:ext cx="3474720" cy="1377086"/>
+            <a:off x="7543800" y="2724912"/>
+            <a:ext cx="3611880" cy="1527048"/>
           </a:xfrm>
           <a:prstGeom prst="roundRect">
             <a:avLst>
-              <a:gd name="adj" fmla="val 7968"/>
+              <a:gd name="adj" fmla="val 7186"/>
             </a:avLst>
           </a:prstGeom>
           <a:solidFill>
@@ -13312,8 +13312,8 @@
         </p:nvSpPr>
         <p:spPr>
           <a:xfrm>
-            <a:off x="7799832" y="2816352"/>
-            <a:ext cx="3145536" cy="256032"/>
+            <a:off x="7708392" y="2852928"/>
+            <a:ext cx="3282696" cy="228600"/>
           </a:xfrm>
           <a:prstGeom prst="rect">
             <a:avLst/>
@@ -13329,7 +13329,7 @@
               <a:buNone/>
             </a:pPr>
             <a:r>
-              <a:rPr lang="en-US" sz="1300" b="1" dirty="0">
+              <a:rPr lang="en-US" sz="1220" b="1" dirty="0">
                 <a:solidFill>
                   <a:srgbClr val="0068B7"/>
                 </a:solidFill>
@@ -13339,7 +13339,7 @@
               </a:rPr>
               <a:t>Concept checkpoints</a:t>
             </a:r>
-            <a:endParaRPr lang="en-US" sz="1300" dirty="0"/>
+            <a:endParaRPr lang="en-US" sz="1220" dirty="0"/>
           </a:p>
         </p:txBody>
       </p:sp>
@@ -13351,8 +13351,8 @@
         </p:nvSpPr>
         <p:spPr>
           <a:xfrm>
-            <a:off x="7818120" y="3182112"/>
-            <a:ext cx="3090672" cy="718718"/>
+            <a:off x="7726680" y="3182112"/>
+            <a:ext cx="3227832" cy="960120"/>
           </a:xfrm>
           <a:prstGeom prst="rect">
             <a:avLst/>
@@ -13370,7 +13370,7 @@
               <a:buNone/>
             </a:pPr>
             <a:r>
-              <a:rPr lang="en-US" sz="1220" dirty="0">
+              <a:rPr lang="en-US" sz="1140" dirty="0">
                 <a:solidFill>
                   <a:srgbClr val="17364A"/>
                 </a:solidFill>
@@ -13378,9 +13378,9 @@
                 <a:ea typeface="Aptos" pitchFamily="34" charset="-122"/>
                 <a:cs typeface="Aptos" pitchFamily="34" charset="-120"/>
               </a:rPr>
-              <a:t>Relevant public health program SOPs, data governance.</a:t>
-            </a:r>
-            <a:endParaRPr lang="en-US" sz="1220" dirty="0"/>
+              <a:t>Relevant public health program SOPs, data.</a:t>
+            </a:r>
+            <a:endParaRPr lang="en-US" sz="1140" dirty="0"/>
           </a:p>
         </p:txBody>
       </p:sp>
@@ -13392,12 +13392,12 @@
         </p:nvSpPr>
         <p:spPr>
           <a:xfrm>
-            <a:off x="7635240" y="4184294"/>
-            <a:ext cx="3474720" cy="1466698"/>
+            <a:off x="7543800" y="4389120"/>
+            <a:ext cx="3611880" cy="1261872"/>
           </a:xfrm>
           <a:prstGeom prst="roundRect">
             <a:avLst>
-              <a:gd name="adj" fmla="val 7481"/>
+              <a:gd name="adj" fmla="val 8696"/>
             </a:avLst>
           </a:prstGeom>
           <a:solidFill>
@@ -13419,8 +13419,8 @@
         </p:nvSpPr>
         <p:spPr>
           <a:xfrm>
-            <a:off x="7799832" y="4330598"/>
-            <a:ext cx="3145536" cy="256032"/>
+            <a:off x="7708392" y="4517136"/>
+            <a:ext cx="3282696" cy="228600"/>
           </a:xfrm>
           <a:prstGeom prst="rect">
             <a:avLst/>
@@ -13436,7 +13436,7 @@
               <a:buNone/>
             </a:pPr>
             <a:r>
-              <a:rPr lang="en-US" sz="1300" b="1" dirty="0">
+              <a:rPr lang="en-US" sz="1220" b="1" dirty="0">
                 <a:solidFill>
                   <a:srgbClr val="0068B7"/>
                 </a:solidFill>
@@ -13446,7 +13446,7 @@
               </a:rPr>
               <a:t>What to document</a:t>
             </a:r>
-            <a:endParaRPr lang="en-US" sz="1300" dirty="0"/>
+            <a:endParaRPr lang="en-US" sz="1220" dirty="0"/>
           </a:p>
         </p:txBody>
       </p:sp>
@@ -13458,8 +13458,8 @@
         </p:nvSpPr>
         <p:spPr>
           <a:xfrm>
-            <a:off x="7799832" y="4659782"/>
-            <a:ext cx="3145536" cy="899770"/>
+            <a:off x="7708392" y="4828032"/>
+            <a:ext cx="3282696" cy="749808"/>
           </a:xfrm>
           <a:prstGeom prst="rect">
             <a:avLst/>
@@ -13477,7 +13477,7 @@
               <a:buNone/>
             </a:pPr>
             <a:r>
-              <a:rPr lang="en-US" sz="1320" dirty="0">
+              <a:rPr lang="en-US" sz="1220" dirty="0">
                 <a:solidFill>
                   <a:srgbClr val="17364A"/>
                 </a:solidFill>
@@ -13485,9 +13485,9 @@
                 <a:ea typeface="Aptos" pitchFamily="34" charset="-122"/>
                 <a:cs typeface="Aptos" pitchFamily="34" charset="-120"/>
               </a:rPr>
-              <a:t>Translate this concept into clear decision rights, review steps, documentation expectations, and escalation paths before an AI-supported workflow is approved.</a:t>
-            </a:r>
-            <a:endParaRPr lang="en-US" sz="1320" dirty="0"/>
+              <a:t>Translate this concept into clear decision rights, review steps, documentation.</a:t>
+            </a:r>
+            <a:endParaRPr lang="en-US" sz="1220" dirty="0"/>
           </a:p>
         </p:txBody>
       </p:sp>
@@ -13805,7 +13805,7 @@
                 <a:ea typeface="Aptos" pitchFamily="34" charset="-122"/>
                 <a:cs typeface="Aptos" pitchFamily="34" charset="-120"/>
               </a:rPr>
-              <a:t>• Play 3: Establish AI Governance - This lesson informs Play 3 by helping learners connect the.</a:t>
+              <a:t>• Play 3: Establish AI Governance - This lesson informs Play 3 by helping.</a:t>
             </a:r>
             <a:endParaRPr lang="en-US" sz="1900" dirty="0"/>
           </a:p>
@@ -13822,7 +13822,7 @@
                 <a:ea typeface="Aptos" pitchFamily="34" charset="-122"/>
                 <a:cs typeface="Aptos" pitchFamily="34" charset="-120"/>
               </a:rPr>
-              <a:t>• Play 12: Execute Governance and Oversight - This lesson informs Play 12 by helping learners.</a:t>
+              <a:t>• Play 12: Execute Governance and Oversight - This lesson informs Play 12 by.</a:t>
             </a:r>
             <a:endParaRPr lang="en-US" sz="1900" dirty="0"/>
           </a:p>
@@ -13839,7 +13839,7 @@
                 <a:ea typeface="Aptos" pitchFamily="34" charset="-122"/>
                 <a:cs typeface="Aptos" pitchFamily="34" charset="-120"/>
               </a:rPr>
-              <a:t>• Play 11: Build and Deploy AI Solutions - This lesson informs Play 11 by helping learners.</a:t>
+              <a:t>• Play 11: Build and Deploy AI Solutions - This lesson informs Play 11 by.</a:t>
             </a:r>
             <a:endParaRPr lang="en-US" sz="1900" dirty="0"/>
           </a:p>
@@ -13856,7 +13856,7 @@
                 <a:ea typeface="Aptos" pitchFamily="34" charset="-122"/>
                 <a:cs typeface="Aptos" pitchFamily="34" charset="-120"/>
               </a:rPr>
-              <a:t>• Play 8: Develop a Funding Strategy - This lesson informs Play 8 by helping learners connect.</a:t>
+              <a:t>• Play 8: Develop a Funding Strategy - This lesson informs Play 8 by helping.</a:t>
             </a:r>
             <a:endParaRPr lang="en-US" sz="1900" dirty="0"/>
           </a:p>
@@ -13897,8 +13897,8 @@
         </p:nvSpPr>
         <p:spPr>
           <a:xfrm>
-            <a:off x="8211312" y="1563624"/>
-            <a:ext cx="2734056" cy="256032"/>
+            <a:off x="8211312" y="1545336"/>
+            <a:ext cx="2734056" cy="228600"/>
           </a:xfrm>
           <a:prstGeom prst="rect">
             <a:avLst/>
@@ -13914,7 +13914,7 @@
               <a:buNone/>
             </a:pPr>
             <a:r>
-              <a:rPr lang="en-US" sz="1300" b="1" dirty="0">
+              <a:rPr lang="en-US" sz="1220" b="1" dirty="0">
                 <a:solidFill>
                   <a:srgbClr val="0068B7"/>
                 </a:solidFill>
@@ -13924,7 +13924,7 @@
               </a:rPr>
               <a:t>Apply the lesson</a:t>
             </a:r>
-            <a:endParaRPr lang="en-US" sz="1300" dirty="0"/>
+            <a:endParaRPr lang="en-US" sz="1220" dirty="0"/>
           </a:p>
         </p:txBody>
       </p:sp>
@@ -13936,8 +13936,8 @@
         </p:nvSpPr>
         <p:spPr>
           <a:xfrm>
-            <a:off x="8211312" y="1892808"/>
-            <a:ext cx="2734056" cy="1536192"/>
+            <a:off x="8211312" y="1856232"/>
+            <a:ext cx="2734056" cy="1591056"/>
           </a:xfrm>
           <a:prstGeom prst="rect">
             <a:avLst/>
@@ -13955,7 +13955,7 @@
               <a:buNone/>
             </a:pPr>
             <a:r>
-              <a:rPr lang="en-US" sz="1320" dirty="0">
+              <a:rPr lang="en-US" sz="1220" dirty="0">
                 <a:solidFill>
                   <a:srgbClr val="17364A"/>
                 </a:solidFill>
@@ -13963,9 +13963,9 @@
                 <a:ea typeface="Aptos" pitchFamily="34" charset="-122"/>
                 <a:cs typeface="Aptos" pitchFamily="34" charset="-120"/>
               </a:rPr>
-              <a:t>Use the related plays to identify decisions, participants, timing, approvals, and documentation needed for responsible implementation.</a:t>
-            </a:r>
-            <a:endParaRPr lang="en-US" sz="1320" dirty="0"/>
+              <a:t>Use the related plays to identify decisions, participants, timing, approvals,.</a:t>
+            </a:r>
+            <a:endParaRPr lang="en-US" sz="1220" dirty="0"/>
           </a:p>
         </p:txBody>
       </p:sp>
@@ -14004,8 +14004,8 @@
         </p:nvSpPr>
         <p:spPr>
           <a:xfrm>
-            <a:off x="8211312" y="3941064"/>
-            <a:ext cx="2734056" cy="256032"/>
+            <a:off x="8211312" y="3922776"/>
+            <a:ext cx="2734056" cy="228600"/>
           </a:xfrm>
           <a:prstGeom prst="rect">
             <a:avLst/>
@@ -14021,7 +14021,7 @@
               <a:buNone/>
             </a:pPr>
             <a:r>
-              <a:rPr lang="en-US" sz="1300" b="1" dirty="0">
+              <a:rPr lang="en-US" sz="1220" b="1" dirty="0">
                 <a:solidFill>
                   <a:srgbClr val="0068B7"/>
                 </a:solidFill>
@@ -14031,7 +14031,7 @@
               </a:rPr>
               <a:t>Use the play links to</a:t>
             </a:r>
-            <a:endParaRPr lang="en-US" sz="1300" dirty="0"/>
+            <a:endParaRPr lang="en-US" sz="1220" dirty="0"/>
           </a:p>
         </p:txBody>
       </p:sp>
@@ -14043,8 +14043,8 @@
         </p:nvSpPr>
         <p:spPr>
           <a:xfrm>
-            <a:off x="8229600" y="4306824"/>
-            <a:ext cx="2679192" cy="941832"/>
+            <a:off x="8229600" y="4251960"/>
+            <a:ext cx="2679192" cy="1033272"/>
           </a:xfrm>
           <a:prstGeom prst="rect">
             <a:avLst/>
@@ -14062,7 +14062,7 @@
               <a:buNone/>
             </a:pPr>
             <a:r>
-              <a:rPr lang="en-US" sz="1220" dirty="0">
+              <a:rPr lang="en-US" sz="1140" dirty="0">
                 <a:solidFill>
                   <a:srgbClr val="17364A"/>
                 </a:solidFill>
@@ -14072,14 +14072,14 @@
               </a:rPr>
               <a:t>Locate the decision point in the playbook sequence.</a:t>
             </a:r>
-            <a:endParaRPr lang="en-US" sz="1220" dirty="0"/>
-          </a:p>
-          <a:p>
-            <a:pPr indent="0" marL="0">
-              <a:buNone/>
-            </a:pPr>
-            <a:r>
-              <a:rPr lang="en-US" sz="1220" dirty="0">
+            <a:endParaRPr lang="en-US" sz="1140" dirty="0"/>
+          </a:p>
+          <a:p>
+            <a:pPr indent="0" marL="0">
+              <a:buNone/>
+            </a:pPr>
+            <a:r>
+              <a:rPr lang="en-US" sz="1140" dirty="0">
                 <a:solidFill>
                   <a:srgbClr val="17364A"/>
                 </a:solidFill>
@@ -14089,14 +14089,14 @@
               </a:rPr>
               <a:t>Identify who should participate in the work.</a:t>
             </a:r>
-            <a:endParaRPr lang="en-US" sz="1220" dirty="0"/>
-          </a:p>
-          <a:p>
-            <a:pPr indent="0" marL="0">
-              <a:buNone/>
-            </a:pPr>
-            <a:r>
-              <a:rPr lang="en-US" sz="1220" dirty="0">
+            <a:endParaRPr lang="en-US" sz="1140" dirty="0"/>
+          </a:p>
+          <a:p>
+            <a:pPr indent="0" marL="0">
+              <a:buNone/>
+            </a:pPr>
+            <a:r>
+              <a:rPr lang="en-US" sz="1140" dirty="0">
                 <a:solidFill>
                   <a:srgbClr val="17364A"/>
                 </a:solidFill>
@@ -14104,9 +14104,9 @@
                 <a:ea typeface="Aptos" pitchFamily="34" charset="-122"/>
                 <a:cs typeface="Aptos" pitchFamily="34" charset="-120"/>
               </a:rPr>
-              <a:t>Document the review, approval, or implementation step.</a:t>
-            </a:r>
-            <a:endParaRPr lang="en-US" sz="1220" dirty="0"/>
+              <a:t>Document the review, approval, or implementation.</a:t>
+            </a:r>
+            <a:endParaRPr lang="en-US" sz="1140" dirty="0"/>
           </a:p>
         </p:txBody>
       </p:sp>
@@ -14424,7 +14424,7 @@
                 <a:ea typeface="Aptos" pitchFamily="34" charset="-122"/>
                 <a:cs typeface="Aptos" pitchFamily="34" charset="-120"/>
               </a:rPr>
-              <a:t>• Tool 16: Incident Response Checklist (Checklist) - Use this tool to complete or strengthen the.</a:t>
+              <a:t>• Tool 16: Incident Response Checklist (Checklist) - Use this tool to complete.</a:t>
             </a:r>
             <a:endParaRPr lang="en-US" sz="1850" dirty="0"/>
           </a:p>
@@ -14441,7 +14441,7 @@
                 <a:ea typeface="Aptos" pitchFamily="34" charset="-122"/>
                 <a:cs typeface="Aptos" pitchFamily="34" charset="-120"/>
               </a:rPr>
-              <a:t>• Tool 17: Compliance Audit Checklist (Checklist) - Use this tool to complete or strengthen the.</a:t>
+              <a:t>• Tool 17: Compliance Audit Checklist (Checklist) - Use this tool to complete.</a:t>
             </a:r>
             <a:endParaRPr lang="en-US" sz="1850" dirty="0"/>
           </a:p>
@@ -14458,7 +14458,7 @@
                 <a:ea typeface="Aptos" pitchFamily="34" charset="-122"/>
                 <a:cs typeface="Aptos" pitchFamily="34" charset="-120"/>
               </a:rPr>
-              <a:t>• Tool 18: Policy Update &amp; Version Control Log (Log) - Use this tool to complete or strengthen.</a:t>
+              <a:t>• Tool 18: Policy Update &amp; Version Control Log (Log) - Use this tool to.</a:t>
             </a:r>
             <a:endParaRPr lang="en-US" sz="1850" dirty="0"/>
           </a:p>
@@ -14475,7 +14475,7 @@
                 <a:ea typeface="Aptos" pitchFamily="34" charset="-122"/>
                 <a:cs typeface="Aptos" pitchFamily="34" charset="-120"/>
               </a:rPr>
-              <a:t>• Tool 19: Plain-Language AI Public Notice Template (Template) - Use this tool to complete or.</a:t>
+              <a:t>• Tool 19: Plain-Language AI Public Notice Template (Template) - Use this tool.</a:t>
             </a:r>
             <a:endParaRPr lang="en-US" sz="1850" dirty="0"/>
           </a:p>
@@ -14516,8 +14516,8 @@
         </p:nvSpPr>
         <p:spPr>
           <a:xfrm>
-            <a:off x="8211312" y="1563624"/>
-            <a:ext cx="2734056" cy="256032"/>
+            <a:off x="8211312" y="1545336"/>
+            <a:ext cx="2734056" cy="228600"/>
           </a:xfrm>
           <a:prstGeom prst="rect">
             <a:avLst/>
@@ -14533,7 +14533,7 @@
               <a:buNone/>
             </a:pPr>
             <a:r>
-              <a:rPr lang="en-US" sz="1300" b="1" dirty="0">
+              <a:rPr lang="en-US" sz="1220" b="1" dirty="0">
                 <a:solidFill>
                   <a:srgbClr val="0068B7"/>
                 </a:solidFill>
@@ -14543,7 +14543,7 @@
               </a:rPr>
               <a:t>Use the tools</a:t>
             </a:r>
-            <a:endParaRPr lang="en-US" sz="1300" dirty="0"/>
+            <a:endParaRPr lang="en-US" sz="1220" dirty="0"/>
           </a:p>
         </p:txBody>
       </p:sp>
@@ -14555,8 +14555,8 @@
         </p:nvSpPr>
         <p:spPr>
           <a:xfrm>
-            <a:off x="8211312" y="1892808"/>
-            <a:ext cx="2734056" cy="1536192"/>
+            <a:off x="8211312" y="1856232"/>
+            <a:ext cx="2734056" cy="1591056"/>
           </a:xfrm>
           <a:prstGeom prst="rect">
             <a:avLst/>
@@ -14574,7 +14574,7 @@
               <a:buNone/>
             </a:pPr>
             <a:r>
-              <a:rPr lang="en-US" sz="1320" dirty="0">
+              <a:rPr lang="en-US" sz="1220" dirty="0">
                 <a:solidFill>
                   <a:srgbClr val="17364A"/>
                 </a:solidFill>
@@ -14582,9 +14582,9 @@
                 <a:ea typeface="Aptos" pitchFamily="34" charset="-122"/>
                 <a:cs typeface="Aptos" pitchFamily="34" charset="-120"/>
               </a:rPr>
-              <a:t>Use linked tools when your department needs a structured worksheet, template, checklist, review process, or documentation artifact.</a:t>
-            </a:r>
-            <a:endParaRPr lang="en-US" sz="1320" dirty="0"/>
+              <a:t>Use linked tools when your department needs a structured worksheet, template,.</a:t>
+            </a:r>
+            <a:endParaRPr lang="en-US" sz="1220" dirty="0"/>
           </a:p>
         </p:txBody>
       </p:sp>
@@ -14623,8 +14623,8 @@
         </p:nvSpPr>
         <p:spPr>
           <a:xfrm>
-            <a:off x="8211312" y="3941064"/>
-            <a:ext cx="2734056" cy="256032"/>
+            <a:off x="8211312" y="3922776"/>
+            <a:ext cx="2734056" cy="228600"/>
           </a:xfrm>
           <a:prstGeom prst="rect">
             <a:avLst/>
@@ -14640,7 +14640,7 @@
               <a:buNone/>
             </a:pPr>
             <a:r>
-              <a:rPr lang="en-US" sz="1300" b="1" dirty="0">
+              <a:rPr lang="en-US" sz="1220" b="1" dirty="0">
                 <a:solidFill>
                   <a:srgbClr val="0068B7"/>
                 </a:solidFill>
@@ -14650,7 +14650,7 @@
               </a:rPr>
               <a:t>Tool selection cues</a:t>
             </a:r>
-            <a:endParaRPr lang="en-US" sz="1300" dirty="0"/>
+            <a:endParaRPr lang="en-US" sz="1220" dirty="0"/>
           </a:p>
         </p:txBody>
       </p:sp>
@@ -14662,8 +14662,8 @@
         </p:nvSpPr>
         <p:spPr>
           <a:xfrm>
-            <a:off x="8229600" y="4306824"/>
-            <a:ext cx="2679192" cy="941832"/>
+            <a:off x="8229600" y="4251960"/>
+            <a:ext cx="2679192" cy="1033272"/>
           </a:xfrm>
           <a:prstGeom prst="rect">
             <a:avLst/>
@@ -14681,7 +14681,7 @@
               <a:buNone/>
             </a:pPr>
             <a:r>
-              <a:rPr lang="en-US" sz="1220" dirty="0">
+              <a:rPr lang="en-US" sz="1140" dirty="0">
                 <a:solidFill>
                   <a:srgbClr val="17364A"/>
                 </a:solidFill>
@@ -14691,14 +14691,14 @@
               </a:rPr>
               <a:t>Use a tool when no comparable local process exists.</a:t>
             </a:r>
-            <a:endParaRPr lang="en-US" sz="1220" dirty="0"/>
-          </a:p>
-          <a:p>
-            <a:pPr indent="0" marL="0">
-              <a:buNone/>
-            </a:pPr>
-            <a:r>
-              <a:rPr lang="en-US" sz="1220" dirty="0">
+            <a:endParaRPr lang="en-US" sz="1140" dirty="0"/>
+          </a:p>
+          <a:p>
+            <a:pPr indent="0" marL="0">
+              <a:buNone/>
+            </a:pPr>
+            <a:r>
+              <a:rPr lang="en-US" sz="1140" dirty="0">
                 <a:solidFill>
                   <a:srgbClr val="17364A"/>
                 </a:solidFill>
@@ -14706,16 +14706,16 @@
                 <a:ea typeface="Aptos" pitchFamily="34" charset="-122"/>
                 <a:cs typeface="Aptos" pitchFamily="34" charset="-120"/>
               </a:rPr>
-              <a:t>Adapt existing department templates when they already fit the.</a:t>
-            </a:r>
-            <a:endParaRPr lang="en-US" sz="1220" dirty="0"/>
-          </a:p>
-          <a:p>
-            <a:pPr indent="0" marL="0">
-              <a:buNone/>
-            </a:pPr>
-            <a:r>
-              <a:rPr lang="en-US" sz="1220" dirty="0">
+              <a:t>Adapt existing department templates when they.</a:t>
+            </a:r>
+            <a:endParaRPr lang="en-US" sz="1140" dirty="0"/>
+          </a:p>
+          <a:p>
+            <a:pPr indent="0" marL="0">
+              <a:buNone/>
+            </a:pPr>
+            <a:r>
+              <a:rPr lang="en-US" sz="1140" dirty="0">
                 <a:solidFill>
                   <a:srgbClr val="17364A"/>
                 </a:solidFill>
@@ -14723,9 +14723,9 @@
                 <a:ea typeface="Aptos" pitchFamily="34" charset="-122"/>
                 <a:cs typeface="Aptos" pitchFamily="34" charset="-120"/>
               </a:rPr>
-              <a:t>Save the completed artifact as evidence of the decision.</a:t>
-            </a:r>
-            <a:endParaRPr lang="en-US" sz="1220" dirty="0"/>
+              <a:t>Save the completed artifact as evidence of the.</a:t>
+            </a:r>
+            <a:endParaRPr lang="en-US" sz="1140" dirty="0"/>
           </a:p>
         </p:txBody>
       </p:sp>
@@ -15016,8 +15016,8 @@
         </p:nvSpPr>
         <p:spPr>
           <a:xfrm>
-            <a:off x="868680" y="1508760"/>
-            <a:ext cx="6309360" cy="4160520"/>
+            <a:off x="822960" y="1463040"/>
+            <a:ext cx="6565392" cy="4343400"/>
           </a:xfrm>
           <a:prstGeom prst="rect">
             <a:avLst/>
@@ -15035,7 +15035,7 @@
               <a:buNone/>
             </a:pPr>
             <a:r>
-              <a:rPr lang="en-US" sz="2100" dirty="0">
+              <a:rPr lang="en-US" sz="1920" dirty="0">
                 <a:solidFill>
                   <a:srgbClr val="003A63"/>
                 </a:solidFill>
@@ -15043,16 +15043,16 @@
                 <a:ea typeface="Aptos" pitchFamily="34" charset="-122"/>
                 <a:cs typeface="Aptos" pitchFamily="34" charset="-120"/>
               </a:rPr>
-              <a:t>• Identify categories of law, policy, standards, and guidance that may affect public health AI.</a:t>
-            </a:r>
-            <a:endParaRPr lang="en-US" sz="2100" dirty="0"/>
-          </a:p>
-          <a:p>
-            <a:pPr indent="0" marL="0">
-              <a:buNone/>
-            </a:pPr>
-            <a:r>
-              <a:rPr lang="en-US" sz="2100" dirty="0">
+              <a:t>• Identify categories of law, policy, standards, and guidance that may affect.</a:t>
+            </a:r>
+            <a:endParaRPr lang="en-US" sz="1920" dirty="0"/>
+          </a:p>
+          <a:p>
+            <a:pPr indent="0" marL="0">
+              <a:buNone/>
+            </a:pPr>
+            <a:r>
+              <a:rPr lang="en-US" sz="1920" dirty="0">
                 <a:solidFill>
                   <a:srgbClr val="003A63"/>
                 </a:solidFill>
@@ -15060,16 +15060,16 @@
                 <a:ea typeface="Aptos" pitchFamily="34" charset="-122"/>
                 <a:cs typeface="Aptos" pitchFamily="34" charset="-120"/>
               </a:rPr>
-              <a:t>• Explain why regulatory readiness requires monitoring, interpretation, documentation, and policy.</a:t>
-            </a:r>
-            <a:endParaRPr lang="en-US" sz="2100" dirty="0"/>
-          </a:p>
-          <a:p>
-            <a:pPr indent="0" marL="0">
-              <a:buNone/>
-            </a:pPr>
-            <a:r>
-              <a:rPr lang="en-US" sz="2100" dirty="0">
+              <a:t>• Explain why regulatory readiness requires monitoring, interpretation,.</a:t>
+            </a:r>
+            <a:endParaRPr lang="en-US" sz="1920" dirty="0"/>
+          </a:p>
+          <a:p>
+            <a:pPr indent="0" marL="0">
+              <a:buNone/>
+            </a:pPr>
+            <a:r>
+              <a:rPr lang="en-US" sz="1920" dirty="0">
                 <a:solidFill>
                   <a:srgbClr val="003A63"/>
                 </a:solidFill>
@@ -15077,9 +15077,9 @@
                 <a:ea typeface="Aptos" pitchFamily="34" charset="-122"/>
                 <a:cs typeface="Aptos" pitchFamily="34" charset="-120"/>
               </a:rPr>
-              <a:t>• Distinguish between binding requirements, agency policy, professional guidance, standards, and.</a:t>
-            </a:r>
-            <a:endParaRPr lang="en-US" sz="2100" dirty="0"/>
+              <a:t>• Distinguish between binding requirements, agency policy, professional.</a:t>
+            </a:r>
+            <a:endParaRPr lang="en-US" sz="1920" dirty="0"/>
           </a:p>
         </p:txBody>
       </p:sp>
@@ -15091,12 +15091,12 @@
         </p:nvSpPr>
         <p:spPr>
           <a:xfrm>
-            <a:off x="7635240" y="1325880"/>
-            <a:ext cx="3474720" cy="1207008"/>
+            <a:off x="7543800" y="1325880"/>
+            <a:ext cx="3611880" cy="1261872"/>
           </a:xfrm>
           <a:prstGeom prst="roundRect">
             <a:avLst>
-              <a:gd name="adj" fmla="val 9091"/>
+              <a:gd name="adj" fmla="val 8696"/>
             </a:avLst>
           </a:prstGeom>
           <a:solidFill>
@@ -15118,8 +15118,8 @@
         </p:nvSpPr>
         <p:spPr>
           <a:xfrm>
-            <a:off x="7799832" y="1472184"/>
-            <a:ext cx="3145536" cy="256032"/>
+            <a:off x="7708392" y="1453896"/>
+            <a:ext cx="3282696" cy="228600"/>
           </a:xfrm>
           <a:prstGeom prst="rect">
             <a:avLst/>
@@ -15135,7 +15135,7 @@
               <a:buNone/>
             </a:pPr>
             <a:r>
-              <a:rPr lang="en-US" sz="1300" b="1" dirty="0">
+              <a:rPr lang="en-US" sz="1220" b="1" dirty="0">
                 <a:solidFill>
                   <a:srgbClr val="0068B7"/>
                 </a:solidFill>
@@ -15145,7 +15145,7 @@
               </a:rPr>
               <a:t>Governance lens</a:t>
             </a:r>
-            <a:endParaRPr lang="en-US" sz="1300" dirty="0"/>
+            <a:endParaRPr lang="en-US" sz="1220" dirty="0"/>
           </a:p>
         </p:txBody>
       </p:sp>
@@ -15157,8 +15157,8 @@
         </p:nvSpPr>
         <p:spPr>
           <a:xfrm>
-            <a:off x="7799832" y="1801368"/>
-            <a:ext cx="3145536" cy="640080"/>
+            <a:off x="7708392" y="1764792"/>
+            <a:ext cx="3282696" cy="749808"/>
           </a:xfrm>
           <a:prstGeom prst="rect">
             <a:avLst/>
@@ -15176,7 +15176,7 @@
               <a:buNone/>
             </a:pPr>
             <a:r>
-              <a:rPr lang="en-US" sz="1320" dirty="0">
+              <a:rPr lang="en-US" sz="1220" dirty="0">
                 <a:solidFill>
                   <a:srgbClr val="17364A"/>
                 </a:solidFill>
@@ -15184,9 +15184,9 @@
                 <a:ea typeface="Aptos" pitchFamily="34" charset="-122"/>
                 <a:cs typeface="Aptos" pitchFamily="34" charset="-120"/>
               </a:rPr>
-              <a:t>Identify categories of law, policy, standards, and guidance that may affect public.</a:t>
-            </a:r>
-            <a:endParaRPr lang="en-US" sz="1320" dirty="0"/>
+              <a:t>Identify categories of law, policy, standards, and guidance that may affect.</a:t>
+            </a:r>
+            <a:endParaRPr lang="en-US" sz="1220" dirty="0"/>
           </a:p>
         </p:txBody>
       </p:sp>
@@ -15198,12 +15198,12 @@
         </p:nvSpPr>
         <p:spPr>
           <a:xfrm>
-            <a:off x="7635240" y="2670048"/>
-            <a:ext cx="3474720" cy="1377086"/>
+            <a:off x="7543800" y="2724912"/>
+            <a:ext cx="3611880" cy="1527048"/>
           </a:xfrm>
           <a:prstGeom prst="roundRect">
             <a:avLst>
-              <a:gd name="adj" fmla="val 7968"/>
+              <a:gd name="adj" fmla="val 7186"/>
             </a:avLst>
           </a:prstGeom>
           <a:solidFill>
@@ -15225,8 +15225,8 @@
         </p:nvSpPr>
         <p:spPr>
           <a:xfrm>
-            <a:off x="7799832" y="2816352"/>
-            <a:ext cx="3145536" cy="256032"/>
+            <a:off x="7708392" y="2852928"/>
+            <a:ext cx="3282696" cy="228600"/>
           </a:xfrm>
           <a:prstGeom prst="rect">
             <a:avLst/>
@@ -15242,7 +15242,7 @@
               <a:buNone/>
             </a:pPr>
             <a:r>
-              <a:rPr lang="en-US" sz="1300" b="1" dirty="0">
+              <a:rPr lang="en-US" sz="1220" b="1" dirty="0">
                 <a:solidFill>
                   <a:srgbClr val="0068B7"/>
                 </a:solidFill>
@@ -15252,7 +15252,7 @@
               </a:rPr>
               <a:t>Concept checkpoints</a:t>
             </a:r>
-            <a:endParaRPr lang="en-US" sz="1300" dirty="0"/>
+            <a:endParaRPr lang="en-US" sz="1220" dirty="0"/>
           </a:p>
         </p:txBody>
       </p:sp>
@@ -15264,8 +15264,8 @@
         </p:nvSpPr>
         <p:spPr>
           <a:xfrm>
-            <a:off x="7818120" y="3182112"/>
-            <a:ext cx="3090672" cy="718718"/>
+            <a:off x="7726680" y="3182112"/>
+            <a:ext cx="3227832" cy="960120"/>
           </a:xfrm>
           <a:prstGeom prst="rect">
             <a:avLst/>
@@ -15283,7 +15283,7 @@
               <a:buNone/>
             </a:pPr>
             <a:r>
-              <a:rPr lang="en-US" sz="1220" dirty="0">
+              <a:rPr lang="en-US" sz="1140" dirty="0">
                 <a:solidFill>
                   <a:srgbClr val="17364A"/>
                 </a:solidFill>
@@ -15291,16 +15291,16 @@
                 <a:ea typeface="Aptos" pitchFamily="34" charset="-122"/>
                 <a:cs typeface="Aptos" pitchFamily="34" charset="-120"/>
               </a:rPr>
-              <a:t>Explain why regulatory readiness requires monitoring,.</a:t>
-            </a:r>
-            <a:endParaRPr lang="en-US" sz="1220" dirty="0"/>
-          </a:p>
-          <a:p>
-            <a:pPr indent="0" marL="0">
-              <a:buNone/>
-            </a:pPr>
-            <a:r>
-              <a:rPr lang="en-US" sz="1220" dirty="0">
+              <a:t>Explain why regulatory readiness requires.</a:t>
+            </a:r>
+            <a:endParaRPr lang="en-US" sz="1140" dirty="0"/>
+          </a:p>
+          <a:p>
+            <a:pPr indent="0" marL="0">
+              <a:buNone/>
+            </a:pPr>
+            <a:r>
+              <a:rPr lang="en-US" sz="1140" dirty="0">
                 <a:solidFill>
                   <a:srgbClr val="17364A"/>
                 </a:solidFill>
@@ -15308,16 +15308,16 @@
                 <a:ea typeface="Aptos" pitchFamily="34" charset="-122"/>
                 <a:cs typeface="Aptos" pitchFamily="34" charset="-120"/>
               </a:rPr>
-              <a:t>Distinguish between binding requirements, agency policy,.</a:t>
-            </a:r>
-            <a:endParaRPr lang="en-US" sz="1220" dirty="0"/>
-          </a:p>
-          <a:p>
-            <a:pPr indent="0" marL="0">
-              <a:buNone/>
-            </a:pPr>
-            <a:r>
-              <a:rPr lang="en-US" sz="1220" dirty="0">
+              <a:t>Distinguish between binding requirements, agency.</a:t>
+            </a:r>
+            <a:endParaRPr lang="en-US" sz="1140" dirty="0"/>
+          </a:p>
+          <a:p>
+            <a:pPr indent="0" marL="0">
+              <a:buNone/>
+            </a:pPr>
+            <a:r>
+              <a:rPr lang="en-US" sz="1140" dirty="0">
                 <a:solidFill>
                   <a:srgbClr val="17364A"/>
                 </a:solidFill>
@@ -15325,9 +15325,9 @@
                 <a:ea typeface="Aptos" pitchFamily="34" charset="-122"/>
                 <a:cs typeface="Aptos" pitchFamily="34" charset="-120"/>
               </a:rPr>
-              <a:t>Create a policy scan process for AI-related developments.</a:t>
-            </a:r>
-            <a:endParaRPr lang="en-US" sz="1220" dirty="0"/>
+              <a:t>Create a policy scan process for AI-related.</a:t>
+            </a:r>
+            <a:endParaRPr lang="en-US" sz="1140" dirty="0"/>
           </a:p>
         </p:txBody>
       </p:sp>
@@ -15339,12 +15339,12 @@
         </p:nvSpPr>
         <p:spPr>
           <a:xfrm>
-            <a:off x="7635240" y="4184294"/>
-            <a:ext cx="3474720" cy="1466698"/>
+            <a:off x="7543800" y="4389120"/>
+            <a:ext cx="3611880" cy="1261872"/>
           </a:xfrm>
           <a:prstGeom prst="roundRect">
             <a:avLst>
-              <a:gd name="adj" fmla="val 7481"/>
+              <a:gd name="adj" fmla="val 8696"/>
             </a:avLst>
           </a:prstGeom>
           <a:solidFill>
@@ -15366,8 +15366,8 @@
         </p:nvSpPr>
         <p:spPr>
           <a:xfrm>
-            <a:off x="7799832" y="4330598"/>
-            <a:ext cx="3145536" cy="256032"/>
+            <a:off x="7708392" y="4517136"/>
+            <a:ext cx="3282696" cy="228600"/>
           </a:xfrm>
           <a:prstGeom prst="rect">
             <a:avLst/>
@@ -15383,7 +15383,7 @@
               <a:buNone/>
             </a:pPr>
             <a:r>
-              <a:rPr lang="en-US" sz="1300" b="1" dirty="0">
+              <a:rPr lang="en-US" sz="1220" b="1" dirty="0">
                 <a:solidFill>
                   <a:srgbClr val="0068B7"/>
                 </a:solidFill>
@@ -15393,7 +15393,7 @@
               </a:rPr>
               <a:t>What to document</a:t>
             </a:r>
-            <a:endParaRPr lang="en-US" sz="1300" dirty="0"/>
+            <a:endParaRPr lang="en-US" sz="1220" dirty="0"/>
           </a:p>
         </p:txBody>
       </p:sp>
@@ -15405,8 +15405,8 @@
         </p:nvSpPr>
         <p:spPr>
           <a:xfrm>
-            <a:off x="7799832" y="4659782"/>
-            <a:ext cx="3145536" cy="899770"/>
+            <a:off x="7708392" y="4828032"/>
+            <a:ext cx="3282696" cy="749808"/>
           </a:xfrm>
           <a:prstGeom prst="rect">
             <a:avLst/>
@@ -15424,7 +15424,7 @@
               <a:buNone/>
             </a:pPr>
             <a:r>
-              <a:rPr lang="en-US" sz="1320" dirty="0">
+              <a:rPr lang="en-US" sz="1220" dirty="0">
                 <a:solidFill>
                   <a:srgbClr val="17364A"/>
                 </a:solidFill>
@@ -15432,9 +15432,9 @@
                 <a:ea typeface="Aptos" pitchFamily="34" charset="-122"/>
                 <a:cs typeface="Aptos" pitchFamily="34" charset="-120"/>
               </a:rPr>
-              <a:t>Use the assignment to test whether you can explain the concept, apply it to a realistic public health situation, and identify what would need review before the work moves forward.</a:t>
-            </a:r>
-            <a:endParaRPr lang="en-US" sz="1320" dirty="0"/>
+              <a:t>Use the assignment to test whether you can explain the concept, apply it to a.</a:t>
+            </a:r>
+            <a:endParaRPr lang="en-US" sz="1220" dirty="0"/>
           </a:p>
         </p:txBody>
       </p:sp>
@@ -15725,8 +15725,8 @@
         </p:nvSpPr>
         <p:spPr>
           <a:xfrm>
-            <a:off x="868680" y="1508760"/>
-            <a:ext cx="6309360" cy="4160520"/>
+            <a:off x="822960" y="1463040"/>
+            <a:ext cx="6565392" cy="4343400"/>
           </a:xfrm>
           <a:prstGeom prst="rect">
             <a:avLst/>
@@ -15744,7 +15744,7 @@
               <a:buNone/>
             </a:pPr>
             <a:r>
-              <a:rPr lang="en-US" sz="2100" dirty="0">
+              <a:rPr lang="en-US" sz="1920" dirty="0">
                 <a:solidFill>
                   <a:srgbClr val="003A63"/>
                 </a:solidFill>
@@ -15752,16 +15752,16 @@
                 <a:ea typeface="Aptos" pitchFamily="34" charset="-122"/>
                 <a:cs typeface="Aptos" pitchFamily="34" charset="-120"/>
               </a:rPr>
-              <a:t>• The public health AI policy landscape is evolving quickly across federal agencies, states,.</a:t>
-            </a:r>
-            <a:endParaRPr lang="en-US" sz="2100" dirty="0"/>
-          </a:p>
-          <a:p>
-            <a:pPr indent="0" marL="0">
-              <a:buNone/>
-            </a:pPr>
-            <a:r>
-              <a:rPr lang="en-US" sz="2100" dirty="0">
+              <a:t>• The public health AI policy landscape is evolving quickly across federal.</a:t>
+            </a:r>
+            <a:endParaRPr lang="en-US" sz="1920" dirty="0"/>
+          </a:p>
+          <a:p>
+            <a:pPr indent="0" marL="0">
+              <a:buNone/>
+            </a:pPr>
+            <a:r>
+              <a:rPr lang="en-US" sz="1920" dirty="0">
                 <a:solidFill>
                   <a:srgbClr val="003A63"/>
                 </a:solidFill>
@@ -15769,16 +15769,16 @@
                 <a:ea typeface="Aptos" pitchFamily="34" charset="-122"/>
                 <a:cs typeface="Aptos" pitchFamily="34" charset="-120"/>
               </a:rPr>
-              <a:t>• Public health agencies do not need to wait for every rule to be settled before acting.</a:t>
-            </a:r>
-            <a:endParaRPr lang="en-US" sz="2100" dirty="0"/>
-          </a:p>
-          <a:p>
-            <a:pPr indent="0" marL="0">
-              <a:buNone/>
-            </a:pPr>
-            <a:r>
-              <a:rPr lang="en-US" sz="2100" dirty="0">
+              <a:t>• Public health agencies do not need to wait for every rule to be settled.</a:t>
+            </a:r>
+            <a:endParaRPr lang="en-US" sz="1920" dirty="0"/>
+          </a:p>
+          <a:p>
+            <a:pPr indent="0" marL="0">
+              <a:buNone/>
+            </a:pPr>
+            <a:r>
+              <a:rPr lang="en-US" sz="1920" dirty="0">
                 <a:solidFill>
                   <a:srgbClr val="003A63"/>
                 </a:solidFill>
@@ -15786,9 +15786,9 @@
                 <a:ea typeface="Aptos" pitchFamily="34" charset="-122"/>
                 <a:cs typeface="Aptos" pitchFamily="34" charset="-120"/>
               </a:rPr>
-              <a:t>• Regulatory readiness means the agency can identify relevant requirements, update internal.</a:t>
-            </a:r>
-            <a:endParaRPr lang="en-US" sz="2100" dirty="0"/>
+              <a:t>• Regulatory readiness means the agency can identify relevant requirements,.</a:t>
+            </a:r>
+            <a:endParaRPr lang="en-US" sz="1920" dirty="0"/>
           </a:p>
         </p:txBody>
       </p:sp>
@@ -15800,12 +15800,12 @@
         </p:nvSpPr>
         <p:spPr>
           <a:xfrm>
-            <a:off x="7635240" y="1325880"/>
-            <a:ext cx="3474720" cy="1255471"/>
+            <a:off x="7543800" y="1325880"/>
+            <a:ext cx="3611880" cy="1261872"/>
           </a:xfrm>
           <a:prstGeom prst="roundRect">
             <a:avLst>
-              <a:gd name="adj" fmla="val 8740"/>
+              <a:gd name="adj" fmla="val 8696"/>
             </a:avLst>
           </a:prstGeom>
           <a:solidFill>
@@ -15827,8 +15827,8 @@
         </p:nvSpPr>
         <p:spPr>
           <a:xfrm>
-            <a:off x="7799832" y="1472184"/>
-            <a:ext cx="3145536" cy="256032"/>
+            <a:off x="7708392" y="1453896"/>
+            <a:ext cx="3282696" cy="228600"/>
           </a:xfrm>
           <a:prstGeom prst="rect">
             <a:avLst/>
@@ -15844,7 +15844,7 @@
               <a:buNone/>
             </a:pPr>
             <a:r>
-              <a:rPr lang="en-US" sz="1300" b="1" dirty="0">
+              <a:rPr lang="en-US" sz="1220" b="1" dirty="0">
                 <a:solidFill>
                   <a:srgbClr val="0068B7"/>
                 </a:solidFill>
@@ -15854,7 +15854,7 @@
               </a:rPr>
               <a:t>Governance lens</a:t>
             </a:r>
-            <a:endParaRPr lang="en-US" sz="1300" dirty="0"/>
+            <a:endParaRPr lang="en-US" sz="1220" dirty="0"/>
           </a:p>
         </p:txBody>
       </p:sp>
@@ -15866,8 +15866,8 @@
         </p:nvSpPr>
         <p:spPr>
           <a:xfrm>
-            <a:off x="7799832" y="1801368"/>
-            <a:ext cx="3145536" cy="688543"/>
+            <a:off x="7708392" y="1764792"/>
+            <a:ext cx="3282696" cy="749808"/>
           </a:xfrm>
           <a:prstGeom prst="rect">
             <a:avLst/>
@@ -15885,7 +15885,7 @@
               <a:buNone/>
             </a:pPr>
             <a:r>
-              <a:rPr lang="en-US" sz="1320" dirty="0">
+              <a:rPr lang="en-US" sz="1220" dirty="0">
                 <a:solidFill>
                   <a:srgbClr val="17364A"/>
                 </a:solidFill>
@@ -15893,9 +15893,9 @@
                 <a:ea typeface="Aptos" pitchFamily="34" charset="-122"/>
                 <a:cs typeface="Aptos" pitchFamily="34" charset="-120"/>
               </a:rPr>
-              <a:t>The public health AI policy landscape is evolving quickly across federal agencies, states, local.</a:t>
-            </a:r>
-            <a:endParaRPr lang="en-US" sz="1320" dirty="0"/>
+              <a:t>The public health AI policy landscape is evolving quickly across federal.</a:t>
+            </a:r>
+            <a:endParaRPr lang="en-US" sz="1220" dirty="0"/>
           </a:p>
         </p:txBody>
       </p:sp>
@@ -15907,12 +15907,12 @@
         </p:nvSpPr>
         <p:spPr>
           <a:xfrm>
-            <a:off x="7635240" y="2718511"/>
-            <a:ext cx="3474720" cy="1328623"/>
+            <a:off x="7543800" y="2724912"/>
+            <a:ext cx="3611880" cy="1527048"/>
           </a:xfrm>
           <a:prstGeom prst="roundRect">
             <a:avLst>
-              <a:gd name="adj" fmla="val 8259"/>
+              <a:gd name="adj" fmla="val 7186"/>
             </a:avLst>
           </a:prstGeom>
           <a:solidFill>
@@ -15934,24 +15934,26 @@
         </p:nvSpPr>
         <p:spPr>
           <a:xfrm>
-            <a:off x="7799832" y="2846527"/>
-            <a:ext cx="3145536" cy="237744"/>
-          </a:xfrm>
-          <a:prstGeom prst="rect">
-            <a:avLst/>
-          </a:prstGeom>
-          <a:noFill/>
-          <a:ln/>
-        </p:spPr>
-        <p:txBody>
-          <a:bodyPr wrap="square" lIns="0" tIns="0" rIns="0" bIns="0" rtlCol="0" anchor="ctr"/>
-          <a:lstStyle/>
-          <a:p>
-            <a:pPr indent="0" marL="0">
-              <a:buNone/>
-            </a:pPr>
-            <a:r>
-              <a:rPr lang="en-US" sz="1250" b="1" dirty="0">
+            <a:off x="7708392" y="2852928"/>
+            <a:ext cx="3282696" cy="219456"/>
+          </a:xfrm>
+          <a:prstGeom prst="rect">
+            <a:avLst/>
+          </a:prstGeom>
+          <a:noFill/>
+          <a:ln/>
+        </p:spPr>
+        <p:txBody>
+          <a:bodyPr wrap="square" lIns="0" tIns="0" rIns="0" bIns="0" rtlCol="0" anchor="ctr">
+            <a:normAutofit/>
+          </a:bodyPr>
+          <a:lstStyle/>
+          <a:p>
+            <a:pPr indent="0" marL="0">
+              <a:buNone/>
+            </a:pPr>
+            <a:r>
+              <a:rPr lang="en-US" sz="1160" b="1" dirty="0">
                 <a:solidFill>
                   <a:srgbClr val="0068B7"/>
                 </a:solidFill>
@@ -15961,7 +15963,7 @@
               </a:rPr>
               <a:t>Governance pathway</a:t>
             </a:r>
-            <a:endParaRPr lang="en-US" sz="1250" dirty="0"/>
+            <a:endParaRPr lang="en-US" sz="1160" dirty="0"/>
           </a:p>
         </p:txBody>
       </p:sp>
@@ -15973,7 +15975,7 @@
         </p:nvSpPr>
         <p:spPr>
           <a:xfrm>
-            <a:off x="8763000" y="3399739"/>
+            <a:off x="8717280" y="3406140"/>
             <a:ext cx="164592" cy="0"/>
           </a:xfrm>
           <a:prstGeom prst="line">
@@ -15996,8 +15998,8 @@
         </p:nvSpPr>
         <p:spPr>
           <a:xfrm>
-            <a:off x="7872984" y="3248863"/>
-            <a:ext cx="890016" cy="301752"/>
+            <a:off x="7781544" y="3255264"/>
+            <a:ext cx="935736" cy="301752"/>
           </a:xfrm>
           <a:prstGeom prst="roundRect">
             <a:avLst>
@@ -16023,8 +16025,8 @@
         </p:nvSpPr>
         <p:spPr>
           <a:xfrm>
-            <a:off x="7909560" y="3322015"/>
-            <a:ext cx="816864" cy="146304"/>
+            <a:off x="7818120" y="3328416"/>
+            <a:ext cx="862584" cy="146304"/>
           </a:xfrm>
           <a:prstGeom prst="rect">
             <a:avLst/>
@@ -16064,7 +16066,7 @@
         </p:nvSpPr>
         <p:spPr>
           <a:xfrm>
-            <a:off x="9817608" y="3399739"/>
+            <a:off x="9817608" y="3406140"/>
             <a:ext cx="164592" cy="0"/>
           </a:xfrm>
           <a:prstGeom prst="line">
@@ -16087,8 +16089,8 @@
         </p:nvSpPr>
         <p:spPr>
           <a:xfrm>
-            <a:off x="8927592" y="3248863"/>
-            <a:ext cx="890016" cy="301752"/>
+            <a:off x="8881872" y="3255264"/>
+            <a:ext cx="935736" cy="301752"/>
           </a:xfrm>
           <a:prstGeom prst="roundRect">
             <a:avLst>
@@ -16114,8 +16116,8 @@
         </p:nvSpPr>
         <p:spPr>
           <a:xfrm>
-            <a:off x="8964168" y="3322015"/>
-            <a:ext cx="816864" cy="146304"/>
+            <a:off x="8918448" y="3328416"/>
+            <a:ext cx="862584" cy="146304"/>
           </a:xfrm>
           <a:prstGeom prst="rect">
             <a:avLst/>
@@ -16155,8 +16157,8 @@
         </p:nvSpPr>
         <p:spPr>
           <a:xfrm>
-            <a:off x="9982200" y="3248863"/>
-            <a:ext cx="890016" cy="301752"/>
+            <a:off x="9982200" y="3255264"/>
+            <a:ext cx="935736" cy="301752"/>
           </a:xfrm>
           <a:prstGeom prst="roundRect">
             <a:avLst>
@@ -16182,8 +16184,8 @@
         </p:nvSpPr>
         <p:spPr>
           <a:xfrm>
-            <a:off x="10018776" y="3322015"/>
-            <a:ext cx="816864" cy="146304"/>
+            <a:off x="10018776" y="3328416"/>
+            <a:ext cx="862584" cy="146304"/>
           </a:xfrm>
           <a:prstGeom prst="rect">
             <a:avLst/>
@@ -16223,8 +16225,8 @@
         </p:nvSpPr>
         <p:spPr>
           <a:xfrm>
-            <a:off x="7854696" y="3742639"/>
-            <a:ext cx="3035808" cy="158191"/>
+            <a:off x="7763256" y="3749040"/>
+            <a:ext cx="3172968" cy="356616"/>
           </a:xfrm>
           <a:prstGeom prst="rect">
             <a:avLst/>
@@ -16242,7 +16244,7 @@
               <a:buNone/>
             </a:pPr>
             <a:r>
-              <a:rPr lang="en-US" sz="1120" dirty="0">
+              <a:rPr lang="en-US" sz="1040" dirty="0">
                 <a:solidFill>
                   <a:srgbClr val="17364A"/>
                 </a:solidFill>
@@ -16250,9 +16252,9 @@
                 <a:ea typeface="Aptos" pitchFamily="34" charset="-122"/>
                 <a:cs typeface="Aptos" pitchFamily="34" charset="-120"/>
               </a:rPr>
-              <a:t>A proposed AI use should move through documented review before it becomes an operational workflow.</a:t>
-            </a:r>
-            <a:endParaRPr lang="en-US" sz="1120" dirty="0"/>
+              <a:t>A proposed AI use should move through documented review before it.</a:t>
+            </a:r>
+            <a:endParaRPr lang="en-US" sz="1040" dirty="0"/>
           </a:p>
         </p:txBody>
       </p:sp>
@@ -16264,12 +16266,12 @@
         </p:nvSpPr>
         <p:spPr>
           <a:xfrm>
-            <a:off x="7635240" y="4184294"/>
-            <a:ext cx="3474720" cy="1466698"/>
+            <a:off x="7543800" y="4389120"/>
+            <a:ext cx="3611880" cy="1261872"/>
           </a:xfrm>
           <a:prstGeom prst="roundRect">
             <a:avLst>
-              <a:gd name="adj" fmla="val 7481"/>
+              <a:gd name="adj" fmla="val 8696"/>
             </a:avLst>
           </a:prstGeom>
           <a:solidFill>
@@ -16291,8 +16293,8 @@
         </p:nvSpPr>
         <p:spPr>
           <a:xfrm>
-            <a:off x="7799832" y="4330598"/>
-            <a:ext cx="3145536" cy="256032"/>
+            <a:off x="7708392" y="4517136"/>
+            <a:ext cx="3282696" cy="228600"/>
           </a:xfrm>
           <a:prstGeom prst="rect">
             <a:avLst/>
@@ -16308,7 +16310,7 @@
               <a:buNone/>
             </a:pPr>
             <a:r>
-              <a:rPr lang="en-US" sz="1300" b="1" dirty="0">
+              <a:rPr lang="en-US" sz="1220" b="1" dirty="0">
                 <a:solidFill>
                   <a:srgbClr val="0068B7"/>
                 </a:solidFill>
@@ -16318,7 +16320,7 @@
               </a:rPr>
               <a:t>What to document</a:t>
             </a:r>
-            <a:endParaRPr lang="en-US" sz="1300" dirty="0"/>
+            <a:endParaRPr lang="en-US" sz="1220" dirty="0"/>
           </a:p>
         </p:txBody>
       </p:sp>
@@ -16330,8 +16332,8 @@
         </p:nvSpPr>
         <p:spPr>
           <a:xfrm>
-            <a:off x="7799832" y="4659782"/>
-            <a:ext cx="3145536" cy="899770"/>
+            <a:off x="7708392" y="4828032"/>
+            <a:ext cx="3282696" cy="749808"/>
           </a:xfrm>
           <a:prstGeom prst="rect">
             <a:avLst/>
@@ -16349,7 +16351,7 @@
               <a:buNone/>
             </a:pPr>
             <a:r>
-              <a:rPr lang="en-US" sz="1320" dirty="0">
+              <a:rPr lang="en-US" sz="1220" dirty="0">
                 <a:solidFill>
                   <a:srgbClr val="17364A"/>
                 </a:solidFill>
@@ -16357,9 +16359,9 @@
                 <a:ea typeface="Aptos" pitchFamily="34" charset="-122"/>
                 <a:cs typeface="Aptos" pitchFamily="34" charset="-120"/>
               </a:rPr>
-              <a:t>Translate this concept into clear decision rights, review steps, documentation expectations, and escalation paths before an AI-supported workflow is approved.</a:t>
-            </a:r>
-            <a:endParaRPr lang="en-US" sz="1320" dirty="0"/>
+              <a:t>Translate this concept into clear decision rights, review steps, documentation.</a:t>
+            </a:r>
+            <a:endParaRPr lang="en-US" sz="1220" dirty="0"/>
           </a:p>
         </p:txBody>
       </p:sp>
@@ -16650,8 +16652,8 @@
         </p:nvSpPr>
         <p:spPr>
           <a:xfrm>
-            <a:off x="868680" y="1508760"/>
-            <a:ext cx="6309360" cy="4160520"/>
+            <a:off x="822960" y="1463040"/>
+            <a:ext cx="6565392" cy="4343400"/>
           </a:xfrm>
           <a:prstGeom prst="rect">
             <a:avLst/>
@@ -16669,7 +16671,7 @@
               <a:buNone/>
             </a:pPr>
             <a:r>
-              <a:rPr lang="en-US" sz="2100" dirty="0">
+              <a:rPr lang="en-US" sz="1920" dirty="0">
                 <a:solidFill>
                   <a:srgbClr val="003A63"/>
                 </a:solidFill>
@@ -16677,16 +16679,16 @@
                 <a:ea typeface="Aptos" pitchFamily="34" charset="-122"/>
                 <a:cs typeface="Aptos" pitchFamily="34" charset="-120"/>
               </a:rPr>
-              <a:t>• This module provides national-level training guidance for public health agencies and partners.</a:t>
-            </a:r>
-            <a:endParaRPr lang="en-US" sz="2100" dirty="0"/>
-          </a:p>
-          <a:p>
-            <a:pPr indent="0" marL="0">
-              <a:buNone/>
-            </a:pPr>
-            <a:r>
-              <a:rPr lang="en-US" sz="2100" dirty="0">
+              <a:t>• This module provides national-level training guidance for public health.</a:t>
+            </a:r>
+            <a:endParaRPr lang="en-US" sz="1920" dirty="0"/>
+          </a:p>
+          <a:p>
+            <a:pPr indent="0" marL="0">
+              <a:buNone/>
+            </a:pPr>
+            <a:r>
+              <a:rPr lang="en-US" sz="1920" dirty="0">
                 <a:solidFill>
                   <a:srgbClr val="003A63"/>
                 </a:solidFill>
@@ -16694,16 +16696,16 @@
                 <a:ea typeface="Aptos" pitchFamily="34" charset="-122"/>
                 <a:cs typeface="Aptos" pitchFamily="34" charset="-120"/>
               </a:rPr>
-              <a:t>• It is not legal advice and does not replace review by agency legal counsel, privacy officers,.</a:t>
-            </a:r>
-            <a:endParaRPr lang="en-US" sz="2100" dirty="0"/>
-          </a:p>
-          <a:p>
-            <a:pPr indent="0" marL="0">
-              <a:buNone/>
-            </a:pPr>
-            <a:r>
-              <a:rPr lang="en-US" sz="2100" dirty="0">
+              <a:t>• It is not legal advice and does not replace review by agency legal counsel,.</a:t>
+            </a:r>
+            <a:endParaRPr lang="en-US" sz="1920" dirty="0"/>
+          </a:p>
+          <a:p>
+            <a:pPr indent="0" marL="0">
+              <a:buNone/>
+            </a:pPr>
+            <a:r>
+              <a:rPr lang="en-US" sz="1920" dirty="0">
                 <a:solidFill>
                   <a:srgbClr val="003A63"/>
                 </a:solidFill>
@@ -16711,9 +16713,9 @@
                 <a:ea typeface="Aptos" pitchFamily="34" charset="-122"/>
                 <a:cs typeface="Aptos" pitchFamily="34" charset="-120"/>
               </a:rPr>
-              <a:t>• Requirements may vary by state, locality, territory, Tribe, agency, funding source,.</a:t>
-            </a:r>
-            <a:endParaRPr lang="en-US" sz="2100" dirty="0"/>
+              <a:t>• Requirements may vary by state, locality, territory, Tribe, agency, funding.</a:t>
+            </a:r>
+            <a:endParaRPr lang="en-US" sz="1920" dirty="0"/>
           </a:p>
         </p:txBody>
       </p:sp>
@@ -16725,12 +16727,12 @@
         </p:nvSpPr>
         <p:spPr>
           <a:xfrm>
-            <a:off x="7635240" y="1325880"/>
-            <a:ext cx="3474720" cy="1207008"/>
+            <a:off x="7543800" y="1325880"/>
+            <a:ext cx="3611880" cy="1261872"/>
           </a:xfrm>
           <a:prstGeom prst="roundRect">
             <a:avLst>
-              <a:gd name="adj" fmla="val 9091"/>
+              <a:gd name="adj" fmla="val 8696"/>
             </a:avLst>
           </a:prstGeom>
           <a:solidFill>
@@ -16752,8 +16754,8 @@
         </p:nvSpPr>
         <p:spPr>
           <a:xfrm>
-            <a:off x="7799832" y="1472184"/>
-            <a:ext cx="3145536" cy="256032"/>
+            <a:off x="7708392" y="1453896"/>
+            <a:ext cx="3282696" cy="228600"/>
           </a:xfrm>
           <a:prstGeom prst="rect">
             <a:avLst/>
@@ -16769,7 +16771,7 @@
               <a:buNone/>
             </a:pPr>
             <a:r>
-              <a:rPr lang="en-US" sz="1300" b="1" dirty="0">
+              <a:rPr lang="en-US" sz="1220" b="1" dirty="0">
                 <a:solidFill>
                   <a:srgbClr val="0068B7"/>
                 </a:solidFill>
@@ -16779,7 +16781,7 @@
               </a:rPr>
               <a:t>Governance lens</a:t>
             </a:r>
-            <a:endParaRPr lang="en-US" sz="1300" dirty="0"/>
+            <a:endParaRPr lang="en-US" sz="1220" dirty="0"/>
           </a:p>
         </p:txBody>
       </p:sp>
@@ -16791,8 +16793,8 @@
         </p:nvSpPr>
         <p:spPr>
           <a:xfrm>
-            <a:off x="7799832" y="1801368"/>
-            <a:ext cx="3145536" cy="640080"/>
+            <a:off x="7708392" y="1764792"/>
+            <a:ext cx="3282696" cy="749808"/>
           </a:xfrm>
           <a:prstGeom prst="rect">
             <a:avLst/>
@@ -16810,7 +16812,7 @@
               <a:buNone/>
             </a:pPr>
             <a:r>
-              <a:rPr lang="en-US" sz="1320" dirty="0">
+              <a:rPr lang="en-US" sz="1220" dirty="0">
                 <a:solidFill>
                   <a:srgbClr val="17364A"/>
                 </a:solidFill>
@@ -16818,9 +16820,9 @@
                 <a:ea typeface="Aptos" pitchFamily="34" charset="-122"/>
                 <a:cs typeface="Aptos" pitchFamily="34" charset="-120"/>
               </a:rPr>
-              <a:t>This module provides national-level training guidance for public health agencies and.</a:t>
-            </a:r>
-            <a:endParaRPr lang="en-US" sz="1320" dirty="0"/>
+              <a:t>This module provides national-level training guidance for public health agencies.</a:t>
+            </a:r>
+            <a:endParaRPr lang="en-US" sz="1220" dirty="0"/>
           </a:p>
         </p:txBody>
       </p:sp>
@@ -16832,12 +16834,12 @@
         </p:nvSpPr>
         <p:spPr>
           <a:xfrm>
-            <a:off x="7635240" y="2670048"/>
-            <a:ext cx="3474720" cy="1377086"/>
+            <a:off x="7543800" y="2724912"/>
+            <a:ext cx="3611880" cy="1527048"/>
           </a:xfrm>
           <a:prstGeom prst="roundRect">
             <a:avLst>
-              <a:gd name="adj" fmla="val 7968"/>
+              <a:gd name="adj" fmla="val 7186"/>
             </a:avLst>
           </a:prstGeom>
           <a:solidFill>
@@ -16859,24 +16861,26 @@
         </p:nvSpPr>
         <p:spPr>
           <a:xfrm>
-            <a:off x="7799832" y="2798064"/>
-            <a:ext cx="3145536" cy="237744"/>
-          </a:xfrm>
-          <a:prstGeom prst="rect">
-            <a:avLst/>
-          </a:prstGeom>
-          <a:noFill/>
-          <a:ln/>
-        </p:spPr>
-        <p:txBody>
-          <a:bodyPr wrap="square" lIns="0" tIns="0" rIns="0" bIns="0" rtlCol="0" anchor="ctr"/>
-          <a:lstStyle/>
-          <a:p>
-            <a:pPr indent="0" marL="0">
-              <a:buNone/>
-            </a:pPr>
-            <a:r>
-              <a:rPr lang="en-US" sz="1250" b="1" dirty="0">
+            <a:off x="7708392" y="2852928"/>
+            <a:ext cx="3282696" cy="219456"/>
+          </a:xfrm>
+          <a:prstGeom prst="rect">
+            <a:avLst/>
+          </a:prstGeom>
+          <a:noFill/>
+          <a:ln/>
+        </p:spPr>
+        <p:txBody>
+          <a:bodyPr wrap="square" lIns="0" tIns="0" rIns="0" bIns="0" rtlCol="0" anchor="ctr">
+            <a:normAutofit/>
+          </a:bodyPr>
+          <a:lstStyle/>
+          <a:p>
+            <a:pPr indent="0" marL="0">
+              <a:buNone/>
+            </a:pPr>
+            <a:r>
+              <a:rPr lang="en-US" sz="1160" b="1" dirty="0">
                 <a:solidFill>
                   <a:srgbClr val="0068B7"/>
                 </a:solidFill>
@@ -16886,7 +16890,7 @@
               </a:rPr>
               <a:t>Governance pathway</a:t>
             </a:r>
-            <a:endParaRPr lang="en-US" sz="1250" dirty="0"/>
+            <a:endParaRPr lang="en-US" sz="1160" dirty="0"/>
           </a:p>
         </p:txBody>
       </p:sp>
@@ -16898,7 +16902,7 @@
         </p:nvSpPr>
         <p:spPr>
           <a:xfrm>
-            <a:off x="8763000" y="3351276"/>
+            <a:off x="8717280" y="3406140"/>
             <a:ext cx="164592" cy="0"/>
           </a:xfrm>
           <a:prstGeom prst="line">
@@ -16921,8 +16925,8 @@
         </p:nvSpPr>
         <p:spPr>
           <a:xfrm>
-            <a:off x="7872984" y="3200400"/>
-            <a:ext cx="890016" cy="301752"/>
+            <a:off x="7781544" y="3255264"/>
+            <a:ext cx="935736" cy="301752"/>
           </a:xfrm>
           <a:prstGeom prst="roundRect">
             <a:avLst>
@@ -16948,8 +16952,8 @@
         </p:nvSpPr>
         <p:spPr>
           <a:xfrm>
-            <a:off x="7909560" y="3273552"/>
-            <a:ext cx="816864" cy="146304"/>
+            <a:off x="7818120" y="3328416"/>
+            <a:ext cx="862584" cy="146304"/>
           </a:xfrm>
           <a:prstGeom prst="rect">
             <a:avLst/>
@@ -16989,7 +16993,7 @@
         </p:nvSpPr>
         <p:spPr>
           <a:xfrm>
-            <a:off x="9817608" y="3351276"/>
+            <a:off x="9817608" y="3406140"/>
             <a:ext cx="164592" cy="0"/>
           </a:xfrm>
           <a:prstGeom prst="line">
@@ -17012,8 +17016,8 @@
         </p:nvSpPr>
         <p:spPr>
           <a:xfrm>
-            <a:off x="8927592" y="3200400"/>
-            <a:ext cx="890016" cy="301752"/>
+            <a:off x="8881872" y="3255264"/>
+            <a:ext cx="935736" cy="301752"/>
           </a:xfrm>
           <a:prstGeom prst="roundRect">
             <a:avLst>
@@ -17039,8 +17043,8 @@
         </p:nvSpPr>
         <p:spPr>
           <a:xfrm>
-            <a:off x="8964168" y="3273552"/>
-            <a:ext cx="816864" cy="146304"/>
+            <a:off x="8918448" y="3328416"/>
+            <a:ext cx="862584" cy="146304"/>
           </a:xfrm>
           <a:prstGeom prst="rect">
             <a:avLst/>
@@ -17080,8 +17084,8 @@
         </p:nvSpPr>
         <p:spPr>
           <a:xfrm>
-            <a:off x="9982200" y="3200400"/>
-            <a:ext cx="890016" cy="301752"/>
+            <a:off x="9982200" y="3255264"/>
+            <a:ext cx="935736" cy="301752"/>
           </a:xfrm>
           <a:prstGeom prst="roundRect">
             <a:avLst>
@@ -17107,8 +17111,8 @@
         </p:nvSpPr>
         <p:spPr>
           <a:xfrm>
-            <a:off x="10018776" y="3273552"/>
-            <a:ext cx="816864" cy="146304"/>
+            <a:off x="10018776" y="3328416"/>
+            <a:ext cx="862584" cy="146304"/>
           </a:xfrm>
           <a:prstGeom prst="rect">
             <a:avLst/>
@@ -17148,8 +17152,8 @@
         </p:nvSpPr>
         <p:spPr>
           <a:xfrm>
-            <a:off x="7854696" y="3694176"/>
-            <a:ext cx="3035808" cy="206654"/>
+            <a:off x="7763256" y="3749040"/>
+            <a:ext cx="3172968" cy="356616"/>
           </a:xfrm>
           <a:prstGeom prst="rect">
             <a:avLst/>
@@ -17167,7 +17171,7 @@
               <a:buNone/>
             </a:pPr>
             <a:r>
-              <a:rPr lang="en-US" sz="1120" dirty="0">
+              <a:rPr lang="en-US" sz="1040" dirty="0">
                 <a:solidFill>
                   <a:srgbClr val="17364A"/>
                 </a:solidFill>
@@ -17175,9 +17179,9 @@
                 <a:ea typeface="Aptos" pitchFamily="34" charset="-122"/>
                 <a:cs typeface="Aptos" pitchFamily="34" charset="-120"/>
               </a:rPr>
-              <a:t>A proposed AI use should move through documented review before it becomes an operational workflow.</a:t>
-            </a:r>
-            <a:endParaRPr lang="en-US" sz="1120" dirty="0"/>
+              <a:t>A proposed AI use should move through documented review before it.</a:t>
+            </a:r>
+            <a:endParaRPr lang="en-US" sz="1040" dirty="0"/>
           </a:p>
         </p:txBody>
       </p:sp>
@@ -17189,12 +17193,12 @@
         </p:nvSpPr>
         <p:spPr>
           <a:xfrm>
-            <a:off x="7635240" y="4184294"/>
-            <a:ext cx="3474720" cy="1466698"/>
+            <a:off x="7543800" y="4389120"/>
+            <a:ext cx="3611880" cy="1261872"/>
           </a:xfrm>
           <a:prstGeom prst="roundRect">
             <a:avLst>
-              <a:gd name="adj" fmla="val 7481"/>
+              <a:gd name="adj" fmla="val 8696"/>
             </a:avLst>
           </a:prstGeom>
           <a:solidFill>
@@ -17216,8 +17220,8 @@
         </p:nvSpPr>
         <p:spPr>
           <a:xfrm>
-            <a:off x="7799832" y="4330598"/>
-            <a:ext cx="3145536" cy="256032"/>
+            <a:off x="7708392" y="4517136"/>
+            <a:ext cx="3282696" cy="228600"/>
           </a:xfrm>
           <a:prstGeom prst="rect">
             <a:avLst/>
@@ -17233,7 +17237,7 @@
               <a:buNone/>
             </a:pPr>
             <a:r>
-              <a:rPr lang="en-US" sz="1300" b="1" dirty="0">
+              <a:rPr lang="en-US" sz="1220" b="1" dirty="0">
                 <a:solidFill>
                   <a:srgbClr val="0068B7"/>
                 </a:solidFill>
@@ -17243,7 +17247,7 @@
               </a:rPr>
               <a:t>What to document</a:t>
             </a:r>
-            <a:endParaRPr lang="en-US" sz="1300" dirty="0"/>
+            <a:endParaRPr lang="en-US" sz="1220" dirty="0"/>
           </a:p>
         </p:txBody>
       </p:sp>
@@ -17255,8 +17259,8 @@
         </p:nvSpPr>
         <p:spPr>
           <a:xfrm>
-            <a:off x="7799832" y="4659782"/>
-            <a:ext cx="3145536" cy="899770"/>
+            <a:off x="7708392" y="4828032"/>
+            <a:ext cx="3282696" cy="749808"/>
           </a:xfrm>
           <a:prstGeom prst="rect">
             <a:avLst/>
@@ -17274,7 +17278,7 @@
               <a:buNone/>
             </a:pPr>
             <a:r>
-              <a:rPr lang="en-US" sz="1320" dirty="0">
+              <a:rPr lang="en-US" sz="1220" dirty="0">
                 <a:solidFill>
                   <a:srgbClr val="17364A"/>
                 </a:solidFill>
@@ -17282,9 +17286,9 @@
                 <a:ea typeface="Aptos" pitchFamily="34" charset="-122"/>
                 <a:cs typeface="Aptos" pitchFamily="34" charset="-120"/>
               </a:rPr>
-              <a:t>Translate this concept into clear decision rights, review steps, documentation expectations, and escalation paths before an AI-supported workflow is approved.</a:t>
-            </a:r>
-            <a:endParaRPr lang="en-US" sz="1320" dirty="0"/>
+              <a:t>Translate this concept into clear decision rights, review steps, documentation.</a:t>
+            </a:r>
+            <a:endParaRPr lang="en-US" sz="1220" dirty="0"/>
           </a:p>
         </p:txBody>
       </p:sp>
@@ -17575,8 +17579,8 @@
         </p:nvSpPr>
         <p:spPr>
           <a:xfrm>
-            <a:off x="868680" y="1508760"/>
-            <a:ext cx="6309360" cy="4160520"/>
+            <a:off x="822960" y="1463040"/>
+            <a:ext cx="6565392" cy="4343400"/>
           </a:xfrm>
           <a:prstGeom prst="rect">
             <a:avLst/>
@@ -17594,7 +17598,7 @@
               <a:buNone/>
             </a:pPr>
             <a:r>
-              <a:rPr lang="en-US" sz="2100" dirty="0">
+              <a:rPr lang="en-US" sz="1920" dirty="0">
                 <a:solidFill>
                   <a:srgbClr val="003A63"/>
                 </a:solidFill>
@@ -17602,16 +17606,16 @@
                 <a:ea typeface="Aptos" pitchFamily="34" charset="-122"/>
                 <a:cs typeface="Aptos" pitchFamily="34" charset="-120"/>
               </a:rPr>
-              <a:t>• A local health department is considering AI tools for translation, complaint triage, and case.</a:t>
-            </a:r>
-            <a:endParaRPr lang="en-US" sz="2100" dirty="0"/>
-          </a:p>
-          <a:p>
-            <a:pPr indent="0" marL="0">
-              <a:buNone/>
-            </a:pPr>
-            <a:r>
-              <a:rPr lang="en-US" sz="2100" dirty="0">
+              <a:t>• A local health department is considering AI tools for translation, complaint.</a:t>
+            </a:r>
+            <a:endParaRPr lang="en-US" sz="1920" dirty="0"/>
+          </a:p>
+          <a:p>
+            <a:pPr indent="0" marL="0">
+              <a:buNone/>
+            </a:pPr>
+            <a:r>
+              <a:rPr lang="en-US" sz="1920" dirty="0">
                 <a:solidFill>
                   <a:srgbClr val="003A63"/>
                 </a:solidFill>
@@ -17619,16 +17623,16 @@
                 <a:ea typeface="Aptos" pitchFamily="34" charset="-122"/>
                 <a:cs typeface="Aptos" pitchFamily="34" charset="-120"/>
               </a:rPr>
-              <a:t>• A policy scan identifies privacy, public records, procurement, accessibility, cybersecurity,.</a:t>
-            </a:r>
-            <a:endParaRPr lang="en-US" sz="2100" dirty="0"/>
-          </a:p>
-          <a:p>
-            <a:pPr indent="0" marL="0">
-              <a:buNone/>
-            </a:pPr>
-            <a:r>
-              <a:rPr lang="en-US" sz="2100" dirty="0">
+              <a:t>• A policy scan identifies privacy, public records, procurement,.</a:t>
+            </a:r>
+            <a:endParaRPr lang="en-US" sz="1920" dirty="0"/>
+          </a:p>
+          <a:p>
+            <a:pPr indent="0" marL="0">
+              <a:buNone/>
+            </a:pPr>
+            <a:r>
+              <a:rPr lang="en-US" sz="1920" dirty="0">
                 <a:solidFill>
                   <a:srgbClr val="003A63"/>
                 </a:solidFill>
@@ -17636,9 +17640,9 @@
                 <a:ea typeface="Aptos" pitchFamily="34" charset="-122"/>
                 <a:cs typeface="Aptos" pitchFamily="34" charset="-120"/>
               </a:rPr>
-              <a:t>• The agency creates a readiness memo that distinguishes existing requirements from emerging.</a:t>
-            </a:r>
-            <a:endParaRPr lang="en-US" sz="2100" dirty="0"/>
+              <a:t>• The agency creates a readiness memo that distinguishes existing requirements.</a:t>
+            </a:r>
+            <a:endParaRPr lang="en-US" sz="1920" dirty="0"/>
           </a:p>
         </p:txBody>
       </p:sp>
@@ -17650,12 +17654,12 @@
         </p:nvSpPr>
         <p:spPr>
           <a:xfrm>
-            <a:off x="7635240" y="1325880"/>
-            <a:ext cx="3474720" cy="1255471"/>
+            <a:off x="7543800" y="1325880"/>
+            <a:ext cx="3611880" cy="1261872"/>
           </a:xfrm>
           <a:prstGeom prst="roundRect">
             <a:avLst>
-              <a:gd name="adj" fmla="val 8740"/>
+              <a:gd name="adj" fmla="val 8696"/>
             </a:avLst>
           </a:prstGeom>
           <a:solidFill>
@@ -17677,8 +17681,8 @@
         </p:nvSpPr>
         <p:spPr>
           <a:xfrm>
-            <a:off x="7799832" y="1472184"/>
-            <a:ext cx="3145536" cy="256032"/>
+            <a:off x="7708392" y="1453896"/>
+            <a:ext cx="3282696" cy="228600"/>
           </a:xfrm>
           <a:prstGeom prst="rect">
             <a:avLst/>
@@ -17694,7 +17698,7 @@
               <a:buNone/>
             </a:pPr>
             <a:r>
-              <a:rPr lang="en-US" sz="1300" b="1" dirty="0">
+              <a:rPr lang="en-US" sz="1220" b="1" dirty="0">
                 <a:solidFill>
                   <a:srgbClr val="0068B7"/>
                 </a:solidFill>
@@ -17704,7 +17708,7 @@
               </a:rPr>
               <a:t>Governance lens</a:t>
             </a:r>
-            <a:endParaRPr lang="en-US" sz="1300" dirty="0"/>
+            <a:endParaRPr lang="en-US" sz="1220" dirty="0"/>
           </a:p>
         </p:txBody>
       </p:sp>
@@ -17716,8 +17720,8 @@
         </p:nvSpPr>
         <p:spPr>
           <a:xfrm>
-            <a:off x="7799832" y="1801368"/>
-            <a:ext cx="3145536" cy="688543"/>
+            <a:off x="7708392" y="1764792"/>
+            <a:ext cx="3282696" cy="749808"/>
           </a:xfrm>
           <a:prstGeom prst="rect">
             <a:avLst/>
@@ -17735,7 +17739,7 @@
               <a:buNone/>
             </a:pPr>
             <a:r>
-              <a:rPr lang="en-US" sz="1320" dirty="0">
+              <a:rPr lang="en-US" sz="1220" dirty="0">
                 <a:solidFill>
                   <a:srgbClr val="17364A"/>
                 </a:solidFill>
@@ -17743,9 +17747,9 @@
                 <a:ea typeface="Aptos" pitchFamily="34" charset="-122"/>
                 <a:cs typeface="Aptos" pitchFamily="34" charset="-120"/>
               </a:rPr>
-              <a:t>A local health department is considering AI tools for translation, complaint triage, and case note.</a:t>
-            </a:r>
-            <a:endParaRPr lang="en-US" sz="1320" dirty="0"/>
+              <a:t>A local health department is considering AI tools for translation, complaint.</a:t>
+            </a:r>
+            <a:endParaRPr lang="en-US" sz="1220" dirty="0"/>
           </a:p>
         </p:txBody>
       </p:sp>
@@ -17757,12 +17761,12 @@
         </p:nvSpPr>
         <p:spPr>
           <a:xfrm>
-            <a:off x="7635240" y="2718511"/>
-            <a:ext cx="3474720" cy="1328623"/>
+            <a:off x="7543800" y="2724912"/>
+            <a:ext cx="3611880" cy="1527048"/>
           </a:xfrm>
           <a:prstGeom prst="roundRect">
             <a:avLst>
-              <a:gd name="adj" fmla="val 8259"/>
+              <a:gd name="adj" fmla="val 7186"/>
             </a:avLst>
           </a:prstGeom>
           <a:solidFill>
@@ -17784,8 +17788,8 @@
         </p:nvSpPr>
         <p:spPr>
           <a:xfrm>
-            <a:off x="7799832" y="2864815"/>
-            <a:ext cx="3145536" cy="256032"/>
+            <a:off x="7708392" y="2852928"/>
+            <a:ext cx="3282696" cy="228600"/>
           </a:xfrm>
           <a:prstGeom prst="rect">
             <a:avLst/>
@@ -17801,7 +17805,7 @@
               <a:buNone/>
             </a:pPr>
             <a:r>
-              <a:rPr lang="en-US" sz="1300" b="1" dirty="0">
+              <a:rPr lang="en-US" sz="1220" b="1" dirty="0">
                 <a:solidFill>
                   <a:srgbClr val="0068B7"/>
                 </a:solidFill>
@@ -17811,7 +17815,7 @@
               </a:rPr>
               <a:t>Concept checkpoints</a:t>
             </a:r>
-            <a:endParaRPr lang="en-US" sz="1300" dirty="0"/>
+            <a:endParaRPr lang="en-US" sz="1220" dirty="0"/>
           </a:p>
         </p:txBody>
       </p:sp>
@@ -17823,8 +17827,8 @@
         </p:nvSpPr>
         <p:spPr>
           <a:xfrm>
-            <a:off x="7818120" y="3230575"/>
-            <a:ext cx="3090672" cy="670255"/>
+            <a:off x="7726680" y="3182112"/>
+            <a:ext cx="3227832" cy="960120"/>
           </a:xfrm>
           <a:prstGeom prst="rect">
             <a:avLst/>
@@ -17842,7 +17846,7 @@
               <a:buNone/>
             </a:pPr>
             <a:r>
-              <a:rPr lang="en-US" sz="1220" dirty="0">
+              <a:rPr lang="en-US" sz="1140" dirty="0">
                 <a:solidFill>
                   <a:srgbClr val="17364A"/>
                 </a:solidFill>
@@ -17850,16 +17854,16 @@
                 <a:ea typeface="Aptos" pitchFamily="34" charset="-122"/>
                 <a:cs typeface="Aptos" pitchFamily="34" charset="-120"/>
               </a:rPr>
-              <a:t>A local health department is considering AI tools for translation,.</a:t>
-            </a:r>
-            <a:endParaRPr lang="en-US" sz="1220" dirty="0"/>
-          </a:p>
-          <a:p>
-            <a:pPr indent="0" marL="0">
-              <a:buNone/>
-            </a:pPr>
-            <a:r>
-              <a:rPr lang="en-US" sz="1220" dirty="0">
+              <a:t>A local health department is considering AI tools.</a:t>
+            </a:r>
+            <a:endParaRPr lang="en-US" sz="1140" dirty="0"/>
+          </a:p>
+          <a:p>
+            <a:pPr indent="0" marL="0">
+              <a:buNone/>
+            </a:pPr>
+            <a:r>
+              <a:rPr lang="en-US" sz="1140" dirty="0">
                 <a:solidFill>
                   <a:srgbClr val="17364A"/>
                 </a:solidFill>
@@ -17867,16 +17871,16 @@
                 <a:ea typeface="Aptos" pitchFamily="34" charset="-122"/>
                 <a:cs typeface="Aptos" pitchFamily="34" charset="-120"/>
               </a:rPr>
-              <a:t>A policy scan identifies privacy, public records, procurement,.</a:t>
-            </a:r>
-            <a:endParaRPr lang="en-US" sz="1220" dirty="0"/>
-          </a:p>
-          <a:p>
-            <a:pPr indent="0" marL="0">
-              <a:buNone/>
-            </a:pPr>
-            <a:r>
-              <a:rPr lang="en-US" sz="1220" dirty="0">
+              <a:t>A policy scan identifies privacy, public records,.</a:t>
+            </a:r>
+            <a:endParaRPr lang="en-US" sz="1140" dirty="0"/>
+          </a:p>
+          <a:p>
+            <a:pPr indent="0" marL="0">
+              <a:buNone/>
+            </a:pPr>
+            <a:r>
+              <a:rPr lang="en-US" sz="1140" dirty="0">
                 <a:solidFill>
                   <a:srgbClr val="17364A"/>
                 </a:solidFill>
@@ -17884,9 +17888,9 @@
                 <a:ea typeface="Aptos" pitchFamily="34" charset="-122"/>
                 <a:cs typeface="Aptos" pitchFamily="34" charset="-120"/>
               </a:rPr>
-              <a:t>The agency creates a readiness memo that distinguishes existing.</a:t>
-            </a:r>
-            <a:endParaRPr lang="en-US" sz="1220" dirty="0"/>
+              <a:t>The agency creates a readiness memo that.</a:t>
+            </a:r>
+            <a:endParaRPr lang="en-US" sz="1140" dirty="0"/>
           </a:p>
         </p:txBody>
       </p:sp>
@@ -17898,12 +17902,12 @@
         </p:nvSpPr>
         <p:spPr>
           <a:xfrm>
-            <a:off x="7635240" y="4184294"/>
-            <a:ext cx="3474720" cy="1466698"/>
+            <a:off x="7543800" y="4389120"/>
+            <a:ext cx="3611880" cy="1261872"/>
           </a:xfrm>
           <a:prstGeom prst="roundRect">
             <a:avLst>
-              <a:gd name="adj" fmla="val 7481"/>
+              <a:gd name="adj" fmla="val 8696"/>
             </a:avLst>
           </a:prstGeom>
           <a:solidFill>
@@ -17925,8 +17929,8 @@
         </p:nvSpPr>
         <p:spPr>
           <a:xfrm>
-            <a:off x="7799832" y="4330598"/>
-            <a:ext cx="3145536" cy="256032"/>
+            <a:off x="7708392" y="4517136"/>
+            <a:ext cx="3282696" cy="228600"/>
           </a:xfrm>
           <a:prstGeom prst="rect">
             <a:avLst/>
@@ -17942,7 +17946,7 @@
               <a:buNone/>
             </a:pPr>
             <a:r>
-              <a:rPr lang="en-US" sz="1300" b="1" dirty="0">
+              <a:rPr lang="en-US" sz="1220" b="1" dirty="0">
                 <a:solidFill>
                   <a:srgbClr val="0068B7"/>
                 </a:solidFill>
@@ -17952,7 +17956,7 @@
               </a:rPr>
               <a:t>What to document</a:t>
             </a:r>
-            <a:endParaRPr lang="en-US" sz="1300" dirty="0"/>
+            <a:endParaRPr lang="en-US" sz="1220" dirty="0"/>
           </a:p>
         </p:txBody>
       </p:sp>
@@ -17964,8 +17968,8 @@
         </p:nvSpPr>
         <p:spPr>
           <a:xfrm>
-            <a:off x="7799832" y="4659782"/>
-            <a:ext cx="3145536" cy="899770"/>
+            <a:off x="7708392" y="4828032"/>
+            <a:ext cx="3282696" cy="749808"/>
           </a:xfrm>
           <a:prstGeom prst="rect">
             <a:avLst/>
@@ -17983,7 +17987,7 @@
               <a:buNone/>
             </a:pPr>
             <a:r>
-              <a:rPr lang="en-US" sz="1320" dirty="0">
+              <a:rPr lang="en-US" sz="1220" dirty="0">
                 <a:solidFill>
                   <a:srgbClr val="17364A"/>
                 </a:solidFill>
@@ -17991,9 +17995,9 @@
                 <a:ea typeface="Aptos" pitchFamily="34" charset="-122"/>
                 <a:cs typeface="Aptos" pitchFamily="34" charset="-120"/>
               </a:rPr>
-              <a:t>Translate this concept into clear decision rights, review steps, documentation expectations, and escalation paths before an AI-supported workflow is approved.</a:t>
-            </a:r>
-            <a:endParaRPr lang="en-US" sz="1320" dirty="0"/>
+              <a:t>Translate this concept into clear decision rights, review steps, documentation.</a:t>
+            </a:r>
+            <a:endParaRPr lang="en-US" sz="1220" dirty="0"/>
           </a:p>
         </p:txBody>
       </p:sp>
@@ -18284,8 +18288,8 @@
         </p:nvSpPr>
         <p:spPr>
           <a:xfrm>
-            <a:off x="868680" y="1508760"/>
-            <a:ext cx="6309360" cy="4160520"/>
+            <a:off x="822960" y="1463040"/>
+            <a:ext cx="6565392" cy="4343400"/>
           </a:xfrm>
           <a:prstGeom prst="rect">
             <a:avLst/>
@@ -18303,7 +18307,7 @@
               <a:buNone/>
             </a:pPr>
             <a:r>
-              <a:rPr lang="en-US" sz="2100" dirty="0">
+              <a:rPr lang="en-US" sz="1920" dirty="0">
                 <a:solidFill>
                   <a:srgbClr val="003A63"/>
                 </a:solidFill>
@@ -18311,16 +18315,16 @@
                 <a:ea typeface="Aptos" pitchFamily="34" charset="-122"/>
                 <a:cs typeface="Aptos" pitchFamily="34" charset="-120"/>
               </a:rPr>
-              <a:t>• Policy readiness begins by identifying relevant domains rather than looking for a single AI law.</a:t>
-            </a:r>
-            <a:endParaRPr lang="en-US" sz="2100" dirty="0"/>
-          </a:p>
-          <a:p>
-            <a:pPr indent="0" marL="0">
-              <a:buNone/>
-            </a:pPr>
-            <a:r>
-              <a:rPr lang="en-US" sz="2100" dirty="0">
+              <a:t>• Policy readiness begins by identifying relevant domains rather than looking.</a:t>
+            </a:r>
+            <a:endParaRPr lang="en-US" sz="1920" dirty="0"/>
+          </a:p>
+          <a:p>
+            <a:pPr indent="0" marL="0">
+              <a:buNone/>
+            </a:pPr>
+            <a:r>
+              <a:rPr lang="en-US" sz="1920" dirty="0">
                 <a:solidFill>
                   <a:srgbClr val="003A63"/>
                 </a:solidFill>
@@ -18328,16 +18332,16 @@
                 <a:ea typeface="Aptos" pitchFamily="34" charset="-122"/>
                 <a:cs typeface="Aptos" pitchFamily="34" charset="-120"/>
               </a:rPr>
-              <a:t>• Public health AI may be affected by health privacy rules, state confidentiality laws, public.</a:t>
-            </a:r>
-            <a:endParaRPr lang="en-US" sz="2100" dirty="0"/>
-          </a:p>
-          <a:p>
-            <a:pPr indent="0" marL="0">
-              <a:buNone/>
-            </a:pPr>
-            <a:r>
-              <a:rPr lang="en-US" sz="2100" dirty="0">
+              <a:t>• Public health AI may be affected by health privacy rules, state.</a:t>
+            </a:r>
+            <a:endParaRPr lang="en-US" sz="1920" dirty="0"/>
+          </a:p>
+          <a:p>
+            <a:pPr indent="0" marL="0">
+              <a:buNone/>
+            </a:pPr>
+            <a:r>
+              <a:rPr lang="en-US" sz="1920" dirty="0">
                 <a:solidFill>
                   <a:srgbClr val="003A63"/>
                 </a:solidFill>
@@ -18347,7 +18351,7 @@
               </a:rPr>
               <a:t>• AI-specific policy should be layered onto this existing policy environment.</a:t>
             </a:r>
-            <a:endParaRPr lang="en-US" sz="2100" dirty="0"/>
+            <a:endParaRPr lang="en-US" sz="1920" dirty="0"/>
           </a:p>
         </p:txBody>
       </p:sp>
@@ -18359,12 +18363,12 @@
         </p:nvSpPr>
         <p:spPr>
           <a:xfrm>
-            <a:off x="7635240" y="1325880"/>
-            <a:ext cx="3474720" cy="1255471"/>
+            <a:off x="7543800" y="1325880"/>
+            <a:ext cx="3611880" cy="1261872"/>
           </a:xfrm>
           <a:prstGeom prst="roundRect">
             <a:avLst>
-              <a:gd name="adj" fmla="val 8740"/>
+              <a:gd name="adj" fmla="val 8696"/>
             </a:avLst>
           </a:prstGeom>
           <a:solidFill>
@@ -18386,8 +18390,8 @@
         </p:nvSpPr>
         <p:spPr>
           <a:xfrm>
-            <a:off x="7799832" y="1472184"/>
-            <a:ext cx="3145536" cy="256032"/>
+            <a:off x="7708392" y="1453896"/>
+            <a:ext cx="3282696" cy="228600"/>
           </a:xfrm>
           <a:prstGeom prst="rect">
             <a:avLst/>
@@ -18403,7 +18407,7 @@
               <a:buNone/>
             </a:pPr>
             <a:r>
-              <a:rPr lang="en-US" sz="1300" b="1" dirty="0">
+              <a:rPr lang="en-US" sz="1220" b="1" dirty="0">
                 <a:solidFill>
                   <a:srgbClr val="0068B7"/>
                 </a:solidFill>
@@ -18413,7 +18417,7 @@
               </a:rPr>
               <a:t>Governance lens</a:t>
             </a:r>
-            <a:endParaRPr lang="en-US" sz="1300" dirty="0"/>
+            <a:endParaRPr lang="en-US" sz="1220" dirty="0"/>
           </a:p>
         </p:txBody>
       </p:sp>
@@ -18425,8 +18429,8 @@
         </p:nvSpPr>
         <p:spPr>
           <a:xfrm>
-            <a:off x="7799832" y="1801368"/>
-            <a:ext cx="3145536" cy="688543"/>
+            <a:off x="7708392" y="1764792"/>
+            <a:ext cx="3282696" cy="749808"/>
           </a:xfrm>
           <a:prstGeom prst="rect">
             <a:avLst/>
@@ -18444,7 +18448,7 @@
               <a:buNone/>
             </a:pPr>
             <a:r>
-              <a:rPr lang="en-US" sz="1320" dirty="0">
+              <a:rPr lang="en-US" sz="1220" dirty="0">
                 <a:solidFill>
                   <a:srgbClr val="17364A"/>
                 </a:solidFill>
@@ -18452,9 +18456,9 @@
                 <a:ea typeface="Aptos" pitchFamily="34" charset="-122"/>
                 <a:cs typeface="Aptos" pitchFamily="34" charset="-120"/>
               </a:rPr>
-              <a:t>Policy readiness begins by identifying relevant domains rather than looking for a single AI law.</a:t>
-            </a:r>
-            <a:endParaRPr lang="en-US" sz="1320" dirty="0"/>
+              <a:t>Policy readiness begins by identifying relevant domains rather than looking for.</a:t>
+            </a:r>
+            <a:endParaRPr lang="en-US" sz="1220" dirty="0"/>
           </a:p>
         </p:txBody>
       </p:sp>
@@ -18466,12 +18470,12 @@
         </p:nvSpPr>
         <p:spPr>
           <a:xfrm>
-            <a:off x="7635240" y="2718511"/>
-            <a:ext cx="3474720" cy="1328623"/>
+            <a:off x="7543800" y="2724912"/>
+            <a:ext cx="3611880" cy="1527048"/>
           </a:xfrm>
           <a:prstGeom prst="roundRect">
             <a:avLst>
-              <a:gd name="adj" fmla="val 8259"/>
+              <a:gd name="adj" fmla="val 7186"/>
             </a:avLst>
           </a:prstGeom>
           <a:solidFill>
@@ -18493,24 +18497,26 @@
         </p:nvSpPr>
         <p:spPr>
           <a:xfrm>
-            <a:off x="7799832" y="2846527"/>
-            <a:ext cx="3145536" cy="237744"/>
-          </a:xfrm>
-          <a:prstGeom prst="rect">
-            <a:avLst/>
-          </a:prstGeom>
-          <a:noFill/>
-          <a:ln/>
-        </p:spPr>
-        <p:txBody>
-          <a:bodyPr wrap="square" lIns="0" tIns="0" rIns="0" bIns="0" rtlCol="0" anchor="ctr"/>
-          <a:lstStyle/>
-          <a:p>
-            <a:pPr indent="0" marL="0">
-              <a:buNone/>
-            </a:pPr>
-            <a:r>
-              <a:rPr lang="en-US" sz="1250" b="1" dirty="0">
+            <a:off x="7708392" y="2852928"/>
+            <a:ext cx="3282696" cy="219456"/>
+          </a:xfrm>
+          <a:prstGeom prst="rect">
+            <a:avLst/>
+          </a:prstGeom>
+          <a:noFill/>
+          <a:ln/>
+        </p:spPr>
+        <p:txBody>
+          <a:bodyPr wrap="square" lIns="0" tIns="0" rIns="0" bIns="0" rtlCol="0" anchor="ctr">
+            <a:normAutofit/>
+          </a:bodyPr>
+          <a:lstStyle/>
+          <a:p>
+            <a:pPr indent="0" marL="0">
+              <a:buNone/>
+            </a:pPr>
+            <a:r>
+              <a:rPr lang="en-US" sz="1160" b="1" dirty="0">
                 <a:solidFill>
                   <a:srgbClr val="0068B7"/>
                 </a:solidFill>
@@ -18520,7 +18526,7 @@
               </a:rPr>
               <a:t>Governance pathway</a:t>
             </a:r>
-            <a:endParaRPr lang="en-US" sz="1250" dirty="0"/>
+            <a:endParaRPr lang="en-US" sz="1160" dirty="0"/>
           </a:p>
         </p:txBody>
       </p:sp>
@@ -18532,7 +18538,7 @@
         </p:nvSpPr>
         <p:spPr>
           <a:xfrm>
-            <a:off x="8763000" y="3399739"/>
+            <a:off x="8717280" y="3406140"/>
             <a:ext cx="164592" cy="0"/>
           </a:xfrm>
           <a:prstGeom prst="line">
@@ -18555,8 +18561,8 @@
         </p:nvSpPr>
         <p:spPr>
           <a:xfrm>
-            <a:off x="7872984" y="3248863"/>
-            <a:ext cx="890016" cy="301752"/>
+            <a:off x="7781544" y="3255264"/>
+            <a:ext cx="935736" cy="301752"/>
           </a:xfrm>
           <a:prstGeom prst="roundRect">
             <a:avLst>
@@ -18582,8 +18588,8 @@
         </p:nvSpPr>
         <p:spPr>
           <a:xfrm>
-            <a:off x="7909560" y="3322015"/>
-            <a:ext cx="816864" cy="146304"/>
+            <a:off x="7818120" y="3328416"/>
+            <a:ext cx="862584" cy="146304"/>
           </a:xfrm>
           <a:prstGeom prst="rect">
             <a:avLst/>
@@ -18623,7 +18629,7 @@
         </p:nvSpPr>
         <p:spPr>
           <a:xfrm>
-            <a:off x="9817608" y="3399739"/>
+            <a:off x="9817608" y="3406140"/>
             <a:ext cx="164592" cy="0"/>
           </a:xfrm>
           <a:prstGeom prst="line">
@@ -18646,8 +18652,8 @@
         </p:nvSpPr>
         <p:spPr>
           <a:xfrm>
-            <a:off x="8927592" y="3248863"/>
-            <a:ext cx="890016" cy="301752"/>
+            <a:off x="8881872" y="3255264"/>
+            <a:ext cx="935736" cy="301752"/>
           </a:xfrm>
           <a:prstGeom prst="roundRect">
             <a:avLst>
@@ -18673,8 +18679,8 @@
         </p:nvSpPr>
         <p:spPr>
           <a:xfrm>
-            <a:off x="8964168" y="3322015"/>
-            <a:ext cx="816864" cy="146304"/>
+            <a:off x="8918448" y="3328416"/>
+            <a:ext cx="862584" cy="146304"/>
           </a:xfrm>
           <a:prstGeom prst="rect">
             <a:avLst/>
@@ -18714,8 +18720,8 @@
         </p:nvSpPr>
         <p:spPr>
           <a:xfrm>
-            <a:off x="9982200" y="3248863"/>
-            <a:ext cx="890016" cy="301752"/>
+            <a:off x="9982200" y="3255264"/>
+            <a:ext cx="935736" cy="301752"/>
           </a:xfrm>
           <a:prstGeom prst="roundRect">
             <a:avLst>
@@ -18741,8 +18747,8 @@
         </p:nvSpPr>
         <p:spPr>
           <a:xfrm>
-            <a:off x="10018776" y="3322015"/>
-            <a:ext cx="816864" cy="146304"/>
+            <a:off x="10018776" y="3328416"/>
+            <a:ext cx="862584" cy="146304"/>
           </a:xfrm>
           <a:prstGeom prst="rect">
             <a:avLst/>
@@ -18782,8 +18788,8 @@
         </p:nvSpPr>
         <p:spPr>
           <a:xfrm>
-            <a:off x="7854696" y="3742639"/>
-            <a:ext cx="3035808" cy="158191"/>
+            <a:off x="7763256" y="3749040"/>
+            <a:ext cx="3172968" cy="356616"/>
           </a:xfrm>
           <a:prstGeom prst="rect">
             <a:avLst/>
@@ -18801,7 +18807,7 @@
               <a:buNone/>
             </a:pPr>
             <a:r>
-              <a:rPr lang="en-US" sz="1120" dirty="0">
+              <a:rPr lang="en-US" sz="1040" dirty="0">
                 <a:solidFill>
                   <a:srgbClr val="17364A"/>
                 </a:solidFill>
@@ -18809,9 +18815,9 @@
                 <a:ea typeface="Aptos" pitchFamily="34" charset="-122"/>
                 <a:cs typeface="Aptos" pitchFamily="34" charset="-120"/>
               </a:rPr>
-              <a:t>A proposed AI use should move through documented review before it becomes an operational workflow.</a:t>
-            </a:r>
-            <a:endParaRPr lang="en-US" sz="1120" dirty="0"/>
+              <a:t>A proposed AI use should move through documented review before it.</a:t>
+            </a:r>
+            <a:endParaRPr lang="en-US" sz="1040" dirty="0"/>
           </a:p>
         </p:txBody>
       </p:sp>
@@ -18823,12 +18829,12 @@
         </p:nvSpPr>
         <p:spPr>
           <a:xfrm>
-            <a:off x="7635240" y="4184294"/>
-            <a:ext cx="3474720" cy="1466698"/>
+            <a:off x="7543800" y="4389120"/>
+            <a:ext cx="3611880" cy="1261872"/>
           </a:xfrm>
           <a:prstGeom prst="roundRect">
             <a:avLst>
-              <a:gd name="adj" fmla="val 7481"/>
+              <a:gd name="adj" fmla="val 8696"/>
             </a:avLst>
           </a:prstGeom>
           <a:solidFill>
@@ -18850,8 +18856,8 @@
         </p:nvSpPr>
         <p:spPr>
           <a:xfrm>
-            <a:off x="7799832" y="4330598"/>
-            <a:ext cx="3145536" cy="256032"/>
+            <a:off x="7708392" y="4517136"/>
+            <a:ext cx="3282696" cy="228600"/>
           </a:xfrm>
           <a:prstGeom prst="rect">
             <a:avLst/>
@@ -18867,7 +18873,7 @@
               <a:buNone/>
             </a:pPr>
             <a:r>
-              <a:rPr lang="en-US" sz="1300" b="1" dirty="0">
+              <a:rPr lang="en-US" sz="1220" b="1" dirty="0">
                 <a:solidFill>
                   <a:srgbClr val="0068B7"/>
                 </a:solidFill>
@@ -18877,7 +18883,7 @@
               </a:rPr>
               <a:t>What to document</a:t>
             </a:r>
-            <a:endParaRPr lang="en-US" sz="1300" dirty="0"/>
+            <a:endParaRPr lang="en-US" sz="1220" dirty="0"/>
           </a:p>
         </p:txBody>
       </p:sp>
@@ -18889,8 +18895,8 @@
         </p:nvSpPr>
         <p:spPr>
           <a:xfrm>
-            <a:off x="7799832" y="4659782"/>
-            <a:ext cx="3145536" cy="899770"/>
+            <a:off x="7708392" y="4828032"/>
+            <a:ext cx="3282696" cy="749808"/>
           </a:xfrm>
           <a:prstGeom prst="rect">
             <a:avLst/>
@@ -18908,7 +18914,7 @@
               <a:buNone/>
             </a:pPr>
             <a:r>
-              <a:rPr lang="en-US" sz="1320" dirty="0">
+              <a:rPr lang="en-US" sz="1220" dirty="0">
                 <a:solidFill>
                   <a:srgbClr val="17364A"/>
                 </a:solidFill>
@@ -18916,9 +18922,9 @@
                 <a:ea typeface="Aptos" pitchFamily="34" charset="-122"/>
                 <a:cs typeface="Aptos" pitchFamily="34" charset="-120"/>
               </a:rPr>
-              <a:t>Translate this concept into clear decision rights, review steps, documentation expectations, and escalation paths before an AI-supported workflow is approved.</a:t>
-            </a:r>
-            <a:endParaRPr lang="en-US" sz="1320" dirty="0"/>
+              <a:t>Translate this concept into clear decision rights, review steps, documentation.</a:t>
+            </a:r>
+            <a:endParaRPr lang="en-US" sz="1220" dirty="0"/>
           </a:p>
         </p:txBody>
       </p:sp>

--- a/downloads/presentations/modules/pol-300.pptx
+++ b/downloads/presentations/modules/pol-300.pptx
@@ -11746,7 +11746,7 @@
                 <a:ea typeface="Aptos" pitchFamily="34" charset="-122"/>
                 <a:cs typeface="Aptos" pitchFamily="34" charset="-120"/>
               </a:rPr>
-              <a:t>• 1. What does regulatory readiness mean in this module?</a:t>
+              <a:t>1. What does regulatory readiness mean in this module?</a:t>
             </a:r>
             <a:endParaRPr lang="en-US" sz="1920" dirty="0"/>
           </a:p>
@@ -11763,7 +11763,7 @@
                 <a:ea typeface="Aptos" pitchFamily="34" charset="-122"/>
                 <a:cs typeface="Aptos" pitchFamily="34" charset="-120"/>
               </a:rPr>
-              <a:t>• 2. Which statement is most accurate?</a:t>
+              <a:t>2. Which statement is most accurate?</a:t>
             </a:r>
             <a:endParaRPr lang="en-US" sz="1920" dirty="0"/>
           </a:p>
@@ -11780,7 +11780,7 @@
                 <a:ea typeface="Aptos" pitchFamily="34" charset="-122"/>
                 <a:cs typeface="Aptos" pitchFamily="34" charset="-120"/>
               </a:rPr>
-              <a:t>• 3. What is a policy scan?</a:t>
+              <a:t>3. What is a policy scan?</a:t>
             </a:r>
             <a:endParaRPr lang="en-US" sz="1920" dirty="0"/>
           </a:p>
@@ -11887,7 +11887,7 @@
                 <a:ea typeface="Aptos" pitchFamily="34" charset="-122"/>
                 <a:cs typeface="Aptos" pitchFamily="34" charset="-120"/>
               </a:rPr>
-              <a:t>1. What does regulatory readiness mean in this module?</a:t>
+              <a:t>What does regulatory readiness mean in this module?</a:t>
             </a:r>
             <a:endParaRPr lang="en-US" sz="1220" dirty="0"/>
           </a:p>
@@ -11994,41 +11994,7 @@
                 <a:ea typeface="Aptos" pitchFamily="34" charset="-122"/>
                 <a:cs typeface="Aptos" pitchFamily="34" charset="-120"/>
               </a:rPr>
-              <a:t>1.</a:t>
-            </a:r>
-            <a:endParaRPr lang="en-US" sz="1140" dirty="0"/>
-          </a:p>
-          <a:p>
-            <a:pPr indent="0" marL="0">
-              <a:buNone/>
-            </a:pPr>
-            <a:r>
-              <a:rPr lang="en-US" sz="1140" dirty="0">
-                <a:solidFill>
-                  <a:srgbClr val="17364A"/>
-                </a:solidFill>
-                <a:latin typeface="Aptos" pitchFamily="34" charset="0"/>
-                <a:ea typeface="Aptos" pitchFamily="34" charset="-122"/>
-                <a:cs typeface="Aptos" pitchFamily="34" charset="-120"/>
-              </a:rPr>
               <a:t>What does regulatory readiness mean in this module?</a:t>
-            </a:r>
-            <a:endParaRPr lang="en-US" sz="1140" dirty="0"/>
-          </a:p>
-          <a:p>
-            <a:pPr indent="0" marL="0">
-              <a:buNone/>
-            </a:pPr>
-            <a:r>
-              <a:rPr lang="en-US" sz="1140" dirty="0">
-                <a:solidFill>
-                  <a:srgbClr val="17364A"/>
-                </a:solidFill>
-                <a:latin typeface="Aptos" pitchFamily="34" charset="0"/>
-                <a:ea typeface="Aptos" pitchFamily="34" charset="-122"/>
-                <a:cs typeface="Aptos" pitchFamily="34" charset="-120"/>
-              </a:rPr>
-              <a:t>2.</a:t>
             </a:r>
             <a:endParaRPr lang="en-US" sz="1140" dirty="0"/>
           </a:p>
